--- a/outputs/Red_Sox_Outfield_Strategy.pptx
+++ b/outputs/Red_Sox_Outfield_Strategy.pptx
@@ -15,6 +15,7 @@
     <p:sldId id="263" r:id="rId14"/>
     <p:sldId id="264" r:id="rId15"/>
     <p:sldId id="265" r:id="rId16"/>
+    <p:sldId id="266" r:id="rId17"/>
   </p:sldIdLst>
   <p:sldSz cx="12191695" cy="6858000" type="screen4x3"/>
   <p:notesSz cx="6858000" cy="9144000"/>
@@ -3350,6 +3351,780 @@
     <p:bg>
       <p:bgPr>
         <a:solidFill>
+          <a:srgbClr val="F4F5F7"/>
+        </a:solidFill>
+        <a:effectLst/>
+      </p:bgPr>
+    </p:bg>
+    <p:spTree>
+      <p:nvGrpSpPr>
+        <p:cNvPr id="1" name=""/>
+        <p:cNvGrpSpPr/>
+        <p:nvPr/>
+      </p:nvGrpSpPr>
+      <p:grpSpPr/>
+      <p:sp>
+        <p:nvSpPr>
+          <p:cNvPr id="2" name="TextBox 1"/>
+          <p:cNvSpPr txBox="1"/>
+          <p:nvPr/>
+        </p:nvSpPr>
+        <p:spPr>
+          <a:xfrm>
+            <a:off x="566928" y="384048"/>
+            <a:ext cx="10058400" cy="274320"/>
+          </a:xfrm>
+          <a:prstGeom prst="rect">
+            <a:avLst/>
+          </a:prstGeom>
+          <a:noFill/>
+        </p:spPr>
+        <p:txBody>
+          <a:bodyPr wrap="square" anchor="t" lIns="0" rIns="0" tIns="0" bIns="0">
+            <a:spAutoFit/>
+          </a:bodyPr>
+          <a:lstStyle/>
+          <a:p>
+            <a:pPr algn="l">
+              <a:lnSpc>
+                <a:spcPct val="100000"/>
+              </a:lnSpc>
+              <a:spcAft>
+                <a:spcPts val="0"/>
+              </a:spcAft>
+            </a:pPr>
+            <a:r>
+              <a:rPr sz="1250" b="1" i="0">
+                <a:solidFill>
+                  <a:srgbClr val="BD3039"/>
+                </a:solidFill>
+                <a:latin typeface="Calibri"/>
+              </a:rPr>
+              <a:t>THE SEQUENCE</a:t>
+            </a:r>
+          </a:p>
+        </p:txBody>
+      </p:sp>
+      <p:sp>
+        <p:nvSpPr>
+          <p:cNvPr id="3" name="TextBox 2"/>
+          <p:cNvSpPr txBox="1"/>
+          <p:nvPr/>
+        </p:nvSpPr>
+        <p:spPr>
+          <a:xfrm>
+            <a:off x="566928" y="658368"/>
+            <a:ext cx="11064240" cy="868680"/>
+          </a:xfrm>
+          <a:prstGeom prst="rect">
+            <a:avLst/>
+          </a:prstGeom>
+          <a:noFill/>
+        </p:spPr>
+        <p:txBody>
+          <a:bodyPr wrap="square" anchor="t" lIns="0" rIns="0" tIns="0" bIns="0">
+            <a:spAutoFit/>
+          </a:bodyPr>
+          <a:lstStyle/>
+          <a:p>
+            <a:pPr algn="l">
+              <a:lnSpc>
+                <a:spcPct val="100000"/>
+              </a:lnSpc>
+              <a:spcAft>
+                <a:spcPts val="0"/>
+              </a:spcAft>
+            </a:pPr>
+            <a:r>
+              <a:rPr sz="3000" b="1" i="0">
+                <a:solidFill>
+                  <a:srgbClr val="0C2340"/>
+                </a:solidFill>
+                <a:latin typeface="Cambria"/>
+              </a:rPr>
+              <a:t>Solve it this winter, from a position of strength</a:t>
+            </a:r>
+          </a:p>
+        </p:txBody>
+      </p:sp>
+      <p:sp>
+        <p:nvSpPr>
+          <p:cNvPr id="4" name="Oval 3"/>
+          <p:cNvSpPr/>
+          <p:nvPr/>
+        </p:nvSpPr>
+        <p:spPr>
+          <a:xfrm>
+            <a:off x="640080" y="1801368"/>
+            <a:ext cx="457200" cy="457200"/>
+          </a:xfrm>
+          <a:prstGeom prst="ellipse">
+            <a:avLst/>
+          </a:prstGeom>
+          <a:solidFill>
+            <a:srgbClr val="BD3039"/>
+          </a:solidFill>
+          <a:ln>
+            <a:noFill/>
+          </a:ln>
+          <a:effectLst/>
+        </p:spPr>
+        <p:style>
+          <a:lnRef idx="1">
+            <a:schemeClr val="accent1"/>
+          </a:lnRef>
+          <a:fillRef idx="3">
+            <a:schemeClr val="accent1"/>
+          </a:fillRef>
+          <a:effectRef idx="2">
+            <a:schemeClr val="accent1"/>
+          </a:effectRef>
+          <a:fontRef idx="minor">
+            <a:schemeClr val="lt1"/>
+          </a:fontRef>
+        </p:style>
+        <p:txBody>
+          <a:bodyPr rtlCol="0" anchor="ctr" wrap="none"/>
+          <a:lstStyle/>
+          <a:p>
+            <a:pPr algn="ctr"/>
+            <a:r>
+              <a:rPr sz="1800" b="1">
+                <a:solidFill>
+                  <a:srgbClr val="FFFFFF"/>
+                </a:solidFill>
+                <a:latin typeface="Cambria"/>
+              </a:rPr>
+              <a:t>1</a:t>
+            </a:r>
+          </a:p>
+        </p:txBody>
+      </p:sp>
+      <p:sp>
+        <p:nvSpPr>
+          <p:cNvPr id="5" name="TextBox 4"/>
+          <p:cNvSpPr txBox="1"/>
+          <p:nvPr/>
+        </p:nvSpPr>
+        <p:spPr>
+          <a:xfrm>
+            <a:off x="1280160" y="1783080"/>
+            <a:ext cx="6126480" cy="1005840"/>
+          </a:xfrm>
+          <a:prstGeom prst="rect">
+            <a:avLst/>
+          </a:prstGeom>
+          <a:noFill/>
+        </p:spPr>
+        <p:txBody>
+          <a:bodyPr wrap="square" anchor="t" lIns="0" rIns="0" tIns="0" bIns="0">
+            <a:spAutoFit/>
+          </a:bodyPr>
+          <a:lstStyle/>
+          <a:p>
+            <a:pPr algn="l">
+              <a:lnSpc>
+                <a:spcPct val="108000"/>
+              </a:lnSpc>
+              <a:spcAft>
+                <a:spcPts val="200"/>
+              </a:spcAft>
+            </a:pPr>
+            <a:r>
+              <a:rPr sz="1700" b="1" i="0">
+                <a:solidFill>
+                  <a:srgbClr val="0C2340"/>
+                </a:solidFill>
+                <a:latin typeface="Cambria"/>
+              </a:rPr>
+              <a:t>Hold through 2026</a:t>
+            </a:r>
+          </a:p>
+          <a:p>
+            <a:pPr algn="l">
+              <a:lnSpc>
+                <a:spcPct val="108000"/>
+              </a:lnSpc>
+              <a:spcAft>
+                <a:spcPts val="200"/>
+              </a:spcAft>
+            </a:pPr>
+            <a:r>
+              <a:rPr sz="1350" b="0" i="0">
+                <a:solidFill>
+                  <a:srgbClr val="6B7280"/>
+                </a:solidFill>
+                <a:latin typeface="Calibri"/>
+              </a:rPr>
+              <a:t>No contention urgency and Anthony hurt — keep Duran's bat, let his value rebound off an unlucky first half.</a:t>
+            </a:r>
+          </a:p>
+        </p:txBody>
+      </p:sp>
+      <p:sp>
+        <p:nvSpPr>
+          <p:cNvPr id="6" name="Oval 5"/>
+          <p:cNvSpPr/>
+          <p:nvPr/>
+        </p:nvSpPr>
+        <p:spPr>
+          <a:xfrm>
+            <a:off x="640080" y="2971800"/>
+            <a:ext cx="457200" cy="457200"/>
+          </a:xfrm>
+          <a:prstGeom prst="ellipse">
+            <a:avLst/>
+          </a:prstGeom>
+          <a:solidFill>
+            <a:srgbClr val="BD3039"/>
+          </a:solidFill>
+          <a:ln>
+            <a:noFill/>
+          </a:ln>
+          <a:effectLst/>
+        </p:spPr>
+        <p:style>
+          <a:lnRef idx="1">
+            <a:schemeClr val="accent1"/>
+          </a:lnRef>
+          <a:fillRef idx="3">
+            <a:schemeClr val="accent1"/>
+          </a:fillRef>
+          <a:effectRef idx="2">
+            <a:schemeClr val="accent1"/>
+          </a:effectRef>
+          <a:fontRef idx="minor">
+            <a:schemeClr val="lt1"/>
+          </a:fontRef>
+        </p:style>
+        <p:txBody>
+          <a:bodyPr rtlCol="0" anchor="ctr" wrap="none"/>
+          <a:lstStyle/>
+          <a:p>
+            <a:pPr algn="ctr"/>
+            <a:r>
+              <a:rPr sz="1800" b="1">
+                <a:solidFill>
+                  <a:srgbClr val="FFFFFF"/>
+                </a:solidFill>
+                <a:latin typeface="Cambria"/>
+              </a:rPr>
+              <a:t>2</a:t>
+            </a:r>
+          </a:p>
+        </p:txBody>
+      </p:sp>
+      <p:sp>
+        <p:nvSpPr>
+          <p:cNvPr id="7" name="TextBox 6"/>
+          <p:cNvSpPr txBox="1"/>
+          <p:nvPr/>
+        </p:nvSpPr>
+        <p:spPr>
+          <a:xfrm>
+            <a:off x="1280160" y="2953512"/>
+            <a:ext cx="6126480" cy="1005840"/>
+          </a:xfrm>
+          <a:prstGeom prst="rect">
+            <a:avLst/>
+          </a:prstGeom>
+          <a:noFill/>
+        </p:spPr>
+        <p:txBody>
+          <a:bodyPr wrap="square" anchor="t" lIns="0" rIns="0" tIns="0" bIns="0">
+            <a:spAutoFit/>
+          </a:bodyPr>
+          <a:lstStyle/>
+          <a:p>
+            <a:pPr algn="l">
+              <a:lnSpc>
+                <a:spcPct val="108000"/>
+              </a:lnSpc>
+              <a:spcAft>
+                <a:spcPts val="200"/>
+              </a:spcAft>
+            </a:pPr>
+            <a:r>
+              <a:rPr sz="1700" b="1" i="0">
+                <a:solidFill>
+                  <a:srgbClr val="0C2340"/>
+                </a:solidFill>
+                <a:latin typeface="Cambria"/>
+              </a:rPr>
+              <a:t>Deal Duran in the offseason</a:t>
+            </a:r>
+          </a:p>
+          <a:p>
+            <a:pPr algn="l">
+              <a:lnSpc>
+                <a:spcPct val="108000"/>
+              </a:lnSpc>
+              <a:spcAft>
+                <a:spcPts val="200"/>
+              </a:spcAft>
+            </a:pPr>
+            <a:r>
+              <a:rPr sz="1350" b="0" i="0">
+                <a:solidFill>
+                  <a:srgbClr val="6B7280"/>
+                </a:solidFill>
+                <a:latin typeface="Calibri"/>
+              </a:rPr>
+              <a:t>Anthony's healthy (jam returns), value restored. Trade him — plus Yoshida money — for controllable bats, not arms.</a:t>
+            </a:r>
+          </a:p>
+        </p:txBody>
+      </p:sp>
+      <p:sp>
+        <p:nvSpPr>
+          <p:cNvPr id="8" name="Oval 7"/>
+          <p:cNvSpPr/>
+          <p:nvPr/>
+        </p:nvSpPr>
+        <p:spPr>
+          <a:xfrm>
+            <a:off x="640080" y="4142231"/>
+            <a:ext cx="457200" cy="457200"/>
+          </a:xfrm>
+          <a:prstGeom prst="ellipse">
+            <a:avLst/>
+          </a:prstGeom>
+          <a:solidFill>
+            <a:srgbClr val="BD3039"/>
+          </a:solidFill>
+          <a:ln>
+            <a:noFill/>
+          </a:ln>
+          <a:effectLst/>
+        </p:spPr>
+        <p:style>
+          <a:lnRef idx="1">
+            <a:schemeClr val="accent1"/>
+          </a:lnRef>
+          <a:fillRef idx="3">
+            <a:schemeClr val="accent1"/>
+          </a:fillRef>
+          <a:effectRef idx="2">
+            <a:schemeClr val="accent1"/>
+          </a:effectRef>
+          <a:fontRef idx="minor">
+            <a:schemeClr val="lt1"/>
+          </a:fontRef>
+        </p:style>
+        <p:txBody>
+          <a:bodyPr rtlCol="0" anchor="ctr" wrap="none"/>
+          <a:lstStyle/>
+          <a:p>
+            <a:pPr algn="ctr"/>
+            <a:r>
+              <a:rPr sz="1800" b="1">
+                <a:solidFill>
+                  <a:srgbClr val="FFFFFF"/>
+                </a:solidFill>
+                <a:latin typeface="Cambria"/>
+              </a:rPr>
+              <a:t>3</a:t>
+            </a:r>
+          </a:p>
+        </p:txBody>
+      </p:sp>
+      <p:sp>
+        <p:nvSpPr>
+          <p:cNvPr id="9" name="TextBox 8"/>
+          <p:cNvSpPr txBox="1"/>
+          <p:nvPr/>
+        </p:nvSpPr>
+        <p:spPr>
+          <a:xfrm>
+            <a:off x="1280160" y="4123944"/>
+            <a:ext cx="6126480" cy="1005840"/>
+          </a:xfrm>
+          <a:prstGeom prst="rect">
+            <a:avLst/>
+          </a:prstGeom>
+          <a:noFill/>
+        </p:spPr>
+        <p:txBody>
+          <a:bodyPr wrap="square" anchor="t" lIns="0" rIns="0" tIns="0" bIns="0">
+            <a:spAutoFit/>
+          </a:bodyPr>
+          <a:lstStyle/>
+          <a:p>
+            <a:pPr algn="l">
+              <a:lnSpc>
+                <a:spcPct val="108000"/>
+              </a:lnSpc>
+              <a:spcAft>
+                <a:spcPts val="200"/>
+              </a:spcAft>
+            </a:pPr>
+            <a:r>
+              <a:rPr sz="1700" b="1" i="0">
+                <a:solidFill>
+                  <a:srgbClr val="0C2340"/>
+                </a:solidFill>
+                <a:latin typeface="Cambria"/>
+              </a:rPr>
+              <a:t>Run it back in 2027</a:t>
+            </a:r>
+          </a:p>
+          <a:p>
+            <a:pPr algn="l">
+              <a:lnSpc>
+                <a:spcPct val="108000"/>
+              </a:lnSpc>
+              <a:spcAft>
+                <a:spcPts val="200"/>
+              </a:spcAft>
+            </a:pPr>
+            <a:r>
+              <a:rPr sz="1350" b="0" i="0">
+                <a:solidFill>
+                  <a:srgbClr val="6B7280"/>
+                </a:solidFill>
+                <a:latin typeface="Calibri"/>
+              </a:rPr>
+              <a:t>OF = Anthony / Rafaela / Abreu; strong rotation intact; DH opens after 2027. A cheaper, younger, more balanced roster.</a:t>
+            </a:r>
+          </a:p>
+        </p:txBody>
+      </p:sp>
+      <p:sp>
+        <p:nvSpPr>
+          <p:cNvPr id="10" name="Rounded Rectangle 9"/>
+          <p:cNvSpPr/>
+          <p:nvPr/>
+        </p:nvSpPr>
+        <p:spPr>
+          <a:xfrm>
+            <a:off x="7818120" y="1783080"/>
+            <a:ext cx="3794760" cy="3337560"/>
+          </a:xfrm>
+          <a:prstGeom prst="roundRect">
+            <a:avLst>
+              <a:gd name="adj" fmla="val 8000"/>
+            </a:avLst>
+          </a:prstGeom>
+          <a:solidFill>
+            <a:srgbClr val="0C2340"/>
+          </a:solidFill>
+          <a:ln>
+            <a:noFill/>
+          </a:ln>
+          <a:effectLst/>
+        </p:spPr>
+        <p:style>
+          <a:lnRef idx="1">
+            <a:schemeClr val="accent1"/>
+          </a:lnRef>
+          <a:fillRef idx="3">
+            <a:schemeClr val="accent1"/>
+          </a:fillRef>
+          <a:effectRef idx="2">
+            <a:schemeClr val="accent1"/>
+          </a:effectRef>
+          <a:fontRef idx="minor">
+            <a:schemeClr val="lt1"/>
+          </a:fontRef>
+        </p:style>
+        <p:txBody>
+          <a:bodyPr rtlCol="0" anchor="ctr"/>
+          <a:lstStyle/>
+          <a:p>
+            <a:pPr algn="ctr"/>
+          </a:p>
+        </p:txBody>
+      </p:sp>
+      <p:sp>
+        <p:nvSpPr>
+          <p:cNvPr id="11" name="TextBox 10"/>
+          <p:cNvSpPr txBox="1"/>
+          <p:nvPr/>
+        </p:nvSpPr>
+        <p:spPr>
+          <a:xfrm>
+            <a:off x="8092440" y="2011680"/>
+            <a:ext cx="3291840" cy="365760"/>
+          </a:xfrm>
+          <a:prstGeom prst="rect">
+            <a:avLst/>
+          </a:prstGeom>
+          <a:noFill/>
+        </p:spPr>
+        <p:txBody>
+          <a:bodyPr wrap="square" anchor="t" lIns="0" rIns="0" tIns="0" bIns="0">
+            <a:spAutoFit/>
+          </a:bodyPr>
+          <a:lstStyle/>
+          <a:p>
+            <a:pPr algn="l">
+              <a:lnSpc>
+                <a:spcPct val="100000"/>
+              </a:lnSpc>
+              <a:spcAft>
+                <a:spcPts val="0"/>
+              </a:spcAft>
+            </a:pPr>
+            <a:r>
+              <a:rPr sz="1250" b="1" i="0">
+                <a:solidFill>
+                  <a:srgbClr val="C9D2E3"/>
+                </a:solidFill>
+                <a:latin typeface="Calibri"/>
+              </a:rPr>
+              <a:t>THE RETURN</a:t>
+            </a:r>
+          </a:p>
+        </p:txBody>
+      </p:sp>
+      <p:sp>
+        <p:nvSpPr>
+          <p:cNvPr id="12" name="TextBox 11"/>
+          <p:cNvSpPr txBox="1"/>
+          <p:nvPr/>
+        </p:nvSpPr>
+        <p:spPr>
+          <a:xfrm>
+            <a:off x="8092440" y="2487168"/>
+            <a:ext cx="3291840" cy="914400"/>
+          </a:xfrm>
+          <a:prstGeom prst="rect">
+            <a:avLst/>
+          </a:prstGeom>
+          <a:noFill/>
+        </p:spPr>
+        <p:txBody>
+          <a:bodyPr wrap="square" anchor="t" lIns="0" rIns="0" tIns="0" bIns="0">
+            <a:spAutoFit/>
+          </a:bodyPr>
+          <a:lstStyle/>
+          <a:p>
+            <a:pPr algn="l">
+              <a:lnSpc>
+                <a:spcPct val="105000"/>
+              </a:lnSpc>
+              <a:spcAft>
+                <a:spcPts val="200"/>
+              </a:spcAft>
+            </a:pPr>
+            <a:r>
+              <a:rPr sz="1300" b="1" i="0">
+                <a:solidFill>
+                  <a:srgbClr val="F0B8BC"/>
+                </a:solidFill>
+                <a:latin typeface="Calibri"/>
+              </a:rPr>
+              <a:t>Sell now (nadir)</a:t>
+            </a:r>
+          </a:p>
+          <a:p>
+            <a:pPr algn="l">
+              <a:lnSpc>
+                <a:spcPct val="105000"/>
+              </a:lnSpc>
+              <a:spcAft>
+                <a:spcPts val="200"/>
+              </a:spcAft>
+            </a:pPr>
+            <a:r>
+              <a:rPr sz="1400" b="0" i="0">
+                <a:solidFill>
+                  <a:srgbClr val="FFFFFF"/>
+                </a:solidFill>
+                <a:latin typeface="Calibri"/>
+              </a:rPr>
+              <a:t>~$10–15M · a 45-FV bat</a:t>
+            </a:r>
+          </a:p>
+        </p:txBody>
+      </p:sp>
+      <p:sp>
+        <p:nvSpPr>
+          <p:cNvPr id="13" name="TextBox 12"/>
+          <p:cNvSpPr txBox="1"/>
+          <p:nvPr/>
+        </p:nvSpPr>
+        <p:spPr>
+          <a:xfrm>
+            <a:off x="8092440" y="3520440"/>
+            <a:ext cx="3291840" cy="1005840"/>
+          </a:xfrm>
+          <a:prstGeom prst="rect">
+            <a:avLst/>
+          </a:prstGeom>
+          <a:noFill/>
+        </p:spPr>
+        <p:txBody>
+          <a:bodyPr wrap="square" anchor="t" lIns="0" rIns="0" tIns="0" bIns="0">
+            <a:spAutoFit/>
+          </a:bodyPr>
+          <a:lstStyle/>
+          <a:p>
+            <a:pPr algn="l">
+              <a:lnSpc>
+                <a:spcPct val="105000"/>
+              </a:lnSpc>
+              <a:spcAft>
+                <a:spcPts val="200"/>
+              </a:spcAft>
+            </a:pPr>
+            <a:r>
+              <a:rPr sz="1300" b="1" i="0">
+                <a:solidFill>
+                  <a:srgbClr val="A9E5B5"/>
+                </a:solidFill>
+                <a:latin typeface="Calibri"/>
+              </a:rPr>
+              <a:t>Sell after rebound</a:t>
+            </a:r>
+          </a:p>
+          <a:p>
+            <a:pPr algn="l">
+              <a:lnSpc>
+                <a:spcPct val="105000"/>
+              </a:lnSpc>
+              <a:spcAft>
+                <a:spcPts val="200"/>
+              </a:spcAft>
+            </a:pPr>
+            <a:r>
+              <a:rPr sz="1400" b="0" i="0">
+                <a:solidFill>
+                  <a:srgbClr val="FFFFFF"/>
+                </a:solidFill>
+                <a:latin typeface="Calibri"/>
+              </a:rPr>
+              <a:t>~$28M · a 50-FV, top-100</a:t>
+            </a:r>
+          </a:p>
+          <a:p>
+            <a:pPr algn="l">
+              <a:lnSpc>
+                <a:spcPct val="105000"/>
+              </a:lnSpc>
+              <a:spcAft>
+                <a:spcPts val="200"/>
+              </a:spcAft>
+            </a:pPr>
+            <a:r>
+              <a:rPr sz="1400" b="0" i="0">
+                <a:solidFill>
+                  <a:srgbClr val="FFFFFF"/>
+                </a:solidFill>
+                <a:latin typeface="Calibri"/>
+              </a:rPr>
+              <a:t>controllable talent</a:t>
+            </a:r>
+          </a:p>
+        </p:txBody>
+      </p:sp>
+      <p:sp>
+        <p:nvSpPr>
+          <p:cNvPr id="14" name="TextBox 13"/>
+          <p:cNvSpPr txBox="1"/>
+          <p:nvPr/>
+        </p:nvSpPr>
+        <p:spPr>
+          <a:xfrm>
+            <a:off x="8092440" y="4617720"/>
+            <a:ext cx="3291840" cy="457200"/>
+          </a:xfrm>
+          <a:prstGeom prst="rect">
+            <a:avLst/>
+          </a:prstGeom>
+          <a:noFill/>
+        </p:spPr>
+        <p:txBody>
+          <a:bodyPr wrap="square" anchor="t" lIns="0" rIns="0" tIns="0" bIns="0">
+            <a:spAutoFit/>
+          </a:bodyPr>
+          <a:lstStyle/>
+          <a:p>
+            <a:pPr algn="l">
+              <a:lnSpc>
+                <a:spcPct val="105000"/>
+              </a:lnSpc>
+              <a:spcAft>
+                <a:spcPts val="400"/>
+              </a:spcAft>
+            </a:pPr>
+            <a:r>
+              <a:rPr sz="1150" b="0" i="1">
+                <a:solidFill>
+                  <a:srgbClr val="C9D2E3"/>
+                </a:solidFill>
+                <a:latin typeface="Calibri"/>
+              </a:rPr>
+              <a:t>One grade of return = the reason to wait.</a:t>
+            </a:r>
+          </a:p>
+        </p:txBody>
+      </p:sp>
+      <p:sp>
+        <p:nvSpPr>
+          <p:cNvPr id="15" name="TextBox 14"/>
+          <p:cNvSpPr txBox="1"/>
+          <p:nvPr/>
+        </p:nvSpPr>
+        <p:spPr>
+          <a:xfrm>
+            <a:off x="566928" y="6510528"/>
+            <a:ext cx="11064240" cy="274320"/>
+          </a:xfrm>
+          <a:prstGeom prst="rect">
+            <a:avLst/>
+          </a:prstGeom>
+          <a:noFill/>
+        </p:spPr>
+        <p:txBody>
+          <a:bodyPr wrap="square" anchor="t" lIns="0" rIns="0" tIns="0" bIns="0">
+            <a:spAutoFit/>
+          </a:bodyPr>
+          <a:lstStyle/>
+          <a:p>
+            <a:pPr algn="l">
+              <a:lnSpc>
+                <a:spcPct val="100000"/>
+              </a:lnSpc>
+              <a:spcAft>
+                <a:spcPts val="0"/>
+              </a:spcAft>
+            </a:pPr>
+            <a:r>
+              <a:rPr sz="900" b="0" i="0">
+                <a:solidFill>
+                  <a:srgbClr val="6B7280"/>
+                </a:solidFill>
+                <a:latin typeface="Calibri"/>
+              </a:rPr>
+              <a:t>Boston Red Sox · Outfield Strategy</a:t>
+            </a:r>
+            <a:r>
+              <a:rPr sz="900" b="0" i="0">
+                <a:solidFill>
+                  <a:srgbClr val="6B7280"/>
+                </a:solidFill>
+                <a:latin typeface="Calibri"/>
+              </a:rPr>
+              <a:t>      Analysis: Statcast / FanGraphs / MLB Stats API · salary Spotrac · July 2026</a:t>
+            </a:r>
+          </a:p>
+        </p:txBody>
+      </p:sp>
+    </p:spTree>
+  </p:cSld>
+  <p:clrMapOvr>
+    <a:masterClrMapping/>
+  </p:clrMapOvr>
+</p:sld>
+</file>
+
+<file path=ppt/slides/slide11.xml><?xml version="1.0" encoding="utf-8"?>
+<p:sld xmlns:a="http://schemas.openxmlformats.org/drawingml/2006/main" xmlns:p="http://schemas.openxmlformats.org/presentationml/2006/main" xmlns:r="http://schemas.openxmlformats.org/officeDocument/2006/relationships">
+  <p:cSld>
+    <p:bg>
+      <p:bgPr>
+        <a:solidFill>
           <a:srgbClr val="0C2340"/>
         </a:solidFill>
         <a:effectLst/>
@@ -7049,7 +7824,7 @@
                 </a:solidFill>
                 <a:latin typeface="Calibri"/>
               </a:rPr>
-              <a:t>CONTEXT</a:t>
+              <a:t>THE REBOUND MATH</a:t>
             </a:r>
           </a:p>
         </p:txBody>
@@ -7091,14 +7866,14 @@
                 </a:solidFill>
                 <a:latin typeface="Cambria"/>
               </a:rPr>
-              <a:t>Aging doesn't explain the drop — regression and luck do</a:t>
+              <a:t>10,000 simulations: the rebound is likely — unless the erosion is real</a:t>
             </a:r>
           </a:p>
         </p:txBody>
       </p:sp>
       <p:pic>
         <p:nvPicPr>
-          <p:cNvPr id="4" name="Picture 3" descr="04_age_curve_overlay.png"/>
+          <p:cNvPr id="4" name="Picture 3" descr="09_rebound_probability.png"/>
           <p:cNvPicPr>
             <a:picLocks noChangeAspect="1"/>
           </p:cNvPicPr>
@@ -7112,8 +7887,8 @@
         </p:blipFill>
         <p:spPr>
           <a:xfrm>
-            <a:off x="2811779" y="1508760"/>
-            <a:ext cx="6583680" cy="4114800"/>
+            <a:off x="365760" y="1554480"/>
+            <a:ext cx="7589520" cy="3274998"/>
           </a:xfrm>
           <a:prstGeom prst="rect">
             <a:avLst/>
@@ -7128,7 +7903,249 @@
         </p:nvSpPr>
         <p:spPr>
           <a:xfrm>
-            <a:off x="566928" y="5806440"/>
+            <a:off x="8229600" y="1645920"/>
+            <a:ext cx="3383280" cy="320040"/>
+          </a:xfrm>
+          <a:prstGeom prst="rect">
+            <a:avLst/>
+          </a:prstGeom>
+          <a:noFill/>
+        </p:spPr>
+        <p:txBody>
+          <a:bodyPr wrap="square" anchor="t" lIns="0" rIns="0" tIns="0" bIns="0">
+            <a:spAutoFit/>
+          </a:bodyPr>
+          <a:lstStyle/>
+          <a:p>
+            <a:pPr algn="l">
+              <a:lnSpc>
+                <a:spcPct val="100000"/>
+              </a:lnSpc>
+              <a:spcAft>
+                <a:spcPts val="0"/>
+              </a:spcAft>
+            </a:pPr>
+            <a:r>
+              <a:rPr sz="1150" b="1" i="0">
+                <a:solidFill>
+                  <a:srgbClr val="6B7280"/>
+                </a:solidFill>
+                <a:latin typeface="Calibri"/>
+              </a:rPr>
+              <a:t>P(REST-OF-SEASON wRC+ ≥ 100)</a:t>
+            </a:r>
+          </a:p>
+        </p:txBody>
+      </p:sp>
+      <p:sp>
+        <p:nvSpPr>
+          <p:cNvPr id="6" name="TextBox 5"/>
+          <p:cNvSpPr txBox="1"/>
+          <p:nvPr/>
+        </p:nvSpPr>
+        <p:spPr>
+          <a:xfrm>
+            <a:off x="8229600" y="1965960"/>
+            <a:ext cx="3383280" cy="777240"/>
+          </a:xfrm>
+          <a:prstGeom prst="rect">
+            <a:avLst/>
+          </a:prstGeom>
+          <a:noFill/>
+        </p:spPr>
+        <p:txBody>
+          <a:bodyPr wrap="square" anchor="t" lIns="0" rIns="0" tIns="0" bIns="0">
+            <a:spAutoFit/>
+          </a:bodyPr>
+          <a:lstStyle/>
+          <a:p>
+            <a:pPr algn="l">
+              <a:lnSpc>
+                <a:spcPct val="100000"/>
+              </a:lnSpc>
+              <a:spcAft>
+                <a:spcPts val="200"/>
+              </a:spcAft>
+            </a:pPr>
+            <a:r>
+              <a:rPr sz="3400" b="1" i="0">
+                <a:solidFill>
+                  <a:srgbClr val="2E7D32"/>
+                </a:solidFill>
+                <a:latin typeface="Cambria"/>
+              </a:rPr>
+              <a:t>69%</a:t>
+            </a:r>
+            <a:r>
+              <a:rPr sz="1250" b="0" i="0">
+                <a:solidFill>
+                  <a:srgbClr val="6B7280"/>
+                </a:solidFill>
+                <a:latin typeface="Calibri"/>
+              </a:rPr>
+              <a:t>  healthy prior</a:t>
+            </a:r>
+          </a:p>
+          <a:p>
+            <a:pPr algn="l">
+              <a:lnSpc>
+                <a:spcPct val="100000"/>
+              </a:lnSpc>
+              <a:spcAft>
+                <a:spcPts val="200"/>
+              </a:spcAft>
+            </a:pPr>
+            <a:r>
+              <a:rPr sz="3400" b="1" i="0">
+                <a:solidFill>
+                  <a:srgbClr val="BD3039"/>
+                </a:solidFill>
+                <a:latin typeface="Cambria"/>
+              </a:rPr>
+              <a:t>47%</a:t>
+            </a:r>
+            <a:r>
+              <a:rPr sz="1250" b="0" i="0">
+                <a:solidFill>
+                  <a:srgbClr val="6B7280"/>
+                </a:solidFill>
+                <a:latin typeface="Calibri"/>
+              </a:rPr>
+              <a:t>  erosion-blended</a:t>
+            </a:r>
+          </a:p>
+        </p:txBody>
+      </p:sp>
+      <p:sp>
+        <p:nvSpPr>
+          <p:cNvPr id="7" name="TextBox 6"/>
+          <p:cNvSpPr txBox="1"/>
+          <p:nvPr/>
+        </p:nvSpPr>
+        <p:spPr>
+          <a:xfrm>
+            <a:off x="8229600" y="3520440"/>
+            <a:ext cx="3383280" cy="320040"/>
+          </a:xfrm>
+          <a:prstGeom prst="rect">
+            <a:avLst/>
+          </a:prstGeom>
+          <a:noFill/>
+        </p:spPr>
+        <p:txBody>
+          <a:bodyPr wrap="square" anchor="t" lIns="0" rIns="0" tIns="0" bIns="0">
+            <a:spAutoFit/>
+          </a:bodyPr>
+          <a:lstStyle/>
+          <a:p>
+            <a:pPr algn="l">
+              <a:lnSpc>
+                <a:spcPct val="100000"/>
+              </a:lnSpc>
+              <a:spcAft>
+                <a:spcPts val="0"/>
+              </a:spcAft>
+            </a:pPr>
+            <a:r>
+              <a:rPr sz="1150" b="1" i="0">
+                <a:solidFill>
+                  <a:srgbClr val="6B7280"/>
+                </a:solidFill>
+                <a:latin typeface="Calibri"/>
+              </a:rPr>
+              <a:t>EXPECTED OFFSEASON TRADE VALUE</a:t>
+            </a:r>
+          </a:p>
+        </p:txBody>
+      </p:sp>
+      <p:sp>
+        <p:nvSpPr>
+          <p:cNvPr id="8" name="TextBox 7"/>
+          <p:cNvSpPr txBox="1"/>
+          <p:nvPr/>
+        </p:nvSpPr>
+        <p:spPr>
+          <a:xfrm>
+            <a:off x="8229600" y="3840480"/>
+            <a:ext cx="3383280" cy="731520"/>
+          </a:xfrm>
+          <a:prstGeom prst="rect">
+            <a:avLst/>
+          </a:prstGeom>
+          <a:noFill/>
+        </p:spPr>
+        <p:txBody>
+          <a:bodyPr wrap="square" anchor="t" lIns="0" rIns="0" tIns="0" bIns="0">
+            <a:spAutoFit/>
+          </a:bodyPr>
+          <a:lstStyle/>
+          <a:p>
+            <a:pPr algn="l">
+              <a:lnSpc>
+                <a:spcPct val="105000"/>
+              </a:lnSpc>
+              <a:spcAft>
+                <a:spcPts val="200"/>
+              </a:spcAft>
+            </a:pPr>
+            <a:r>
+              <a:rPr sz="2400" b="1" i="0">
+                <a:solidFill>
+                  <a:srgbClr val="0C2340"/>
+                </a:solidFill>
+                <a:latin typeface="Cambria"/>
+              </a:rPr>
+              <a:t>$22M</a:t>
+            </a:r>
+            <a:r>
+              <a:rPr sz="1300" b="0" i="0">
+                <a:solidFill>
+                  <a:srgbClr val="6B7280"/>
+                </a:solidFill>
+                <a:latin typeface="Calibri"/>
+              </a:rPr>
+              <a:t> vs </a:t>
+            </a:r>
+            <a:r>
+              <a:rPr sz="2400" b="1" i="0">
+                <a:solidFill>
+                  <a:srgbClr val="0C2340"/>
+                </a:solidFill>
+                <a:latin typeface="Cambria"/>
+              </a:rPr>
+              <a:t>$18M</a:t>
+            </a:r>
+          </a:p>
+          <a:p>
+            <a:pPr algn="l">
+              <a:lnSpc>
+                <a:spcPct val="105000"/>
+              </a:lnSpc>
+              <a:spcAft>
+                <a:spcPts val="200"/>
+              </a:spcAft>
+            </a:pPr>
+            <a:r>
+              <a:rPr sz="1150" b="0" i="0">
+                <a:solidFill>
+                  <a:srgbClr val="6B7280"/>
+                </a:solidFill>
+                <a:latin typeface="Calibri"/>
+              </a:rPr>
+              <a:t>either way, well above the ~$10M a July sale fetches</a:t>
+            </a:r>
+          </a:p>
+        </p:txBody>
+      </p:sp>
+      <p:sp>
+        <p:nvSpPr>
+          <p:cNvPr id="9" name="TextBox 8"/>
+          <p:cNvSpPr txBox="1"/>
+          <p:nvPr/>
+        </p:nvSpPr>
+        <p:spPr>
+          <a:xfrm>
+            <a:off x="566928" y="5623560"/>
             <a:ext cx="11064240" cy="640080"/>
           </a:xfrm>
           <a:prstGeom prst="rect">
@@ -7144,36 +8161,36 @@
           <a:p>
             <a:pPr algn="l">
               <a:lnSpc>
-                <a:spcPct val="110000"/>
+                <a:spcPct val="112000"/>
               </a:lnSpc>
               <a:spcAft>
                 <a:spcPts val="400"/>
               </a:spcAft>
             </a:pPr>
             <a:r>
-              <a:rPr sz="1400" b="0" i="0">
+              <a:rPr sz="1350" b="1" i="0">
+                <a:solidFill>
+                  <a:srgbClr val="BD3039"/>
+                </a:solidFill>
+                <a:latin typeface="Calibri"/>
+              </a:rPr>
+              <a:t>The honest line: </a:t>
+            </a:r>
+            <a:r>
+              <a:rPr sz="1350" b="0" i="0">
                 <a:solidFill>
                   <a:srgbClr val="20232A"/>
                 </a:solidFill>
                 <a:latin typeface="Calibri"/>
               </a:rPr>
-              <a:t>2024 → 2026 wRC+ fell ~70 points; a normal age 27→29 curve predicts only ~7. </a:t>
-            </a:r>
-            <a:r>
-              <a:rPr sz="1400" b="1" i="0">
-                <a:solidFill>
-                  <a:srgbClr val="0C2340"/>
-                </a:solidFill>
-                <a:latin typeface="Calibri"/>
-              </a:rPr>
-              <a:t>The gap is mean-reversion from an inflated peak plus a 2026 bad-luck tail — not skill cliff.</a:t>
-            </a:r>
-          </a:p>
-        </p:txBody>
-      </p:sp>
-      <p:sp>
-        <p:nvSpPr>
-          <p:cNvPr id="6" name="TextBox 5"/>
+              <a:t>the 22-point probability gap is the price of the worse chase / whiff / hard-hit rates. Hold-through-2026 survives the erosion stress test — but with less confidence in the rebound narrative itself.</a:t>
+            </a:r>
+          </a:p>
+        </p:txBody>
+      </p:sp>
+      <p:sp>
+        <p:nvSpPr>
+          <p:cNvPr id="10" name="TextBox 9"/>
           <p:cNvSpPr txBox="1"/>
           <p:nvPr/>
         </p:nvSpPr>
@@ -7285,7 +8302,7 @@
                 </a:solidFill>
                 <a:latin typeface="Calibri"/>
               </a:rPr>
-              <a:t>WHAT TO GET BACK</a:t>
+              <a:t>CONTEXT</a:t>
             </a:r>
           </a:p>
         </p:txBody>
@@ -7327,20 +8344,44 @@
                 </a:solidFill>
                 <a:latin typeface="Cambria"/>
               </a:rPr>
-              <a:t>Pitching is the strength — spend the surplus on offense</a:t>
-            </a:r>
-          </a:p>
-        </p:txBody>
-      </p:sp>
-      <p:sp>
-        <p:nvSpPr>
-          <p:cNvPr id="4" name="TextBox 3"/>
-          <p:cNvSpPr txBox="1"/>
-          <p:nvPr/>
-        </p:nvSpPr>
-        <p:spPr>
-          <a:xfrm>
-            <a:off x="566928" y="1572768"/>
+              <a:t>Aging doesn't explain the drop — regression and luck do</a:t>
+            </a:r>
+          </a:p>
+        </p:txBody>
+      </p:sp>
+      <p:pic>
+        <p:nvPicPr>
+          <p:cNvPr id="4" name="Picture 3" descr="04_age_curve_overlay.png"/>
+          <p:cNvPicPr>
+            <a:picLocks noChangeAspect="1"/>
+          </p:cNvPicPr>
+          <p:nvPr/>
+        </p:nvPicPr>
+        <p:blipFill>
+          <a:blip r:embed="rId2"/>
+          <a:stretch>
+            <a:fillRect/>
+          </a:stretch>
+        </p:blipFill>
+        <p:spPr>
+          <a:xfrm>
+            <a:off x="2811779" y="1508760"/>
+            <a:ext cx="6583680" cy="4114800"/>
+          </a:xfrm>
+          <a:prstGeom prst="rect">
+            <a:avLst/>
+          </a:prstGeom>
+        </p:spPr>
+      </p:pic>
+      <p:sp>
+        <p:nvSpPr>
+          <p:cNvPr id="5" name="TextBox 4"/>
+          <p:cNvSpPr txBox="1"/>
+          <p:nvPr/>
+        </p:nvSpPr>
+        <p:spPr>
+          <a:xfrm>
+            <a:off x="566928" y="5806440"/>
             <a:ext cx="11064240" cy="640080"/>
           </a:xfrm>
           <a:prstGeom prst="rect">
@@ -7356,633 +8397,36 @@
           <a:p>
             <a:pPr algn="l">
               <a:lnSpc>
-                <a:spcPct val="112000"/>
+                <a:spcPct val="110000"/>
               </a:lnSpc>
               <a:spcAft>
                 <a:spcPts val="400"/>
               </a:spcAft>
             </a:pPr>
             <a:r>
-              <a:rPr sz="1450" b="0" i="0">
+              <a:rPr sz="1400" b="0" i="0">
                 <a:solidFill>
                   <a:srgbClr val="20232A"/>
                 </a:solidFill>
                 <a:latin typeface="Calibri"/>
               </a:rPr>
-              <a:t>With a top-10 rotation (3.76 ERA) already carrying the club, trading bats for arms is backwards. Convert the outfield surplus into what's thin:</a:t>
-            </a:r>
-          </a:p>
-        </p:txBody>
-      </p:sp>
-      <p:sp>
-        <p:nvSpPr>
-          <p:cNvPr id="5" name="Rounded Rectangle 4"/>
-          <p:cNvSpPr/>
-          <p:nvPr/>
-        </p:nvSpPr>
-        <p:spPr>
-          <a:xfrm>
-            <a:off x="566928" y="2468880"/>
-            <a:ext cx="3502152" cy="2514600"/>
-          </a:xfrm>
-          <a:prstGeom prst="roundRect">
-            <a:avLst>
-              <a:gd name="adj" fmla="val 8000"/>
-            </a:avLst>
-          </a:prstGeom>
-          <a:solidFill>
-            <a:srgbClr val="FFFFFF"/>
-          </a:solidFill>
-          <a:ln w="12700">
-            <a:solidFill>
-              <a:srgbClr val="D7DAE0"/>
-            </a:solidFill>
-          </a:ln>
-          <a:effectLst/>
-        </p:spPr>
-        <p:style>
-          <a:lnRef idx="1">
-            <a:schemeClr val="accent1"/>
-          </a:lnRef>
-          <a:fillRef idx="3">
-            <a:schemeClr val="accent1"/>
-          </a:fillRef>
-          <a:effectRef idx="2">
-            <a:schemeClr val="accent1"/>
-          </a:effectRef>
-          <a:fontRef idx="minor">
-            <a:schemeClr val="lt1"/>
-          </a:fontRef>
-        </p:style>
-        <p:txBody>
-          <a:bodyPr rtlCol="0" anchor="ctr"/>
-          <a:lstStyle/>
-          <a:p>
-            <a:pPr algn="ctr"/>
-          </a:p>
-        </p:txBody>
-      </p:sp>
-      <p:sp>
-        <p:nvSpPr>
-          <p:cNvPr id="6" name="Oval 5"/>
-          <p:cNvSpPr/>
-          <p:nvPr/>
-        </p:nvSpPr>
-        <p:spPr>
-          <a:xfrm>
-            <a:off x="841247" y="2724912"/>
-            <a:ext cx="384048" cy="384048"/>
-          </a:xfrm>
-          <a:prstGeom prst="ellipse">
-            <a:avLst/>
-          </a:prstGeom>
-          <a:solidFill>
-            <a:srgbClr val="2E7D32"/>
-          </a:solidFill>
-          <a:ln>
-            <a:noFill/>
-          </a:ln>
-          <a:effectLst/>
-        </p:spPr>
-        <p:style>
-          <a:lnRef idx="1">
-            <a:schemeClr val="accent1"/>
-          </a:lnRef>
-          <a:fillRef idx="3">
-            <a:schemeClr val="accent1"/>
-          </a:fillRef>
-          <a:effectRef idx="2">
-            <a:schemeClr val="accent1"/>
-          </a:effectRef>
-          <a:fontRef idx="minor">
-            <a:schemeClr val="lt1"/>
-          </a:fontRef>
-        </p:style>
-        <p:txBody>
-          <a:bodyPr rtlCol="0" anchor="ctr" wrap="none"/>
-          <a:lstStyle/>
-          <a:p>
-            <a:pPr algn="ctr"/>
-            <a:r>
-              <a:rPr sz="1600" b="1">
-                <a:solidFill>
-                  <a:srgbClr val="FFFFFF"/>
-                </a:solidFill>
-                <a:latin typeface="Cambria"/>
-              </a:rPr>
-              <a:t>1</a:t>
-            </a:r>
-          </a:p>
-        </p:txBody>
-      </p:sp>
-      <p:sp>
-        <p:nvSpPr>
-          <p:cNvPr id="7" name="TextBox 6"/>
-          <p:cNvSpPr txBox="1"/>
-          <p:nvPr/>
-        </p:nvSpPr>
-        <p:spPr>
-          <a:xfrm>
-            <a:off x="841247" y="3310128"/>
-            <a:ext cx="2999232" cy="411480"/>
-          </a:xfrm>
-          <a:prstGeom prst="rect">
-            <a:avLst/>
-          </a:prstGeom>
-          <a:noFill/>
-        </p:spPr>
-        <p:txBody>
-          <a:bodyPr wrap="square" anchor="t" lIns="0" rIns="0" tIns="0" bIns="0">
-            <a:spAutoFit/>
-          </a:bodyPr>
-          <a:lstStyle/>
-          <a:p>
-            <a:pPr algn="l">
-              <a:lnSpc>
-                <a:spcPct val="100000"/>
-              </a:lnSpc>
-              <a:spcAft>
-                <a:spcPts val="0"/>
-              </a:spcAft>
-            </a:pPr>
-            <a:r>
-              <a:rPr sz="1600" b="1" i="0">
+              <a:t>2024 → 2026 wRC+ fell ~70 points; a normal age 27→29 curve predicts only ~7. </a:t>
+            </a:r>
+            <a:r>
+              <a:rPr sz="1400" b="1" i="0">
                 <a:solidFill>
                   <a:srgbClr val="0C2340"/>
                 </a:solidFill>
-                <a:latin typeface="Cambria"/>
-              </a:rPr>
-              <a:t>Controllable bats</a:t>
-            </a:r>
-          </a:p>
-        </p:txBody>
-      </p:sp>
-      <p:sp>
-        <p:nvSpPr>
-          <p:cNvPr id="8" name="TextBox 7"/>
-          <p:cNvSpPr txBox="1"/>
-          <p:nvPr/>
-        </p:nvSpPr>
-        <p:spPr>
-          <a:xfrm>
-            <a:off x="841247" y="3767328"/>
-            <a:ext cx="2999232" cy="1097280"/>
-          </a:xfrm>
-          <a:prstGeom prst="rect">
-            <a:avLst/>
-          </a:prstGeom>
-          <a:noFill/>
-        </p:spPr>
-        <p:txBody>
-          <a:bodyPr wrap="square" anchor="t" lIns="0" rIns="0" tIns="0" bIns="0">
-            <a:spAutoFit/>
-          </a:bodyPr>
-          <a:lstStyle/>
-          <a:p>
-            <a:pPr algn="l">
-              <a:lnSpc>
-                <a:spcPct val="110000"/>
-              </a:lnSpc>
-              <a:spcAft>
-                <a:spcPts val="400"/>
-              </a:spcAft>
-            </a:pPr>
-            <a:r>
-              <a:rPr sz="1280" b="0" i="0">
-                <a:solidFill>
-                  <a:srgbClr val="6B7280"/>
-                </a:solidFill>
-                <a:latin typeface="Calibri"/>
-              </a:rPr>
-              <a:t>Young, cost-controlled position players to fix an inconsistent lineup and lengthen it around the core.</a:t>
-            </a:r>
-          </a:p>
-        </p:txBody>
-      </p:sp>
-      <p:sp>
-        <p:nvSpPr>
-          <p:cNvPr id="9" name="Rounded Rectangle 8"/>
-          <p:cNvSpPr/>
-          <p:nvPr/>
-        </p:nvSpPr>
-        <p:spPr>
-          <a:xfrm>
-            <a:off x="4352544" y="2468880"/>
-            <a:ext cx="3502152" cy="2514600"/>
-          </a:xfrm>
-          <a:prstGeom prst="roundRect">
-            <a:avLst>
-              <a:gd name="adj" fmla="val 8000"/>
-            </a:avLst>
-          </a:prstGeom>
-          <a:solidFill>
-            <a:srgbClr val="FFFFFF"/>
-          </a:solidFill>
-          <a:ln w="12700">
-            <a:solidFill>
-              <a:srgbClr val="D7DAE0"/>
-            </a:solidFill>
-          </a:ln>
-          <a:effectLst/>
-        </p:spPr>
-        <p:style>
-          <a:lnRef idx="1">
-            <a:schemeClr val="accent1"/>
-          </a:lnRef>
-          <a:fillRef idx="3">
-            <a:schemeClr val="accent1"/>
-          </a:fillRef>
-          <a:effectRef idx="2">
-            <a:schemeClr val="accent1"/>
-          </a:effectRef>
-          <a:fontRef idx="minor">
-            <a:schemeClr val="lt1"/>
-          </a:fontRef>
-        </p:style>
-        <p:txBody>
-          <a:bodyPr rtlCol="0" anchor="ctr"/>
-          <a:lstStyle/>
-          <a:p>
-            <a:pPr algn="ctr"/>
-          </a:p>
-        </p:txBody>
-      </p:sp>
-      <p:sp>
-        <p:nvSpPr>
-          <p:cNvPr id="10" name="Oval 9"/>
-          <p:cNvSpPr/>
-          <p:nvPr/>
-        </p:nvSpPr>
-        <p:spPr>
-          <a:xfrm>
-            <a:off x="4626864" y="2724912"/>
-            <a:ext cx="384048" cy="384048"/>
-          </a:xfrm>
-          <a:prstGeom prst="ellipse">
-            <a:avLst/>
-          </a:prstGeom>
-          <a:solidFill>
-            <a:srgbClr val="0C2340"/>
-          </a:solidFill>
-          <a:ln>
-            <a:noFill/>
-          </a:ln>
-          <a:effectLst/>
-        </p:spPr>
-        <p:style>
-          <a:lnRef idx="1">
-            <a:schemeClr val="accent1"/>
-          </a:lnRef>
-          <a:fillRef idx="3">
-            <a:schemeClr val="accent1"/>
-          </a:fillRef>
-          <a:effectRef idx="2">
-            <a:schemeClr val="accent1"/>
-          </a:effectRef>
-          <a:fontRef idx="minor">
-            <a:schemeClr val="lt1"/>
-          </a:fontRef>
-        </p:style>
-        <p:txBody>
-          <a:bodyPr rtlCol="0" anchor="ctr" wrap="none"/>
-          <a:lstStyle/>
-          <a:p>
-            <a:pPr algn="ctr"/>
-            <a:r>
-              <a:rPr sz="1600" b="1">
-                <a:solidFill>
-                  <a:srgbClr val="FFFFFF"/>
-                </a:solidFill>
-                <a:latin typeface="Cambria"/>
-              </a:rPr>
-              <a:t>2</a:t>
-            </a:r>
-          </a:p>
-        </p:txBody>
-      </p:sp>
-      <p:sp>
-        <p:nvSpPr>
-          <p:cNvPr id="11" name="TextBox 10"/>
-          <p:cNvSpPr txBox="1"/>
-          <p:nvPr/>
-        </p:nvSpPr>
-        <p:spPr>
-          <a:xfrm>
-            <a:off x="4626864" y="3310128"/>
-            <a:ext cx="2999232" cy="411480"/>
-          </a:xfrm>
-          <a:prstGeom prst="rect">
-            <a:avLst/>
-          </a:prstGeom>
-          <a:noFill/>
-        </p:spPr>
-        <p:txBody>
-          <a:bodyPr wrap="square" anchor="t" lIns="0" rIns="0" tIns="0" bIns="0">
-            <a:spAutoFit/>
-          </a:bodyPr>
-          <a:lstStyle/>
-          <a:p>
-            <a:pPr algn="l">
-              <a:lnSpc>
-                <a:spcPct val="100000"/>
-              </a:lnSpc>
-              <a:spcAft>
-                <a:spcPts val="0"/>
-              </a:spcAft>
-            </a:pPr>
-            <a:r>
-              <a:rPr sz="1600" b="1" i="0">
-                <a:solidFill>
-                  <a:srgbClr val="0C2340"/>
-                </a:solidFill>
-                <a:latin typeface="Cambria"/>
-              </a:rPr>
-              <a:t>Best talent / upside</a:t>
-            </a:r>
-          </a:p>
-        </p:txBody>
-      </p:sp>
-      <p:sp>
-        <p:nvSpPr>
-          <p:cNvPr id="12" name="TextBox 11"/>
-          <p:cNvSpPr txBox="1"/>
-          <p:nvPr/>
-        </p:nvSpPr>
-        <p:spPr>
-          <a:xfrm>
-            <a:off x="4626864" y="3767328"/>
-            <a:ext cx="2999232" cy="1097280"/>
-          </a:xfrm>
-          <a:prstGeom prst="rect">
-            <a:avLst/>
-          </a:prstGeom>
-          <a:noFill/>
-        </p:spPr>
-        <p:txBody>
-          <a:bodyPr wrap="square" anchor="t" lIns="0" rIns="0" tIns="0" bIns="0">
-            <a:spAutoFit/>
-          </a:bodyPr>
-          <a:lstStyle/>
-          <a:p>
-            <a:pPr algn="l">
-              <a:lnSpc>
-                <a:spcPct val="110000"/>
-              </a:lnSpc>
-              <a:spcAft>
-                <a:spcPts val="400"/>
-              </a:spcAft>
-            </a:pPr>
-            <a:r>
-              <a:rPr sz="1280" b="0" i="0">
-                <a:solidFill>
-                  <a:srgbClr val="6B7280"/>
-                </a:solidFill>
-                <a:latin typeface="Calibri"/>
-              </a:rPr>
-              <a:t>In a retool you take the best player, not the positional patch — prospects and MLB-ready youth over rentals.</a:t>
-            </a:r>
-          </a:p>
-        </p:txBody>
-      </p:sp>
-      <p:sp>
-        <p:nvSpPr>
-          <p:cNvPr id="13" name="Rounded Rectangle 12"/>
-          <p:cNvSpPr/>
-          <p:nvPr/>
-        </p:nvSpPr>
-        <p:spPr>
-          <a:xfrm>
-            <a:off x="8138159" y="2468880"/>
-            <a:ext cx="3502152" cy="2514600"/>
-          </a:xfrm>
-          <a:prstGeom prst="roundRect">
-            <a:avLst>
-              <a:gd name="adj" fmla="val 8000"/>
-            </a:avLst>
-          </a:prstGeom>
-          <a:solidFill>
-            <a:srgbClr val="FFFFFF"/>
-          </a:solidFill>
-          <a:ln w="12700">
-            <a:solidFill>
-              <a:srgbClr val="D7DAE0"/>
-            </a:solidFill>
-          </a:ln>
-          <a:effectLst/>
-        </p:spPr>
-        <p:style>
-          <a:lnRef idx="1">
-            <a:schemeClr val="accent1"/>
-          </a:lnRef>
-          <a:fillRef idx="3">
-            <a:schemeClr val="accent1"/>
-          </a:fillRef>
-          <a:effectRef idx="2">
-            <a:schemeClr val="accent1"/>
-          </a:effectRef>
-          <a:fontRef idx="minor">
-            <a:schemeClr val="lt1"/>
-          </a:fontRef>
-        </p:style>
-        <p:txBody>
-          <a:bodyPr rtlCol="0" anchor="ctr"/>
-          <a:lstStyle/>
-          <a:p>
-            <a:pPr algn="ctr"/>
-          </a:p>
-        </p:txBody>
-      </p:sp>
-      <p:sp>
-        <p:nvSpPr>
-          <p:cNvPr id="14" name="Oval 13"/>
-          <p:cNvSpPr/>
-          <p:nvPr/>
-        </p:nvSpPr>
-        <p:spPr>
-          <a:xfrm>
-            <a:off x="8412480" y="2724912"/>
-            <a:ext cx="384048" cy="384048"/>
-          </a:xfrm>
-          <a:prstGeom prst="ellipse">
-            <a:avLst/>
-          </a:prstGeom>
-          <a:solidFill>
-            <a:srgbClr val="B7892F"/>
-          </a:solidFill>
-          <a:ln>
-            <a:noFill/>
-          </a:ln>
-          <a:effectLst/>
-        </p:spPr>
-        <p:style>
-          <a:lnRef idx="1">
-            <a:schemeClr val="accent1"/>
-          </a:lnRef>
-          <a:fillRef idx="3">
-            <a:schemeClr val="accent1"/>
-          </a:fillRef>
-          <a:effectRef idx="2">
-            <a:schemeClr val="accent1"/>
-          </a:effectRef>
-          <a:fontRef idx="minor">
-            <a:schemeClr val="lt1"/>
-          </a:fontRef>
-        </p:style>
-        <p:txBody>
-          <a:bodyPr rtlCol="0" anchor="ctr" wrap="none"/>
-          <a:lstStyle/>
-          <a:p>
-            <a:pPr algn="ctr"/>
-            <a:r>
-              <a:rPr sz="1600" b="1">
-                <a:solidFill>
-                  <a:srgbClr val="FFFFFF"/>
-                </a:solidFill>
-                <a:latin typeface="Cambria"/>
-              </a:rPr>
-              <a:t>3</a:t>
-            </a:r>
-          </a:p>
-        </p:txBody>
-      </p:sp>
-      <p:sp>
-        <p:nvSpPr>
-          <p:cNvPr id="15" name="TextBox 14"/>
-          <p:cNvSpPr txBox="1"/>
-          <p:nvPr/>
-        </p:nvSpPr>
-        <p:spPr>
-          <a:xfrm>
-            <a:off x="8412480" y="3310128"/>
-            <a:ext cx="2999232" cy="411480"/>
-          </a:xfrm>
-          <a:prstGeom prst="rect">
-            <a:avLst/>
-          </a:prstGeom>
-          <a:noFill/>
-        </p:spPr>
-        <p:txBody>
-          <a:bodyPr wrap="square" anchor="t" lIns="0" rIns="0" tIns="0" bIns="0">
-            <a:spAutoFit/>
-          </a:bodyPr>
-          <a:lstStyle/>
-          <a:p>
-            <a:pPr algn="l">
-              <a:lnSpc>
-                <a:spcPct val="100000"/>
-              </a:lnSpc>
-              <a:spcAft>
-                <a:spcPts val="0"/>
-              </a:spcAft>
-            </a:pPr>
-            <a:r>
-              <a:rPr sz="1600" b="1" i="0">
-                <a:solidFill>
-                  <a:srgbClr val="0C2340"/>
-                </a:solidFill>
-                <a:latin typeface="Cambria"/>
-              </a:rPr>
-              <a:t>Salary relief</a:t>
-            </a:r>
-          </a:p>
-        </p:txBody>
-      </p:sp>
-      <p:sp>
-        <p:nvSpPr>
-          <p:cNvPr id="16" name="TextBox 15"/>
-          <p:cNvSpPr txBox="1"/>
-          <p:nvPr/>
-        </p:nvSpPr>
-        <p:spPr>
-          <a:xfrm>
-            <a:off x="8412480" y="3767328"/>
-            <a:ext cx="2999232" cy="1097280"/>
-          </a:xfrm>
-          <a:prstGeom prst="rect">
-            <a:avLst/>
-          </a:prstGeom>
-          <a:noFill/>
-        </p:spPr>
-        <p:txBody>
-          <a:bodyPr wrap="square" anchor="t" lIns="0" rIns="0" tIns="0" bIns="0">
-            <a:spAutoFit/>
-          </a:bodyPr>
-          <a:lstStyle/>
-          <a:p>
-            <a:pPr algn="l">
-              <a:lnSpc>
-                <a:spcPct val="110000"/>
-              </a:lnSpc>
-              <a:spcAft>
-                <a:spcPts val="400"/>
-              </a:spcAft>
-            </a:pPr>
-            <a:r>
-              <a:rPr sz="1280" b="0" i="0">
-                <a:solidFill>
-                  <a:srgbClr val="6B7280"/>
-                </a:solidFill>
-                <a:latin typeface="Calibri"/>
-              </a:rPr>
-              <a:t>Attach Yoshida money where possible; free payroll for the 2027 window.</a:t>
-            </a:r>
-          </a:p>
-        </p:txBody>
-      </p:sp>
-      <p:sp>
-        <p:nvSpPr>
-          <p:cNvPr id="17" name="TextBox 16"/>
-          <p:cNvSpPr txBox="1"/>
-          <p:nvPr/>
-        </p:nvSpPr>
-        <p:spPr>
-          <a:xfrm>
-            <a:off x="566928" y="5257800"/>
-            <a:ext cx="11064240" cy="457200"/>
-          </a:xfrm>
-          <a:prstGeom prst="rect">
-            <a:avLst/>
-          </a:prstGeom>
-          <a:noFill/>
-        </p:spPr>
-        <p:txBody>
-          <a:bodyPr wrap="square" anchor="t" lIns="0" rIns="0" tIns="0" bIns="0">
-            <a:spAutoFit/>
-          </a:bodyPr>
-          <a:lstStyle/>
-          <a:p>
-            <a:pPr algn="l">
-              <a:lnSpc>
-                <a:spcPct val="100000"/>
-              </a:lnSpc>
-              <a:spcAft>
-                <a:spcPts val="0"/>
-              </a:spcAft>
-            </a:pPr>
-            <a:r>
-              <a:rPr sz="1400" b="1" i="1">
-                <a:solidFill>
-                  <a:srgbClr val="0C2340"/>
-                </a:solidFill>
-                <a:latin typeface="Calibri"/>
-              </a:rPr>
-              <a:t>Keep the arms. Cash the outfield. </a:t>
-            </a:r>
-            <a:r>
-              <a:rPr sz="1400" b="0" i="1">
-                <a:solidFill>
-                  <a:srgbClr val="6B7280"/>
-                </a:solidFill>
-                <a:latin typeface="Calibri"/>
-              </a:rPr>
-              <a:t>Build the 2027 lineup, don't rent the 2026 one.</a:t>
-            </a:r>
-          </a:p>
-        </p:txBody>
-      </p:sp>
-      <p:sp>
-        <p:nvSpPr>
-          <p:cNvPr id="18" name="TextBox 17"/>
+                <a:latin typeface="Calibri"/>
+              </a:rPr>
+              <a:t>The gap is mean-reversion from an inflated peak plus a 2026 bad-luck tail — not skill cliff.</a:t>
+            </a:r>
+          </a:p>
+        </p:txBody>
+      </p:sp>
+      <p:sp>
+        <p:nvSpPr>
+          <p:cNvPr id="6" name="TextBox 5"/>
           <p:cNvSpPr txBox="1"/>
           <p:nvPr/>
         </p:nvSpPr>
@@ -8094,7 +8538,7 @@
                 </a:solidFill>
                 <a:latin typeface="Calibri"/>
               </a:rPr>
-              <a:t>THE MARKET</a:t>
+              <a:t>WHAT TO GET BACK</a:t>
             </a:r>
           </a:p>
         </p:txBody>
@@ -8136,96 +8580,76 @@
                 </a:solidFill>
                 <a:latin typeface="Cambria"/>
               </a:rPr>
-              <a:t>Who pays: contenders with a hole in the outfield</a:t>
-            </a:r>
-          </a:p>
-        </p:txBody>
-      </p:sp>
-      <p:pic>
-        <p:nvPicPr>
-          <p:cNvPr id="4" name="Picture 3" descr="08_trade_fit_targets.png"/>
-          <p:cNvPicPr>
-            <a:picLocks noChangeAspect="1"/>
-          </p:cNvPicPr>
-          <p:nvPr/>
-        </p:nvPicPr>
-        <p:blipFill>
-          <a:blip r:embed="rId2"/>
-          <a:stretch>
-            <a:fillRect/>
-          </a:stretch>
-        </p:blipFill>
-        <p:spPr>
-          <a:xfrm>
-            <a:off x="757237" y="1463040"/>
-            <a:ext cx="6715125" cy="4297680"/>
-          </a:xfrm>
-          <a:prstGeom prst="rect">
-            <a:avLst/>
-          </a:prstGeom>
-        </p:spPr>
-      </p:pic>
-      <p:sp>
-        <p:nvSpPr>
-          <p:cNvPr id="5" name="TextBox 4"/>
-          <p:cNvSpPr txBox="1"/>
-          <p:nvPr/>
-        </p:nvSpPr>
-        <p:spPr>
-          <a:xfrm>
-            <a:off x="8183879" y="1691640"/>
-            <a:ext cx="3657600" cy="457200"/>
-          </a:xfrm>
-          <a:prstGeom prst="rect">
-            <a:avLst/>
-          </a:prstGeom>
-          <a:noFill/>
-        </p:spPr>
-        <p:txBody>
-          <a:bodyPr wrap="square" anchor="t" lIns="0" rIns="0" tIns="0" bIns="0">
-            <a:spAutoFit/>
-          </a:bodyPr>
-          <a:lstStyle/>
-          <a:p>
-            <a:pPr algn="l">
-              <a:lnSpc>
-                <a:spcPct val="100000"/>
-              </a:lnSpc>
-              <a:spcAft>
-                <a:spcPts val="0"/>
-              </a:spcAft>
-            </a:pPr>
-            <a:r>
-              <a:rPr sz="1500" b="1" i="0">
-                <a:solidFill>
-                  <a:srgbClr val="0C2340"/>
-                </a:solidFill>
-                <a:latin typeface="Cambria"/>
-              </a:rPr>
-              <a:t>Best-fit buyers</a:t>
-            </a:r>
-          </a:p>
-        </p:txBody>
-      </p:sp>
-      <p:sp>
-        <p:nvSpPr>
-          <p:cNvPr id="6" name="Oval 5"/>
+              <a:t>Pitching is the strength — spend the surplus on offense</a:t>
+            </a:r>
+          </a:p>
+        </p:txBody>
+      </p:sp>
+      <p:sp>
+        <p:nvSpPr>
+          <p:cNvPr id="4" name="TextBox 3"/>
+          <p:cNvSpPr txBox="1"/>
+          <p:nvPr/>
+        </p:nvSpPr>
+        <p:spPr>
+          <a:xfrm>
+            <a:off x="566928" y="1572768"/>
+            <a:ext cx="11064240" cy="640080"/>
+          </a:xfrm>
+          <a:prstGeom prst="rect">
+            <a:avLst/>
+          </a:prstGeom>
+          <a:noFill/>
+        </p:spPr>
+        <p:txBody>
+          <a:bodyPr wrap="square" anchor="t" lIns="0" rIns="0" tIns="0" bIns="0">
+            <a:spAutoFit/>
+          </a:bodyPr>
+          <a:lstStyle/>
+          <a:p>
+            <a:pPr algn="l">
+              <a:lnSpc>
+                <a:spcPct val="112000"/>
+              </a:lnSpc>
+              <a:spcAft>
+                <a:spcPts val="400"/>
+              </a:spcAft>
+            </a:pPr>
+            <a:r>
+              <a:rPr sz="1450" b="0" i="0">
+                <a:solidFill>
+                  <a:srgbClr val="20232A"/>
+                </a:solidFill>
+                <a:latin typeface="Calibri"/>
+              </a:rPr>
+              <a:t>With a top-10 rotation (3.76 ERA) already carrying the club, trading bats for arms is backwards. Convert the outfield surplus into what's thin:</a:t>
+            </a:r>
+          </a:p>
+        </p:txBody>
+      </p:sp>
+      <p:sp>
+        <p:nvSpPr>
+          <p:cNvPr id="5" name="Rounded Rectangle 4"/>
           <p:cNvSpPr/>
           <p:nvPr/>
         </p:nvSpPr>
         <p:spPr>
           <a:xfrm>
-            <a:off x="8183879" y="2221991"/>
-            <a:ext cx="128016" cy="128016"/>
-          </a:xfrm>
-          <a:prstGeom prst="ellipse">
-            <a:avLst/>
+            <a:off x="566928" y="2468880"/>
+            <a:ext cx="3502152" cy="2514600"/>
+          </a:xfrm>
+          <a:prstGeom prst="roundRect">
+            <a:avLst>
+              <a:gd name="adj" fmla="val 8000"/>
+            </a:avLst>
           </a:prstGeom>
           <a:solidFill>
-            <a:srgbClr val="BD3039"/>
+            <a:srgbClr val="FFFFFF"/>
           </a:solidFill>
-          <a:ln>
-            <a:noFill/>
+          <a:ln w="12700">
+            <a:solidFill>
+              <a:srgbClr val="D7DAE0"/>
+            </a:solidFill>
           </a:ln>
           <a:effectLst/>
         </p:spPr>
@@ -8253,71 +8677,20 @@
       </p:sp>
       <p:sp>
         <p:nvSpPr>
-          <p:cNvPr id="7" name="TextBox 6"/>
-          <p:cNvSpPr txBox="1"/>
-          <p:nvPr/>
-        </p:nvSpPr>
-        <p:spPr>
-          <a:xfrm>
-            <a:off x="8439911" y="2194560"/>
-            <a:ext cx="3566160" cy="457200"/>
-          </a:xfrm>
-          <a:prstGeom prst="rect">
-            <a:avLst/>
-          </a:prstGeom>
-          <a:noFill/>
-        </p:spPr>
-        <p:txBody>
-          <a:bodyPr wrap="square" anchor="t" lIns="0" rIns="0" tIns="0" bIns="0">
-            <a:spAutoFit/>
-          </a:bodyPr>
-          <a:lstStyle/>
-          <a:p>
-            <a:pPr algn="l">
-              <a:lnSpc>
-                <a:spcPct val="100000"/>
-              </a:lnSpc>
-              <a:spcAft>
-                <a:spcPts val="0"/>
-              </a:spcAft>
-            </a:pPr>
-            <a:r>
-              <a:rPr sz="1400" b="1" i="0">
-                <a:solidFill>
-                  <a:srgbClr val="0C2340"/>
-                </a:solidFill>
-                <a:latin typeface="Calibri"/>
-              </a:rPr>
-              <a:t>Phillies  </a:t>
-            </a:r>
-            <a:r>
-              <a:rPr sz="1200" b="0" i="0">
-                <a:solidFill>
-                  <a:srgbClr val="6B7280"/>
-                </a:solidFill>
-                <a:latin typeface="Calibri"/>
-              </a:rPr>
-              <a:t>contender, 88 OF wRC+</a:t>
-            </a:r>
-          </a:p>
-        </p:txBody>
-      </p:sp>
-      <p:sp>
-        <p:nvSpPr>
-          <p:cNvPr id="8" name="Oval 7"/>
+          <p:cNvPr id="6" name="Oval 5"/>
           <p:cNvSpPr/>
           <p:nvPr/>
         </p:nvSpPr>
         <p:spPr>
           <a:xfrm>
-            <a:off x="8183879" y="2788920"/>
-            <a:ext cx="128016" cy="128016"/>
+            <a:off x="841247" y="2724912"/>
+            <a:ext cx="384048" cy="384048"/>
           </a:xfrm>
           <a:prstGeom prst="ellipse">
             <a:avLst/>
           </a:prstGeom>
           <a:solidFill>
-            <a:srgbClr val="BD3039"/>
+            <a:srgbClr val="2E7D32"/>
           </a:solidFill>
           <a:ln>
             <a:noFill/>
@@ -8339,23 +8712,32 @@
           </a:fontRef>
         </p:style>
         <p:txBody>
-          <a:bodyPr rtlCol="0" anchor="ctr"/>
+          <a:bodyPr rtlCol="0" anchor="ctr" wrap="none"/>
           <a:lstStyle/>
           <a:p>
             <a:pPr algn="ctr"/>
-          </a:p>
-        </p:txBody>
-      </p:sp>
-      <p:sp>
-        <p:nvSpPr>
-          <p:cNvPr id="9" name="TextBox 8"/>
-          <p:cNvSpPr txBox="1"/>
-          <p:nvPr/>
-        </p:nvSpPr>
-        <p:spPr>
-          <a:xfrm>
-            <a:off x="8439911" y="2761488"/>
-            <a:ext cx="3566160" cy="457200"/>
+            <a:r>
+              <a:rPr sz="1600" b="1">
+                <a:solidFill>
+                  <a:srgbClr val="FFFFFF"/>
+                </a:solidFill>
+                <a:latin typeface="Cambria"/>
+              </a:rPr>
+              <a:t>1</a:t>
+            </a:r>
+          </a:p>
+        </p:txBody>
+      </p:sp>
+      <p:sp>
+        <p:nvSpPr>
+          <p:cNvPr id="7" name="TextBox 6"/>
+          <p:cNvSpPr txBox="1"/>
+          <p:nvPr/>
+        </p:nvSpPr>
+        <p:spPr>
+          <a:xfrm>
+            <a:off x="841247" y="3310128"/>
+            <a:ext cx="2999232" cy="411480"/>
           </a:xfrm>
           <a:prstGeom prst="rect">
             <a:avLst/>
@@ -8377,45 +8759,82 @@
               </a:spcAft>
             </a:pPr>
             <a:r>
-              <a:rPr sz="1400" b="1" i="0">
+              <a:rPr sz="1600" b="1" i="0">
                 <a:solidFill>
                   <a:srgbClr val="0C2340"/>
                 </a:solidFill>
-                <a:latin typeface="Calibri"/>
-              </a:rPr>
-              <a:t>Rays  </a:t>
-            </a:r>
-            <a:r>
-              <a:rPr sz="1200" b="0" i="0">
+                <a:latin typeface="Cambria"/>
+              </a:rPr>
+              <a:t>Controllable bats</a:t>
+            </a:r>
+          </a:p>
+        </p:txBody>
+      </p:sp>
+      <p:sp>
+        <p:nvSpPr>
+          <p:cNvPr id="8" name="TextBox 7"/>
+          <p:cNvSpPr txBox="1"/>
+          <p:nvPr/>
+        </p:nvSpPr>
+        <p:spPr>
+          <a:xfrm>
+            <a:off x="841247" y="3767328"/>
+            <a:ext cx="2999232" cy="1097280"/>
+          </a:xfrm>
+          <a:prstGeom prst="rect">
+            <a:avLst/>
+          </a:prstGeom>
+          <a:noFill/>
+        </p:spPr>
+        <p:txBody>
+          <a:bodyPr wrap="square" anchor="t" lIns="0" rIns="0" tIns="0" bIns="0">
+            <a:spAutoFit/>
+          </a:bodyPr>
+          <a:lstStyle/>
+          <a:p>
+            <a:pPr algn="l">
+              <a:lnSpc>
+                <a:spcPct val="110000"/>
+              </a:lnSpc>
+              <a:spcAft>
+                <a:spcPts val="400"/>
+              </a:spcAft>
+            </a:pPr>
+            <a:r>
+              <a:rPr sz="1280" b="0" i="0">
                 <a:solidFill>
                   <a:srgbClr val="6B7280"/>
                 </a:solidFill>
                 <a:latin typeface="Calibri"/>
               </a:rPr>
-              <a:t>.602, weak OF</a:t>
-            </a:r>
-          </a:p>
-        </p:txBody>
-      </p:sp>
-      <p:sp>
-        <p:nvSpPr>
-          <p:cNvPr id="10" name="Oval 9"/>
+              <a:t>Young, cost-controlled position players to fix an inconsistent lineup and lengthen it around the core.</a:t>
+            </a:r>
+          </a:p>
+        </p:txBody>
+      </p:sp>
+      <p:sp>
+        <p:nvSpPr>
+          <p:cNvPr id="9" name="Rounded Rectangle 8"/>
           <p:cNvSpPr/>
           <p:nvPr/>
         </p:nvSpPr>
         <p:spPr>
           <a:xfrm>
-            <a:off x="8183879" y="3355847"/>
-            <a:ext cx="128016" cy="128016"/>
-          </a:xfrm>
-          <a:prstGeom prst="ellipse">
-            <a:avLst/>
+            <a:off x="4352544" y="2468880"/>
+            <a:ext cx="3502152" cy="2514600"/>
+          </a:xfrm>
+          <a:prstGeom prst="roundRect">
+            <a:avLst>
+              <a:gd name="adj" fmla="val 8000"/>
+            </a:avLst>
           </a:prstGeom>
           <a:solidFill>
-            <a:srgbClr val="BD3039"/>
+            <a:srgbClr val="FFFFFF"/>
           </a:solidFill>
-          <a:ln>
-            <a:noFill/>
+          <a:ln w="12700">
+            <a:solidFill>
+              <a:srgbClr val="D7DAE0"/>
+            </a:solidFill>
           </a:ln>
           <a:effectLst/>
         </p:spPr>
@@ -8443,71 +8862,20 @@
       </p:sp>
       <p:sp>
         <p:nvSpPr>
-          <p:cNvPr id="11" name="TextBox 10"/>
-          <p:cNvSpPr txBox="1"/>
-          <p:nvPr/>
-        </p:nvSpPr>
-        <p:spPr>
-          <a:xfrm>
-            <a:off x="8439911" y="3328415"/>
-            <a:ext cx="3566160" cy="457200"/>
-          </a:xfrm>
-          <a:prstGeom prst="rect">
-            <a:avLst/>
-          </a:prstGeom>
-          <a:noFill/>
-        </p:spPr>
-        <p:txBody>
-          <a:bodyPr wrap="square" anchor="t" lIns="0" rIns="0" tIns="0" bIns="0">
-            <a:spAutoFit/>
-          </a:bodyPr>
-          <a:lstStyle/>
-          <a:p>
-            <a:pPr algn="l">
-              <a:lnSpc>
-                <a:spcPct val="100000"/>
-              </a:lnSpc>
-              <a:spcAft>
-                <a:spcPts val="0"/>
-              </a:spcAft>
-            </a:pPr>
-            <a:r>
-              <a:rPr sz="1400" b="1" i="0">
-                <a:solidFill>
-                  <a:srgbClr val="0C2340"/>
-                </a:solidFill>
-                <a:latin typeface="Calibri"/>
-              </a:rPr>
-              <a:t>Marlins  </a:t>
-            </a:r>
-            <a:r>
-              <a:rPr sz="1200" b="0" i="0">
-                <a:solidFill>
-                  <a:srgbClr val="6B7280"/>
-                </a:solidFill>
-                <a:latin typeface="Calibri"/>
-              </a:rPr>
-              <a:t>in the hunt, thin OF</a:t>
-            </a:r>
-          </a:p>
-        </p:txBody>
-      </p:sp>
-      <p:sp>
-        <p:nvSpPr>
-          <p:cNvPr id="12" name="Oval 11"/>
+          <p:cNvPr id="10" name="Oval 9"/>
           <p:cNvSpPr/>
           <p:nvPr/>
         </p:nvSpPr>
         <p:spPr>
           <a:xfrm>
-            <a:off x="8183879" y="3922776"/>
-            <a:ext cx="128016" cy="128016"/>
+            <a:off x="4626864" y="2724912"/>
+            <a:ext cx="384048" cy="384048"/>
           </a:xfrm>
           <a:prstGeom prst="ellipse">
             <a:avLst/>
           </a:prstGeom>
           <a:solidFill>
-            <a:srgbClr val="BD3039"/>
+            <a:srgbClr val="0C2340"/>
           </a:solidFill>
           <a:ln>
             <a:noFill/>
@@ -8529,6 +8897,147 @@
           </a:fontRef>
         </p:style>
         <p:txBody>
+          <a:bodyPr rtlCol="0" anchor="ctr" wrap="none"/>
+          <a:lstStyle/>
+          <a:p>
+            <a:pPr algn="ctr"/>
+            <a:r>
+              <a:rPr sz="1600" b="1">
+                <a:solidFill>
+                  <a:srgbClr val="FFFFFF"/>
+                </a:solidFill>
+                <a:latin typeface="Cambria"/>
+              </a:rPr>
+              <a:t>2</a:t>
+            </a:r>
+          </a:p>
+        </p:txBody>
+      </p:sp>
+      <p:sp>
+        <p:nvSpPr>
+          <p:cNvPr id="11" name="TextBox 10"/>
+          <p:cNvSpPr txBox="1"/>
+          <p:nvPr/>
+        </p:nvSpPr>
+        <p:spPr>
+          <a:xfrm>
+            <a:off x="4626864" y="3310128"/>
+            <a:ext cx="2999232" cy="411480"/>
+          </a:xfrm>
+          <a:prstGeom prst="rect">
+            <a:avLst/>
+          </a:prstGeom>
+          <a:noFill/>
+        </p:spPr>
+        <p:txBody>
+          <a:bodyPr wrap="square" anchor="t" lIns="0" rIns="0" tIns="0" bIns="0">
+            <a:spAutoFit/>
+          </a:bodyPr>
+          <a:lstStyle/>
+          <a:p>
+            <a:pPr algn="l">
+              <a:lnSpc>
+                <a:spcPct val="100000"/>
+              </a:lnSpc>
+              <a:spcAft>
+                <a:spcPts val="0"/>
+              </a:spcAft>
+            </a:pPr>
+            <a:r>
+              <a:rPr sz="1600" b="1" i="0">
+                <a:solidFill>
+                  <a:srgbClr val="0C2340"/>
+                </a:solidFill>
+                <a:latin typeface="Cambria"/>
+              </a:rPr>
+              <a:t>Best talent / upside</a:t>
+            </a:r>
+          </a:p>
+        </p:txBody>
+      </p:sp>
+      <p:sp>
+        <p:nvSpPr>
+          <p:cNvPr id="12" name="TextBox 11"/>
+          <p:cNvSpPr txBox="1"/>
+          <p:nvPr/>
+        </p:nvSpPr>
+        <p:spPr>
+          <a:xfrm>
+            <a:off x="4626864" y="3767328"/>
+            <a:ext cx="2999232" cy="1097280"/>
+          </a:xfrm>
+          <a:prstGeom prst="rect">
+            <a:avLst/>
+          </a:prstGeom>
+          <a:noFill/>
+        </p:spPr>
+        <p:txBody>
+          <a:bodyPr wrap="square" anchor="t" lIns="0" rIns="0" tIns="0" bIns="0">
+            <a:spAutoFit/>
+          </a:bodyPr>
+          <a:lstStyle/>
+          <a:p>
+            <a:pPr algn="l">
+              <a:lnSpc>
+                <a:spcPct val="110000"/>
+              </a:lnSpc>
+              <a:spcAft>
+                <a:spcPts val="400"/>
+              </a:spcAft>
+            </a:pPr>
+            <a:r>
+              <a:rPr sz="1280" b="0" i="0">
+                <a:solidFill>
+                  <a:srgbClr val="6B7280"/>
+                </a:solidFill>
+                <a:latin typeface="Calibri"/>
+              </a:rPr>
+              <a:t>In a retool you take the best player, not the positional patch — prospects and MLB-ready youth over rentals.</a:t>
+            </a:r>
+          </a:p>
+        </p:txBody>
+      </p:sp>
+      <p:sp>
+        <p:nvSpPr>
+          <p:cNvPr id="13" name="Rounded Rectangle 12"/>
+          <p:cNvSpPr/>
+          <p:nvPr/>
+        </p:nvSpPr>
+        <p:spPr>
+          <a:xfrm>
+            <a:off x="8138159" y="2468880"/>
+            <a:ext cx="3502152" cy="2514600"/>
+          </a:xfrm>
+          <a:prstGeom prst="roundRect">
+            <a:avLst>
+              <a:gd name="adj" fmla="val 8000"/>
+            </a:avLst>
+          </a:prstGeom>
+          <a:solidFill>
+            <a:srgbClr val="FFFFFF"/>
+          </a:solidFill>
+          <a:ln w="12700">
+            <a:solidFill>
+              <a:srgbClr val="D7DAE0"/>
+            </a:solidFill>
+          </a:ln>
+          <a:effectLst/>
+        </p:spPr>
+        <p:style>
+          <a:lnRef idx="1">
+            <a:schemeClr val="accent1"/>
+          </a:lnRef>
+          <a:fillRef idx="3">
+            <a:schemeClr val="accent1"/>
+          </a:fillRef>
+          <a:effectRef idx="2">
+            <a:schemeClr val="accent1"/>
+          </a:effectRef>
+          <a:fontRef idx="minor">
+            <a:schemeClr val="lt1"/>
+          </a:fontRef>
+        </p:style>
+        <p:txBody>
           <a:bodyPr rtlCol="0" anchor="ctr"/>
           <a:lstStyle/>
           <a:p>
@@ -8538,14 +9047,67 @@
       </p:sp>
       <p:sp>
         <p:nvSpPr>
-          <p:cNvPr id="13" name="TextBox 12"/>
-          <p:cNvSpPr txBox="1"/>
-          <p:nvPr/>
-        </p:nvSpPr>
-        <p:spPr>
-          <a:xfrm>
-            <a:off x="8439911" y="3895344"/>
-            <a:ext cx="3566160" cy="457200"/>
+          <p:cNvPr id="14" name="Oval 13"/>
+          <p:cNvSpPr/>
+          <p:nvPr/>
+        </p:nvSpPr>
+        <p:spPr>
+          <a:xfrm>
+            <a:off x="8412480" y="2724912"/>
+            <a:ext cx="384048" cy="384048"/>
+          </a:xfrm>
+          <a:prstGeom prst="ellipse">
+            <a:avLst/>
+          </a:prstGeom>
+          <a:solidFill>
+            <a:srgbClr val="B7892F"/>
+          </a:solidFill>
+          <a:ln>
+            <a:noFill/>
+          </a:ln>
+          <a:effectLst/>
+        </p:spPr>
+        <p:style>
+          <a:lnRef idx="1">
+            <a:schemeClr val="accent1"/>
+          </a:lnRef>
+          <a:fillRef idx="3">
+            <a:schemeClr val="accent1"/>
+          </a:fillRef>
+          <a:effectRef idx="2">
+            <a:schemeClr val="accent1"/>
+          </a:effectRef>
+          <a:fontRef idx="minor">
+            <a:schemeClr val="lt1"/>
+          </a:fontRef>
+        </p:style>
+        <p:txBody>
+          <a:bodyPr rtlCol="0" anchor="ctr" wrap="none"/>
+          <a:lstStyle/>
+          <a:p>
+            <a:pPr algn="ctr"/>
+            <a:r>
+              <a:rPr sz="1600" b="1">
+                <a:solidFill>
+                  <a:srgbClr val="FFFFFF"/>
+                </a:solidFill>
+                <a:latin typeface="Cambria"/>
+              </a:rPr>
+              <a:t>3</a:t>
+            </a:r>
+          </a:p>
+        </p:txBody>
+      </p:sp>
+      <p:sp>
+        <p:nvSpPr>
+          <p:cNvPr id="15" name="TextBox 14"/>
+          <p:cNvSpPr txBox="1"/>
+          <p:nvPr/>
+        </p:nvSpPr>
+        <p:spPr>
+          <a:xfrm>
+            <a:off x="8412480" y="3310128"/>
+            <a:ext cx="2999232" cy="411480"/>
           </a:xfrm>
           <a:prstGeom prst="rect">
             <a:avLst/>
@@ -8567,89 +9129,113 @@
               </a:spcAft>
             </a:pPr>
             <a:r>
-              <a:rPr sz="1400" b="1" i="0">
+              <a:rPr sz="1600" b="1" i="0">
                 <a:solidFill>
                   <a:srgbClr val="0C2340"/>
                 </a:solidFill>
-                <a:latin typeface="Calibri"/>
-              </a:rPr>
-              <a:t>Guardians  </a:t>
-            </a:r>
-            <a:r>
-              <a:rPr sz="1200" b="0" i="0">
+                <a:latin typeface="Cambria"/>
+              </a:rPr>
+              <a:t>Salary relief</a:t>
+            </a:r>
+          </a:p>
+        </p:txBody>
+      </p:sp>
+      <p:sp>
+        <p:nvSpPr>
+          <p:cNvPr id="16" name="TextBox 15"/>
+          <p:cNvSpPr txBox="1"/>
+          <p:nvPr/>
+        </p:nvSpPr>
+        <p:spPr>
+          <a:xfrm>
+            <a:off x="8412480" y="3767328"/>
+            <a:ext cx="2999232" cy="1097280"/>
+          </a:xfrm>
+          <a:prstGeom prst="rect">
+            <a:avLst/>
+          </a:prstGeom>
+          <a:noFill/>
+        </p:spPr>
+        <p:txBody>
+          <a:bodyPr wrap="square" anchor="t" lIns="0" rIns="0" tIns="0" bIns="0">
+            <a:spAutoFit/>
+          </a:bodyPr>
+          <a:lstStyle/>
+          <a:p>
+            <a:pPr algn="l">
+              <a:lnSpc>
+                <a:spcPct val="110000"/>
+              </a:lnSpc>
+              <a:spcAft>
+                <a:spcPts val="400"/>
+              </a:spcAft>
+            </a:pPr>
+            <a:r>
+              <a:rPr sz="1280" b="0" i="0">
                 <a:solidFill>
                   <a:srgbClr val="6B7280"/>
                 </a:solidFill>
                 <a:latin typeface="Calibri"/>
               </a:rPr>
-              <a:t>contender, OF need</a:t>
-            </a:r>
-          </a:p>
-        </p:txBody>
-      </p:sp>
-      <p:sp>
-        <p:nvSpPr>
-          <p:cNvPr id="14" name="TextBox 13"/>
-          <p:cNvSpPr txBox="1"/>
-          <p:nvPr/>
-        </p:nvSpPr>
-        <p:spPr>
-          <a:xfrm>
-            <a:off x="8183879" y="4709160"/>
-            <a:ext cx="3657600" cy="1005840"/>
-          </a:xfrm>
-          <a:prstGeom prst="rect">
-            <a:avLst/>
-          </a:prstGeom>
-          <a:noFill/>
-        </p:spPr>
-        <p:txBody>
-          <a:bodyPr wrap="square" anchor="t" lIns="0" rIns="0" tIns="0" bIns="0">
-            <a:spAutoFit/>
-          </a:bodyPr>
-          <a:lstStyle/>
-          <a:p>
-            <a:pPr algn="l">
-              <a:lnSpc>
-                <a:spcPct val="112000"/>
-              </a:lnSpc>
-              <a:spcAft>
-                <a:spcPts val="400"/>
-              </a:spcAft>
-            </a:pPr>
-            <a:r>
-              <a:rPr sz="1250" b="0" i="0">
-                <a:solidFill>
-                  <a:srgbClr val="20232A"/>
-                </a:solidFill>
-                <a:latin typeface="Calibri"/>
-              </a:rPr>
-              <a:t>Trade a redundant bat to a team that needs one — and take back the </a:t>
-            </a:r>
-            <a:r>
-              <a:rPr sz="1250" b="1" i="0">
-                <a:solidFill>
-                  <a:srgbClr val="2E7D32"/>
-                </a:solidFill>
-                <a:latin typeface="Calibri"/>
-              </a:rPr>
-              <a:t>hitting/youth</a:t>
-            </a:r>
-            <a:r>
-              <a:rPr sz="1250" b="0" i="0">
-                <a:solidFill>
-                  <a:srgbClr val="20232A"/>
-                </a:solidFill>
-                <a:latin typeface="Calibri"/>
-              </a:rPr>
-              <a:t> Boston is short on.</a:t>
-            </a:r>
-          </a:p>
-        </p:txBody>
-      </p:sp>
-      <p:sp>
-        <p:nvSpPr>
-          <p:cNvPr id="15" name="TextBox 14"/>
+              <a:t>Attach Yoshida money where possible; free payroll for the 2027 window.</a:t>
+            </a:r>
+          </a:p>
+        </p:txBody>
+      </p:sp>
+      <p:sp>
+        <p:nvSpPr>
+          <p:cNvPr id="17" name="TextBox 16"/>
+          <p:cNvSpPr txBox="1"/>
+          <p:nvPr/>
+        </p:nvSpPr>
+        <p:spPr>
+          <a:xfrm>
+            <a:off x="566928" y="5257800"/>
+            <a:ext cx="11064240" cy="457200"/>
+          </a:xfrm>
+          <a:prstGeom prst="rect">
+            <a:avLst/>
+          </a:prstGeom>
+          <a:noFill/>
+        </p:spPr>
+        <p:txBody>
+          <a:bodyPr wrap="square" anchor="t" lIns="0" rIns="0" tIns="0" bIns="0">
+            <a:spAutoFit/>
+          </a:bodyPr>
+          <a:lstStyle/>
+          <a:p>
+            <a:pPr algn="l">
+              <a:lnSpc>
+                <a:spcPct val="100000"/>
+              </a:lnSpc>
+              <a:spcAft>
+                <a:spcPts val="0"/>
+              </a:spcAft>
+            </a:pPr>
+            <a:r>
+              <a:rPr sz="1400" b="1" i="1">
+                <a:solidFill>
+                  <a:srgbClr val="0C2340"/>
+                </a:solidFill>
+                <a:latin typeface="Calibri"/>
+              </a:rPr>
+              <a:t>Keep the arms. Cash the outfield. </a:t>
+            </a:r>
+            <a:r>
+              <a:rPr sz="1400" b="0" i="1">
+                <a:solidFill>
+                  <a:srgbClr val="6B7280"/>
+                </a:solidFill>
+                <a:latin typeface="Calibri"/>
+              </a:rPr>
+              <a:t>Build the 2027 lineup, don't rent the 2026 one.</a:t>
+            </a:r>
+          </a:p>
+        </p:txBody>
+      </p:sp>
+      <p:sp>
+        <p:nvSpPr>
+          <p:cNvPr id="18" name="TextBox 17"/>
           <p:cNvSpPr txBox="1"/>
           <p:nvPr/>
         </p:nvSpPr>
@@ -8761,7 +9347,7 @@
                 </a:solidFill>
                 <a:latin typeface="Calibri"/>
               </a:rPr>
-              <a:t>THE SEQUENCE</a:t>
+              <a:t>THE MARKET</a:t>
             </a:r>
           </a:p>
         </p:txBody>
@@ -8803,21 +9389,87 @@
                 </a:solidFill>
                 <a:latin typeface="Cambria"/>
               </a:rPr>
-              <a:t>Solve it this winter, from a position of strength</a:t>
-            </a:r>
-          </a:p>
-        </p:txBody>
-      </p:sp>
-      <p:sp>
-        <p:nvSpPr>
-          <p:cNvPr id="4" name="Oval 3"/>
+              <a:t>Who pays: contenders with a hole in the outfield</a:t>
+            </a:r>
+          </a:p>
+        </p:txBody>
+      </p:sp>
+      <p:pic>
+        <p:nvPicPr>
+          <p:cNvPr id="4" name="Picture 3" descr="08_trade_fit_targets.png"/>
+          <p:cNvPicPr>
+            <a:picLocks noChangeAspect="1"/>
+          </p:cNvPicPr>
+          <p:nvPr/>
+        </p:nvPicPr>
+        <p:blipFill>
+          <a:blip r:embed="rId2"/>
+          <a:stretch>
+            <a:fillRect/>
+          </a:stretch>
+        </p:blipFill>
+        <p:spPr>
+          <a:xfrm>
+            <a:off x="757237" y="1463040"/>
+            <a:ext cx="6715125" cy="4297680"/>
+          </a:xfrm>
+          <a:prstGeom prst="rect">
+            <a:avLst/>
+          </a:prstGeom>
+        </p:spPr>
+      </p:pic>
+      <p:sp>
+        <p:nvSpPr>
+          <p:cNvPr id="5" name="TextBox 4"/>
+          <p:cNvSpPr txBox="1"/>
+          <p:nvPr/>
+        </p:nvSpPr>
+        <p:spPr>
+          <a:xfrm>
+            <a:off x="8183879" y="1691640"/>
+            <a:ext cx="3657600" cy="457200"/>
+          </a:xfrm>
+          <a:prstGeom prst="rect">
+            <a:avLst/>
+          </a:prstGeom>
+          <a:noFill/>
+        </p:spPr>
+        <p:txBody>
+          <a:bodyPr wrap="square" anchor="t" lIns="0" rIns="0" tIns="0" bIns="0">
+            <a:spAutoFit/>
+          </a:bodyPr>
+          <a:lstStyle/>
+          <a:p>
+            <a:pPr algn="l">
+              <a:lnSpc>
+                <a:spcPct val="100000"/>
+              </a:lnSpc>
+              <a:spcAft>
+                <a:spcPts val="0"/>
+              </a:spcAft>
+            </a:pPr>
+            <a:r>
+              <a:rPr sz="1500" b="1" i="0">
+                <a:solidFill>
+                  <a:srgbClr val="0C2340"/>
+                </a:solidFill>
+                <a:latin typeface="Cambria"/>
+              </a:rPr>
+              <a:t>Best-fit buyers</a:t>
+            </a:r>
+          </a:p>
+        </p:txBody>
+      </p:sp>
+      <p:sp>
+        <p:nvSpPr>
+          <p:cNvPr id="6" name="Oval 5"/>
           <p:cNvSpPr/>
           <p:nvPr/>
         </p:nvSpPr>
         <p:spPr>
           <a:xfrm>
-            <a:off x="640080" y="1801368"/>
-            <a:ext cx="457200" cy="457200"/>
+            <a:off x="8183879" y="2221991"/>
+            <a:ext cx="128016" cy="128016"/>
           </a:xfrm>
           <a:prstGeom prst="ellipse">
             <a:avLst/>
@@ -8845,93 +9497,74 @@
           </a:fontRef>
         </p:style>
         <p:txBody>
-          <a:bodyPr rtlCol="0" anchor="ctr" wrap="none"/>
+          <a:bodyPr rtlCol="0" anchor="ctr"/>
           <a:lstStyle/>
           <a:p>
             <a:pPr algn="ctr"/>
-            <a:r>
-              <a:rPr sz="1800" b="1">
-                <a:solidFill>
-                  <a:srgbClr val="FFFFFF"/>
-                </a:solidFill>
-                <a:latin typeface="Cambria"/>
-              </a:rPr>
-              <a:t>1</a:t>
-            </a:r>
-          </a:p>
-        </p:txBody>
-      </p:sp>
-      <p:sp>
-        <p:nvSpPr>
-          <p:cNvPr id="5" name="TextBox 4"/>
-          <p:cNvSpPr txBox="1"/>
-          <p:nvPr/>
-        </p:nvSpPr>
-        <p:spPr>
-          <a:xfrm>
-            <a:off x="1280160" y="1783080"/>
-            <a:ext cx="6126480" cy="1005840"/>
-          </a:xfrm>
-          <a:prstGeom prst="rect">
-            <a:avLst/>
-          </a:prstGeom>
-          <a:noFill/>
-        </p:spPr>
-        <p:txBody>
-          <a:bodyPr wrap="square" anchor="t" lIns="0" rIns="0" tIns="0" bIns="0">
-            <a:spAutoFit/>
-          </a:bodyPr>
-          <a:lstStyle/>
-          <a:p>
-            <a:pPr algn="l">
-              <a:lnSpc>
-                <a:spcPct val="108000"/>
-              </a:lnSpc>
-              <a:spcAft>
-                <a:spcPts val="200"/>
-              </a:spcAft>
-            </a:pPr>
-            <a:r>
-              <a:rPr sz="1700" b="1" i="0">
+          </a:p>
+        </p:txBody>
+      </p:sp>
+      <p:sp>
+        <p:nvSpPr>
+          <p:cNvPr id="7" name="TextBox 6"/>
+          <p:cNvSpPr txBox="1"/>
+          <p:nvPr/>
+        </p:nvSpPr>
+        <p:spPr>
+          <a:xfrm>
+            <a:off x="8439911" y="2194560"/>
+            <a:ext cx="3566160" cy="457200"/>
+          </a:xfrm>
+          <a:prstGeom prst="rect">
+            <a:avLst/>
+          </a:prstGeom>
+          <a:noFill/>
+        </p:spPr>
+        <p:txBody>
+          <a:bodyPr wrap="square" anchor="t" lIns="0" rIns="0" tIns="0" bIns="0">
+            <a:spAutoFit/>
+          </a:bodyPr>
+          <a:lstStyle/>
+          <a:p>
+            <a:pPr algn="l">
+              <a:lnSpc>
+                <a:spcPct val="100000"/>
+              </a:lnSpc>
+              <a:spcAft>
+                <a:spcPts val="0"/>
+              </a:spcAft>
+            </a:pPr>
+            <a:r>
+              <a:rPr sz="1400" b="1" i="0">
                 <a:solidFill>
                   <a:srgbClr val="0C2340"/>
                 </a:solidFill>
-                <a:latin typeface="Cambria"/>
-              </a:rPr>
-              <a:t>Hold through 2026</a:t>
-            </a:r>
-          </a:p>
-          <a:p>
-            <a:pPr algn="l">
-              <a:lnSpc>
-                <a:spcPct val="108000"/>
-              </a:lnSpc>
-              <a:spcAft>
-                <a:spcPts val="200"/>
-              </a:spcAft>
-            </a:pPr>
-            <a:r>
-              <a:rPr sz="1350" b="0" i="0">
+                <a:latin typeface="Calibri"/>
+              </a:rPr>
+              <a:t>Phillies  </a:t>
+            </a:r>
+            <a:r>
+              <a:rPr sz="1200" b="0" i="0">
                 <a:solidFill>
                   <a:srgbClr val="6B7280"/>
                 </a:solidFill>
                 <a:latin typeface="Calibri"/>
               </a:rPr>
-              <a:t>No contention urgency and Anthony hurt — keep Duran's bat, let his value rebound off an unlucky first half.</a:t>
-            </a:r>
-          </a:p>
-        </p:txBody>
-      </p:sp>
-      <p:sp>
-        <p:nvSpPr>
-          <p:cNvPr id="6" name="Oval 5"/>
+              <a:t>contender, 88 OF wRC+</a:t>
+            </a:r>
+          </a:p>
+        </p:txBody>
+      </p:sp>
+      <p:sp>
+        <p:nvSpPr>
+          <p:cNvPr id="8" name="Oval 7"/>
           <p:cNvSpPr/>
           <p:nvPr/>
         </p:nvSpPr>
         <p:spPr>
           <a:xfrm>
-            <a:off x="640080" y="2971800"/>
-            <a:ext cx="457200" cy="457200"/>
+            <a:off x="8183879" y="2788920"/>
+            <a:ext cx="128016" cy="128016"/>
           </a:xfrm>
           <a:prstGeom prst="ellipse">
             <a:avLst/>
@@ -8959,93 +9592,74 @@
           </a:fontRef>
         </p:style>
         <p:txBody>
-          <a:bodyPr rtlCol="0" anchor="ctr" wrap="none"/>
+          <a:bodyPr rtlCol="0" anchor="ctr"/>
           <a:lstStyle/>
           <a:p>
             <a:pPr algn="ctr"/>
-            <a:r>
-              <a:rPr sz="1800" b="1">
-                <a:solidFill>
-                  <a:srgbClr val="FFFFFF"/>
-                </a:solidFill>
-                <a:latin typeface="Cambria"/>
-              </a:rPr>
-              <a:t>2</a:t>
-            </a:r>
-          </a:p>
-        </p:txBody>
-      </p:sp>
-      <p:sp>
-        <p:nvSpPr>
-          <p:cNvPr id="7" name="TextBox 6"/>
-          <p:cNvSpPr txBox="1"/>
-          <p:nvPr/>
-        </p:nvSpPr>
-        <p:spPr>
-          <a:xfrm>
-            <a:off x="1280160" y="2953512"/>
-            <a:ext cx="6126480" cy="1005840"/>
-          </a:xfrm>
-          <a:prstGeom prst="rect">
-            <a:avLst/>
-          </a:prstGeom>
-          <a:noFill/>
-        </p:spPr>
-        <p:txBody>
-          <a:bodyPr wrap="square" anchor="t" lIns="0" rIns="0" tIns="0" bIns="0">
-            <a:spAutoFit/>
-          </a:bodyPr>
-          <a:lstStyle/>
-          <a:p>
-            <a:pPr algn="l">
-              <a:lnSpc>
-                <a:spcPct val="108000"/>
-              </a:lnSpc>
-              <a:spcAft>
-                <a:spcPts val="200"/>
-              </a:spcAft>
-            </a:pPr>
-            <a:r>
-              <a:rPr sz="1700" b="1" i="0">
+          </a:p>
+        </p:txBody>
+      </p:sp>
+      <p:sp>
+        <p:nvSpPr>
+          <p:cNvPr id="9" name="TextBox 8"/>
+          <p:cNvSpPr txBox="1"/>
+          <p:nvPr/>
+        </p:nvSpPr>
+        <p:spPr>
+          <a:xfrm>
+            <a:off x="8439911" y="2761488"/>
+            <a:ext cx="3566160" cy="457200"/>
+          </a:xfrm>
+          <a:prstGeom prst="rect">
+            <a:avLst/>
+          </a:prstGeom>
+          <a:noFill/>
+        </p:spPr>
+        <p:txBody>
+          <a:bodyPr wrap="square" anchor="t" lIns="0" rIns="0" tIns="0" bIns="0">
+            <a:spAutoFit/>
+          </a:bodyPr>
+          <a:lstStyle/>
+          <a:p>
+            <a:pPr algn="l">
+              <a:lnSpc>
+                <a:spcPct val="100000"/>
+              </a:lnSpc>
+              <a:spcAft>
+                <a:spcPts val="0"/>
+              </a:spcAft>
+            </a:pPr>
+            <a:r>
+              <a:rPr sz="1400" b="1" i="0">
                 <a:solidFill>
                   <a:srgbClr val="0C2340"/>
                 </a:solidFill>
-                <a:latin typeface="Cambria"/>
-              </a:rPr>
-              <a:t>Deal Duran in the offseason</a:t>
-            </a:r>
-          </a:p>
-          <a:p>
-            <a:pPr algn="l">
-              <a:lnSpc>
-                <a:spcPct val="108000"/>
-              </a:lnSpc>
-              <a:spcAft>
-                <a:spcPts val="200"/>
-              </a:spcAft>
-            </a:pPr>
-            <a:r>
-              <a:rPr sz="1350" b="0" i="0">
+                <a:latin typeface="Calibri"/>
+              </a:rPr>
+              <a:t>Rays  </a:t>
+            </a:r>
+            <a:r>
+              <a:rPr sz="1200" b="0" i="0">
                 <a:solidFill>
                   <a:srgbClr val="6B7280"/>
                 </a:solidFill>
                 <a:latin typeface="Calibri"/>
               </a:rPr>
-              <a:t>Anthony's healthy (jam returns), value restored. Trade him — plus Yoshida money — for controllable bats, not arms.</a:t>
-            </a:r>
-          </a:p>
-        </p:txBody>
-      </p:sp>
-      <p:sp>
-        <p:nvSpPr>
-          <p:cNvPr id="8" name="Oval 7"/>
+              <a:t>.602, weak OF</a:t>
+            </a:r>
+          </a:p>
+        </p:txBody>
+      </p:sp>
+      <p:sp>
+        <p:nvSpPr>
+          <p:cNvPr id="10" name="Oval 9"/>
           <p:cNvSpPr/>
           <p:nvPr/>
         </p:nvSpPr>
         <p:spPr>
           <a:xfrm>
-            <a:off x="640080" y="4142231"/>
-            <a:ext cx="457200" cy="457200"/>
+            <a:off x="8183879" y="3355847"/>
+            <a:ext cx="128016" cy="128016"/>
           </a:xfrm>
           <a:prstGeom prst="ellipse">
             <a:avLst/>
@@ -9073,101 +9687,80 @@
           </a:fontRef>
         </p:style>
         <p:txBody>
-          <a:bodyPr rtlCol="0" anchor="ctr" wrap="none"/>
+          <a:bodyPr rtlCol="0" anchor="ctr"/>
           <a:lstStyle/>
           <a:p>
             <a:pPr algn="ctr"/>
-            <a:r>
-              <a:rPr sz="1800" b="1">
-                <a:solidFill>
-                  <a:srgbClr val="FFFFFF"/>
-                </a:solidFill>
-                <a:latin typeface="Cambria"/>
-              </a:rPr>
-              <a:t>3</a:t>
-            </a:r>
-          </a:p>
-        </p:txBody>
-      </p:sp>
-      <p:sp>
-        <p:nvSpPr>
-          <p:cNvPr id="9" name="TextBox 8"/>
-          <p:cNvSpPr txBox="1"/>
-          <p:nvPr/>
-        </p:nvSpPr>
-        <p:spPr>
-          <a:xfrm>
-            <a:off x="1280160" y="4123944"/>
-            <a:ext cx="6126480" cy="1005840"/>
-          </a:xfrm>
-          <a:prstGeom prst="rect">
-            <a:avLst/>
-          </a:prstGeom>
-          <a:noFill/>
-        </p:spPr>
-        <p:txBody>
-          <a:bodyPr wrap="square" anchor="t" lIns="0" rIns="0" tIns="0" bIns="0">
-            <a:spAutoFit/>
-          </a:bodyPr>
-          <a:lstStyle/>
-          <a:p>
-            <a:pPr algn="l">
-              <a:lnSpc>
-                <a:spcPct val="108000"/>
-              </a:lnSpc>
-              <a:spcAft>
-                <a:spcPts val="200"/>
-              </a:spcAft>
-            </a:pPr>
-            <a:r>
-              <a:rPr sz="1700" b="1" i="0">
+          </a:p>
+        </p:txBody>
+      </p:sp>
+      <p:sp>
+        <p:nvSpPr>
+          <p:cNvPr id="11" name="TextBox 10"/>
+          <p:cNvSpPr txBox="1"/>
+          <p:nvPr/>
+        </p:nvSpPr>
+        <p:spPr>
+          <a:xfrm>
+            <a:off x="8439911" y="3328415"/>
+            <a:ext cx="3566160" cy="457200"/>
+          </a:xfrm>
+          <a:prstGeom prst="rect">
+            <a:avLst/>
+          </a:prstGeom>
+          <a:noFill/>
+        </p:spPr>
+        <p:txBody>
+          <a:bodyPr wrap="square" anchor="t" lIns="0" rIns="0" tIns="0" bIns="0">
+            <a:spAutoFit/>
+          </a:bodyPr>
+          <a:lstStyle/>
+          <a:p>
+            <a:pPr algn="l">
+              <a:lnSpc>
+                <a:spcPct val="100000"/>
+              </a:lnSpc>
+              <a:spcAft>
+                <a:spcPts val="0"/>
+              </a:spcAft>
+            </a:pPr>
+            <a:r>
+              <a:rPr sz="1400" b="1" i="0">
                 <a:solidFill>
                   <a:srgbClr val="0C2340"/>
                 </a:solidFill>
-                <a:latin typeface="Cambria"/>
-              </a:rPr>
-              <a:t>Run it back in 2027</a:t>
-            </a:r>
-          </a:p>
-          <a:p>
-            <a:pPr algn="l">
-              <a:lnSpc>
-                <a:spcPct val="108000"/>
-              </a:lnSpc>
-              <a:spcAft>
-                <a:spcPts val="200"/>
-              </a:spcAft>
-            </a:pPr>
-            <a:r>
-              <a:rPr sz="1350" b="0" i="0">
+                <a:latin typeface="Calibri"/>
+              </a:rPr>
+              <a:t>Marlins  </a:t>
+            </a:r>
+            <a:r>
+              <a:rPr sz="1200" b="0" i="0">
                 <a:solidFill>
                   <a:srgbClr val="6B7280"/>
                 </a:solidFill>
                 <a:latin typeface="Calibri"/>
               </a:rPr>
-              <a:t>OF = Anthony / Rafaela / Abreu; strong rotation intact; DH opens after 2027. A cheaper, younger, more balanced roster.</a:t>
-            </a:r>
-          </a:p>
-        </p:txBody>
-      </p:sp>
-      <p:sp>
-        <p:nvSpPr>
-          <p:cNvPr id="10" name="Rounded Rectangle 9"/>
+              <a:t>in the hunt, thin OF</a:t>
+            </a:r>
+          </a:p>
+        </p:txBody>
+      </p:sp>
+      <p:sp>
+        <p:nvSpPr>
+          <p:cNvPr id="12" name="Oval 11"/>
           <p:cNvSpPr/>
           <p:nvPr/>
         </p:nvSpPr>
         <p:spPr>
           <a:xfrm>
-            <a:off x="7818120" y="1783080"/>
-            <a:ext cx="3794760" cy="3337560"/>
-          </a:xfrm>
-          <a:prstGeom prst="roundRect">
-            <a:avLst>
-              <a:gd name="adj" fmla="val 8000"/>
-            </a:avLst>
+            <a:off x="8183879" y="3922776"/>
+            <a:ext cx="128016" cy="128016"/>
+          </a:xfrm>
+          <a:prstGeom prst="ellipse">
+            <a:avLst/>
           </a:prstGeom>
           <a:solidFill>
-            <a:srgbClr val="0C2340"/>
+            <a:srgbClr val="BD3039"/>
           </a:solidFill>
           <a:ln>
             <a:noFill/>
@@ -9198,14 +9791,14 @@
       </p:sp>
       <p:sp>
         <p:nvSpPr>
-          <p:cNvPr id="11" name="TextBox 10"/>
-          <p:cNvSpPr txBox="1"/>
-          <p:nvPr/>
-        </p:nvSpPr>
-        <p:spPr>
-          <a:xfrm>
-            <a:off x="8092440" y="2011680"/>
-            <a:ext cx="3291840" cy="365760"/>
+          <p:cNvPr id="13" name="TextBox 12"/>
+          <p:cNvSpPr txBox="1"/>
+          <p:nvPr/>
+        </p:nvSpPr>
+        <p:spPr>
+          <a:xfrm>
+            <a:off x="8439911" y="3895344"/>
+            <a:ext cx="3566160" cy="457200"/>
           </a:xfrm>
           <a:prstGeom prst="rect">
             <a:avLst/>
@@ -9227,196 +9820,82 @@
               </a:spcAft>
             </a:pPr>
             <a:r>
+              <a:rPr sz="1400" b="1" i="0">
+                <a:solidFill>
+                  <a:srgbClr val="0C2340"/>
+                </a:solidFill>
+                <a:latin typeface="Calibri"/>
+              </a:rPr>
+              <a:t>Guardians  </a:t>
+            </a:r>
+            <a:r>
+              <a:rPr sz="1200" b="0" i="0">
+                <a:solidFill>
+                  <a:srgbClr val="6B7280"/>
+                </a:solidFill>
+                <a:latin typeface="Calibri"/>
+              </a:rPr>
+              <a:t>contender, OF need</a:t>
+            </a:r>
+          </a:p>
+        </p:txBody>
+      </p:sp>
+      <p:sp>
+        <p:nvSpPr>
+          <p:cNvPr id="14" name="TextBox 13"/>
+          <p:cNvSpPr txBox="1"/>
+          <p:nvPr/>
+        </p:nvSpPr>
+        <p:spPr>
+          <a:xfrm>
+            <a:off x="8183879" y="4709160"/>
+            <a:ext cx="3657600" cy="1005840"/>
+          </a:xfrm>
+          <a:prstGeom prst="rect">
+            <a:avLst/>
+          </a:prstGeom>
+          <a:noFill/>
+        </p:spPr>
+        <p:txBody>
+          <a:bodyPr wrap="square" anchor="t" lIns="0" rIns="0" tIns="0" bIns="0">
+            <a:spAutoFit/>
+          </a:bodyPr>
+          <a:lstStyle/>
+          <a:p>
+            <a:pPr algn="l">
+              <a:lnSpc>
+                <a:spcPct val="112000"/>
+              </a:lnSpc>
+              <a:spcAft>
+                <a:spcPts val="400"/>
+              </a:spcAft>
+            </a:pPr>
+            <a:r>
+              <a:rPr sz="1250" b="0" i="0">
+                <a:solidFill>
+                  <a:srgbClr val="20232A"/>
+                </a:solidFill>
+                <a:latin typeface="Calibri"/>
+              </a:rPr>
+              <a:t>Trade a redundant bat to a team that needs one — and take back the </a:t>
+            </a:r>
+            <a:r>
               <a:rPr sz="1250" b="1" i="0">
                 <a:solidFill>
-                  <a:srgbClr val="C9D2E3"/>
-                </a:solidFill>
-                <a:latin typeface="Calibri"/>
-              </a:rPr>
-              <a:t>THE RETURN</a:t>
-            </a:r>
-          </a:p>
-        </p:txBody>
-      </p:sp>
-      <p:sp>
-        <p:nvSpPr>
-          <p:cNvPr id="12" name="TextBox 11"/>
-          <p:cNvSpPr txBox="1"/>
-          <p:nvPr/>
-        </p:nvSpPr>
-        <p:spPr>
-          <a:xfrm>
-            <a:off x="8092440" y="2487168"/>
-            <a:ext cx="3291840" cy="914400"/>
-          </a:xfrm>
-          <a:prstGeom prst="rect">
-            <a:avLst/>
-          </a:prstGeom>
-          <a:noFill/>
-        </p:spPr>
-        <p:txBody>
-          <a:bodyPr wrap="square" anchor="t" lIns="0" rIns="0" tIns="0" bIns="0">
-            <a:spAutoFit/>
-          </a:bodyPr>
-          <a:lstStyle/>
-          <a:p>
-            <a:pPr algn="l">
-              <a:lnSpc>
-                <a:spcPct val="105000"/>
-              </a:lnSpc>
-              <a:spcAft>
-                <a:spcPts val="200"/>
-              </a:spcAft>
-            </a:pPr>
-            <a:r>
-              <a:rPr sz="1300" b="1" i="0">
-                <a:solidFill>
-                  <a:srgbClr val="F0B8BC"/>
-                </a:solidFill>
-                <a:latin typeface="Calibri"/>
-              </a:rPr>
-              <a:t>Sell now (nadir)</a:t>
-            </a:r>
-          </a:p>
-          <a:p>
-            <a:pPr algn="l">
-              <a:lnSpc>
-                <a:spcPct val="105000"/>
-              </a:lnSpc>
-              <a:spcAft>
-                <a:spcPts val="200"/>
-              </a:spcAft>
-            </a:pPr>
-            <a:r>
-              <a:rPr sz="1400" b="0" i="0">
-                <a:solidFill>
-                  <a:srgbClr val="FFFFFF"/>
-                </a:solidFill>
-                <a:latin typeface="Calibri"/>
-              </a:rPr>
-              <a:t>~$10–15M · a 45-FV bat</a:t>
-            </a:r>
-          </a:p>
-        </p:txBody>
-      </p:sp>
-      <p:sp>
-        <p:nvSpPr>
-          <p:cNvPr id="13" name="TextBox 12"/>
-          <p:cNvSpPr txBox="1"/>
-          <p:nvPr/>
-        </p:nvSpPr>
-        <p:spPr>
-          <a:xfrm>
-            <a:off x="8092440" y="3520440"/>
-            <a:ext cx="3291840" cy="1005840"/>
-          </a:xfrm>
-          <a:prstGeom prst="rect">
-            <a:avLst/>
-          </a:prstGeom>
-          <a:noFill/>
-        </p:spPr>
-        <p:txBody>
-          <a:bodyPr wrap="square" anchor="t" lIns="0" rIns="0" tIns="0" bIns="0">
-            <a:spAutoFit/>
-          </a:bodyPr>
-          <a:lstStyle/>
-          <a:p>
-            <a:pPr algn="l">
-              <a:lnSpc>
-                <a:spcPct val="105000"/>
-              </a:lnSpc>
-              <a:spcAft>
-                <a:spcPts val="200"/>
-              </a:spcAft>
-            </a:pPr>
-            <a:r>
-              <a:rPr sz="1300" b="1" i="0">
-                <a:solidFill>
-                  <a:srgbClr val="A9E5B5"/>
-                </a:solidFill>
-                <a:latin typeface="Calibri"/>
-              </a:rPr>
-              <a:t>Sell after rebound</a:t>
-            </a:r>
-          </a:p>
-          <a:p>
-            <a:pPr algn="l">
-              <a:lnSpc>
-                <a:spcPct val="105000"/>
-              </a:lnSpc>
-              <a:spcAft>
-                <a:spcPts val="200"/>
-              </a:spcAft>
-            </a:pPr>
-            <a:r>
-              <a:rPr sz="1400" b="0" i="0">
-                <a:solidFill>
-                  <a:srgbClr val="FFFFFF"/>
-                </a:solidFill>
-                <a:latin typeface="Calibri"/>
-              </a:rPr>
-              <a:t>~$28M · a 50-FV, top-100</a:t>
-            </a:r>
-          </a:p>
-          <a:p>
-            <a:pPr algn="l">
-              <a:lnSpc>
-                <a:spcPct val="105000"/>
-              </a:lnSpc>
-              <a:spcAft>
-                <a:spcPts val="200"/>
-              </a:spcAft>
-            </a:pPr>
-            <a:r>
-              <a:rPr sz="1400" b="0" i="0">
-                <a:solidFill>
-                  <a:srgbClr val="FFFFFF"/>
-                </a:solidFill>
-                <a:latin typeface="Calibri"/>
-              </a:rPr>
-              <a:t>controllable talent</a:t>
-            </a:r>
-          </a:p>
-        </p:txBody>
-      </p:sp>
-      <p:sp>
-        <p:nvSpPr>
-          <p:cNvPr id="14" name="TextBox 13"/>
-          <p:cNvSpPr txBox="1"/>
-          <p:nvPr/>
-        </p:nvSpPr>
-        <p:spPr>
-          <a:xfrm>
-            <a:off x="8092440" y="4617720"/>
-            <a:ext cx="3291840" cy="457200"/>
-          </a:xfrm>
-          <a:prstGeom prst="rect">
-            <a:avLst/>
-          </a:prstGeom>
-          <a:noFill/>
-        </p:spPr>
-        <p:txBody>
-          <a:bodyPr wrap="square" anchor="t" lIns="0" rIns="0" tIns="0" bIns="0">
-            <a:spAutoFit/>
-          </a:bodyPr>
-          <a:lstStyle/>
-          <a:p>
-            <a:pPr algn="l">
-              <a:lnSpc>
-                <a:spcPct val="105000"/>
-              </a:lnSpc>
-              <a:spcAft>
-                <a:spcPts val="400"/>
-              </a:spcAft>
-            </a:pPr>
-            <a:r>
-              <a:rPr sz="1150" b="0" i="1">
-                <a:solidFill>
-                  <a:srgbClr val="C9D2E3"/>
-                </a:solidFill>
-                <a:latin typeface="Calibri"/>
-              </a:rPr>
-              <a:t>One grade of return = the reason to wait.</a:t>
+                  <a:srgbClr val="2E7D32"/>
+                </a:solidFill>
+                <a:latin typeface="Calibri"/>
+              </a:rPr>
+              <a:t>hitting/youth</a:t>
+            </a:r>
+            <a:r>
+              <a:rPr sz="1250" b="0" i="0">
+                <a:solidFill>
+                  <a:srgbClr val="20232A"/>
+                </a:solidFill>
+                <a:latin typeface="Calibri"/>
+              </a:rPr>
+              <a:t> Boston is short on.</a:t>
             </a:r>
           </a:p>
         </p:txBody>

--- a/outputs/Red_Sox_Outfield_Strategy.pptx
+++ b/outputs/Red_Sox_Outfield_Strategy.pptx
@@ -16,6 +16,7 @@
     <p:sldId id="264" r:id="rId15"/>
     <p:sldId id="265" r:id="rId16"/>
     <p:sldId id="266" r:id="rId17"/>
+    <p:sldId id="267" r:id="rId18"/>
   </p:sldIdLst>
   <p:sldSz cx="12191695" cy="6858000" type="screen4x3"/>
   <p:notesSz cx="6858000" cy="9144000"/>
@@ -3400,7 +3401,7 @@
                 </a:solidFill>
                 <a:latin typeface="Calibri"/>
               </a:rPr>
-              <a:t>THE SEQUENCE</a:t>
+              <a:t>THE MARKET</a:t>
             </a:r>
           </a:p>
         </p:txBody>
@@ -3442,21 +3443,87 @@
                 </a:solidFill>
                 <a:latin typeface="Cambria"/>
               </a:rPr>
-              <a:t>Solve it this winter, from a position of strength</a:t>
-            </a:r>
-          </a:p>
-        </p:txBody>
-      </p:sp>
-      <p:sp>
-        <p:nvSpPr>
-          <p:cNvPr id="4" name="Oval 3"/>
+              <a:t>Who pays: contenders with a hole in the outfield</a:t>
+            </a:r>
+          </a:p>
+        </p:txBody>
+      </p:sp>
+      <p:pic>
+        <p:nvPicPr>
+          <p:cNvPr id="4" name="Picture 3" descr="08_trade_fit_targets.png"/>
+          <p:cNvPicPr>
+            <a:picLocks noChangeAspect="1"/>
+          </p:cNvPicPr>
+          <p:nvPr/>
+        </p:nvPicPr>
+        <p:blipFill>
+          <a:blip r:embed="rId2"/>
+          <a:stretch>
+            <a:fillRect/>
+          </a:stretch>
+        </p:blipFill>
+        <p:spPr>
+          <a:xfrm>
+            <a:off x="757237" y="1463040"/>
+            <a:ext cx="6715125" cy="4297680"/>
+          </a:xfrm>
+          <a:prstGeom prst="rect">
+            <a:avLst/>
+          </a:prstGeom>
+        </p:spPr>
+      </p:pic>
+      <p:sp>
+        <p:nvSpPr>
+          <p:cNvPr id="5" name="TextBox 4"/>
+          <p:cNvSpPr txBox="1"/>
+          <p:nvPr/>
+        </p:nvSpPr>
+        <p:spPr>
+          <a:xfrm>
+            <a:off x="8183879" y="1691640"/>
+            <a:ext cx="3657600" cy="457200"/>
+          </a:xfrm>
+          <a:prstGeom prst="rect">
+            <a:avLst/>
+          </a:prstGeom>
+          <a:noFill/>
+        </p:spPr>
+        <p:txBody>
+          <a:bodyPr wrap="square" anchor="t" lIns="0" rIns="0" tIns="0" bIns="0">
+            <a:spAutoFit/>
+          </a:bodyPr>
+          <a:lstStyle/>
+          <a:p>
+            <a:pPr algn="l">
+              <a:lnSpc>
+                <a:spcPct val="100000"/>
+              </a:lnSpc>
+              <a:spcAft>
+                <a:spcPts val="0"/>
+              </a:spcAft>
+            </a:pPr>
+            <a:r>
+              <a:rPr sz="1500" b="1" i="0">
+                <a:solidFill>
+                  <a:srgbClr val="0C2340"/>
+                </a:solidFill>
+                <a:latin typeface="Cambria"/>
+              </a:rPr>
+              <a:t>Best-fit buyers</a:t>
+            </a:r>
+          </a:p>
+        </p:txBody>
+      </p:sp>
+      <p:sp>
+        <p:nvSpPr>
+          <p:cNvPr id="6" name="Oval 5"/>
           <p:cNvSpPr/>
           <p:nvPr/>
         </p:nvSpPr>
         <p:spPr>
           <a:xfrm>
-            <a:off x="640080" y="1801368"/>
-            <a:ext cx="457200" cy="457200"/>
+            <a:off x="8183879" y="2221991"/>
+            <a:ext cx="128016" cy="128016"/>
           </a:xfrm>
           <a:prstGeom prst="ellipse">
             <a:avLst/>
@@ -3484,93 +3551,74 @@
           </a:fontRef>
         </p:style>
         <p:txBody>
-          <a:bodyPr rtlCol="0" anchor="ctr" wrap="none"/>
+          <a:bodyPr rtlCol="0" anchor="ctr"/>
           <a:lstStyle/>
           <a:p>
             <a:pPr algn="ctr"/>
-            <a:r>
-              <a:rPr sz="1800" b="1">
-                <a:solidFill>
-                  <a:srgbClr val="FFFFFF"/>
-                </a:solidFill>
-                <a:latin typeface="Cambria"/>
-              </a:rPr>
-              <a:t>1</a:t>
-            </a:r>
-          </a:p>
-        </p:txBody>
-      </p:sp>
-      <p:sp>
-        <p:nvSpPr>
-          <p:cNvPr id="5" name="TextBox 4"/>
-          <p:cNvSpPr txBox="1"/>
-          <p:nvPr/>
-        </p:nvSpPr>
-        <p:spPr>
-          <a:xfrm>
-            <a:off x="1280160" y="1783080"/>
-            <a:ext cx="6126480" cy="1005840"/>
-          </a:xfrm>
-          <a:prstGeom prst="rect">
-            <a:avLst/>
-          </a:prstGeom>
-          <a:noFill/>
-        </p:spPr>
-        <p:txBody>
-          <a:bodyPr wrap="square" anchor="t" lIns="0" rIns="0" tIns="0" bIns="0">
-            <a:spAutoFit/>
-          </a:bodyPr>
-          <a:lstStyle/>
-          <a:p>
-            <a:pPr algn="l">
-              <a:lnSpc>
-                <a:spcPct val="108000"/>
-              </a:lnSpc>
-              <a:spcAft>
-                <a:spcPts val="200"/>
-              </a:spcAft>
-            </a:pPr>
-            <a:r>
-              <a:rPr sz="1700" b="1" i="0">
+          </a:p>
+        </p:txBody>
+      </p:sp>
+      <p:sp>
+        <p:nvSpPr>
+          <p:cNvPr id="7" name="TextBox 6"/>
+          <p:cNvSpPr txBox="1"/>
+          <p:nvPr/>
+        </p:nvSpPr>
+        <p:spPr>
+          <a:xfrm>
+            <a:off x="8439911" y="2194560"/>
+            <a:ext cx="3566160" cy="457200"/>
+          </a:xfrm>
+          <a:prstGeom prst="rect">
+            <a:avLst/>
+          </a:prstGeom>
+          <a:noFill/>
+        </p:spPr>
+        <p:txBody>
+          <a:bodyPr wrap="square" anchor="t" lIns="0" rIns="0" tIns="0" bIns="0">
+            <a:spAutoFit/>
+          </a:bodyPr>
+          <a:lstStyle/>
+          <a:p>
+            <a:pPr algn="l">
+              <a:lnSpc>
+                <a:spcPct val="100000"/>
+              </a:lnSpc>
+              <a:spcAft>
+                <a:spcPts val="0"/>
+              </a:spcAft>
+            </a:pPr>
+            <a:r>
+              <a:rPr sz="1400" b="1" i="0">
                 <a:solidFill>
                   <a:srgbClr val="0C2340"/>
                 </a:solidFill>
-                <a:latin typeface="Cambria"/>
-              </a:rPr>
-              <a:t>Hold through 2026</a:t>
-            </a:r>
-          </a:p>
-          <a:p>
-            <a:pPr algn="l">
-              <a:lnSpc>
-                <a:spcPct val="108000"/>
-              </a:lnSpc>
-              <a:spcAft>
-                <a:spcPts val="200"/>
-              </a:spcAft>
-            </a:pPr>
-            <a:r>
-              <a:rPr sz="1350" b="0" i="0">
+                <a:latin typeface="Calibri"/>
+              </a:rPr>
+              <a:t>Phillies  </a:t>
+            </a:r>
+            <a:r>
+              <a:rPr sz="1200" b="0" i="0">
                 <a:solidFill>
                   <a:srgbClr val="6B7280"/>
                 </a:solidFill>
                 <a:latin typeface="Calibri"/>
               </a:rPr>
-              <a:t>No contention urgency and Anthony hurt — keep Duran's bat, let his value rebound off an unlucky first half.</a:t>
-            </a:r>
-          </a:p>
-        </p:txBody>
-      </p:sp>
-      <p:sp>
-        <p:nvSpPr>
-          <p:cNvPr id="6" name="Oval 5"/>
+              <a:t>contender, 88 OF wRC+</a:t>
+            </a:r>
+          </a:p>
+        </p:txBody>
+      </p:sp>
+      <p:sp>
+        <p:nvSpPr>
+          <p:cNvPr id="8" name="Oval 7"/>
           <p:cNvSpPr/>
           <p:nvPr/>
         </p:nvSpPr>
         <p:spPr>
           <a:xfrm>
-            <a:off x="640080" y="2971800"/>
-            <a:ext cx="457200" cy="457200"/>
+            <a:off x="8183879" y="2788920"/>
+            <a:ext cx="128016" cy="128016"/>
           </a:xfrm>
           <a:prstGeom prst="ellipse">
             <a:avLst/>
@@ -3598,93 +3646,74 @@
           </a:fontRef>
         </p:style>
         <p:txBody>
-          <a:bodyPr rtlCol="0" anchor="ctr" wrap="none"/>
+          <a:bodyPr rtlCol="0" anchor="ctr"/>
           <a:lstStyle/>
           <a:p>
             <a:pPr algn="ctr"/>
-            <a:r>
-              <a:rPr sz="1800" b="1">
-                <a:solidFill>
-                  <a:srgbClr val="FFFFFF"/>
-                </a:solidFill>
-                <a:latin typeface="Cambria"/>
-              </a:rPr>
-              <a:t>2</a:t>
-            </a:r>
-          </a:p>
-        </p:txBody>
-      </p:sp>
-      <p:sp>
-        <p:nvSpPr>
-          <p:cNvPr id="7" name="TextBox 6"/>
-          <p:cNvSpPr txBox="1"/>
-          <p:nvPr/>
-        </p:nvSpPr>
-        <p:spPr>
-          <a:xfrm>
-            <a:off x="1280160" y="2953512"/>
-            <a:ext cx="6126480" cy="1005840"/>
-          </a:xfrm>
-          <a:prstGeom prst="rect">
-            <a:avLst/>
-          </a:prstGeom>
-          <a:noFill/>
-        </p:spPr>
-        <p:txBody>
-          <a:bodyPr wrap="square" anchor="t" lIns="0" rIns="0" tIns="0" bIns="0">
-            <a:spAutoFit/>
-          </a:bodyPr>
-          <a:lstStyle/>
-          <a:p>
-            <a:pPr algn="l">
-              <a:lnSpc>
-                <a:spcPct val="108000"/>
-              </a:lnSpc>
-              <a:spcAft>
-                <a:spcPts val="200"/>
-              </a:spcAft>
-            </a:pPr>
-            <a:r>
-              <a:rPr sz="1700" b="1" i="0">
+          </a:p>
+        </p:txBody>
+      </p:sp>
+      <p:sp>
+        <p:nvSpPr>
+          <p:cNvPr id="9" name="TextBox 8"/>
+          <p:cNvSpPr txBox="1"/>
+          <p:nvPr/>
+        </p:nvSpPr>
+        <p:spPr>
+          <a:xfrm>
+            <a:off x="8439911" y="2761488"/>
+            <a:ext cx="3566160" cy="457200"/>
+          </a:xfrm>
+          <a:prstGeom prst="rect">
+            <a:avLst/>
+          </a:prstGeom>
+          <a:noFill/>
+        </p:spPr>
+        <p:txBody>
+          <a:bodyPr wrap="square" anchor="t" lIns="0" rIns="0" tIns="0" bIns="0">
+            <a:spAutoFit/>
+          </a:bodyPr>
+          <a:lstStyle/>
+          <a:p>
+            <a:pPr algn="l">
+              <a:lnSpc>
+                <a:spcPct val="100000"/>
+              </a:lnSpc>
+              <a:spcAft>
+                <a:spcPts val="0"/>
+              </a:spcAft>
+            </a:pPr>
+            <a:r>
+              <a:rPr sz="1400" b="1" i="0">
                 <a:solidFill>
                   <a:srgbClr val="0C2340"/>
                 </a:solidFill>
-                <a:latin typeface="Cambria"/>
-              </a:rPr>
-              <a:t>Deal Duran in the offseason</a:t>
-            </a:r>
-          </a:p>
-          <a:p>
-            <a:pPr algn="l">
-              <a:lnSpc>
-                <a:spcPct val="108000"/>
-              </a:lnSpc>
-              <a:spcAft>
-                <a:spcPts val="200"/>
-              </a:spcAft>
-            </a:pPr>
-            <a:r>
-              <a:rPr sz="1350" b="0" i="0">
+                <a:latin typeface="Calibri"/>
+              </a:rPr>
+              <a:t>Rays  </a:t>
+            </a:r>
+            <a:r>
+              <a:rPr sz="1200" b="0" i="0">
                 <a:solidFill>
                   <a:srgbClr val="6B7280"/>
                 </a:solidFill>
                 <a:latin typeface="Calibri"/>
               </a:rPr>
-              <a:t>Anthony's healthy (jam returns), value restored. Trade him — plus Yoshida money — for controllable bats, not arms.</a:t>
-            </a:r>
-          </a:p>
-        </p:txBody>
-      </p:sp>
-      <p:sp>
-        <p:nvSpPr>
-          <p:cNvPr id="8" name="Oval 7"/>
+              <a:t>.602, weak OF</a:t>
+            </a:r>
+          </a:p>
+        </p:txBody>
+      </p:sp>
+      <p:sp>
+        <p:nvSpPr>
+          <p:cNvPr id="10" name="Oval 9"/>
           <p:cNvSpPr/>
           <p:nvPr/>
         </p:nvSpPr>
         <p:spPr>
           <a:xfrm>
-            <a:off x="640080" y="4142231"/>
-            <a:ext cx="457200" cy="457200"/>
+            <a:off x="8183879" y="3355847"/>
+            <a:ext cx="128016" cy="128016"/>
           </a:xfrm>
           <a:prstGeom prst="ellipse">
             <a:avLst/>
@@ -3712,101 +3741,80 @@
           </a:fontRef>
         </p:style>
         <p:txBody>
-          <a:bodyPr rtlCol="0" anchor="ctr" wrap="none"/>
+          <a:bodyPr rtlCol="0" anchor="ctr"/>
           <a:lstStyle/>
           <a:p>
             <a:pPr algn="ctr"/>
-            <a:r>
-              <a:rPr sz="1800" b="1">
-                <a:solidFill>
-                  <a:srgbClr val="FFFFFF"/>
-                </a:solidFill>
-                <a:latin typeface="Cambria"/>
-              </a:rPr>
-              <a:t>3</a:t>
-            </a:r>
-          </a:p>
-        </p:txBody>
-      </p:sp>
-      <p:sp>
-        <p:nvSpPr>
-          <p:cNvPr id="9" name="TextBox 8"/>
-          <p:cNvSpPr txBox="1"/>
-          <p:nvPr/>
-        </p:nvSpPr>
-        <p:spPr>
-          <a:xfrm>
-            <a:off x="1280160" y="4123944"/>
-            <a:ext cx="6126480" cy="1005840"/>
-          </a:xfrm>
-          <a:prstGeom prst="rect">
-            <a:avLst/>
-          </a:prstGeom>
-          <a:noFill/>
-        </p:spPr>
-        <p:txBody>
-          <a:bodyPr wrap="square" anchor="t" lIns="0" rIns="0" tIns="0" bIns="0">
-            <a:spAutoFit/>
-          </a:bodyPr>
-          <a:lstStyle/>
-          <a:p>
-            <a:pPr algn="l">
-              <a:lnSpc>
-                <a:spcPct val="108000"/>
-              </a:lnSpc>
-              <a:spcAft>
-                <a:spcPts val="200"/>
-              </a:spcAft>
-            </a:pPr>
-            <a:r>
-              <a:rPr sz="1700" b="1" i="0">
+          </a:p>
+        </p:txBody>
+      </p:sp>
+      <p:sp>
+        <p:nvSpPr>
+          <p:cNvPr id="11" name="TextBox 10"/>
+          <p:cNvSpPr txBox="1"/>
+          <p:nvPr/>
+        </p:nvSpPr>
+        <p:spPr>
+          <a:xfrm>
+            <a:off x="8439911" y="3328415"/>
+            <a:ext cx="3566160" cy="457200"/>
+          </a:xfrm>
+          <a:prstGeom prst="rect">
+            <a:avLst/>
+          </a:prstGeom>
+          <a:noFill/>
+        </p:spPr>
+        <p:txBody>
+          <a:bodyPr wrap="square" anchor="t" lIns="0" rIns="0" tIns="0" bIns="0">
+            <a:spAutoFit/>
+          </a:bodyPr>
+          <a:lstStyle/>
+          <a:p>
+            <a:pPr algn="l">
+              <a:lnSpc>
+                <a:spcPct val="100000"/>
+              </a:lnSpc>
+              <a:spcAft>
+                <a:spcPts val="0"/>
+              </a:spcAft>
+            </a:pPr>
+            <a:r>
+              <a:rPr sz="1400" b="1" i="0">
                 <a:solidFill>
                   <a:srgbClr val="0C2340"/>
                 </a:solidFill>
-                <a:latin typeface="Cambria"/>
-              </a:rPr>
-              <a:t>Run it back in 2027</a:t>
-            </a:r>
-          </a:p>
-          <a:p>
-            <a:pPr algn="l">
-              <a:lnSpc>
-                <a:spcPct val="108000"/>
-              </a:lnSpc>
-              <a:spcAft>
-                <a:spcPts val="200"/>
-              </a:spcAft>
-            </a:pPr>
-            <a:r>
-              <a:rPr sz="1350" b="0" i="0">
+                <a:latin typeface="Calibri"/>
+              </a:rPr>
+              <a:t>Marlins  </a:t>
+            </a:r>
+            <a:r>
+              <a:rPr sz="1200" b="0" i="0">
                 <a:solidFill>
                   <a:srgbClr val="6B7280"/>
                 </a:solidFill>
                 <a:latin typeface="Calibri"/>
               </a:rPr>
-              <a:t>OF = Anthony / Rafaela / Abreu; strong rotation intact; DH opens after 2027. A cheaper, younger, more balanced roster.</a:t>
-            </a:r>
-          </a:p>
-        </p:txBody>
-      </p:sp>
-      <p:sp>
-        <p:nvSpPr>
-          <p:cNvPr id="10" name="Rounded Rectangle 9"/>
+              <a:t>in the hunt, thin OF</a:t>
+            </a:r>
+          </a:p>
+        </p:txBody>
+      </p:sp>
+      <p:sp>
+        <p:nvSpPr>
+          <p:cNvPr id="12" name="Oval 11"/>
           <p:cNvSpPr/>
           <p:nvPr/>
         </p:nvSpPr>
         <p:spPr>
           <a:xfrm>
-            <a:off x="7818120" y="1783080"/>
-            <a:ext cx="3794760" cy="3337560"/>
-          </a:xfrm>
-          <a:prstGeom prst="roundRect">
-            <a:avLst>
-              <a:gd name="adj" fmla="val 8000"/>
-            </a:avLst>
+            <a:off x="8183879" y="3922776"/>
+            <a:ext cx="128016" cy="128016"/>
+          </a:xfrm>
+          <a:prstGeom prst="ellipse">
+            <a:avLst/>
           </a:prstGeom>
           <a:solidFill>
-            <a:srgbClr val="0C2340"/>
+            <a:srgbClr val="BD3039"/>
           </a:solidFill>
           <a:ln>
             <a:noFill/>
@@ -3837,14 +3845,14 @@
       </p:sp>
       <p:sp>
         <p:nvSpPr>
-          <p:cNvPr id="11" name="TextBox 10"/>
-          <p:cNvSpPr txBox="1"/>
-          <p:nvPr/>
-        </p:nvSpPr>
-        <p:spPr>
-          <a:xfrm>
-            <a:off x="8092440" y="2011680"/>
-            <a:ext cx="3291840" cy="365760"/>
+          <p:cNvPr id="13" name="TextBox 12"/>
+          <p:cNvSpPr txBox="1"/>
+          <p:nvPr/>
+        </p:nvSpPr>
+        <p:spPr>
+          <a:xfrm>
+            <a:off x="8439911" y="3895344"/>
+            <a:ext cx="3566160" cy="457200"/>
           </a:xfrm>
           <a:prstGeom prst="rect">
             <a:avLst/>
@@ -3866,196 +3874,82 @@
               </a:spcAft>
             </a:pPr>
             <a:r>
+              <a:rPr sz="1400" b="1" i="0">
+                <a:solidFill>
+                  <a:srgbClr val="0C2340"/>
+                </a:solidFill>
+                <a:latin typeface="Calibri"/>
+              </a:rPr>
+              <a:t>Guardians  </a:t>
+            </a:r>
+            <a:r>
+              <a:rPr sz="1200" b="0" i="0">
+                <a:solidFill>
+                  <a:srgbClr val="6B7280"/>
+                </a:solidFill>
+                <a:latin typeface="Calibri"/>
+              </a:rPr>
+              <a:t>contender, OF need</a:t>
+            </a:r>
+          </a:p>
+        </p:txBody>
+      </p:sp>
+      <p:sp>
+        <p:nvSpPr>
+          <p:cNvPr id="14" name="TextBox 13"/>
+          <p:cNvSpPr txBox="1"/>
+          <p:nvPr/>
+        </p:nvSpPr>
+        <p:spPr>
+          <a:xfrm>
+            <a:off x="8183879" y="4709160"/>
+            <a:ext cx="3657600" cy="1005840"/>
+          </a:xfrm>
+          <a:prstGeom prst="rect">
+            <a:avLst/>
+          </a:prstGeom>
+          <a:noFill/>
+        </p:spPr>
+        <p:txBody>
+          <a:bodyPr wrap="square" anchor="t" lIns="0" rIns="0" tIns="0" bIns="0">
+            <a:spAutoFit/>
+          </a:bodyPr>
+          <a:lstStyle/>
+          <a:p>
+            <a:pPr algn="l">
+              <a:lnSpc>
+                <a:spcPct val="112000"/>
+              </a:lnSpc>
+              <a:spcAft>
+                <a:spcPts val="400"/>
+              </a:spcAft>
+            </a:pPr>
+            <a:r>
+              <a:rPr sz="1250" b="0" i="0">
+                <a:solidFill>
+                  <a:srgbClr val="20232A"/>
+                </a:solidFill>
+                <a:latin typeface="Calibri"/>
+              </a:rPr>
+              <a:t>Trade a redundant bat to a team that needs one — and take back the </a:t>
+            </a:r>
+            <a:r>
               <a:rPr sz="1250" b="1" i="0">
                 <a:solidFill>
-                  <a:srgbClr val="C9D2E3"/>
-                </a:solidFill>
-                <a:latin typeface="Calibri"/>
-              </a:rPr>
-              <a:t>THE RETURN</a:t>
-            </a:r>
-          </a:p>
-        </p:txBody>
-      </p:sp>
-      <p:sp>
-        <p:nvSpPr>
-          <p:cNvPr id="12" name="TextBox 11"/>
-          <p:cNvSpPr txBox="1"/>
-          <p:nvPr/>
-        </p:nvSpPr>
-        <p:spPr>
-          <a:xfrm>
-            <a:off x="8092440" y="2487168"/>
-            <a:ext cx="3291840" cy="914400"/>
-          </a:xfrm>
-          <a:prstGeom prst="rect">
-            <a:avLst/>
-          </a:prstGeom>
-          <a:noFill/>
-        </p:spPr>
-        <p:txBody>
-          <a:bodyPr wrap="square" anchor="t" lIns="0" rIns="0" tIns="0" bIns="0">
-            <a:spAutoFit/>
-          </a:bodyPr>
-          <a:lstStyle/>
-          <a:p>
-            <a:pPr algn="l">
-              <a:lnSpc>
-                <a:spcPct val="105000"/>
-              </a:lnSpc>
-              <a:spcAft>
-                <a:spcPts val="200"/>
-              </a:spcAft>
-            </a:pPr>
-            <a:r>
-              <a:rPr sz="1300" b="1" i="0">
-                <a:solidFill>
-                  <a:srgbClr val="F0B8BC"/>
-                </a:solidFill>
-                <a:latin typeface="Calibri"/>
-              </a:rPr>
-              <a:t>Sell now (nadir)</a:t>
-            </a:r>
-          </a:p>
-          <a:p>
-            <a:pPr algn="l">
-              <a:lnSpc>
-                <a:spcPct val="105000"/>
-              </a:lnSpc>
-              <a:spcAft>
-                <a:spcPts val="200"/>
-              </a:spcAft>
-            </a:pPr>
-            <a:r>
-              <a:rPr sz="1400" b="0" i="0">
-                <a:solidFill>
-                  <a:srgbClr val="FFFFFF"/>
-                </a:solidFill>
-                <a:latin typeface="Calibri"/>
-              </a:rPr>
-              <a:t>~$10–15M · a 45-FV bat</a:t>
-            </a:r>
-          </a:p>
-        </p:txBody>
-      </p:sp>
-      <p:sp>
-        <p:nvSpPr>
-          <p:cNvPr id="13" name="TextBox 12"/>
-          <p:cNvSpPr txBox="1"/>
-          <p:nvPr/>
-        </p:nvSpPr>
-        <p:spPr>
-          <a:xfrm>
-            <a:off x="8092440" y="3520440"/>
-            <a:ext cx="3291840" cy="1005840"/>
-          </a:xfrm>
-          <a:prstGeom prst="rect">
-            <a:avLst/>
-          </a:prstGeom>
-          <a:noFill/>
-        </p:spPr>
-        <p:txBody>
-          <a:bodyPr wrap="square" anchor="t" lIns="0" rIns="0" tIns="0" bIns="0">
-            <a:spAutoFit/>
-          </a:bodyPr>
-          <a:lstStyle/>
-          <a:p>
-            <a:pPr algn="l">
-              <a:lnSpc>
-                <a:spcPct val="105000"/>
-              </a:lnSpc>
-              <a:spcAft>
-                <a:spcPts val="200"/>
-              </a:spcAft>
-            </a:pPr>
-            <a:r>
-              <a:rPr sz="1300" b="1" i="0">
-                <a:solidFill>
-                  <a:srgbClr val="A9E5B5"/>
-                </a:solidFill>
-                <a:latin typeface="Calibri"/>
-              </a:rPr>
-              <a:t>Sell after rebound</a:t>
-            </a:r>
-          </a:p>
-          <a:p>
-            <a:pPr algn="l">
-              <a:lnSpc>
-                <a:spcPct val="105000"/>
-              </a:lnSpc>
-              <a:spcAft>
-                <a:spcPts val="200"/>
-              </a:spcAft>
-            </a:pPr>
-            <a:r>
-              <a:rPr sz="1400" b="0" i="0">
-                <a:solidFill>
-                  <a:srgbClr val="FFFFFF"/>
-                </a:solidFill>
-                <a:latin typeface="Calibri"/>
-              </a:rPr>
-              <a:t>~$28M · a 50-FV, top-100</a:t>
-            </a:r>
-          </a:p>
-          <a:p>
-            <a:pPr algn="l">
-              <a:lnSpc>
-                <a:spcPct val="105000"/>
-              </a:lnSpc>
-              <a:spcAft>
-                <a:spcPts val="200"/>
-              </a:spcAft>
-            </a:pPr>
-            <a:r>
-              <a:rPr sz="1400" b="0" i="0">
-                <a:solidFill>
-                  <a:srgbClr val="FFFFFF"/>
-                </a:solidFill>
-                <a:latin typeface="Calibri"/>
-              </a:rPr>
-              <a:t>controllable talent</a:t>
-            </a:r>
-          </a:p>
-        </p:txBody>
-      </p:sp>
-      <p:sp>
-        <p:nvSpPr>
-          <p:cNvPr id="14" name="TextBox 13"/>
-          <p:cNvSpPr txBox="1"/>
-          <p:nvPr/>
-        </p:nvSpPr>
-        <p:spPr>
-          <a:xfrm>
-            <a:off x="8092440" y="4617720"/>
-            <a:ext cx="3291840" cy="457200"/>
-          </a:xfrm>
-          <a:prstGeom prst="rect">
-            <a:avLst/>
-          </a:prstGeom>
-          <a:noFill/>
-        </p:spPr>
-        <p:txBody>
-          <a:bodyPr wrap="square" anchor="t" lIns="0" rIns="0" tIns="0" bIns="0">
-            <a:spAutoFit/>
-          </a:bodyPr>
-          <a:lstStyle/>
-          <a:p>
-            <a:pPr algn="l">
-              <a:lnSpc>
-                <a:spcPct val="105000"/>
-              </a:lnSpc>
-              <a:spcAft>
-                <a:spcPts val="400"/>
-              </a:spcAft>
-            </a:pPr>
-            <a:r>
-              <a:rPr sz="1150" b="0" i="1">
-                <a:solidFill>
-                  <a:srgbClr val="C9D2E3"/>
-                </a:solidFill>
-                <a:latin typeface="Calibri"/>
-              </a:rPr>
-              <a:t>One grade of return = the reason to wait.</a:t>
+                  <a:srgbClr val="2E7D32"/>
+                </a:solidFill>
+                <a:latin typeface="Calibri"/>
+              </a:rPr>
+              <a:t>hitting/youth</a:t>
+            </a:r>
+            <a:r>
+              <a:rPr sz="1250" b="0" i="0">
+                <a:solidFill>
+                  <a:srgbClr val="20232A"/>
+                </a:solidFill>
+                <a:latin typeface="Calibri"/>
+              </a:rPr>
+              <a:t> Boston is short on.</a:t>
             </a:r>
           </a:p>
         </p:txBody>
@@ -4120,6 +4014,780 @@
 </file>
 
 <file path=ppt/slides/slide11.xml><?xml version="1.0" encoding="utf-8"?>
+<p:sld xmlns:a="http://schemas.openxmlformats.org/drawingml/2006/main" xmlns:p="http://schemas.openxmlformats.org/presentationml/2006/main" xmlns:r="http://schemas.openxmlformats.org/officeDocument/2006/relationships">
+  <p:cSld>
+    <p:bg>
+      <p:bgPr>
+        <a:solidFill>
+          <a:srgbClr val="F4F5F7"/>
+        </a:solidFill>
+        <a:effectLst/>
+      </p:bgPr>
+    </p:bg>
+    <p:spTree>
+      <p:nvGrpSpPr>
+        <p:cNvPr id="1" name=""/>
+        <p:cNvGrpSpPr/>
+        <p:nvPr/>
+      </p:nvGrpSpPr>
+      <p:grpSpPr/>
+      <p:sp>
+        <p:nvSpPr>
+          <p:cNvPr id="2" name="TextBox 1"/>
+          <p:cNvSpPr txBox="1"/>
+          <p:nvPr/>
+        </p:nvSpPr>
+        <p:spPr>
+          <a:xfrm>
+            <a:off x="566928" y="384048"/>
+            <a:ext cx="10058400" cy="274320"/>
+          </a:xfrm>
+          <a:prstGeom prst="rect">
+            <a:avLst/>
+          </a:prstGeom>
+          <a:noFill/>
+        </p:spPr>
+        <p:txBody>
+          <a:bodyPr wrap="square" anchor="t" lIns="0" rIns="0" tIns="0" bIns="0">
+            <a:spAutoFit/>
+          </a:bodyPr>
+          <a:lstStyle/>
+          <a:p>
+            <a:pPr algn="l">
+              <a:lnSpc>
+                <a:spcPct val="100000"/>
+              </a:lnSpc>
+              <a:spcAft>
+                <a:spcPts val="0"/>
+              </a:spcAft>
+            </a:pPr>
+            <a:r>
+              <a:rPr sz="1250" b="1" i="0">
+                <a:solidFill>
+                  <a:srgbClr val="BD3039"/>
+                </a:solidFill>
+                <a:latin typeface="Calibri"/>
+              </a:rPr>
+              <a:t>THE SEQUENCE</a:t>
+            </a:r>
+          </a:p>
+        </p:txBody>
+      </p:sp>
+      <p:sp>
+        <p:nvSpPr>
+          <p:cNvPr id="3" name="TextBox 2"/>
+          <p:cNvSpPr txBox="1"/>
+          <p:nvPr/>
+        </p:nvSpPr>
+        <p:spPr>
+          <a:xfrm>
+            <a:off x="566928" y="658368"/>
+            <a:ext cx="11064240" cy="868680"/>
+          </a:xfrm>
+          <a:prstGeom prst="rect">
+            <a:avLst/>
+          </a:prstGeom>
+          <a:noFill/>
+        </p:spPr>
+        <p:txBody>
+          <a:bodyPr wrap="square" anchor="t" lIns="0" rIns="0" tIns="0" bIns="0">
+            <a:spAutoFit/>
+          </a:bodyPr>
+          <a:lstStyle/>
+          <a:p>
+            <a:pPr algn="l">
+              <a:lnSpc>
+                <a:spcPct val="100000"/>
+              </a:lnSpc>
+              <a:spcAft>
+                <a:spcPts val="0"/>
+              </a:spcAft>
+            </a:pPr>
+            <a:r>
+              <a:rPr sz="3000" b="1" i="0">
+                <a:solidFill>
+                  <a:srgbClr val="0C2340"/>
+                </a:solidFill>
+                <a:latin typeface="Cambria"/>
+              </a:rPr>
+              <a:t>Solve it this winter, from a position of strength</a:t>
+            </a:r>
+          </a:p>
+        </p:txBody>
+      </p:sp>
+      <p:sp>
+        <p:nvSpPr>
+          <p:cNvPr id="4" name="Oval 3"/>
+          <p:cNvSpPr/>
+          <p:nvPr/>
+        </p:nvSpPr>
+        <p:spPr>
+          <a:xfrm>
+            <a:off x="640080" y="1801368"/>
+            <a:ext cx="457200" cy="457200"/>
+          </a:xfrm>
+          <a:prstGeom prst="ellipse">
+            <a:avLst/>
+          </a:prstGeom>
+          <a:solidFill>
+            <a:srgbClr val="BD3039"/>
+          </a:solidFill>
+          <a:ln>
+            <a:noFill/>
+          </a:ln>
+          <a:effectLst/>
+        </p:spPr>
+        <p:style>
+          <a:lnRef idx="1">
+            <a:schemeClr val="accent1"/>
+          </a:lnRef>
+          <a:fillRef idx="3">
+            <a:schemeClr val="accent1"/>
+          </a:fillRef>
+          <a:effectRef idx="2">
+            <a:schemeClr val="accent1"/>
+          </a:effectRef>
+          <a:fontRef idx="minor">
+            <a:schemeClr val="lt1"/>
+          </a:fontRef>
+        </p:style>
+        <p:txBody>
+          <a:bodyPr rtlCol="0" anchor="ctr" wrap="none"/>
+          <a:lstStyle/>
+          <a:p>
+            <a:pPr algn="ctr"/>
+            <a:r>
+              <a:rPr sz="1800" b="1">
+                <a:solidFill>
+                  <a:srgbClr val="FFFFFF"/>
+                </a:solidFill>
+                <a:latin typeface="Cambria"/>
+              </a:rPr>
+              <a:t>1</a:t>
+            </a:r>
+          </a:p>
+        </p:txBody>
+      </p:sp>
+      <p:sp>
+        <p:nvSpPr>
+          <p:cNvPr id="5" name="TextBox 4"/>
+          <p:cNvSpPr txBox="1"/>
+          <p:nvPr/>
+        </p:nvSpPr>
+        <p:spPr>
+          <a:xfrm>
+            <a:off x="1280160" y="1783080"/>
+            <a:ext cx="6126480" cy="1005840"/>
+          </a:xfrm>
+          <a:prstGeom prst="rect">
+            <a:avLst/>
+          </a:prstGeom>
+          <a:noFill/>
+        </p:spPr>
+        <p:txBody>
+          <a:bodyPr wrap="square" anchor="t" lIns="0" rIns="0" tIns="0" bIns="0">
+            <a:spAutoFit/>
+          </a:bodyPr>
+          <a:lstStyle/>
+          <a:p>
+            <a:pPr algn="l">
+              <a:lnSpc>
+                <a:spcPct val="108000"/>
+              </a:lnSpc>
+              <a:spcAft>
+                <a:spcPts val="200"/>
+              </a:spcAft>
+            </a:pPr>
+            <a:r>
+              <a:rPr sz="1700" b="1" i="0">
+                <a:solidFill>
+                  <a:srgbClr val="0C2340"/>
+                </a:solidFill>
+                <a:latin typeface="Cambria"/>
+              </a:rPr>
+              <a:t>Hold through 2026</a:t>
+            </a:r>
+          </a:p>
+          <a:p>
+            <a:pPr algn="l">
+              <a:lnSpc>
+                <a:spcPct val="108000"/>
+              </a:lnSpc>
+              <a:spcAft>
+                <a:spcPts val="200"/>
+              </a:spcAft>
+            </a:pPr>
+            <a:r>
+              <a:rPr sz="1350" b="0" i="0">
+                <a:solidFill>
+                  <a:srgbClr val="6B7280"/>
+                </a:solidFill>
+                <a:latin typeface="Calibri"/>
+              </a:rPr>
+              <a:t>No contention urgency and Anthony hurt — keep Duran's bat, let his value rebound off an unlucky first half.</a:t>
+            </a:r>
+          </a:p>
+        </p:txBody>
+      </p:sp>
+      <p:sp>
+        <p:nvSpPr>
+          <p:cNvPr id="6" name="Oval 5"/>
+          <p:cNvSpPr/>
+          <p:nvPr/>
+        </p:nvSpPr>
+        <p:spPr>
+          <a:xfrm>
+            <a:off x="640080" y="2971800"/>
+            <a:ext cx="457200" cy="457200"/>
+          </a:xfrm>
+          <a:prstGeom prst="ellipse">
+            <a:avLst/>
+          </a:prstGeom>
+          <a:solidFill>
+            <a:srgbClr val="BD3039"/>
+          </a:solidFill>
+          <a:ln>
+            <a:noFill/>
+          </a:ln>
+          <a:effectLst/>
+        </p:spPr>
+        <p:style>
+          <a:lnRef idx="1">
+            <a:schemeClr val="accent1"/>
+          </a:lnRef>
+          <a:fillRef idx="3">
+            <a:schemeClr val="accent1"/>
+          </a:fillRef>
+          <a:effectRef idx="2">
+            <a:schemeClr val="accent1"/>
+          </a:effectRef>
+          <a:fontRef idx="minor">
+            <a:schemeClr val="lt1"/>
+          </a:fontRef>
+        </p:style>
+        <p:txBody>
+          <a:bodyPr rtlCol="0" anchor="ctr" wrap="none"/>
+          <a:lstStyle/>
+          <a:p>
+            <a:pPr algn="ctr"/>
+            <a:r>
+              <a:rPr sz="1800" b="1">
+                <a:solidFill>
+                  <a:srgbClr val="FFFFFF"/>
+                </a:solidFill>
+                <a:latin typeface="Cambria"/>
+              </a:rPr>
+              <a:t>2</a:t>
+            </a:r>
+          </a:p>
+        </p:txBody>
+      </p:sp>
+      <p:sp>
+        <p:nvSpPr>
+          <p:cNvPr id="7" name="TextBox 6"/>
+          <p:cNvSpPr txBox="1"/>
+          <p:nvPr/>
+        </p:nvSpPr>
+        <p:spPr>
+          <a:xfrm>
+            <a:off x="1280160" y="2953512"/>
+            <a:ext cx="6126480" cy="1005840"/>
+          </a:xfrm>
+          <a:prstGeom prst="rect">
+            <a:avLst/>
+          </a:prstGeom>
+          <a:noFill/>
+        </p:spPr>
+        <p:txBody>
+          <a:bodyPr wrap="square" anchor="t" lIns="0" rIns="0" tIns="0" bIns="0">
+            <a:spAutoFit/>
+          </a:bodyPr>
+          <a:lstStyle/>
+          <a:p>
+            <a:pPr algn="l">
+              <a:lnSpc>
+                <a:spcPct val="108000"/>
+              </a:lnSpc>
+              <a:spcAft>
+                <a:spcPts val="200"/>
+              </a:spcAft>
+            </a:pPr>
+            <a:r>
+              <a:rPr sz="1700" b="1" i="0">
+                <a:solidFill>
+                  <a:srgbClr val="0C2340"/>
+                </a:solidFill>
+                <a:latin typeface="Cambria"/>
+              </a:rPr>
+              <a:t>Deal Duran in the offseason</a:t>
+            </a:r>
+          </a:p>
+          <a:p>
+            <a:pPr algn="l">
+              <a:lnSpc>
+                <a:spcPct val="108000"/>
+              </a:lnSpc>
+              <a:spcAft>
+                <a:spcPts val="200"/>
+              </a:spcAft>
+            </a:pPr>
+            <a:r>
+              <a:rPr sz="1350" b="0" i="0">
+                <a:solidFill>
+                  <a:srgbClr val="6B7280"/>
+                </a:solidFill>
+                <a:latin typeface="Calibri"/>
+              </a:rPr>
+              <a:t>Anthony's healthy (jam returns), value restored. Trade him — plus Yoshida money — for controllable bats, not arms.</a:t>
+            </a:r>
+          </a:p>
+        </p:txBody>
+      </p:sp>
+      <p:sp>
+        <p:nvSpPr>
+          <p:cNvPr id="8" name="Oval 7"/>
+          <p:cNvSpPr/>
+          <p:nvPr/>
+        </p:nvSpPr>
+        <p:spPr>
+          <a:xfrm>
+            <a:off x="640080" y="4142231"/>
+            <a:ext cx="457200" cy="457200"/>
+          </a:xfrm>
+          <a:prstGeom prst="ellipse">
+            <a:avLst/>
+          </a:prstGeom>
+          <a:solidFill>
+            <a:srgbClr val="BD3039"/>
+          </a:solidFill>
+          <a:ln>
+            <a:noFill/>
+          </a:ln>
+          <a:effectLst/>
+        </p:spPr>
+        <p:style>
+          <a:lnRef idx="1">
+            <a:schemeClr val="accent1"/>
+          </a:lnRef>
+          <a:fillRef idx="3">
+            <a:schemeClr val="accent1"/>
+          </a:fillRef>
+          <a:effectRef idx="2">
+            <a:schemeClr val="accent1"/>
+          </a:effectRef>
+          <a:fontRef idx="minor">
+            <a:schemeClr val="lt1"/>
+          </a:fontRef>
+        </p:style>
+        <p:txBody>
+          <a:bodyPr rtlCol="0" anchor="ctr" wrap="none"/>
+          <a:lstStyle/>
+          <a:p>
+            <a:pPr algn="ctr"/>
+            <a:r>
+              <a:rPr sz="1800" b="1">
+                <a:solidFill>
+                  <a:srgbClr val="FFFFFF"/>
+                </a:solidFill>
+                <a:latin typeface="Cambria"/>
+              </a:rPr>
+              <a:t>3</a:t>
+            </a:r>
+          </a:p>
+        </p:txBody>
+      </p:sp>
+      <p:sp>
+        <p:nvSpPr>
+          <p:cNvPr id="9" name="TextBox 8"/>
+          <p:cNvSpPr txBox="1"/>
+          <p:nvPr/>
+        </p:nvSpPr>
+        <p:spPr>
+          <a:xfrm>
+            <a:off x="1280160" y="4123944"/>
+            <a:ext cx="6126480" cy="1005840"/>
+          </a:xfrm>
+          <a:prstGeom prst="rect">
+            <a:avLst/>
+          </a:prstGeom>
+          <a:noFill/>
+        </p:spPr>
+        <p:txBody>
+          <a:bodyPr wrap="square" anchor="t" lIns="0" rIns="0" tIns="0" bIns="0">
+            <a:spAutoFit/>
+          </a:bodyPr>
+          <a:lstStyle/>
+          <a:p>
+            <a:pPr algn="l">
+              <a:lnSpc>
+                <a:spcPct val="108000"/>
+              </a:lnSpc>
+              <a:spcAft>
+                <a:spcPts val="200"/>
+              </a:spcAft>
+            </a:pPr>
+            <a:r>
+              <a:rPr sz="1700" b="1" i="0">
+                <a:solidFill>
+                  <a:srgbClr val="0C2340"/>
+                </a:solidFill>
+                <a:latin typeface="Cambria"/>
+              </a:rPr>
+              <a:t>Run it back in 2027</a:t>
+            </a:r>
+          </a:p>
+          <a:p>
+            <a:pPr algn="l">
+              <a:lnSpc>
+                <a:spcPct val="108000"/>
+              </a:lnSpc>
+              <a:spcAft>
+                <a:spcPts val="200"/>
+              </a:spcAft>
+            </a:pPr>
+            <a:r>
+              <a:rPr sz="1350" b="0" i="0">
+                <a:solidFill>
+                  <a:srgbClr val="6B7280"/>
+                </a:solidFill>
+                <a:latin typeface="Calibri"/>
+              </a:rPr>
+              <a:t>OF = Anthony / Rafaela / Abreu; strong rotation intact; DH opens after 2027. A cheaper, younger, more balanced roster.</a:t>
+            </a:r>
+          </a:p>
+        </p:txBody>
+      </p:sp>
+      <p:sp>
+        <p:nvSpPr>
+          <p:cNvPr id="10" name="Rounded Rectangle 9"/>
+          <p:cNvSpPr/>
+          <p:nvPr/>
+        </p:nvSpPr>
+        <p:spPr>
+          <a:xfrm>
+            <a:off x="7818120" y="1783080"/>
+            <a:ext cx="3794760" cy="3337560"/>
+          </a:xfrm>
+          <a:prstGeom prst="roundRect">
+            <a:avLst>
+              <a:gd name="adj" fmla="val 8000"/>
+            </a:avLst>
+          </a:prstGeom>
+          <a:solidFill>
+            <a:srgbClr val="0C2340"/>
+          </a:solidFill>
+          <a:ln>
+            <a:noFill/>
+          </a:ln>
+          <a:effectLst/>
+        </p:spPr>
+        <p:style>
+          <a:lnRef idx="1">
+            <a:schemeClr val="accent1"/>
+          </a:lnRef>
+          <a:fillRef idx="3">
+            <a:schemeClr val="accent1"/>
+          </a:fillRef>
+          <a:effectRef idx="2">
+            <a:schemeClr val="accent1"/>
+          </a:effectRef>
+          <a:fontRef idx="minor">
+            <a:schemeClr val="lt1"/>
+          </a:fontRef>
+        </p:style>
+        <p:txBody>
+          <a:bodyPr rtlCol="0" anchor="ctr"/>
+          <a:lstStyle/>
+          <a:p>
+            <a:pPr algn="ctr"/>
+          </a:p>
+        </p:txBody>
+      </p:sp>
+      <p:sp>
+        <p:nvSpPr>
+          <p:cNvPr id="11" name="TextBox 10"/>
+          <p:cNvSpPr txBox="1"/>
+          <p:nvPr/>
+        </p:nvSpPr>
+        <p:spPr>
+          <a:xfrm>
+            <a:off x="8092440" y="2011680"/>
+            <a:ext cx="3291840" cy="365760"/>
+          </a:xfrm>
+          <a:prstGeom prst="rect">
+            <a:avLst/>
+          </a:prstGeom>
+          <a:noFill/>
+        </p:spPr>
+        <p:txBody>
+          <a:bodyPr wrap="square" anchor="t" lIns="0" rIns="0" tIns="0" bIns="0">
+            <a:spAutoFit/>
+          </a:bodyPr>
+          <a:lstStyle/>
+          <a:p>
+            <a:pPr algn="l">
+              <a:lnSpc>
+                <a:spcPct val="100000"/>
+              </a:lnSpc>
+              <a:spcAft>
+                <a:spcPts val="0"/>
+              </a:spcAft>
+            </a:pPr>
+            <a:r>
+              <a:rPr sz="1250" b="1" i="0">
+                <a:solidFill>
+                  <a:srgbClr val="C9D2E3"/>
+                </a:solidFill>
+                <a:latin typeface="Calibri"/>
+              </a:rPr>
+              <a:t>THE RETURN</a:t>
+            </a:r>
+          </a:p>
+        </p:txBody>
+      </p:sp>
+      <p:sp>
+        <p:nvSpPr>
+          <p:cNvPr id="12" name="TextBox 11"/>
+          <p:cNvSpPr txBox="1"/>
+          <p:nvPr/>
+        </p:nvSpPr>
+        <p:spPr>
+          <a:xfrm>
+            <a:off x="8092440" y="2487168"/>
+            <a:ext cx="3291840" cy="914400"/>
+          </a:xfrm>
+          <a:prstGeom prst="rect">
+            <a:avLst/>
+          </a:prstGeom>
+          <a:noFill/>
+        </p:spPr>
+        <p:txBody>
+          <a:bodyPr wrap="square" anchor="t" lIns="0" rIns="0" tIns="0" bIns="0">
+            <a:spAutoFit/>
+          </a:bodyPr>
+          <a:lstStyle/>
+          <a:p>
+            <a:pPr algn="l">
+              <a:lnSpc>
+                <a:spcPct val="105000"/>
+              </a:lnSpc>
+              <a:spcAft>
+                <a:spcPts val="200"/>
+              </a:spcAft>
+            </a:pPr>
+            <a:r>
+              <a:rPr sz="1300" b="1" i="0">
+                <a:solidFill>
+                  <a:srgbClr val="F0B8BC"/>
+                </a:solidFill>
+                <a:latin typeface="Calibri"/>
+              </a:rPr>
+              <a:t>Sell now (nadir)</a:t>
+            </a:r>
+          </a:p>
+          <a:p>
+            <a:pPr algn="l">
+              <a:lnSpc>
+                <a:spcPct val="105000"/>
+              </a:lnSpc>
+              <a:spcAft>
+                <a:spcPts val="200"/>
+              </a:spcAft>
+            </a:pPr>
+            <a:r>
+              <a:rPr sz="1400" b="0" i="0">
+                <a:solidFill>
+                  <a:srgbClr val="FFFFFF"/>
+                </a:solidFill>
+                <a:latin typeface="Calibri"/>
+              </a:rPr>
+              <a:t>~$10–15M · a 45-FV bat</a:t>
+            </a:r>
+          </a:p>
+        </p:txBody>
+      </p:sp>
+      <p:sp>
+        <p:nvSpPr>
+          <p:cNvPr id="13" name="TextBox 12"/>
+          <p:cNvSpPr txBox="1"/>
+          <p:nvPr/>
+        </p:nvSpPr>
+        <p:spPr>
+          <a:xfrm>
+            <a:off x="8092440" y="3520440"/>
+            <a:ext cx="3291840" cy="1005840"/>
+          </a:xfrm>
+          <a:prstGeom prst="rect">
+            <a:avLst/>
+          </a:prstGeom>
+          <a:noFill/>
+        </p:spPr>
+        <p:txBody>
+          <a:bodyPr wrap="square" anchor="t" lIns="0" rIns="0" tIns="0" bIns="0">
+            <a:spAutoFit/>
+          </a:bodyPr>
+          <a:lstStyle/>
+          <a:p>
+            <a:pPr algn="l">
+              <a:lnSpc>
+                <a:spcPct val="105000"/>
+              </a:lnSpc>
+              <a:spcAft>
+                <a:spcPts val="200"/>
+              </a:spcAft>
+            </a:pPr>
+            <a:r>
+              <a:rPr sz="1300" b="1" i="0">
+                <a:solidFill>
+                  <a:srgbClr val="A9E5B5"/>
+                </a:solidFill>
+                <a:latin typeface="Calibri"/>
+              </a:rPr>
+              <a:t>Sell after rebound</a:t>
+            </a:r>
+          </a:p>
+          <a:p>
+            <a:pPr algn="l">
+              <a:lnSpc>
+                <a:spcPct val="105000"/>
+              </a:lnSpc>
+              <a:spcAft>
+                <a:spcPts val="200"/>
+              </a:spcAft>
+            </a:pPr>
+            <a:r>
+              <a:rPr sz="1400" b="0" i="0">
+                <a:solidFill>
+                  <a:srgbClr val="FFFFFF"/>
+                </a:solidFill>
+                <a:latin typeface="Calibri"/>
+              </a:rPr>
+              <a:t>~$28M · a 50-FV, top-100</a:t>
+            </a:r>
+          </a:p>
+          <a:p>
+            <a:pPr algn="l">
+              <a:lnSpc>
+                <a:spcPct val="105000"/>
+              </a:lnSpc>
+              <a:spcAft>
+                <a:spcPts val="200"/>
+              </a:spcAft>
+            </a:pPr>
+            <a:r>
+              <a:rPr sz="1400" b="0" i="0">
+                <a:solidFill>
+                  <a:srgbClr val="FFFFFF"/>
+                </a:solidFill>
+                <a:latin typeface="Calibri"/>
+              </a:rPr>
+              <a:t>controllable talent</a:t>
+            </a:r>
+          </a:p>
+        </p:txBody>
+      </p:sp>
+      <p:sp>
+        <p:nvSpPr>
+          <p:cNvPr id="14" name="TextBox 13"/>
+          <p:cNvSpPr txBox="1"/>
+          <p:nvPr/>
+        </p:nvSpPr>
+        <p:spPr>
+          <a:xfrm>
+            <a:off x="8092440" y="4617720"/>
+            <a:ext cx="3291840" cy="457200"/>
+          </a:xfrm>
+          <a:prstGeom prst="rect">
+            <a:avLst/>
+          </a:prstGeom>
+          <a:noFill/>
+        </p:spPr>
+        <p:txBody>
+          <a:bodyPr wrap="square" anchor="t" lIns="0" rIns="0" tIns="0" bIns="0">
+            <a:spAutoFit/>
+          </a:bodyPr>
+          <a:lstStyle/>
+          <a:p>
+            <a:pPr algn="l">
+              <a:lnSpc>
+                <a:spcPct val="105000"/>
+              </a:lnSpc>
+              <a:spcAft>
+                <a:spcPts val="400"/>
+              </a:spcAft>
+            </a:pPr>
+            <a:r>
+              <a:rPr sz="1150" b="0" i="1">
+                <a:solidFill>
+                  <a:srgbClr val="C9D2E3"/>
+                </a:solidFill>
+                <a:latin typeface="Calibri"/>
+              </a:rPr>
+              <a:t>One grade of return = the reason to wait.</a:t>
+            </a:r>
+          </a:p>
+        </p:txBody>
+      </p:sp>
+      <p:sp>
+        <p:nvSpPr>
+          <p:cNvPr id="15" name="TextBox 14"/>
+          <p:cNvSpPr txBox="1"/>
+          <p:nvPr/>
+        </p:nvSpPr>
+        <p:spPr>
+          <a:xfrm>
+            <a:off x="566928" y="6510528"/>
+            <a:ext cx="11064240" cy="274320"/>
+          </a:xfrm>
+          <a:prstGeom prst="rect">
+            <a:avLst/>
+          </a:prstGeom>
+          <a:noFill/>
+        </p:spPr>
+        <p:txBody>
+          <a:bodyPr wrap="square" anchor="t" lIns="0" rIns="0" tIns="0" bIns="0">
+            <a:spAutoFit/>
+          </a:bodyPr>
+          <a:lstStyle/>
+          <a:p>
+            <a:pPr algn="l">
+              <a:lnSpc>
+                <a:spcPct val="100000"/>
+              </a:lnSpc>
+              <a:spcAft>
+                <a:spcPts val="0"/>
+              </a:spcAft>
+            </a:pPr>
+            <a:r>
+              <a:rPr sz="900" b="0" i="0">
+                <a:solidFill>
+                  <a:srgbClr val="6B7280"/>
+                </a:solidFill>
+                <a:latin typeface="Calibri"/>
+              </a:rPr>
+              <a:t>Boston Red Sox · Outfield Strategy</a:t>
+            </a:r>
+            <a:r>
+              <a:rPr sz="900" b="0" i="0">
+                <a:solidFill>
+                  <a:srgbClr val="6B7280"/>
+                </a:solidFill>
+                <a:latin typeface="Calibri"/>
+              </a:rPr>
+              <a:t>      Analysis: Statcast / FanGraphs / MLB Stats API · salary Spotrac · July 2026</a:t>
+            </a:r>
+          </a:p>
+        </p:txBody>
+      </p:sp>
+    </p:spTree>
+  </p:cSld>
+  <p:clrMapOvr>
+    <a:masterClrMapping/>
+  </p:clrMapOvr>
+</p:sld>
+</file>
+
+<file path=ppt/slides/slide12.xml><?xml version="1.0" encoding="utf-8"?>
 <p:sld xmlns:a="http://schemas.openxmlformats.org/drawingml/2006/main" xmlns:p="http://schemas.openxmlformats.org/presentationml/2006/main" xmlns:r="http://schemas.openxmlformats.org/officeDocument/2006/relationships">
   <p:cSld>
     <p:bg>
@@ -8302,7 +8970,7 @@
                 </a:solidFill>
                 <a:latin typeface="Calibri"/>
               </a:rPr>
-              <a:t>CONTEXT</a:t>
+              <a:t>THE TIEBREAKER</a:t>
             </a:r>
           </a:p>
         </p:txBody>
@@ -8344,14 +9012,14 @@
                 </a:solidFill>
                 <a:latin typeface="Cambria"/>
               </a:rPr>
-              <a:t>Aging doesn't explain the drop — regression and luck do</a:t>
+              <a:t>The bat speed says it's the approach — not the body</a:t>
             </a:r>
           </a:p>
         </p:txBody>
       </p:sp>
       <p:pic>
         <p:nvPicPr>
-          <p:cNvPr id="4" name="Picture 3" descr="04_age_curve_overlay.png"/>
+          <p:cNvPr id="4" name="Picture 3" descr="10_erosion_decomposition.png"/>
           <p:cNvPicPr>
             <a:picLocks noChangeAspect="1"/>
           </p:cNvPicPr>
@@ -8365,8 +9033,8 @@
         </p:blipFill>
         <p:spPr>
           <a:xfrm>
-            <a:off x="2811779" y="1508760"/>
-            <a:ext cx="6583680" cy="4114800"/>
+            <a:off x="1597621" y="1554480"/>
+            <a:ext cx="8993709" cy="2926080"/>
           </a:xfrm>
           <a:prstGeom prst="rect">
             <a:avLst/>
@@ -8375,58 +9043,430 @@
       </p:pic>
       <p:sp>
         <p:nvSpPr>
-          <p:cNvPr id="5" name="TextBox 4"/>
-          <p:cNvSpPr txBox="1"/>
-          <p:nvPr/>
-        </p:nvSpPr>
-        <p:spPr>
-          <a:xfrm>
-            <a:off x="566928" y="5806440"/>
-            <a:ext cx="11064240" cy="640080"/>
-          </a:xfrm>
-          <a:prstGeom prst="rect">
-            <a:avLst/>
-          </a:prstGeom>
-          <a:noFill/>
-        </p:spPr>
-        <p:txBody>
-          <a:bodyPr wrap="square" anchor="t" lIns="0" rIns="0" tIns="0" bIns="0">
-            <a:spAutoFit/>
-          </a:bodyPr>
-          <a:lstStyle/>
-          <a:p>
-            <a:pPr algn="l">
-              <a:lnSpc>
-                <a:spcPct val="110000"/>
+          <p:cNvPr id="5" name="Rounded Rectangle 4"/>
+          <p:cNvSpPr/>
+          <p:nvPr/>
+        </p:nvSpPr>
+        <p:spPr>
+          <a:xfrm>
+            <a:off x="566928" y="4617720"/>
+            <a:ext cx="3502152" cy="1691640"/>
+          </a:xfrm>
+          <a:prstGeom prst="roundRect">
+            <a:avLst>
+              <a:gd name="adj" fmla="val 8000"/>
+            </a:avLst>
+          </a:prstGeom>
+          <a:solidFill>
+            <a:srgbClr val="FFFFFF"/>
+          </a:solidFill>
+          <a:ln w="12700">
+            <a:solidFill>
+              <a:srgbClr val="D7DAE0"/>
+            </a:solidFill>
+          </a:ln>
+          <a:effectLst/>
+        </p:spPr>
+        <p:style>
+          <a:lnRef idx="1">
+            <a:schemeClr val="accent1"/>
+          </a:lnRef>
+          <a:fillRef idx="3">
+            <a:schemeClr val="accent1"/>
+          </a:fillRef>
+          <a:effectRef idx="2">
+            <a:schemeClr val="accent1"/>
+          </a:effectRef>
+          <a:fontRef idx="minor">
+            <a:schemeClr val="lt1"/>
+          </a:fontRef>
+        </p:style>
+        <p:txBody>
+          <a:bodyPr rtlCol="0" anchor="ctr"/>
+          <a:lstStyle/>
+          <a:p>
+            <a:pPr algn="ctr"/>
+          </a:p>
+        </p:txBody>
+      </p:sp>
+      <p:sp>
+        <p:nvSpPr>
+          <p:cNvPr id="6" name="TextBox 5"/>
+          <p:cNvSpPr txBox="1"/>
+          <p:nvPr/>
+        </p:nvSpPr>
+        <p:spPr>
+          <a:xfrm>
+            <a:off x="804672" y="4754880"/>
+            <a:ext cx="3044952" cy="457200"/>
+          </a:xfrm>
+          <a:prstGeom prst="rect">
+            <a:avLst/>
+          </a:prstGeom>
+          <a:noFill/>
+        </p:spPr>
+        <p:txBody>
+          <a:bodyPr wrap="square" anchor="t" lIns="0" rIns="0" tIns="0" bIns="0">
+            <a:spAutoFit/>
+          </a:bodyPr>
+          <a:lstStyle/>
+          <a:p>
+            <a:pPr algn="l">
+              <a:lnSpc>
+                <a:spcPct val="100000"/>
+              </a:lnSpc>
+              <a:spcAft>
+                <a:spcPts val="0"/>
+              </a:spcAft>
+            </a:pPr>
+            <a:r>
+              <a:rPr sz="2100" b="1" i="0">
+                <a:solidFill>
+                  <a:srgbClr val="2E7D32"/>
+                </a:solidFill>
+                <a:latin typeface="Cambria"/>
+              </a:rPr>
+              <a:t>74.5 mph</a:t>
+            </a:r>
+            <a:r>
+              <a:rPr sz="1050" b="0" i="0">
+                <a:solidFill>
+                  <a:srgbClr val="6B7280"/>
+                </a:solidFill>
+                <a:latin typeface="Calibri"/>
+              </a:rPr>
+              <a:t>  avg bat speed, 2026 — UP from 72.7 in '24</a:t>
+            </a:r>
+          </a:p>
+        </p:txBody>
+      </p:sp>
+      <p:sp>
+        <p:nvSpPr>
+          <p:cNvPr id="7" name="TextBox 6"/>
+          <p:cNvSpPr txBox="1"/>
+          <p:nvPr/>
+        </p:nvSpPr>
+        <p:spPr>
+          <a:xfrm>
+            <a:off x="804672" y="5285232"/>
+            <a:ext cx="3044952" cy="914400"/>
+          </a:xfrm>
+          <a:prstGeom prst="rect">
+            <a:avLst/>
+          </a:prstGeom>
+          <a:noFill/>
+        </p:spPr>
+        <p:txBody>
+          <a:bodyPr wrap="square" anchor="t" lIns="0" rIns="0" tIns="0" bIns="0">
+            <a:spAutoFit/>
+          </a:bodyPr>
+          <a:lstStyle/>
+          <a:p>
+            <a:pPr algn="l">
+              <a:lnSpc>
+                <a:spcPct val="107000"/>
               </a:lnSpc>
               <a:spcAft>
                 <a:spcPts val="400"/>
               </a:spcAft>
             </a:pPr>
             <a:r>
-              <a:rPr sz="1400" b="0" i="0">
+              <a:rPr sz="1080" b="0" i="0">
                 <a:solidFill>
                   <a:srgbClr val="20232A"/>
                 </a:solidFill>
                 <a:latin typeface="Calibri"/>
               </a:rPr>
-              <a:t>2024 → 2026 wRC+ fell ~70 points; a normal age 27→29 curve predicts only ~7. </a:t>
-            </a:r>
-            <a:r>
-              <a:rPr sz="1400" b="1" i="0">
+              <a:t>A declining hitter swings slower. Duran is swinging harder, longer and steeper — pressing, not fading.</a:t>
+            </a:r>
+          </a:p>
+        </p:txBody>
+      </p:sp>
+      <p:sp>
+        <p:nvSpPr>
+          <p:cNvPr id="8" name="Rounded Rectangle 7"/>
+          <p:cNvSpPr/>
+          <p:nvPr/>
+        </p:nvSpPr>
+        <p:spPr>
+          <a:xfrm>
+            <a:off x="4352544" y="4617720"/>
+            <a:ext cx="3502152" cy="1691640"/>
+          </a:xfrm>
+          <a:prstGeom prst="roundRect">
+            <a:avLst>
+              <a:gd name="adj" fmla="val 8000"/>
+            </a:avLst>
+          </a:prstGeom>
+          <a:solidFill>
+            <a:srgbClr val="FFFFFF"/>
+          </a:solidFill>
+          <a:ln w="12700">
+            <a:solidFill>
+              <a:srgbClr val="D7DAE0"/>
+            </a:solidFill>
+          </a:ln>
+          <a:effectLst/>
+        </p:spPr>
+        <p:style>
+          <a:lnRef idx="1">
+            <a:schemeClr val="accent1"/>
+          </a:lnRef>
+          <a:fillRef idx="3">
+            <a:schemeClr val="accent1"/>
+          </a:fillRef>
+          <a:effectRef idx="2">
+            <a:schemeClr val="accent1"/>
+          </a:effectRef>
+          <a:fontRef idx="minor">
+            <a:schemeClr val="lt1"/>
+          </a:fontRef>
+        </p:style>
+        <p:txBody>
+          <a:bodyPr rtlCol="0" anchor="ctr"/>
+          <a:lstStyle/>
+          <a:p>
+            <a:pPr algn="ctr"/>
+          </a:p>
+        </p:txBody>
+      </p:sp>
+      <p:sp>
+        <p:nvSpPr>
+          <p:cNvPr id="9" name="TextBox 8"/>
+          <p:cNvSpPr txBox="1"/>
+          <p:nvPr/>
+        </p:nvSpPr>
+        <p:spPr>
+          <a:xfrm>
+            <a:off x="4590288" y="4754880"/>
+            <a:ext cx="3044952" cy="457200"/>
+          </a:xfrm>
+          <a:prstGeom prst="rect">
+            <a:avLst/>
+          </a:prstGeom>
+          <a:noFill/>
+        </p:spPr>
+        <p:txBody>
+          <a:bodyPr wrap="square" anchor="t" lIns="0" rIns="0" tIns="0" bIns="0">
+            <a:spAutoFit/>
+          </a:bodyPr>
+          <a:lstStyle/>
+          <a:p>
+            <a:pPr algn="l">
+              <a:lnSpc>
+                <a:spcPct val="100000"/>
+              </a:lnSpc>
+              <a:spcAft>
+                <a:spcPts val="0"/>
+              </a:spcAft>
+            </a:pPr>
+            <a:r>
+              <a:rPr sz="2100" b="1" i="0">
+                <a:solidFill>
+                  <a:srgbClr val="BD3039"/>
+                </a:solidFill>
+                <a:latin typeface="Cambria"/>
+              </a:rPr>
+              <a:t>29% whiff vs 95+</a:t>
+            </a:r>
+            <a:r>
+              <a:rPr sz="1050" b="0" i="0">
+                <a:solidFill>
+                  <a:srgbClr val="6B7280"/>
+                </a:solidFill>
+                <a:latin typeface="Calibri"/>
+              </a:rPr>
+              <a:t>  up from 16% in '24 — but not bat-death</a:t>
+            </a:r>
+          </a:p>
+        </p:txBody>
+      </p:sp>
+      <p:sp>
+        <p:nvSpPr>
+          <p:cNvPr id="10" name="TextBox 9"/>
+          <p:cNvSpPr txBox="1"/>
+          <p:nvPr/>
+        </p:nvSpPr>
+        <p:spPr>
+          <a:xfrm>
+            <a:off x="4590288" y="5285232"/>
+            <a:ext cx="3044952" cy="914400"/>
+          </a:xfrm>
+          <a:prstGeom prst="rect">
+            <a:avLst/>
+          </a:prstGeom>
+          <a:noFill/>
+        </p:spPr>
+        <p:txBody>
+          <a:bodyPr wrap="square" anchor="t" lIns="0" rIns="0" tIns="0" bIns="0">
+            <a:spAutoFit/>
+          </a:bodyPr>
+          <a:lstStyle/>
+          <a:p>
+            <a:pPr algn="l">
+              <a:lnSpc>
+                <a:spcPct val="107000"/>
+              </a:lnSpc>
+              <a:spcAft>
+                <a:spcPts val="400"/>
+              </a:spcAft>
+            </a:pPr>
+            <a:r>
+              <a:rPr sz="1080" b="0" i="0">
+                <a:solidFill>
+                  <a:srgbClr val="20232A"/>
+                </a:solidFill>
+                <a:latin typeface="Calibri"/>
+              </a:rPr>
+              <a:t>Whiffs on a rising bat speed = selling out. The chase leak is velo/offspeed; breaking-ball chase actually improved.</a:t>
+            </a:r>
+          </a:p>
+        </p:txBody>
+      </p:sp>
+      <p:sp>
+        <p:nvSpPr>
+          <p:cNvPr id="11" name="Rounded Rectangle 10"/>
+          <p:cNvSpPr/>
+          <p:nvPr/>
+        </p:nvSpPr>
+        <p:spPr>
+          <a:xfrm>
+            <a:off x="8138159" y="4617720"/>
+            <a:ext cx="3502152" cy="1691640"/>
+          </a:xfrm>
+          <a:prstGeom prst="roundRect">
+            <a:avLst>
+              <a:gd name="adj" fmla="val 8000"/>
+            </a:avLst>
+          </a:prstGeom>
+          <a:solidFill>
+            <a:srgbClr val="FFFFFF"/>
+          </a:solidFill>
+          <a:ln w="12700">
+            <a:solidFill>
+              <a:srgbClr val="D7DAE0"/>
+            </a:solidFill>
+          </a:ln>
+          <a:effectLst/>
+        </p:spPr>
+        <p:style>
+          <a:lnRef idx="1">
+            <a:schemeClr val="accent1"/>
+          </a:lnRef>
+          <a:fillRef idx="3">
+            <a:schemeClr val="accent1"/>
+          </a:fillRef>
+          <a:effectRef idx="2">
+            <a:schemeClr val="accent1"/>
+          </a:effectRef>
+          <a:fontRef idx="minor">
+            <a:schemeClr val="lt1"/>
+          </a:fontRef>
+        </p:style>
+        <p:txBody>
+          <a:bodyPr rtlCol="0" anchor="ctr"/>
+          <a:lstStyle/>
+          <a:p>
+            <a:pPr algn="ctr"/>
+          </a:p>
+        </p:txBody>
+      </p:sp>
+      <p:sp>
+        <p:nvSpPr>
+          <p:cNvPr id="12" name="TextBox 11"/>
+          <p:cNvSpPr txBox="1"/>
+          <p:nvPr/>
+        </p:nvSpPr>
+        <p:spPr>
+          <a:xfrm>
+            <a:off x="8375903" y="4754880"/>
+            <a:ext cx="3044952" cy="457200"/>
+          </a:xfrm>
+          <a:prstGeom prst="rect">
+            <a:avLst/>
+          </a:prstGeom>
+          <a:noFill/>
+        </p:spPr>
+        <p:txBody>
+          <a:bodyPr wrap="square" anchor="t" lIns="0" rIns="0" tIns="0" bIns="0">
+            <a:spAutoFit/>
+          </a:bodyPr>
+          <a:lstStyle/>
+          <a:p>
+            <a:pPr algn="l">
+              <a:lnSpc>
+                <a:spcPct val="100000"/>
+              </a:lnSpc>
+              <a:spcAft>
+                <a:spcPts val="0"/>
+              </a:spcAft>
+            </a:pPr>
+            <a:r>
+              <a:rPr sz="2100" b="1" i="0">
                 <a:solidFill>
                   <a:srgbClr val="0C2340"/>
                 </a:solidFill>
-                <a:latin typeface="Calibri"/>
-              </a:rPr>
-              <a:t>The gap is mean-reversion from an inflated peak plus a 2026 bad-luck tail — not skill cliff.</a:t>
-            </a:r>
-          </a:p>
-        </p:txBody>
-      </p:sp>
-      <p:sp>
-        <p:nvSpPr>
-          <p:cNvPr id="6" name="TextBox 5"/>
+                <a:latin typeface="Cambria"/>
+              </a:rPr>
+              <a:t>60 / 40</a:t>
+            </a:r>
+            <a:r>
+              <a:rPr sz="1050" b="0" i="0">
+                <a:solidFill>
+                  <a:srgbClr val="6B7280"/>
+                </a:solidFill>
+                <a:latin typeface="Calibri"/>
+              </a:rPr>
+              <a:t>  re-weighted scenario odds → 60% rebound</a:t>
+            </a:r>
+          </a:p>
+        </p:txBody>
+      </p:sp>
+      <p:sp>
+        <p:nvSpPr>
+          <p:cNvPr id="13" name="TextBox 12"/>
+          <p:cNvSpPr txBox="1"/>
+          <p:nvPr/>
+        </p:nvSpPr>
+        <p:spPr>
+          <a:xfrm>
+            <a:off x="8375903" y="5285232"/>
+            <a:ext cx="3044952" cy="914400"/>
+          </a:xfrm>
+          <a:prstGeom prst="rect">
+            <a:avLst/>
+          </a:prstGeom>
+          <a:noFill/>
+        </p:spPr>
+        <p:txBody>
+          <a:bodyPr wrap="square" anchor="t" lIns="0" rIns="0" tIns="0" bIns="0">
+            <a:spAutoFit/>
+          </a:bodyPr>
+          <a:lstStyle/>
+          <a:p>
+            <a:pPr algn="l">
+              <a:lnSpc>
+                <a:spcPct val="107000"/>
+              </a:lnSpc>
+              <a:spcAft>
+                <a:spcPts val="400"/>
+              </a:spcAft>
+            </a:pPr>
+            <a:r>
+              <a:rPr sz="1080" b="0" i="0">
+                <a:solidFill>
+                  <a:srgbClr val="20232A"/>
+                </a:solidFill>
+                <a:latin typeface="Calibri"/>
+              </a:rPr>
+              <a:t>Approach is fixable (see his own 2022→23 chase overhaul); the tools a buyer prices are intact.</a:t>
+            </a:r>
+          </a:p>
+        </p:txBody>
+      </p:sp>
+      <p:sp>
+        <p:nvSpPr>
+          <p:cNvPr id="14" name="TextBox 13"/>
           <p:cNvSpPr txBox="1"/>
           <p:nvPr/>
         </p:nvSpPr>
@@ -8538,7 +9578,7 @@
                 </a:solidFill>
                 <a:latin typeface="Calibri"/>
               </a:rPr>
-              <a:t>WHAT TO GET BACK</a:t>
+              <a:t>CONTEXT</a:t>
             </a:r>
           </a:p>
         </p:txBody>
@@ -8580,20 +9620,44 @@
                 </a:solidFill>
                 <a:latin typeface="Cambria"/>
               </a:rPr>
-              <a:t>Pitching is the strength — spend the surplus on offense</a:t>
-            </a:r>
-          </a:p>
-        </p:txBody>
-      </p:sp>
-      <p:sp>
-        <p:nvSpPr>
-          <p:cNvPr id="4" name="TextBox 3"/>
-          <p:cNvSpPr txBox="1"/>
-          <p:nvPr/>
-        </p:nvSpPr>
-        <p:spPr>
-          <a:xfrm>
-            <a:off x="566928" y="1572768"/>
+              <a:t>Aging doesn't explain the drop — regression and luck do</a:t>
+            </a:r>
+          </a:p>
+        </p:txBody>
+      </p:sp>
+      <p:pic>
+        <p:nvPicPr>
+          <p:cNvPr id="4" name="Picture 3" descr="04_age_curve_overlay.png"/>
+          <p:cNvPicPr>
+            <a:picLocks noChangeAspect="1"/>
+          </p:cNvPicPr>
+          <p:nvPr/>
+        </p:nvPicPr>
+        <p:blipFill>
+          <a:blip r:embed="rId2"/>
+          <a:stretch>
+            <a:fillRect/>
+          </a:stretch>
+        </p:blipFill>
+        <p:spPr>
+          <a:xfrm>
+            <a:off x="2811779" y="1508760"/>
+            <a:ext cx="6583680" cy="4114800"/>
+          </a:xfrm>
+          <a:prstGeom prst="rect">
+            <a:avLst/>
+          </a:prstGeom>
+        </p:spPr>
+      </p:pic>
+      <p:sp>
+        <p:nvSpPr>
+          <p:cNvPr id="5" name="TextBox 4"/>
+          <p:cNvSpPr txBox="1"/>
+          <p:nvPr/>
+        </p:nvSpPr>
+        <p:spPr>
+          <a:xfrm>
+            <a:off x="566928" y="5806440"/>
             <a:ext cx="11064240" cy="640080"/>
           </a:xfrm>
           <a:prstGeom prst="rect">
@@ -8609,633 +9673,36 @@
           <a:p>
             <a:pPr algn="l">
               <a:lnSpc>
-                <a:spcPct val="112000"/>
+                <a:spcPct val="110000"/>
               </a:lnSpc>
               <a:spcAft>
                 <a:spcPts val="400"/>
               </a:spcAft>
             </a:pPr>
             <a:r>
-              <a:rPr sz="1450" b="0" i="0">
+              <a:rPr sz="1400" b="0" i="0">
                 <a:solidFill>
                   <a:srgbClr val="20232A"/>
                 </a:solidFill>
                 <a:latin typeface="Calibri"/>
               </a:rPr>
-              <a:t>With a top-10 rotation (3.76 ERA) already carrying the club, trading bats for arms is backwards. Convert the outfield surplus into what's thin:</a:t>
-            </a:r>
-          </a:p>
-        </p:txBody>
-      </p:sp>
-      <p:sp>
-        <p:nvSpPr>
-          <p:cNvPr id="5" name="Rounded Rectangle 4"/>
-          <p:cNvSpPr/>
-          <p:nvPr/>
-        </p:nvSpPr>
-        <p:spPr>
-          <a:xfrm>
-            <a:off x="566928" y="2468880"/>
-            <a:ext cx="3502152" cy="2514600"/>
-          </a:xfrm>
-          <a:prstGeom prst="roundRect">
-            <a:avLst>
-              <a:gd name="adj" fmla="val 8000"/>
-            </a:avLst>
-          </a:prstGeom>
-          <a:solidFill>
-            <a:srgbClr val="FFFFFF"/>
-          </a:solidFill>
-          <a:ln w="12700">
-            <a:solidFill>
-              <a:srgbClr val="D7DAE0"/>
-            </a:solidFill>
-          </a:ln>
-          <a:effectLst/>
-        </p:spPr>
-        <p:style>
-          <a:lnRef idx="1">
-            <a:schemeClr val="accent1"/>
-          </a:lnRef>
-          <a:fillRef idx="3">
-            <a:schemeClr val="accent1"/>
-          </a:fillRef>
-          <a:effectRef idx="2">
-            <a:schemeClr val="accent1"/>
-          </a:effectRef>
-          <a:fontRef idx="minor">
-            <a:schemeClr val="lt1"/>
-          </a:fontRef>
-        </p:style>
-        <p:txBody>
-          <a:bodyPr rtlCol="0" anchor="ctr"/>
-          <a:lstStyle/>
-          <a:p>
-            <a:pPr algn="ctr"/>
-          </a:p>
-        </p:txBody>
-      </p:sp>
-      <p:sp>
-        <p:nvSpPr>
-          <p:cNvPr id="6" name="Oval 5"/>
-          <p:cNvSpPr/>
-          <p:nvPr/>
-        </p:nvSpPr>
-        <p:spPr>
-          <a:xfrm>
-            <a:off x="841247" y="2724912"/>
-            <a:ext cx="384048" cy="384048"/>
-          </a:xfrm>
-          <a:prstGeom prst="ellipse">
-            <a:avLst/>
-          </a:prstGeom>
-          <a:solidFill>
-            <a:srgbClr val="2E7D32"/>
-          </a:solidFill>
-          <a:ln>
-            <a:noFill/>
-          </a:ln>
-          <a:effectLst/>
-        </p:spPr>
-        <p:style>
-          <a:lnRef idx="1">
-            <a:schemeClr val="accent1"/>
-          </a:lnRef>
-          <a:fillRef idx="3">
-            <a:schemeClr val="accent1"/>
-          </a:fillRef>
-          <a:effectRef idx="2">
-            <a:schemeClr val="accent1"/>
-          </a:effectRef>
-          <a:fontRef idx="minor">
-            <a:schemeClr val="lt1"/>
-          </a:fontRef>
-        </p:style>
-        <p:txBody>
-          <a:bodyPr rtlCol="0" anchor="ctr" wrap="none"/>
-          <a:lstStyle/>
-          <a:p>
-            <a:pPr algn="ctr"/>
-            <a:r>
-              <a:rPr sz="1600" b="1">
-                <a:solidFill>
-                  <a:srgbClr val="FFFFFF"/>
-                </a:solidFill>
-                <a:latin typeface="Cambria"/>
-              </a:rPr>
-              <a:t>1</a:t>
-            </a:r>
-          </a:p>
-        </p:txBody>
-      </p:sp>
-      <p:sp>
-        <p:nvSpPr>
-          <p:cNvPr id="7" name="TextBox 6"/>
-          <p:cNvSpPr txBox="1"/>
-          <p:nvPr/>
-        </p:nvSpPr>
-        <p:spPr>
-          <a:xfrm>
-            <a:off x="841247" y="3310128"/>
-            <a:ext cx="2999232" cy="411480"/>
-          </a:xfrm>
-          <a:prstGeom prst="rect">
-            <a:avLst/>
-          </a:prstGeom>
-          <a:noFill/>
-        </p:spPr>
-        <p:txBody>
-          <a:bodyPr wrap="square" anchor="t" lIns="0" rIns="0" tIns="0" bIns="0">
-            <a:spAutoFit/>
-          </a:bodyPr>
-          <a:lstStyle/>
-          <a:p>
-            <a:pPr algn="l">
-              <a:lnSpc>
-                <a:spcPct val="100000"/>
-              </a:lnSpc>
-              <a:spcAft>
-                <a:spcPts val="0"/>
-              </a:spcAft>
-            </a:pPr>
-            <a:r>
-              <a:rPr sz="1600" b="1" i="0">
+              <a:t>2024 → 2026 wRC+ fell ~70 points; a normal age 27→29 curve predicts only ~7. </a:t>
+            </a:r>
+            <a:r>
+              <a:rPr sz="1400" b="1" i="0">
                 <a:solidFill>
                   <a:srgbClr val="0C2340"/>
                 </a:solidFill>
-                <a:latin typeface="Cambria"/>
-              </a:rPr>
-              <a:t>Controllable bats</a:t>
-            </a:r>
-          </a:p>
-        </p:txBody>
-      </p:sp>
-      <p:sp>
-        <p:nvSpPr>
-          <p:cNvPr id="8" name="TextBox 7"/>
-          <p:cNvSpPr txBox="1"/>
-          <p:nvPr/>
-        </p:nvSpPr>
-        <p:spPr>
-          <a:xfrm>
-            <a:off x="841247" y="3767328"/>
-            <a:ext cx="2999232" cy="1097280"/>
-          </a:xfrm>
-          <a:prstGeom prst="rect">
-            <a:avLst/>
-          </a:prstGeom>
-          <a:noFill/>
-        </p:spPr>
-        <p:txBody>
-          <a:bodyPr wrap="square" anchor="t" lIns="0" rIns="0" tIns="0" bIns="0">
-            <a:spAutoFit/>
-          </a:bodyPr>
-          <a:lstStyle/>
-          <a:p>
-            <a:pPr algn="l">
-              <a:lnSpc>
-                <a:spcPct val="110000"/>
-              </a:lnSpc>
-              <a:spcAft>
-                <a:spcPts val="400"/>
-              </a:spcAft>
-            </a:pPr>
-            <a:r>
-              <a:rPr sz="1280" b="0" i="0">
-                <a:solidFill>
-                  <a:srgbClr val="6B7280"/>
-                </a:solidFill>
-                <a:latin typeface="Calibri"/>
-              </a:rPr>
-              <a:t>Young, cost-controlled position players to fix an inconsistent lineup and lengthen it around the core.</a:t>
-            </a:r>
-          </a:p>
-        </p:txBody>
-      </p:sp>
-      <p:sp>
-        <p:nvSpPr>
-          <p:cNvPr id="9" name="Rounded Rectangle 8"/>
-          <p:cNvSpPr/>
-          <p:nvPr/>
-        </p:nvSpPr>
-        <p:spPr>
-          <a:xfrm>
-            <a:off x="4352544" y="2468880"/>
-            <a:ext cx="3502152" cy="2514600"/>
-          </a:xfrm>
-          <a:prstGeom prst="roundRect">
-            <a:avLst>
-              <a:gd name="adj" fmla="val 8000"/>
-            </a:avLst>
-          </a:prstGeom>
-          <a:solidFill>
-            <a:srgbClr val="FFFFFF"/>
-          </a:solidFill>
-          <a:ln w="12700">
-            <a:solidFill>
-              <a:srgbClr val="D7DAE0"/>
-            </a:solidFill>
-          </a:ln>
-          <a:effectLst/>
-        </p:spPr>
-        <p:style>
-          <a:lnRef idx="1">
-            <a:schemeClr val="accent1"/>
-          </a:lnRef>
-          <a:fillRef idx="3">
-            <a:schemeClr val="accent1"/>
-          </a:fillRef>
-          <a:effectRef idx="2">
-            <a:schemeClr val="accent1"/>
-          </a:effectRef>
-          <a:fontRef idx="minor">
-            <a:schemeClr val="lt1"/>
-          </a:fontRef>
-        </p:style>
-        <p:txBody>
-          <a:bodyPr rtlCol="0" anchor="ctr"/>
-          <a:lstStyle/>
-          <a:p>
-            <a:pPr algn="ctr"/>
-          </a:p>
-        </p:txBody>
-      </p:sp>
-      <p:sp>
-        <p:nvSpPr>
-          <p:cNvPr id="10" name="Oval 9"/>
-          <p:cNvSpPr/>
-          <p:nvPr/>
-        </p:nvSpPr>
-        <p:spPr>
-          <a:xfrm>
-            <a:off x="4626864" y="2724912"/>
-            <a:ext cx="384048" cy="384048"/>
-          </a:xfrm>
-          <a:prstGeom prst="ellipse">
-            <a:avLst/>
-          </a:prstGeom>
-          <a:solidFill>
-            <a:srgbClr val="0C2340"/>
-          </a:solidFill>
-          <a:ln>
-            <a:noFill/>
-          </a:ln>
-          <a:effectLst/>
-        </p:spPr>
-        <p:style>
-          <a:lnRef idx="1">
-            <a:schemeClr val="accent1"/>
-          </a:lnRef>
-          <a:fillRef idx="3">
-            <a:schemeClr val="accent1"/>
-          </a:fillRef>
-          <a:effectRef idx="2">
-            <a:schemeClr val="accent1"/>
-          </a:effectRef>
-          <a:fontRef idx="minor">
-            <a:schemeClr val="lt1"/>
-          </a:fontRef>
-        </p:style>
-        <p:txBody>
-          <a:bodyPr rtlCol="0" anchor="ctr" wrap="none"/>
-          <a:lstStyle/>
-          <a:p>
-            <a:pPr algn="ctr"/>
-            <a:r>
-              <a:rPr sz="1600" b="1">
-                <a:solidFill>
-                  <a:srgbClr val="FFFFFF"/>
-                </a:solidFill>
-                <a:latin typeface="Cambria"/>
-              </a:rPr>
-              <a:t>2</a:t>
-            </a:r>
-          </a:p>
-        </p:txBody>
-      </p:sp>
-      <p:sp>
-        <p:nvSpPr>
-          <p:cNvPr id="11" name="TextBox 10"/>
-          <p:cNvSpPr txBox="1"/>
-          <p:nvPr/>
-        </p:nvSpPr>
-        <p:spPr>
-          <a:xfrm>
-            <a:off x="4626864" y="3310128"/>
-            <a:ext cx="2999232" cy="411480"/>
-          </a:xfrm>
-          <a:prstGeom prst="rect">
-            <a:avLst/>
-          </a:prstGeom>
-          <a:noFill/>
-        </p:spPr>
-        <p:txBody>
-          <a:bodyPr wrap="square" anchor="t" lIns="0" rIns="0" tIns="0" bIns="0">
-            <a:spAutoFit/>
-          </a:bodyPr>
-          <a:lstStyle/>
-          <a:p>
-            <a:pPr algn="l">
-              <a:lnSpc>
-                <a:spcPct val="100000"/>
-              </a:lnSpc>
-              <a:spcAft>
-                <a:spcPts val="0"/>
-              </a:spcAft>
-            </a:pPr>
-            <a:r>
-              <a:rPr sz="1600" b="1" i="0">
-                <a:solidFill>
-                  <a:srgbClr val="0C2340"/>
-                </a:solidFill>
-                <a:latin typeface="Cambria"/>
-              </a:rPr>
-              <a:t>Best talent / upside</a:t>
-            </a:r>
-          </a:p>
-        </p:txBody>
-      </p:sp>
-      <p:sp>
-        <p:nvSpPr>
-          <p:cNvPr id="12" name="TextBox 11"/>
-          <p:cNvSpPr txBox="1"/>
-          <p:nvPr/>
-        </p:nvSpPr>
-        <p:spPr>
-          <a:xfrm>
-            <a:off x="4626864" y="3767328"/>
-            <a:ext cx="2999232" cy="1097280"/>
-          </a:xfrm>
-          <a:prstGeom prst="rect">
-            <a:avLst/>
-          </a:prstGeom>
-          <a:noFill/>
-        </p:spPr>
-        <p:txBody>
-          <a:bodyPr wrap="square" anchor="t" lIns="0" rIns="0" tIns="0" bIns="0">
-            <a:spAutoFit/>
-          </a:bodyPr>
-          <a:lstStyle/>
-          <a:p>
-            <a:pPr algn="l">
-              <a:lnSpc>
-                <a:spcPct val="110000"/>
-              </a:lnSpc>
-              <a:spcAft>
-                <a:spcPts val="400"/>
-              </a:spcAft>
-            </a:pPr>
-            <a:r>
-              <a:rPr sz="1280" b="0" i="0">
-                <a:solidFill>
-                  <a:srgbClr val="6B7280"/>
-                </a:solidFill>
-                <a:latin typeface="Calibri"/>
-              </a:rPr>
-              <a:t>In a retool you take the best player, not the positional patch — prospects and MLB-ready youth over rentals.</a:t>
-            </a:r>
-          </a:p>
-        </p:txBody>
-      </p:sp>
-      <p:sp>
-        <p:nvSpPr>
-          <p:cNvPr id="13" name="Rounded Rectangle 12"/>
-          <p:cNvSpPr/>
-          <p:nvPr/>
-        </p:nvSpPr>
-        <p:spPr>
-          <a:xfrm>
-            <a:off x="8138159" y="2468880"/>
-            <a:ext cx="3502152" cy="2514600"/>
-          </a:xfrm>
-          <a:prstGeom prst="roundRect">
-            <a:avLst>
-              <a:gd name="adj" fmla="val 8000"/>
-            </a:avLst>
-          </a:prstGeom>
-          <a:solidFill>
-            <a:srgbClr val="FFFFFF"/>
-          </a:solidFill>
-          <a:ln w="12700">
-            <a:solidFill>
-              <a:srgbClr val="D7DAE0"/>
-            </a:solidFill>
-          </a:ln>
-          <a:effectLst/>
-        </p:spPr>
-        <p:style>
-          <a:lnRef idx="1">
-            <a:schemeClr val="accent1"/>
-          </a:lnRef>
-          <a:fillRef idx="3">
-            <a:schemeClr val="accent1"/>
-          </a:fillRef>
-          <a:effectRef idx="2">
-            <a:schemeClr val="accent1"/>
-          </a:effectRef>
-          <a:fontRef idx="minor">
-            <a:schemeClr val="lt1"/>
-          </a:fontRef>
-        </p:style>
-        <p:txBody>
-          <a:bodyPr rtlCol="0" anchor="ctr"/>
-          <a:lstStyle/>
-          <a:p>
-            <a:pPr algn="ctr"/>
-          </a:p>
-        </p:txBody>
-      </p:sp>
-      <p:sp>
-        <p:nvSpPr>
-          <p:cNvPr id="14" name="Oval 13"/>
-          <p:cNvSpPr/>
-          <p:nvPr/>
-        </p:nvSpPr>
-        <p:spPr>
-          <a:xfrm>
-            <a:off x="8412480" y="2724912"/>
-            <a:ext cx="384048" cy="384048"/>
-          </a:xfrm>
-          <a:prstGeom prst="ellipse">
-            <a:avLst/>
-          </a:prstGeom>
-          <a:solidFill>
-            <a:srgbClr val="B7892F"/>
-          </a:solidFill>
-          <a:ln>
-            <a:noFill/>
-          </a:ln>
-          <a:effectLst/>
-        </p:spPr>
-        <p:style>
-          <a:lnRef idx="1">
-            <a:schemeClr val="accent1"/>
-          </a:lnRef>
-          <a:fillRef idx="3">
-            <a:schemeClr val="accent1"/>
-          </a:fillRef>
-          <a:effectRef idx="2">
-            <a:schemeClr val="accent1"/>
-          </a:effectRef>
-          <a:fontRef idx="minor">
-            <a:schemeClr val="lt1"/>
-          </a:fontRef>
-        </p:style>
-        <p:txBody>
-          <a:bodyPr rtlCol="0" anchor="ctr" wrap="none"/>
-          <a:lstStyle/>
-          <a:p>
-            <a:pPr algn="ctr"/>
-            <a:r>
-              <a:rPr sz="1600" b="1">
-                <a:solidFill>
-                  <a:srgbClr val="FFFFFF"/>
-                </a:solidFill>
-                <a:latin typeface="Cambria"/>
-              </a:rPr>
-              <a:t>3</a:t>
-            </a:r>
-          </a:p>
-        </p:txBody>
-      </p:sp>
-      <p:sp>
-        <p:nvSpPr>
-          <p:cNvPr id="15" name="TextBox 14"/>
-          <p:cNvSpPr txBox="1"/>
-          <p:nvPr/>
-        </p:nvSpPr>
-        <p:spPr>
-          <a:xfrm>
-            <a:off x="8412480" y="3310128"/>
-            <a:ext cx="2999232" cy="411480"/>
-          </a:xfrm>
-          <a:prstGeom prst="rect">
-            <a:avLst/>
-          </a:prstGeom>
-          <a:noFill/>
-        </p:spPr>
-        <p:txBody>
-          <a:bodyPr wrap="square" anchor="t" lIns="0" rIns="0" tIns="0" bIns="0">
-            <a:spAutoFit/>
-          </a:bodyPr>
-          <a:lstStyle/>
-          <a:p>
-            <a:pPr algn="l">
-              <a:lnSpc>
-                <a:spcPct val="100000"/>
-              </a:lnSpc>
-              <a:spcAft>
-                <a:spcPts val="0"/>
-              </a:spcAft>
-            </a:pPr>
-            <a:r>
-              <a:rPr sz="1600" b="1" i="0">
-                <a:solidFill>
-                  <a:srgbClr val="0C2340"/>
-                </a:solidFill>
-                <a:latin typeface="Cambria"/>
-              </a:rPr>
-              <a:t>Salary relief</a:t>
-            </a:r>
-          </a:p>
-        </p:txBody>
-      </p:sp>
-      <p:sp>
-        <p:nvSpPr>
-          <p:cNvPr id="16" name="TextBox 15"/>
-          <p:cNvSpPr txBox="1"/>
-          <p:nvPr/>
-        </p:nvSpPr>
-        <p:spPr>
-          <a:xfrm>
-            <a:off x="8412480" y="3767328"/>
-            <a:ext cx="2999232" cy="1097280"/>
-          </a:xfrm>
-          <a:prstGeom prst="rect">
-            <a:avLst/>
-          </a:prstGeom>
-          <a:noFill/>
-        </p:spPr>
-        <p:txBody>
-          <a:bodyPr wrap="square" anchor="t" lIns="0" rIns="0" tIns="0" bIns="0">
-            <a:spAutoFit/>
-          </a:bodyPr>
-          <a:lstStyle/>
-          <a:p>
-            <a:pPr algn="l">
-              <a:lnSpc>
-                <a:spcPct val="110000"/>
-              </a:lnSpc>
-              <a:spcAft>
-                <a:spcPts val="400"/>
-              </a:spcAft>
-            </a:pPr>
-            <a:r>
-              <a:rPr sz="1280" b="0" i="0">
-                <a:solidFill>
-                  <a:srgbClr val="6B7280"/>
-                </a:solidFill>
-                <a:latin typeface="Calibri"/>
-              </a:rPr>
-              <a:t>Attach Yoshida money where possible; free payroll for the 2027 window.</a:t>
-            </a:r>
-          </a:p>
-        </p:txBody>
-      </p:sp>
-      <p:sp>
-        <p:nvSpPr>
-          <p:cNvPr id="17" name="TextBox 16"/>
-          <p:cNvSpPr txBox="1"/>
-          <p:nvPr/>
-        </p:nvSpPr>
-        <p:spPr>
-          <a:xfrm>
-            <a:off x="566928" y="5257800"/>
-            <a:ext cx="11064240" cy="457200"/>
-          </a:xfrm>
-          <a:prstGeom prst="rect">
-            <a:avLst/>
-          </a:prstGeom>
-          <a:noFill/>
-        </p:spPr>
-        <p:txBody>
-          <a:bodyPr wrap="square" anchor="t" lIns="0" rIns="0" tIns="0" bIns="0">
-            <a:spAutoFit/>
-          </a:bodyPr>
-          <a:lstStyle/>
-          <a:p>
-            <a:pPr algn="l">
-              <a:lnSpc>
-                <a:spcPct val="100000"/>
-              </a:lnSpc>
-              <a:spcAft>
-                <a:spcPts val="0"/>
-              </a:spcAft>
-            </a:pPr>
-            <a:r>
-              <a:rPr sz="1400" b="1" i="1">
-                <a:solidFill>
-                  <a:srgbClr val="0C2340"/>
-                </a:solidFill>
-                <a:latin typeface="Calibri"/>
-              </a:rPr>
-              <a:t>Keep the arms. Cash the outfield. </a:t>
-            </a:r>
-            <a:r>
-              <a:rPr sz="1400" b="0" i="1">
-                <a:solidFill>
-                  <a:srgbClr val="6B7280"/>
-                </a:solidFill>
-                <a:latin typeface="Calibri"/>
-              </a:rPr>
-              <a:t>Build the 2027 lineup, don't rent the 2026 one.</a:t>
-            </a:r>
-          </a:p>
-        </p:txBody>
-      </p:sp>
-      <p:sp>
-        <p:nvSpPr>
-          <p:cNvPr id="18" name="TextBox 17"/>
+                <a:latin typeface="Calibri"/>
+              </a:rPr>
+              <a:t>The gap is mean-reversion from an inflated peak plus a 2026 bad-luck tail — not skill cliff.</a:t>
+            </a:r>
+          </a:p>
+        </p:txBody>
+      </p:sp>
+      <p:sp>
+        <p:nvSpPr>
+          <p:cNvPr id="6" name="TextBox 5"/>
           <p:cNvSpPr txBox="1"/>
           <p:nvPr/>
         </p:nvSpPr>
@@ -9347,7 +9814,7 @@
                 </a:solidFill>
                 <a:latin typeface="Calibri"/>
               </a:rPr>
-              <a:t>THE MARKET</a:t>
+              <a:t>WHAT TO GET BACK</a:t>
             </a:r>
           </a:p>
         </p:txBody>
@@ -9389,74 +9856,98 @@
                 </a:solidFill>
                 <a:latin typeface="Cambria"/>
               </a:rPr>
-              <a:t>Who pays: contenders with a hole in the outfield</a:t>
-            </a:r>
-          </a:p>
-        </p:txBody>
-      </p:sp>
-      <p:pic>
-        <p:nvPicPr>
-          <p:cNvPr id="4" name="Picture 3" descr="08_trade_fit_targets.png"/>
-          <p:cNvPicPr>
-            <a:picLocks noChangeAspect="1"/>
-          </p:cNvPicPr>
-          <p:nvPr/>
-        </p:nvPicPr>
-        <p:blipFill>
-          <a:blip r:embed="rId2"/>
-          <a:stretch>
-            <a:fillRect/>
-          </a:stretch>
-        </p:blipFill>
-        <p:spPr>
-          <a:xfrm>
-            <a:off x="757237" y="1463040"/>
-            <a:ext cx="6715125" cy="4297680"/>
-          </a:xfrm>
-          <a:prstGeom prst="rect">
-            <a:avLst/>
-          </a:prstGeom>
-        </p:spPr>
-      </p:pic>
-      <p:sp>
-        <p:nvSpPr>
-          <p:cNvPr id="5" name="TextBox 4"/>
-          <p:cNvSpPr txBox="1"/>
-          <p:nvPr/>
-        </p:nvSpPr>
-        <p:spPr>
-          <a:xfrm>
-            <a:off x="8183879" y="1691640"/>
-            <a:ext cx="3657600" cy="457200"/>
-          </a:xfrm>
-          <a:prstGeom prst="rect">
-            <a:avLst/>
-          </a:prstGeom>
-          <a:noFill/>
-        </p:spPr>
-        <p:txBody>
-          <a:bodyPr wrap="square" anchor="t" lIns="0" rIns="0" tIns="0" bIns="0">
-            <a:spAutoFit/>
-          </a:bodyPr>
-          <a:lstStyle/>
-          <a:p>
-            <a:pPr algn="l">
-              <a:lnSpc>
-                <a:spcPct val="100000"/>
-              </a:lnSpc>
-              <a:spcAft>
-                <a:spcPts val="0"/>
-              </a:spcAft>
-            </a:pPr>
-            <a:r>
-              <a:rPr sz="1500" b="1" i="0">
-                <a:solidFill>
-                  <a:srgbClr val="0C2340"/>
-                </a:solidFill>
-                <a:latin typeface="Cambria"/>
-              </a:rPr>
-              <a:t>Best-fit buyers</a:t>
-            </a:r>
+              <a:t>Pitching is the strength — spend the surplus on offense</a:t>
+            </a:r>
+          </a:p>
+        </p:txBody>
+      </p:sp>
+      <p:sp>
+        <p:nvSpPr>
+          <p:cNvPr id="4" name="TextBox 3"/>
+          <p:cNvSpPr txBox="1"/>
+          <p:nvPr/>
+        </p:nvSpPr>
+        <p:spPr>
+          <a:xfrm>
+            <a:off x="566928" y="1572768"/>
+            <a:ext cx="11064240" cy="640080"/>
+          </a:xfrm>
+          <a:prstGeom prst="rect">
+            <a:avLst/>
+          </a:prstGeom>
+          <a:noFill/>
+        </p:spPr>
+        <p:txBody>
+          <a:bodyPr wrap="square" anchor="t" lIns="0" rIns="0" tIns="0" bIns="0">
+            <a:spAutoFit/>
+          </a:bodyPr>
+          <a:lstStyle/>
+          <a:p>
+            <a:pPr algn="l">
+              <a:lnSpc>
+                <a:spcPct val="112000"/>
+              </a:lnSpc>
+              <a:spcAft>
+                <a:spcPts val="400"/>
+              </a:spcAft>
+            </a:pPr>
+            <a:r>
+              <a:rPr sz="1450" b="0" i="0">
+                <a:solidFill>
+                  <a:srgbClr val="20232A"/>
+                </a:solidFill>
+                <a:latin typeface="Calibri"/>
+              </a:rPr>
+              <a:t>With a top-10 rotation (3.76 ERA) already carrying the club, trading bats for arms is backwards. Convert the outfield surplus into what's thin:</a:t>
+            </a:r>
+          </a:p>
+        </p:txBody>
+      </p:sp>
+      <p:sp>
+        <p:nvSpPr>
+          <p:cNvPr id="5" name="Rounded Rectangle 4"/>
+          <p:cNvSpPr/>
+          <p:nvPr/>
+        </p:nvSpPr>
+        <p:spPr>
+          <a:xfrm>
+            <a:off x="566928" y="2468880"/>
+            <a:ext cx="3502152" cy="2514600"/>
+          </a:xfrm>
+          <a:prstGeom prst="roundRect">
+            <a:avLst>
+              <a:gd name="adj" fmla="val 8000"/>
+            </a:avLst>
+          </a:prstGeom>
+          <a:solidFill>
+            <a:srgbClr val="FFFFFF"/>
+          </a:solidFill>
+          <a:ln w="12700">
+            <a:solidFill>
+              <a:srgbClr val="D7DAE0"/>
+            </a:solidFill>
+          </a:ln>
+          <a:effectLst/>
+        </p:spPr>
+        <p:style>
+          <a:lnRef idx="1">
+            <a:schemeClr val="accent1"/>
+          </a:lnRef>
+          <a:fillRef idx="3">
+            <a:schemeClr val="accent1"/>
+          </a:fillRef>
+          <a:effectRef idx="2">
+            <a:schemeClr val="accent1"/>
+          </a:effectRef>
+          <a:fontRef idx="minor">
+            <a:schemeClr val="lt1"/>
+          </a:fontRef>
+        </p:style>
+        <p:txBody>
+          <a:bodyPr rtlCol="0" anchor="ctr"/>
+          <a:lstStyle/>
+          <a:p>
+            <a:pPr algn="ctr"/>
           </a:p>
         </p:txBody>
       </p:sp>
@@ -9468,14 +9959,14 @@
         </p:nvSpPr>
         <p:spPr>
           <a:xfrm>
-            <a:off x="8183879" y="2221991"/>
-            <a:ext cx="128016" cy="128016"/>
+            <a:off x="841247" y="2724912"/>
+            <a:ext cx="384048" cy="384048"/>
           </a:xfrm>
           <a:prstGeom prst="ellipse">
             <a:avLst/>
           </a:prstGeom>
           <a:solidFill>
-            <a:srgbClr val="BD3039"/>
+            <a:srgbClr val="2E7D32"/>
           </a:solidFill>
           <a:ln>
             <a:noFill/>
@@ -9497,6 +9988,147 @@
           </a:fontRef>
         </p:style>
         <p:txBody>
+          <a:bodyPr rtlCol="0" anchor="ctr" wrap="none"/>
+          <a:lstStyle/>
+          <a:p>
+            <a:pPr algn="ctr"/>
+            <a:r>
+              <a:rPr sz="1600" b="1">
+                <a:solidFill>
+                  <a:srgbClr val="FFFFFF"/>
+                </a:solidFill>
+                <a:latin typeface="Cambria"/>
+              </a:rPr>
+              <a:t>1</a:t>
+            </a:r>
+          </a:p>
+        </p:txBody>
+      </p:sp>
+      <p:sp>
+        <p:nvSpPr>
+          <p:cNvPr id="7" name="TextBox 6"/>
+          <p:cNvSpPr txBox="1"/>
+          <p:nvPr/>
+        </p:nvSpPr>
+        <p:spPr>
+          <a:xfrm>
+            <a:off x="841247" y="3310128"/>
+            <a:ext cx="2999232" cy="411480"/>
+          </a:xfrm>
+          <a:prstGeom prst="rect">
+            <a:avLst/>
+          </a:prstGeom>
+          <a:noFill/>
+        </p:spPr>
+        <p:txBody>
+          <a:bodyPr wrap="square" anchor="t" lIns="0" rIns="0" tIns="0" bIns="0">
+            <a:spAutoFit/>
+          </a:bodyPr>
+          <a:lstStyle/>
+          <a:p>
+            <a:pPr algn="l">
+              <a:lnSpc>
+                <a:spcPct val="100000"/>
+              </a:lnSpc>
+              <a:spcAft>
+                <a:spcPts val="0"/>
+              </a:spcAft>
+            </a:pPr>
+            <a:r>
+              <a:rPr sz="1600" b="1" i="0">
+                <a:solidFill>
+                  <a:srgbClr val="0C2340"/>
+                </a:solidFill>
+                <a:latin typeface="Cambria"/>
+              </a:rPr>
+              <a:t>Controllable bats</a:t>
+            </a:r>
+          </a:p>
+        </p:txBody>
+      </p:sp>
+      <p:sp>
+        <p:nvSpPr>
+          <p:cNvPr id="8" name="TextBox 7"/>
+          <p:cNvSpPr txBox="1"/>
+          <p:nvPr/>
+        </p:nvSpPr>
+        <p:spPr>
+          <a:xfrm>
+            <a:off x="841247" y="3767328"/>
+            <a:ext cx="2999232" cy="1097280"/>
+          </a:xfrm>
+          <a:prstGeom prst="rect">
+            <a:avLst/>
+          </a:prstGeom>
+          <a:noFill/>
+        </p:spPr>
+        <p:txBody>
+          <a:bodyPr wrap="square" anchor="t" lIns="0" rIns="0" tIns="0" bIns="0">
+            <a:spAutoFit/>
+          </a:bodyPr>
+          <a:lstStyle/>
+          <a:p>
+            <a:pPr algn="l">
+              <a:lnSpc>
+                <a:spcPct val="110000"/>
+              </a:lnSpc>
+              <a:spcAft>
+                <a:spcPts val="400"/>
+              </a:spcAft>
+            </a:pPr>
+            <a:r>
+              <a:rPr sz="1280" b="0" i="0">
+                <a:solidFill>
+                  <a:srgbClr val="6B7280"/>
+                </a:solidFill>
+                <a:latin typeface="Calibri"/>
+              </a:rPr>
+              <a:t>Young, cost-controlled position players to fix an inconsistent lineup and lengthen it around the core.</a:t>
+            </a:r>
+          </a:p>
+        </p:txBody>
+      </p:sp>
+      <p:sp>
+        <p:nvSpPr>
+          <p:cNvPr id="9" name="Rounded Rectangle 8"/>
+          <p:cNvSpPr/>
+          <p:nvPr/>
+        </p:nvSpPr>
+        <p:spPr>
+          <a:xfrm>
+            <a:off x="4352544" y="2468880"/>
+            <a:ext cx="3502152" cy="2514600"/>
+          </a:xfrm>
+          <a:prstGeom prst="roundRect">
+            <a:avLst>
+              <a:gd name="adj" fmla="val 8000"/>
+            </a:avLst>
+          </a:prstGeom>
+          <a:solidFill>
+            <a:srgbClr val="FFFFFF"/>
+          </a:solidFill>
+          <a:ln w="12700">
+            <a:solidFill>
+              <a:srgbClr val="D7DAE0"/>
+            </a:solidFill>
+          </a:ln>
+          <a:effectLst/>
+        </p:spPr>
+        <p:style>
+          <a:lnRef idx="1">
+            <a:schemeClr val="accent1"/>
+          </a:lnRef>
+          <a:fillRef idx="3">
+            <a:schemeClr val="accent1"/>
+          </a:fillRef>
+          <a:effectRef idx="2">
+            <a:schemeClr val="accent1"/>
+          </a:effectRef>
+          <a:fontRef idx="minor">
+            <a:schemeClr val="lt1"/>
+          </a:fontRef>
+        </p:style>
+        <p:txBody>
           <a:bodyPr rtlCol="0" anchor="ctr"/>
           <a:lstStyle/>
           <a:p>
@@ -9506,71 +10138,20 @@
       </p:sp>
       <p:sp>
         <p:nvSpPr>
-          <p:cNvPr id="7" name="TextBox 6"/>
-          <p:cNvSpPr txBox="1"/>
-          <p:nvPr/>
-        </p:nvSpPr>
-        <p:spPr>
-          <a:xfrm>
-            <a:off x="8439911" y="2194560"/>
-            <a:ext cx="3566160" cy="457200"/>
-          </a:xfrm>
-          <a:prstGeom prst="rect">
-            <a:avLst/>
-          </a:prstGeom>
-          <a:noFill/>
-        </p:spPr>
-        <p:txBody>
-          <a:bodyPr wrap="square" anchor="t" lIns="0" rIns="0" tIns="0" bIns="0">
-            <a:spAutoFit/>
-          </a:bodyPr>
-          <a:lstStyle/>
-          <a:p>
-            <a:pPr algn="l">
-              <a:lnSpc>
-                <a:spcPct val="100000"/>
-              </a:lnSpc>
-              <a:spcAft>
-                <a:spcPts val="0"/>
-              </a:spcAft>
-            </a:pPr>
-            <a:r>
-              <a:rPr sz="1400" b="1" i="0">
-                <a:solidFill>
-                  <a:srgbClr val="0C2340"/>
-                </a:solidFill>
-                <a:latin typeface="Calibri"/>
-              </a:rPr>
-              <a:t>Phillies  </a:t>
-            </a:r>
-            <a:r>
-              <a:rPr sz="1200" b="0" i="0">
-                <a:solidFill>
-                  <a:srgbClr val="6B7280"/>
-                </a:solidFill>
-                <a:latin typeface="Calibri"/>
-              </a:rPr>
-              <a:t>contender, 88 OF wRC+</a:t>
-            </a:r>
-          </a:p>
-        </p:txBody>
-      </p:sp>
-      <p:sp>
-        <p:nvSpPr>
-          <p:cNvPr id="8" name="Oval 7"/>
+          <p:cNvPr id="10" name="Oval 9"/>
           <p:cNvSpPr/>
           <p:nvPr/>
         </p:nvSpPr>
         <p:spPr>
           <a:xfrm>
-            <a:off x="8183879" y="2788920"/>
-            <a:ext cx="128016" cy="128016"/>
+            <a:off x="4626864" y="2724912"/>
+            <a:ext cx="384048" cy="384048"/>
           </a:xfrm>
           <a:prstGeom prst="ellipse">
             <a:avLst/>
           </a:prstGeom>
           <a:solidFill>
-            <a:srgbClr val="BD3039"/>
+            <a:srgbClr val="0C2340"/>
           </a:solidFill>
           <a:ln>
             <a:noFill/>
@@ -9592,6 +10173,147 @@
           </a:fontRef>
         </p:style>
         <p:txBody>
+          <a:bodyPr rtlCol="0" anchor="ctr" wrap="none"/>
+          <a:lstStyle/>
+          <a:p>
+            <a:pPr algn="ctr"/>
+            <a:r>
+              <a:rPr sz="1600" b="1">
+                <a:solidFill>
+                  <a:srgbClr val="FFFFFF"/>
+                </a:solidFill>
+                <a:latin typeface="Cambria"/>
+              </a:rPr>
+              <a:t>2</a:t>
+            </a:r>
+          </a:p>
+        </p:txBody>
+      </p:sp>
+      <p:sp>
+        <p:nvSpPr>
+          <p:cNvPr id="11" name="TextBox 10"/>
+          <p:cNvSpPr txBox="1"/>
+          <p:nvPr/>
+        </p:nvSpPr>
+        <p:spPr>
+          <a:xfrm>
+            <a:off x="4626864" y="3310128"/>
+            <a:ext cx="2999232" cy="411480"/>
+          </a:xfrm>
+          <a:prstGeom prst="rect">
+            <a:avLst/>
+          </a:prstGeom>
+          <a:noFill/>
+        </p:spPr>
+        <p:txBody>
+          <a:bodyPr wrap="square" anchor="t" lIns="0" rIns="0" tIns="0" bIns="0">
+            <a:spAutoFit/>
+          </a:bodyPr>
+          <a:lstStyle/>
+          <a:p>
+            <a:pPr algn="l">
+              <a:lnSpc>
+                <a:spcPct val="100000"/>
+              </a:lnSpc>
+              <a:spcAft>
+                <a:spcPts val="0"/>
+              </a:spcAft>
+            </a:pPr>
+            <a:r>
+              <a:rPr sz="1600" b="1" i="0">
+                <a:solidFill>
+                  <a:srgbClr val="0C2340"/>
+                </a:solidFill>
+                <a:latin typeface="Cambria"/>
+              </a:rPr>
+              <a:t>Best talent / upside</a:t>
+            </a:r>
+          </a:p>
+        </p:txBody>
+      </p:sp>
+      <p:sp>
+        <p:nvSpPr>
+          <p:cNvPr id="12" name="TextBox 11"/>
+          <p:cNvSpPr txBox="1"/>
+          <p:nvPr/>
+        </p:nvSpPr>
+        <p:spPr>
+          <a:xfrm>
+            <a:off x="4626864" y="3767328"/>
+            <a:ext cx="2999232" cy="1097280"/>
+          </a:xfrm>
+          <a:prstGeom prst="rect">
+            <a:avLst/>
+          </a:prstGeom>
+          <a:noFill/>
+        </p:spPr>
+        <p:txBody>
+          <a:bodyPr wrap="square" anchor="t" lIns="0" rIns="0" tIns="0" bIns="0">
+            <a:spAutoFit/>
+          </a:bodyPr>
+          <a:lstStyle/>
+          <a:p>
+            <a:pPr algn="l">
+              <a:lnSpc>
+                <a:spcPct val="110000"/>
+              </a:lnSpc>
+              <a:spcAft>
+                <a:spcPts val="400"/>
+              </a:spcAft>
+            </a:pPr>
+            <a:r>
+              <a:rPr sz="1280" b="0" i="0">
+                <a:solidFill>
+                  <a:srgbClr val="6B7280"/>
+                </a:solidFill>
+                <a:latin typeface="Calibri"/>
+              </a:rPr>
+              <a:t>In a retool you take the best player, not the positional patch — prospects and MLB-ready youth over rentals.</a:t>
+            </a:r>
+          </a:p>
+        </p:txBody>
+      </p:sp>
+      <p:sp>
+        <p:nvSpPr>
+          <p:cNvPr id="13" name="Rounded Rectangle 12"/>
+          <p:cNvSpPr/>
+          <p:nvPr/>
+        </p:nvSpPr>
+        <p:spPr>
+          <a:xfrm>
+            <a:off x="8138159" y="2468880"/>
+            <a:ext cx="3502152" cy="2514600"/>
+          </a:xfrm>
+          <a:prstGeom prst="roundRect">
+            <a:avLst>
+              <a:gd name="adj" fmla="val 8000"/>
+            </a:avLst>
+          </a:prstGeom>
+          <a:solidFill>
+            <a:srgbClr val="FFFFFF"/>
+          </a:solidFill>
+          <a:ln w="12700">
+            <a:solidFill>
+              <a:srgbClr val="D7DAE0"/>
+            </a:solidFill>
+          </a:ln>
+          <a:effectLst/>
+        </p:spPr>
+        <p:style>
+          <a:lnRef idx="1">
+            <a:schemeClr val="accent1"/>
+          </a:lnRef>
+          <a:fillRef idx="3">
+            <a:schemeClr val="accent1"/>
+          </a:fillRef>
+          <a:effectRef idx="2">
+            <a:schemeClr val="accent1"/>
+          </a:effectRef>
+          <a:fontRef idx="minor">
+            <a:schemeClr val="lt1"/>
+          </a:fontRef>
+        </p:style>
+        <p:txBody>
           <a:bodyPr rtlCol="0" anchor="ctr"/>
           <a:lstStyle/>
           <a:p>
@@ -9601,71 +10323,20 @@
       </p:sp>
       <p:sp>
         <p:nvSpPr>
-          <p:cNvPr id="9" name="TextBox 8"/>
-          <p:cNvSpPr txBox="1"/>
-          <p:nvPr/>
-        </p:nvSpPr>
-        <p:spPr>
-          <a:xfrm>
-            <a:off x="8439911" y="2761488"/>
-            <a:ext cx="3566160" cy="457200"/>
-          </a:xfrm>
-          <a:prstGeom prst="rect">
-            <a:avLst/>
-          </a:prstGeom>
-          <a:noFill/>
-        </p:spPr>
-        <p:txBody>
-          <a:bodyPr wrap="square" anchor="t" lIns="0" rIns="0" tIns="0" bIns="0">
-            <a:spAutoFit/>
-          </a:bodyPr>
-          <a:lstStyle/>
-          <a:p>
-            <a:pPr algn="l">
-              <a:lnSpc>
-                <a:spcPct val="100000"/>
-              </a:lnSpc>
-              <a:spcAft>
-                <a:spcPts val="0"/>
-              </a:spcAft>
-            </a:pPr>
-            <a:r>
-              <a:rPr sz="1400" b="1" i="0">
-                <a:solidFill>
-                  <a:srgbClr val="0C2340"/>
-                </a:solidFill>
-                <a:latin typeface="Calibri"/>
-              </a:rPr>
-              <a:t>Rays  </a:t>
-            </a:r>
-            <a:r>
-              <a:rPr sz="1200" b="0" i="0">
-                <a:solidFill>
-                  <a:srgbClr val="6B7280"/>
-                </a:solidFill>
-                <a:latin typeface="Calibri"/>
-              </a:rPr>
-              <a:t>.602, weak OF</a:t>
-            </a:r>
-          </a:p>
-        </p:txBody>
-      </p:sp>
-      <p:sp>
-        <p:nvSpPr>
-          <p:cNvPr id="10" name="Oval 9"/>
+          <p:cNvPr id="14" name="Oval 13"/>
           <p:cNvSpPr/>
           <p:nvPr/>
         </p:nvSpPr>
         <p:spPr>
           <a:xfrm>
-            <a:off x="8183879" y="3355847"/>
-            <a:ext cx="128016" cy="128016"/>
+            <a:off x="8412480" y="2724912"/>
+            <a:ext cx="384048" cy="384048"/>
           </a:xfrm>
           <a:prstGeom prst="ellipse">
             <a:avLst/>
           </a:prstGeom>
           <a:solidFill>
-            <a:srgbClr val="BD3039"/>
+            <a:srgbClr val="B7892F"/>
           </a:solidFill>
           <a:ln>
             <a:noFill/>
@@ -9687,23 +10358,32 @@
           </a:fontRef>
         </p:style>
         <p:txBody>
-          <a:bodyPr rtlCol="0" anchor="ctr"/>
+          <a:bodyPr rtlCol="0" anchor="ctr" wrap="none"/>
           <a:lstStyle/>
           <a:p>
             <a:pPr algn="ctr"/>
-          </a:p>
-        </p:txBody>
-      </p:sp>
-      <p:sp>
-        <p:nvSpPr>
-          <p:cNvPr id="11" name="TextBox 10"/>
-          <p:cNvSpPr txBox="1"/>
-          <p:nvPr/>
-        </p:nvSpPr>
-        <p:spPr>
-          <a:xfrm>
-            <a:off x="8439911" y="3328415"/>
-            <a:ext cx="3566160" cy="457200"/>
+            <a:r>
+              <a:rPr sz="1600" b="1">
+                <a:solidFill>
+                  <a:srgbClr val="FFFFFF"/>
+                </a:solidFill>
+                <a:latin typeface="Cambria"/>
+              </a:rPr>
+              <a:t>3</a:t>
+            </a:r>
+          </a:p>
+        </p:txBody>
+      </p:sp>
+      <p:sp>
+        <p:nvSpPr>
+          <p:cNvPr id="15" name="TextBox 14"/>
+          <p:cNvSpPr txBox="1"/>
+          <p:nvPr/>
+        </p:nvSpPr>
+        <p:spPr>
+          <a:xfrm>
+            <a:off x="8412480" y="3310128"/>
+            <a:ext cx="2999232" cy="411480"/>
           </a:xfrm>
           <a:prstGeom prst="rect">
             <a:avLst/>
@@ -9725,80 +10405,69 @@
               </a:spcAft>
             </a:pPr>
             <a:r>
-              <a:rPr sz="1400" b="1" i="0">
+              <a:rPr sz="1600" b="1" i="0">
                 <a:solidFill>
                   <a:srgbClr val="0C2340"/>
                 </a:solidFill>
-                <a:latin typeface="Calibri"/>
-              </a:rPr>
-              <a:t>Marlins  </a:t>
-            </a:r>
-            <a:r>
-              <a:rPr sz="1200" b="0" i="0">
+                <a:latin typeface="Cambria"/>
+              </a:rPr>
+              <a:t>Salary relief</a:t>
+            </a:r>
+          </a:p>
+        </p:txBody>
+      </p:sp>
+      <p:sp>
+        <p:nvSpPr>
+          <p:cNvPr id="16" name="TextBox 15"/>
+          <p:cNvSpPr txBox="1"/>
+          <p:nvPr/>
+        </p:nvSpPr>
+        <p:spPr>
+          <a:xfrm>
+            <a:off x="8412480" y="3767328"/>
+            <a:ext cx="2999232" cy="1097280"/>
+          </a:xfrm>
+          <a:prstGeom prst="rect">
+            <a:avLst/>
+          </a:prstGeom>
+          <a:noFill/>
+        </p:spPr>
+        <p:txBody>
+          <a:bodyPr wrap="square" anchor="t" lIns="0" rIns="0" tIns="0" bIns="0">
+            <a:spAutoFit/>
+          </a:bodyPr>
+          <a:lstStyle/>
+          <a:p>
+            <a:pPr algn="l">
+              <a:lnSpc>
+                <a:spcPct val="110000"/>
+              </a:lnSpc>
+              <a:spcAft>
+                <a:spcPts val="400"/>
+              </a:spcAft>
+            </a:pPr>
+            <a:r>
+              <a:rPr sz="1280" b="0" i="0">
                 <a:solidFill>
                   <a:srgbClr val="6B7280"/>
                 </a:solidFill>
                 <a:latin typeface="Calibri"/>
               </a:rPr>
-              <a:t>in the hunt, thin OF</a:t>
-            </a:r>
-          </a:p>
-        </p:txBody>
-      </p:sp>
-      <p:sp>
-        <p:nvSpPr>
-          <p:cNvPr id="12" name="Oval 11"/>
-          <p:cNvSpPr/>
-          <p:nvPr/>
-        </p:nvSpPr>
-        <p:spPr>
-          <a:xfrm>
-            <a:off x="8183879" y="3922776"/>
-            <a:ext cx="128016" cy="128016"/>
-          </a:xfrm>
-          <a:prstGeom prst="ellipse">
-            <a:avLst/>
-          </a:prstGeom>
-          <a:solidFill>
-            <a:srgbClr val="BD3039"/>
-          </a:solidFill>
-          <a:ln>
-            <a:noFill/>
-          </a:ln>
-          <a:effectLst/>
-        </p:spPr>
-        <p:style>
-          <a:lnRef idx="1">
-            <a:schemeClr val="accent1"/>
-          </a:lnRef>
-          <a:fillRef idx="3">
-            <a:schemeClr val="accent1"/>
-          </a:fillRef>
-          <a:effectRef idx="2">
-            <a:schemeClr val="accent1"/>
-          </a:effectRef>
-          <a:fontRef idx="minor">
-            <a:schemeClr val="lt1"/>
-          </a:fontRef>
-        </p:style>
-        <p:txBody>
-          <a:bodyPr rtlCol="0" anchor="ctr"/>
-          <a:lstStyle/>
-          <a:p>
-            <a:pPr algn="ctr"/>
-          </a:p>
-        </p:txBody>
-      </p:sp>
-      <p:sp>
-        <p:nvSpPr>
-          <p:cNvPr id="13" name="TextBox 12"/>
-          <p:cNvSpPr txBox="1"/>
-          <p:nvPr/>
-        </p:nvSpPr>
-        <p:spPr>
-          <a:xfrm>
-            <a:off x="8439911" y="3895344"/>
-            <a:ext cx="3566160" cy="457200"/>
+              <a:t>Attach Yoshida money where possible; free payroll for the 2027 window.</a:t>
+            </a:r>
+          </a:p>
+        </p:txBody>
+      </p:sp>
+      <p:sp>
+        <p:nvSpPr>
+          <p:cNvPr id="17" name="TextBox 16"/>
+          <p:cNvSpPr txBox="1"/>
+          <p:nvPr/>
+        </p:nvSpPr>
+        <p:spPr>
+          <a:xfrm>
+            <a:off x="566928" y="5257800"/>
+            <a:ext cx="11064240" cy="457200"/>
           </a:xfrm>
           <a:prstGeom prst="rect">
             <a:avLst/>
@@ -9820,89 +10489,29 @@
               </a:spcAft>
             </a:pPr>
             <a:r>
-              <a:rPr sz="1400" b="1" i="0">
+              <a:rPr sz="1400" b="1" i="1">
                 <a:solidFill>
                   <a:srgbClr val="0C2340"/>
                 </a:solidFill>
                 <a:latin typeface="Calibri"/>
               </a:rPr>
-              <a:t>Guardians  </a:t>
-            </a:r>
-            <a:r>
-              <a:rPr sz="1200" b="0" i="0">
+              <a:t>Keep the arms. Cash the outfield. </a:t>
+            </a:r>
+            <a:r>
+              <a:rPr sz="1400" b="0" i="1">
                 <a:solidFill>
                   <a:srgbClr val="6B7280"/>
                 </a:solidFill>
                 <a:latin typeface="Calibri"/>
               </a:rPr>
-              <a:t>contender, OF need</a:t>
-            </a:r>
-          </a:p>
-        </p:txBody>
-      </p:sp>
-      <p:sp>
-        <p:nvSpPr>
-          <p:cNvPr id="14" name="TextBox 13"/>
-          <p:cNvSpPr txBox="1"/>
-          <p:nvPr/>
-        </p:nvSpPr>
-        <p:spPr>
-          <a:xfrm>
-            <a:off x="8183879" y="4709160"/>
-            <a:ext cx="3657600" cy="1005840"/>
-          </a:xfrm>
-          <a:prstGeom prst="rect">
-            <a:avLst/>
-          </a:prstGeom>
-          <a:noFill/>
-        </p:spPr>
-        <p:txBody>
-          <a:bodyPr wrap="square" anchor="t" lIns="0" rIns="0" tIns="0" bIns="0">
-            <a:spAutoFit/>
-          </a:bodyPr>
-          <a:lstStyle/>
-          <a:p>
-            <a:pPr algn="l">
-              <a:lnSpc>
-                <a:spcPct val="112000"/>
-              </a:lnSpc>
-              <a:spcAft>
-                <a:spcPts val="400"/>
-              </a:spcAft>
-            </a:pPr>
-            <a:r>
-              <a:rPr sz="1250" b="0" i="0">
-                <a:solidFill>
-                  <a:srgbClr val="20232A"/>
-                </a:solidFill>
-                <a:latin typeface="Calibri"/>
-              </a:rPr>
-              <a:t>Trade a redundant bat to a team that needs one — and take back the </a:t>
-            </a:r>
-            <a:r>
-              <a:rPr sz="1250" b="1" i="0">
-                <a:solidFill>
-                  <a:srgbClr val="2E7D32"/>
-                </a:solidFill>
-                <a:latin typeface="Calibri"/>
-              </a:rPr>
-              <a:t>hitting/youth</a:t>
-            </a:r>
-            <a:r>
-              <a:rPr sz="1250" b="0" i="0">
-                <a:solidFill>
-                  <a:srgbClr val="20232A"/>
-                </a:solidFill>
-                <a:latin typeface="Calibri"/>
-              </a:rPr>
-              <a:t> Boston is short on.</a:t>
-            </a:r>
-          </a:p>
-        </p:txBody>
-      </p:sp>
-      <p:sp>
-        <p:nvSpPr>
-          <p:cNvPr id="15" name="TextBox 14"/>
+              <a:t>Build the 2027 lineup, don't rent the 2026 one.</a:t>
+            </a:r>
+          </a:p>
+        </p:txBody>
+      </p:sp>
+      <p:sp>
+        <p:nvSpPr>
+          <p:cNvPr id="18" name="TextBox 17"/>
           <p:cNvSpPr txBox="1"/>
           <p:nvPr/>
         </p:nvSpPr>

--- a/outputs/Red_Sox_Outfield_Strategy.pptx
+++ b/outputs/Red_Sox_Outfield_Strategy.pptx
@@ -3193,7 +3193,7 @@
                 </a:solidFill>
                 <a:latin typeface="Arial"/>
               </a:rPr>
-              <a:t>BOSTON RED SOX  ·  ROSTER STRATEGY</a:t>
+              <a:t>BOSTON RED SOX  ·  TRADE DEADLINE 2026</a:t>
             </a:r>
           </a:p>
         </p:txBody>
@@ -3235,7 +3235,7 @@
                 </a:solidFill>
                 <a:latin typeface="Arial"/>
               </a:rPr>
-              <a:t>Turning the Outfield Logjam</a:t>
+              <a:t>They Won 13 Straight.</a:t>
             </a:r>
           </a:p>
           <a:p>
@@ -3254,7 +3254,7 @@
                 </a:solidFill>
                 <a:latin typeface="Arial"/>
               </a:rPr>
-              <a:t>into an Asset</a:t>
+              <a:t>Now Comes the Hard Part</a:t>
             </a:r>
           </a:p>
         </p:txBody>
@@ -3296,7 +3296,7 @@
                 </a:solidFill>
                 <a:latin typeface="Arial"/>
               </a:rPr>
-              <a:t>Five bats for four spots, a playoff spot in hand, and a deadline plan the data actually supports: buy targeted, hold Duran at his nadir, and decide his future in the winter.</a:t>
+              <a:t>The hottest team in baseball was supposed to sell. A deadline case study: why the run differential saw the streak coming, what Boston should buy — and why the left fielder is the whole season in miniature.</a:t>
             </a:r>
           </a:p>
         </p:txBody>
@@ -7695,7 +7695,7 @@
                 </a:solidFill>
                 <a:latin typeface="Arial"/>
               </a:rPr>
-              <a:t>The record is finally catching up to the ballclub</a:t>
+              <a:t>The hottest team in baseball — and the math saw it coming</a:t>
             </a:r>
           </a:p>
         </p:txBody>
@@ -7785,7 +7785,7 @@
                 </a:solidFill>
                 <a:latin typeface="Arial"/>
               </a:rPr>
-              <a:t>75%</a:t>
+              <a:t>W13</a:t>
             </a:r>
           </a:p>
         </p:txBody>
@@ -7827,7 +7827,7 @@
                 </a:solidFill>
                 <a:latin typeface="Arial"/>
               </a:rPr>
-              <a:t>playoff odds</a:t>
+              <a:t>winning streak</a:t>
             </a:r>
           </a:p>
         </p:txBody>
@@ -7869,7 +7869,7 @@
                 </a:solidFill>
                 <a:latin typeface="Arial"/>
               </a:rPr>
-              <a:t>10,000 sims — a playoff team, not a corpse (fig. 12)</a:t>
+              <a:t>longest run in the majors this season</a:t>
             </a:r>
           </a:p>
         </p:txBody>
@@ -8133,7 +8133,7 @@
                 </a:solidFill>
                 <a:latin typeface="Arial"/>
               </a:rPr>
-              <a:t>WC3</a:t>
+              <a:t>75%</a:t>
             </a:r>
           </a:p>
         </p:txBody>
@@ -8175,7 +8175,7 @@
                 </a:solidFill>
                 <a:latin typeface="Arial"/>
               </a:rPr>
-              <a:t>spot currently held</a:t>
+              <a:t>playoff odds</a:t>
             </a:r>
           </a:p>
         </p:txBody>
@@ -8217,7 +8217,7 @@
                 </a:solidFill>
                 <a:latin typeface="Arial"/>
               </a:rPr>
-              <a:t>after a 13-game winning streak</a:t>
+              <a:t>10,000 sims — holding the final wild card (fig. 12)</a:t>
             </a:r>
           </a:p>
         </p:txBody>

--- a/outputs/Red_Sox_Outfield_Strategy.pptx
+++ b/outputs/Red_Sox_Outfield_Strategy.pptx
@@ -4061,7 +4061,7 @@
                 </a:solidFill>
                 <a:latin typeface="Arial"/>
               </a:rPr>
-              <a:t>Four trades that fit — arms out, bats and leverage in</a:t>
+              <a:t>Four trades that fit — ranked by what they cost the room</a:t>
             </a:r>
           </a:p>
         </p:txBody>
@@ -4147,11 +4147,11 @@
             <a:r>
               <a:rPr sz="1100" b="1" i="0">
                 <a:solidFill>
-                  <a:srgbClr val="E8615A"/>
-                </a:solidFill>
-                <a:latin typeface="Arial"/>
-              </a:rPr>
-              <a:t>1 · THE BIG SWING</a:t>
+                  <a:srgbClr val="58C08D"/>
+                </a:solidFill>
+                <a:latin typeface="Arial"/>
+              </a:rPr>
+              <a:t>1 · THE PEN FIX · ZERO DISRUPTION</a:t>
             </a:r>
           </a:p>
         </p:txBody>
@@ -4193,7 +4193,7 @@
                 </a:solidFill>
                 <a:latin typeface="Arial"/>
               </a:rPr>
-              <a:t>SS Zach Neto (LAA)</a:t>
+              <a:t>RHP Luke Weaver (NYM)</a:t>
             </a:r>
           </a:p>
         </p:txBody>
@@ -4235,7 +4235,7 @@
                 </a:solidFill>
                 <a:latin typeface="Arial"/>
               </a:rPr>
-              <a:t>For Tolle + Early + a 45 FV. Controlled through 2029; ~$80M of value each way. Painful, franchise-window correct.</a:t>
+              <a:t>For a 45 FV + 40 FV — prospects only, nobody loses a job or an inning. Elite relief year, signed through '27. The highest-probability marginal win on the board.</a:t>
             </a:r>
           </a:p>
         </p:txBody>
@@ -4321,11 +4321,11 @@
             <a:r>
               <a:rPr sz="1100" b="1" i="0">
                 <a:solidFill>
-                  <a:srgbClr val="EAF0F8"/>
-                </a:solidFill>
-                <a:latin typeface="Arial"/>
-              </a:rPr>
-              <a:t>2 · THE STABILIZER</a:t>
+                  <a:srgbClr val="E3B14E"/>
+                </a:solidFill>
+                <a:latin typeface="Arial"/>
+              </a:rPr>
+              <a:t>2 · THE CATCHER FIX · LOW</a:t>
             </a:r>
           </a:p>
         </p:txBody>
@@ -4367,7 +4367,7 @@
                 </a:solidFill>
                 <a:latin typeface="Arial"/>
               </a:rPr>
-              <a:t>2B Luis Arraez (SFG)</a:t>
+              <a:t>C Shea Langeliers (ATH)</a:t>
             </a:r>
           </a:p>
         </p:txBody>
@@ -4409,7 +4409,7 @@
                 </a:solidFill>
                 <a:latin typeface="Arial"/>
               </a:rPr>
-              <a:t>For Brayan Bello. Pure rental; Arraez takes 2B, Mayer slides to SS. Zero prospect cost — the most odds-proportionate move.</a:t>
+              <a:t>For Bennett + a 45 FV. Bennett is the 8th starter on a 5-slot staff; catcher is the one spot with no hot incumbent. Controlled through 2028.</a:t>
             </a:r>
           </a:p>
         </p:txBody>
@@ -4495,11 +4495,11 @@
             <a:r>
               <a:rPr sz="1100" b="1" i="0">
                 <a:solidFill>
-                  <a:srgbClr val="58C08D"/>
-                </a:solidFill>
-                <a:latin typeface="Arial"/>
-              </a:rPr>
-              <a:t>3 · THE PEN FIX</a:t>
+                  <a:srgbClr val="EAF0F8"/>
+                </a:solidFill>
+                <a:latin typeface="Arial"/>
+              </a:rPr>
+              <a:t>3 · THE STABILIZER · MODERATE</a:t>
             </a:r>
           </a:p>
         </p:txBody>
@@ -4541,7 +4541,7 @@
                 </a:solidFill>
                 <a:latin typeface="Arial"/>
               </a:rPr>
-              <a:t>RHP Luke Weaver (NYM)</a:t>
+              <a:t>2B Luis Arraez (SFG)</a:t>
             </a:r>
           </a:p>
         </p:txBody>
@@ -4583,7 +4583,7 @@
                 </a:solidFill>
                 <a:latin typeface="Arial"/>
               </a:rPr>
-              <a:t>For a 45 FV + 40 FV. Elite relief year, signed through '27. The highest-probability marginal win on the board.</a:t>
+              <a:t>For Brayan Bello — the first deal that touches the active roster. Zero prospect cost; Arraez fills a patchwork platoon spot, not a hot regular's.</a:t>
             </a:r>
           </a:p>
         </p:txBody>
@@ -4669,11 +4669,11 @@
             <a:r>
               <a:rPr sz="1100" b="1" i="0">
                 <a:solidFill>
-                  <a:srgbClr val="E3B14E"/>
-                </a:solidFill>
-                <a:latin typeface="Arial"/>
-              </a:rPr>
-              <a:t>4 · THE CATCHER FIX</a:t>
+                  <a:srgbClr val="E8615A"/>
+                </a:solidFill>
+                <a:latin typeface="Arial"/>
+              </a:rPr>
+              <a:t>4 · THE BIG SWING · HIGH — WAIT?</a:t>
             </a:r>
           </a:p>
         </p:txBody>
@@ -4715,7 +4715,7 @@
                 </a:solidFill>
                 <a:latin typeface="Arial"/>
               </a:rPr>
-              <a:t>C Shea Langeliers (ATH)</a:t>
+              <a:t>SS Zach Neto (LAA)</a:t>
             </a:r>
           </a:p>
         </p:txBody>
@@ -4757,7 +4757,7 @@
                 </a:solidFill>
                 <a:latin typeface="Arial"/>
               </a:rPr>
-              <a:t>For Bennett + a 45 FV. 120+ wRC+ catcher controlled through 2028; the A's always need cheap innings.</a:t>
+              <a:t>For Tolle + Early + a 45 FV: two arms out of a winning rotation mid-streak. Franchise-window correct — and still there in the winter. Controlled through 2029.</a:t>
             </a:r>
           </a:p>
         </p:txBody>
@@ -8773,7 +8773,7 @@
                 </a:solidFill>
                 <a:latin typeface="Arial"/>
               </a:rPr>
-              <a:t>Add at the holes</a:t>
+              <a:t>Add without disturbing the room</a:t>
             </a:r>
           </a:p>
           <a:p>
@@ -8792,7 +8792,7 @@
                 </a:solidFill>
                 <a:latin typeface="Arial"/>
               </a:rPr>
-              <a:t>A controllable infield bat, a reliever, and a catcher upgrade — targeted, no rental splurges (see the audit).</a:t>
+              <a:t>A reliever, a catcher, an infield bat — paid for in prospects before big-leaguers, filling empty spots, not hot ones.</a:t>
             </a:r>
           </a:p>
         </p:txBody>

--- a/outputs/Red_Sox_Outfield_Strategy.pptx
+++ b/outputs/Red_Sox_Outfield_Strategy.pptx
@@ -20,6 +20,7 @@
     <p:sldId id="268" r:id="rId19"/>
     <p:sldId id="269" r:id="rId20"/>
     <p:sldId id="270" r:id="rId21"/>
+    <p:sldId id="271" r:id="rId22"/>
   </p:sldIdLst>
   <p:sldSz cx="12191695" cy="6858000" type="screen4x3"/>
   <p:notesSz cx="6858000" cy="9144000"/>
@@ -4019,7 +4020,7 @@
                 </a:solidFill>
                 <a:latin typeface="Courier New"/>
               </a:rPr>
-              <a:t>// THE MENU</a:t>
+              <a:t>// THE CHEMISTRY VETO</a:t>
             </a:r>
           </a:p>
         </p:txBody>
@@ -4061,34 +4062,56 @@
                 </a:solidFill>
                 <a:latin typeface="Arial"/>
               </a:rPr>
-              <a:t>Four trades that fit — ranked by what they cost the room</a:t>
-            </a:r>
-          </a:p>
-        </p:txBody>
-      </p:sp>
-      <p:sp>
-        <p:nvSpPr>
-          <p:cNvPr id="4" name="Rounded Rectangle 3"/>
+              <a:t>Two catchers, one assignment system — don't touch it</a:t>
+            </a:r>
+          </a:p>
+        </p:txBody>
+      </p:sp>
+      <p:pic>
+        <p:nvPicPr>
+          <p:cNvPr id="4" name="Picture 3" descr="14_battery_map.png"/>
+          <p:cNvPicPr>
+            <a:picLocks noChangeAspect="1"/>
+          </p:cNvPicPr>
+          <p:nvPr/>
+        </p:nvPicPr>
+        <p:blipFill>
+          <a:blip r:embed="rId2"/>
+          <a:stretch>
+            <a:fillRect/>
+          </a:stretch>
+        </p:blipFill>
+        <p:spPr>
+          <a:xfrm>
+            <a:off x="518160" y="1554480"/>
+            <a:ext cx="7010399" cy="4206240"/>
+          </a:xfrm>
+          <a:prstGeom prst="rect">
+            <a:avLst/>
+          </a:prstGeom>
+        </p:spPr>
+      </p:pic>
+      <p:sp>
+        <p:nvSpPr>
+          <p:cNvPr id="5" name="Rounded Rectangle 4"/>
           <p:cNvSpPr/>
           <p:nvPr/>
         </p:nvSpPr>
         <p:spPr>
           <a:xfrm>
-            <a:off x="566928" y="1691640"/>
-            <a:ext cx="5358384" cy="1938528"/>
+            <a:off x="8001000" y="1773936"/>
+            <a:ext cx="146304" cy="146304"/>
           </a:xfrm>
           <a:prstGeom prst="roundRect">
             <a:avLst>
-              <a:gd name="adj" fmla="val 6000"/>
+              <a:gd name="adj" fmla="val 18000"/>
             </a:avLst>
           </a:prstGeom>
           <a:solidFill>
-            <a:srgbClr val="121E33"/>
+            <a:srgbClr val="E8615A"/>
           </a:solidFill>
-          <a:ln w="12700">
-            <a:solidFill>
-              <a:srgbClr val="26334E"/>
-            </a:solidFill>
+          <a:ln>
+            <a:noFill/>
           </a:ln>
           <a:effectLst/>
         </p:spPr>
@@ -4116,116 +4139,51 @@
       </p:sp>
       <p:sp>
         <p:nvSpPr>
-          <p:cNvPr id="5" name="TextBox 4"/>
-          <p:cNvSpPr txBox="1"/>
-          <p:nvPr/>
-        </p:nvSpPr>
-        <p:spPr>
-          <a:xfrm>
-            <a:off x="822960" y="1856232"/>
-            <a:ext cx="4855464" cy="292608"/>
-          </a:xfrm>
-          <a:prstGeom prst="rect">
-            <a:avLst/>
-          </a:prstGeom>
-          <a:noFill/>
-        </p:spPr>
-        <p:txBody>
-          <a:bodyPr wrap="square" anchor="t" lIns="0" rIns="0" tIns="0" bIns="0">
-            <a:spAutoFit/>
-          </a:bodyPr>
-          <a:lstStyle/>
-          <a:p>
-            <a:pPr algn="l">
-              <a:lnSpc>
-                <a:spcPct val="100000"/>
-              </a:lnSpc>
-              <a:spcAft>
-                <a:spcPts val="0"/>
-              </a:spcAft>
-            </a:pPr>
-            <a:r>
-              <a:rPr sz="1100" b="1" i="0">
-                <a:solidFill>
-                  <a:srgbClr val="58C08D"/>
-                </a:solidFill>
-                <a:latin typeface="Arial"/>
-              </a:rPr>
-              <a:t>1 · THE PEN FIX · ZERO DISRUPTION</a:t>
-            </a:r>
-          </a:p>
-        </p:txBody>
-      </p:sp>
-      <p:sp>
-        <p:nvSpPr>
           <p:cNvPr id="6" name="TextBox 5"/>
           <p:cNvSpPr txBox="1"/>
           <p:nvPr/>
         </p:nvSpPr>
         <p:spPr>
           <a:xfrm>
-            <a:off x="822960" y="2148840"/>
-            <a:ext cx="4855464" cy="365760"/>
-          </a:xfrm>
-          <a:prstGeom prst="rect">
-            <a:avLst/>
-          </a:prstGeom>
-          <a:noFill/>
-        </p:spPr>
-        <p:txBody>
-          <a:bodyPr wrap="square" anchor="t" lIns="0" rIns="0" tIns="0" bIns="0">
-            <a:spAutoFit/>
-          </a:bodyPr>
-          <a:lstStyle/>
-          <a:p>
-            <a:pPr algn="l">
-              <a:lnSpc>
-                <a:spcPct val="100000"/>
-              </a:lnSpc>
-              <a:spcAft>
-                <a:spcPts val="0"/>
-              </a:spcAft>
-            </a:pPr>
-            <a:r>
-              <a:rPr sz="1650" b="1" i="0">
+            <a:off x="8293608" y="1737360"/>
+            <a:ext cx="3749039" cy="1097280"/>
+          </a:xfrm>
+          <a:prstGeom prst="rect">
+            <a:avLst/>
+          </a:prstGeom>
+          <a:noFill/>
+        </p:spPr>
+        <p:txBody>
+          <a:bodyPr wrap="square" anchor="t" lIns="0" rIns="0" tIns="0" bIns="0">
+            <a:spAutoFit/>
+          </a:bodyPr>
+          <a:lstStyle/>
+          <a:p>
+            <a:pPr algn="l">
+              <a:lnSpc>
+                <a:spcPct val="107000"/>
+              </a:lnSpc>
+              <a:spcAft>
+                <a:spcPts val="200"/>
+              </a:spcAft>
+            </a:pPr>
+            <a:r>
+              <a:rPr sz="1350" b="1" i="0">
                 <a:solidFill>
                   <a:srgbClr val="EAF0F8"/>
                 </a:solidFill>
                 <a:latin typeface="Arial"/>
               </a:rPr>
-              <a:t>RHP Luke Weaver (NYM)</a:t>
-            </a:r>
-          </a:p>
-        </p:txBody>
-      </p:sp>
-      <p:sp>
-        <p:nvSpPr>
-          <p:cNvPr id="7" name="TextBox 6"/>
-          <p:cNvSpPr txBox="1"/>
-          <p:nvPr/>
-        </p:nvSpPr>
-        <p:spPr>
-          <a:xfrm>
-            <a:off x="822960" y="2560320"/>
-            <a:ext cx="4855464" cy="960120"/>
-          </a:xfrm>
-          <a:prstGeom prst="rect">
-            <a:avLst/>
-          </a:prstGeom>
-          <a:noFill/>
-        </p:spPr>
-        <p:txBody>
-          <a:bodyPr wrap="square" anchor="t" lIns="0" rIns="0" tIns="0" bIns="0">
-            <a:spAutoFit/>
-          </a:bodyPr>
-          <a:lstStyle/>
-          <a:p>
-            <a:pPr algn="l">
-              <a:lnSpc>
-                <a:spcPct val="110000"/>
-              </a:lnSpc>
-              <a:spcAft>
-                <a:spcPts val="400"/>
+              <a:t>The staff works with both</a:t>
+            </a:r>
+          </a:p>
+          <a:p>
+            <a:pPr algn="l">
+              <a:lnSpc>
+                <a:spcPct val="107000"/>
+              </a:lnSpc>
+              <a:spcAft>
+                <a:spcPts val="200"/>
               </a:spcAft>
             </a:pPr>
             <a:r>
@@ -4235,34 +4193,32 @@
                 </a:solidFill>
                 <a:latin typeface="Arial"/>
               </a:rPr>
-              <a:t>For a 45 FV + 40 FV — prospects only, nobody loses a job or an inning. Elite relief year, signed through '27. The highest-probability marginal win on the board.</a:t>
-            </a:r>
-          </a:p>
-        </p:txBody>
-      </p:sp>
-      <p:sp>
-        <p:nvSpPr>
-          <p:cNvPr id="8" name="Rounded Rectangle 7"/>
+              <a:t>3.47 RA9 with Wong, 4.17 with Narváez — the run-prevention core of the streak.</a:t>
+            </a:r>
+          </a:p>
+        </p:txBody>
+      </p:sp>
+      <p:sp>
+        <p:nvSpPr>
+          <p:cNvPr id="7" name="Rounded Rectangle 6"/>
           <p:cNvSpPr/>
           <p:nvPr/>
         </p:nvSpPr>
         <p:spPr>
           <a:xfrm>
-            <a:off x="6227064" y="1691640"/>
-            <a:ext cx="5358384" cy="1938528"/>
+            <a:off x="8001000" y="2889504"/>
+            <a:ext cx="146304" cy="146304"/>
           </a:xfrm>
           <a:prstGeom prst="roundRect">
             <a:avLst>
-              <a:gd name="adj" fmla="val 6000"/>
+              <a:gd name="adj" fmla="val 18000"/>
             </a:avLst>
           </a:prstGeom>
           <a:solidFill>
-            <a:srgbClr val="121E33"/>
+            <a:srgbClr val="EAF0F8"/>
           </a:solidFill>
-          <a:ln w="12700">
-            <a:solidFill>
-              <a:srgbClr val="26334E"/>
-            </a:solidFill>
+          <a:ln>
+            <a:noFill/>
           </a:ln>
           <a:effectLst/>
         </p:spPr>
@@ -4290,116 +4246,51 @@
       </p:sp>
       <p:sp>
         <p:nvSpPr>
-          <p:cNvPr id="9" name="TextBox 8"/>
-          <p:cNvSpPr txBox="1"/>
-          <p:nvPr/>
-        </p:nvSpPr>
-        <p:spPr>
-          <a:xfrm>
-            <a:off x="6483096" y="1856232"/>
-            <a:ext cx="4855464" cy="292608"/>
-          </a:xfrm>
-          <a:prstGeom prst="rect">
-            <a:avLst/>
-          </a:prstGeom>
-          <a:noFill/>
-        </p:spPr>
-        <p:txBody>
-          <a:bodyPr wrap="square" anchor="t" lIns="0" rIns="0" tIns="0" bIns="0">
-            <a:spAutoFit/>
-          </a:bodyPr>
-          <a:lstStyle/>
-          <a:p>
-            <a:pPr algn="l">
-              <a:lnSpc>
-                <a:spcPct val="100000"/>
-              </a:lnSpc>
-              <a:spcAft>
-                <a:spcPts val="0"/>
-              </a:spcAft>
-            </a:pPr>
-            <a:r>
-              <a:rPr sz="1100" b="1" i="0">
-                <a:solidFill>
-                  <a:srgbClr val="E3B14E"/>
-                </a:solidFill>
-                <a:latin typeface="Arial"/>
-              </a:rPr>
-              <a:t>2 · THE CATCHER FIX · LOW</a:t>
-            </a:r>
-          </a:p>
-        </p:txBody>
-      </p:sp>
-      <p:sp>
-        <p:nvSpPr>
-          <p:cNvPr id="10" name="TextBox 9"/>
-          <p:cNvSpPr txBox="1"/>
-          <p:nvPr/>
-        </p:nvSpPr>
-        <p:spPr>
-          <a:xfrm>
-            <a:off x="6483096" y="2148840"/>
-            <a:ext cx="4855464" cy="365760"/>
-          </a:xfrm>
-          <a:prstGeom prst="rect">
-            <a:avLst/>
-          </a:prstGeom>
-          <a:noFill/>
-        </p:spPr>
-        <p:txBody>
-          <a:bodyPr wrap="square" anchor="t" lIns="0" rIns="0" tIns="0" bIns="0">
-            <a:spAutoFit/>
-          </a:bodyPr>
-          <a:lstStyle/>
-          <a:p>
-            <a:pPr algn="l">
-              <a:lnSpc>
-                <a:spcPct val="100000"/>
-              </a:lnSpc>
-              <a:spcAft>
-                <a:spcPts val="0"/>
-              </a:spcAft>
-            </a:pPr>
-            <a:r>
-              <a:rPr sz="1650" b="1" i="0">
+          <p:cNvPr id="8" name="TextBox 7"/>
+          <p:cNvSpPr txBox="1"/>
+          <p:nvPr/>
+        </p:nvSpPr>
+        <p:spPr>
+          <a:xfrm>
+            <a:off x="8293608" y="2852928"/>
+            <a:ext cx="3749039" cy="1097280"/>
+          </a:xfrm>
+          <a:prstGeom prst="rect">
+            <a:avLst/>
+          </a:prstGeom>
+          <a:noFill/>
+        </p:spPr>
+        <p:txBody>
+          <a:bodyPr wrap="square" anchor="t" lIns="0" rIns="0" tIns="0" bIns="0">
+            <a:spAutoFit/>
+          </a:bodyPr>
+          <a:lstStyle/>
+          <a:p>
+            <a:pPr algn="l">
+              <a:lnSpc>
+                <a:spcPct val="107000"/>
+              </a:lnSpc>
+              <a:spcAft>
+                <a:spcPts val="200"/>
+              </a:spcAft>
+            </a:pPr>
+            <a:r>
+              <a:rPr sz="1350" b="1" i="0">
                 <a:solidFill>
                   <a:srgbClr val="EAF0F8"/>
                 </a:solidFill>
                 <a:latin typeface="Arial"/>
               </a:rPr>
-              <a:t>C Shea Langeliers (ATH)</a:t>
-            </a:r>
-          </a:p>
-        </p:txBody>
-      </p:sp>
-      <p:sp>
-        <p:nvSpPr>
-          <p:cNvPr id="11" name="TextBox 10"/>
-          <p:cNvSpPr txBox="1"/>
-          <p:nvPr/>
-        </p:nvSpPr>
-        <p:spPr>
-          <a:xfrm>
-            <a:off x="6483096" y="2560320"/>
-            <a:ext cx="4855464" cy="960120"/>
-          </a:xfrm>
-          <a:prstGeom prst="rect">
-            <a:avLst/>
-          </a:prstGeom>
-          <a:noFill/>
-        </p:spPr>
-        <p:txBody>
-          <a:bodyPr wrap="square" anchor="t" lIns="0" rIns="0" tIns="0" bIns="0">
-            <a:spAutoFit/>
-          </a:bodyPr>
-          <a:lstStyle/>
-          <a:p>
-            <a:pPr algn="l">
-              <a:lnSpc>
-                <a:spcPct val="110000"/>
-              </a:lnSpc>
-              <a:spcAft>
-                <a:spcPts val="400"/>
+              <a:t>Every arm has a guy</a:t>
+            </a:r>
+          </a:p>
+          <a:p>
+            <a:pPr algn="l">
+              <a:lnSpc>
+                <a:spcPct val="107000"/>
+              </a:lnSpc>
+              <a:spcAft>
+                <a:spcPts val="200"/>
               </a:spcAft>
             </a:pPr>
             <a:r>
@@ -4409,34 +4300,32 @@
                 </a:solidFill>
                 <a:latin typeface="Arial"/>
               </a:rPr>
-              <a:t>For Bennett + a 45 FV. Bennett is the 8th starter on a 5-slot staff; catcher is the one spot with no hot incumbent. Controlled through 2028.</a:t>
-            </a:r>
-          </a:p>
-        </p:txBody>
-      </p:sp>
-      <p:sp>
-        <p:nvSpPr>
-          <p:cNvPr id="12" name="Rounded Rectangle 11"/>
+              <a:t>Gray: 1.86 with Wong (4.40 with Narváez). Bennett: 1.12 with Narváez. Bello: ~5 runs better with Wong.</a:t>
+            </a:r>
+          </a:p>
+        </p:txBody>
+      </p:sp>
+      <p:sp>
+        <p:nvSpPr>
+          <p:cNvPr id="9" name="Rounded Rectangle 8"/>
           <p:cNvSpPr/>
           <p:nvPr/>
         </p:nvSpPr>
         <p:spPr>
           <a:xfrm>
-            <a:off x="566928" y="3886200"/>
-            <a:ext cx="5358384" cy="1938528"/>
+            <a:off x="8001000" y="4005072"/>
+            <a:ext cx="146304" cy="146304"/>
           </a:xfrm>
           <a:prstGeom prst="roundRect">
             <a:avLst>
-              <a:gd name="adj" fmla="val 6000"/>
+              <a:gd name="adj" fmla="val 18000"/>
             </a:avLst>
           </a:prstGeom>
           <a:solidFill>
-            <a:srgbClr val="121E33"/>
+            <a:srgbClr val="E3B14E"/>
           </a:solidFill>
-          <a:ln w="12700">
-            <a:solidFill>
-              <a:srgbClr val="26334E"/>
-            </a:solidFill>
+          <a:ln>
+            <a:noFill/>
           </a:ln>
           <a:effectLst/>
         </p:spPr>
@@ -4464,116 +4353,51 @@
       </p:sp>
       <p:sp>
         <p:nvSpPr>
-          <p:cNvPr id="13" name="TextBox 12"/>
-          <p:cNvSpPr txBox="1"/>
-          <p:nvPr/>
-        </p:nvSpPr>
-        <p:spPr>
-          <a:xfrm>
-            <a:off x="822960" y="4050791"/>
-            <a:ext cx="4855464" cy="292608"/>
-          </a:xfrm>
-          <a:prstGeom prst="rect">
-            <a:avLst/>
-          </a:prstGeom>
-          <a:noFill/>
-        </p:spPr>
-        <p:txBody>
-          <a:bodyPr wrap="square" anchor="t" lIns="0" rIns="0" tIns="0" bIns="0">
-            <a:spAutoFit/>
-          </a:bodyPr>
-          <a:lstStyle/>
-          <a:p>
-            <a:pPr algn="l">
-              <a:lnSpc>
-                <a:spcPct val="100000"/>
-              </a:lnSpc>
-              <a:spcAft>
-                <a:spcPts val="0"/>
-              </a:spcAft>
-            </a:pPr>
-            <a:r>
-              <a:rPr sz="1100" b="1" i="0">
+          <p:cNvPr id="10" name="TextBox 9"/>
+          <p:cNvSpPr txBox="1"/>
+          <p:nvPr/>
+        </p:nvSpPr>
+        <p:spPr>
+          <a:xfrm>
+            <a:off x="8293608" y="3968496"/>
+            <a:ext cx="3749039" cy="1097280"/>
+          </a:xfrm>
+          <a:prstGeom prst="rect">
+            <a:avLst/>
+          </a:prstGeom>
+          <a:noFill/>
+        </p:spPr>
+        <p:txBody>
+          <a:bodyPr wrap="square" anchor="t" lIns="0" rIns="0" tIns="0" bIns="0">
+            <a:spAutoFit/>
+          </a:bodyPr>
+          <a:lstStyle/>
+          <a:p>
+            <a:pPr algn="l">
+              <a:lnSpc>
+                <a:spcPct val="107000"/>
+              </a:lnSpc>
+              <a:spcAft>
+                <a:spcPts val="200"/>
+              </a:spcAft>
+            </a:pPr>
+            <a:r>
+              <a:rPr sz="1350" b="1" i="0">
                 <a:solidFill>
                   <a:srgbClr val="EAF0F8"/>
                 </a:solidFill>
                 <a:latin typeface="Arial"/>
               </a:rPr>
-              <a:t>3 · THE STABILIZER · MODERATE</a:t>
-            </a:r>
-          </a:p>
-        </p:txBody>
-      </p:sp>
-      <p:sp>
-        <p:nvSpPr>
-          <p:cNvPr id="14" name="TextBox 13"/>
-          <p:cNvSpPr txBox="1"/>
-          <p:nvPr/>
-        </p:nvSpPr>
-        <p:spPr>
-          <a:xfrm>
-            <a:off x="822960" y="4343400"/>
-            <a:ext cx="4855464" cy="365760"/>
-          </a:xfrm>
-          <a:prstGeom prst="rect">
-            <a:avLst/>
-          </a:prstGeom>
-          <a:noFill/>
-        </p:spPr>
-        <p:txBody>
-          <a:bodyPr wrap="square" anchor="t" lIns="0" rIns="0" tIns="0" bIns="0">
-            <a:spAutoFit/>
-          </a:bodyPr>
-          <a:lstStyle/>
-          <a:p>
-            <a:pPr algn="l">
-              <a:lnSpc>
-                <a:spcPct val="100000"/>
-              </a:lnSpc>
-              <a:spcAft>
-                <a:spcPts val="0"/>
-              </a:spcAft>
-            </a:pPr>
-            <a:r>
-              <a:rPr sz="1650" b="1" i="0">
-                <a:solidFill>
-                  <a:srgbClr val="EAF0F8"/>
-                </a:solidFill>
-                <a:latin typeface="Arial"/>
-              </a:rPr>
-              <a:t>2B Luis Arraez (SFG)</a:t>
-            </a:r>
-          </a:p>
-        </p:txBody>
-      </p:sp>
-      <p:sp>
-        <p:nvSpPr>
-          <p:cNvPr id="15" name="TextBox 14"/>
-          <p:cNvSpPr txBox="1"/>
-          <p:nvPr/>
-        </p:nvSpPr>
-        <p:spPr>
-          <a:xfrm>
-            <a:off x="822960" y="4754880"/>
-            <a:ext cx="4855464" cy="960120"/>
-          </a:xfrm>
-          <a:prstGeom prst="rect">
-            <a:avLst/>
-          </a:prstGeom>
-          <a:noFill/>
-        </p:spPr>
-        <p:txBody>
-          <a:bodyPr wrap="square" anchor="t" lIns="0" rIns="0" tIns="0" bIns="0">
-            <a:spAutoFit/>
-          </a:bodyPr>
-          <a:lstStyle/>
-          <a:p>
-            <a:pPr algn="l">
-              <a:lnSpc>
-                <a:spcPct val="110000"/>
-              </a:lnSpc>
-              <a:spcAft>
-                <a:spcPts val="400"/>
+              <a:t>The pen is paired too</a:t>
+            </a:r>
+          </a:p>
+          <a:p>
+            <a:pPr algn="l">
+              <a:lnSpc>
+                <a:spcPct val="107000"/>
+              </a:lnSpc>
+              <a:spcAft>
+                <a:spcPts val="200"/>
               </a:spcAft>
             </a:pPr>
             <a:r>
@@ -4583,34 +4407,32 @@
                 </a:solidFill>
                 <a:latin typeface="Arial"/>
               </a:rPr>
-              <a:t>For Brayan Bello — the first deal that touches the active roster. Zero prospect cost; Arraez fills a patchwork platoon spot, not a hot regular's.</a:t>
-            </a:r>
-          </a:p>
-        </p:txBody>
-      </p:sp>
-      <p:sp>
-        <p:nvSpPr>
-          <p:cNvPr id="16" name="Rounded Rectangle 15"/>
+              <a:t>Watson and Morán both run 3+ runs better with Narváez — leverage innings aren't assigned at random.</a:t>
+            </a:r>
+          </a:p>
+        </p:txBody>
+      </p:sp>
+      <p:sp>
+        <p:nvSpPr>
+          <p:cNvPr id="11" name="Rounded Rectangle 10"/>
           <p:cNvSpPr/>
           <p:nvPr/>
         </p:nvSpPr>
         <p:spPr>
           <a:xfrm>
-            <a:off x="6227064" y="3886200"/>
-            <a:ext cx="5358384" cy="1938528"/>
+            <a:off x="8001000" y="5120640"/>
+            <a:ext cx="146304" cy="146304"/>
           </a:xfrm>
           <a:prstGeom prst="roundRect">
             <a:avLst>
-              <a:gd name="adj" fmla="val 6000"/>
+              <a:gd name="adj" fmla="val 18000"/>
             </a:avLst>
           </a:prstGeom>
           <a:solidFill>
-            <a:srgbClr val="121E33"/>
+            <a:srgbClr val="58C08D"/>
           </a:solidFill>
-          <a:ln w="12700">
-            <a:solidFill>
-              <a:srgbClr val="26334E"/>
-            </a:solidFill>
+          <a:ln>
+            <a:noFill/>
           </a:ln>
           <a:effectLst/>
         </p:spPr>
@@ -4638,116 +4460,51 @@
       </p:sp>
       <p:sp>
         <p:nvSpPr>
-          <p:cNvPr id="17" name="TextBox 16"/>
-          <p:cNvSpPr txBox="1"/>
-          <p:nvPr/>
-        </p:nvSpPr>
-        <p:spPr>
-          <a:xfrm>
-            <a:off x="6483096" y="4050791"/>
-            <a:ext cx="4855464" cy="292608"/>
-          </a:xfrm>
-          <a:prstGeom prst="rect">
-            <a:avLst/>
-          </a:prstGeom>
-          <a:noFill/>
-        </p:spPr>
-        <p:txBody>
-          <a:bodyPr wrap="square" anchor="t" lIns="0" rIns="0" tIns="0" bIns="0">
-            <a:spAutoFit/>
-          </a:bodyPr>
-          <a:lstStyle/>
-          <a:p>
-            <a:pPr algn="l">
-              <a:lnSpc>
-                <a:spcPct val="100000"/>
-              </a:lnSpc>
-              <a:spcAft>
-                <a:spcPts val="0"/>
-              </a:spcAft>
-            </a:pPr>
-            <a:r>
-              <a:rPr sz="1100" b="1" i="0">
-                <a:solidFill>
-                  <a:srgbClr val="E8615A"/>
-                </a:solidFill>
-                <a:latin typeface="Arial"/>
-              </a:rPr>
-              <a:t>4 · THE BIG SWING · HIGH — WAIT?</a:t>
-            </a:r>
-          </a:p>
-        </p:txBody>
-      </p:sp>
-      <p:sp>
-        <p:nvSpPr>
-          <p:cNvPr id="18" name="TextBox 17"/>
-          <p:cNvSpPr txBox="1"/>
-          <p:nvPr/>
-        </p:nvSpPr>
-        <p:spPr>
-          <a:xfrm>
-            <a:off x="6483096" y="4343400"/>
-            <a:ext cx="4855464" cy="365760"/>
-          </a:xfrm>
-          <a:prstGeom prst="rect">
-            <a:avLst/>
-          </a:prstGeom>
-          <a:noFill/>
-        </p:spPr>
-        <p:txBody>
-          <a:bodyPr wrap="square" anchor="t" lIns="0" rIns="0" tIns="0" bIns="0">
-            <a:spAutoFit/>
-          </a:bodyPr>
-          <a:lstStyle/>
-          <a:p>
-            <a:pPr algn="l">
-              <a:lnSpc>
-                <a:spcPct val="100000"/>
-              </a:lnSpc>
-              <a:spcAft>
-                <a:spcPts val="0"/>
-              </a:spcAft>
-            </a:pPr>
-            <a:r>
-              <a:rPr sz="1650" b="1" i="0">
+          <p:cNvPr id="12" name="TextBox 11"/>
+          <p:cNvSpPr txBox="1"/>
+          <p:nvPr/>
+        </p:nvSpPr>
+        <p:spPr>
+          <a:xfrm>
+            <a:off x="8293608" y="5084064"/>
+            <a:ext cx="3749039" cy="1097280"/>
+          </a:xfrm>
+          <a:prstGeom prst="rect">
+            <a:avLst/>
+          </a:prstGeom>
+          <a:noFill/>
+        </p:spPr>
+        <p:txBody>
+          <a:bodyPr wrap="square" anchor="t" lIns="0" rIns="0" tIns="0" bIns="0">
+            <a:spAutoFit/>
+          </a:bodyPr>
+          <a:lstStyle/>
+          <a:p>
+            <a:pPr algn="l">
+              <a:lnSpc>
+                <a:spcPct val="107000"/>
+              </a:lnSpc>
+              <a:spcAft>
+                <a:spcPts val="200"/>
+              </a:spcAft>
+            </a:pPr>
+            <a:r>
+              <a:rPr sz="1350" b="1" i="0">
                 <a:solidFill>
                   <a:srgbClr val="EAF0F8"/>
                 </a:solidFill>
                 <a:latin typeface="Arial"/>
               </a:rPr>
-              <a:t>SS Zach Neto (LAA)</a:t>
-            </a:r>
-          </a:p>
-        </p:txBody>
-      </p:sp>
-      <p:sp>
-        <p:nvSpPr>
-          <p:cNvPr id="19" name="TextBox 18"/>
-          <p:cNvSpPr txBox="1"/>
-          <p:nvPr/>
-        </p:nvSpPr>
-        <p:spPr>
-          <a:xfrm>
-            <a:off x="6483096" y="4754880"/>
-            <a:ext cx="4855464" cy="960120"/>
-          </a:xfrm>
-          <a:prstGeom prst="rect">
-            <a:avLst/>
-          </a:prstGeom>
-          <a:noFill/>
-        </p:spPr>
-        <p:txBody>
-          <a:bodyPr wrap="square" anchor="t" lIns="0" rIns="0" tIns="0" bIns="0">
-            <a:spAutoFit/>
-          </a:bodyPr>
-          <a:lstStyle/>
-          <a:p>
-            <a:pPr algn="l">
-              <a:lnSpc>
-                <a:spcPct val="110000"/>
-              </a:lnSpc>
-              <a:spcAft>
-                <a:spcPts val="400"/>
+              <a:t>So: no catcher trade</a:t>
+            </a:r>
+          </a:p>
+          <a:p>
+            <a:pPr algn="l">
+              <a:lnSpc>
+                <a:spcPct val="107000"/>
+              </a:lnSpc>
+              <a:spcAft>
+                <a:spcPts val="200"/>
               </a:spcAft>
             </a:pPr>
             <a:r>
@@ -4757,65 +4514,14 @@
                 </a:solidFill>
                 <a:latin typeface="Arial"/>
               </a:rPr>
-              <a:t>For Tolle + Early + a 45 FV: two arms out of a winning rotation mid-streak. Franchise-window correct — and still there in the winter. Controlled through 2029.</a:t>
-            </a:r>
-          </a:p>
-        </p:txBody>
-      </p:sp>
-      <p:sp>
-        <p:nvSpPr>
-          <p:cNvPr id="20" name="TextBox 19"/>
-          <p:cNvSpPr txBox="1"/>
-          <p:nvPr/>
-        </p:nvSpPr>
-        <p:spPr>
-          <a:xfrm>
-            <a:off x="566928" y="5897880"/>
-            <a:ext cx="11064240" cy="457200"/>
-          </a:xfrm>
-          <a:prstGeom prst="rect">
-            <a:avLst/>
-          </a:prstGeom>
-          <a:noFill/>
-        </p:spPr>
-        <p:txBody>
-          <a:bodyPr wrap="square" anchor="t" lIns="0" rIns="0" tIns="0" bIns="0">
-            <a:spAutoFit/>
-          </a:bodyPr>
-          <a:lstStyle/>
-          <a:p>
-            <a:pPr algn="l">
-              <a:lnSpc>
-                <a:spcPct val="100000"/>
-              </a:lnSpc>
-              <a:spcAft>
-                <a:spcPts val="0"/>
-              </a:spcAft>
-            </a:pPr>
-            <a:r>
-              <a:rPr sz="1250" b="1" i="0">
-                <a:solidFill>
-                  <a:srgbClr val="D9E1EF"/>
-                </a:solidFill>
-                <a:latin typeface="Arial"/>
-              </a:rPr>
-              <a:t>A menu, not a plan — Boston can afford about two. </a:t>
-            </a:r>
-            <a:r>
-              <a:rPr sz="1250" b="0" i="0">
-                <a:solidFill>
-                  <a:srgbClr val="93A0B6"/>
-                </a:solidFill>
-                <a:latin typeface="Arial"/>
-              </a:rPr>
-              <a:t>Full value math and verified contracts in the mock-trades memo. Hypotheticals, not reporting.</a:t>
-            </a:r>
-          </a:p>
-        </p:txBody>
-      </p:sp>
-      <p:sp>
-        <p:nvSpPr>
-          <p:cNvPr id="21" name="TextBox 20"/>
+              <a:t>The audit sees a below-average bat; the staff sees its catchers. Small, usage-confounded samples — but you don't reset eight batteries mid-streak for one.</a:t>
+            </a:r>
+          </a:p>
+        </p:txBody>
+      </p:sp>
+      <p:sp>
+        <p:nvSpPr>
+          <p:cNvPr id="13" name="TextBox 12"/>
           <p:cNvSpPr txBox="1"/>
           <p:nvPr/>
         </p:nvSpPr>
@@ -4927,7 +4633,7 @@
                 </a:solidFill>
                 <a:latin typeface="Courier New"/>
               </a:rPr>
-              <a:t>// THE WINTER PLAN</a:t>
+              <a:t>// THE MENU</a:t>
             </a:r>
           </a:p>
         </p:txBody>
@@ -4969,63 +4675,21 @@
                 </a:solidFill>
                 <a:latin typeface="Arial"/>
               </a:rPr>
-              <a:t>Pitching is the strength — spend the surplus on offense</a:t>
-            </a:r>
-          </a:p>
-        </p:txBody>
-      </p:sp>
-      <p:sp>
-        <p:nvSpPr>
-          <p:cNvPr id="4" name="TextBox 3"/>
-          <p:cNvSpPr txBox="1"/>
-          <p:nvPr/>
-        </p:nvSpPr>
-        <p:spPr>
-          <a:xfrm>
-            <a:off x="566928" y="1572768"/>
-            <a:ext cx="11064240" cy="640080"/>
-          </a:xfrm>
-          <a:prstGeom prst="rect">
-            <a:avLst/>
-          </a:prstGeom>
-          <a:noFill/>
-        </p:spPr>
-        <p:txBody>
-          <a:bodyPr wrap="square" anchor="t" lIns="0" rIns="0" tIns="0" bIns="0">
-            <a:spAutoFit/>
-          </a:bodyPr>
-          <a:lstStyle/>
-          <a:p>
-            <a:pPr algn="l">
-              <a:lnSpc>
-                <a:spcPct val="112000"/>
-              </a:lnSpc>
-              <a:spcAft>
-                <a:spcPts val="400"/>
-              </a:spcAft>
-            </a:pPr>
-            <a:r>
-              <a:rPr sz="1450" b="0" i="0">
-                <a:solidFill>
-                  <a:srgbClr val="D9E1EF"/>
-                </a:solidFill>
-                <a:latin typeface="Arial"/>
-              </a:rPr>
-              <a:t>If winter comes and Duran's rebound has shown up, this is what a deal should return. With a top-6 rotation (3.65 ERA) carrying the club, trading bats for arms is backwards — convert the outfield surplus into what's thin:</a:t>
-            </a:r>
-          </a:p>
-        </p:txBody>
-      </p:sp>
-      <p:sp>
-        <p:nvSpPr>
-          <p:cNvPr id="5" name="Rounded Rectangle 4"/>
+              <a:t>Three trades that fit — and the walk-away. Keep it small</a:t>
+            </a:r>
+          </a:p>
+        </p:txBody>
+      </p:sp>
+      <p:sp>
+        <p:nvSpPr>
+          <p:cNvPr id="4" name="Rounded Rectangle 3"/>
           <p:cNvSpPr/>
           <p:nvPr/>
         </p:nvSpPr>
         <p:spPr>
           <a:xfrm>
-            <a:off x="566928" y="2468880"/>
-            <a:ext cx="3502152" cy="2514600"/>
+            <a:off x="566928" y="1691640"/>
+            <a:ext cx="5358384" cy="1938528"/>
           </a:xfrm>
           <a:prstGeom prst="roundRect">
             <a:avLst>
@@ -5066,153 +4730,140 @@
       </p:sp>
       <p:sp>
         <p:nvSpPr>
-          <p:cNvPr id="6" name="Rounded Rectangle 5"/>
+          <p:cNvPr id="5" name="TextBox 4"/>
+          <p:cNvSpPr txBox="1"/>
+          <p:nvPr/>
+        </p:nvSpPr>
+        <p:spPr>
+          <a:xfrm>
+            <a:off x="822960" y="1856232"/>
+            <a:ext cx="4855464" cy="292608"/>
+          </a:xfrm>
+          <a:prstGeom prst="rect">
+            <a:avLst/>
+          </a:prstGeom>
+          <a:noFill/>
+        </p:spPr>
+        <p:txBody>
+          <a:bodyPr wrap="square" anchor="t" lIns="0" rIns="0" tIns="0" bIns="0">
+            <a:spAutoFit/>
+          </a:bodyPr>
+          <a:lstStyle/>
+          <a:p>
+            <a:pPr algn="l">
+              <a:lnSpc>
+                <a:spcPct val="100000"/>
+              </a:lnSpc>
+              <a:spcAft>
+                <a:spcPts val="0"/>
+              </a:spcAft>
+            </a:pPr>
+            <a:r>
+              <a:rPr sz="1100" b="1" i="0">
+                <a:solidFill>
+                  <a:srgbClr val="58C08D"/>
+                </a:solidFill>
+                <a:latin typeface="Arial"/>
+              </a:rPr>
+              <a:t>1 · THE PEN FIX · DO IT</a:t>
+            </a:r>
+          </a:p>
+        </p:txBody>
+      </p:sp>
+      <p:sp>
+        <p:nvSpPr>
+          <p:cNvPr id="6" name="TextBox 5"/>
+          <p:cNvSpPr txBox="1"/>
+          <p:nvPr/>
+        </p:nvSpPr>
+        <p:spPr>
+          <a:xfrm>
+            <a:off x="822960" y="2148840"/>
+            <a:ext cx="4855464" cy="365760"/>
+          </a:xfrm>
+          <a:prstGeom prst="rect">
+            <a:avLst/>
+          </a:prstGeom>
+          <a:noFill/>
+        </p:spPr>
+        <p:txBody>
+          <a:bodyPr wrap="square" anchor="t" lIns="0" rIns="0" tIns="0" bIns="0">
+            <a:spAutoFit/>
+          </a:bodyPr>
+          <a:lstStyle/>
+          <a:p>
+            <a:pPr algn="l">
+              <a:lnSpc>
+                <a:spcPct val="100000"/>
+              </a:lnSpc>
+              <a:spcAft>
+                <a:spcPts val="0"/>
+              </a:spcAft>
+            </a:pPr>
+            <a:r>
+              <a:rPr sz="1650" b="1" i="0">
+                <a:solidFill>
+                  <a:srgbClr val="EAF0F8"/>
+                </a:solidFill>
+                <a:latin typeface="Arial"/>
+              </a:rPr>
+              <a:t>RHP Luke Weaver (NYM)</a:t>
+            </a:r>
+          </a:p>
+        </p:txBody>
+      </p:sp>
+      <p:sp>
+        <p:nvSpPr>
+          <p:cNvPr id="7" name="TextBox 6"/>
+          <p:cNvSpPr txBox="1"/>
+          <p:nvPr/>
+        </p:nvSpPr>
+        <p:spPr>
+          <a:xfrm>
+            <a:off x="822960" y="2560320"/>
+            <a:ext cx="4855464" cy="960120"/>
+          </a:xfrm>
+          <a:prstGeom prst="rect">
+            <a:avLst/>
+          </a:prstGeom>
+          <a:noFill/>
+        </p:spPr>
+        <p:txBody>
+          <a:bodyPr wrap="square" anchor="t" lIns="0" rIns="0" tIns="0" bIns="0">
+            <a:spAutoFit/>
+          </a:bodyPr>
+          <a:lstStyle/>
+          <a:p>
+            <a:pPr algn="l">
+              <a:lnSpc>
+                <a:spcPct val="110000"/>
+              </a:lnSpc>
+              <a:spcAft>
+                <a:spcPts val="400"/>
+              </a:spcAft>
+            </a:pPr>
+            <a:r>
+              <a:rPr sz="1160" b="0" i="0">
+                <a:solidFill>
+                  <a:srgbClr val="93A0B6"/>
+                </a:solidFill>
+                <a:latin typeface="Arial"/>
+              </a:rPr>
+              <a:t>For a 45 FV + 40 FV — prospects only, nobody loses a job or an inning. Elite relief year, signed through '27. The highest-probability marginal win on the board.</a:t>
+            </a:r>
+          </a:p>
+        </p:txBody>
+      </p:sp>
+      <p:sp>
+        <p:nvSpPr>
+          <p:cNvPr id="8" name="Rounded Rectangle 7"/>
           <p:cNvSpPr/>
           <p:nvPr/>
         </p:nvSpPr>
         <p:spPr>
           <a:xfrm>
-            <a:off x="841247" y="2724912"/>
-            <a:ext cx="384048" cy="384048"/>
-          </a:xfrm>
-          <a:prstGeom prst="roundRect">
-            <a:avLst>
-              <a:gd name="adj" fmla="val 18000"/>
-            </a:avLst>
-          </a:prstGeom>
-          <a:solidFill>
-            <a:srgbClr val="58C08D"/>
-          </a:solidFill>
-          <a:ln>
-            <a:noFill/>
-          </a:ln>
-          <a:effectLst/>
-        </p:spPr>
-        <p:style>
-          <a:lnRef idx="1">
-            <a:schemeClr val="accent1"/>
-          </a:lnRef>
-          <a:fillRef idx="3">
-            <a:schemeClr val="accent1"/>
-          </a:fillRef>
-          <a:effectRef idx="2">
-            <a:schemeClr val="accent1"/>
-          </a:effectRef>
-          <a:fontRef idx="minor">
-            <a:schemeClr val="lt1"/>
-          </a:fontRef>
-        </p:style>
-        <p:txBody>
-          <a:bodyPr rtlCol="0" anchor="ctr" wrap="none"/>
-          <a:lstStyle/>
-          <a:p>
-            <a:pPr algn="ctr"/>
-            <a:r>
-              <a:rPr sz="1600" b="1">
-                <a:solidFill>
-                  <a:srgbClr val="0B1220"/>
-                </a:solidFill>
-                <a:latin typeface="Courier New"/>
-              </a:rPr>
-              <a:t>1</a:t>
-            </a:r>
-          </a:p>
-        </p:txBody>
-      </p:sp>
-      <p:sp>
-        <p:nvSpPr>
-          <p:cNvPr id="7" name="TextBox 6"/>
-          <p:cNvSpPr txBox="1"/>
-          <p:nvPr/>
-        </p:nvSpPr>
-        <p:spPr>
-          <a:xfrm>
-            <a:off x="841247" y="3310128"/>
-            <a:ext cx="2999232" cy="411480"/>
-          </a:xfrm>
-          <a:prstGeom prst="rect">
-            <a:avLst/>
-          </a:prstGeom>
-          <a:noFill/>
-        </p:spPr>
-        <p:txBody>
-          <a:bodyPr wrap="square" anchor="t" lIns="0" rIns="0" tIns="0" bIns="0">
-            <a:spAutoFit/>
-          </a:bodyPr>
-          <a:lstStyle/>
-          <a:p>
-            <a:pPr algn="l">
-              <a:lnSpc>
-                <a:spcPct val="100000"/>
-              </a:lnSpc>
-              <a:spcAft>
-                <a:spcPts val="0"/>
-              </a:spcAft>
-            </a:pPr>
-            <a:r>
-              <a:rPr sz="1600" b="1" i="0">
-                <a:solidFill>
-                  <a:srgbClr val="EAF0F8"/>
-                </a:solidFill>
-                <a:latin typeface="Arial"/>
-              </a:rPr>
-              <a:t>Controllable bats</a:t>
-            </a:r>
-          </a:p>
-        </p:txBody>
-      </p:sp>
-      <p:sp>
-        <p:nvSpPr>
-          <p:cNvPr id="8" name="TextBox 7"/>
-          <p:cNvSpPr txBox="1"/>
-          <p:nvPr/>
-        </p:nvSpPr>
-        <p:spPr>
-          <a:xfrm>
-            <a:off x="841247" y="3767328"/>
-            <a:ext cx="2999232" cy="1097280"/>
-          </a:xfrm>
-          <a:prstGeom prst="rect">
-            <a:avLst/>
-          </a:prstGeom>
-          <a:noFill/>
-        </p:spPr>
-        <p:txBody>
-          <a:bodyPr wrap="square" anchor="t" lIns="0" rIns="0" tIns="0" bIns="0">
-            <a:spAutoFit/>
-          </a:bodyPr>
-          <a:lstStyle/>
-          <a:p>
-            <a:pPr algn="l">
-              <a:lnSpc>
-                <a:spcPct val="110000"/>
-              </a:lnSpc>
-              <a:spcAft>
-                <a:spcPts val="400"/>
-              </a:spcAft>
-            </a:pPr>
-            <a:r>
-              <a:rPr sz="1280" b="0" i="0">
-                <a:solidFill>
-                  <a:srgbClr val="93A0B6"/>
-                </a:solidFill>
-                <a:latin typeface="Arial"/>
-              </a:rPr>
-              <a:t>Young, cost-controlled position players to fix an inconsistent lineup and lengthen it around the core.</a:t>
-            </a:r>
-          </a:p>
-        </p:txBody>
-      </p:sp>
-      <p:sp>
-        <p:nvSpPr>
-          <p:cNvPr id="9" name="Rounded Rectangle 8"/>
-          <p:cNvSpPr/>
-          <p:nvPr/>
-        </p:nvSpPr>
-        <p:spPr>
-          <a:xfrm>
-            <a:off x="4352544" y="2468880"/>
-            <a:ext cx="3502152" cy="2514600"/>
+            <a:off x="6227064" y="1691640"/>
+            <a:ext cx="5358384" cy="1938528"/>
           </a:xfrm>
           <a:prstGeom prst="roundRect">
             <a:avLst>
@@ -5253,153 +4904,140 @@
       </p:sp>
       <p:sp>
         <p:nvSpPr>
-          <p:cNvPr id="10" name="Rounded Rectangle 9"/>
+          <p:cNvPr id="9" name="TextBox 8"/>
+          <p:cNvSpPr txBox="1"/>
+          <p:nvPr/>
+        </p:nvSpPr>
+        <p:spPr>
+          <a:xfrm>
+            <a:off x="6483096" y="1856232"/>
+            <a:ext cx="4855464" cy="292608"/>
+          </a:xfrm>
+          <a:prstGeom prst="rect">
+            <a:avLst/>
+          </a:prstGeom>
+          <a:noFill/>
+        </p:spPr>
+        <p:txBody>
+          <a:bodyPr wrap="square" anchor="t" lIns="0" rIns="0" tIns="0" bIns="0">
+            <a:spAutoFit/>
+          </a:bodyPr>
+          <a:lstStyle/>
+          <a:p>
+            <a:pPr algn="l">
+              <a:lnSpc>
+                <a:spcPct val="100000"/>
+              </a:lnSpc>
+              <a:spcAft>
+                <a:spcPts val="0"/>
+              </a:spcAft>
+            </a:pPr>
+            <a:r>
+              <a:rPr sz="1100" b="1" i="0">
+                <a:solidFill>
+                  <a:srgbClr val="EAF0F8"/>
+                </a:solidFill>
+                <a:latin typeface="Arial"/>
+              </a:rPr>
+              <a:t>2 · THE STABILIZER · IF THE PRICE HOLDS</a:t>
+            </a:r>
+          </a:p>
+        </p:txBody>
+      </p:sp>
+      <p:sp>
+        <p:nvSpPr>
+          <p:cNvPr id="10" name="TextBox 9"/>
+          <p:cNvSpPr txBox="1"/>
+          <p:nvPr/>
+        </p:nvSpPr>
+        <p:spPr>
+          <a:xfrm>
+            <a:off x="6483096" y="2148840"/>
+            <a:ext cx="4855464" cy="365760"/>
+          </a:xfrm>
+          <a:prstGeom prst="rect">
+            <a:avLst/>
+          </a:prstGeom>
+          <a:noFill/>
+        </p:spPr>
+        <p:txBody>
+          <a:bodyPr wrap="square" anchor="t" lIns="0" rIns="0" tIns="0" bIns="0">
+            <a:spAutoFit/>
+          </a:bodyPr>
+          <a:lstStyle/>
+          <a:p>
+            <a:pPr algn="l">
+              <a:lnSpc>
+                <a:spcPct val="100000"/>
+              </a:lnSpc>
+              <a:spcAft>
+                <a:spcPts val="0"/>
+              </a:spcAft>
+            </a:pPr>
+            <a:r>
+              <a:rPr sz="1650" b="1" i="0">
+                <a:solidFill>
+                  <a:srgbClr val="EAF0F8"/>
+                </a:solidFill>
+                <a:latin typeface="Arial"/>
+              </a:rPr>
+              <a:t>2B Luis Arraez (SFG)</a:t>
+            </a:r>
+          </a:p>
+        </p:txBody>
+      </p:sp>
+      <p:sp>
+        <p:nvSpPr>
+          <p:cNvPr id="11" name="TextBox 10"/>
+          <p:cNvSpPr txBox="1"/>
+          <p:nvPr/>
+        </p:nvSpPr>
+        <p:spPr>
+          <a:xfrm>
+            <a:off x="6483096" y="2560320"/>
+            <a:ext cx="4855464" cy="960120"/>
+          </a:xfrm>
+          <a:prstGeom prst="rect">
+            <a:avLst/>
+          </a:prstGeom>
+          <a:noFill/>
+        </p:spPr>
+        <p:txBody>
+          <a:bodyPr wrap="square" anchor="t" lIns="0" rIns="0" tIns="0" bIns="0">
+            <a:spAutoFit/>
+          </a:bodyPr>
+          <a:lstStyle/>
+          <a:p>
+            <a:pPr algn="l">
+              <a:lnSpc>
+                <a:spcPct val="110000"/>
+              </a:lnSpc>
+              <a:spcAft>
+                <a:spcPts val="400"/>
+              </a:spcAft>
+            </a:pPr>
+            <a:r>
+              <a:rPr sz="1160" b="0" i="0">
+                <a:solidFill>
+                  <a:srgbClr val="93A0B6"/>
+                </a:solidFill>
+                <a:latin typeface="Arial"/>
+              </a:rPr>
+              <a:t>For Brayan Bello — the first deal that touches the active roster. Zero prospect cost; Arraez fills a patchwork platoon spot, not a hot regular's.</a:t>
+            </a:r>
+          </a:p>
+        </p:txBody>
+      </p:sp>
+      <p:sp>
+        <p:nvSpPr>
+          <p:cNvPr id="12" name="Rounded Rectangle 11"/>
           <p:cNvSpPr/>
           <p:nvPr/>
         </p:nvSpPr>
         <p:spPr>
           <a:xfrm>
-            <a:off x="4626864" y="2724912"/>
-            <a:ext cx="384048" cy="384048"/>
-          </a:xfrm>
-          <a:prstGeom prst="roundRect">
-            <a:avLst>
-              <a:gd name="adj" fmla="val 18000"/>
-            </a:avLst>
-          </a:prstGeom>
-          <a:solidFill>
-            <a:srgbClr val="EAF0F8"/>
-          </a:solidFill>
-          <a:ln>
-            <a:noFill/>
-          </a:ln>
-          <a:effectLst/>
-        </p:spPr>
-        <p:style>
-          <a:lnRef idx="1">
-            <a:schemeClr val="accent1"/>
-          </a:lnRef>
-          <a:fillRef idx="3">
-            <a:schemeClr val="accent1"/>
-          </a:fillRef>
-          <a:effectRef idx="2">
-            <a:schemeClr val="accent1"/>
-          </a:effectRef>
-          <a:fontRef idx="minor">
-            <a:schemeClr val="lt1"/>
-          </a:fontRef>
-        </p:style>
-        <p:txBody>
-          <a:bodyPr rtlCol="0" anchor="ctr" wrap="none"/>
-          <a:lstStyle/>
-          <a:p>
-            <a:pPr algn="ctr"/>
-            <a:r>
-              <a:rPr sz="1600" b="1">
-                <a:solidFill>
-                  <a:srgbClr val="0B1220"/>
-                </a:solidFill>
-                <a:latin typeface="Courier New"/>
-              </a:rPr>
-              <a:t>2</a:t>
-            </a:r>
-          </a:p>
-        </p:txBody>
-      </p:sp>
-      <p:sp>
-        <p:nvSpPr>
-          <p:cNvPr id="11" name="TextBox 10"/>
-          <p:cNvSpPr txBox="1"/>
-          <p:nvPr/>
-        </p:nvSpPr>
-        <p:spPr>
-          <a:xfrm>
-            <a:off x="4626864" y="3310128"/>
-            <a:ext cx="2999232" cy="411480"/>
-          </a:xfrm>
-          <a:prstGeom prst="rect">
-            <a:avLst/>
-          </a:prstGeom>
-          <a:noFill/>
-        </p:spPr>
-        <p:txBody>
-          <a:bodyPr wrap="square" anchor="t" lIns="0" rIns="0" tIns="0" bIns="0">
-            <a:spAutoFit/>
-          </a:bodyPr>
-          <a:lstStyle/>
-          <a:p>
-            <a:pPr algn="l">
-              <a:lnSpc>
-                <a:spcPct val="100000"/>
-              </a:lnSpc>
-              <a:spcAft>
-                <a:spcPts val="0"/>
-              </a:spcAft>
-            </a:pPr>
-            <a:r>
-              <a:rPr sz="1600" b="1" i="0">
-                <a:solidFill>
-                  <a:srgbClr val="EAF0F8"/>
-                </a:solidFill>
-                <a:latin typeface="Arial"/>
-              </a:rPr>
-              <a:t>Best talent / upside</a:t>
-            </a:r>
-          </a:p>
-        </p:txBody>
-      </p:sp>
-      <p:sp>
-        <p:nvSpPr>
-          <p:cNvPr id="12" name="TextBox 11"/>
-          <p:cNvSpPr txBox="1"/>
-          <p:nvPr/>
-        </p:nvSpPr>
-        <p:spPr>
-          <a:xfrm>
-            <a:off x="4626864" y="3767328"/>
-            <a:ext cx="2999232" cy="1097280"/>
-          </a:xfrm>
-          <a:prstGeom prst="rect">
-            <a:avLst/>
-          </a:prstGeom>
-          <a:noFill/>
-        </p:spPr>
-        <p:txBody>
-          <a:bodyPr wrap="square" anchor="t" lIns="0" rIns="0" tIns="0" bIns="0">
-            <a:spAutoFit/>
-          </a:bodyPr>
-          <a:lstStyle/>
-          <a:p>
-            <a:pPr algn="l">
-              <a:lnSpc>
-                <a:spcPct val="110000"/>
-              </a:lnSpc>
-              <a:spcAft>
-                <a:spcPts val="400"/>
-              </a:spcAft>
-            </a:pPr>
-            <a:r>
-              <a:rPr sz="1280" b="0" i="0">
-                <a:solidFill>
-                  <a:srgbClr val="93A0B6"/>
-                </a:solidFill>
-                <a:latin typeface="Arial"/>
-              </a:rPr>
-              <a:t>In a retool you take the best player, not the positional patch — prospects and MLB-ready youth over rentals.</a:t>
-            </a:r>
-          </a:p>
-        </p:txBody>
-      </p:sp>
-      <p:sp>
-        <p:nvSpPr>
-          <p:cNvPr id="13" name="Rounded Rectangle 12"/>
-          <p:cNvSpPr/>
-          <p:nvPr/>
-        </p:nvSpPr>
-        <p:spPr>
-          <a:xfrm>
-            <a:off x="8138159" y="2468880"/>
-            <a:ext cx="3502152" cy="2514600"/>
+            <a:off x="566928" y="3886200"/>
+            <a:ext cx="5358384" cy="1938528"/>
           </a:xfrm>
           <a:prstGeom prst="roundRect">
             <a:avLst>
@@ -5440,25 +5078,153 @@
       </p:sp>
       <p:sp>
         <p:nvSpPr>
-          <p:cNvPr id="14" name="Rounded Rectangle 13"/>
+          <p:cNvPr id="13" name="TextBox 12"/>
+          <p:cNvSpPr txBox="1"/>
+          <p:nvPr/>
+        </p:nvSpPr>
+        <p:spPr>
+          <a:xfrm>
+            <a:off x="822960" y="4050791"/>
+            <a:ext cx="4855464" cy="292608"/>
+          </a:xfrm>
+          <a:prstGeom prst="rect">
+            <a:avLst/>
+          </a:prstGeom>
+          <a:noFill/>
+        </p:spPr>
+        <p:txBody>
+          <a:bodyPr wrap="square" anchor="t" lIns="0" rIns="0" tIns="0" bIns="0">
+            <a:spAutoFit/>
+          </a:bodyPr>
+          <a:lstStyle/>
+          <a:p>
+            <a:pPr algn="l">
+              <a:lnSpc>
+                <a:spcPct val="100000"/>
+              </a:lnSpc>
+              <a:spcAft>
+                <a:spcPts val="0"/>
+              </a:spcAft>
+            </a:pPr>
+            <a:r>
+              <a:rPr sz="1100" b="1" i="0">
+                <a:solidFill>
+                  <a:srgbClr val="E8615A"/>
+                </a:solidFill>
+                <a:latin typeface="Arial"/>
+              </a:rPr>
+              <a:t>3 · THE BIG SWING · PROBABLY WAIT</a:t>
+            </a:r>
+          </a:p>
+        </p:txBody>
+      </p:sp>
+      <p:sp>
+        <p:nvSpPr>
+          <p:cNvPr id="14" name="TextBox 13"/>
+          <p:cNvSpPr txBox="1"/>
+          <p:nvPr/>
+        </p:nvSpPr>
+        <p:spPr>
+          <a:xfrm>
+            <a:off x="822960" y="4343400"/>
+            <a:ext cx="4855464" cy="365760"/>
+          </a:xfrm>
+          <a:prstGeom prst="rect">
+            <a:avLst/>
+          </a:prstGeom>
+          <a:noFill/>
+        </p:spPr>
+        <p:txBody>
+          <a:bodyPr wrap="square" anchor="t" lIns="0" rIns="0" tIns="0" bIns="0">
+            <a:spAutoFit/>
+          </a:bodyPr>
+          <a:lstStyle/>
+          <a:p>
+            <a:pPr algn="l">
+              <a:lnSpc>
+                <a:spcPct val="100000"/>
+              </a:lnSpc>
+              <a:spcAft>
+                <a:spcPts val="0"/>
+              </a:spcAft>
+            </a:pPr>
+            <a:r>
+              <a:rPr sz="1650" b="1" i="0">
+                <a:solidFill>
+                  <a:srgbClr val="EAF0F8"/>
+                </a:solidFill>
+                <a:latin typeface="Arial"/>
+              </a:rPr>
+              <a:t>SS Zach Neto (LAA)</a:t>
+            </a:r>
+          </a:p>
+        </p:txBody>
+      </p:sp>
+      <p:sp>
+        <p:nvSpPr>
+          <p:cNvPr id="15" name="TextBox 14"/>
+          <p:cNvSpPr txBox="1"/>
+          <p:nvPr/>
+        </p:nvSpPr>
+        <p:spPr>
+          <a:xfrm>
+            <a:off x="822960" y="4754880"/>
+            <a:ext cx="4855464" cy="960120"/>
+          </a:xfrm>
+          <a:prstGeom prst="rect">
+            <a:avLst/>
+          </a:prstGeom>
+          <a:noFill/>
+        </p:spPr>
+        <p:txBody>
+          <a:bodyPr wrap="square" anchor="t" lIns="0" rIns="0" tIns="0" bIns="0">
+            <a:spAutoFit/>
+          </a:bodyPr>
+          <a:lstStyle/>
+          <a:p>
+            <a:pPr algn="l">
+              <a:lnSpc>
+                <a:spcPct val="110000"/>
+              </a:lnSpc>
+              <a:spcAft>
+                <a:spcPts val="400"/>
+              </a:spcAft>
+            </a:pPr>
+            <a:r>
+              <a:rPr sz="1160" b="0" i="0">
+                <a:solidFill>
+                  <a:srgbClr val="93A0B6"/>
+                </a:solidFill>
+                <a:latin typeface="Arial"/>
+              </a:rPr>
+              <a:t>For Tolle + Early + a 45 FV: two arms out of a winning rotation mid-streak. Franchise-window correct — and still there in the winter. Controlled through 2029.</a:t>
+            </a:r>
+          </a:p>
+        </p:txBody>
+      </p:sp>
+      <p:sp>
+        <p:nvSpPr>
+          <p:cNvPr id="16" name="Rounded Rectangle 15"/>
           <p:cNvSpPr/>
           <p:nvPr/>
         </p:nvSpPr>
         <p:spPr>
           <a:xfrm>
-            <a:off x="8412480" y="2724912"/>
-            <a:ext cx="384048" cy="384048"/>
+            <a:off x="6227064" y="3886200"/>
+            <a:ext cx="5358384" cy="1938528"/>
           </a:xfrm>
           <a:prstGeom prst="roundRect">
             <a:avLst>
-              <a:gd name="adj" fmla="val 18000"/>
+              <a:gd name="adj" fmla="val 6000"/>
             </a:avLst>
           </a:prstGeom>
           <a:solidFill>
-            <a:srgbClr val="E3B14E"/>
+            <a:srgbClr val="121E33"/>
           </a:solidFill>
-          <a:ln>
-            <a:noFill/>
+          <a:ln w="12700">
+            <a:solidFill>
+              <a:srgbClr val="26334E"/>
+            </a:solidFill>
           </a:ln>
           <a:effectLst/>
         </p:spPr>
@@ -5477,32 +5243,23 @@
           </a:fontRef>
         </p:style>
         <p:txBody>
-          <a:bodyPr rtlCol="0" anchor="ctr" wrap="none"/>
+          <a:bodyPr rtlCol="0" anchor="ctr"/>
           <a:lstStyle/>
           <a:p>
             <a:pPr algn="ctr"/>
-            <a:r>
-              <a:rPr sz="1600" b="1">
-                <a:solidFill>
-                  <a:srgbClr val="0B1220"/>
-                </a:solidFill>
-                <a:latin typeface="Courier New"/>
-              </a:rPr>
-              <a:t>3</a:t>
-            </a:r>
-          </a:p>
-        </p:txBody>
-      </p:sp>
-      <p:sp>
-        <p:nvSpPr>
-          <p:cNvPr id="15" name="TextBox 14"/>
-          <p:cNvSpPr txBox="1"/>
-          <p:nvPr/>
-        </p:nvSpPr>
-        <p:spPr>
-          <a:xfrm>
-            <a:off x="8412480" y="3310128"/>
-            <a:ext cx="2999232" cy="411480"/>
+          </a:p>
+        </p:txBody>
+      </p:sp>
+      <p:sp>
+        <p:nvSpPr>
+          <p:cNvPr id="17" name="TextBox 16"/>
+          <p:cNvSpPr txBox="1"/>
+          <p:nvPr/>
+        </p:nvSpPr>
+        <p:spPr>
+          <a:xfrm>
+            <a:off x="6483096" y="4050791"/>
+            <a:ext cx="4855464" cy="292608"/>
           </a:xfrm>
           <a:prstGeom prst="rect">
             <a:avLst/>
@@ -5524,27 +5281,69 @@
               </a:spcAft>
             </a:pPr>
             <a:r>
-              <a:rPr sz="1600" b="1" i="0">
+              <a:rPr sz="1100" b="1" i="0">
+                <a:solidFill>
+                  <a:srgbClr val="E3B14E"/>
+                </a:solidFill>
+                <a:latin typeface="Arial"/>
+              </a:rPr>
+              <a:t>✗ · THE WALK-AWAY</a:t>
+            </a:r>
+          </a:p>
+        </p:txBody>
+      </p:sp>
+      <p:sp>
+        <p:nvSpPr>
+          <p:cNvPr id="18" name="TextBox 17"/>
+          <p:cNvSpPr txBox="1"/>
+          <p:nvPr/>
+        </p:nvSpPr>
+        <p:spPr>
+          <a:xfrm>
+            <a:off x="6483096" y="4343400"/>
+            <a:ext cx="4855464" cy="365760"/>
+          </a:xfrm>
+          <a:prstGeom prst="rect">
+            <a:avLst/>
+          </a:prstGeom>
+          <a:noFill/>
+        </p:spPr>
+        <p:txBody>
+          <a:bodyPr wrap="square" anchor="t" lIns="0" rIns="0" tIns="0" bIns="0">
+            <a:spAutoFit/>
+          </a:bodyPr>
+          <a:lstStyle/>
+          <a:p>
+            <a:pPr algn="l">
+              <a:lnSpc>
+                <a:spcPct val="100000"/>
+              </a:lnSpc>
+              <a:spcAft>
+                <a:spcPts val="0"/>
+              </a:spcAft>
+            </a:pPr>
+            <a:r>
+              <a:rPr sz="1650" b="1" i="0">
                 <a:solidFill>
                   <a:srgbClr val="EAF0F8"/>
                 </a:solidFill>
                 <a:latin typeface="Arial"/>
               </a:rPr>
-              <a:t>Salary relief</a:t>
-            </a:r>
-          </a:p>
-        </p:txBody>
-      </p:sp>
-      <p:sp>
-        <p:nvSpPr>
-          <p:cNvPr id="16" name="TextBox 15"/>
-          <p:cNvSpPr txBox="1"/>
-          <p:nvPr/>
-        </p:nvSpPr>
-        <p:spPr>
-          <a:xfrm>
-            <a:off x="8412480" y="3767328"/>
-            <a:ext cx="2999232" cy="1097280"/>
+              <a:t>C Shea Langeliers (ATH)</a:t>
+            </a:r>
+          </a:p>
+        </p:txBody>
+      </p:sp>
+      <p:sp>
+        <p:nvSpPr>
+          <p:cNvPr id="19" name="TextBox 18"/>
+          <p:cNvSpPr txBox="1"/>
+          <p:nvPr/>
+        </p:nvSpPr>
+        <p:spPr>
+          <a:xfrm>
+            <a:off x="6483096" y="4754880"/>
+            <a:ext cx="4855464" cy="960120"/>
           </a:xfrm>
           <a:prstGeom prst="rect">
             <a:avLst/>
@@ -5566,26 +5365,26 @@
               </a:spcAft>
             </a:pPr>
             <a:r>
-              <a:rPr sz="1280" b="0" i="0">
+              <a:rPr sz="1160" b="0" i="0">
                 <a:solidFill>
                   <a:srgbClr val="93A0B6"/>
                 </a:solidFill>
                 <a:latin typeface="Arial"/>
               </a:rPr>
-              <a:t>Attach Yoshida money where possible; free payroll for the 2027 window.</a:t>
-            </a:r>
-          </a:p>
-        </p:txBody>
-      </p:sp>
-      <p:sp>
-        <p:nvSpPr>
-          <p:cNvPr id="17" name="TextBox 16"/>
-          <p:cNvSpPr txBox="1"/>
-          <p:nvPr/>
-        </p:nvSpPr>
-        <p:spPr>
-          <a:xfrm>
-            <a:off x="566928" y="5257800"/>
+              <a:t>The value math worked; the battery map is the veto. No August bat is worth resetting eight pitcher-catcher pairings in the middle of a streak built on run prevention.</a:t>
+            </a:r>
+          </a:p>
+        </p:txBody>
+      </p:sp>
+      <p:sp>
+        <p:nvSpPr>
+          <p:cNvPr id="20" name="TextBox 19"/>
+          <p:cNvSpPr txBox="1"/>
+          <p:nvPr/>
+        </p:nvSpPr>
+        <p:spPr>
+          <a:xfrm>
+            <a:off x="566928" y="5897880"/>
             <a:ext cx="11064240" cy="457200"/>
           </a:xfrm>
           <a:prstGeom prst="rect">
@@ -5608,29 +5407,29 @@
               </a:spcAft>
             </a:pPr>
             <a:r>
-              <a:rPr sz="1400" b="1" i="1">
-                <a:solidFill>
-                  <a:srgbClr val="EAF0F8"/>
-                </a:solidFill>
-                <a:latin typeface="Arial"/>
-              </a:rPr>
-              <a:t>Keep the arms. Cash the outfield. </a:t>
-            </a:r>
-            <a:r>
-              <a:rPr sz="1400" b="0" i="1">
+              <a:rPr sz="1250" b="1" i="0">
+                <a:solidFill>
+                  <a:srgbClr val="D9E1EF"/>
+                </a:solidFill>
+                <a:latin typeface="Arial"/>
+              </a:rPr>
+              <a:t>A menu, not a plan — Boston can afford about two. </a:t>
+            </a:r>
+            <a:r>
+              <a:rPr sz="1250" b="0" i="0">
                 <a:solidFill>
                   <a:srgbClr val="93A0B6"/>
                 </a:solidFill>
                 <a:latin typeface="Arial"/>
               </a:rPr>
-              <a:t>Build the 2027 lineup, don't rent the 2026 one.</a:t>
-            </a:r>
-          </a:p>
-        </p:txBody>
-      </p:sp>
-      <p:sp>
-        <p:nvSpPr>
-          <p:cNvPr id="18" name="TextBox 17"/>
+              <a:t>Full value math and verified contracts in the mock-trades memo. Hypotheticals, not reporting.</a:t>
+            </a:r>
+          </a:p>
+        </p:txBody>
+      </p:sp>
+      <p:sp>
+        <p:nvSpPr>
+          <p:cNvPr id="21" name="TextBox 20"/>
           <p:cNvSpPr txBox="1"/>
           <p:nvPr/>
         </p:nvSpPr>
@@ -5742,7 +5541,7 @@
                 </a:solidFill>
                 <a:latin typeface="Courier New"/>
               </a:rPr>
-              <a:t>// THE MARKET</a:t>
+              <a:t>// THE WINTER PLAN</a:t>
             </a:r>
           </a:p>
         </p:txBody>
@@ -5784,74 +5583,98 @@
                 </a:solidFill>
                 <a:latin typeface="Arial"/>
               </a:rPr>
-              <a:t>Who pays: contenders with a hole in the outfield</a:t>
-            </a:r>
-          </a:p>
-        </p:txBody>
-      </p:sp>
-      <p:pic>
-        <p:nvPicPr>
-          <p:cNvPr id="4" name="Picture 3" descr="08_trade_fit_targets.png"/>
-          <p:cNvPicPr>
-            <a:picLocks noChangeAspect="1"/>
-          </p:cNvPicPr>
-          <p:nvPr/>
-        </p:nvPicPr>
-        <p:blipFill>
-          <a:blip r:embed="rId2"/>
-          <a:stretch>
-            <a:fillRect/>
-          </a:stretch>
-        </p:blipFill>
-        <p:spPr>
-          <a:xfrm>
-            <a:off x="757237" y="1463040"/>
-            <a:ext cx="6715125" cy="4297680"/>
-          </a:xfrm>
-          <a:prstGeom prst="rect">
-            <a:avLst/>
-          </a:prstGeom>
-        </p:spPr>
-      </p:pic>
-      <p:sp>
-        <p:nvSpPr>
-          <p:cNvPr id="5" name="TextBox 4"/>
-          <p:cNvSpPr txBox="1"/>
-          <p:nvPr/>
-        </p:nvSpPr>
-        <p:spPr>
-          <a:xfrm>
-            <a:off x="8183879" y="1691640"/>
-            <a:ext cx="3657600" cy="457200"/>
-          </a:xfrm>
-          <a:prstGeom prst="rect">
-            <a:avLst/>
-          </a:prstGeom>
-          <a:noFill/>
-        </p:spPr>
-        <p:txBody>
-          <a:bodyPr wrap="square" anchor="t" lIns="0" rIns="0" tIns="0" bIns="0">
-            <a:spAutoFit/>
-          </a:bodyPr>
-          <a:lstStyle/>
-          <a:p>
-            <a:pPr algn="l">
-              <a:lnSpc>
-                <a:spcPct val="100000"/>
-              </a:lnSpc>
-              <a:spcAft>
-                <a:spcPts val="0"/>
-              </a:spcAft>
-            </a:pPr>
-            <a:r>
-              <a:rPr sz="1500" b="1" i="0">
-                <a:solidFill>
-                  <a:srgbClr val="EAF0F8"/>
-                </a:solidFill>
-                <a:latin typeface="Arial"/>
-              </a:rPr>
-              <a:t>Best-fit buyers</a:t>
-            </a:r>
+              <a:t>Pitching is the strength — spend the surplus on offense</a:t>
+            </a:r>
+          </a:p>
+        </p:txBody>
+      </p:sp>
+      <p:sp>
+        <p:nvSpPr>
+          <p:cNvPr id="4" name="TextBox 3"/>
+          <p:cNvSpPr txBox="1"/>
+          <p:nvPr/>
+        </p:nvSpPr>
+        <p:spPr>
+          <a:xfrm>
+            <a:off x="566928" y="1572768"/>
+            <a:ext cx="11064240" cy="640080"/>
+          </a:xfrm>
+          <a:prstGeom prst="rect">
+            <a:avLst/>
+          </a:prstGeom>
+          <a:noFill/>
+        </p:spPr>
+        <p:txBody>
+          <a:bodyPr wrap="square" anchor="t" lIns="0" rIns="0" tIns="0" bIns="0">
+            <a:spAutoFit/>
+          </a:bodyPr>
+          <a:lstStyle/>
+          <a:p>
+            <a:pPr algn="l">
+              <a:lnSpc>
+                <a:spcPct val="112000"/>
+              </a:lnSpc>
+              <a:spcAft>
+                <a:spcPts val="400"/>
+              </a:spcAft>
+            </a:pPr>
+            <a:r>
+              <a:rPr sz="1450" b="0" i="0">
+                <a:solidFill>
+                  <a:srgbClr val="D9E1EF"/>
+                </a:solidFill>
+                <a:latin typeface="Arial"/>
+              </a:rPr>
+              <a:t>If winter comes and Duran's rebound has shown up, this is what a deal should return. With a top-6 rotation (3.65 ERA) carrying the club, trading bats for arms is backwards — convert the outfield surplus into what's thin:</a:t>
+            </a:r>
+          </a:p>
+        </p:txBody>
+      </p:sp>
+      <p:sp>
+        <p:nvSpPr>
+          <p:cNvPr id="5" name="Rounded Rectangle 4"/>
+          <p:cNvSpPr/>
+          <p:nvPr/>
+        </p:nvSpPr>
+        <p:spPr>
+          <a:xfrm>
+            <a:off x="566928" y="2468880"/>
+            <a:ext cx="3502152" cy="2514600"/>
+          </a:xfrm>
+          <a:prstGeom prst="roundRect">
+            <a:avLst>
+              <a:gd name="adj" fmla="val 6000"/>
+            </a:avLst>
+          </a:prstGeom>
+          <a:solidFill>
+            <a:srgbClr val="121E33"/>
+          </a:solidFill>
+          <a:ln w="12700">
+            <a:solidFill>
+              <a:srgbClr val="26334E"/>
+            </a:solidFill>
+          </a:ln>
+          <a:effectLst/>
+        </p:spPr>
+        <p:style>
+          <a:lnRef idx="1">
+            <a:schemeClr val="accent1"/>
+          </a:lnRef>
+          <a:fillRef idx="3">
+            <a:schemeClr val="accent1"/>
+          </a:fillRef>
+          <a:effectRef idx="2">
+            <a:schemeClr val="accent1"/>
+          </a:effectRef>
+          <a:fontRef idx="minor">
+            <a:schemeClr val="lt1"/>
+          </a:fontRef>
+        </p:style>
+        <p:txBody>
+          <a:bodyPr rtlCol="0" anchor="ctr"/>
+          <a:lstStyle/>
+          <a:p>
+            <a:pPr algn="ctr"/>
           </a:p>
         </p:txBody>
       </p:sp>
@@ -5863,8 +5686,8 @@
         </p:nvSpPr>
         <p:spPr>
           <a:xfrm>
-            <a:off x="8183879" y="2221991"/>
-            <a:ext cx="128016" cy="128016"/>
+            <a:off x="841247" y="2724912"/>
+            <a:ext cx="384048" cy="384048"/>
           </a:xfrm>
           <a:prstGeom prst="roundRect">
             <a:avLst>
@@ -5872,7 +5695,7 @@
             </a:avLst>
           </a:prstGeom>
           <a:solidFill>
-            <a:srgbClr val="E8615A"/>
+            <a:srgbClr val="58C08D"/>
           </a:solidFill>
           <a:ln>
             <a:noFill/>
@@ -5894,6 +5717,147 @@
           </a:fontRef>
         </p:style>
         <p:txBody>
+          <a:bodyPr rtlCol="0" anchor="ctr" wrap="none"/>
+          <a:lstStyle/>
+          <a:p>
+            <a:pPr algn="ctr"/>
+            <a:r>
+              <a:rPr sz="1600" b="1">
+                <a:solidFill>
+                  <a:srgbClr val="0B1220"/>
+                </a:solidFill>
+                <a:latin typeface="Courier New"/>
+              </a:rPr>
+              <a:t>1</a:t>
+            </a:r>
+          </a:p>
+        </p:txBody>
+      </p:sp>
+      <p:sp>
+        <p:nvSpPr>
+          <p:cNvPr id="7" name="TextBox 6"/>
+          <p:cNvSpPr txBox="1"/>
+          <p:nvPr/>
+        </p:nvSpPr>
+        <p:spPr>
+          <a:xfrm>
+            <a:off x="841247" y="3310128"/>
+            <a:ext cx="2999232" cy="411480"/>
+          </a:xfrm>
+          <a:prstGeom prst="rect">
+            <a:avLst/>
+          </a:prstGeom>
+          <a:noFill/>
+        </p:spPr>
+        <p:txBody>
+          <a:bodyPr wrap="square" anchor="t" lIns="0" rIns="0" tIns="0" bIns="0">
+            <a:spAutoFit/>
+          </a:bodyPr>
+          <a:lstStyle/>
+          <a:p>
+            <a:pPr algn="l">
+              <a:lnSpc>
+                <a:spcPct val="100000"/>
+              </a:lnSpc>
+              <a:spcAft>
+                <a:spcPts val="0"/>
+              </a:spcAft>
+            </a:pPr>
+            <a:r>
+              <a:rPr sz="1600" b="1" i="0">
+                <a:solidFill>
+                  <a:srgbClr val="EAF0F8"/>
+                </a:solidFill>
+                <a:latin typeface="Arial"/>
+              </a:rPr>
+              <a:t>Controllable bats</a:t>
+            </a:r>
+          </a:p>
+        </p:txBody>
+      </p:sp>
+      <p:sp>
+        <p:nvSpPr>
+          <p:cNvPr id="8" name="TextBox 7"/>
+          <p:cNvSpPr txBox="1"/>
+          <p:nvPr/>
+        </p:nvSpPr>
+        <p:spPr>
+          <a:xfrm>
+            <a:off x="841247" y="3767328"/>
+            <a:ext cx="2999232" cy="1097280"/>
+          </a:xfrm>
+          <a:prstGeom prst="rect">
+            <a:avLst/>
+          </a:prstGeom>
+          <a:noFill/>
+        </p:spPr>
+        <p:txBody>
+          <a:bodyPr wrap="square" anchor="t" lIns="0" rIns="0" tIns="0" bIns="0">
+            <a:spAutoFit/>
+          </a:bodyPr>
+          <a:lstStyle/>
+          <a:p>
+            <a:pPr algn="l">
+              <a:lnSpc>
+                <a:spcPct val="110000"/>
+              </a:lnSpc>
+              <a:spcAft>
+                <a:spcPts val="400"/>
+              </a:spcAft>
+            </a:pPr>
+            <a:r>
+              <a:rPr sz="1280" b="0" i="0">
+                <a:solidFill>
+                  <a:srgbClr val="93A0B6"/>
+                </a:solidFill>
+                <a:latin typeface="Arial"/>
+              </a:rPr>
+              <a:t>Young, cost-controlled position players to fix an inconsistent lineup and lengthen it around the core.</a:t>
+            </a:r>
+          </a:p>
+        </p:txBody>
+      </p:sp>
+      <p:sp>
+        <p:nvSpPr>
+          <p:cNvPr id="9" name="Rounded Rectangle 8"/>
+          <p:cNvSpPr/>
+          <p:nvPr/>
+        </p:nvSpPr>
+        <p:spPr>
+          <a:xfrm>
+            <a:off x="4352544" y="2468880"/>
+            <a:ext cx="3502152" cy="2514600"/>
+          </a:xfrm>
+          <a:prstGeom prst="roundRect">
+            <a:avLst>
+              <a:gd name="adj" fmla="val 6000"/>
+            </a:avLst>
+          </a:prstGeom>
+          <a:solidFill>
+            <a:srgbClr val="121E33"/>
+          </a:solidFill>
+          <a:ln w="12700">
+            <a:solidFill>
+              <a:srgbClr val="26334E"/>
+            </a:solidFill>
+          </a:ln>
+          <a:effectLst/>
+        </p:spPr>
+        <p:style>
+          <a:lnRef idx="1">
+            <a:schemeClr val="accent1"/>
+          </a:lnRef>
+          <a:fillRef idx="3">
+            <a:schemeClr val="accent1"/>
+          </a:fillRef>
+          <a:effectRef idx="2">
+            <a:schemeClr val="accent1"/>
+          </a:effectRef>
+          <a:fontRef idx="minor">
+            <a:schemeClr val="lt1"/>
+          </a:fontRef>
+        </p:style>
+        <p:txBody>
           <a:bodyPr rtlCol="0" anchor="ctr"/>
           <a:lstStyle/>
           <a:p>
@@ -5903,65 +5867,14 @@
       </p:sp>
       <p:sp>
         <p:nvSpPr>
-          <p:cNvPr id="7" name="TextBox 6"/>
-          <p:cNvSpPr txBox="1"/>
-          <p:nvPr/>
-        </p:nvSpPr>
-        <p:spPr>
-          <a:xfrm>
-            <a:off x="8439911" y="2194560"/>
-            <a:ext cx="3566160" cy="457200"/>
-          </a:xfrm>
-          <a:prstGeom prst="rect">
-            <a:avLst/>
-          </a:prstGeom>
-          <a:noFill/>
-        </p:spPr>
-        <p:txBody>
-          <a:bodyPr wrap="square" anchor="t" lIns="0" rIns="0" tIns="0" bIns="0">
-            <a:spAutoFit/>
-          </a:bodyPr>
-          <a:lstStyle/>
-          <a:p>
-            <a:pPr algn="l">
-              <a:lnSpc>
-                <a:spcPct val="100000"/>
-              </a:lnSpc>
-              <a:spcAft>
-                <a:spcPts val="0"/>
-              </a:spcAft>
-            </a:pPr>
-            <a:r>
-              <a:rPr sz="1400" b="1" i="0">
-                <a:solidFill>
-                  <a:srgbClr val="EAF0F8"/>
-                </a:solidFill>
-                <a:latin typeface="Arial"/>
-              </a:rPr>
-              <a:t>Phillies  </a:t>
-            </a:r>
-            <a:r>
-              <a:rPr sz="1200" b="0" i="0">
-                <a:solidFill>
-                  <a:srgbClr val="93A0B6"/>
-                </a:solidFill>
-                <a:latin typeface="Arial"/>
-              </a:rPr>
-              <a:t>.557, 84 OF wRC+</a:t>
-            </a:r>
-          </a:p>
-        </p:txBody>
-      </p:sp>
-      <p:sp>
-        <p:nvSpPr>
-          <p:cNvPr id="8" name="Rounded Rectangle 7"/>
+          <p:cNvPr id="10" name="Rounded Rectangle 9"/>
           <p:cNvSpPr/>
           <p:nvPr/>
         </p:nvSpPr>
         <p:spPr>
           <a:xfrm>
-            <a:off x="8183879" y="2788920"/>
-            <a:ext cx="128016" cy="128016"/>
+            <a:off x="4626864" y="2724912"/>
+            <a:ext cx="384048" cy="384048"/>
           </a:xfrm>
           <a:prstGeom prst="roundRect">
             <a:avLst>
@@ -5969,7 +5882,7 @@
             </a:avLst>
           </a:prstGeom>
           <a:solidFill>
-            <a:srgbClr val="E8615A"/>
+            <a:srgbClr val="EAF0F8"/>
           </a:solidFill>
           <a:ln>
             <a:noFill/>
@@ -5991,6 +5904,147 @@
           </a:fontRef>
         </p:style>
         <p:txBody>
+          <a:bodyPr rtlCol="0" anchor="ctr" wrap="none"/>
+          <a:lstStyle/>
+          <a:p>
+            <a:pPr algn="ctr"/>
+            <a:r>
+              <a:rPr sz="1600" b="1">
+                <a:solidFill>
+                  <a:srgbClr val="0B1220"/>
+                </a:solidFill>
+                <a:latin typeface="Courier New"/>
+              </a:rPr>
+              <a:t>2</a:t>
+            </a:r>
+          </a:p>
+        </p:txBody>
+      </p:sp>
+      <p:sp>
+        <p:nvSpPr>
+          <p:cNvPr id="11" name="TextBox 10"/>
+          <p:cNvSpPr txBox="1"/>
+          <p:nvPr/>
+        </p:nvSpPr>
+        <p:spPr>
+          <a:xfrm>
+            <a:off x="4626864" y="3310128"/>
+            <a:ext cx="2999232" cy="411480"/>
+          </a:xfrm>
+          <a:prstGeom prst="rect">
+            <a:avLst/>
+          </a:prstGeom>
+          <a:noFill/>
+        </p:spPr>
+        <p:txBody>
+          <a:bodyPr wrap="square" anchor="t" lIns="0" rIns="0" tIns="0" bIns="0">
+            <a:spAutoFit/>
+          </a:bodyPr>
+          <a:lstStyle/>
+          <a:p>
+            <a:pPr algn="l">
+              <a:lnSpc>
+                <a:spcPct val="100000"/>
+              </a:lnSpc>
+              <a:spcAft>
+                <a:spcPts val="0"/>
+              </a:spcAft>
+            </a:pPr>
+            <a:r>
+              <a:rPr sz="1600" b="1" i="0">
+                <a:solidFill>
+                  <a:srgbClr val="EAF0F8"/>
+                </a:solidFill>
+                <a:latin typeface="Arial"/>
+              </a:rPr>
+              <a:t>Best talent / upside</a:t>
+            </a:r>
+          </a:p>
+        </p:txBody>
+      </p:sp>
+      <p:sp>
+        <p:nvSpPr>
+          <p:cNvPr id="12" name="TextBox 11"/>
+          <p:cNvSpPr txBox="1"/>
+          <p:nvPr/>
+        </p:nvSpPr>
+        <p:spPr>
+          <a:xfrm>
+            <a:off x="4626864" y="3767328"/>
+            <a:ext cx="2999232" cy="1097280"/>
+          </a:xfrm>
+          <a:prstGeom prst="rect">
+            <a:avLst/>
+          </a:prstGeom>
+          <a:noFill/>
+        </p:spPr>
+        <p:txBody>
+          <a:bodyPr wrap="square" anchor="t" lIns="0" rIns="0" tIns="0" bIns="0">
+            <a:spAutoFit/>
+          </a:bodyPr>
+          <a:lstStyle/>
+          <a:p>
+            <a:pPr algn="l">
+              <a:lnSpc>
+                <a:spcPct val="110000"/>
+              </a:lnSpc>
+              <a:spcAft>
+                <a:spcPts val="400"/>
+              </a:spcAft>
+            </a:pPr>
+            <a:r>
+              <a:rPr sz="1280" b="0" i="0">
+                <a:solidFill>
+                  <a:srgbClr val="93A0B6"/>
+                </a:solidFill>
+                <a:latin typeface="Arial"/>
+              </a:rPr>
+              <a:t>In a retool you take the best player, not the positional patch — prospects and MLB-ready youth over rentals.</a:t>
+            </a:r>
+          </a:p>
+        </p:txBody>
+      </p:sp>
+      <p:sp>
+        <p:nvSpPr>
+          <p:cNvPr id="13" name="Rounded Rectangle 12"/>
+          <p:cNvSpPr/>
+          <p:nvPr/>
+        </p:nvSpPr>
+        <p:spPr>
+          <a:xfrm>
+            <a:off x="8138159" y="2468880"/>
+            <a:ext cx="3502152" cy="2514600"/>
+          </a:xfrm>
+          <a:prstGeom prst="roundRect">
+            <a:avLst>
+              <a:gd name="adj" fmla="val 6000"/>
+            </a:avLst>
+          </a:prstGeom>
+          <a:solidFill>
+            <a:srgbClr val="121E33"/>
+          </a:solidFill>
+          <a:ln w="12700">
+            <a:solidFill>
+              <a:srgbClr val="26334E"/>
+            </a:solidFill>
+          </a:ln>
+          <a:effectLst/>
+        </p:spPr>
+        <p:style>
+          <a:lnRef idx="1">
+            <a:schemeClr val="accent1"/>
+          </a:lnRef>
+          <a:fillRef idx="3">
+            <a:schemeClr val="accent1"/>
+          </a:fillRef>
+          <a:effectRef idx="2">
+            <a:schemeClr val="accent1"/>
+          </a:effectRef>
+          <a:fontRef idx="minor">
+            <a:schemeClr val="lt1"/>
+          </a:fontRef>
+        </p:style>
+        <p:txBody>
           <a:bodyPr rtlCol="0" anchor="ctr"/>
           <a:lstStyle/>
           <a:p>
@@ -6000,65 +6054,14 @@
       </p:sp>
       <p:sp>
         <p:nvSpPr>
-          <p:cNvPr id="9" name="TextBox 8"/>
-          <p:cNvSpPr txBox="1"/>
-          <p:nvPr/>
-        </p:nvSpPr>
-        <p:spPr>
-          <a:xfrm>
-            <a:off x="8439911" y="2761488"/>
-            <a:ext cx="3566160" cy="457200"/>
-          </a:xfrm>
-          <a:prstGeom prst="rect">
-            <a:avLst/>
-          </a:prstGeom>
-          <a:noFill/>
-        </p:spPr>
-        <p:txBody>
-          <a:bodyPr wrap="square" anchor="t" lIns="0" rIns="0" tIns="0" bIns="0">
-            <a:spAutoFit/>
-          </a:bodyPr>
-          <a:lstStyle/>
-          <a:p>
-            <a:pPr algn="l">
-              <a:lnSpc>
-                <a:spcPct val="100000"/>
-              </a:lnSpc>
-              <a:spcAft>
-                <a:spcPts val="0"/>
-              </a:spcAft>
-            </a:pPr>
-            <a:r>
-              <a:rPr sz="1400" b="1" i="0">
-                <a:solidFill>
-                  <a:srgbClr val="EAF0F8"/>
-                </a:solidFill>
-                <a:latin typeface="Arial"/>
-              </a:rPr>
-              <a:t>Rays  </a:t>
-            </a:r>
-            <a:r>
-              <a:rPr sz="1200" b="0" i="0">
-                <a:solidFill>
-                  <a:srgbClr val="93A0B6"/>
-                </a:solidFill>
-                <a:latin typeface="Arial"/>
-              </a:rPr>
-              <a:t>.596, 88 OF wRC+</a:t>
-            </a:r>
-          </a:p>
-        </p:txBody>
-      </p:sp>
-      <p:sp>
-        <p:nvSpPr>
-          <p:cNvPr id="10" name="Rounded Rectangle 9"/>
+          <p:cNvPr id="14" name="Rounded Rectangle 13"/>
           <p:cNvSpPr/>
           <p:nvPr/>
         </p:nvSpPr>
         <p:spPr>
           <a:xfrm>
-            <a:off x="8183879" y="3355847"/>
-            <a:ext cx="128016" cy="128016"/>
+            <a:off x="8412480" y="2724912"/>
+            <a:ext cx="384048" cy="384048"/>
           </a:xfrm>
           <a:prstGeom prst="roundRect">
             <a:avLst>
@@ -6066,7 +6069,7 @@
             </a:avLst>
           </a:prstGeom>
           <a:solidFill>
-            <a:srgbClr val="E8615A"/>
+            <a:srgbClr val="E3B14E"/>
           </a:solidFill>
           <a:ln>
             <a:noFill/>
@@ -6088,23 +6091,32 @@
           </a:fontRef>
         </p:style>
         <p:txBody>
-          <a:bodyPr rtlCol="0" anchor="ctr"/>
+          <a:bodyPr rtlCol="0" anchor="ctr" wrap="none"/>
           <a:lstStyle/>
           <a:p>
             <a:pPr algn="ctr"/>
-          </a:p>
-        </p:txBody>
-      </p:sp>
-      <p:sp>
-        <p:nvSpPr>
-          <p:cNvPr id="11" name="TextBox 10"/>
-          <p:cNvSpPr txBox="1"/>
-          <p:nvPr/>
-        </p:nvSpPr>
-        <p:spPr>
-          <a:xfrm>
-            <a:off x="8439911" y="3328415"/>
-            <a:ext cx="3566160" cy="457200"/>
+            <a:r>
+              <a:rPr sz="1600" b="1">
+                <a:solidFill>
+                  <a:srgbClr val="0B1220"/>
+                </a:solidFill>
+                <a:latin typeface="Courier New"/>
+              </a:rPr>
+              <a:t>3</a:t>
+            </a:r>
+          </a:p>
+        </p:txBody>
+      </p:sp>
+      <p:sp>
+        <p:nvSpPr>
+          <p:cNvPr id="15" name="TextBox 14"/>
+          <p:cNvSpPr txBox="1"/>
+          <p:nvPr/>
+        </p:nvSpPr>
+        <p:spPr>
+          <a:xfrm>
+            <a:off x="8412480" y="3310128"/>
+            <a:ext cx="2999232" cy="411480"/>
           </a:xfrm>
           <a:prstGeom prst="rect">
             <a:avLst/>
@@ -6126,82 +6138,69 @@
               </a:spcAft>
             </a:pPr>
             <a:r>
-              <a:rPr sz="1400" b="1" i="0">
+              <a:rPr sz="1600" b="1" i="0">
                 <a:solidFill>
                   <a:srgbClr val="EAF0F8"/>
                 </a:solidFill>
                 <a:latin typeface="Arial"/>
               </a:rPr>
-              <a:t>Cardinals  </a:t>
-            </a:r>
-            <a:r>
-              <a:rPr sz="1200" b="0" i="0">
+              <a:t>Salary relief</a:t>
+            </a:r>
+          </a:p>
+        </p:txBody>
+      </p:sp>
+      <p:sp>
+        <p:nvSpPr>
+          <p:cNvPr id="16" name="TextBox 15"/>
+          <p:cNvSpPr txBox="1"/>
+          <p:nvPr/>
+        </p:nvSpPr>
+        <p:spPr>
+          <a:xfrm>
+            <a:off x="8412480" y="3767328"/>
+            <a:ext cx="2999232" cy="1097280"/>
+          </a:xfrm>
+          <a:prstGeom prst="rect">
+            <a:avLst/>
+          </a:prstGeom>
+          <a:noFill/>
+        </p:spPr>
+        <p:txBody>
+          <a:bodyPr wrap="square" anchor="t" lIns="0" rIns="0" tIns="0" bIns="0">
+            <a:spAutoFit/>
+          </a:bodyPr>
+          <a:lstStyle/>
+          <a:p>
+            <a:pPr algn="l">
+              <a:lnSpc>
+                <a:spcPct val="110000"/>
+              </a:lnSpc>
+              <a:spcAft>
+                <a:spcPts val="400"/>
+              </a:spcAft>
+            </a:pPr>
+            <a:r>
+              <a:rPr sz="1280" b="0" i="0">
                 <a:solidFill>
                   <a:srgbClr val="93A0B6"/>
                 </a:solidFill>
                 <a:latin typeface="Arial"/>
               </a:rPr>
-              <a:t>.526, OF need</a:t>
-            </a:r>
-          </a:p>
-        </p:txBody>
-      </p:sp>
-      <p:sp>
-        <p:nvSpPr>
-          <p:cNvPr id="12" name="Rounded Rectangle 11"/>
-          <p:cNvSpPr/>
-          <p:nvPr/>
-        </p:nvSpPr>
-        <p:spPr>
-          <a:xfrm>
-            <a:off x="8183879" y="3922776"/>
-            <a:ext cx="128016" cy="128016"/>
-          </a:xfrm>
-          <a:prstGeom prst="roundRect">
-            <a:avLst>
-              <a:gd name="adj" fmla="val 18000"/>
-            </a:avLst>
-          </a:prstGeom>
-          <a:solidFill>
-            <a:srgbClr val="E8615A"/>
-          </a:solidFill>
-          <a:ln>
-            <a:noFill/>
-          </a:ln>
-          <a:effectLst/>
-        </p:spPr>
-        <p:style>
-          <a:lnRef idx="1">
-            <a:schemeClr val="accent1"/>
-          </a:lnRef>
-          <a:fillRef idx="3">
-            <a:schemeClr val="accent1"/>
-          </a:fillRef>
-          <a:effectRef idx="2">
-            <a:schemeClr val="accent1"/>
-          </a:effectRef>
-          <a:fontRef idx="minor">
-            <a:schemeClr val="lt1"/>
-          </a:fontRef>
-        </p:style>
-        <p:txBody>
-          <a:bodyPr rtlCol="0" anchor="ctr"/>
-          <a:lstStyle/>
-          <a:p>
-            <a:pPr algn="ctr"/>
-          </a:p>
-        </p:txBody>
-      </p:sp>
-      <p:sp>
-        <p:nvSpPr>
-          <p:cNvPr id="13" name="TextBox 12"/>
-          <p:cNvSpPr txBox="1"/>
-          <p:nvPr/>
-        </p:nvSpPr>
-        <p:spPr>
-          <a:xfrm>
-            <a:off x="8439911" y="3895344"/>
-            <a:ext cx="3566160" cy="457200"/>
+              <a:t>Attach Yoshida money where possible; free payroll for the 2027 window.</a:t>
+            </a:r>
+          </a:p>
+        </p:txBody>
+      </p:sp>
+      <p:sp>
+        <p:nvSpPr>
+          <p:cNvPr id="17" name="TextBox 16"/>
+          <p:cNvSpPr txBox="1"/>
+          <p:nvPr/>
+        </p:nvSpPr>
+        <p:spPr>
+          <a:xfrm>
+            <a:off x="566928" y="5257800"/>
+            <a:ext cx="11064240" cy="457200"/>
           </a:xfrm>
           <a:prstGeom prst="rect">
             <a:avLst/>
@@ -6223,89 +6222,29 @@
               </a:spcAft>
             </a:pPr>
             <a:r>
-              <a:rPr sz="1400" b="1" i="0">
+              <a:rPr sz="1400" b="1" i="1">
                 <a:solidFill>
                   <a:srgbClr val="EAF0F8"/>
                 </a:solidFill>
                 <a:latin typeface="Arial"/>
               </a:rPr>
-              <a:t>Astros  </a:t>
-            </a:r>
-            <a:r>
-              <a:rPr sz="1200" b="0" i="0">
+              <a:t>Keep the arms. Cash the outfield. </a:t>
+            </a:r>
+            <a:r>
+              <a:rPr sz="1400" b="0" i="1">
                 <a:solidFill>
                   <a:srgbClr val="93A0B6"/>
                 </a:solidFill>
                 <a:latin typeface="Arial"/>
               </a:rPr>
-              <a:t>fringe, weakest OF</a:t>
-            </a:r>
-          </a:p>
-        </p:txBody>
-      </p:sp>
-      <p:sp>
-        <p:nvSpPr>
-          <p:cNvPr id="14" name="TextBox 13"/>
-          <p:cNvSpPr txBox="1"/>
-          <p:nvPr/>
-        </p:nvSpPr>
-        <p:spPr>
-          <a:xfrm>
-            <a:off x="8183879" y="4709160"/>
-            <a:ext cx="3657600" cy="1005840"/>
-          </a:xfrm>
-          <a:prstGeom prst="rect">
-            <a:avLst/>
-          </a:prstGeom>
-          <a:noFill/>
-        </p:spPr>
-        <p:txBody>
-          <a:bodyPr wrap="square" anchor="t" lIns="0" rIns="0" tIns="0" bIns="0">
-            <a:spAutoFit/>
-          </a:bodyPr>
-          <a:lstStyle/>
-          <a:p>
-            <a:pPr algn="l">
-              <a:lnSpc>
-                <a:spcPct val="112000"/>
-              </a:lnSpc>
-              <a:spcAft>
-                <a:spcPts val="400"/>
-              </a:spcAft>
-            </a:pPr>
-            <a:r>
-              <a:rPr sz="1250" b="0" i="0">
-                <a:solidFill>
-                  <a:srgbClr val="D9E1EF"/>
-                </a:solidFill>
-                <a:latin typeface="Arial"/>
-              </a:rPr>
-              <a:t>Trade a redundant bat to a team that needs one — and take back the </a:t>
-            </a:r>
-            <a:r>
-              <a:rPr sz="1250" b="1" i="0">
-                <a:solidFill>
-                  <a:srgbClr val="58C08D"/>
-                </a:solidFill>
-                <a:latin typeface="Arial"/>
-              </a:rPr>
-              <a:t>hitting/youth</a:t>
-            </a:r>
-            <a:r>
-              <a:rPr sz="1250" b="0" i="0">
-                <a:solidFill>
-                  <a:srgbClr val="D9E1EF"/>
-                </a:solidFill>
-                <a:latin typeface="Arial"/>
-              </a:rPr>
-              <a:t> Boston is short on.</a:t>
-            </a:r>
-          </a:p>
-        </p:txBody>
-      </p:sp>
-      <p:sp>
-        <p:nvSpPr>
-          <p:cNvPr id="15" name="TextBox 14"/>
+              <a:t>Build the 2027 lineup, don't rent the 2026 one.</a:t>
+            </a:r>
+          </a:p>
+        </p:txBody>
+      </p:sp>
+      <p:sp>
+        <p:nvSpPr>
+          <p:cNvPr id="18" name="TextBox 17"/>
           <p:cNvSpPr txBox="1"/>
           <p:nvPr/>
         </p:nvSpPr>
@@ -6417,7 +6356,7 @@
                 </a:solidFill>
                 <a:latin typeface="Courier New"/>
               </a:rPr>
-              <a:t>// THE SEQUENCE</a:t>
+              <a:t>// THE MARKET</a:t>
             </a:r>
           </a:p>
         </p:txBody>
@@ -6459,21 +6398,87 @@
                 </a:solidFill>
                 <a:latin typeface="Arial"/>
               </a:rPr>
-              <a:t>Buy now, decide on Duran in the winter</a:t>
-            </a:r>
-          </a:p>
-        </p:txBody>
-      </p:sp>
-      <p:sp>
-        <p:nvSpPr>
-          <p:cNvPr id="4" name="Rounded Rectangle 3"/>
+              <a:t>Who pays: contenders with a hole in the outfield</a:t>
+            </a:r>
+          </a:p>
+        </p:txBody>
+      </p:sp>
+      <p:pic>
+        <p:nvPicPr>
+          <p:cNvPr id="4" name="Picture 3" descr="08_trade_fit_targets.png"/>
+          <p:cNvPicPr>
+            <a:picLocks noChangeAspect="1"/>
+          </p:cNvPicPr>
+          <p:nvPr/>
+        </p:nvPicPr>
+        <p:blipFill>
+          <a:blip r:embed="rId2"/>
+          <a:stretch>
+            <a:fillRect/>
+          </a:stretch>
+        </p:blipFill>
+        <p:spPr>
+          <a:xfrm>
+            <a:off x="757237" y="1463040"/>
+            <a:ext cx="6715125" cy="4297680"/>
+          </a:xfrm>
+          <a:prstGeom prst="rect">
+            <a:avLst/>
+          </a:prstGeom>
+        </p:spPr>
+      </p:pic>
+      <p:sp>
+        <p:nvSpPr>
+          <p:cNvPr id="5" name="TextBox 4"/>
+          <p:cNvSpPr txBox="1"/>
+          <p:nvPr/>
+        </p:nvSpPr>
+        <p:spPr>
+          <a:xfrm>
+            <a:off x="8183879" y="1691640"/>
+            <a:ext cx="3657600" cy="457200"/>
+          </a:xfrm>
+          <a:prstGeom prst="rect">
+            <a:avLst/>
+          </a:prstGeom>
+          <a:noFill/>
+        </p:spPr>
+        <p:txBody>
+          <a:bodyPr wrap="square" anchor="t" lIns="0" rIns="0" tIns="0" bIns="0">
+            <a:spAutoFit/>
+          </a:bodyPr>
+          <a:lstStyle/>
+          <a:p>
+            <a:pPr algn="l">
+              <a:lnSpc>
+                <a:spcPct val="100000"/>
+              </a:lnSpc>
+              <a:spcAft>
+                <a:spcPts val="0"/>
+              </a:spcAft>
+            </a:pPr>
+            <a:r>
+              <a:rPr sz="1500" b="1" i="0">
+                <a:solidFill>
+                  <a:srgbClr val="EAF0F8"/>
+                </a:solidFill>
+                <a:latin typeface="Arial"/>
+              </a:rPr>
+              <a:t>Best-fit buyers</a:t>
+            </a:r>
+          </a:p>
+        </p:txBody>
+      </p:sp>
+      <p:sp>
+        <p:nvSpPr>
+          <p:cNvPr id="6" name="Rounded Rectangle 5"/>
           <p:cNvSpPr/>
           <p:nvPr/>
         </p:nvSpPr>
         <p:spPr>
           <a:xfrm>
-            <a:off x="640080" y="1801368"/>
-            <a:ext cx="457200" cy="457200"/>
+            <a:off x="8183879" y="2221991"/>
+            <a:ext cx="128016" cy="128016"/>
           </a:xfrm>
           <a:prstGeom prst="roundRect">
             <a:avLst>
@@ -6503,93 +6508,74 @@
           </a:fontRef>
         </p:style>
         <p:txBody>
-          <a:bodyPr rtlCol="0" anchor="ctr" wrap="none"/>
+          <a:bodyPr rtlCol="0" anchor="ctr"/>
           <a:lstStyle/>
           <a:p>
             <a:pPr algn="ctr"/>
-            <a:r>
-              <a:rPr sz="1800" b="1">
-                <a:solidFill>
-                  <a:srgbClr val="0B1220"/>
-                </a:solidFill>
-                <a:latin typeface="Courier New"/>
-              </a:rPr>
-              <a:t>1</a:t>
-            </a:r>
-          </a:p>
-        </p:txBody>
-      </p:sp>
-      <p:sp>
-        <p:nvSpPr>
-          <p:cNvPr id="5" name="TextBox 4"/>
-          <p:cNvSpPr txBox="1"/>
-          <p:nvPr/>
-        </p:nvSpPr>
-        <p:spPr>
-          <a:xfrm>
-            <a:off x="1280160" y="1783080"/>
-            <a:ext cx="6126480" cy="1005840"/>
-          </a:xfrm>
-          <a:prstGeom prst="rect">
-            <a:avLst/>
-          </a:prstGeom>
-          <a:noFill/>
-        </p:spPr>
-        <p:txBody>
-          <a:bodyPr wrap="square" anchor="t" lIns="0" rIns="0" tIns="0" bIns="0">
-            <a:spAutoFit/>
-          </a:bodyPr>
-          <a:lstStyle/>
-          <a:p>
-            <a:pPr algn="l">
-              <a:lnSpc>
-                <a:spcPct val="108000"/>
-              </a:lnSpc>
-              <a:spcAft>
-                <a:spcPts val="200"/>
-              </a:spcAft>
-            </a:pPr>
-            <a:r>
-              <a:rPr sz="1700" b="1" i="0">
+          </a:p>
+        </p:txBody>
+      </p:sp>
+      <p:sp>
+        <p:nvSpPr>
+          <p:cNvPr id="7" name="TextBox 6"/>
+          <p:cNvSpPr txBox="1"/>
+          <p:nvPr/>
+        </p:nvSpPr>
+        <p:spPr>
+          <a:xfrm>
+            <a:off x="8439911" y="2194560"/>
+            <a:ext cx="3566160" cy="457200"/>
+          </a:xfrm>
+          <a:prstGeom prst="rect">
+            <a:avLst/>
+          </a:prstGeom>
+          <a:noFill/>
+        </p:spPr>
+        <p:txBody>
+          <a:bodyPr wrap="square" anchor="t" lIns="0" rIns="0" tIns="0" bIns="0">
+            <a:spAutoFit/>
+          </a:bodyPr>
+          <a:lstStyle/>
+          <a:p>
+            <a:pPr algn="l">
+              <a:lnSpc>
+                <a:spcPct val="100000"/>
+              </a:lnSpc>
+              <a:spcAft>
+                <a:spcPts val="0"/>
+              </a:spcAft>
+            </a:pPr>
+            <a:r>
+              <a:rPr sz="1400" b="1" i="0">
                 <a:solidFill>
                   <a:srgbClr val="EAF0F8"/>
                 </a:solidFill>
                 <a:latin typeface="Arial"/>
               </a:rPr>
-              <a:t>At the deadline: buy targeted</a:t>
-            </a:r>
-          </a:p>
-          <a:p>
-            <a:pPr algn="l">
-              <a:lnSpc>
-                <a:spcPct val="108000"/>
-              </a:lnSpc>
-              <a:spcAft>
-                <a:spcPts val="200"/>
-              </a:spcAft>
-            </a:pPr>
-            <a:r>
-              <a:rPr sz="1350" b="0" i="0">
+              <a:t>Phillies  </a:t>
+            </a:r>
+            <a:r>
+              <a:rPr sz="1200" b="0" i="0">
                 <a:solidFill>
                   <a:srgbClr val="93A0B6"/>
                 </a:solidFill>
                 <a:latin typeface="Arial"/>
               </a:rPr>
-              <a:t>A controllable infield bat and a reliever, funded from the pitching surplus. Keep the vets — they're playoff innings now.</a:t>
-            </a:r>
-          </a:p>
-        </p:txBody>
-      </p:sp>
-      <p:sp>
-        <p:nvSpPr>
-          <p:cNvPr id="6" name="Rounded Rectangle 5"/>
+              <a:t>.557, 84 OF wRC+</a:t>
+            </a:r>
+          </a:p>
+        </p:txBody>
+      </p:sp>
+      <p:sp>
+        <p:nvSpPr>
+          <p:cNvPr id="8" name="Rounded Rectangle 7"/>
           <p:cNvSpPr/>
           <p:nvPr/>
         </p:nvSpPr>
         <p:spPr>
           <a:xfrm>
-            <a:off x="640080" y="2971800"/>
-            <a:ext cx="457200" cy="457200"/>
+            <a:off x="8183879" y="2788920"/>
+            <a:ext cx="128016" cy="128016"/>
           </a:xfrm>
           <a:prstGeom prst="roundRect">
             <a:avLst>
@@ -6619,93 +6605,74 @@
           </a:fontRef>
         </p:style>
         <p:txBody>
-          <a:bodyPr rtlCol="0" anchor="ctr" wrap="none"/>
+          <a:bodyPr rtlCol="0" anchor="ctr"/>
           <a:lstStyle/>
           <a:p>
             <a:pPr algn="ctr"/>
-            <a:r>
-              <a:rPr sz="1800" b="1">
-                <a:solidFill>
-                  <a:srgbClr val="0B1220"/>
-                </a:solidFill>
-                <a:latin typeface="Courier New"/>
-              </a:rPr>
-              <a:t>2</a:t>
-            </a:r>
-          </a:p>
-        </p:txBody>
-      </p:sp>
-      <p:sp>
-        <p:nvSpPr>
-          <p:cNvPr id="7" name="TextBox 6"/>
-          <p:cNvSpPr txBox="1"/>
-          <p:nvPr/>
-        </p:nvSpPr>
-        <p:spPr>
-          <a:xfrm>
-            <a:off x="1280160" y="2953512"/>
-            <a:ext cx="6126480" cy="1005840"/>
-          </a:xfrm>
-          <a:prstGeom prst="rect">
-            <a:avLst/>
-          </a:prstGeom>
-          <a:noFill/>
-        </p:spPr>
-        <p:txBody>
-          <a:bodyPr wrap="square" anchor="t" lIns="0" rIns="0" tIns="0" bIns="0">
-            <a:spAutoFit/>
-          </a:bodyPr>
-          <a:lstStyle/>
-          <a:p>
-            <a:pPr algn="l">
-              <a:lnSpc>
-                <a:spcPct val="108000"/>
-              </a:lnSpc>
-              <a:spcAft>
-                <a:spcPts val="200"/>
-              </a:spcAft>
-            </a:pPr>
-            <a:r>
-              <a:rPr sz="1700" b="1" i="0">
+          </a:p>
+        </p:txBody>
+      </p:sp>
+      <p:sp>
+        <p:nvSpPr>
+          <p:cNvPr id="9" name="TextBox 8"/>
+          <p:cNvSpPr txBox="1"/>
+          <p:nvPr/>
+        </p:nvSpPr>
+        <p:spPr>
+          <a:xfrm>
+            <a:off x="8439911" y="2761488"/>
+            <a:ext cx="3566160" cy="457200"/>
+          </a:xfrm>
+          <a:prstGeom prst="rect">
+            <a:avLst/>
+          </a:prstGeom>
+          <a:noFill/>
+        </p:spPr>
+        <p:txBody>
+          <a:bodyPr wrap="square" anchor="t" lIns="0" rIns="0" tIns="0" bIns="0">
+            <a:spAutoFit/>
+          </a:bodyPr>
+          <a:lstStyle/>
+          <a:p>
+            <a:pPr algn="l">
+              <a:lnSpc>
+                <a:spcPct val="100000"/>
+              </a:lnSpc>
+              <a:spcAft>
+                <a:spcPts val="0"/>
+              </a:spcAft>
+            </a:pPr>
+            <a:r>
+              <a:rPr sz="1400" b="1" i="0">
                 <a:solidFill>
                   <a:srgbClr val="EAF0F8"/>
                 </a:solidFill>
                 <a:latin typeface="Arial"/>
               </a:rPr>
-              <a:t>Hold Duran through August</a:t>
-            </a:r>
-          </a:p>
-          <a:p>
-            <a:pPr algn="l">
-              <a:lnSpc>
-                <a:spcPct val="108000"/>
-              </a:lnSpc>
-              <a:spcAft>
-                <a:spcPts val="200"/>
-              </a:spcAft>
-            </a:pPr>
-            <a:r>
-              <a:rPr sz="1350" b="0" i="0">
+              <a:t>Rays  </a:t>
+            </a:r>
+            <a:r>
+              <a:rPr sz="1200" b="0" i="0">
                 <a:solidFill>
                   <a:srgbClr val="93A0B6"/>
                 </a:solidFill>
                 <a:latin typeface="Arial"/>
               </a:rPr>
-              <a:t>His value is at its nadir and his July contact quality (~.35 xwOBA) is already surging. Selling now cashes the slump.</a:t>
-            </a:r>
-          </a:p>
-        </p:txBody>
-      </p:sp>
-      <p:sp>
-        <p:nvSpPr>
-          <p:cNvPr id="8" name="Rounded Rectangle 7"/>
+              <a:t>.596, 88 OF wRC+</a:t>
+            </a:r>
+          </a:p>
+        </p:txBody>
+      </p:sp>
+      <p:sp>
+        <p:nvSpPr>
+          <p:cNvPr id="10" name="Rounded Rectangle 9"/>
           <p:cNvSpPr/>
           <p:nvPr/>
         </p:nvSpPr>
         <p:spPr>
           <a:xfrm>
-            <a:off x="640080" y="4142231"/>
-            <a:ext cx="457200" cy="457200"/>
+            <a:off x="8183879" y="3355847"/>
+            <a:ext cx="128016" cy="128016"/>
           </a:xfrm>
           <a:prstGeom prst="roundRect">
             <a:avLst>
@@ -6735,101 +6702,82 @@
           </a:fontRef>
         </p:style>
         <p:txBody>
-          <a:bodyPr rtlCol="0" anchor="ctr" wrap="none"/>
+          <a:bodyPr rtlCol="0" anchor="ctr"/>
           <a:lstStyle/>
           <a:p>
             <a:pPr algn="ctr"/>
-            <a:r>
-              <a:rPr sz="1800" b="1">
-                <a:solidFill>
-                  <a:srgbClr val="0B1220"/>
-                </a:solidFill>
-                <a:latin typeface="Courier New"/>
-              </a:rPr>
-              <a:t>3</a:t>
-            </a:r>
-          </a:p>
-        </p:txBody>
-      </p:sp>
-      <p:sp>
-        <p:nvSpPr>
-          <p:cNvPr id="9" name="TextBox 8"/>
-          <p:cNvSpPr txBox="1"/>
-          <p:nvPr/>
-        </p:nvSpPr>
-        <p:spPr>
-          <a:xfrm>
-            <a:off x="1280160" y="4123944"/>
-            <a:ext cx="6126480" cy="1005840"/>
-          </a:xfrm>
-          <a:prstGeom prst="rect">
-            <a:avLst/>
-          </a:prstGeom>
-          <a:noFill/>
-        </p:spPr>
-        <p:txBody>
-          <a:bodyPr wrap="square" anchor="t" lIns="0" rIns="0" tIns="0" bIns="0">
-            <a:spAutoFit/>
-          </a:bodyPr>
-          <a:lstStyle/>
-          <a:p>
-            <a:pPr algn="l">
-              <a:lnSpc>
-                <a:spcPct val="108000"/>
-              </a:lnSpc>
-              <a:spcAft>
-                <a:spcPts val="200"/>
-              </a:spcAft>
-            </a:pPr>
-            <a:r>
-              <a:rPr sz="1700" b="1" i="0">
+          </a:p>
+        </p:txBody>
+      </p:sp>
+      <p:sp>
+        <p:nvSpPr>
+          <p:cNvPr id="11" name="TextBox 10"/>
+          <p:cNvSpPr txBox="1"/>
+          <p:nvPr/>
+        </p:nvSpPr>
+        <p:spPr>
+          <a:xfrm>
+            <a:off x="8439911" y="3328415"/>
+            <a:ext cx="3566160" cy="457200"/>
+          </a:xfrm>
+          <a:prstGeom prst="rect">
+            <a:avLst/>
+          </a:prstGeom>
+          <a:noFill/>
+        </p:spPr>
+        <p:txBody>
+          <a:bodyPr wrap="square" anchor="t" lIns="0" rIns="0" tIns="0" bIns="0">
+            <a:spAutoFit/>
+          </a:bodyPr>
+          <a:lstStyle/>
+          <a:p>
+            <a:pPr algn="l">
+              <a:lnSpc>
+                <a:spcPct val="100000"/>
+              </a:lnSpc>
+              <a:spcAft>
+                <a:spcPts val="0"/>
+              </a:spcAft>
+            </a:pPr>
+            <a:r>
+              <a:rPr sz="1400" b="1" i="0">
                 <a:solidFill>
                   <a:srgbClr val="EAF0F8"/>
                 </a:solidFill>
                 <a:latin typeface="Arial"/>
               </a:rPr>
-              <a:t>Winter: re-price, then choose</a:t>
-            </a:r>
-          </a:p>
-          <a:p>
-            <a:pPr algn="l">
-              <a:lnSpc>
-                <a:spcPct val="108000"/>
-              </a:lnSpc>
-              <a:spcAft>
-                <a:spcPts val="200"/>
-              </a:spcAft>
-            </a:pPr>
-            <a:r>
-              <a:rPr sz="1350" b="0" i="0">
+              <a:t>Cardinals  </a:t>
+            </a:r>
+            <a:r>
+              <a:rPr sz="1200" b="0" i="0">
                 <a:solidFill>
                   <a:srgbClr val="93A0B6"/>
                 </a:solidFill>
                 <a:latin typeface="Arial"/>
               </a:rPr>
-              <a:t>Anthony healthy, jam returns. Rebound confirmed → extend or trade at full price, plus Yoshida money. Erosion persists → sell at market. Either way, the 2027 OF is Anthony / Rafaela / Abreu.</a:t>
-            </a:r>
-          </a:p>
-        </p:txBody>
-      </p:sp>
-      <p:sp>
-        <p:nvSpPr>
-          <p:cNvPr id="10" name="Rounded Rectangle 9"/>
+              <a:t>.526, OF need</a:t>
+            </a:r>
+          </a:p>
+        </p:txBody>
+      </p:sp>
+      <p:sp>
+        <p:nvSpPr>
+          <p:cNvPr id="12" name="Rounded Rectangle 11"/>
           <p:cNvSpPr/>
           <p:nvPr/>
         </p:nvSpPr>
         <p:spPr>
           <a:xfrm>
-            <a:off x="7818120" y="1783080"/>
-            <a:ext cx="3794760" cy="3337560"/>
+            <a:off x="8183879" y="3922776"/>
+            <a:ext cx="128016" cy="128016"/>
           </a:xfrm>
           <a:prstGeom prst="roundRect">
             <a:avLst>
-              <a:gd name="adj" fmla="val 6000"/>
+              <a:gd name="adj" fmla="val 18000"/>
             </a:avLst>
           </a:prstGeom>
           <a:solidFill>
-            <a:srgbClr val="1A2740"/>
+            <a:srgbClr val="E8615A"/>
           </a:solidFill>
           <a:ln>
             <a:noFill/>
@@ -6860,14 +6808,14 @@
       </p:sp>
       <p:sp>
         <p:nvSpPr>
-          <p:cNvPr id="11" name="TextBox 10"/>
-          <p:cNvSpPr txBox="1"/>
-          <p:nvPr/>
-        </p:nvSpPr>
-        <p:spPr>
-          <a:xfrm>
-            <a:off x="8092440" y="2011680"/>
-            <a:ext cx="3291840" cy="365760"/>
+          <p:cNvPr id="13" name="TextBox 12"/>
+          <p:cNvSpPr txBox="1"/>
+          <p:nvPr/>
+        </p:nvSpPr>
+        <p:spPr>
+          <a:xfrm>
+            <a:off x="8439911" y="3895344"/>
+            <a:ext cx="3566160" cy="457200"/>
           </a:xfrm>
           <a:prstGeom prst="rect">
             <a:avLst/>
@@ -6889,196 +6837,82 @@
               </a:spcAft>
             </a:pPr>
             <a:r>
+              <a:rPr sz="1400" b="1" i="0">
+                <a:solidFill>
+                  <a:srgbClr val="EAF0F8"/>
+                </a:solidFill>
+                <a:latin typeface="Arial"/>
+              </a:rPr>
+              <a:t>Astros  </a:t>
+            </a:r>
+            <a:r>
+              <a:rPr sz="1200" b="0" i="0">
+                <a:solidFill>
+                  <a:srgbClr val="93A0B6"/>
+                </a:solidFill>
+                <a:latin typeface="Arial"/>
+              </a:rPr>
+              <a:t>fringe, weakest OF</a:t>
+            </a:r>
+          </a:p>
+        </p:txBody>
+      </p:sp>
+      <p:sp>
+        <p:nvSpPr>
+          <p:cNvPr id="14" name="TextBox 13"/>
+          <p:cNvSpPr txBox="1"/>
+          <p:nvPr/>
+        </p:nvSpPr>
+        <p:spPr>
+          <a:xfrm>
+            <a:off x="8183879" y="4709160"/>
+            <a:ext cx="3657600" cy="1005840"/>
+          </a:xfrm>
+          <a:prstGeom prst="rect">
+            <a:avLst/>
+          </a:prstGeom>
+          <a:noFill/>
+        </p:spPr>
+        <p:txBody>
+          <a:bodyPr wrap="square" anchor="t" lIns="0" rIns="0" tIns="0" bIns="0">
+            <a:spAutoFit/>
+          </a:bodyPr>
+          <a:lstStyle/>
+          <a:p>
+            <a:pPr algn="l">
+              <a:lnSpc>
+                <a:spcPct val="112000"/>
+              </a:lnSpc>
+              <a:spcAft>
+                <a:spcPts val="400"/>
+              </a:spcAft>
+            </a:pPr>
+            <a:r>
+              <a:rPr sz="1250" b="0" i="0">
+                <a:solidFill>
+                  <a:srgbClr val="D9E1EF"/>
+                </a:solidFill>
+                <a:latin typeface="Arial"/>
+              </a:rPr>
+              <a:t>Trade a redundant bat to a team that needs one — and take back the </a:t>
+            </a:r>
+            <a:r>
               <a:rPr sz="1250" b="1" i="0">
                 <a:solidFill>
-                  <a:srgbClr val="C9D2E3"/>
-                </a:solidFill>
-                <a:latin typeface="Arial"/>
-              </a:rPr>
-              <a:t>THE RETURN</a:t>
-            </a:r>
-          </a:p>
-        </p:txBody>
-      </p:sp>
-      <p:sp>
-        <p:nvSpPr>
-          <p:cNvPr id="12" name="TextBox 11"/>
-          <p:cNvSpPr txBox="1"/>
-          <p:nvPr/>
-        </p:nvSpPr>
-        <p:spPr>
-          <a:xfrm>
-            <a:off x="8092440" y="2487168"/>
-            <a:ext cx="3291840" cy="914400"/>
-          </a:xfrm>
-          <a:prstGeom prst="rect">
-            <a:avLst/>
-          </a:prstGeom>
-          <a:noFill/>
-        </p:spPr>
-        <p:txBody>
-          <a:bodyPr wrap="square" anchor="t" lIns="0" rIns="0" tIns="0" bIns="0">
-            <a:spAutoFit/>
-          </a:bodyPr>
-          <a:lstStyle/>
-          <a:p>
-            <a:pPr algn="l">
-              <a:lnSpc>
-                <a:spcPct val="105000"/>
-              </a:lnSpc>
-              <a:spcAft>
-                <a:spcPts val="200"/>
-              </a:spcAft>
-            </a:pPr>
-            <a:r>
-              <a:rPr sz="1300" b="1" i="0">
-                <a:solidFill>
-                  <a:srgbClr val="F0B8BC"/>
-                </a:solidFill>
-                <a:latin typeface="Arial"/>
-              </a:rPr>
-              <a:t>Sell now (nadir)</a:t>
-            </a:r>
-          </a:p>
-          <a:p>
-            <a:pPr algn="l">
-              <a:lnSpc>
-                <a:spcPct val="105000"/>
-              </a:lnSpc>
-              <a:spcAft>
-                <a:spcPts val="200"/>
-              </a:spcAft>
-            </a:pPr>
-            <a:r>
-              <a:rPr sz="1400" b="0" i="0">
-                <a:solidFill>
-                  <a:srgbClr val="F4F7FC"/>
-                </a:solidFill>
-                <a:latin typeface="Arial"/>
-              </a:rPr>
-              <a:t>~$10–15M · a 45-FV bat</a:t>
-            </a:r>
-          </a:p>
-        </p:txBody>
-      </p:sp>
-      <p:sp>
-        <p:nvSpPr>
-          <p:cNvPr id="13" name="TextBox 12"/>
-          <p:cNvSpPr txBox="1"/>
-          <p:nvPr/>
-        </p:nvSpPr>
-        <p:spPr>
-          <a:xfrm>
-            <a:off x="8092440" y="3520440"/>
-            <a:ext cx="3291840" cy="1005840"/>
-          </a:xfrm>
-          <a:prstGeom prst="rect">
-            <a:avLst/>
-          </a:prstGeom>
-          <a:noFill/>
-        </p:spPr>
-        <p:txBody>
-          <a:bodyPr wrap="square" anchor="t" lIns="0" rIns="0" tIns="0" bIns="0">
-            <a:spAutoFit/>
-          </a:bodyPr>
-          <a:lstStyle/>
-          <a:p>
-            <a:pPr algn="l">
-              <a:lnSpc>
-                <a:spcPct val="105000"/>
-              </a:lnSpc>
-              <a:spcAft>
-                <a:spcPts val="200"/>
-              </a:spcAft>
-            </a:pPr>
-            <a:r>
-              <a:rPr sz="1300" b="1" i="0">
-                <a:solidFill>
-                  <a:srgbClr val="A9E5B5"/>
-                </a:solidFill>
-                <a:latin typeface="Arial"/>
-              </a:rPr>
-              <a:t>Sell after rebound</a:t>
-            </a:r>
-          </a:p>
-          <a:p>
-            <a:pPr algn="l">
-              <a:lnSpc>
-                <a:spcPct val="105000"/>
-              </a:lnSpc>
-              <a:spcAft>
-                <a:spcPts val="200"/>
-              </a:spcAft>
-            </a:pPr>
-            <a:r>
-              <a:rPr sz="1400" b="0" i="0">
-                <a:solidFill>
-                  <a:srgbClr val="F4F7FC"/>
-                </a:solidFill>
-                <a:latin typeface="Arial"/>
-              </a:rPr>
-              <a:t>~$28M · a 50-FV, top-100</a:t>
-            </a:r>
-          </a:p>
-          <a:p>
-            <a:pPr algn="l">
-              <a:lnSpc>
-                <a:spcPct val="105000"/>
-              </a:lnSpc>
-              <a:spcAft>
-                <a:spcPts val="200"/>
-              </a:spcAft>
-            </a:pPr>
-            <a:r>
-              <a:rPr sz="1400" b="0" i="0">
-                <a:solidFill>
-                  <a:srgbClr val="F4F7FC"/>
-                </a:solidFill>
-                <a:latin typeface="Arial"/>
-              </a:rPr>
-              <a:t>controllable talent</a:t>
-            </a:r>
-          </a:p>
-        </p:txBody>
-      </p:sp>
-      <p:sp>
-        <p:nvSpPr>
-          <p:cNvPr id="14" name="TextBox 13"/>
-          <p:cNvSpPr txBox="1"/>
-          <p:nvPr/>
-        </p:nvSpPr>
-        <p:spPr>
-          <a:xfrm>
-            <a:off x="8092440" y="4617720"/>
-            <a:ext cx="3291840" cy="457200"/>
-          </a:xfrm>
-          <a:prstGeom prst="rect">
-            <a:avLst/>
-          </a:prstGeom>
-          <a:noFill/>
-        </p:spPr>
-        <p:txBody>
-          <a:bodyPr wrap="square" anchor="t" lIns="0" rIns="0" tIns="0" bIns="0">
-            <a:spAutoFit/>
-          </a:bodyPr>
-          <a:lstStyle/>
-          <a:p>
-            <a:pPr algn="l">
-              <a:lnSpc>
-                <a:spcPct val="105000"/>
-              </a:lnSpc>
-              <a:spcAft>
-                <a:spcPts val="400"/>
-              </a:spcAft>
-            </a:pPr>
-            <a:r>
-              <a:rPr sz="1150" b="0" i="1">
-                <a:solidFill>
-                  <a:srgbClr val="C9D2E3"/>
-                </a:solidFill>
-                <a:latin typeface="Arial"/>
-              </a:rPr>
-              <a:t>One grade of return = the reason to wait.</a:t>
+                  <a:srgbClr val="58C08D"/>
+                </a:solidFill>
+                <a:latin typeface="Arial"/>
+              </a:rPr>
+              <a:t>hitting/youth</a:t>
+            </a:r>
+            <a:r>
+              <a:rPr sz="1250" b="0" i="0">
+                <a:solidFill>
+                  <a:srgbClr val="D9E1EF"/>
+                </a:solidFill>
+                <a:latin typeface="Arial"/>
+              </a:rPr>
+              <a:t> Boston is short on.</a:t>
             </a:r>
           </a:p>
         </p:txBody>
@@ -7143,6 +6977,786 @@
 </file>
 
 <file path=ppt/slides/slide15.xml><?xml version="1.0" encoding="utf-8"?>
+<p:sld xmlns:a="http://schemas.openxmlformats.org/drawingml/2006/main" xmlns:p="http://schemas.openxmlformats.org/presentationml/2006/main" xmlns:r="http://schemas.openxmlformats.org/officeDocument/2006/relationships">
+  <p:cSld>
+    <p:bg>
+      <p:bgPr>
+        <a:solidFill>
+          <a:srgbClr val="0B1220"/>
+        </a:solidFill>
+        <a:effectLst/>
+      </p:bgPr>
+    </p:bg>
+    <p:spTree>
+      <p:nvGrpSpPr>
+        <p:cNvPr id="1" name=""/>
+        <p:cNvGrpSpPr/>
+        <p:nvPr/>
+      </p:nvGrpSpPr>
+      <p:grpSpPr/>
+      <p:sp>
+        <p:nvSpPr>
+          <p:cNvPr id="2" name="TextBox 1"/>
+          <p:cNvSpPr txBox="1"/>
+          <p:nvPr/>
+        </p:nvSpPr>
+        <p:spPr>
+          <a:xfrm>
+            <a:off x="566928" y="384048"/>
+            <a:ext cx="10058400" cy="274320"/>
+          </a:xfrm>
+          <a:prstGeom prst="rect">
+            <a:avLst/>
+          </a:prstGeom>
+          <a:noFill/>
+        </p:spPr>
+        <p:txBody>
+          <a:bodyPr wrap="square" anchor="t" lIns="0" rIns="0" tIns="0" bIns="0">
+            <a:spAutoFit/>
+          </a:bodyPr>
+          <a:lstStyle/>
+          <a:p>
+            <a:pPr algn="l">
+              <a:lnSpc>
+                <a:spcPct val="100000"/>
+              </a:lnSpc>
+              <a:spcAft>
+                <a:spcPts val="0"/>
+              </a:spcAft>
+            </a:pPr>
+            <a:r>
+              <a:rPr sz="1200" b="1" i="0">
+                <a:solidFill>
+                  <a:srgbClr val="E8615A"/>
+                </a:solidFill>
+                <a:latin typeface="Courier New"/>
+              </a:rPr>
+              <a:t>// THE SEQUENCE</a:t>
+            </a:r>
+          </a:p>
+        </p:txBody>
+      </p:sp>
+      <p:sp>
+        <p:nvSpPr>
+          <p:cNvPr id="3" name="TextBox 2"/>
+          <p:cNvSpPr txBox="1"/>
+          <p:nvPr/>
+        </p:nvSpPr>
+        <p:spPr>
+          <a:xfrm>
+            <a:off x="566928" y="658368"/>
+            <a:ext cx="11064240" cy="868680"/>
+          </a:xfrm>
+          <a:prstGeom prst="rect">
+            <a:avLst/>
+          </a:prstGeom>
+          <a:noFill/>
+        </p:spPr>
+        <p:txBody>
+          <a:bodyPr wrap="square" anchor="t" lIns="0" rIns="0" tIns="0" bIns="0">
+            <a:spAutoFit/>
+          </a:bodyPr>
+          <a:lstStyle/>
+          <a:p>
+            <a:pPr algn="l">
+              <a:lnSpc>
+                <a:spcPct val="100000"/>
+              </a:lnSpc>
+              <a:spcAft>
+                <a:spcPts val="0"/>
+              </a:spcAft>
+            </a:pPr>
+            <a:r>
+              <a:rPr sz="3000" b="1" i="0">
+                <a:solidFill>
+                  <a:srgbClr val="EAF0F8"/>
+                </a:solidFill>
+                <a:latin typeface="Arial"/>
+              </a:rPr>
+              <a:t>Buy now, decide on Duran in the winter</a:t>
+            </a:r>
+          </a:p>
+        </p:txBody>
+      </p:sp>
+      <p:sp>
+        <p:nvSpPr>
+          <p:cNvPr id="4" name="Rounded Rectangle 3"/>
+          <p:cNvSpPr/>
+          <p:nvPr/>
+        </p:nvSpPr>
+        <p:spPr>
+          <a:xfrm>
+            <a:off x="640080" y="1801368"/>
+            <a:ext cx="457200" cy="457200"/>
+          </a:xfrm>
+          <a:prstGeom prst="roundRect">
+            <a:avLst>
+              <a:gd name="adj" fmla="val 18000"/>
+            </a:avLst>
+          </a:prstGeom>
+          <a:solidFill>
+            <a:srgbClr val="E8615A"/>
+          </a:solidFill>
+          <a:ln>
+            <a:noFill/>
+          </a:ln>
+          <a:effectLst/>
+        </p:spPr>
+        <p:style>
+          <a:lnRef idx="1">
+            <a:schemeClr val="accent1"/>
+          </a:lnRef>
+          <a:fillRef idx="3">
+            <a:schemeClr val="accent1"/>
+          </a:fillRef>
+          <a:effectRef idx="2">
+            <a:schemeClr val="accent1"/>
+          </a:effectRef>
+          <a:fontRef idx="minor">
+            <a:schemeClr val="lt1"/>
+          </a:fontRef>
+        </p:style>
+        <p:txBody>
+          <a:bodyPr rtlCol="0" anchor="ctr" wrap="none"/>
+          <a:lstStyle/>
+          <a:p>
+            <a:pPr algn="ctr"/>
+            <a:r>
+              <a:rPr sz="1800" b="1">
+                <a:solidFill>
+                  <a:srgbClr val="0B1220"/>
+                </a:solidFill>
+                <a:latin typeface="Courier New"/>
+              </a:rPr>
+              <a:t>1</a:t>
+            </a:r>
+          </a:p>
+        </p:txBody>
+      </p:sp>
+      <p:sp>
+        <p:nvSpPr>
+          <p:cNvPr id="5" name="TextBox 4"/>
+          <p:cNvSpPr txBox="1"/>
+          <p:nvPr/>
+        </p:nvSpPr>
+        <p:spPr>
+          <a:xfrm>
+            <a:off x="1280160" y="1783080"/>
+            <a:ext cx="6126480" cy="1005840"/>
+          </a:xfrm>
+          <a:prstGeom prst="rect">
+            <a:avLst/>
+          </a:prstGeom>
+          <a:noFill/>
+        </p:spPr>
+        <p:txBody>
+          <a:bodyPr wrap="square" anchor="t" lIns="0" rIns="0" tIns="0" bIns="0">
+            <a:spAutoFit/>
+          </a:bodyPr>
+          <a:lstStyle/>
+          <a:p>
+            <a:pPr algn="l">
+              <a:lnSpc>
+                <a:spcPct val="108000"/>
+              </a:lnSpc>
+              <a:spcAft>
+                <a:spcPts val="200"/>
+              </a:spcAft>
+            </a:pPr>
+            <a:r>
+              <a:rPr sz="1700" b="1" i="0">
+                <a:solidFill>
+                  <a:srgbClr val="EAF0F8"/>
+                </a:solidFill>
+                <a:latin typeface="Arial"/>
+              </a:rPr>
+              <a:t>At the deadline: buy targeted</a:t>
+            </a:r>
+          </a:p>
+          <a:p>
+            <a:pPr algn="l">
+              <a:lnSpc>
+                <a:spcPct val="108000"/>
+              </a:lnSpc>
+              <a:spcAft>
+                <a:spcPts val="200"/>
+              </a:spcAft>
+            </a:pPr>
+            <a:r>
+              <a:rPr sz="1350" b="0" i="0">
+                <a:solidFill>
+                  <a:srgbClr val="93A0B6"/>
+                </a:solidFill>
+                <a:latin typeface="Arial"/>
+              </a:rPr>
+              <a:t>A controllable infield bat and a reliever, funded from the pitching surplus. Keep the vets — they're playoff innings now.</a:t>
+            </a:r>
+          </a:p>
+        </p:txBody>
+      </p:sp>
+      <p:sp>
+        <p:nvSpPr>
+          <p:cNvPr id="6" name="Rounded Rectangle 5"/>
+          <p:cNvSpPr/>
+          <p:nvPr/>
+        </p:nvSpPr>
+        <p:spPr>
+          <a:xfrm>
+            <a:off x="640080" y="2971800"/>
+            <a:ext cx="457200" cy="457200"/>
+          </a:xfrm>
+          <a:prstGeom prst="roundRect">
+            <a:avLst>
+              <a:gd name="adj" fmla="val 18000"/>
+            </a:avLst>
+          </a:prstGeom>
+          <a:solidFill>
+            <a:srgbClr val="E8615A"/>
+          </a:solidFill>
+          <a:ln>
+            <a:noFill/>
+          </a:ln>
+          <a:effectLst/>
+        </p:spPr>
+        <p:style>
+          <a:lnRef idx="1">
+            <a:schemeClr val="accent1"/>
+          </a:lnRef>
+          <a:fillRef idx="3">
+            <a:schemeClr val="accent1"/>
+          </a:fillRef>
+          <a:effectRef idx="2">
+            <a:schemeClr val="accent1"/>
+          </a:effectRef>
+          <a:fontRef idx="minor">
+            <a:schemeClr val="lt1"/>
+          </a:fontRef>
+        </p:style>
+        <p:txBody>
+          <a:bodyPr rtlCol="0" anchor="ctr" wrap="none"/>
+          <a:lstStyle/>
+          <a:p>
+            <a:pPr algn="ctr"/>
+            <a:r>
+              <a:rPr sz="1800" b="1">
+                <a:solidFill>
+                  <a:srgbClr val="0B1220"/>
+                </a:solidFill>
+                <a:latin typeface="Courier New"/>
+              </a:rPr>
+              <a:t>2</a:t>
+            </a:r>
+          </a:p>
+        </p:txBody>
+      </p:sp>
+      <p:sp>
+        <p:nvSpPr>
+          <p:cNvPr id="7" name="TextBox 6"/>
+          <p:cNvSpPr txBox="1"/>
+          <p:nvPr/>
+        </p:nvSpPr>
+        <p:spPr>
+          <a:xfrm>
+            <a:off x="1280160" y="2953512"/>
+            <a:ext cx="6126480" cy="1005840"/>
+          </a:xfrm>
+          <a:prstGeom prst="rect">
+            <a:avLst/>
+          </a:prstGeom>
+          <a:noFill/>
+        </p:spPr>
+        <p:txBody>
+          <a:bodyPr wrap="square" anchor="t" lIns="0" rIns="0" tIns="0" bIns="0">
+            <a:spAutoFit/>
+          </a:bodyPr>
+          <a:lstStyle/>
+          <a:p>
+            <a:pPr algn="l">
+              <a:lnSpc>
+                <a:spcPct val="108000"/>
+              </a:lnSpc>
+              <a:spcAft>
+                <a:spcPts val="200"/>
+              </a:spcAft>
+            </a:pPr>
+            <a:r>
+              <a:rPr sz="1700" b="1" i="0">
+                <a:solidFill>
+                  <a:srgbClr val="EAF0F8"/>
+                </a:solidFill>
+                <a:latin typeface="Arial"/>
+              </a:rPr>
+              <a:t>Hold Duran through August</a:t>
+            </a:r>
+          </a:p>
+          <a:p>
+            <a:pPr algn="l">
+              <a:lnSpc>
+                <a:spcPct val="108000"/>
+              </a:lnSpc>
+              <a:spcAft>
+                <a:spcPts val="200"/>
+              </a:spcAft>
+            </a:pPr>
+            <a:r>
+              <a:rPr sz="1350" b="0" i="0">
+                <a:solidFill>
+                  <a:srgbClr val="93A0B6"/>
+                </a:solidFill>
+                <a:latin typeface="Arial"/>
+              </a:rPr>
+              <a:t>His value is at its nadir and his July contact quality (~.35 xwOBA) is already surging. Selling now cashes the slump.</a:t>
+            </a:r>
+          </a:p>
+        </p:txBody>
+      </p:sp>
+      <p:sp>
+        <p:nvSpPr>
+          <p:cNvPr id="8" name="Rounded Rectangle 7"/>
+          <p:cNvSpPr/>
+          <p:nvPr/>
+        </p:nvSpPr>
+        <p:spPr>
+          <a:xfrm>
+            <a:off x="640080" y="4142231"/>
+            <a:ext cx="457200" cy="457200"/>
+          </a:xfrm>
+          <a:prstGeom prst="roundRect">
+            <a:avLst>
+              <a:gd name="adj" fmla="val 18000"/>
+            </a:avLst>
+          </a:prstGeom>
+          <a:solidFill>
+            <a:srgbClr val="E8615A"/>
+          </a:solidFill>
+          <a:ln>
+            <a:noFill/>
+          </a:ln>
+          <a:effectLst/>
+        </p:spPr>
+        <p:style>
+          <a:lnRef idx="1">
+            <a:schemeClr val="accent1"/>
+          </a:lnRef>
+          <a:fillRef idx="3">
+            <a:schemeClr val="accent1"/>
+          </a:fillRef>
+          <a:effectRef idx="2">
+            <a:schemeClr val="accent1"/>
+          </a:effectRef>
+          <a:fontRef idx="minor">
+            <a:schemeClr val="lt1"/>
+          </a:fontRef>
+        </p:style>
+        <p:txBody>
+          <a:bodyPr rtlCol="0" anchor="ctr" wrap="none"/>
+          <a:lstStyle/>
+          <a:p>
+            <a:pPr algn="ctr"/>
+            <a:r>
+              <a:rPr sz="1800" b="1">
+                <a:solidFill>
+                  <a:srgbClr val="0B1220"/>
+                </a:solidFill>
+                <a:latin typeface="Courier New"/>
+              </a:rPr>
+              <a:t>3</a:t>
+            </a:r>
+          </a:p>
+        </p:txBody>
+      </p:sp>
+      <p:sp>
+        <p:nvSpPr>
+          <p:cNvPr id="9" name="TextBox 8"/>
+          <p:cNvSpPr txBox="1"/>
+          <p:nvPr/>
+        </p:nvSpPr>
+        <p:spPr>
+          <a:xfrm>
+            <a:off x="1280160" y="4123944"/>
+            <a:ext cx="6126480" cy="1005840"/>
+          </a:xfrm>
+          <a:prstGeom prst="rect">
+            <a:avLst/>
+          </a:prstGeom>
+          <a:noFill/>
+        </p:spPr>
+        <p:txBody>
+          <a:bodyPr wrap="square" anchor="t" lIns="0" rIns="0" tIns="0" bIns="0">
+            <a:spAutoFit/>
+          </a:bodyPr>
+          <a:lstStyle/>
+          <a:p>
+            <a:pPr algn="l">
+              <a:lnSpc>
+                <a:spcPct val="108000"/>
+              </a:lnSpc>
+              <a:spcAft>
+                <a:spcPts val="200"/>
+              </a:spcAft>
+            </a:pPr>
+            <a:r>
+              <a:rPr sz="1700" b="1" i="0">
+                <a:solidFill>
+                  <a:srgbClr val="EAF0F8"/>
+                </a:solidFill>
+                <a:latin typeface="Arial"/>
+              </a:rPr>
+              <a:t>Winter: re-price, then choose</a:t>
+            </a:r>
+          </a:p>
+          <a:p>
+            <a:pPr algn="l">
+              <a:lnSpc>
+                <a:spcPct val="108000"/>
+              </a:lnSpc>
+              <a:spcAft>
+                <a:spcPts val="200"/>
+              </a:spcAft>
+            </a:pPr>
+            <a:r>
+              <a:rPr sz="1350" b="0" i="0">
+                <a:solidFill>
+                  <a:srgbClr val="93A0B6"/>
+                </a:solidFill>
+                <a:latin typeface="Arial"/>
+              </a:rPr>
+              <a:t>Anthony healthy, jam returns. Rebound confirmed → extend or trade at full price, plus Yoshida money. Erosion persists → sell at market. Either way, the 2027 OF is Anthony / Rafaela / Abreu.</a:t>
+            </a:r>
+          </a:p>
+        </p:txBody>
+      </p:sp>
+      <p:sp>
+        <p:nvSpPr>
+          <p:cNvPr id="10" name="Rounded Rectangle 9"/>
+          <p:cNvSpPr/>
+          <p:nvPr/>
+        </p:nvSpPr>
+        <p:spPr>
+          <a:xfrm>
+            <a:off x="7818120" y="1783080"/>
+            <a:ext cx="3794760" cy="3337560"/>
+          </a:xfrm>
+          <a:prstGeom prst="roundRect">
+            <a:avLst>
+              <a:gd name="adj" fmla="val 6000"/>
+            </a:avLst>
+          </a:prstGeom>
+          <a:solidFill>
+            <a:srgbClr val="1A2740"/>
+          </a:solidFill>
+          <a:ln>
+            <a:noFill/>
+          </a:ln>
+          <a:effectLst/>
+        </p:spPr>
+        <p:style>
+          <a:lnRef idx="1">
+            <a:schemeClr val="accent1"/>
+          </a:lnRef>
+          <a:fillRef idx="3">
+            <a:schemeClr val="accent1"/>
+          </a:fillRef>
+          <a:effectRef idx="2">
+            <a:schemeClr val="accent1"/>
+          </a:effectRef>
+          <a:fontRef idx="minor">
+            <a:schemeClr val="lt1"/>
+          </a:fontRef>
+        </p:style>
+        <p:txBody>
+          <a:bodyPr rtlCol="0" anchor="ctr"/>
+          <a:lstStyle/>
+          <a:p>
+            <a:pPr algn="ctr"/>
+          </a:p>
+        </p:txBody>
+      </p:sp>
+      <p:sp>
+        <p:nvSpPr>
+          <p:cNvPr id="11" name="TextBox 10"/>
+          <p:cNvSpPr txBox="1"/>
+          <p:nvPr/>
+        </p:nvSpPr>
+        <p:spPr>
+          <a:xfrm>
+            <a:off x="8092440" y="2011680"/>
+            <a:ext cx="3291840" cy="365760"/>
+          </a:xfrm>
+          <a:prstGeom prst="rect">
+            <a:avLst/>
+          </a:prstGeom>
+          <a:noFill/>
+        </p:spPr>
+        <p:txBody>
+          <a:bodyPr wrap="square" anchor="t" lIns="0" rIns="0" tIns="0" bIns="0">
+            <a:spAutoFit/>
+          </a:bodyPr>
+          <a:lstStyle/>
+          <a:p>
+            <a:pPr algn="l">
+              <a:lnSpc>
+                <a:spcPct val="100000"/>
+              </a:lnSpc>
+              <a:spcAft>
+                <a:spcPts val="0"/>
+              </a:spcAft>
+            </a:pPr>
+            <a:r>
+              <a:rPr sz="1250" b="1" i="0">
+                <a:solidFill>
+                  <a:srgbClr val="C9D2E3"/>
+                </a:solidFill>
+                <a:latin typeface="Arial"/>
+              </a:rPr>
+              <a:t>THE RETURN</a:t>
+            </a:r>
+          </a:p>
+        </p:txBody>
+      </p:sp>
+      <p:sp>
+        <p:nvSpPr>
+          <p:cNvPr id="12" name="TextBox 11"/>
+          <p:cNvSpPr txBox="1"/>
+          <p:nvPr/>
+        </p:nvSpPr>
+        <p:spPr>
+          <a:xfrm>
+            <a:off x="8092440" y="2487168"/>
+            <a:ext cx="3291840" cy="914400"/>
+          </a:xfrm>
+          <a:prstGeom prst="rect">
+            <a:avLst/>
+          </a:prstGeom>
+          <a:noFill/>
+        </p:spPr>
+        <p:txBody>
+          <a:bodyPr wrap="square" anchor="t" lIns="0" rIns="0" tIns="0" bIns="0">
+            <a:spAutoFit/>
+          </a:bodyPr>
+          <a:lstStyle/>
+          <a:p>
+            <a:pPr algn="l">
+              <a:lnSpc>
+                <a:spcPct val="105000"/>
+              </a:lnSpc>
+              <a:spcAft>
+                <a:spcPts val="200"/>
+              </a:spcAft>
+            </a:pPr>
+            <a:r>
+              <a:rPr sz="1300" b="1" i="0">
+                <a:solidFill>
+                  <a:srgbClr val="F0B8BC"/>
+                </a:solidFill>
+                <a:latin typeface="Arial"/>
+              </a:rPr>
+              <a:t>Sell now (nadir)</a:t>
+            </a:r>
+          </a:p>
+          <a:p>
+            <a:pPr algn="l">
+              <a:lnSpc>
+                <a:spcPct val="105000"/>
+              </a:lnSpc>
+              <a:spcAft>
+                <a:spcPts val="200"/>
+              </a:spcAft>
+            </a:pPr>
+            <a:r>
+              <a:rPr sz="1400" b="0" i="0">
+                <a:solidFill>
+                  <a:srgbClr val="F4F7FC"/>
+                </a:solidFill>
+                <a:latin typeface="Arial"/>
+              </a:rPr>
+              <a:t>~$10–15M · a 45-FV bat</a:t>
+            </a:r>
+          </a:p>
+        </p:txBody>
+      </p:sp>
+      <p:sp>
+        <p:nvSpPr>
+          <p:cNvPr id="13" name="TextBox 12"/>
+          <p:cNvSpPr txBox="1"/>
+          <p:nvPr/>
+        </p:nvSpPr>
+        <p:spPr>
+          <a:xfrm>
+            <a:off x="8092440" y="3520440"/>
+            <a:ext cx="3291840" cy="1005840"/>
+          </a:xfrm>
+          <a:prstGeom prst="rect">
+            <a:avLst/>
+          </a:prstGeom>
+          <a:noFill/>
+        </p:spPr>
+        <p:txBody>
+          <a:bodyPr wrap="square" anchor="t" lIns="0" rIns="0" tIns="0" bIns="0">
+            <a:spAutoFit/>
+          </a:bodyPr>
+          <a:lstStyle/>
+          <a:p>
+            <a:pPr algn="l">
+              <a:lnSpc>
+                <a:spcPct val="105000"/>
+              </a:lnSpc>
+              <a:spcAft>
+                <a:spcPts val="200"/>
+              </a:spcAft>
+            </a:pPr>
+            <a:r>
+              <a:rPr sz="1300" b="1" i="0">
+                <a:solidFill>
+                  <a:srgbClr val="A9E5B5"/>
+                </a:solidFill>
+                <a:latin typeface="Arial"/>
+              </a:rPr>
+              <a:t>Sell after rebound</a:t>
+            </a:r>
+          </a:p>
+          <a:p>
+            <a:pPr algn="l">
+              <a:lnSpc>
+                <a:spcPct val="105000"/>
+              </a:lnSpc>
+              <a:spcAft>
+                <a:spcPts val="200"/>
+              </a:spcAft>
+            </a:pPr>
+            <a:r>
+              <a:rPr sz="1400" b="0" i="0">
+                <a:solidFill>
+                  <a:srgbClr val="F4F7FC"/>
+                </a:solidFill>
+                <a:latin typeface="Arial"/>
+              </a:rPr>
+              <a:t>~$28M · a 50-FV, top-100</a:t>
+            </a:r>
+          </a:p>
+          <a:p>
+            <a:pPr algn="l">
+              <a:lnSpc>
+                <a:spcPct val="105000"/>
+              </a:lnSpc>
+              <a:spcAft>
+                <a:spcPts val="200"/>
+              </a:spcAft>
+            </a:pPr>
+            <a:r>
+              <a:rPr sz="1400" b="0" i="0">
+                <a:solidFill>
+                  <a:srgbClr val="F4F7FC"/>
+                </a:solidFill>
+                <a:latin typeface="Arial"/>
+              </a:rPr>
+              <a:t>controllable talent</a:t>
+            </a:r>
+          </a:p>
+        </p:txBody>
+      </p:sp>
+      <p:sp>
+        <p:nvSpPr>
+          <p:cNvPr id="14" name="TextBox 13"/>
+          <p:cNvSpPr txBox="1"/>
+          <p:nvPr/>
+        </p:nvSpPr>
+        <p:spPr>
+          <a:xfrm>
+            <a:off x="8092440" y="4617720"/>
+            <a:ext cx="3291840" cy="457200"/>
+          </a:xfrm>
+          <a:prstGeom prst="rect">
+            <a:avLst/>
+          </a:prstGeom>
+          <a:noFill/>
+        </p:spPr>
+        <p:txBody>
+          <a:bodyPr wrap="square" anchor="t" lIns="0" rIns="0" tIns="0" bIns="0">
+            <a:spAutoFit/>
+          </a:bodyPr>
+          <a:lstStyle/>
+          <a:p>
+            <a:pPr algn="l">
+              <a:lnSpc>
+                <a:spcPct val="105000"/>
+              </a:lnSpc>
+              <a:spcAft>
+                <a:spcPts val="400"/>
+              </a:spcAft>
+            </a:pPr>
+            <a:r>
+              <a:rPr sz="1150" b="0" i="1">
+                <a:solidFill>
+                  <a:srgbClr val="C9D2E3"/>
+                </a:solidFill>
+                <a:latin typeface="Arial"/>
+              </a:rPr>
+              <a:t>One grade of return = the reason to wait.</a:t>
+            </a:r>
+          </a:p>
+        </p:txBody>
+      </p:sp>
+      <p:sp>
+        <p:nvSpPr>
+          <p:cNvPr id="15" name="TextBox 14"/>
+          <p:cNvSpPr txBox="1"/>
+          <p:nvPr/>
+        </p:nvSpPr>
+        <p:spPr>
+          <a:xfrm>
+            <a:off x="566928" y="6510528"/>
+            <a:ext cx="11064240" cy="274320"/>
+          </a:xfrm>
+          <a:prstGeom prst="rect">
+            <a:avLst/>
+          </a:prstGeom>
+          <a:noFill/>
+        </p:spPr>
+        <p:txBody>
+          <a:bodyPr wrap="square" anchor="t" lIns="0" rIns="0" tIns="0" bIns="0">
+            <a:spAutoFit/>
+          </a:bodyPr>
+          <a:lstStyle/>
+          <a:p>
+            <a:pPr algn="l">
+              <a:lnSpc>
+                <a:spcPct val="100000"/>
+              </a:lnSpc>
+              <a:spcAft>
+                <a:spcPts val="0"/>
+              </a:spcAft>
+            </a:pPr>
+            <a:r>
+              <a:rPr sz="800" b="1" i="0">
+                <a:solidFill>
+                  <a:srgbClr val="E8615A"/>
+                </a:solidFill>
+                <a:latin typeface="Courier New"/>
+              </a:rPr>
+              <a:t>BOS // OUTFIELD STRATEGY</a:t>
+            </a:r>
+            <a:r>
+              <a:rPr sz="800" b="0" i="0">
+                <a:solidFill>
+                  <a:srgbClr val="5E6B84"/>
+                </a:solidFill>
+                <a:latin typeface="Courier New"/>
+              </a:rPr>
+              <a:t>   STATCAST / FANGRAPHS / MLB STATS API / SPOTRAC · JULY 2026</a:t>
+            </a:r>
+          </a:p>
+        </p:txBody>
+      </p:sp>
+    </p:spTree>
+  </p:cSld>
+  <p:clrMapOvr>
+    <a:masterClrMapping/>
+  </p:clrMapOvr>
+</p:sld>
+</file>
+
+<file path=ppt/slides/slide16.xml><?xml version="1.0" encoding="utf-8"?>
 <p:sld xmlns:a="http://schemas.openxmlformats.org/drawingml/2006/main" xmlns:p="http://schemas.openxmlformats.org/presentationml/2006/main" xmlns:r="http://schemas.openxmlformats.org/officeDocument/2006/relationships">
   <p:cSld>
     <p:bg>
@@ -8773,7 +9387,7 @@
                 </a:solidFill>
                 <a:latin typeface="Arial"/>
               </a:rPr>
-              <a:t>Add without disturbing the room</a:t>
+              <a:t>Add small, without disturbing the room</a:t>
             </a:r>
           </a:p>
           <a:p>
@@ -8792,7 +9406,7 @@
                 </a:solidFill>
                 <a:latin typeface="Arial"/>
               </a:rPr>
-              <a:t>A reliever, a catcher, an infield bat — paid for in prospects before big-leaguers, filling empty spots, not hot ones.</a:t>
+              <a:t>A reliever first, maybe an infield bat — prospects before big-leaguers, empty spots before hot ones. The catcher tandem stays.</a:t>
             </a:r>
           </a:p>
         </p:txBody>

--- a/outputs/Red_Sox_Outfield_Strategy.pptx
+++ b/outputs/Red_Sox_Outfield_Strategy.pptx
@@ -21,6 +21,7 @@
     <p:sldId id="269" r:id="rId20"/>
     <p:sldId id="270" r:id="rId21"/>
     <p:sldId id="271" r:id="rId22"/>
+    <p:sldId id="272" r:id="rId23"/>
   </p:sldIdLst>
   <p:sldSz cx="12191695" cy="6858000" type="screen4x3"/>
   <p:notesSz cx="6858000" cy="9144000"/>
@@ -3236,7 +3237,7 @@
                 </a:solidFill>
                 <a:latin typeface="Arial"/>
               </a:rPr>
-              <a:t>They Won 13 Straight.</a:t>
+              <a:t>They Won 14 Straight.</a:t>
             </a:r>
           </a:p>
           <a:p>
@@ -3297,7 +3298,7 @@
                 </a:solidFill>
                 <a:latin typeface="Arial"/>
               </a:rPr>
-              <a:t>The hottest team in baseball was supposed to sell. A deadline case study: why the run differential saw the streak coming, what Boston should buy — and why the left fielder is the whole season in miniature.</a:t>
+              <a:t>The hottest team in baseball was supposed to sell. A deadline case study: why the run differential saw the streak coming, what Boston should buy, and what it should leave alone.</a:t>
             </a:r>
           </a:p>
         </p:txBody>
@@ -4193,7 +4194,7 @@
                 </a:solidFill>
                 <a:latin typeface="Arial"/>
               </a:rPr>
-              <a:t>3.47 RA9 with Wong, 4.17 with Narváez — the run-prevention core of the streak.</a:t>
+              <a:t>3.44 RA9 with Wong, 4.17 with Narváez — the run-prevention core of the streak.</a:t>
             </a:r>
           </a:p>
         </p:txBody>
@@ -4300,7 +4301,7 @@
                 </a:solidFill>
                 <a:latin typeface="Arial"/>
               </a:rPr>
-              <a:t>Gray: 1.86 with Wong (4.40 with Narváez). Bennett: 1.12 with Narváez. Bello: ~5 runs better with Wong.</a:t>
+              <a:t>Raw pairings look dramatic (fig. 14) — but small samples shrink hard (fig. 15). What survives: settled, deliberate assignments.</a:t>
             </a:r>
           </a:p>
         </p:txBody>
@@ -4407,7 +4408,7 @@
                 </a:solidFill>
                 <a:latin typeface="Arial"/>
               </a:rPr>
-              <a:t>Watson and Morán both run 3+ runs better with Narváez — leverage innings aren't assigned at random.</a:t>
+              <a:t>Leverage relievers ride with a settled catcher — these innings aren't assigned at random.</a:t>
             </a:r>
           </a:p>
         </p:txBody>
@@ -4514,7 +4515,7 @@
                 </a:solidFill>
                 <a:latin typeface="Arial"/>
               </a:rPr>
-              <a:t>The audit sees a below-average bat; the staff sees its catchers. Small, usage-confounded samples — but you don't reset eight batteries mid-streak for one.</a:t>
+              <a:t>The adjusted model (pitcher/opponent/park controls) finds no significant catcher effect: -34 pts, 95% CI [-90, +22]. Nothing here for a trade to fix.</a:t>
             </a:r>
           </a:p>
         </p:txBody>
@@ -4633,7 +4634,7 @@
                 </a:solidFill>
                 <a:latin typeface="Courier New"/>
               </a:rPr>
-              <a:t>// THE MENU</a:t>
+              <a:t>// UNDER THE HOOD</a:t>
             </a:r>
           </a:p>
         </p:txBody>
@@ -4675,34 +4676,56 @@
                 </a:solidFill>
                 <a:latin typeface="Arial"/>
               </a:rPr>
-              <a:t>Three trades that fit — and the walk-away. Keep it small</a:t>
-            </a:r>
-          </a:p>
-        </p:txBody>
-      </p:sp>
-      <p:sp>
-        <p:nvSpPr>
-          <p:cNvPr id="4" name="Rounded Rectangle 3"/>
+              <a:t>Two custom models behind the calls — built and validated here</a:t>
+            </a:r>
+          </a:p>
+        </p:txBody>
+      </p:sp>
+      <p:pic>
+        <p:nvPicPr>
+          <p:cNvPr id="4" name="Picture 3" descr="16_speed_model.png"/>
+          <p:cNvPicPr>
+            <a:picLocks noChangeAspect="1"/>
+          </p:cNvPicPr>
+          <p:nvPr/>
+        </p:nvPicPr>
+        <p:blipFill>
+          <a:blip r:embed="rId2"/>
+          <a:stretch>
+            <a:fillRect/>
+          </a:stretch>
+        </p:blipFill>
+        <p:spPr>
+          <a:xfrm>
+            <a:off x="383344" y="1554480"/>
+            <a:ext cx="7280030" cy="4206240"/>
+          </a:xfrm>
+          <a:prstGeom prst="rect">
+            <a:avLst/>
+          </a:prstGeom>
+        </p:spPr>
+      </p:pic>
+      <p:sp>
+        <p:nvSpPr>
+          <p:cNvPr id="5" name="Rounded Rectangle 4"/>
           <p:cNvSpPr/>
           <p:nvPr/>
         </p:nvSpPr>
         <p:spPr>
           <a:xfrm>
-            <a:off x="566928" y="1691640"/>
-            <a:ext cx="5358384" cy="1938528"/>
+            <a:off x="8001000" y="1773936"/>
+            <a:ext cx="146304" cy="146304"/>
           </a:xfrm>
           <a:prstGeom prst="roundRect">
             <a:avLst>
-              <a:gd name="adj" fmla="val 6000"/>
+              <a:gd name="adj" fmla="val 18000"/>
             </a:avLst>
           </a:prstGeom>
           <a:solidFill>
-            <a:srgbClr val="121E33"/>
+            <a:srgbClr val="E8615A"/>
           </a:solidFill>
-          <a:ln w="12700">
-            <a:solidFill>
-              <a:srgbClr val="26334E"/>
-            </a:solidFill>
+          <a:ln>
+            <a:noFill/>
           </a:ln>
           <a:effectLst/>
         </p:spPr>
@@ -4730,116 +4753,51 @@
       </p:sp>
       <p:sp>
         <p:nvSpPr>
-          <p:cNvPr id="5" name="TextBox 4"/>
-          <p:cNvSpPr txBox="1"/>
-          <p:nvPr/>
-        </p:nvSpPr>
-        <p:spPr>
-          <a:xfrm>
-            <a:off x="822960" y="1856232"/>
-            <a:ext cx="4855464" cy="292608"/>
-          </a:xfrm>
-          <a:prstGeom prst="rect">
-            <a:avLst/>
-          </a:prstGeom>
-          <a:noFill/>
-        </p:spPr>
-        <p:txBody>
-          <a:bodyPr wrap="square" anchor="t" lIns="0" rIns="0" tIns="0" bIns="0">
-            <a:spAutoFit/>
-          </a:bodyPr>
-          <a:lstStyle/>
-          <a:p>
-            <a:pPr algn="l">
-              <a:lnSpc>
-                <a:spcPct val="100000"/>
-              </a:lnSpc>
-              <a:spcAft>
-                <a:spcPts val="0"/>
-              </a:spcAft>
-            </a:pPr>
-            <a:r>
-              <a:rPr sz="1100" b="1" i="0">
-                <a:solidFill>
-                  <a:srgbClr val="58C08D"/>
-                </a:solidFill>
-                <a:latin typeface="Arial"/>
-              </a:rPr>
-              <a:t>1 · THE PEN FIX · DO IT</a:t>
-            </a:r>
-          </a:p>
-        </p:txBody>
-      </p:sp>
-      <p:sp>
-        <p:nvSpPr>
           <p:cNvPr id="6" name="TextBox 5"/>
           <p:cNvSpPr txBox="1"/>
           <p:nvPr/>
         </p:nvSpPr>
         <p:spPr>
           <a:xfrm>
-            <a:off x="822960" y="2148840"/>
-            <a:ext cx="4855464" cy="365760"/>
-          </a:xfrm>
-          <a:prstGeom prst="rect">
-            <a:avLst/>
-          </a:prstGeom>
-          <a:noFill/>
-        </p:spPr>
-        <p:txBody>
-          <a:bodyPr wrap="square" anchor="t" lIns="0" rIns="0" tIns="0" bIns="0">
-            <a:spAutoFit/>
-          </a:bodyPr>
-          <a:lstStyle/>
-          <a:p>
-            <a:pPr algn="l">
-              <a:lnSpc>
-                <a:spcPct val="100000"/>
-              </a:lnSpc>
-              <a:spcAft>
-                <a:spcPts val="0"/>
-              </a:spcAft>
-            </a:pPr>
-            <a:r>
-              <a:rPr sz="1650" b="1" i="0">
+            <a:off x="8293608" y="1737360"/>
+            <a:ext cx="3749039" cy="1097280"/>
+          </a:xfrm>
+          <a:prstGeom prst="rect">
+            <a:avLst/>
+          </a:prstGeom>
+          <a:noFill/>
+        </p:spPr>
+        <p:txBody>
+          <a:bodyPr wrap="square" anchor="t" lIns="0" rIns="0" tIns="0" bIns="0">
+            <a:spAutoFit/>
+          </a:bodyPr>
+          <a:lstStyle/>
+          <a:p>
+            <a:pPr algn="l">
+              <a:lnSpc>
+                <a:spcPct val="107000"/>
+              </a:lnSpc>
+              <a:spcAft>
+                <a:spcPts val="200"/>
+              </a:spcAft>
+            </a:pPr>
+            <a:r>
+              <a:rPr sz="1350" b="1" i="0">
                 <a:solidFill>
                   <a:srgbClr val="EAF0F8"/>
                 </a:solidFill>
                 <a:latin typeface="Arial"/>
               </a:rPr>
-              <a:t>RHP Luke Weaver (NYM)</a:t>
-            </a:r>
-          </a:p>
-        </p:txBody>
-      </p:sp>
-      <p:sp>
-        <p:nvSpPr>
-          <p:cNvPr id="7" name="TextBox 6"/>
-          <p:cNvSpPr txBox="1"/>
-          <p:nvPr/>
-        </p:nvSpPr>
-        <p:spPr>
-          <a:xfrm>
-            <a:off x="822960" y="2560320"/>
-            <a:ext cx="4855464" cy="960120"/>
-          </a:xfrm>
-          <a:prstGeom prst="rect">
-            <a:avLst/>
-          </a:prstGeom>
-          <a:noFill/>
-        </p:spPr>
-        <p:txBody>
-          <a:bodyPr wrap="square" anchor="t" lIns="0" rIns="0" tIns="0" bIns="0">
-            <a:spAutoFit/>
-          </a:bodyPr>
-          <a:lstStyle/>
-          <a:p>
-            <a:pPr algn="l">
-              <a:lnSpc>
-                <a:spcPct val="110000"/>
-              </a:lnSpc>
-              <a:spcAft>
-                <a:spcPts val="400"/>
+              <a:t>Speed-aware xBABIP / xwOBAcon</a:t>
+            </a:r>
+          </a:p>
+          <a:p>
+            <a:pPr algn="l">
+              <a:lnSpc>
+                <a:spcPct val="107000"/>
+              </a:lnSpc>
+              <a:spcAft>
+                <a:spcPts val="200"/>
               </a:spcAft>
             </a:pPr>
             <a:r>
@@ -4849,34 +4807,32 @@
                 </a:solidFill>
                 <a:latin typeface="Arial"/>
               </a:rPr>
-              <a:t>For a 45 FV + 40 FV — prospects only, nobody loses a job or an inning. Elite relief year, signed through '27. The highest-probability marginal win on the board.</a:t>
-            </a:r>
-          </a:p>
-        </p:txBody>
-      </p:sp>
-      <p:sp>
-        <p:nvSpPr>
-          <p:cNvPr id="8" name="Rounded Rectangle 7"/>
+              <a:t>Gradient boosting on 76,373 league batted balls (EV, LA, spray ± sprint speed), 5-fold CV grouped by batter so every residual is out-of-sample.</a:t>
+            </a:r>
+          </a:p>
+        </p:txBody>
+      </p:sp>
+      <p:sp>
+        <p:nvSpPr>
+          <p:cNvPr id="7" name="Rounded Rectangle 6"/>
           <p:cNvSpPr/>
           <p:nvPr/>
         </p:nvSpPr>
         <p:spPr>
           <a:xfrm>
-            <a:off x="6227064" y="1691640"/>
-            <a:ext cx="5358384" cy="1938528"/>
+            <a:off x="8001000" y="2889504"/>
+            <a:ext cx="146304" cy="146304"/>
           </a:xfrm>
           <a:prstGeom prst="roundRect">
             <a:avLst>
-              <a:gd name="adj" fmla="val 6000"/>
+              <a:gd name="adj" fmla="val 18000"/>
             </a:avLst>
           </a:prstGeom>
           <a:solidFill>
-            <a:srgbClr val="121E33"/>
+            <a:srgbClr val="EAF0F8"/>
           </a:solidFill>
-          <a:ln w="12700">
-            <a:solidFill>
-              <a:srgbClr val="26334E"/>
-            </a:solidFill>
+          <a:ln>
+            <a:noFill/>
           </a:ln>
           <a:effectLst/>
         </p:spPr>
@@ -4904,116 +4860,51 @@
       </p:sp>
       <p:sp>
         <p:nvSpPr>
-          <p:cNvPr id="9" name="TextBox 8"/>
-          <p:cNvSpPr txBox="1"/>
-          <p:nvPr/>
-        </p:nvSpPr>
-        <p:spPr>
-          <a:xfrm>
-            <a:off x="6483096" y="1856232"/>
-            <a:ext cx="4855464" cy="292608"/>
-          </a:xfrm>
-          <a:prstGeom prst="rect">
-            <a:avLst/>
-          </a:prstGeom>
-          <a:noFill/>
-        </p:spPr>
-        <p:txBody>
-          <a:bodyPr wrap="square" anchor="t" lIns="0" rIns="0" tIns="0" bIns="0">
-            <a:spAutoFit/>
-          </a:bodyPr>
-          <a:lstStyle/>
-          <a:p>
-            <a:pPr algn="l">
-              <a:lnSpc>
-                <a:spcPct val="100000"/>
-              </a:lnSpc>
-              <a:spcAft>
-                <a:spcPts val="0"/>
-              </a:spcAft>
-            </a:pPr>
-            <a:r>
-              <a:rPr sz="1100" b="1" i="0">
+          <p:cNvPr id="8" name="TextBox 7"/>
+          <p:cNvSpPr txBox="1"/>
+          <p:nvPr/>
+        </p:nvSpPr>
+        <p:spPr>
+          <a:xfrm>
+            <a:off x="8293608" y="2852928"/>
+            <a:ext cx="3749039" cy="1097280"/>
+          </a:xfrm>
+          <a:prstGeom prst="rect">
+            <a:avLst/>
+          </a:prstGeom>
+          <a:noFill/>
+        </p:spPr>
+        <p:txBody>
+          <a:bodyPr wrap="square" anchor="t" lIns="0" rIns="0" tIns="0" bIns="0">
+            <a:spAutoFit/>
+          </a:bodyPr>
+          <a:lstStyle/>
+          <a:p>
+            <a:pPr algn="l">
+              <a:lnSpc>
+                <a:spcPct val="107000"/>
+              </a:lnSpc>
+              <a:spcAft>
+                <a:spcPts val="200"/>
+              </a:spcAft>
+            </a:pPr>
+            <a:r>
+              <a:rPr sz="1350" b="1" i="0">
                 <a:solidFill>
                   <a:srgbClr val="EAF0F8"/>
                 </a:solidFill>
                 <a:latin typeface="Arial"/>
               </a:rPr>
-              <a:t>2 · THE STABILIZER · IF THE PRICE HOLDS</a:t>
-            </a:r>
-          </a:p>
-        </p:txBody>
-      </p:sp>
-      <p:sp>
-        <p:nvSpPr>
-          <p:cNvPr id="10" name="TextBox 9"/>
-          <p:cNvSpPr txBox="1"/>
-          <p:nvPr/>
-        </p:nvSpPr>
-        <p:spPr>
-          <a:xfrm>
-            <a:off x="6483096" y="2148840"/>
-            <a:ext cx="4855464" cy="365760"/>
-          </a:xfrm>
-          <a:prstGeom prst="rect">
-            <a:avLst/>
-          </a:prstGeom>
-          <a:noFill/>
-        </p:spPr>
-        <p:txBody>
-          <a:bodyPr wrap="square" anchor="t" lIns="0" rIns="0" tIns="0" bIns="0">
-            <a:spAutoFit/>
-          </a:bodyPr>
-          <a:lstStyle/>
-          <a:p>
-            <a:pPr algn="l">
-              <a:lnSpc>
-                <a:spcPct val="100000"/>
-              </a:lnSpc>
-              <a:spcAft>
-                <a:spcPts val="0"/>
-              </a:spcAft>
-            </a:pPr>
-            <a:r>
-              <a:rPr sz="1650" b="1" i="0">
-                <a:solidFill>
-                  <a:srgbClr val="EAF0F8"/>
-                </a:solidFill>
-                <a:latin typeface="Arial"/>
-              </a:rPr>
-              <a:t>2B Luis Arraez (SFG)</a:t>
-            </a:r>
-          </a:p>
-        </p:txBody>
-      </p:sp>
-      <p:sp>
-        <p:nvSpPr>
-          <p:cNvPr id="11" name="TextBox 10"/>
-          <p:cNvSpPr txBox="1"/>
-          <p:nvPr/>
-        </p:nvSpPr>
-        <p:spPr>
-          <a:xfrm>
-            <a:off x="6483096" y="2560320"/>
-            <a:ext cx="4855464" cy="960120"/>
-          </a:xfrm>
-          <a:prstGeom prst="rect">
-            <a:avLst/>
-          </a:prstGeom>
-          <a:noFill/>
-        </p:spPr>
-        <p:txBody>
-          <a:bodyPr wrap="square" anchor="t" lIns="0" rIns="0" tIns="0" bIns="0">
-            <a:spAutoFit/>
-          </a:bodyPr>
-          <a:lstStyle/>
-          <a:p>
-            <a:pPr algn="l">
-              <a:lnSpc>
-                <a:spcPct val="110000"/>
-              </a:lnSpc>
-              <a:spcAft>
-                <a:spcPts val="400"/>
+              <a:t>The blind spot, measured</a:t>
+            </a:r>
+          </a:p>
+          <a:p>
+            <a:pPr algn="l">
+              <a:lnSpc>
+                <a:spcPct val="107000"/>
+              </a:lnSpc>
+              <a:spcAft>
+                <a:spcPts val="200"/>
               </a:spcAft>
             </a:pPr>
             <a:r>
@@ -5023,34 +4914,32 @@
                 </a:solidFill>
                 <a:latin typeface="Arial"/>
               </a:rPr>
-              <a:t>For Brayan Bello — the first deal that touches the active roster. Zero prospect cost; Arraez fills a patchwork platoon spot, not a hot regular's.</a:t>
-            </a:r>
-          </a:p>
-        </p:txBody>
-      </p:sp>
-      <p:sp>
-        <p:nvSpPr>
-          <p:cNvPr id="12" name="Rounded Rectangle 11"/>
+              <a:t>Speed-blind xstats under-predict the fastest decile by +19 pts of BABIP. Duran's speed term: +18 pts of wOBA on contact — inside the +5–14 band derived independently.</a:t>
+            </a:r>
+          </a:p>
+        </p:txBody>
+      </p:sp>
+      <p:sp>
+        <p:nvSpPr>
+          <p:cNvPr id="9" name="Rounded Rectangle 8"/>
           <p:cNvSpPr/>
           <p:nvPr/>
         </p:nvSpPr>
         <p:spPr>
           <a:xfrm>
-            <a:off x="566928" y="3886200"/>
-            <a:ext cx="5358384" cy="1938528"/>
+            <a:off x="8001000" y="4005072"/>
+            <a:ext cx="146304" cy="146304"/>
           </a:xfrm>
           <a:prstGeom prst="roundRect">
             <a:avLst>
-              <a:gd name="adj" fmla="val 6000"/>
+              <a:gd name="adj" fmla="val 18000"/>
             </a:avLst>
           </a:prstGeom>
           <a:solidFill>
-            <a:srgbClr val="121E33"/>
+            <a:srgbClr val="E3B14E"/>
           </a:solidFill>
-          <a:ln w="12700">
-            <a:solidFill>
-              <a:srgbClr val="26334E"/>
-            </a:solidFill>
+          <a:ln>
+            <a:noFill/>
           </a:ln>
           <a:effectLst/>
         </p:spPr>
@@ -5078,116 +4967,51 @@
       </p:sp>
       <p:sp>
         <p:nvSpPr>
-          <p:cNvPr id="13" name="TextBox 12"/>
-          <p:cNvSpPr txBox="1"/>
-          <p:nvPr/>
-        </p:nvSpPr>
-        <p:spPr>
-          <a:xfrm>
-            <a:off x="822960" y="4050791"/>
-            <a:ext cx="4855464" cy="292608"/>
-          </a:xfrm>
-          <a:prstGeom prst="rect">
-            <a:avLst/>
-          </a:prstGeom>
-          <a:noFill/>
-        </p:spPr>
-        <p:txBody>
-          <a:bodyPr wrap="square" anchor="t" lIns="0" rIns="0" tIns="0" bIns="0">
-            <a:spAutoFit/>
-          </a:bodyPr>
-          <a:lstStyle/>
-          <a:p>
-            <a:pPr algn="l">
-              <a:lnSpc>
-                <a:spcPct val="100000"/>
-              </a:lnSpc>
-              <a:spcAft>
-                <a:spcPts val="0"/>
-              </a:spcAft>
-            </a:pPr>
-            <a:r>
-              <a:rPr sz="1100" b="1" i="0">
-                <a:solidFill>
-                  <a:srgbClr val="E8615A"/>
-                </a:solidFill>
-                <a:latin typeface="Arial"/>
-              </a:rPr>
-              <a:t>3 · THE BIG SWING · PROBABLY WAIT</a:t>
-            </a:r>
-          </a:p>
-        </p:txBody>
-      </p:sp>
-      <p:sp>
-        <p:nvSpPr>
-          <p:cNvPr id="14" name="TextBox 13"/>
-          <p:cNvSpPr txBox="1"/>
-          <p:nvPr/>
-        </p:nvSpPr>
-        <p:spPr>
-          <a:xfrm>
-            <a:off x="822960" y="4343400"/>
-            <a:ext cx="4855464" cy="365760"/>
-          </a:xfrm>
-          <a:prstGeom prst="rect">
-            <a:avLst/>
-          </a:prstGeom>
-          <a:noFill/>
-        </p:spPr>
-        <p:txBody>
-          <a:bodyPr wrap="square" anchor="t" lIns="0" rIns="0" tIns="0" bIns="0">
-            <a:spAutoFit/>
-          </a:bodyPr>
-          <a:lstStyle/>
-          <a:p>
-            <a:pPr algn="l">
-              <a:lnSpc>
-                <a:spcPct val="100000"/>
-              </a:lnSpc>
-              <a:spcAft>
-                <a:spcPts val="0"/>
-              </a:spcAft>
-            </a:pPr>
-            <a:r>
-              <a:rPr sz="1650" b="1" i="0">
+          <p:cNvPr id="10" name="TextBox 9"/>
+          <p:cNvSpPr txBox="1"/>
+          <p:nvPr/>
+        </p:nvSpPr>
+        <p:spPr>
+          <a:xfrm>
+            <a:off x="8293608" y="3968496"/>
+            <a:ext cx="3749039" cy="1097280"/>
+          </a:xfrm>
+          <a:prstGeom prst="rect">
+            <a:avLst/>
+          </a:prstGeom>
+          <a:noFill/>
+        </p:spPr>
+        <p:txBody>
+          <a:bodyPr wrap="square" anchor="t" lIns="0" rIns="0" tIns="0" bIns="0">
+            <a:spAutoFit/>
+          </a:bodyPr>
+          <a:lstStyle/>
+          <a:p>
+            <a:pPr algn="l">
+              <a:lnSpc>
+                <a:spcPct val="107000"/>
+              </a:lnSpc>
+              <a:spcAft>
+                <a:spcPts val="200"/>
+              </a:spcAft>
+            </a:pPr>
+            <a:r>
+              <a:rPr sz="1350" b="1" i="0">
                 <a:solidFill>
                   <a:srgbClr val="EAF0F8"/>
                 </a:solidFill>
                 <a:latin typeface="Arial"/>
               </a:rPr>
-              <a:t>SS Zach Neto (LAA)</a:t>
-            </a:r>
-          </a:p>
-        </p:txBody>
-      </p:sp>
-      <p:sp>
-        <p:nvSpPr>
-          <p:cNvPr id="15" name="TextBox 14"/>
-          <p:cNvSpPr txBox="1"/>
-          <p:nvPr/>
-        </p:nvSpPr>
-        <p:spPr>
-          <a:xfrm>
-            <a:off x="822960" y="4754880"/>
-            <a:ext cx="4855464" cy="960120"/>
-          </a:xfrm>
-          <a:prstGeom prst="rect">
-            <a:avLst/>
-          </a:prstGeom>
-          <a:noFill/>
-        </p:spPr>
-        <p:txBody>
-          <a:bodyPr wrap="square" anchor="t" lIns="0" rIns="0" tIns="0" bIns="0">
-            <a:spAutoFit/>
-          </a:bodyPr>
-          <a:lstStyle/>
-          <a:p>
-            <a:pPr algn="l">
-              <a:lnSpc>
-                <a:spcPct val="110000"/>
-              </a:lnSpc>
-              <a:spcAft>
-                <a:spcPts val="400"/>
+              <a:t>Adjusted battery model</a:t>
+            </a:r>
+          </a:p>
+          <a:p>
+            <a:pPr algn="l">
+              <a:lnSpc>
+                <a:spcPct val="107000"/>
+              </a:lnSpc>
+              <a:spcAft>
+                <a:spcPts val="200"/>
               </a:spcAft>
             </a:pPr>
             <a:r>
@@ -5197,34 +5021,32 @@
                 </a:solidFill>
                 <a:latin typeface="Arial"/>
               </a:rPr>
-              <a:t>For Tolle + Early + a 45 FV: two arms out of a winning rotation mid-streak. Franchise-window correct — and still there in the winter. Controlled through 2029.</a:t>
-            </a:r>
-          </a:p>
-        </p:txBody>
-      </p:sp>
-      <p:sp>
-        <p:nvSpPr>
-          <p:cNvPr id="16" name="Rounded Rectangle 15"/>
+              <a:t>WOWY + fixed-effects OLS (pitcher/opponent/park), cluster-bootstrap CIs, empirical-Bayes shrinkage (fig. 15): raw splits are mostly noise; no significant catcher effect.</a:t>
+            </a:r>
+          </a:p>
+        </p:txBody>
+      </p:sp>
+      <p:sp>
+        <p:nvSpPr>
+          <p:cNvPr id="11" name="Rounded Rectangle 10"/>
           <p:cNvSpPr/>
           <p:nvPr/>
         </p:nvSpPr>
         <p:spPr>
           <a:xfrm>
-            <a:off x="6227064" y="3886200"/>
-            <a:ext cx="5358384" cy="1938528"/>
+            <a:off x="8001000" y="5120640"/>
+            <a:ext cx="146304" cy="146304"/>
           </a:xfrm>
           <a:prstGeom prst="roundRect">
             <a:avLst>
-              <a:gd name="adj" fmla="val 6000"/>
+              <a:gd name="adj" fmla="val 18000"/>
             </a:avLst>
           </a:prstGeom>
           <a:solidFill>
-            <a:srgbClr val="121E33"/>
+            <a:srgbClr val="58C08D"/>
           </a:solidFill>
-          <a:ln w="12700">
-            <a:solidFill>
-              <a:srgbClr val="26334E"/>
-            </a:solidFill>
+          <a:ln>
+            <a:noFill/>
           </a:ln>
           <a:effectLst/>
         </p:spPr>
@@ -5252,116 +5074,51 @@
       </p:sp>
       <p:sp>
         <p:nvSpPr>
-          <p:cNvPr id="17" name="TextBox 16"/>
-          <p:cNvSpPr txBox="1"/>
-          <p:nvPr/>
-        </p:nvSpPr>
-        <p:spPr>
-          <a:xfrm>
-            <a:off x="6483096" y="4050791"/>
-            <a:ext cx="4855464" cy="292608"/>
-          </a:xfrm>
-          <a:prstGeom prst="rect">
-            <a:avLst/>
-          </a:prstGeom>
-          <a:noFill/>
-        </p:spPr>
-        <p:txBody>
-          <a:bodyPr wrap="square" anchor="t" lIns="0" rIns="0" tIns="0" bIns="0">
-            <a:spAutoFit/>
-          </a:bodyPr>
-          <a:lstStyle/>
-          <a:p>
-            <a:pPr algn="l">
-              <a:lnSpc>
-                <a:spcPct val="100000"/>
-              </a:lnSpc>
-              <a:spcAft>
-                <a:spcPts val="0"/>
-              </a:spcAft>
-            </a:pPr>
-            <a:r>
-              <a:rPr sz="1100" b="1" i="0">
-                <a:solidFill>
-                  <a:srgbClr val="E3B14E"/>
-                </a:solidFill>
-                <a:latin typeface="Arial"/>
-              </a:rPr>
-              <a:t>✗ · THE WALK-AWAY</a:t>
-            </a:r>
-          </a:p>
-        </p:txBody>
-      </p:sp>
-      <p:sp>
-        <p:nvSpPr>
-          <p:cNvPr id="18" name="TextBox 17"/>
-          <p:cNvSpPr txBox="1"/>
-          <p:nvPr/>
-        </p:nvSpPr>
-        <p:spPr>
-          <a:xfrm>
-            <a:off x="6483096" y="4343400"/>
-            <a:ext cx="4855464" cy="365760"/>
-          </a:xfrm>
-          <a:prstGeom prst="rect">
-            <a:avLst/>
-          </a:prstGeom>
-          <a:noFill/>
-        </p:spPr>
-        <p:txBody>
-          <a:bodyPr wrap="square" anchor="t" lIns="0" rIns="0" tIns="0" bIns="0">
-            <a:spAutoFit/>
-          </a:bodyPr>
-          <a:lstStyle/>
-          <a:p>
-            <a:pPr algn="l">
-              <a:lnSpc>
-                <a:spcPct val="100000"/>
-              </a:lnSpc>
-              <a:spcAft>
-                <a:spcPts val="0"/>
-              </a:spcAft>
-            </a:pPr>
-            <a:r>
-              <a:rPr sz="1650" b="1" i="0">
+          <p:cNvPr id="12" name="TextBox 11"/>
+          <p:cNvSpPr txBox="1"/>
+          <p:nvPr/>
+        </p:nvSpPr>
+        <p:spPr>
+          <a:xfrm>
+            <a:off x="8293608" y="5084064"/>
+            <a:ext cx="3749039" cy="1097280"/>
+          </a:xfrm>
+          <a:prstGeom prst="rect">
+            <a:avLst/>
+          </a:prstGeom>
+          <a:noFill/>
+        </p:spPr>
+        <p:txBody>
+          <a:bodyPr wrap="square" anchor="t" lIns="0" rIns="0" tIns="0" bIns="0">
+            <a:spAutoFit/>
+          </a:bodyPr>
+          <a:lstStyle/>
+          <a:p>
+            <a:pPr algn="l">
+              <a:lnSpc>
+                <a:spcPct val="107000"/>
+              </a:lnSpc>
+              <a:spcAft>
+                <a:spcPts val="200"/>
+              </a:spcAft>
+            </a:pPr>
+            <a:r>
+              <a:rPr sz="1350" b="1" i="0">
                 <a:solidFill>
                   <a:srgbClr val="EAF0F8"/>
                 </a:solidFill>
                 <a:latin typeface="Arial"/>
               </a:rPr>
-              <a:t>C Shea Langeliers (ATH)</a:t>
-            </a:r>
-          </a:p>
-        </p:txBody>
-      </p:sp>
-      <p:sp>
-        <p:nvSpPr>
-          <p:cNvPr id="19" name="TextBox 18"/>
-          <p:cNvSpPr txBox="1"/>
-          <p:nvPr/>
-        </p:nvSpPr>
-        <p:spPr>
-          <a:xfrm>
-            <a:off x="6483096" y="4754880"/>
-            <a:ext cx="4855464" cy="960120"/>
-          </a:xfrm>
-          <a:prstGeom prst="rect">
-            <a:avLst/>
-          </a:prstGeom>
-          <a:noFill/>
-        </p:spPr>
-        <p:txBody>
-          <a:bodyPr wrap="square" anchor="t" lIns="0" rIns="0" tIns="0" bIns="0">
-            <a:spAutoFit/>
-          </a:bodyPr>
-          <a:lstStyle/>
-          <a:p>
-            <a:pPr algn="l">
-              <a:lnSpc>
-                <a:spcPct val="110000"/>
-              </a:lnSpc>
-              <a:spcAft>
-                <a:spcPts val="400"/>
+              <a:t>Why it's credible</a:t>
+            </a:r>
+          </a:p>
+          <a:p>
+            <a:pPr algn="l">
+              <a:lnSpc>
+                <a:spcPct val="107000"/>
+              </a:lnSpc>
+              <a:spcAft>
+                <a:spcPts val="200"/>
               </a:spcAft>
             </a:pPr>
             <a:r>
@@ -5371,65 +5128,14 @@
                 </a:solidFill>
                 <a:latin typeface="Arial"/>
               </a:rPr>
-              <a:t>The value math worked; the battery map is the veto. No August bat is worth resetting eight pitcher-catcher pairings in the middle of a streak built on run prevention.</a:t>
-            </a:r>
-          </a:p>
-        </p:txBody>
-      </p:sp>
-      <p:sp>
-        <p:nvSpPr>
-          <p:cNvPr id="20" name="TextBox 19"/>
-          <p:cNvSpPr txBox="1"/>
-          <p:nvPr/>
-        </p:nvSpPr>
-        <p:spPr>
-          <a:xfrm>
-            <a:off x="566928" y="5897880"/>
-            <a:ext cx="11064240" cy="457200"/>
-          </a:xfrm>
-          <a:prstGeom prst="rect">
-            <a:avLst/>
-          </a:prstGeom>
-          <a:noFill/>
-        </p:spPr>
-        <p:txBody>
-          <a:bodyPr wrap="square" anchor="t" lIns="0" rIns="0" tIns="0" bIns="0">
-            <a:spAutoFit/>
-          </a:bodyPr>
-          <a:lstStyle/>
-          <a:p>
-            <a:pPr algn="l">
-              <a:lnSpc>
-                <a:spcPct val="100000"/>
-              </a:lnSpc>
-              <a:spcAft>
-                <a:spcPts val="0"/>
-              </a:spcAft>
-            </a:pPr>
-            <a:r>
-              <a:rPr sz="1250" b="1" i="0">
-                <a:solidFill>
-                  <a:srgbClr val="D9E1EF"/>
-                </a:solidFill>
-                <a:latin typeface="Arial"/>
-              </a:rPr>
-              <a:t>A menu, not a plan — Boston can afford about two. </a:t>
-            </a:r>
-            <a:r>
-              <a:rPr sz="1250" b="0" i="0">
-                <a:solidFill>
-                  <a:srgbClr val="93A0B6"/>
-                </a:solidFill>
-                <a:latin typeface="Arial"/>
-              </a:rPr>
-              <a:t>Full value math and verified contracts in the mock-trades memo. Hypotheticals, not reporting.</a:t>
-            </a:r>
-          </a:p>
-        </p:txBody>
-      </p:sp>
-      <p:sp>
-        <p:nvSpPr>
-          <p:cNvPr id="21" name="TextBox 20"/>
+              <a:t>Out-of-sample everywhere, CIs on every headline, and frozen pre-registered predictions graded in October — flattering or not.</a:t>
+            </a:r>
+          </a:p>
+        </p:txBody>
+      </p:sp>
+      <p:sp>
+        <p:nvSpPr>
+          <p:cNvPr id="13" name="TextBox 12"/>
           <p:cNvSpPr txBox="1"/>
           <p:nvPr/>
         </p:nvSpPr>
@@ -5541,7 +5247,7 @@
                 </a:solidFill>
                 <a:latin typeface="Courier New"/>
               </a:rPr>
-              <a:t>// THE WINTER PLAN</a:t>
+              <a:t>// THE MENU</a:t>
             </a:r>
           </a:p>
         </p:txBody>
@@ -5583,63 +5289,21 @@
                 </a:solidFill>
                 <a:latin typeface="Arial"/>
               </a:rPr>
-              <a:t>Pitching is the strength — spend the surplus on offense</a:t>
-            </a:r>
-          </a:p>
-        </p:txBody>
-      </p:sp>
-      <p:sp>
-        <p:nvSpPr>
-          <p:cNvPr id="4" name="TextBox 3"/>
-          <p:cNvSpPr txBox="1"/>
-          <p:nvPr/>
-        </p:nvSpPr>
-        <p:spPr>
-          <a:xfrm>
-            <a:off x="566928" y="1572768"/>
-            <a:ext cx="11064240" cy="640080"/>
-          </a:xfrm>
-          <a:prstGeom prst="rect">
-            <a:avLst/>
-          </a:prstGeom>
-          <a:noFill/>
-        </p:spPr>
-        <p:txBody>
-          <a:bodyPr wrap="square" anchor="t" lIns="0" rIns="0" tIns="0" bIns="0">
-            <a:spAutoFit/>
-          </a:bodyPr>
-          <a:lstStyle/>
-          <a:p>
-            <a:pPr algn="l">
-              <a:lnSpc>
-                <a:spcPct val="112000"/>
-              </a:lnSpc>
-              <a:spcAft>
-                <a:spcPts val="400"/>
-              </a:spcAft>
-            </a:pPr>
-            <a:r>
-              <a:rPr sz="1450" b="0" i="0">
-                <a:solidFill>
-                  <a:srgbClr val="D9E1EF"/>
-                </a:solidFill>
-                <a:latin typeface="Arial"/>
-              </a:rPr>
-              <a:t>If winter comes and Duran's rebound has shown up, this is what a deal should return. With a top-6 rotation (3.65 ERA) carrying the club, trading bats for arms is backwards — convert the outfield surplus into what's thin:</a:t>
-            </a:r>
-          </a:p>
-        </p:txBody>
-      </p:sp>
-      <p:sp>
-        <p:nvSpPr>
-          <p:cNvPr id="5" name="Rounded Rectangle 4"/>
+              <a:t>Three trades that fit — and the walk-away. Keep it small</a:t>
+            </a:r>
+          </a:p>
+        </p:txBody>
+      </p:sp>
+      <p:sp>
+        <p:nvSpPr>
+          <p:cNvPr id="4" name="Rounded Rectangle 3"/>
           <p:cNvSpPr/>
           <p:nvPr/>
         </p:nvSpPr>
         <p:spPr>
           <a:xfrm>
-            <a:off x="566928" y="2468880"/>
-            <a:ext cx="3502152" cy="2514600"/>
+            <a:off x="566928" y="1691640"/>
+            <a:ext cx="5358384" cy="1938528"/>
           </a:xfrm>
           <a:prstGeom prst="roundRect">
             <a:avLst>
@@ -5680,153 +5344,140 @@
       </p:sp>
       <p:sp>
         <p:nvSpPr>
-          <p:cNvPr id="6" name="Rounded Rectangle 5"/>
+          <p:cNvPr id="5" name="TextBox 4"/>
+          <p:cNvSpPr txBox="1"/>
+          <p:nvPr/>
+        </p:nvSpPr>
+        <p:spPr>
+          <a:xfrm>
+            <a:off x="822960" y="1856232"/>
+            <a:ext cx="4855464" cy="292608"/>
+          </a:xfrm>
+          <a:prstGeom prst="rect">
+            <a:avLst/>
+          </a:prstGeom>
+          <a:noFill/>
+        </p:spPr>
+        <p:txBody>
+          <a:bodyPr wrap="square" anchor="t" lIns="0" rIns="0" tIns="0" bIns="0">
+            <a:spAutoFit/>
+          </a:bodyPr>
+          <a:lstStyle/>
+          <a:p>
+            <a:pPr algn="l">
+              <a:lnSpc>
+                <a:spcPct val="100000"/>
+              </a:lnSpc>
+              <a:spcAft>
+                <a:spcPts val="0"/>
+              </a:spcAft>
+            </a:pPr>
+            <a:r>
+              <a:rPr sz="1100" b="1" i="0">
+                <a:solidFill>
+                  <a:srgbClr val="58C08D"/>
+                </a:solidFill>
+                <a:latin typeface="Arial"/>
+              </a:rPr>
+              <a:t>1 · THE PEN FIX · DO IT</a:t>
+            </a:r>
+          </a:p>
+        </p:txBody>
+      </p:sp>
+      <p:sp>
+        <p:nvSpPr>
+          <p:cNvPr id="6" name="TextBox 5"/>
+          <p:cNvSpPr txBox="1"/>
+          <p:nvPr/>
+        </p:nvSpPr>
+        <p:spPr>
+          <a:xfrm>
+            <a:off x="822960" y="2148840"/>
+            <a:ext cx="4855464" cy="365760"/>
+          </a:xfrm>
+          <a:prstGeom prst="rect">
+            <a:avLst/>
+          </a:prstGeom>
+          <a:noFill/>
+        </p:spPr>
+        <p:txBody>
+          <a:bodyPr wrap="square" anchor="t" lIns="0" rIns="0" tIns="0" bIns="0">
+            <a:spAutoFit/>
+          </a:bodyPr>
+          <a:lstStyle/>
+          <a:p>
+            <a:pPr algn="l">
+              <a:lnSpc>
+                <a:spcPct val="100000"/>
+              </a:lnSpc>
+              <a:spcAft>
+                <a:spcPts val="0"/>
+              </a:spcAft>
+            </a:pPr>
+            <a:r>
+              <a:rPr sz="1650" b="1" i="0">
+                <a:solidFill>
+                  <a:srgbClr val="EAF0F8"/>
+                </a:solidFill>
+                <a:latin typeface="Arial"/>
+              </a:rPr>
+              <a:t>RHP Luke Weaver (NYM)</a:t>
+            </a:r>
+          </a:p>
+        </p:txBody>
+      </p:sp>
+      <p:sp>
+        <p:nvSpPr>
+          <p:cNvPr id="7" name="TextBox 6"/>
+          <p:cNvSpPr txBox="1"/>
+          <p:nvPr/>
+        </p:nvSpPr>
+        <p:spPr>
+          <a:xfrm>
+            <a:off x="822960" y="2560320"/>
+            <a:ext cx="4855464" cy="960120"/>
+          </a:xfrm>
+          <a:prstGeom prst="rect">
+            <a:avLst/>
+          </a:prstGeom>
+          <a:noFill/>
+        </p:spPr>
+        <p:txBody>
+          <a:bodyPr wrap="square" anchor="t" lIns="0" rIns="0" tIns="0" bIns="0">
+            <a:spAutoFit/>
+          </a:bodyPr>
+          <a:lstStyle/>
+          <a:p>
+            <a:pPr algn="l">
+              <a:lnSpc>
+                <a:spcPct val="110000"/>
+              </a:lnSpc>
+              <a:spcAft>
+                <a:spcPts val="400"/>
+              </a:spcAft>
+            </a:pPr>
+            <a:r>
+              <a:rPr sz="1160" b="0" i="0">
+                <a:solidFill>
+                  <a:srgbClr val="93A0B6"/>
+                </a:solidFill>
+                <a:latin typeface="Arial"/>
+              </a:rPr>
+              <a:t>For a 45 FV + 40 FV — prospects only, nobody loses a job or an inning. Elite relief year, signed through '27. The highest-probability marginal win on the board.</a:t>
+            </a:r>
+          </a:p>
+        </p:txBody>
+      </p:sp>
+      <p:sp>
+        <p:nvSpPr>
+          <p:cNvPr id="8" name="Rounded Rectangle 7"/>
           <p:cNvSpPr/>
           <p:nvPr/>
         </p:nvSpPr>
         <p:spPr>
           <a:xfrm>
-            <a:off x="841247" y="2724912"/>
-            <a:ext cx="384048" cy="384048"/>
-          </a:xfrm>
-          <a:prstGeom prst="roundRect">
-            <a:avLst>
-              <a:gd name="adj" fmla="val 18000"/>
-            </a:avLst>
-          </a:prstGeom>
-          <a:solidFill>
-            <a:srgbClr val="58C08D"/>
-          </a:solidFill>
-          <a:ln>
-            <a:noFill/>
-          </a:ln>
-          <a:effectLst/>
-        </p:spPr>
-        <p:style>
-          <a:lnRef idx="1">
-            <a:schemeClr val="accent1"/>
-          </a:lnRef>
-          <a:fillRef idx="3">
-            <a:schemeClr val="accent1"/>
-          </a:fillRef>
-          <a:effectRef idx="2">
-            <a:schemeClr val="accent1"/>
-          </a:effectRef>
-          <a:fontRef idx="minor">
-            <a:schemeClr val="lt1"/>
-          </a:fontRef>
-        </p:style>
-        <p:txBody>
-          <a:bodyPr rtlCol="0" anchor="ctr" wrap="none"/>
-          <a:lstStyle/>
-          <a:p>
-            <a:pPr algn="ctr"/>
-            <a:r>
-              <a:rPr sz="1600" b="1">
-                <a:solidFill>
-                  <a:srgbClr val="0B1220"/>
-                </a:solidFill>
-                <a:latin typeface="Courier New"/>
-              </a:rPr>
-              <a:t>1</a:t>
-            </a:r>
-          </a:p>
-        </p:txBody>
-      </p:sp>
-      <p:sp>
-        <p:nvSpPr>
-          <p:cNvPr id="7" name="TextBox 6"/>
-          <p:cNvSpPr txBox="1"/>
-          <p:nvPr/>
-        </p:nvSpPr>
-        <p:spPr>
-          <a:xfrm>
-            <a:off x="841247" y="3310128"/>
-            <a:ext cx="2999232" cy="411480"/>
-          </a:xfrm>
-          <a:prstGeom prst="rect">
-            <a:avLst/>
-          </a:prstGeom>
-          <a:noFill/>
-        </p:spPr>
-        <p:txBody>
-          <a:bodyPr wrap="square" anchor="t" lIns="0" rIns="0" tIns="0" bIns="0">
-            <a:spAutoFit/>
-          </a:bodyPr>
-          <a:lstStyle/>
-          <a:p>
-            <a:pPr algn="l">
-              <a:lnSpc>
-                <a:spcPct val="100000"/>
-              </a:lnSpc>
-              <a:spcAft>
-                <a:spcPts val="0"/>
-              </a:spcAft>
-            </a:pPr>
-            <a:r>
-              <a:rPr sz="1600" b="1" i="0">
-                <a:solidFill>
-                  <a:srgbClr val="EAF0F8"/>
-                </a:solidFill>
-                <a:latin typeface="Arial"/>
-              </a:rPr>
-              <a:t>Controllable bats</a:t>
-            </a:r>
-          </a:p>
-        </p:txBody>
-      </p:sp>
-      <p:sp>
-        <p:nvSpPr>
-          <p:cNvPr id="8" name="TextBox 7"/>
-          <p:cNvSpPr txBox="1"/>
-          <p:nvPr/>
-        </p:nvSpPr>
-        <p:spPr>
-          <a:xfrm>
-            <a:off x="841247" y="3767328"/>
-            <a:ext cx="2999232" cy="1097280"/>
-          </a:xfrm>
-          <a:prstGeom prst="rect">
-            <a:avLst/>
-          </a:prstGeom>
-          <a:noFill/>
-        </p:spPr>
-        <p:txBody>
-          <a:bodyPr wrap="square" anchor="t" lIns="0" rIns="0" tIns="0" bIns="0">
-            <a:spAutoFit/>
-          </a:bodyPr>
-          <a:lstStyle/>
-          <a:p>
-            <a:pPr algn="l">
-              <a:lnSpc>
-                <a:spcPct val="110000"/>
-              </a:lnSpc>
-              <a:spcAft>
-                <a:spcPts val="400"/>
-              </a:spcAft>
-            </a:pPr>
-            <a:r>
-              <a:rPr sz="1280" b="0" i="0">
-                <a:solidFill>
-                  <a:srgbClr val="93A0B6"/>
-                </a:solidFill>
-                <a:latin typeface="Arial"/>
-              </a:rPr>
-              <a:t>Young, cost-controlled position players to fix an inconsistent lineup and lengthen it around the core.</a:t>
-            </a:r>
-          </a:p>
-        </p:txBody>
-      </p:sp>
-      <p:sp>
-        <p:nvSpPr>
-          <p:cNvPr id="9" name="Rounded Rectangle 8"/>
-          <p:cNvSpPr/>
-          <p:nvPr/>
-        </p:nvSpPr>
-        <p:spPr>
-          <a:xfrm>
-            <a:off x="4352544" y="2468880"/>
-            <a:ext cx="3502152" cy="2514600"/>
+            <a:off x="6227064" y="1691640"/>
+            <a:ext cx="5358384" cy="1938528"/>
           </a:xfrm>
           <a:prstGeom prst="roundRect">
             <a:avLst>
@@ -5867,153 +5518,140 @@
       </p:sp>
       <p:sp>
         <p:nvSpPr>
-          <p:cNvPr id="10" name="Rounded Rectangle 9"/>
+          <p:cNvPr id="9" name="TextBox 8"/>
+          <p:cNvSpPr txBox="1"/>
+          <p:nvPr/>
+        </p:nvSpPr>
+        <p:spPr>
+          <a:xfrm>
+            <a:off x="6483096" y="1856232"/>
+            <a:ext cx="4855464" cy="292608"/>
+          </a:xfrm>
+          <a:prstGeom prst="rect">
+            <a:avLst/>
+          </a:prstGeom>
+          <a:noFill/>
+        </p:spPr>
+        <p:txBody>
+          <a:bodyPr wrap="square" anchor="t" lIns="0" rIns="0" tIns="0" bIns="0">
+            <a:spAutoFit/>
+          </a:bodyPr>
+          <a:lstStyle/>
+          <a:p>
+            <a:pPr algn="l">
+              <a:lnSpc>
+                <a:spcPct val="100000"/>
+              </a:lnSpc>
+              <a:spcAft>
+                <a:spcPts val="0"/>
+              </a:spcAft>
+            </a:pPr>
+            <a:r>
+              <a:rPr sz="1100" b="1" i="0">
+                <a:solidFill>
+                  <a:srgbClr val="EAF0F8"/>
+                </a:solidFill>
+                <a:latin typeface="Arial"/>
+              </a:rPr>
+              <a:t>2 · THE STABILIZER · IF THE PRICE HOLDS</a:t>
+            </a:r>
+          </a:p>
+        </p:txBody>
+      </p:sp>
+      <p:sp>
+        <p:nvSpPr>
+          <p:cNvPr id="10" name="TextBox 9"/>
+          <p:cNvSpPr txBox="1"/>
+          <p:nvPr/>
+        </p:nvSpPr>
+        <p:spPr>
+          <a:xfrm>
+            <a:off x="6483096" y="2148840"/>
+            <a:ext cx="4855464" cy="365760"/>
+          </a:xfrm>
+          <a:prstGeom prst="rect">
+            <a:avLst/>
+          </a:prstGeom>
+          <a:noFill/>
+        </p:spPr>
+        <p:txBody>
+          <a:bodyPr wrap="square" anchor="t" lIns="0" rIns="0" tIns="0" bIns="0">
+            <a:spAutoFit/>
+          </a:bodyPr>
+          <a:lstStyle/>
+          <a:p>
+            <a:pPr algn="l">
+              <a:lnSpc>
+                <a:spcPct val="100000"/>
+              </a:lnSpc>
+              <a:spcAft>
+                <a:spcPts val="0"/>
+              </a:spcAft>
+            </a:pPr>
+            <a:r>
+              <a:rPr sz="1650" b="1" i="0">
+                <a:solidFill>
+                  <a:srgbClr val="EAF0F8"/>
+                </a:solidFill>
+                <a:latin typeface="Arial"/>
+              </a:rPr>
+              <a:t>2B Luis Arraez (SFG)</a:t>
+            </a:r>
+          </a:p>
+        </p:txBody>
+      </p:sp>
+      <p:sp>
+        <p:nvSpPr>
+          <p:cNvPr id="11" name="TextBox 10"/>
+          <p:cNvSpPr txBox="1"/>
+          <p:nvPr/>
+        </p:nvSpPr>
+        <p:spPr>
+          <a:xfrm>
+            <a:off x="6483096" y="2560320"/>
+            <a:ext cx="4855464" cy="960120"/>
+          </a:xfrm>
+          <a:prstGeom prst="rect">
+            <a:avLst/>
+          </a:prstGeom>
+          <a:noFill/>
+        </p:spPr>
+        <p:txBody>
+          <a:bodyPr wrap="square" anchor="t" lIns="0" rIns="0" tIns="0" bIns="0">
+            <a:spAutoFit/>
+          </a:bodyPr>
+          <a:lstStyle/>
+          <a:p>
+            <a:pPr algn="l">
+              <a:lnSpc>
+                <a:spcPct val="110000"/>
+              </a:lnSpc>
+              <a:spcAft>
+                <a:spcPts val="400"/>
+              </a:spcAft>
+            </a:pPr>
+            <a:r>
+              <a:rPr sz="1160" b="0" i="0">
+                <a:solidFill>
+                  <a:srgbClr val="93A0B6"/>
+                </a:solidFill>
+                <a:latin typeface="Arial"/>
+              </a:rPr>
+              <a:t>For Brayan Bello — the first deal that touches the active roster. Zero prospect cost; Arraez fills a patchwork platoon spot, not a hot regular's.</a:t>
+            </a:r>
+          </a:p>
+        </p:txBody>
+      </p:sp>
+      <p:sp>
+        <p:nvSpPr>
+          <p:cNvPr id="12" name="Rounded Rectangle 11"/>
           <p:cNvSpPr/>
           <p:nvPr/>
         </p:nvSpPr>
         <p:spPr>
           <a:xfrm>
-            <a:off x="4626864" y="2724912"/>
-            <a:ext cx="384048" cy="384048"/>
-          </a:xfrm>
-          <a:prstGeom prst="roundRect">
-            <a:avLst>
-              <a:gd name="adj" fmla="val 18000"/>
-            </a:avLst>
-          </a:prstGeom>
-          <a:solidFill>
-            <a:srgbClr val="EAF0F8"/>
-          </a:solidFill>
-          <a:ln>
-            <a:noFill/>
-          </a:ln>
-          <a:effectLst/>
-        </p:spPr>
-        <p:style>
-          <a:lnRef idx="1">
-            <a:schemeClr val="accent1"/>
-          </a:lnRef>
-          <a:fillRef idx="3">
-            <a:schemeClr val="accent1"/>
-          </a:fillRef>
-          <a:effectRef idx="2">
-            <a:schemeClr val="accent1"/>
-          </a:effectRef>
-          <a:fontRef idx="minor">
-            <a:schemeClr val="lt1"/>
-          </a:fontRef>
-        </p:style>
-        <p:txBody>
-          <a:bodyPr rtlCol="0" anchor="ctr" wrap="none"/>
-          <a:lstStyle/>
-          <a:p>
-            <a:pPr algn="ctr"/>
-            <a:r>
-              <a:rPr sz="1600" b="1">
-                <a:solidFill>
-                  <a:srgbClr val="0B1220"/>
-                </a:solidFill>
-                <a:latin typeface="Courier New"/>
-              </a:rPr>
-              <a:t>2</a:t>
-            </a:r>
-          </a:p>
-        </p:txBody>
-      </p:sp>
-      <p:sp>
-        <p:nvSpPr>
-          <p:cNvPr id="11" name="TextBox 10"/>
-          <p:cNvSpPr txBox="1"/>
-          <p:nvPr/>
-        </p:nvSpPr>
-        <p:spPr>
-          <a:xfrm>
-            <a:off x="4626864" y="3310128"/>
-            <a:ext cx="2999232" cy="411480"/>
-          </a:xfrm>
-          <a:prstGeom prst="rect">
-            <a:avLst/>
-          </a:prstGeom>
-          <a:noFill/>
-        </p:spPr>
-        <p:txBody>
-          <a:bodyPr wrap="square" anchor="t" lIns="0" rIns="0" tIns="0" bIns="0">
-            <a:spAutoFit/>
-          </a:bodyPr>
-          <a:lstStyle/>
-          <a:p>
-            <a:pPr algn="l">
-              <a:lnSpc>
-                <a:spcPct val="100000"/>
-              </a:lnSpc>
-              <a:spcAft>
-                <a:spcPts val="0"/>
-              </a:spcAft>
-            </a:pPr>
-            <a:r>
-              <a:rPr sz="1600" b="1" i="0">
-                <a:solidFill>
-                  <a:srgbClr val="EAF0F8"/>
-                </a:solidFill>
-                <a:latin typeface="Arial"/>
-              </a:rPr>
-              <a:t>Best talent / upside</a:t>
-            </a:r>
-          </a:p>
-        </p:txBody>
-      </p:sp>
-      <p:sp>
-        <p:nvSpPr>
-          <p:cNvPr id="12" name="TextBox 11"/>
-          <p:cNvSpPr txBox="1"/>
-          <p:nvPr/>
-        </p:nvSpPr>
-        <p:spPr>
-          <a:xfrm>
-            <a:off x="4626864" y="3767328"/>
-            <a:ext cx="2999232" cy="1097280"/>
-          </a:xfrm>
-          <a:prstGeom prst="rect">
-            <a:avLst/>
-          </a:prstGeom>
-          <a:noFill/>
-        </p:spPr>
-        <p:txBody>
-          <a:bodyPr wrap="square" anchor="t" lIns="0" rIns="0" tIns="0" bIns="0">
-            <a:spAutoFit/>
-          </a:bodyPr>
-          <a:lstStyle/>
-          <a:p>
-            <a:pPr algn="l">
-              <a:lnSpc>
-                <a:spcPct val="110000"/>
-              </a:lnSpc>
-              <a:spcAft>
-                <a:spcPts val="400"/>
-              </a:spcAft>
-            </a:pPr>
-            <a:r>
-              <a:rPr sz="1280" b="0" i="0">
-                <a:solidFill>
-                  <a:srgbClr val="93A0B6"/>
-                </a:solidFill>
-                <a:latin typeface="Arial"/>
-              </a:rPr>
-              <a:t>In a retool you take the best player, not the positional patch — prospects and MLB-ready youth over rentals.</a:t>
-            </a:r>
-          </a:p>
-        </p:txBody>
-      </p:sp>
-      <p:sp>
-        <p:nvSpPr>
-          <p:cNvPr id="13" name="Rounded Rectangle 12"/>
-          <p:cNvSpPr/>
-          <p:nvPr/>
-        </p:nvSpPr>
-        <p:spPr>
-          <a:xfrm>
-            <a:off x="8138159" y="2468880"/>
-            <a:ext cx="3502152" cy="2514600"/>
+            <a:off x="566928" y="3886200"/>
+            <a:ext cx="5358384" cy="1938528"/>
           </a:xfrm>
           <a:prstGeom prst="roundRect">
             <a:avLst>
@@ -6054,25 +5692,153 @@
       </p:sp>
       <p:sp>
         <p:nvSpPr>
-          <p:cNvPr id="14" name="Rounded Rectangle 13"/>
+          <p:cNvPr id="13" name="TextBox 12"/>
+          <p:cNvSpPr txBox="1"/>
+          <p:nvPr/>
+        </p:nvSpPr>
+        <p:spPr>
+          <a:xfrm>
+            <a:off x="822960" y="4050791"/>
+            <a:ext cx="4855464" cy="292608"/>
+          </a:xfrm>
+          <a:prstGeom prst="rect">
+            <a:avLst/>
+          </a:prstGeom>
+          <a:noFill/>
+        </p:spPr>
+        <p:txBody>
+          <a:bodyPr wrap="square" anchor="t" lIns="0" rIns="0" tIns="0" bIns="0">
+            <a:spAutoFit/>
+          </a:bodyPr>
+          <a:lstStyle/>
+          <a:p>
+            <a:pPr algn="l">
+              <a:lnSpc>
+                <a:spcPct val="100000"/>
+              </a:lnSpc>
+              <a:spcAft>
+                <a:spcPts val="0"/>
+              </a:spcAft>
+            </a:pPr>
+            <a:r>
+              <a:rPr sz="1100" b="1" i="0">
+                <a:solidFill>
+                  <a:srgbClr val="E8615A"/>
+                </a:solidFill>
+                <a:latin typeface="Arial"/>
+              </a:rPr>
+              <a:t>3 · THE BIG SWING · PROBABLY WAIT</a:t>
+            </a:r>
+          </a:p>
+        </p:txBody>
+      </p:sp>
+      <p:sp>
+        <p:nvSpPr>
+          <p:cNvPr id="14" name="TextBox 13"/>
+          <p:cNvSpPr txBox="1"/>
+          <p:nvPr/>
+        </p:nvSpPr>
+        <p:spPr>
+          <a:xfrm>
+            <a:off x="822960" y="4343400"/>
+            <a:ext cx="4855464" cy="365760"/>
+          </a:xfrm>
+          <a:prstGeom prst="rect">
+            <a:avLst/>
+          </a:prstGeom>
+          <a:noFill/>
+        </p:spPr>
+        <p:txBody>
+          <a:bodyPr wrap="square" anchor="t" lIns="0" rIns="0" tIns="0" bIns="0">
+            <a:spAutoFit/>
+          </a:bodyPr>
+          <a:lstStyle/>
+          <a:p>
+            <a:pPr algn="l">
+              <a:lnSpc>
+                <a:spcPct val="100000"/>
+              </a:lnSpc>
+              <a:spcAft>
+                <a:spcPts val="0"/>
+              </a:spcAft>
+            </a:pPr>
+            <a:r>
+              <a:rPr sz="1650" b="1" i="0">
+                <a:solidFill>
+                  <a:srgbClr val="EAF0F8"/>
+                </a:solidFill>
+                <a:latin typeface="Arial"/>
+              </a:rPr>
+              <a:t>SS Zach Neto (LAA)</a:t>
+            </a:r>
+          </a:p>
+        </p:txBody>
+      </p:sp>
+      <p:sp>
+        <p:nvSpPr>
+          <p:cNvPr id="15" name="TextBox 14"/>
+          <p:cNvSpPr txBox="1"/>
+          <p:nvPr/>
+        </p:nvSpPr>
+        <p:spPr>
+          <a:xfrm>
+            <a:off x="822960" y="4754880"/>
+            <a:ext cx="4855464" cy="960120"/>
+          </a:xfrm>
+          <a:prstGeom prst="rect">
+            <a:avLst/>
+          </a:prstGeom>
+          <a:noFill/>
+        </p:spPr>
+        <p:txBody>
+          <a:bodyPr wrap="square" anchor="t" lIns="0" rIns="0" tIns="0" bIns="0">
+            <a:spAutoFit/>
+          </a:bodyPr>
+          <a:lstStyle/>
+          <a:p>
+            <a:pPr algn="l">
+              <a:lnSpc>
+                <a:spcPct val="110000"/>
+              </a:lnSpc>
+              <a:spcAft>
+                <a:spcPts val="400"/>
+              </a:spcAft>
+            </a:pPr>
+            <a:r>
+              <a:rPr sz="1160" b="0" i="0">
+                <a:solidFill>
+                  <a:srgbClr val="93A0B6"/>
+                </a:solidFill>
+                <a:latin typeface="Arial"/>
+              </a:rPr>
+              <a:t>For Tolle + Early + a 45 FV: two arms out of a winning rotation mid-streak. Franchise-window correct — and still there in the winter. Controlled through 2029.</a:t>
+            </a:r>
+          </a:p>
+        </p:txBody>
+      </p:sp>
+      <p:sp>
+        <p:nvSpPr>
+          <p:cNvPr id="16" name="Rounded Rectangle 15"/>
           <p:cNvSpPr/>
           <p:nvPr/>
         </p:nvSpPr>
         <p:spPr>
           <a:xfrm>
-            <a:off x="8412480" y="2724912"/>
-            <a:ext cx="384048" cy="384048"/>
+            <a:off x="6227064" y="3886200"/>
+            <a:ext cx="5358384" cy="1938528"/>
           </a:xfrm>
           <a:prstGeom prst="roundRect">
             <a:avLst>
-              <a:gd name="adj" fmla="val 18000"/>
+              <a:gd name="adj" fmla="val 6000"/>
             </a:avLst>
           </a:prstGeom>
           <a:solidFill>
-            <a:srgbClr val="E3B14E"/>
+            <a:srgbClr val="121E33"/>
           </a:solidFill>
-          <a:ln>
-            <a:noFill/>
+          <a:ln w="12700">
+            <a:solidFill>
+              <a:srgbClr val="26334E"/>
+            </a:solidFill>
           </a:ln>
           <a:effectLst/>
         </p:spPr>
@@ -6091,32 +5857,23 @@
           </a:fontRef>
         </p:style>
         <p:txBody>
-          <a:bodyPr rtlCol="0" anchor="ctr" wrap="none"/>
+          <a:bodyPr rtlCol="0" anchor="ctr"/>
           <a:lstStyle/>
           <a:p>
             <a:pPr algn="ctr"/>
-            <a:r>
-              <a:rPr sz="1600" b="1">
-                <a:solidFill>
-                  <a:srgbClr val="0B1220"/>
-                </a:solidFill>
-                <a:latin typeface="Courier New"/>
-              </a:rPr>
-              <a:t>3</a:t>
-            </a:r>
-          </a:p>
-        </p:txBody>
-      </p:sp>
-      <p:sp>
-        <p:nvSpPr>
-          <p:cNvPr id="15" name="TextBox 14"/>
-          <p:cNvSpPr txBox="1"/>
-          <p:nvPr/>
-        </p:nvSpPr>
-        <p:spPr>
-          <a:xfrm>
-            <a:off x="8412480" y="3310128"/>
-            <a:ext cx="2999232" cy="411480"/>
+          </a:p>
+        </p:txBody>
+      </p:sp>
+      <p:sp>
+        <p:nvSpPr>
+          <p:cNvPr id="17" name="TextBox 16"/>
+          <p:cNvSpPr txBox="1"/>
+          <p:nvPr/>
+        </p:nvSpPr>
+        <p:spPr>
+          <a:xfrm>
+            <a:off x="6483096" y="4050791"/>
+            <a:ext cx="4855464" cy="292608"/>
           </a:xfrm>
           <a:prstGeom prst="rect">
             <a:avLst/>
@@ -6138,27 +5895,69 @@
               </a:spcAft>
             </a:pPr>
             <a:r>
-              <a:rPr sz="1600" b="1" i="0">
+              <a:rPr sz="1100" b="1" i="0">
+                <a:solidFill>
+                  <a:srgbClr val="E3B14E"/>
+                </a:solidFill>
+                <a:latin typeface="Arial"/>
+              </a:rPr>
+              <a:t>✗ · THE WALK-AWAY</a:t>
+            </a:r>
+          </a:p>
+        </p:txBody>
+      </p:sp>
+      <p:sp>
+        <p:nvSpPr>
+          <p:cNvPr id="18" name="TextBox 17"/>
+          <p:cNvSpPr txBox="1"/>
+          <p:nvPr/>
+        </p:nvSpPr>
+        <p:spPr>
+          <a:xfrm>
+            <a:off x="6483096" y="4343400"/>
+            <a:ext cx="4855464" cy="365760"/>
+          </a:xfrm>
+          <a:prstGeom prst="rect">
+            <a:avLst/>
+          </a:prstGeom>
+          <a:noFill/>
+        </p:spPr>
+        <p:txBody>
+          <a:bodyPr wrap="square" anchor="t" lIns="0" rIns="0" tIns="0" bIns="0">
+            <a:spAutoFit/>
+          </a:bodyPr>
+          <a:lstStyle/>
+          <a:p>
+            <a:pPr algn="l">
+              <a:lnSpc>
+                <a:spcPct val="100000"/>
+              </a:lnSpc>
+              <a:spcAft>
+                <a:spcPts val="0"/>
+              </a:spcAft>
+            </a:pPr>
+            <a:r>
+              <a:rPr sz="1650" b="1" i="0">
                 <a:solidFill>
                   <a:srgbClr val="EAF0F8"/>
                 </a:solidFill>
                 <a:latin typeface="Arial"/>
               </a:rPr>
-              <a:t>Salary relief</a:t>
-            </a:r>
-          </a:p>
-        </p:txBody>
-      </p:sp>
-      <p:sp>
-        <p:nvSpPr>
-          <p:cNvPr id="16" name="TextBox 15"/>
-          <p:cNvSpPr txBox="1"/>
-          <p:nvPr/>
-        </p:nvSpPr>
-        <p:spPr>
-          <a:xfrm>
-            <a:off x="8412480" y="3767328"/>
-            <a:ext cx="2999232" cy="1097280"/>
+              <a:t>C Shea Langeliers (ATH)</a:t>
+            </a:r>
+          </a:p>
+        </p:txBody>
+      </p:sp>
+      <p:sp>
+        <p:nvSpPr>
+          <p:cNvPr id="19" name="TextBox 18"/>
+          <p:cNvSpPr txBox="1"/>
+          <p:nvPr/>
+        </p:nvSpPr>
+        <p:spPr>
+          <a:xfrm>
+            <a:off x="6483096" y="4754880"/>
+            <a:ext cx="4855464" cy="960120"/>
           </a:xfrm>
           <a:prstGeom prst="rect">
             <a:avLst/>
@@ -6180,26 +5979,26 @@
               </a:spcAft>
             </a:pPr>
             <a:r>
-              <a:rPr sz="1280" b="0" i="0">
+              <a:rPr sz="1160" b="0" i="0">
                 <a:solidFill>
                   <a:srgbClr val="93A0B6"/>
                 </a:solidFill>
                 <a:latin typeface="Arial"/>
               </a:rPr>
-              <a:t>Attach Yoshida money where possible; free payroll for the 2027 window.</a:t>
-            </a:r>
-          </a:p>
-        </p:txBody>
-      </p:sp>
-      <p:sp>
-        <p:nvSpPr>
-          <p:cNvPr id="17" name="TextBox 16"/>
-          <p:cNvSpPr txBox="1"/>
-          <p:nvPr/>
-        </p:nvSpPr>
-        <p:spPr>
-          <a:xfrm>
-            <a:off x="566928" y="5257800"/>
+              <a:t>The value math worked; the battery map is the veto. No August bat is worth resetting eight pitcher-catcher pairings in the middle of a streak built on run prevention.</a:t>
+            </a:r>
+          </a:p>
+        </p:txBody>
+      </p:sp>
+      <p:sp>
+        <p:nvSpPr>
+          <p:cNvPr id="20" name="TextBox 19"/>
+          <p:cNvSpPr txBox="1"/>
+          <p:nvPr/>
+        </p:nvSpPr>
+        <p:spPr>
+          <a:xfrm>
+            <a:off x="566928" y="5897880"/>
             <a:ext cx="11064240" cy="457200"/>
           </a:xfrm>
           <a:prstGeom prst="rect">
@@ -6222,29 +6021,29 @@
               </a:spcAft>
             </a:pPr>
             <a:r>
-              <a:rPr sz="1400" b="1" i="1">
-                <a:solidFill>
-                  <a:srgbClr val="EAF0F8"/>
-                </a:solidFill>
-                <a:latin typeface="Arial"/>
-              </a:rPr>
-              <a:t>Keep the arms. Cash the outfield. </a:t>
-            </a:r>
-            <a:r>
-              <a:rPr sz="1400" b="0" i="1">
+              <a:rPr sz="1250" b="1" i="0">
+                <a:solidFill>
+                  <a:srgbClr val="D9E1EF"/>
+                </a:solidFill>
+                <a:latin typeface="Arial"/>
+              </a:rPr>
+              <a:t>A menu, not a plan — Boston can afford about two. </a:t>
+            </a:r>
+            <a:r>
+              <a:rPr sz="1250" b="0" i="0">
                 <a:solidFill>
                   <a:srgbClr val="93A0B6"/>
                 </a:solidFill>
                 <a:latin typeface="Arial"/>
               </a:rPr>
-              <a:t>Build the 2027 lineup, don't rent the 2026 one.</a:t>
-            </a:r>
-          </a:p>
-        </p:txBody>
-      </p:sp>
-      <p:sp>
-        <p:nvSpPr>
-          <p:cNvPr id="18" name="TextBox 17"/>
+              <a:t>Full value math and verified contracts in the mock-trades memo. Hypotheticals, not reporting.</a:t>
+            </a:r>
+          </a:p>
+        </p:txBody>
+      </p:sp>
+      <p:sp>
+        <p:nvSpPr>
+          <p:cNvPr id="21" name="TextBox 20"/>
           <p:cNvSpPr txBox="1"/>
           <p:nvPr/>
         </p:nvSpPr>
@@ -6356,7 +6155,7 @@
                 </a:solidFill>
                 <a:latin typeface="Courier New"/>
               </a:rPr>
-              <a:t>// THE MARKET</a:t>
+              <a:t>// THE WINTER PLAN</a:t>
             </a:r>
           </a:p>
         </p:txBody>
@@ -6398,74 +6197,98 @@
                 </a:solidFill>
                 <a:latin typeface="Arial"/>
               </a:rPr>
-              <a:t>Who pays: contenders with a hole in the outfield</a:t>
-            </a:r>
-          </a:p>
-        </p:txBody>
-      </p:sp>
-      <p:pic>
-        <p:nvPicPr>
-          <p:cNvPr id="4" name="Picture 3" descr="08_trade_fit_targets.png"/>
-          <p:cNvPicPr>
-            <a:picLocks noChangeAspect="1"/>
-          </p:cNvPicPr>
-          <p:nvPr/>
-        </p:nvPicPr>
-        <p:blipFill>
-          <a:blip r:embed="rId2"/>
-          <a:stretch>
-            <a:fillRect/>
-          </a:stretch>
-        </p:blipFill>
-        <p:spPr>
-          <a:xfrm>
-            <a:off x="757237" y="1463040"/>
-            <a:ext cx="6715125" cy="4297680"/>
-          </a:xfrm>
-          <a:prstGeom prst="rect">
-            <a:avLst/>
-          </a:prstGeom>
-        </p:spPr>
-      </p:pic>
-      <p:sp>
-        <p:nvSpPr>
-          <p:cNvPr id="5" name="TextBox 4"/>
-          <p:cNvSpPr txBox="1"/>
-          <p:nvPr/>
-        </p:nvSpPr>
-        <p:spPr>
-          <a:xfrm>
-            <a:off x="8183879" y="1691640"/>
-            <a:ext cx="3657600" cy="457200"/>
-          </a:xfrm>
-          <a:prstGeom prst="rect">
-            <a:avLst/>
-          </a:prstGeom>
-          <a:noFill/>
-        </p:spPr>
-        <p:txBody>
-          <a:bodyPr wrap="square" anchor="t" lIns="0" rIns="0" tIns="0" bIns="0">
-            <a:spAutoFit/>
-          </a:bodyPr>
-          <a:lstStyle/>
-          <a:p>
-            <a:pPr algn="l">
-              <a:lnSpc>
-                <a:spcPct val="100000"/>
-              </a:lnSpc>
-              <a:spcAft>
-                <a:spcPts val="0"/>
-              </a:spcAft>
-            </a:pPr>
-            <a:r>
-              <a:rPr sz="1500" b="1" i="0">
-                <a:solidFill>
-                  <a:srgbClr val="EAF0F8"/>
-                </a:solidFill>
-                <a:latin typeface="Arial"/>
-              </a:rPr>
-              <a:t>Best-fit buyers</a:t>
-            </a:r>
+              <a:t>Pitching is the strength — spend the surplus on offense</a:t>
+            </a:r>
+          </a:p>
+        </p:txBody>
+      </p:sp>
+      <p:sp>
+        <p:nvSpPr>
+          <p:cNvPr id="4" name="TextBox 3"/>
+          <p:cNvSpPr txBox="1"/>
+          <p:nvPr/>
+        </p:nvSpPr>
+        <p:spPr>
+          <a:xfrm>
+            <a:off x="566928" y="1572768"/>
+            <a:ext cx="11064240" cy="640080"/>
+          </a:xfrm>
+          <a:prstGeom prst="rect">
+            <a:avLst/>
+          </a:prstGeom>
+          <a:noFill/>
+        </p:spPr>
+        <p:txBody>
+          <a:bodyPr wrap="square" anchor="t" lIns="0" rIns="0" tIns="0" bIns="0">
+            <a:spAutoFit/>
+          </a:bodyPr>
+          <a:lstStyle/>
+          <a:p>
+            <a:pPr algn="l">
+              <a:lnSpc>
+                <a:spcPct val="112000"/>
+              </a:lnSpc>
+              <a:spcAft>
+                <a:spcPts val="400"/>
+              </a:spcAft>
+            </a:pPr>
+            <a:r>
+              <a:rPr sz="1450" b="0" i="0">
+                <a:solidFill>
+                  <a:srgbClr val="D9E1EF"/>
+                </a:solidFill>
+                <a:latin typeface="Arial"/>
+              </a:rPr>
+              <a:t>If winter comes and Duran's rebound has shown up, this is what a deal should return. With a top-6 rotation (3.65 ERA) carrying the club, trading bats for arms is backwards — convert the outfield surplus into what's thin:</a:t>
+            </a:r>
+          </a:p>
+        </p:txBody>
+      </p:sp>
+      <p:sp>
+        <p:nvSpPr>
+          <p:cNvPr id="5" name="Rounded Rectangle 4"/>
+          <p:cNvSpPr/>
+          <p:nvPr/>
+        </p:nvSpPr>
+        <p:spPr>
+          <a:xfrm>
+            <a:off x="566928" y="2468880"/>
+            <a:ext cx="3502152" cy="2514600"/>
+          </a:xfrm>
+          <a:prstGeom prst="roundRect">
+            <a:avLst>
+              <a:gd name="adj" fmla="val 6000"/>
+            </a:avLst>
+          </a:prstGeom>
+          <a:solidFill>
+            <a:srgbClr val="121E33"/>
+          </a:solidFill>
+          <a:ln w="12700">
+            <a:solidFill>
+              <a:srgbClr val="26334E"/>
+            </a:solidFill>
+          </a:ln>
+          <a:effectLst/>
+        </p:spPr>
+        <p:style>
+          <a:lnRef idx="1">
+            <a:schemeClr val="accent1"/>
+          </a:lnRef>
+          <a:fillRef idx="3">
+            <a:schemeClr val="accent1"/>
+          </a:fillRef>
+          <a:effectRef idx="2">
+            <a:schemeClr val="accent1"/>
+          </a:effectRef>
+          <a:fontRef idx="minor">
+            <a:schemeClr val="lt1"/>
+          </a:fontRef>
+        </p:style>
+        <p:txBody>
+          <a:bodyPr rtlCol="0" anchor="ctr"/>
+          <a:lstStyle/>
+          <a:p>
+            <a:pPr algn="ctr"/>
           </a:p>
         </p:txBody>
       </p:sp>
@@ -6477,8 +6300,8 @@
         </p:nvSpPr>
         <p:spPr>
           <a:xfrm>
-            <a:off x="8183879" y="2221991"/>
-            <a:ext cx="128016" cy="128016"/>
+            <a:off x="841247" y="2724912"/>
+            <a:ext cx="384048" cy="384048"/>
           </a:xfrm>
           <a:prstGeom prst="roundRect">
             <a:avLst>
@@ -6486,7 +6309,7 @@
             </a:avLst>
           </a:prstGeom>
           <a:solidFill>
-            <a:srgbClr val="E8615A"/>
+            <a:srgbClr val="58C08D"/>
           </a:solidFill>
           <a:ln>
             <a:noFill/>
@@ -6508,6 +6331,147 @@
           </a:fontRef>
         </p:style>
         <p:txBody>
+          <a:bodyPr rtlCol="0" anchor="ctr" wrap="none"/>
+          <a:lstStyle/>
+          <a:p>
+            <a:pPr algn="ctr"/>
+            <a:r>
+              <a:rPr sz="1600" b="1">
+                <a:solidFill>
+                  <a:srgbClr val="0B1220"/>
+                </a:solidFill>
+                <a:latin typeface="Courier New"/>
+              </a:rPr>
+              <a:t>1</a:t>
+            </a:r>
+          </a:p>
+        </p:txBody>
+      </p:sp>
+      <p:sp>
+        <p:nvSpPr>
+          <p:cNvPr id="7" name="TextBox 6"/>
+          <p:cNvSpPr txBox="1"/>
+          <p:nvPr/>
+        </p:nvSpPr>
+        <p:spPr>
+          <a:xfrm>
+            <a:off x="841247" y="3310128"/>
+            <a:ext cx="2999232" cy="411480"/>
+          </a:xfrm>
+          <a:prstGeom prst="rect">
+            <a:avLst/>
+          </a:prstGeom>
+          <a:noFill/>
+        </p:spPr>
+        <p:txBody>
+          <a:bodyPr wrap="square" anchor="t" lIns="0" rIns="0" tIns="0" bIns="0">
+            <a:spAutoFit/>
+          </a:bodyPr>
+          <a:lstStyle/>
+          <a:p>
+            <a:pPr algn="l">
+              <a:lnSpc>
+                <a:spcPct val="100000"/>
+              </a:lnSpc>
+              <a:spcAft>
+                <a:spcPts val="0"/>
+              </a:spcAft>
+            </a:pPr>
+            <a:r>
+              <a:rPr sz="1600" b="1" i="0">
+                <a:solidFill>
+                  <a:srgbClr val="EAF0F8"/>
+                </a:solidFill>
+                <a:latin typeface="Arial"/>
+              </a:rPr>
+              <a:t>Controllable bats</a:t>
+            </a:r>
+          </a:p>
+        </p:txBody>
+      </p:sp>
+      <p:sp>
+        <p:nvSpPr>
+          <p:cNvPr id="8" name="TextBox 7"/>
+          <p:cNvSpPr txBox="1"/>
+          <p:nvPr/>
+        </p:nvSpPr>
+        <p:spPr>
+          <a:xfrm>
+            <a:off x="841247" y="3767328"/>
+            <a:ext cx="2999232" cy="1097280"/>
+          </a:xfrm>
+          <a:prstGeom prst="rect">
+            <a:avLst/>
+          </a:prstGeom>
+          <a:noFill/>
+        </p:spPr>
+        <p:txBody>
+          <a:bodyPr wrap="square" anchor="t" lIns="0" rIns="0" tIns="0" bIns="0">
+            <a:spAutoFit/>
+          </a:bodyPr>
+          <a:lstStyle/>
+          <a:p>
+            <a:pPr algn="l">
+              <a:lnSpc>
+                <a:spcPct val="110000"/>
+              </a:lnSpc>
+              <a:spcAft>
+                <a:spcPts val="400"/>
+              </a:spcAft>
+            </a:pPr>
+            <a:r>
+              <a:rPr sz="1280" b="0" i="0">
+                <a:solidFill>
+                  <a:srgbClr val="93A0B6"/>
+                </a:solidFill>
+                <a:latin typeface="Arial"/>
+              </a:rPr>
+              <a:t>Young, cost-controlled position players to fix an inconsistent lineup and lengthen it around the core.</a:t>
+            </a:r>
+          </a:p>
+        </p:txBody>
+      </p:sp>
+      <p:sp>
+        <p:nvSpPr>
+          <p:cNvPr id="9" name="Rounded Rectangle 8"/>
+          <p:cNvSpPr/>
+          <p:nvPr/>
+        </p:nvSpPr>
+        <p:spPr>
+          <a:xfrm>
+            <a:off x="4352544" y="2468880"/>
+            <a:ext cx="3502152" cy="2514600"/>
+          </a:xfrm>
+          <a:prstGeom prst="roundRect">
+            <a:avLst>
+              <a:gd name="adj" fmla="val 6000"/>
+            </a:avLst>
+          </a:prstGeom>
+          <a:solidFill>
+            <a:srgbClr val="121E33"/>
+          </a:solidFill>
+          <a:ln w="12700">
+            <a:solidFill>
+              <a:srgbClr val="26334E"/>
+            </a:solidFill>
+          </a:ln>
+          <a:effectLst/>
+        </p:spPr>
+        <p:style>
+          <a:lnRef idx="1">
+            <a:schemeClr val="accent1"/>
+          </a:lnRef>
+          <a:fillRef idx="3">
+            <a:schemeClr val="accent1"/>
+          </a:fillRef>
+          <a:effectRef idx="2">
+            <a:schemeClr val="accent1"/>
+          </a:effectRef>
+          <a:fontRef idx="minor">
+            <a:schemeClr val="lt1"/>
+          </a:fontRef>
+        </p:style>
+        <p:txBody>
           <a:bodyPr rtlCol="0" anchor="ctr"/>
           <a:lstStyle/>
           <a:p>
@@ -6517,65 +6481,14 @@
       </p:sp>
       <p:sp>
         <p:nvSpPr>
-          <p:cNvPr id="7" name="TextBox 6"/>
-          <p:cNvSpPr txBox="1"/>
-          <p:nvPr/>
-        </p:nvSpPr>
-        <p:spPr>
-          <a:xfrm>
-            <a:off x="8439911" y="2194560"/>
-            <a:ext cx="3566160" cy="457200"/>
-          </a:xfrm>
-          <a:prstGeom prst="rect">
-            <a:avLst/>
-          </a:prstGeom>
-          <a:noFill/>
-        </p:spPr>
-        <p:txBody>
-          <a:bodyPr wrap="square" anchor="t" lIns="0" rIns="0" tIns="0" bIns="0">
-            <a:spAutoFit/>
-          </a:bodyPr>
-          <a:lstStyle/>
-          <a:p>
-            <a:pPr algn="l">
-              <a:lnSpc>
-                <a:spcPct val="100000"/>
-              </a:lnSpc>
-              <a:spcAft>
-                <a:spcPts val="0"/>
-              </a:spcAft>
-            </a:pPr>
-            <a:r>
-              <a:rPr sz="1400" b="1" i="0">
-                <a:solidFill>
-                  <a:srgbClr val="EAF0F8"/>
-                </a:solidFill>
-                <a:latin typeface="Arial"/>
-              </a:rPr>
-              <a:t>Phillies  </a:t>
-            </a:r>
-            <a:r>
-              <a:rPr sz="1200" b="0" i="0">
-                <a:solidFill>
-                  <a:srgbClr val="93A0B6"/>
-                </a:solidFill>
-                <a:latin typeface="Arial"/>
-              </a:rPr>
-              <a:t>.557, 84 OF wRC+</a:t>
-            </a:r>
-          </a:p>
-        </p:txBody>
-      </p:sp>
-      <p:sp>
-        <p:nvSpPr>
-          <p:cNvPr id="8" name="Rounded Rectangle 7"/>
+          <p:cNvPr id="10" name="Rounded Rectangle 9"/>
           <p:cNvSpPr/>
           <p:nvPr/>
         </p:nvSpPr>
         <p:spPr>
           <a:xfrm>
-            <a:off x="8183879" y="2788920"/>
-            <a:ext cx="128016" cy="128016"/>
+            <a:off x="4626864" y="2724912"/>
+            <a:ext cx="384048" cy="384048"/>
           </a:xfrm>
           <a:prstGeom prst="roundRect">
             <a:avLst>
@@ -6583,7 +6496,7 @@
             </a:avLst>
           </a:prstGeom>
           <a:solidFill>
-            <a:srgbClr val="E8615A"/>
+            <a:srgbClr val="EAF0F8"/>
           </a:solidFill>
           <a:ln>
             <a:noFill/>
@@ -6605,6 +6518,147 @@
           </a:fontRef>
         </p:style>
         <p:txBody>
+          <a:bodyPr rtlCol="0" anchor="ctr" wrap="none"/>
+          <a:lstStyle/>
+          <a:p>
+            <a:pPr algn="ctr"/>
+            <a:r>
+              <a:rPr sz="1600" b="1">
+                <a:solidFill>
+                  <a:srgbClr val="0B1220"/>
+                </a:solidFill>
+                <a:latin typeface="Courier New"/>
+              </a:rPr>
+              <a:t>2</a:t>
+            </a:r>
+          </a:p>
+        </p:txBody>
+      </p:sp>
+      <p:sp>
+        <p:nvSpPr>
+          <p:cNvPr id="11" name="TextBox 10"/>
+          <p:cNvSpPr txBox="1"/>
+          <p:nvPr/>
+        </p:nvSpPr>
+        <p:spPr>
+          <a:xfrm>
+            <a:off x="4626864" y="3310128"/>
+            <a:ext cx="2999232" cy="411480"/>
+          </a:xfrm>
+          <a:prstGeom prst="rect">
+            <a:avLst/>
+          </a:prstGeom>
+          <a:noFill/>
+        </p:spPr>
+        <p:txBody>
+          <a:bodyPr wrap="square" anchor="t" lIns="0" rIns="0" tIns="0" bIns="0">
+            <a:spAutoFit/>
+          </a:bodyPr>
+          <a:lstStyle/>
+          <a:p>
+            <a:pPr algn="l">
+              <a:lnSpc>
+                <a:spcPct val="100000"/>
+              </a:lnSpc>
+              <a:spcAft>
+                <a:spcPts val="0"/>
+              </a:spcAft>
+            </a:pPr>
+            <a:r>
+              <a:rPr sz="1600" b="1" i="0">
+                <a:solidFill>
+                  <a:srgbClr val="EAF0F8"/>
+                </a:solidFill>
+                <a:latin typeface="Arial"/>
+              </a:rPr>
+              <a:t>Best talent / upside</a:t>
+            </a:r>
+          </a:p>
+        </p:txBody>
+      </p:sp>
+      <p:sp>
+        <p:nvSpPr>
+          <p:cNvPr id="12" name="TextBox 11"/>
+          <p:cNvSpPr txBox="1"/>
+          <p:nvPr/>
+        </p:nvSpPr>
+        <p:spPr>
+          <a:xfrm>
+            <a:off x="4626864" y="3767328"/>
+            <a:ext cx="2999232" cy="1097280"/>
+          </a:xfrm>
+          <a:prstGeom prst="rect">
+            <a:avLst/>
+          </a:prstGeom>
+          <a:noFill/>
+        </p:spPr>
+        <p:txBody>
+          <a:bodyPr wrap="square" anchor="t" lIns="0" rIns="0" tIns="0" bIns="0">
+            <a:spAutoFit/>
+          </a:bodyPr>
+          <a:lstStyle/>
+          <a:p>
+            <a:pPr algn="l">
+              <a:lnSpc>
+                <a:spcPct val="110000"/>
+              </a:lnSpc>
+              <a:spcAft>
+                <a:spcPts val="400"/>
+              </a:spcAft>
+            </a:pPr>
+            <a:r>
+              <a:rPr sz="1280" b="0" i="0">
+                <a:solidFill>
+                  <a:srgbClr val="93A0B6"/>
+                </a:solidFill>
+                <a:latin typeface="Arial"/>
+              </a:rPr>
+              <a:t>In a retool you take the best player, not the positional patch — prospects and MLB-ready youth over rentals.</a:t>
+            </a:r>
+          </a:p>
+        </p:txBody>
+      </p:sp>
+      <p:sp>
+        <p:nvSpPr>
+          <p:cNvPr id="13" name="Rounded Rectangle 12"/>
+          <p:cNvSpPr/>
+          <p:nvPr/>
+        </p:nvSpPr>
+        <p:spPr>
+          <a:xfrm>
+            <a:off x="8138159" y="2468880"/>
+            <a:ext cx="3502152" cy="2514600"/>
+          </a:xfrm>
+          <a:prstGeom prst="roundRect">
+            <a:avLst>
+              <a:gd name="adj" fmla="val 6000"/>
+            </a:avLst>
+          </a:prstGeom>
+          <a:solidFill>
+            <a:srgbClr val="121E33"/>
+          </a:solidFill>
+          <a:ln w="12700">
+            <a:solidFill>
+              <a:srgbClr val="26334E"/>
+            </a:solidFill>
+          </a:ln>
+          <a:effectLst/>
+        </p:spPr>
+        <p:style>
+          <a:lnRef idx="1">
+            <a:schemeClr val="accent1"/>
+          </a:lnRef>
+          <a:fillRef idx="3">
+            <a:schemeClr val="accent1"/>
+          </a:fillRef>
+          <a:effectRef idx="2">
+            <a:schemeClr val="accent1"/>
+          </a:effectRef>
+          <a:fontRef idx="minor">
+            <a:schemeClr val="lt1"/>
+          </a:fontRef>
+        </p:style>
+        <p:txBody>
           <a:bodyPr rtlCol="0" anchor="ctr"/>
           <a:lstStyle/>
           <a:p>
@@ -6614,65 +6668,14 @@
       </p:sp>
       <p:sp>
         <p:nvSpPr>
-          <p:cNvPr id="9" name="TextBox 8"/>
-          <p:cNvSpPr txBox="1"/>
-          <p:nvPr/>
-        </p:nvSpPr>
-        <p:spPr>
-          <a:xfrm>
-            <a:off x="8439911" y="2761488"/>
-            <a:ext cx="3566160" cy="457200"/>
-          </a:xfrm>
-          <a:prstGeom prst="rect">
-            <a:avLst/>
-          </a:prstGeom>
-          <a:noFill/>
-        </p:spPr>
-        <p:txBody>
-          <a:bodyPr wrap="square" anchor="t" lIns="0" rIns="0" tIns="0" bIns="0">
-            <a:spAutoFit/>
-          </a:bodyPr>
-          <a:lstStyle/>
-          <a:p>
-            <a:pPr algn="l">
-              <a:lnSpc>
-                <a:spcPct val="100000"/>
-              </a:lnSpc>
-              <a:spcAft>
-                <a:spcPts val="0"/>
-              </a:spcAft>
-            </a:pPr>
-            <a:r>
-              <a:rPr sz="1400" b="1" i="0">
-                <a:solidFill>
-                  <a:srgbClr val="EAF0F8"/>
-                </a:solidFill>
-                <a:latin typeface="Arial"/>
-              </a:rPr>
-              <a:t>Rays  </a:t>
-            </a:r>
-            <a:r>
-              <a:rPr sz="1200" b="0" i="0">
-                <a:solidFill>
-                  <a:srgbClr val="93A0B6"/>
-                </a:solidFill>
-                <a:latin typeface="Arial"/>
-              </a:rPr>
-              <a:t>.596, 88 OF wRC+</a:t>
-            </a:r>
-          </a:p>
-        </p:txBody>
-      </p:sp>
-      <p:sp>
-        <p:nvSpPr>
-          <p:cNvPr id="10" name="Rounded Rectangle 9"/>
+          <p:cNvPr id="14" name="Rounded Rectangle 13"/>
           <p:cNvSpPr/>
           <p:nvPr/>
         </p:nvSpPr>
         <p:spPr>
           <a:xfrm>
-            <a:off x="8183879" y="3355847"/>
-            <a:ext cx="128016" cy="128016"/>
+            <a:off x="8412480" y="2724912"/>
+            <a:ext cx="384048" cy="384048"/>
           </a:xfrm>
           <a:prstGeom prst="roundRect">
             <a:avLst>
@@ -6680,7 +6683,7 @@
             </a:avLst>
           </a:prstGeom>
           <a:solidFill>
-            <a:srgbClr val="E8615A"/>
+            <a:srgbClr val="E3B14E"/>
           </a:solidFill>
           <a:ln>
             <a:noFill/>
@@ -6702,23 +6705,32 @@
           </a:fontRef>
         </p:style>
         <p:txBody>
-          <a:bodyPr rtlCol="0" anchor="ctr"/>
+          <a:bodyPr rtlCol="0" anchor="ctr" wrap="none"/>
           <a:lstStyle/>
           <a:p>
             <a:pPr algn="ctr"/>
-          </a:p>
-        </p:txBody>
-      </p:sp>
-      <p:sp>
-        <p:nvSpPr>
-          <p:cNvPr id="11" name="TextBox 10"/>
-          <p:cNvSpPr txBox="1"/>
-          <p:nvPr/>
-        </p:nvSpPr>
-        <p:spPr>
-          <a:xfrm>
-            <a:off x="8439911" y="3328415"/>
-            <a:ext cx="3566160" cy="457200"/>
+            <a:r>
+              <a:rPr sz="1600" b="1">
+                <a:solidFill>
+                  <a:srgbClr val="0B1220"/>
+                </a:solidFill>
+                <a:latin typeface="Courier New"/>
+              </a:rPr>
+              <a:t>3</a:t>
+            </a:r>
+          </a:p>
+        </p:txBody>
+      </p:sp>
+      <p:sp>
+        <p:nvSpPr>
+          <p:cNvPr id="15" name="TextBox 14"/>
+          <p:cNvSpPr txBox="1"/>
+          <p:nvPr/>
+        </p:nvSpPr>
+        <p:spPr>
+          <a:xfrm>
+            <a:off x="8412480" y="3310128"/>
+            <a:ext cx="2999232" cy="411480"/>
           </a:xfrm>
           <a:prstGeom prst="rect">
             <a:avLst/>
@@ -6740,82 +6752,69 @@
               </a:spcAft>
             </a:pPr>
             <a:r>
-              <a:rPr sz="1400" b="1" i="0">
+              <a:rPr sz="1600" b="1" i="0">
                 <a:solidFill>
                   <a:srgbClr val="EAF0F8"/>
                 </a:solidFill>
                 <a:latin typeface="Arial"/>
               </a:rPr>
-              <a:t>Cardinals  </a:t>
-            </a:r>
-            <a:r>
-              <a:rPr sz="1200" b="0" i="0">
+              <a:t>Salary relief</a:t>
+            </a:r>
+          </a:p>
+        </p:txBody>
+      </p:sp>
+      <p:sp>
+        <p:nvSpPr>
+          <p:cNvPr id="16" name="TextBox 15"/>
+          <p:cNvSpPr txBox="1"/>
+          <p:nvPr/>
+        </p:nvSpPr>
+        <p:spPr>
+          <a:xfrm>
+            <a:off x="8412480" y="3767328"/>
+            <a:ext cx="2999232" cy="1097280"/>
+          </a:xfrm>
+          <a:prstGeom prst="rect">
+            <a:avLst/>
+          </a:prstGeom>
+          <a:noFill/>
+        </p:spPr>
+        <p:txBody>
+          <a:bodyPr wrap="square" anchor="t" lIns="0" rIns="0" tIns="0" bIns="0">
+            <a:spAutoFit/>
+          </a:bodyPr>
+          <a:lstStyle/>
+          <a:p>
+            <a:pPr algn="l">
+              <a:lnSpc>
+                <a:spcPct val="110000"/>
+              </a:lnSpc>
+              <a:spcAft>
+                <a:spcPts val="400"/>
+              </a:spcAft>
+            </a:pPr>
+            <a:r>
+              <a:rPr sz="1280" b="0" i="0">
                 <a:solidFill>
                   <a:srgbClr val="93A0B6"/>
                 </a:solidFill>
                 <a:latin typeface="Arial"/>
               </a:rPr>
-              <a:t>.526, OF need</a:t>
-            </a:r>
-          </a:p>
-        </p:txBody>
-      </p:sp>
-      <p:sp>
-        <p:nvSpPr>
-          <p:cNvPr id="12" name="Rounded Rectangle 11"/>
-          <p:cNvSpPr/>
-          <p:nvPr/>
-        </p:nvSpPr>
-        <p:spPr>
-          <a:xfrm>
-            <a:off x="8183879" y="3922776"/>
-            <a:ext cx="128016" cy="128016"/>
-          </a:xfrm>
-          <a:prstGeom prst="roundRect">
-            <a:avLst>
-              <a:gd name="adj" fmla="val 18000"/>
-            </a:avLst>
-          </a:prstGeom>
-          <a:solidFill>
-            <a:srgbClr val="E8615A"/>
-          </a:solidFill>
-          <a:ln>
-            <a:noFill/>
-          </a:ln>
-          <a:effectLst/>
-        </p:spPr>
-        <p:style>
-          <a:lnRef idx="1">
-            <a:schemeClr val="accent1"/>
-          </a:lnRef>
-          <a:fillRef idx="3">
-            <a:schemeClr val="accent1"/>
-          </a:fillRef>
-          <a:effectRef idx="2">
-            <a:schemeClr val="accent1"/>
-          </a:effectRef>
-          <a:fontRef idx="minor">
-            <a:schemeClr val="lt1"/>
-          </a:fontRef>
-        </p:style>
-        <p:txBody>
-          <a:bodyPr rtlCol="0" anchor="ctr"/>
-          <a:lstStyle/>
-          <a:p>
-            <a:pPr algn="ctr"/>
-          </a:p>
-        </p:txBody>
-      </p:sp>
-      <p:sp>
-        <p:nvSpPr>
-          <p:cNvPr id="13" name="TextBox 12"/>
-          <p:cNvSpPr txBox="1"/>
-          <p:nvPr/>
-        </p:nvSpPr>
-        <p:spPr>
-          <a:xfrm>
-            <a:off x="8439911" y="3895344"/>
-            <a:ext cx="3566160" cy="457200"/>
+              <a:t>Attach Yoshida money where possible; free payroll for the 2027 window.</a:t>
+            </a:r>
+          </a:p>
+        </p:txBody>
+      </p:sp>
+      <p:sp>
+        <p:nvSpPr>
+          <p:cNvPr id="17" name="TextBox 16"/>
+          <p:cNvSpPr txBox="1"/>
+          <p:nvPr/>
+        </p:nvSpPr>
+        <p:spPr>
+          <a:xfrm>
+            <a:off x="566928" y="5257800"/>
+            <a:ext cx="11064240" cy="457200"/>
           </a:xfrm>
           <a:prstGeom prst="rect">
             <a:avLst/>
@@ -6837,89 +6836,29 @@
               </a:spcAft>
             </a:pPr>
             <a:r>
-              <a:rPr sz="1400" b="1" i="0">
+              <a:rPr sz="1400" b="1" i="1">
                 <a:solidFill>
                   <a:srgbClr val="EAF0F8"/>
                 </a:solidFill>
                 <a:latin typeface="Arial"/>
               </a:rPr>
-              <a:t>Astros  </a:t>
-            </a:r>
-            <a:r>
-              <a:rPr sz="1200" b="0" i="0">
+              <a:t>Keep the arms. Cash the outfield. </a:t>
+            </a:r>
+            <a:r>
+              <a:rPr sz="1400" b="0" i="1">
                 <a:solidFill>
                   <a:srgbClr val="93A0B6"/>
                 </a:solidFill>
                 <a:latin typeface="Arial"/>
               </a:rPr>
-              <a:t>fringe, weakest OF</a:t>
-            </a:r>
-          </a:p>
-        </p:txBody>
-      </p:sp>
-      <p:sp>
-        <p:nvSpPr>
-          <p:cNvPr id="14" name="TextBox 13"/>
-          <p:cNvSpPr txBox="1"/>
-          <p:nvPr/>
-        </p:nvSpPr>
-        <p:spPr>
-          <a:xfrm>
-            <a:off x="8183879" y="4709160"/>
-            <a:ext cx="3657600" cy="1005840"/>
-          </a:xfrm>
-          <a:prstGeom prst="rect">
-            <a:avLst/>
-          </a:prstGeom>
-          <a:noFill/>
-        </p:spPr>
-        <p:txBody>
-          <a:bodyPr wrap="square" anchor="t" lIns="0" rIns="0" tIns="0" bIns="0">
-            <a:spAutoFit/>
-          </a:bodyPr>
-          <a:lstStyle/>
-          <a:p>
-            <a:pPr algn="l">
-              <a:lnSpc>
-                <a:spcPct val="112000"/>
-              </a:lnSpc>
-              <a:spcAft>
-                <a:spcPts val="400"/>
-              </a:spcAft>
-            </a:pPr>
-            <a:r>
-              <a:rPr sz="1250" b="0" i="0">
-                <a:solidFill>
-                  <a:srgbClr val="D9E1EF"/>
-                </a:solidFill>
-                <a:latin typeface="Arial"/>
-              </a:rPr>
-              <a:t>Trade a redundant bat to a team that needs one — and take back the </a:t>
-            </a:r>
-            <a:r>
-              <a:rPr sz="1250" b="1" i="0">
-                <a:solidFill>
-                  <a:srgbClr val="58C08D"/>
-                </a:solidFill>
-                <a:latin typeface="Arial"/>
-              </a:rPr>
-              <a:t>hitting/youth</a:t>
-            </a:r>
-            <a:r>
-              <a:rPr sz="1250" b="0" i="0">
-                <a:solidFill>
-                  <a:srgbClr val="D9E1EF"/>
-                </a:solidFill>
-                <a:latin typeface="Arial"/>
-              </a:rPr>
-              <a:t> Boston is short on.</a:t>
-            </a:r>
-          </a:p>
-        </p:txBody>
-      </p:sp>
-      <p:sp>
-        <p:nvSpPr>
-          <p:cNvPr id="15" name="TextBox 14"/>
+              <a:t>Build the 2027 lineup, don't rent the 2026 one.</a:t>
+            </a:r>
+          </a:p>
+        </p:txBody>
+      </p:sp>
+      <p:sp>
+        <p:nvSpPr>
+          <p:cNvPr id="18" name="TextBox 17"/>
           <p:cNvSpPr txBox="1"/>
           <p:nvPr/>
         </p:nvSpPr>
@@ -7031,7 +6970,7 @@
                 </a:solidFill>
                 <a:latin typeface="Courier New"/>
               </a:rPr>
-              <a:t>// THE SEQUENCE</a:t>
+              <a:t>// THE MARKET</a:t>
             </a:r>
           </a:p>
         </p:txBody>
@@ -7073,21 +7012,87 @@
                 </a:solidFill>
                 <a:latin typeface="Arial"/>
               </a:rPr>
-              <a:t>Buy now, decide on Duran in the winter</a:t>
-            </a:r>
-          </a:p>
-        </p:txBody>
-      </p:sp>
-      <p:sp>
-        <p:nvSpPr>
-          <p:cNvPr id="4" name="Rounded Rectangle 3"/>
+              <a:t>Who pays: contenders with a hole in the outfield</a:t>
+            </a:r>
+          </a:p>
+        </p:txBody>
+      </p:sp>
+      <p:pic>
+        <p:nvPicPr>
+          <p:cNvPr id="4" name="Picture 3" descr="08_trade_fit_targets.png"/>
+          <p:cNvPicPr>
+            <a:picLocks noChangeAspect="1"/>
+          </p:cNvPicPr>
+          <p:nvPr/>
+        </p:nvPicPr>
+        <p:blipFill>
+          <a:blip r:embed="rId2"/>
+          <a:stretch>
+            <a:fillRect/>
+          </a:stretch>
+        </p:blipFill>
+        <p:spPr>
+          <a:xfrm>
+            <a:off x="757237" y="1463040"/>
+            <a:ext cx="6715125" cy="4297680"/>
+          </a:xfrm>
+          <a:prstGeom prst="rect">
+            <a:avLst/>
+          </a:prstGeom>
+        </p:spPr>
+      </p:pic>
+      <p:sp>
+        <p:nvSpPr>
+          <p:cNvPr id="5" name="TextBox 4"/>
+          <p:cNvSpPr txBox="1"/>
+          <p:nvPr/>
+        </p:nvSpPr>
+        <p:spPr>
+          <a:xfrm>
+            <a:off x="8183879" y="1691640"/>
+            <a:ext cx="3657600" cy="457200"/>
+          </a:xfrm>
+          <a:prstGeom prst="rect">
+            <a:avLst/>
+          </a:prstGeom>
+          <a:noFill/>
+        </p:spPr>
+        <p:txBody>
+          <a:bodyPr wrap="square" anchor="t" lIns="0" rIns="0" tIns="0" bIns="0">
+            <a:spAutoFit/>
+          </a:bodyPr>
+          <a:lstStyle/>
+          <a:p>
+            <a:pPr algn="l">
+              <a:lnSpc>
+                <a:spcPct val="100000"/>
+              </a:lnSpc>
+              <a:spcAft>
+                <a:spcPts val="0"/>
+              </a:spcAft>
+            </a:pPr>
+            <a:r>
+              <a:rPr sz="1500" b="1" i="0">
+                <a:solidFill>
+                  <a:srgbClr val="EAF0F8"/>
+                </a:solidFill>
+                <a:latin typeface="Arial"/>
+              </a:rPr>
+              <a:t>Best-fit buyers</a:t>
+            </a:r>
+          </a:p>
+        </p:txBody>
+      </p:sp>
+      <p:sp>
+        <p:nvSpPr>
+          <p:cNvPr id="6" name="Rounded Rectangle 5"/>
           <p:cNvSpPr/>
           <p:nvPr/>
         </p:nvSpPr>
         <p:spPr>
           <a:xfrm>
-            <a:off x="640080" y="1801368"/>
-            <a:ext cx="457200" cy="457200"/>
+            <a:off x="8183879" y="2221991"/>
+            <a:ext cx="128016" cy="128016"/>
           </a:xfrm>
           <a:prstGeom prst="roundRect">
             <a:avLst>
@@ -7117,93 +7122,74 @@
           </a:fontRef>
         </p:style>
         <p:txBody>
-          <a:bodyPr rtlCol="0" anchor="ctr" wrap="none"/>
+          <a:bodyPr rtlCol="0" anchor="ctr"/>
           <a:lstStyle/>
           <a:p>
             <a:pPr algn="ctr"/>
-            <a:r>
-              <a:rPr sz="1800" b="1">
-                <a:solidFill>
-                  <a:srgbClr val="0B1220"/>
-                </a:solidFill>
-                <a:latin typeface="Courier New"/>
-              </a:rPr>
-              <a:t>1</a:t>
-            </a:r>
-          </a:p>
-        </p:txBody>
-      </p:sp>
-      <p:sp>
-        <p:nvSpPr>
-          <p:cNvPr id="5" name="TextBox 4"/>
-          <p:cNvSpPr txBox="1"/>
-          <p:nvPr/>
-        </p:nvSpPr>
-        <p:spPr>
-          <a:xfrm>
-            <a:off x="1280160" y="1783080"/>
-            <a:ext cx="6126480" cy="1005840"/>
-          </a:xfrm>
-          <a:prstGeom prst="rect">
-            <a:avLst/>
-          </a:prstGeom>
-          <a:noFill/>
-        </p:spPr>
-        <p:txBody>
-          <a:bodyPr wrap="square" anchor="t" lIns="0" rIns="0" tIns="0" bIns="0">
-            <a:spAutoFit/>
-          </a:bodyPr>
-          <a:lstStyle/>
-          <a:p>
-            <a:pPr algn="l">
-              <a:lnSpc>
-                <a:spcPct val="108000"/>
-              </a:lnSpc>
-              <a:spcAft>
-                <a:spcPts val="200"/>
-              </a:spcAft>
-            </a:pPr>
-            <a:r>
-              <a:rPr sz="1700" b="1" i="0">
+          </a:p>
+        </p:txBody>
+      </p:sp>
+      <p:sp>
+        <p:nvSpPr>
+          <p:cNvPr id="7" name="TextBox 6"/>
+          <p:cNvSpPr txBox="1"/>
+          <p:nvPr/>
+        </p:nvSpPr>
+        <p:spPr>
+          <a:xfrm>
+            <a:off x="8439911" y="2194560"/>
+            <a:ext cx="3566160" cy="457200"/>
+          </a:xfrm>
+          <a:prstGeom prst="rect">
+            <a:avLst/>
+          </a:prstGeom>
+          <a:noFill/>
+        </p:spPr>
+        <p:txBody>
+          <a:bodyPr wrap="square" anchor="t" lIns="0" rIns="0" tIns="0" bIns="0">
+            <a:spAutoFit/>
+          </a:bodyPr>
+          <a:lstStyle/>
+          <a:p>
+            <a:pPr algn="l">
+              <a:lnSpc>
+                <a:spcPct val="100000"/>
+              </a:lnSpc>
+              <a:spcAft>
+                <a:spcPts val="0"/>
+              </a:spcAft>
+            </a:pPr>
+            <a:r>
+              <a:rPr sz="1400" b="1" i="0">
                 <a:solidFill>
                   <a:srgbClr val="EAF0F8"/>
                 </a:solidFill>
                 <a:latin typeface="Arial"/>
               </a:rPr>
-              <a:t>At the deadline: buy targeted</a:t>
-            </a:r>
-          </a:p>
-          <a:p>
-            <a:pPr algn="l">
-              <a:lnSpc>
-                <a:spcPct val="108000"/>
-              </a:lnSpc>
-              <a:spcAft>
-                <a:spcPts val="200"/>
-              </a:spcAft>
-            </a:pPr>
-            <a:r>
-              <a:rPr sz="1350" b="0" i="0">
+              <a:t>Phillies  </a:t>
+            </a:r>
+            <a:r>
+              <a:rPr sz="1200" b="0" i="0">
                 <a:solidFill>
                   <a:srgbClr val="93A0B6"/>
                 </a:solidFill>
                 <a:latin typeface="Arial"/>
               </a:rPr>
-              <a:t>A controllable infield bat and a reliever, funded from the pitching surplus. Keep the vets — they're playoff innings now.</a:t>
-            </a:r>
-          </a:p>
-        </p:txBody>
-      </p:sp>
-      <p:sp>
-        <p:nvSpPr>
-          <p:cNvPr id="6" name="Rounded Rectangle 5"/>
+              <a:t>.557, 84 OF wRC+</a:t>
+            </a:r>
+          </a:p>
+        </p:txBody>
+      </p:sp>
+      <p:sp>
+        <p:nvSpPr>
+          <p:cNvPr id="8" name="Rounded Rectangle 7"/>
           <p:cNvSpPr/>
           <p:nvPr/>
         </p:nvSpPr>
         <p:spPr>
           <a:xfrm>
-            <a:off x="640080" y="2971800"/>
-            <a:ext cx="457200" cy="457200"/>
+            <a:off x="8183879" y="2788920"/>
+            <a:ext cx="128016" cy="128016"/>
           </a:xfrm>
           <a:prstGeom prst="roundRect">
             <a:avLst>
@@ -7233,93 +7219,74 @@
           </a:fontRef>
         </p:style>
         <p:txBody>
-          <a:bodyPr rtlCol="0" anchor="ctr" wrap="none"/>
+          <a:bodyPr rtlCol="0" anchor="ctr"/>
           <a:lstStyle/>
           <a:p>
             <a:pPr algn="ctr"/>
-            <a:r>
-              <a:rPr sz="1800" b="1">
-                <a:solidFill>
-                  <a:srgbClr val="0B1220"/>
-                </a:solidFill>
-                <a:latin typeface="Courier New"/>
-              </a:rPr>
-              <a:t>2</a:t>
-            </a:r>
-          </a:p>
-        </p:txBody>
-      </p:sp>
-      <p:sp>
-        <p:nvSpPr>
-          <p:cNvPr id="7" name="TextBox 6"/>
-          <p:cNvSpPr txBox="1"/>
-          <p:nvPr/>
-        </p:nvSpPr>
-        <p:spPr>
-          <a:xfrm>
-            <a:off x="1280160" y="2953512"/>
-            <a:ext cx="6126480" cy="1005840"/>
-          </a:xfrm>
-          <a:prstGeom prst="rect">
-            <a:avLst/>
-          </a:prstGeom>
-          <a:noFill/>
-        </p:spPr>
-        <p:txBody>
-          <a:bodyPr wrap="square" anchor="t" lIns="0" rIns="0" tIns="0" bIns="0">
-            <a:spAutoFit/>
-          </a:bodyPr>
-          <a:lstStyle/>
-          <a:p>
-            <a:pPr algn="l">
-              <a:lnSpc>
-                <a:spcPct val="108000"/>
-              </a:lnSpc>
-              <a:spcAft>
-                <a:spcPts val="200"/>
-              </a:spcAft>
-            </a:pPr>
-            <a:r>
-              <a:rPr sz="1700" b="1" i="0">
+          </a:p>
+        </p:txBody>
+      </p:sp>
+      <p:sp>
+        <p:nvSpPr>
+          <p:cNvPr id="9" name="TextBox 8"/>
+          <p:cNvSpPr txBox="1"/>
+          <p:nvPr/>
+        </p:nvSpPr>
+        <p:spPr>
+          <a:xfrm>
+            <a:off x="8439911" y="2761488"/>
+            <a:ext cx="3566160" cy="457200"/>
+          </a:xfrm>
+          <a:prstGeom prst="rect">
+            <a:avLst/>
+          </a:prstGeom>
+          <a:noFill/>
+        </p:spPr>
+        <p:txBody>
+          <a:bodyPr wrap="square" anchor="t" lIns="0" rIns="0" tIns="0" bIns="0">
+            <a:spAutoFit/>
+          </a:bodyPr>
+          <a:lstStyle/>
+          <a:p>
+            <a:pPr algn="l">
+              <a:lnSpc>
+                <a:spcPct val="100000"/>
+              </a:lnSpc>
+              <a:spcAft>
+                <a:spcPts val="0"/>
+              </a:spcAft>
+            </a:pPr>
+            <a:r>
+              <a:rPr sz="1400" b="1" i="0">
                 <a:solidFill>
                   <a:srgbClr val="EAF0F8"/>
                 </a:solidFill>
                 <a:latin typeface="Arial"/>
               </a:rPr>
-              <a:t>Hold Duran through August</a:t>
-            </a:r>
-          </a:p>
-          <a:p>
-            <a:pPr algn="l">
-              <a:lnSpc>
-                <a:spcPct val="108000"/>
-              </a:lnSpc>
-              <a:spcAft>
-                <a:spcPts val="200"/>
-              </a:spcAft>
-            </a:pPr>
-            <a:r>
-              <a:rPr sz="1350" b="0" i="0">
+              <a:t>Rays  </a:t>
+            </a:r>
+            <a:r>
+              <a:rPr sz="1200" b="0" i="0">
                 <a:solidFill>
                   <a:srgbClr val="93A0B6"/>
                 </a:solidFill>
                 <a:latin typeface="Arial"/>
               </a:rPr>
-              <a:t>His value is at its nadir and his July contact quality (~.35 xwOBA) is already surging. Selling now cashes the slump.</a:t>
-            </a:r>
-          </a:p>
-        </p:txBody>
-      </p:sp>
-      <p:sp>
-        <p:nvSpPr>
-          <p:cNvPr id="8" name="Rounded Rectangle 7"/>
+              <a:t>.596, 88 OF wRC+</a:t>
+            </a:r>
+          </a:p>
+        </p:txBody>
+      </p:sp>
+      <p:sp>
+        <p:nvSpPr>
+          <p:cNvPr id="10" name="Rounded Rectangle 9"/>
           <p:cNvSpPr/>
           <p:nvPr/>
         </p:nvSpPr>
         <p:spPr>
           <a:xfrm>
-            <a:off x="640080" y="4142231"/>
-            <a:ext cx="457200" cy="457200"/>
+            <a:off x="8183879" y="3355847"/>
+            <a:ext cx="128016" cy="128016"/>
           </a:xfrm>
           <a:prstGeom prst="roundRect">
             <a:avLst>
@@ -7349,101 +7316,82 @@
           </a:fontRef>
         </p:style>
         <p:txBody>
-          <a:bodyPr rtlCol="0" anchor="ctr" wrap="none"/>
+          <a:bodyPr rtlCol="0" anchor="ctr"/>
           <a:lstStyle/>
           <a:p>
             <a:pPr algn="ctr"/>
-            <a:r>
-              <a:rPr sz="1800" b="1">
-                <a:solidFill>
-                  <a:srgbClr val="0B1220"/>
-                </a:solidFill>
-                <a:latin typeface="Courier New"/>
-              </a:rPr>
-              <a:t>3</a:t>
-            </a:r>
-          </a:p>
-        </p:txBody>
-      </p:sp>
-      <p:sp>
-        <p:nvSpPr>
-          <p:cNvPr id="9" name="TextBox 8"/>
-          <p:cNvSpPr txBox="1"/>
-          <p:nvPr/>
-        </p:nvSpPr>
-        <p:spPr>
-          <a:xfrm>
-            <a:off x="1280160" y="4123944"/>
-            <a:ext cx="6126480" cy="1005840"/>
-          </a:xfrm>
-          <a:prstGeom prst="rect">
-            <a:avLst/>
-          </a:prstGeom>
-          <a:noFill/>
-        </p:spPr>
-        <p:txBody>
-          <a:bodyPr wrap="square" anchor="t" lIns="0" rIns="0" tIns="0" bIns="0">
-            <a:spAutoFit/>
-          </a:bodyPr>
-          <a:lstStyle/>
-          <a:p>
-            <a:pPr algn="l">
-              <a:lnSpc>
-                <a:spcPct val="108000"/>
-              </a:lnSpc>
-              <a:spcAft>
-                <a:spcPts val="200"/>
-              </a:spcAft>
-            </a:pPr>
-            <a:r>
-              <a:rPr sz="1700" b="1" i="0">
+          </a:p>
+        </p:txBody>
+      </p:sp>
+      <p:sp>
+        <p:nvSpPr>
+          <p:cNvPr id="11" name="TextBox 10"/>
+          <p:cNvSpPr txBox="1"/>
+          <p:nvPr/>
+        </p:nvSpPr>
+        <p:spPr>
+          <a:xfrm>
+            <a:off x="8439911" y="3328415"/>
+            <a:ext cx="3566160" cy="457200"/>
+          </a:xfrm>
+          <a:prstGeom prst="rect">
+            <a:avLst/>
+          </a:prstGeom>
+          <a:noFill/>
+        </p:spPr>
+        <p:txBody>
+          <a:bodyPr wrap="square" anchor="t" lIns="0" rIns="0" tIns="0" bIns="0">
+            <a:spAutoFit/>
+          </a:bodyPr>
+          <a:lstStyle/>
+          <a:p>
+            <a:pPr algn="l">
+              <a:lnSpc>
+                <a:spcPct val="100000"/>
+              </a:lnSpc>
+              <a:spcAft>
+                <a:spcPts val="0"/>
+              </a:spcAft>
+            </a:pPr>
+            <a:r>
+              <a:rPr sz="1400" b="1" i="0">
                 <a:solidFill>
                   <a:srgbClr val="EAF0F8"/>
                 </a:solidFill>
                 <a:latin typeface="Arial"/>
               </a:rPr>
-              <a:t>Winter: re-price, then choose</a:t>
-            </a:r>
-          </a:p>
-          <a:p>
-            <a:pPr algn="l">
-              <a:lnSpc>
-                <a:spcPct val="108000"/>
-              </a:lnSpc>
-              <a:spcAft>
-                <a:spcPts val="200"/>
-              </a:spcAft>
-            </a:pPr>
-            <a:r>
-              <a:rPr sz="1350" b="0" i="0">
+              <a:t>Cardinals  </a:t>
+            </a:r>
+            <a:r>
+              <a:rPr sz="1200" b="0" i="0">
                 <a:solidFill>
                   <a:srgbClr val="93A0B6"/>
                 </a:solidFill>
                 <a:latin typeface="Arial"/>
               </a:rPr>
-              <a:t>Anthony healthy, jam returns. Rebound confirmed → extend or trade at full price, plus Yoshida money. Erosion persists → sell at market. Either way, the 2027 OF is Anthony / Rafaela / Abreu.</a:t>
-            </a:r>
-          </a:p>
-        </p:txBody>
-      </p:sp>
-      <p:sp>
-        <p:nvSpPr>
-          <p:cNvPr id="10" name="Rounded Rectangle 9"/>
+              <a:t>.526, OF need</a:t>
+            </a:r>
+          </a:p>
+        </p:txBody>
+      </p:sp>
+      <p:sp>
+        <p:nvSpPr>
+          <p:cNvPr id="12" name="Rounded Rectangle 11"/>
           <p:cNvSpPr/>
           <p:nvPr/>
         </p:nvSpPr>
         <p:spPr>
           <a:xfrm>
-            <a:off x="7818120" y="1783080"/>
-            <a:ext cx="3794760" cy="3337560"/>
+            <a:off x="8183879" y="3922776"/>
+            <a:ext cx="128016" cy="128016"/>
           </a:xfrm>
           <a:prstGeom prst="roundRect">
             <a:avLst>
-              <a:gd name="adj" fmla="val 6000"/>
+              <a:gd name="adj" fmla="val 18000"/>
             </a:avLst>
           </a:prstGeom>
           <a:solidFill>
-            <a:srgbClr val="1A2740"/>
+            <a:srgbClr val="E8615A"/>
           </a:solidFill>
           <a:ln>
             <a:noFill/>
@@ -7474,14 +7422,14 @@
       </p:sp>
       <p:sp>
         <p:nvSpPr>
-          <p:cNvPr id="11" name="TextBox 10"/>
-          <p:cNvSpPr txBox="1"/>
-          <p:nvPr/>
-        </p:nvSpPr>
-        <p:spPr>
-          <a:xfrm>
-            <a:off x="8092440" y="2011680"/>
-            <a:ext cx="3291840" cy="365760"/>
+          <p:cNvPr id="13" name="TextBox 12"/>
+          <p:cNvSpPr txBox="1"/>
+          <p:nvPr/>
+        </p:nvSpPr>
+        <p:spPr>
+          <a:xfrm>
+            <a:off x="8439911" y="3895344"/>
+            <a:ext cx="3566160" cy="457200"/>
           </a:xfrm>
           <a:prstGeom prst="rect">
             <a:avLst/>
@@ -7503,196 +7451,82 @@
               </a:spcAft>
             </a:pPr>
             <a:r>
+              <a:rPr sz="1400" b="1" i="0">
+                <a:solidFill>
+                  <a:srgbClr val="EAF0F8"/>
+                </a:solidFill>
+                <a:latin typeface="Arial"/>
+              </a:rPr>
+              <a:t>Astros  </a:t>
+            </a:r>
+            <a:r>
+              <a:rPr sz="1200" b="0" i="0">
+                <a:solidFill>
+                  <a:srgbClr val="93A0B6"/>
+                </a:solidFill>
+                <a:latin typeface="Arial"/>
+              </a:rPr>
+              <a:t>fringe, weakest OF</a:t>
+            </a:r>
+          </a:p>
+        </p:txBody>
+      </p:sp>
+      <p:sp>
+        <p:nvSpPr>
+          <p:cNvPr id="14" name="TextBox 13"/>
+          <p:cNvSpPr txBox="1"/>
+          <p:nvPr/>
+        </p:nvSpPr>
+        <p:spPr>
+          <a:xfrm>
+            <a:off x="8183879" y="4709160"/>
+            <a:ext cx="3657600" cy="1005840"/>
+          </a:xfrm>
+          <a:prstGeom prst="rect">
+            <a:avLst/>
+          </a:prstGeom>
+          <a:noFill/>
+        </p:spPr>
+        <p:txBody>
+          <a:bodyPr wrap="square" anchor="t" lIns="0" rIns="0" tIns="0" bIns="0">
+            <a:spAutoFit/>
+          </a:bodyPr>
+          <a:lstStyle/>
+          <a:p>
+            <a:pPr algn="l">
+              <a:lnSpc>
+                <a:spcPct val="112000"/>
+              </a:lnSpc>
+              <a:spcAft>
+                <a:spcPts val="400"/>
+              </a:spcAft>
+            </a:pPr>
+            <a:r>
+              <a:rPr sz="1250" b="0" i="0">
+                <a:solidFill>
+                  <a:srgbClr val="D9E1EF"/>
+                </a:solidFill>
+                <a:latin typeface="Arial"/>
+              </a:rPr>
+              <a:t>Trade a redundant bat to a team that needs one — and take back the </a:t>
+            </a:r>
+            <a:r>
               <a:rPr sz="1250" b="1" i="0">
                 <a:solidFill>
-                  <a:srgbClr val="C9D2E3"/>
-                </a:solidFill>
-                <a:latin typeface="Arial"/>
-              </a:rPr>
-              <a:t>THE RETURN</a:t>
-            </a:r>
-          </a:p>
-        </p:txBody>
-      </p:sp>
-      <p:sp>
-        <p:nvSpPr>
-          <p:cNvPr id="12" name="TextBox 11"/>
-          <p:cNvSpPr txBox="1"/>
-          <p:nvPr/>
-        </p:nvSpPr>
-        <p:spPr>
-          <a:xfrm>
-            <a:off x="8092440" y="2487168"/>
-            <a:ext cx="3291840" cy="914400"/>
-          </a:xfrm>
-          <a:prstGeom prst="rect">
-            <a:avLst/>
-          </a:prstGeom>
-          <a:noFill/>
-        </p:spPr>
-        <p:txBody>
-          <a:bodyPr wrap="square" anchor="t" lIns="0" rIns="0" tIns="0" bIns="0">
-            <a:spAutoFit/>
-          </a:bodyPr>
-          <a:lstStyle/>
-          <a:p>
-            <a:pPr algn="l">
-              <a:lnSpc>
-                <a:spcPct val="105000"/>
-              </a:lnSpc>
-              <a:spcAft>
-                <a:spcPts val="200"/>
-              </a:spcAft>
-            </a:pPr>
-            <a:r>
-              <a:rPr sz="1300" b="1" i="0">
-                <a:solidFill>
-                  <a:srgbClr val="F0B8BC"/>
-                </a:solidFill>
-                <a:latin typeface="Arial"/>
-              </a:rPr>
-              <a:t>Sell now (nadir)</a:t>
-            </a:r>
-          </a:p>
-          <a:p>
-            <a:pPr algn="l">
-              <a:lnSpc>
-                <a:spcPct val="105000"/>
-              </a:lnSpc>
-              <a:spcAft>
-                <a:spcPts val="200"/>
-              </a:spcAft>
-            </a:pPr>
-            <a:r>
-              <a:rPr sz="1400" b="0" i="0">
-                <a:solidFill>
-                  <a:srgbClr val="F4F7FC"/>
-                </a:solidFill>
-                <a:latin typeface="Arial"/>
-              </a:rPr>
-              <a:t>~$10–15M · a 45-FV bat</a:t>
-            </a:r>
-          </a:p>
-        </p:txBody>
-      </p:sp>
-      <p:sp>
-        <p:nvSpPr>
-          <p:cNvPr id="13" name="TextBox 12"/>
-          <p:cNvSpPr txBox="1"/>
-          <p:nvPr/>
-        </p:nvSpPr>
-        <p:spPr>
-          <a:xfrm>
-            <a:off x="8092440" y="3520440"/>
-            <a:ext cx="3291840" cy="1005840"/>
-          </a:xfrm>
-          <a:prstGeom prst="rect">
-            <a:avLst/>
-          </a:prstGeom>
-          <a:noFill/>
-        </p:spPr>
-        <p:txBody>
-          <a:bodyPr wrap="square" anchor="t" lIns="0" rIns="0" tIns="0" bIns="0">
-            <a:spAutoFit/>
-          </a:bodyPr>
-          <a:lstStyle/>
-          <a:p>
-            <a:pPr algn="l">
-              <a:lnSpc>
-                <a:spcPct val="105000"/>
-              </a:lnSpc>
-              <a:spcAft>
-                <a:spcPts val="200"/>
-              </a:spcAft>
-            </a:pPr>
-            <a:r>
-              <a:rPr sz="1300" b="1" i="0">
-                <a:solidFill>
-                  <a:srgbClr val="A9E5B5"/>
-                </a:solidFill>
-                <a:latin typeface="Arial"/>
-              </a:rPr>
-              <a:t>Sell after rebound</a:t>
-            </a:r>
-          </a:p>
-          <a:p>
-            <a:pPr algn="l">
-              <a:lnSpc>
-                <a:spcPct val="105000"/>
-              </a:lnSpc>
-              <a:spcAft>
-                <a:spcPts val="200"/>
-              </a:spcAft>
-            </a:pPr>
-            <a:r>
-              <a:rPr sz="1400" b="0" i="0">
-                <a:solidFill>
-                  <a:srgbClr val="F4F7FC"/>
-                </a:solidFill>
-                <a:latin typeface="Arial"/>
-              </a:rPr>
-              <a:t>~$28M · a 50-FV, top-100</a:t>
-            </a:r>
-          </a:p>
-          <a:p>
-            <a:pPr algn="l">
-              <a:lnSpc>
-                <a:spcPct val="105000"/>
-              </a:lnSpc>
-              <a:spcAft>
-                <a:spcPts val="200"/>
-              </a:spcAft>
-            </a:pPr>
-            <a:r>
-              <a:rPr sz="1400" b="0" i="0">
-                <a:solidFill>
-                  <a:srgbClr val="F4F7FC"/>
-                </a:solidFill>
-                <a:latin typeface="Arial"/>
-              </a:rPr>
-              <a:t>controllable talent</a:t>
-            </a:r>
-          </a:p>
-        </p:txBody>
-      </p:sp>
-      <p:sp>
-        <p:nvSpPr>
-          <p:cNvPr id="14" name="TextBox 13"/>
-          <p:cNvSpPr txBox="1"/>
-          <p:nvPr/>
-        </p:nvSpPr>
-        <p:spPr>
-          <a:xfrm>
-            <a:off x="8092440" y="4617720"/>
-            <a:ext cx="3291840" cy="457200"/>
-          </a:xfrm>
-          <a:prstGeom prst="rect">
-            <a:avLst/>
-          </a:prstGeom>
-          <a:noFill/>
-        </p:spPr>
-        <p:txBody>
-          <a:bodyPr wrap="square" anchor="t" lIns="0" rIns="0" tIns="0" bIns="0">
-            <a:spAutoFit/>
-          </a:bodyPr>
-          <a:lstStyle/>
-          <a:p>
-            <a:pPr algn="l">
-              <a:lnSpc>
-                <a:spcPct val="105000"/>
-              </a:lnSpc>
-              <a:spcAft>
-                <a:spcPts val="400"/>
-              </a:spcAft>
-            </a:pPr>
-            <a:r>
-              <a:rPr sz="1150" b="0" i="1">
-                <a:solidFill>
-                  <a:srgbClr val="C9D2E3"/>
-                </a:solidFill>
-                <a:latin typeface="Arial"/>
-              </a:rPr>
-              <a:t>One grade of return = the reason to wait.</a:t>
+                  <a:srgbClr val="58C08D"/>
+                </a:solidFill>
+                <a:latin typeface="Arial"/>
+              </a:rPr>
+              <a:t>hitting/youth</a:t>
+            </a:r>
+            <a:r>
+              <a:rPr sz="1250" b="0" i="0">
+                <a:solidFill>
+                  <a:srgbClr val="D9E1EF"/>
+                </a:solidFill>
+                <a:latin typeface="Arial"/>
+              </a:rPr>
+              <a:t> Boston is short on.</a:t>
             </a:r>
           </a:p>
         </p:txBody>
@@ -7757,6 +7591,786 @@
 </file>
 
 <file path=ppt/slides/slide16.xml><?xml version="1.0" encoding="utf-8"?>
+<p:sld xmlns:a="http://schemas.openxmlformats.org/drawingml/2006/main" xmlns:p="http://schemas.openxmlformats.org/presentationml/2006/main" xmlns:r="http://schemas.openxmlformats.org/officeDocument/2006/relationships">
+  <p:cSld>
+    <p:bg>
+      <p:bgPr>
+        <a:solidFill>
+          <a:srgbClr val="0B1220"/>
+        </a:solidFill>
+        <a:effectLst/>
+      </p:bgPr>
+    </p:bg>
+    <p:spTree>
+      <p:nvGrpSpPr>
+        <p:cNvPr id="1" name=""/>
+        <p:cNvGrpSpPr/>
+        <p:nvPr/>
+      </p:nvGrpSpPr>
+      <p:grpSpPr/>
+      <p:sp>
+        <p:nvSpPr>
+          <p:cNvPr id="2" name="TextBox 1"/>
+          <p:cNvSpPr txBox="1"/>
+          <p:nvPr/>
+        </p:nvSpPr>
+        <p:spPr>
+          <a:xfrm>
+            <a:off x="566928" y="384048"/>
+            <a:ext cx="10058400" cy="274320"/>
+          </a:xfrm>
+          <a:prstGeom prst="rect">
+            <a:avLst/>
+          </a:prstGeom>
+          <a:noFill/>
+        </p:spPr>
+        <p:txBody>
+          <a:bodyPr wrap="square" anchor="t" lIns="0" rIns="0" tIns="0" bIns="0">
+            <a:spAutoFit/>
+          </a:bodyPr>
+          <a:lstStyle/>
+          <a:p>
+            <a:pPr algn="l">
+              <a:lnSpc>
+                <a:spcPct val="100000"/>
+              </a:lnSpc>
+              <a:spcAft>
+                <a:spcPts val="0"/>
+              </a:spcAft>
+            </a:pPr>
+            <a:r>
+              <a:rPr sz="1200" b="1" i="0">
+                <a:solidFill>
+                  <a:srgbClr val="E8615A"/>
+                </a:solidFill>
+                <a:latin typeface="Courier New"/>
+              </a:rPr>
+              <a:t>// THE SEQUENCE</a:t>
+            </a:r>
+          </a:p>
+        </p:txBody>
+      </p:sp>
+      <p:sp>
+        <p:nvSpPr>
+          <p:cNvPr id="3" name="TextBox 2"/>
+          <p:cNvSpPr txBox="1"/>
+          <p:nvPr/>
+        </p:nvSpPr>
+        <p:spPr>
+          <a:xfrm>
+            <a:off x="566928" y="658368"/>
+            <a:ext cx="11064240" cy="868680"/>
+          </a:xfrm>
+          <a:prstGeom prst="rect">
+            <a:avLst/>
+          </a:prstGeom>
+          <a:noFill/>
+        </p:spPr>
+        <p:txBody>
+          <a:bodyPr wrap="square" anchor="t" lIns="0" rIns="0" tIns="0" bIns="0">
+            <a:spAutoFit/>
+          </a:bodyPr>
+          <a:lstStyle/>
+          <a:p>
+            <a:pPr algn="l">
+              <a:lnSpc>
+                <a:spcPct val="100000"/>
+              </a:lnSpc>
+              <a:spcAft>
+                <a:spcPts val="0"/>
+              </a:spcAft>
+            </a:pPr>
+            <a:r>
+              <a:rPr sz="3000" b="1" i="0">
+                <a:solidFill>
+                  <a:srgbClr val="EAF0F8"/>
+                </a:solidFill>
+                <a:latin typeface="Arial"/>
+              </a:rPr>
+              <a:t>Buy now, decide on Duran in the winter</a:t>
+            </a:r>
+          </a:p>
+        </p:txBody>
+      </p:sp>
+      <p:sp>
+        <p:nvSpPr>
+          <p:cNvPr id="4" name="Rounded Rectangle 3"/>
+          <p:cNvSpPr/>
+          <p:nvPr/>
+        </p:nvSpPr>
+        <p:spPr>
+          <a:xfrm>
+            <a:off x="640080" y="1801368"/>
+            <a:ext cx="457200" cy="457200"/>
+          </a:xfrm>
+          <a:prstGeom prst="roundRect">
+            <a:avLst>
+              <a:gd name="adj" fmla="val 18000"/>
+            </a:avLst>
+          </a:prstGeom>
+          <a:solidFill>
+            <a:srgbClr val="E8615A"/>
+          </a:solidFill>
+          <a:ln>
+            <a:noFill/>
+          </a:ln>
+          <a:effectLst/>
+        </p:spPr>
+        <p:style>
+          <a:lnRef idx="1">
+            <a:schemeClr val="accent1"/>
+          </a:lnRef>
+          <a:fillRef idx="3">
+            <a:schemeClr val="accent1"/>
+          </a:fillRef>
+          <a:effectRef idx="2">
+            <a:schemeClr val="accent1"/>
+          </a:effectRef>
+          <a:fontRef idx="minor">
+            <a:schemeClr val="lt1"/>
+          </a:fontRef>
+        </p:style>
+        <p:txBody>
+          <a:bodyPr rtlCol="0" anchor="ctr" wrap="none"/>
+          <a:lstStyle/>
+          <a:p>
+            <a:pPr algn="ctr"/>
+            <a:r>
+              <a:rPr sz="1800" b="1">
+                <a:solidFill>
+                  <a:srgbClr val="0B1220"/>
+                </a:solidFill>
+                <a:latin typeface="Courier New"/>
+              </a:rPr>
+              <a:t>1</a:t>
+            </a:r>
+          </a:p>
+        </p:txBody>
+      </p:sp>
+      <p:sp>
+        <p:nvSpPr>
+          <p:cNvPr id="5" name="TextBox 4"/>
+          <p:cNvSpPr txBox="1"/>
+          <p:nvPr/>
+        </p:nvSpPr>
+        <p:spPr>
+          <a:xfrm>
+            <a:off x="1280160" y="1783080"/>
+            <a:ext cx="6126480" cy="1005840"/>
+          </a:xfrm>
+          <a:prstGeom prst="rect">
+            <a:avLst/>
+          </a:prstGeom>
+          <a:noFill/>
+        </p:spPr>
+        <p:txBody>
+          <a:bodyPr wrap="square" anchor="t" lIns="0" rIns="0" tIns="0" bIns="0">
+            <a:spAutoFit/>
+          </a:bodyPr>
+          <a:lstStyle/>
+          <a:p>
+            <a:pPr algn="l">
+              <a:lnSpc>
+                <a:spcPct val="108000"/>
+              </a:lnSpc>
+              <a:spcAft>
+                <a:spcPts val="200"/>
+              </a:spcAft>
+            </a:pPr>
+            <a:r>
+              <a:rPr sz="1700" b="1" i="0">
+                <a:solidFill>
+                  <a:srgbClr val="EAF0F8"/>
+                </a:solidFill>
+                <a:latin typeface="Arial"/>
+              </a:rPr>
+              <a:t>At the deadline: buy targeted</a:t>
+            </a:r>
+          </a:p>
+          <a:p>
+            <a:pPr algn="l">
+              <a:lnSpc>
+                <a:spcPct val="108000"/>
+              </a:lnSpc>
+              <a:spcAft>
+                <a:spcPts val="200"/>
+              </a:spcAft>
+            </a:pPr>
+            <a:r>
+              <a:rPr sz="1350" b="0" i="0">
+                <a:solidFill>
+                  <a:srgbClr val="93A0B6"/>
+                </a:solidFill>
+                <a:latin typeface="Arial"/>
+              </a:rPr>
+              <a:t>A controllable infield bat and a reliever, funded from the pitching surplus. Keep the vets — they're playoff innings now.</a:t>
+            </a:r>
+          </a:p>
+        </p:txBody>
+      </p:sp>
+      <p:sp>
+        <p:nvSpPr>
+          <p:cNvPr id="6" name="Rounded Rectangle 5"/>
+          <p:cNvSpPr/>
+          <p:nvPr/>
+        </p:nvSpPr>
+        <p:spPr>
+          <a:xfrm>
+            <a:off x="640080" y="2971800"/>
+            <a:ext cx="457200" cy="457200"/>
+          </a:xfrm>
+          <a:prstGeom prst="roundRect">
+            <a:avLst>
+              <a:gd name="adj" fmla="val 18000"/>
+            </a:avLst>
+          </a:prstGeom>
+          <a:solidFill>
+            <a:srgbClr val="E8615A"/>
+          </a:solidFill>
+          <a:ln>
+            <a:noFill/>
+          </a:ln>
+          <a:effectLst/>
+        </p:spPr>
+        <p:style>
+          <a:lnRef idx="1">
+            <a:schemeClr val="accent1"/>
+          </a:lnRef>
+          <a:fillRef idx="3">
+            <a:schemeClr val="accent1"/>
+          </a:fillRef>
+          <a:effectRef idx="2">
+            <a:schemeClr val="accent1"/>
+          </a:effectRef>
+          <a:fontRef idx="minor">
+            <a:schemeClr val="lt1"/>
+          </a:fontRef>
+        </p:style>
+        <p:txBody>
+          <a:bodyPr rtlCol="0" anchor="ctr" wrap="none"/>
+          <a:lstStyle/>
+          <a:p>
+            <a:pPr algn="ctr"/>
+            <a:r>
+              <a:rPr sz="1800" b="1">
+                <a:solidFill>
+                  <a:srgbClr val="0B1220"/>
+                </a:solidFill>
+                <a:latin typeface="Courier New"/>
+              </a:rPr>
+              <a:t>2</a:t>
+            </a:r>
+          </a:p>
+        </p:txBody>
+      </p:sp>
+      <p:sp>
+        <p:nvSpPr>
+          <p:cNvPr id="7" name="TextBox 6"/>
+          <p:cNvSpPr txBox="1"/>
+          <p:nvPr/>
+        </p:nvSpPr>
+        <p:spPr>
+          <a:xfrm>
+            <a:off x="1280160" y="2953512"/>
+            <a:ext cx="6126480" cy="1005840"/>
+          </a:xfrm>
+          <a:prstGeom prst="rect">
+            <a:avLst/>
+          </a:prstGeom>
+          <a:noFill/>
+        </p:spPr>
+        <p:txBody>
+          <a:bodyPr wrap="square" anchor="t" lIns="0" rIns="0" tIns="0" bIns="0">
+            <a:spAutoFit/>
+          </a:bodyPr>
+          <a:lstStyle/>
+          <a:p>
+            <a:pPr algn="l">
+              <a:lnSpc>
+                <a:spcPct val="108000"/>
+              </a:lnSpc>
+              <a:spcAft>
+                <a:spcPts val="200"/>
+              </a:spcAft>
+            </a:pPr>
+            <a:r>
+              <a:rPr sz="1700" b="1" i="0">
+                <a:solidFill>
+                  <a:srgbClr val="EAF0F8"/>
+                </a:solidFill>
+                <a:latin typeface="Arial"/>
+              </a:rPr>
+              <a:t>Hold Duran through August</a:t>
+            </a:r>
+          </a:p>
+          <a:p>
+            <a:pPr algn="l">
+              <a:lnSpc>
+                <a:spcPct val="108000"/>
+              </a:lnSpc>
+              <a:spcAft>
+                <a:spcPts val="200"/>
+              </a:spcAft>
+            </a:pPr>
+            <a:r>
+              <a:rPr sz="1350" b="0" i="0">
+                <a:solidFill>
+                  <a:srgbClr val="93A0B6"/>
+                </a:solidFill>
+                <a:latin typeface="Arial"/>
+              </a:rPr>
+              <a:t>His value is at its nadir and his July contact quality (~.35 xwOBA) is already surging. Selling now cashes the slump.</a:t>
+            </a:r>
+          </a:p>
+        </p:txBody>
+      </p:sp>
+      <p:sp>
+        <p:nvSpPr>
+          <p:cNvPr id="8" name="Rounded Rectangle 7"/>
+          <p:cNvSpPr/>
+          <p:nvPr/>
+        </p:nvSpPr>
+        <p:spPr>
+          <a:xfrm>
+            <a:off x="640080" y="4142231"/>
+            <a:ext cx="457200" cy="457200"/>
+          </a:xfrm>
+          <a:prstGeom prst="roundRect">
+            <a:avLst>
+              <a:gd name="adj" fmla="val 18000"/>
+            </a:avLst>
+          </a:prstGeom>
+          <a:solidFill>
+            <a:srgbClr val="E8615A"/>
+          </a:solidFill>
+          <a:ln>
+            <a:noFill/>
+          </a:ln>
+          <a:effectLst/>
+        </p:spPr>
+        <p:style>
+          <a:lnRef idx="1">
+            <a:schemeClr val="accent1"/>
+          </a:lnRef>
+          <a:fillRef idx="3">
+            <a:schemeClr val="accent1"/>
+          </a:fillRef>
+          <a:effectRef idx="2">
+            <a:schemeClr val="accent1"/>
+          </a:effectRef>
+          <a:fontRef idx="minor">
+            <a:schemeClr val="lt1"/>
+          </a:fontRef>
+        </p:style>
+        <p:txBody>
+          <a:bodyPr rtlCol="0" anchor="ctr" wrap="none"/>
+          <a:lstStyle/>
+          <a:p>
+            <a:pPr algn="ctr"/>
+            <a:r>
+              <a:rPr sz="1800" b="1">
+                <a:solidFill>
+                  <a:srgbClr val="0B1220"/>
+                </a:solidFill>
+                <a:latin typeface="Courier New"/>
+              </a:rPr>
+              <a:t>3</a:t>
+            </a:r>
+          </a:p>
+        </p:txBody>
+      </p:sp>
+      <p:sp>
+        <p:nvSpPr>
+          <p:cNvPr id="9" name="TextBox 8"/>
+          <p:cNvSpPr txBox="1"/>
+          <p:nvPr/>
+        </p:nvSpPr>
+        <p:spPr>
+          <a:xfrm>
+            <a:off x="1280160" y="4123944"/>
+            <a:ext cx="6126480" cy="1005840"/>
+          </a:xfrm>
+          <a:prstGeom prst="rect">
+            <a:avLst/>
+          </a:prstGeom>
+          <a:noFill/>
+        </p:spPr>
+        <p:txBody>
+          <a:bodyPr wrap="square" anchor="t" lIns="0" rIns="0" tIns="0" bIns="0">
+            <a:spAutoFit/>
+          </a:bodyPr>
+          <a:lstStyle/>
+          <a:p>
+            <a:pPr algn="l">
+              <a:lnSpc>
+                <a:spcPct val="108000"/>
+              </a:lnSpc>
+              <a:spcAft>
+                <a:spcPts val="200"/>
+              </a:spcAft>
+            </a:pPr>
+            <a:r>
+              <a:rPr sz="1700" b="1" i="0">
+                <a:solidFill>
+                  <a:srgbClr val="EAF0F8"/>
+                </a:solidFill>
+                <a:latin typeface="Arial"/>
+              </a:rPr>
+              <a:t>Winter: re-price, then choose</a:t>
+            </a:r>
+          </a:p>
+          <a:p>
+            <a:pPr algn="l">
+              <a:lnSpc>
+                <a:spcPct val="108000"/>
+              </a:lnSpc>
+              <a:spcAft>
+                <a:spcPts val="200"/>
+              </a:spcAft>
+            </a:pPr>
+            <a:r>
+              <a:rPr sz="1350" b="0" i="0">
+                <a:solidFill>
+                  <a:srgbClr val="93A0B6"/>
+                </a:solidFill>
+                <a:latin typeface="Arial"/>
+              </a:rPr>
+              <a:t>Anthony healthy, jam returns. Rebound confirmed → extend or trade at full price. Erosion persists → sell at market. Either way, the 2027 OF is Anthony / Rafaela / Abreu.</a:t>
+            </a:r>
+          </a:p>
+        </p:txBody>
+      </p:sp>
+      <p:sp>
+        <p:nvSpPr>
+          <p:cNvPr id="10" name="Rounded Rectangle 9"/>
+          <p:cNvSpPr/>
+          <p:nvPr/>
+        </p:nvSpPr>
+        <p:spPr>
+          <a:xfrm>
+            <a:off x="7818120" y="1783080"/>
+            <a:ext cx="3794760" cy="3337560"/>
+          </a:xfrm>
+          <a:prstGeom prst="roundRect">
+            <a:avLst>
+              <a:gd name="adj" fmla="val 6000"/>
+            </a:avLst>
+          </a:prstGeom>
+          <a:solidFill>
+            <a:srgbClr val="1A2740"/>
+          </a:solidFill>
+          <a:ln>
+            <a:noFill/>
+          </a:ln>
+          <a:effectLst/>
+        </p:spPr>
+        <p:style>
+          <a:lnRef idx="1">
+            <a:schemeClr val="accent1"/>
+          </a:lnRef>
+          <a:fillRef idx="3">
+            <a:schemeClr val="accent1"/>
+          </a:fillRef>
+          <a:effectRef idx="2">
+            <a:schemeClr val="accent1"/>
+          </a:effectRef>
+          <a:fontRef idx="minor">
+            <a:schemeClr val="lt1"/>
+          </a:fontRef>
+        </p:style>
+        <p:txBody>
+          <a:bodyPr rtlCol="0" anchor="ctr"/>
+          <a:lstStyle/>
+          <a:p>
+            <a:pPr algn="ctr"/>
+          </a:p>
+        </p:txBody>
+      </p:sp>
+      <p:sp>
+        <p:nvSpPr>
+          <p:cNvPr id="11" name="TextBox 10"/>
+          <p:cNvSpPr txBox="1"/>
+          <p:nvPr/>
+        </p:nvSpPr>
+        <p:spPr>
+          <a:xfrm>
+            <a:off x="8092440" y="2011680"/>
+            <a:ext cx="3291840" cy="365760"/>
+          </a:xfrm>
+          <a:prstGeom prst="rect">
+            <a:avLst/>
+          </a:prstGeom>
+          <a:noFill/>
+        </p:spPr>
+        <p:txBody>
+          <a:bodyPr wrap="square" anchor="t" lIns="0" rIns="0" tIns="0" bIns="0">
+            <a:spAutoFit/>
+          </a:bodyPr>
+          <a:lstStyle/>
+          <a:p>
+            <a:pPr algn="l">
+              <a:lnSpc>
+                <a:spcPct val="100000"/>
+              </a:lnSpc>
+              <a:spcAft>
+                <a:spcPts val="0"/>
+              </a:spcAft>
+            </a:pPr>
+            <a:r>
+              <a:rPr sz="1250" b="1" i="0">
+                <a:solidFill>
+                  <a:srgbClr val="C9D2E3"/>
+                </a:solidFill>
+                <a:latin typeface="Arial"/>
+              </a:rPr>
+              <a:t>THE RETURN</a:t>
+            </a:r>
+          </a:p>
+        </p:txBody>
+      </p:sp>
+      <p:sp>
+        <p:nvSpPr>
+          <p:cNvPr id="12" name="TextBox 11"/>
+          <p:cNvSpPr txBox="1"/>
+          <p:nvPr/>
+        </p:nvSpPr>
+        <p:spPr>
+          <a:xfrm>
+            <a:off x="8092440" y="2487168"/>
+            <a:ext cx="3291840" cy="914400"/>
+          </a:xfrm>
+          <a:prstGeom prst="rect">
+            <a:avLst/>
+          </a:prstGeom>
+          <a:noFill/>
+        </p:spPr>
+        <p:txBody>
+          <a:bodyPr wrap="square" anchor="t" lIns="0" rIns="0" tIns="0" bIns="0">
+            <a:spAutoFit/>
+          </a:bodyPr>
+          <a:lstStyle/>
+          <a:p>
+            <a:pPr algn="l">
+              <a:lnSpc>
+                <a:spcPct val="105000"/>
+              </a:lnSpc>
+              <a:spcAft>
+                <a:spcPts val="200"/>
+              </a:spcAft>
+            </a:pPr>
+            <a:r>
+              <a:rPr sz="1300" b="1" i="0">
+                <a:solidFill>
+                  <a:srgbClr val="F0B8BC"/>
+                </a:solidFill>
+                <a:latin typeface="Arial"/>
+              </a:rPr>
+              <a:t>Sell now (nadir)</a:t>
+            </a:r>
+          </a:p>
+          <a:p>
+            <a:pPr algn="l">
+              <a:lnSpc>
+                <a:spcPct val="105000"/>
+              </a:lnSpc>
+              <a:spcAft>
+                <a:spcPts val="200"/>
+              </a:spcAft>
+            </a:pPr>
+            <a:r>
+              <a:rPr sz="1400" b="0" i="0">
+                <a:solidFill>
+                  <a:srgbClr val="F4F7FC"/>
+                </a:solidFill>
+                <a:latin typeface="Arial"/>
+              </a:rPr>
+              <a:t>~$10–15M · a 45-FV bat</a:t>
+            </a:r>
+          </a:p>
+        </p:txBody>
+      </p:sp>
+      <p:sp>
+        <p:nvSpPr>
+          <p:cNvPr id="13" name="TextBox 12"/>
+          <p:cNvSpPr txBox="1"/>
+          <p:nvPr/>
+        </p:nvSpPr>
+        <p:spPr>
+          <a:xfrm>
+            <a:off x="8092440" y="3520440"/>
+            <a:ext cx="3291840" cy="1005840"/>
+          </a:xfrm>
+          <a:prstGeom prst="rect">
+            <a:avLst/>
+          </a:prstGeom>
+          <a:noFill/>
+        </p:spPr>
+        <p:txBody>
+          <a:bodyPr wrap="square" anchor="t" lIns="0" rIns="0" tIns="0" bIns="0">
+            <a:spAutoFit/>
+          </a:bodyPr>
+          <a:lstStyle/>
+          <a:p>
+            <a:pPr algn="l">
+              <a:lnSpc>
+                <a:spcPct val="105000"/>
+              </a:lnSpc>
+              <a:spcAft>
+                <a:spcPts val="200"/>
+              </a:spcAft>
+            </a:pPr>
+            <a:r>
+              <a:rPr sz="1300" b="1" i="0">
+                <a:solidFill>
+                  <a:srgbClr val="A9E5B5"/>
+                </a:solidFill>
+                <a:latin typeface="Arial"/>
+              </a:rPr>
+              <a:t>Sell after rebound</a:t>
+            </a:r>
+          </a:p>
+          <a:p>
+            <a:pPr algn="l">
+              <a:lnSpc>
+                <a:spcPct val="105000"/>
+              </a:lnSpc>
+              <a:spcAft>
+                <a:spcPts val="200"/>
+              </a:spcAft>
+            </a:pPr>
+            <a:r>
+              <a:rPr sz="1400" b="0" i="0">
+                <a:solidFill>
+                  <a:srgbClr val="F4F7FC"/>
+                </a:solidFill>
+                <a:latin typeface="Arial"/>
+              </a:rPr>
+              <a:t>~$28M · a 50-FV, top-100</a:t>
+            </a:r>
+          </a:p>
+          <a:p>
+            <a:pPr algn="l">
+              <a:lnSpc>
+                <a:spcPct val="105000"/>
+              </a:lnSpc>
+              <a:spcAft>
+                <a:spcPts val="200"/>
+              </a:spcAft>
+            </a:pPr>
+            <a:r>
+              <a:rPr sz="1400" b="0" i="0">
+                <a:solidFill>
+                  <a:srgbClr val="F4F7FC"/>
+                </a:solidFill>
+                <a:latin typeface="Arial"/>
+              </a:rPr>
+              <a:t>controllable talent</a:t>
+            </a:r>
+          </a:p>
+        </p:txBody>
+      </p:sp>
+      <p:sp>
+        <p:nvSpPr>
+          <p:cNvPr id="14" name="TextBox 13"/>
+          <p:cNvSpPr txBox="1"/>
+          <p:nvPr/>
+        </p:nvSpPr>
+        <p:spPr>
+          <a:xfrm>
+            <a:off x="8092440" y="4617720"/>
+            <a:ext cx="3291840" cy="457200"/>
+          </a:xfrm>
+          <a:prstGeom prst="rect">
+            <a:avLst/>
+          </a:prstGeom>
+          <a:noFill/>
+        </p:spPr>
+        <p:txBody>
+          <a:bodyPr wrap="square" anchor="t" lIns="0" rIns="0" tIns="0" bIns="0">
+            <a:spAutoFit/>
+          </a:bodyPr>
+          <a:lstStyle/>
+          <a:p>
+            <a:pPr algn="l">
+              <a:lnSpc>
+                <a:spcPct val="105000"/>
+              </a:lnSpc>
+              <a:spcAft>
+                <a:spcPts val="400"/>
+              </a:spcAft>
+            </a:pPr>
+            <a:r>
+              <a:rPr sz="1150" b="0" i="1">
+                <a:solidFill>
+                  <a:srgbClr val="C9D2E3"/>
+                </a:solidFill>
+                <a:latin typeface="Arial"/>
+              </a:rPr>
+              <a:t>One grade of return = the reason to wait.</a:t>
+            </a:r>
+          </a:p>
+        </p:txBody>
+      </p:sp>
+      <p:sp>
+        <p:nvSpPr>
+          <p:cNvPr id="15" name="TextBox 14"/>
+          <p:cNvSpPr txBox="1"/>
+          <p:nvPr/>
+        </p:nvSpPr>
+        <p:spPr>
+          <a:xfrm>
+            <a:off x="566928" y="6510528"/>
+            <a:ext cx="11064240" cy="274320"/>
+          </a:xfrm>
+          <a:prstGeom prst="rect">
+            <a:avLst/>
+          </a:prstGeom>
+          <a:noFill/>
+        </p:spPr>
+        <p:txBody>
+          <a:bodyPr wrap="square" anchor="t" lIns="0" rIns="0" tIns="0" bIns="0">
+            <a:spAutoFit/>
+          </a:bodyPr>
+          <a:lstStyle/>
+          <a:p>
+            <a:pPr algn="l">
+              <a:lnSpc>
+                <a:spcPct val="100000"/>
+              </a:lnSpc>
+              <a:spcAft>
+                <a:spcPts val="0"/>
+              </a:spcAft>
+            </a:pPr>
+            <a:r>
+              <a:rPr sz="800" b="1" i="0">
+                <a:solidFill>
+                  <a:srgbClr val="E8615A"/>
+                </a:solidFill>
+                <a:latin typeface="Courier New"/>
+              </a:rPr>
+              <a:t>BOS // OUTFIELD STRATEGY</a:t>
+            </a:r>
+            <a:r>
+              <a:rPr sz="800" b="0" i="0">
+                <a:solidFill>
+                  <a:srgbClr val="5E6B84"/>
+                </a:solidFill>
+                <a:latin typeface="Courier New"/>
+              </a:rPr>
+              <a:t>   STATCAST / FANGRAPHS / MLB STATS API / SPOTRAC · JULY 2026</a:t>
+            </a:r>
+          </a:p>
+        </p:txBody>
+      </p:sp>
+    </p:spTree>
+  </p:cSld>
+  <p:clrMapOvr>
+    <a:masterClrMapping/>
+  </p:clrMapOvr>
+</p:sld>
+</file>
+
+<file path=ppt/slides/slide17.xml><?xml version="1.0" encoding="utf-8"?>
 <p:sld xmlns:a="http://schemas.openxmlformats.org/drawingml/2006/main" xmlns:p="http://schemas.openxmlformats.org/presentationml/2006/main" xmlns:r="http://schemas.openxmlformats.org/officeDocument/2006/relationships">
   <p:cSld>
     <p:bg>
@@ -7954,7 +8568,7 @@
                 </a:solidFill>
                 <a:latin typeface="Arial"/>
               </a:rPr>
-              <a:t>75% playoff odds, +45 run differential, a wild card in hand — buy targeted (a shortstop, a reliever), keep the vets, and let the record keep catching up to the process.</a:t>
+              <a:t>78% playoff odds, +46 run differential, a wild card in hand — buy small (a reliever first), keep the vets, and let the record keep catching up to the process.</a:t>
             </a:r>
           </a:p>
         </p:txBody>
@@ -8139,7 +8753,7 @@
                 </a:solidFill>
                 <a:latin typeface="Arial"/>
               </a:rPr>
-              <a:t>Quarantine the dead money.  </a:t>
+              <a:t>Stop fighting the Yoshida deal.  </a:t>
             </a:r>
             <a:r>
               <a:rPr sz="1500" b="0" i="0">
@@ -8148,7 +8762,7 @@
                 </a:solidFill>
                 <a:latin typeface="Arial"/>
               </a:rPr>
-              <a:t>Absorb Yoshida; free the 2027 payroll and the DH slot.</a:t>
+              <a:t>The bat is back to average or better; absorb the contract and let it expire.</a:t>
             </a:r>
           </a:p>
         </p:txBody>
@@ -8399,7 +9013,7 @@
                 </a:solidFill>
                 <a:latin typeface="Arial"/>
               </a:rPr>
-              <a:t>W13</a:t>
+              <a:t>W14</a:t>
             </a:r>
           </a:p>
         </p:txBody>
@@ -8573,7 +9187,7 @@
                 </a:solidFill>
                 <a:latin typeface="Arial"/>
               </a:rPr>
-              <a:t>+45</a:t>
+              <a:t>+46</a:t>
             </a:r>
           </a:p>
         </p:txBody>
@@ -8657,7 +9271,7 @@
                 </a:solidFill>
                 <a:latin typeface="Arial"/>
               </a:rPr>
-              <a:t>a Pythagorean .553 team wearing a .510 record</a:t>
+              <a:t>a Pythagorean .553 team wearing a .515 record</a:t>
             </a:r>
           </a:p>
         </p:txBody>
@@ -8747,7 +9361,7 @@
                 </a:solidFill>
                 <a:latin typeface="Arial"/>
               </a:rPr>
-              <a:t>75%</a:t>
+              <a:t>78%</a:t>
             </a:r>
           </a:p>
         </p:txBody>
@@ -8831,7 +9445,7 @@
                 </a:solidFill>
                 <a:latin typeface="Arial"/>
               </a:rPr>
-              <a:t>10,000 sims — holding the final wild card (fig. 12)</a:t>
+              <a:t>10,000 sims of the rest of the season (fig. 12)</a:t>
             </a:r>
           </a:p>
         </p:txBody>
@@ -8882,7 +9496,7 @@
                 </a:solidFill>
                 <a:latin typeface="Arial"/>
               </a:rPr>
-              <a:t>But the record was lying — the run differential said so all along, and the streak is the correction arriving. The outfield jam, still </a:t>
+              <a:t>But the record was lying; the run differential said so all season, and the streak closed the gap. The outfield jam, still </a:t>
             </a:r>
             <a:r>
               <a:rPr sz="1500" b="1" i="0">
@@ -10712,7 +11326,7 @@
                 </a:solidFill>
                 <a:latin typeface="Arial"/>
               </a:rPr>
-              <a:t>The two that don't fit: a redundant bat and a dead contract</a:t>
+              <a:t>The two hard cases: a redundant bat and an underwater contract</a:t>
             </a:r>
           </a:p>
         </p:txBody>
@@ -11258,7 +11872,7 @@
                 </a:solidFill>
                 <a:latin typeface="Arial"/>
               </a:rPr>
-              <a:t>Dead money. </a:t>
+              <a:t>The contract, not the bat. </a:t>
             </a:r>
             <a:r>
               <a:rPr sz="1300" b="0" i="0">
@@ -11267,7 +11881,7 @@
                 </a:solidFill>
                 <a:latin typeface="Arial"/>
               </a:rPr>
-              <a:t>$18.6M through 2027 for a DH-only, below-average bat. Negative trade value.</a:t>
+              <a:t>He's hitting: above-average wRC+, .340-class OBP, one of MLB's lowest strikeout rates. $18.6M for a DH is still underwater as an asset.</a:t>
             </a:r>
           </a:p>
         </p:txBody>
@@ -11355,7 +11969,7 @@
                 </a:solidFill>
                 <a:latin typeface="Arial"/>
               </a:rPr>
-              <a:t>Absorb, don't chase. </a:t>
+              <a:t>Keep him in the lineup. </a:t>
             </a:r>
             <a:r>
               <a:rPr sz="1300" b="0" i="0">
@@ -11364,7 +11978,7 @@
                 </a:solidFill>
                 <a:latin typeface="Arial"/>
               </a:rPr>
-              <a:t>Now platooning with Romy Gonzalez — as prescribed. Let it expire; move only in a partial salary-dump.</a:t>
+              <a:t>Gonzalez covers the tougher lefties. Absorb the deal, let it expire — move money only in a genuinely neutral swap.</a:t>
             </a:r>
           </a:p>
         </p:txBody>

--- a/outputs/Red_Sox_Outfield_Strategy.pptx
+++ b/outputs/Red_Sox_Outfield_Strategy.pptx
@@ -3237,7 +3237,7 @@
                 </a:solidFill>
                 <a:latin typeface="Arial"/>
               </a:rPr>
-              <a:t>They Won 14 Straight.</a:t>
+              <a:t>Don't Count Out</a:t>
             </a:r>
           </a:p>
           <a:p>
@@ -3256,7 +3256,7 @@
                 </a:solidFill>
                 <a:latin typeface="Arial"/>
               </a:rPr>
-              <a:t>Now Comes the Hard Part</a:t>
+              <a:t>The Sox.</a:t>
             </a:r>
           </a:p>
         </p:txBody>
@@ -3298,7 +3298,7 @@
                 </a:solidFill>
                 <a:latin typeface="Arial"/>
               </a:rPr>
-              <a:t>The hottest team in baseball was supposed to sell. A deadline case study: why the run differential saw the streak coming, what Boston should buy, and what it should leave alone.</a:t>
+              <a:t>The hottest team in baseball was supposed to sell. A lookahead to trade deadline thoughts.</a:t>
             </a:r>
           </a:p>
         </p:txBody>
@@ -3902,7 +3902,7 @@
                 </a:solidFill>
                 <a:latin typeface="Arial"/>
               </a:rPr>
-              <a:t>The winter's reported sell candidate is now their best hitter. Moving him would be surrender priced as prudence.</a:t>
+              <a:t>The winter's reported sell candidate is now their best hitter. Moving him would be met with outrage.</a:t>
             </a:r>
           </a:p>
         </p:txBody>
@@ -4063,7 +4063,7 @@
                 </a:solidFill>
                 <a:latin typeface="Arial"/>
               </a:rPr>
-              <a:t>Two catchers, one assignment system — don't touch it</a:t>
+              <a:t>Don't Mess Up The Pitching Staff</a:t>
             </a:r>
           </a:p>
         </p:txBody>
@@ -4676,7 +4676,7 @@
                 </a:solidFill>
                 <a:latin typeface="Arial"/>
               </a:rPr>
-              <a:t>Two custom models behind the calls — built and validated here</a:t>
+              <a:t>Two custom models behind the calls</a:t>
             </a:r>
           </a:p>
         </p:txBody>
@@ -5289,7 +5289,7 @@
                 </a:solidFill>
                 <a:latin typeface="Arial"/>
               </a:rPr>
-              <a:t>Three trades that fit — and the walk-away. Keep it small</a:t>
+              <a:t>Three trades that fit, and one walk-away</a:t>
             </a:r>
           </a:p>
         </p:txBody>
@@ -6197,7 +6197,7 @@
                 </a:solidFill>
                 <a:latin typeface="Arial"/>
               </a:rPr>
-              <a:t>Pitching is the strength — spend the surplus on offense</a:t>
+              <a:t>Spend the pitching surplus on offense</a:t>
             </a:r>
           </a:p>
         </p:txBody>
@@ -8568,7 +8568,7 @@
                 </a:solidFill>
                 <a:latin typeface="Arial"/>
               </a:rPr>
-              <a:t>78% playoff odds, +46 run differential, a wild card in hand — buy small (a reliever first), keep the vets, and let the record keep catching up to the process.</a:t>
+              <a:t>77% playoff odds, +46 run differential, a wild card in hand — buy small (a reliever first), keep the vets, and let the record keep catching up to the process.</a:t>
             </a:r>
           </a:p>
         </p:txBody>
@@ -8923,7 +8923,7 @@
                 </a:solidFill>
                 <a:latin typeface="Arial"/>
               </a:rPr>
-              <a:t>The hottest team in baseball — and the math saw it coming</a:t>
+              <a:t>The hottest team in baseball</a:t>
             </a:r>
           </a:p>
         </p:txBody>
@@ -9271,7 +9271,7 @@
                 </a:solidFill>
                 <a:latin typeface="Arial"/>
               </a:rPr>
-              <a:t>a Pythagorean .553 team wearing a .515 record</a:t>
+              <a:t>outplaying their .515 record all season</a:t>
             </a:r>
           </a:p>
         </p:txBody>
@@ -9361,7 +9361,7 @@
                 </a:solidFill>
                 <a:latin typeface="Arial"/>
               </a:rPr>
-              <a:t>78%</a:t>
+              <a:t>77%</a:t>
             </a:r>
           </a:p>
         </p:txBody>
@@ -9496,7 +9496,7 @@
                 </a:solidFill>
                 <a:latin typeface="Arial"/>
               </a:rPr>
-              <a:t>But the record was lying; the run differential said so all season, and the streak closed the gap. The outfield jam, still </a:t>
+              <a:t>The outfield jam, still </a:t>
             </a:r>
             <a:r>
               <a:rPr sz="1500" b="1" i="0">
@@ -9675,7 +9675,7 @@
                 </a:solidFill>
                 <a:latin typeface="Arial"/>
               </a:rPr>
-              <a:t>BUY — but buy like the math, not like a panic</a:t>
+              <a:t>Buy, but keep it small</a:t>
             </a:r>
           </a:p>
         </p:txBody>
@@ -10223,7 +10223,7 @@
                 </a:solidFill>
                 <a:latin typeface="Arial"/>
               </a:rPr>
-              <a:t>The young, cheap, controllable core — that's the 2027 outfield</a:t>
+              <a:t>The young, cheap, controllable core</a:t>
             </a:r>
           </a:p>
         </p:txBody>
@@ -11546,7 +11546,7 @@
                 </a:solidFill>
                 <a:latin typeface="Arial"/>
               </a:rPr>
-              <a:t>Movable piece — later. </a:t>
+              <a:t>Movable piece. </a:t>
             </a:r>
             <a:r>
               <a:rPr sz="1300" b="0" i="0">
@@ -11881,7 +11881,7 @@
                 </a:solidFill>
                 <a:latin typeface="Arial"/>
               </a:rPr>
-              <a:t>He's hitting: above-average wRC+, .340-class OBP, one of MLB's lowest strikeout rates. $18.6M for a DH is still underwater as an asset.</a:t>
+              <a:t>He's hitting: above-average wRC+, .340-class OBP, one of MLB's lowest strikeout rates. $18.6M for a DH with below-average pop is still underwater as an asset.</a:t>
             </a:r>
           </a:p>
         </p:txBody>
@@ -11978,7 +11978,7 @@
                 </a:solidFill>
                 <a:latin typeface="Arial"/>
               </a:rPr>
-              <a:t>Gonzalez covers the tougher lefties. Absorb the deal, let it expire — move money only in a genuinely neutral swap.</a:t>
+              <a:t>Gonzalez covers the tougher lefties. Absorb the deal, let it expire.</a:t>
             </a:r>
           </a:p>
         </p:txBody>
@@ -12139,7 +12139,7 @@
                 </a:solidFill>
                 <a:latin typeface="Arial"/>
               </a:rPr>
-              <a:t>Duran's 2026 is unlucky — not a true collapse</a:t>
+              <a:t>Duran's 2026 is unlucky</a:t>
             </a:r>
           </a:p>
         </p:txBody>
@@ -12251,7 +12251,7 @@
                 </a:solidFill>
                 <a:latin typeface="Arial"/>
               </a:rPr>
-              <a:t>2024 was earned, not a fluke</a:t>
+              <a:t>2024 was more what we should expect</a:t>
             </a:r>
           </a:p>
           <a:p>
@@ -12358,7 +12358,7 @@
                 </a:solidFill>
                 <a:latin typeface="Arial"/>
               </a:rPr>
-              <a:t>2026 is the real anomaly — downward</a:t>
+              <a:t>2026 is the real anomaly</a:t>
             </a:r>
           </a:p>
           <a:p>
@@ -12465,7 +12465,7 @@
                 </a:solidFill>
                 <a:latin typeface="Arial"/>
               </a:rPr>
-              <a:t>It isn't Fenway — and the legs are fine</a:t>
+              <a:t>The legs are fine</a:t>
             </a:r>
           </a:p>
           <a:p>
@@ -12484,7 +12484,7 @@
                 </a:solidFill>
                 <a:latin typeface="Arial"/>
               </a:rPr>
-              <a:t>Career gap +19 home / +19 road: identical — the skill travels. Speed, baserunning and fielding all still plus. No injury.</a:t>
+              <a:t>Career gap +19 home / +19 road: identical, the skill travels. Speed, baserunning and fielding all still plus. No injury.</a:t>
             </a:r>
           </a:p>
         </p:txBody>
@@ -12794,7 +12794,7 @@
                 </a:solidFill>
                 <a:latin typeface="Arial"/>
               </a:rPr>
-              <a:t>10,000 simulations: the rebound is likely — unless the erosion is real</a:t>
+              <a:t>10,000 simulations: the rebound is likely</a:t>
             </a:r>
           </a:p>
         </p:txBody>
@@ -13272,7 +13272,7 @@
                 </a:solidFill>
                 <a:latin typeface="Arial"/>
               </a:rPr>
-              <a:t>The bat speed says it's the approach — not the body</a:t>
+              <a:t>Swing Stats</a:t>
             </a:r>
           </a:p>
         </p:txBody>
@@ -13437,7 +13437,7 @@
                 </a:solidFill>
                 <a:latin typeface="Arial"/>
               </a:rPr>
-              <a:t>A declining hitter swings slower. Duran is swinging harder, longer and steeper — pressing, not fading.</a:t>
+              <a:t>Duran is swinging harder, longer and steeper. That's pressing, not fading.</a:t>
             </a:r>
           </a:p>
         </p:txBody>
@@ -13536,7 +13536,7 @@
                 </a:solidFill>
                 <a:latin typeface="Arial"/>
               </a:rPr>
-              <a:t>  up from 16% in '24 — but not bat-death</a:t>
+              <a:t>  up from 16% in '24</a:t>
             </a:r>
           </a:p>
         </p:txBody>
@@ -13880,7 +13880,7 @@
                 </a:solidFill>
                 <a:latin typeface="Arial"/>
               </a:rPr>
-              <a:t>Aging doesn't explain the drop — regression and luck do</a:t>
+              <a:t>Aging doesn't explain the drop</a:t>
             </a:r>
           </a:p>
         </p:txBody>
@@ -13955,7 +13955,7 @@
                 </a:solidFill>
                 <a:latin typeface="Arial"/>
               </a:rPr>
-              <a:t>The gap is mean-reversion from an inflated peak plus a 2026 bad-luck tail — not skill cliff.</a:t>
+              <a:t>The gap is mean-reversion from an inflated peak plus a 2026 bad-luck tail, not a skill cliff.</a:t>
             </a:r>
           </a:p>
         </p:txBody>

--- a/outputs/Red_Sox_Outfield_Strategy.pptx
+++ b/outputs/Red_Sox_Outfield_Strategy.pptx
@@ -22,6 +22,7 @@
     <p:sldId id="270" r:id="rId21"/>
     <p:sldId id="271" r:id="rId22"/>
     <p:sldId id="272" r:id="rId23"/>
+    <p:sldId id="273" r:id="rId24"/>
   </p:sldIdLst>
   <p:sldSz cx="12191695" cy="6858000" type="screen4x3"/>
   <p:notesSz cx="6858000" cy="9144000"/>
@@ -4021,7 +4022,7 @@
                 </a:solidFill>
                 <a:latin typeface="Courier New"/>
               </a:rPr>
-              <a:t>// THE CHEMISTRY VETO</a:t>
+              <a:t>// THE SUPPORTING CAST</a:t>
             </a:r>
           </a:p>
         </p:txBody>
@@ -4063,14 +4064,14 @@
                 </a:solidFill>
                 <a:latin typeface="Arial"/>
               </a:rPr>
-              <a:t>Don't Mess Up The Pitching Staff</a:t>
+              <a:t>Career years everywhere. That's a tailwind, not a foundation</a:t>
             </a:r>
           </a:p>
         </p:txBody>
       </p:sp>
       <p:pic>
         <p:nvPicPr>
-          <p:cNvPr id="4" name="Picture 3" descr="14_battery_map.png"/>
+          <p:cNvPr id="4" name="Picture 3" descr="17_aaaa_audit.png"/>
           <p:cNvPicPr>
             <a:picLocks noChangeAspect="1"/>
           </p:cNvPicPr>
@@ -4084,8 +4085,8 @@
         </p:blipFill>
         <p:spPr>
           <a:xfrm>
-            <a:off x="518160" y="1554480"/>
-            <a:ext cx="7010399" cy="4206240"/>
+            <a:off x="365760" y="1600200"/>
+            <a:ext cx="7315200" cy="3593431"/>
           </a:xfrm>
           <a:prstGeom prst="rect">
             <a:avLst/>
@@ -4175,7 +4176,7 @@
                 </a:solidFill>
                 <a:latin typeface="Arial"/>
               </a:rPr>
-              <a:t>The staff works with both</a:t>
+              <a:t>15 quad-A contributors</a:t>
             </a:r>
           </a:p>
           <a:p>
@@ -4194,7 +4195,7 @@
                 </a:solidFill>
                 <a:latin typeface="Arial"/>
               </a:rPr>
-              <a:t>3.44 RA9 with Wong, 4.17 with Narváez — the run-prevention core of the streak.</a:t>
+              <a:t>Waiver claims, up-down arms and career minor-leaguers holding real roles — +3.0 WAR combined.</a:t>
             </a:r>
           </a:p>
         </p:txBody>
@@ -4208,6 +4209,113 @@
         <p:spPr>
           <a:xfrm>
             <a:off x="8001000" y="2889504"/>
+            <a:ext cx="146304" cy="146304"/>
+          </a:xfrm>
+          <a:prstGeom prst="roundRect">
+            <a:avLst>
+              <a:gd name="adj" fmla="val 18000"/>
+            </a:avLst>
+          </a:prstGeom>
+          <a:solidFill>
+            <a:srgbClr val="E3B14E"/>
+          </a:solidFill>
+          <a:ln>
+            <a:noFill/>
+          </a:ln>
+          <a:effectLst/>
+        </p:spPr>
+        <p:style>
+          <a:lnRef idx="1">
+            <a:schemeClr val="accent1"/>
+          </a:lnRef>
+          <a:fillRef idx="3">
+            <a:schemeClr val="accent1"/>
+          </a:fillRef>
+          <a:effectRef idx="2">
+            <a:schemeClr val="accent1"/>
+          </a:effectRef>
+          <a:fontRef idx="minor">
+            <a:schemeClr val="lt1"/>
+          </a:fontRef>
+        </p:style>
+        <p:txBody>
+          <a:bodyPr rtlCol="0" anchor="ctr"/>
+          <a:lstStyle/>
+          <a:p>
+            <a:pPr algn="ctr"/>
+          </a:p>
+        </p:txBody>
+      </p:sp>
+      <p:sp>
+        <p:nvSpPr>
+          <p:cNvPr id="8" name="TextBox 7"/>
+          <p:cNvSpPr txBox="1"/>
+          <p:nvPr/>
+        </p:nvSpPr>
+        <p:spPr>
+          <a:xfrm>
+            <a:off x="8293608" y="2852928"/>
+            <a:ext cx="3749039" cy="1097280"/>
+          </a:xfrm>
+          <a:prstGeom prst="rect">
+            <a:avLst/>
+          </a:prstGeom>
+          <a:noFill/>
+        </p:spPr>
+        <p:txBody>
+          <a:bodyPr wrap="square" anchor="t" lIns="0" rIns="0" tIns="0" bIns="0">
+            <a:spAutoFit/>
+          </a:bodyPr>
+          <a:lstStyle/>
+          <a:p>
+            <a:pPr algn="l">
+              <a:lnSpc>
+                <a:spcPct val="107000"/>
+              </a:lnSpc>
+              <a:spcAft>
+                <a:spcPts val="200"/>
+              </a:spcAft>
+            </a:pPr>
+            <a:r>
+              <a:rPr sz="1350" b="1" i="0">
+                <a:solidFill>
+                  <a:srgbClr val="EAF0F8"/>
+                </a:solidFill>
+                <a:latin typeface="Arial"/>
+              </a:rPr>
+              <a:t>4 career bests, 4 rookies</a:t>
+            </a:r>
+          </a:p>
+          <a:p>
+            <a:pPr algn="l">
+              <a:lnSpc>
+                <a:spcPct val="107000"/>
+              </a:lnSpc>
+              <a:spcAft>
+                <a:spcPts val="200"/>
+              </a:spcAft>
+            </a:pPr>
+            <a:r>
+              <a:rPr sz="1160" b="0" i="0">
+                <a:solidFill>
+                  <a:srgbClr val="93A0B6"/>
+                </a:solidFill>
+                <a:latin typeface="Arial"/>
+              </a:rPr>
+              <a:t>Most of the returners are beating every season they've ever had; the rookies have no baseline at all.</a:t>
+            </a:r>
+          </a:p>
+        </p:txBody>
+      </p:sp>
+      <p:sp>
+        <p:nvSpPr>
+          <p:cNvPr id="9" name="Rounded Rectangle 8"/>
+          <p:cNvSpPr/>
+          <p:nvPr/>
+        </p:nvSpPr>
+        <p:spPr>
+          <a:xfrm>
+            <a:off x="8001000" y="4005072"/>
             <a:ext cx="146304" cy="146304"/>
           </a:xfrm>
           <a:prstGeom prst="roundRect">
@@ -4247,113 +4355,6 @@
       </p:sp>
       <p:sp>
         <p:nvSpPr>
-          <p:cNvPr id="8" name="TextBox 7"/>
-          <p:cNvSpPr txBox="1"/>
-          <p:nvPr/>
-        </p:nvSpPr>
-        <p:spPr>
-          <a:xfrm>
-            <a:off x="8293608" y="2852928"/>
-            <a:ext cx="3749039" cy="1097280"/>
-          </a:xfrm>
-          <a:prstGeom prst="rect">
-            <a:avLst/>
-          </a:prstGeom>
-          <a:noFill/>
-        </p:spPr>
-        <p:txBody>
-          <a:bodyPr wrap="square" anchor="t" lIns="0" rIns="0" tIns="0" bIns="0">
-            <a:spAutoFit/>
-          </a:bodyPr>
-          <a:lstStyle/>
-          <a:p>
-            <a:pPr algn="l">
-              <a:lnSpc>
-                <a:spcPct val="107000"/>
-              </a:lnSpc>
-              <a:spcAft>
-                <a:spcPts val="200"/>
-              </a:spcAft>
-            </a:pPr>
-            <a:r>
-              <a:rPr sz="1350" b="1" i="0">
-                <a:solidFill>
-                  <a:srgbClr val="EAF0F8"/>
-                </a:solidFill>
-                <a:latin typeface="Arial"/>
-              </a:rPr>
-              <a:t>Every arm has a guy</a:t>
-            </a:r>
-          </a:p>
-          <a:p>
-            <a:pPr algn="l">
-              <a:lnSpc>
-                <a:spcPct val="107000"/>
-              </a:lnSpc>
-              <a:spcAft>
-                <a:spcPts val="200"/>
-              </a:spcAft>
-            </a:pPr>
-            <a:r>
-              <a:rPr sz="1160" b="0" i="0">
-                <a:solidFill>
-                  <a:srgbClr val="93A0B6"/>
-                </a:solidFill>
-                <a:latin typeface="Arial"/>
-              </a:rPr>
-              <a:t>Raw pairings look dramatic (fig. 14) — but small samples shrink hard (fig. 15). What survives: settled, deliberate assignments.</a:t>
-            </a:r>
-          </a:p>
-        </p:txBody>
-      </p:sp>
-      <p:sp>
-        <p:nvSpPr>
-          <p:cNvPr id="9" name="Rounded Rectangle 8"/>
-          <p:cNvSpPr/>
-          <p:nvPr/>
-        </p:nvSpPr>
-        <p:spPr>
-          <a:xfrm>
-            <a:off x="8001000" y="4005072"/>
-            <a:ext cx="146304" cy="146304"/>
-          </a:xfrm>
-          <a:prstGeom prst="roundRect">
-            <a:avLst>
-              <a:gd name="adj" fmla="val 18000"/>
-            </a:avLst>
-          </a:prstGeom>
-          <a:solidFill>
-            <a:srgbClr val="E3B14E"/>
-          </a:solidFill>
-          <a:ln>
-            <a:noFill/>
-          </a:ln>
-          <a:effectLst/>
-        </p:spPr>
-        <p:style>
-          <a:lnRef idx="1">
-            <a:schemeClr val="accent1"/>
-          </a:lnRef>
-          <a:fillRef idx="3">
-            <a:schemeClr val="accent1"/>
-          </a:fillRef>
-          <a:effectRef idx="2">
-            <a:schemeClr val="accent1"/>
-          </a:effectRef>
-          <a:fontRef idx="minor">
-            <a:schemeClr val="lt1"/>
-          </a:fontRef>
-        </p:style>
-        <p:txBody>
-          <a:bodyPr rtlCol="0" anchor="ctr"/>
-          <a:lstStyle/>
-          <a:p>
-            <a:pPr algn="ctr"/>
-          </a:p>
-        </p:txBody>
-      </p:sp>
-      <p:sp>
-        <p:nvSpPr>
           <p:cNvPr id="10" name="TextBox 9"/>
           <p:cNvSpPr txBox="1"/>
           <p:nvPr/>
@@ -4389,7 +4390,7 @@
                 </a:solidFill>
                 <a:latin typeface="Arial"/>
               </a:rPr>
-              <a:t>The pen is paired too</a:t>
+              <a:t>The process check</a:t>
             </a:r>
           </a:p>
           <a:p>
@@ -4408,7 +4409,7 @@
                 </a:solidFill>
                 <a:latin typeface="Arial"/>
               </a:rPr>
-              <a:t>Leverage relievers ride with a settled catcher — these innings aren't assigned at random.</a:t>
+              <a:t>Results sit within a few points of expected — they're earning it. The risk is track record: careers, not heaters, predict August.</a:t>
             </a:r>
           </a:p>
         </p:txBody>
@@ -4496,7 +4497,7 @@
                 </a:solidFill>
                 <a:latin typeface="Arial"/>
               </a:rPr>
-              <a:t>So: no catcher trade</a:t>
+              <a:t>So buy substance</a:t>
             </a:r>
           </a:p>
           <a:p>
@@ -4515,7 +4516,7 @@
                 </a:solidFill>
                 <a:latin typeface="Arial"/>
               </a:rPr>
-              <a:t>The adjusted model (pitcher/opponent/park controls) finds no significant catcher effect: -34 pts, 95% CI [-90, +22]. Nothing here for a trade to fix.</a:t>
+              <a:t>Replace borrowed production before August returns it: a real reliever over a career-year one, a real bat over a waiver claim on a heater.</a:t>
             </a:r>
           </a:p>
         </p:txBody>
@@ -4634,7 +4635,7 @@
                 </a:solidFill>
                 <a:latin typeface="Courier New"/>
               </a:rPr>
-              <a:t>// UNDER THE HOOD</a:t>
+              <a:t>// THE CHEMISTRY VETO</a:t>
             </a:r>
           </a:p>
         </p:txBody>
@@ -4676,14 +4677,14 @@
                 </a:solidFill>
                 <a:latin typeface="Arial"/>
               </a:rPr>
-              <a:t>Two custom models behind the calls</a:t>
+              <a:t>Don't Mess Up The Pitching Staff</a:t>
             </a:r>
           </a:p>
         </p:txBody>
       </p:sp>
       <p:pic>
         <p:nvPicPr>
-          <p:cNvPr id="4" name="Picture 3" descr="16_speed_model.png"/>
+          <p:cNvPr id="4" name="Picture 3" descr="14_battery_map.png"/>
           <p:cNvPicPr>
             <a:picLocks noChangeAspect="1"/>
           </p:cNvPicPr>
@@ -4697,8 +4698,8 @@
         </p:blipFill>
         <p:spPr>
           <a:xfrm>
-            <a:off x="383344" y="1554480"/>
-            <a:ext cx="7280030" cy="4206240"/>
+            <a:off x="518160" y="1554480"/>
+            <a:ext cx="7010399" cy="4206240"/>
           </a:xfrm>
           <a:prstGeom prst="rect">
             <a:avLst/>
@@ -4788,7 +4789,7 @@
                 </a:solidFill>
                 <a:latin typeface="Arial"/>
               </a:rPr>
-              <a:t>Speed-aware xBABIP / xwOBAcon</a:t>
+              <a:t>The staff works with both</a:t>
             </a:r>
           </a:p>
           <a:p>
@@ -4807,7 +4808,7 @@
                 </a:solidFill>
                 <a:latin typeface="Arial"/>
               </a:rPr>
-              <a:t>Gradient boosting on 76,373 league batted balls (EV, LA, spray ± sprint speed), 5-fold CV grouped by batter so every residual is out-of-sample.</a:t>
+              <a:t>3.42 RA9 with Wong, 4.20 with Narváez — the run-prevention core of the streak.</a:t>
             </a:r>
           </a:p>
         </p:txBody>
@@ -4895,7 +4896,7 @@
                 </a:solidFill>
                 <a:latin typeface="Arial"/>
               </a:rPr>
-              <a:t>The blind spot, measured</a:t>
+              <a:t>Every arm has a guy</a:t>
             </a:r>
           </a:p>
           <a:p>
@@ -4914,7 +4915,7 @@
                 </a:solidFill>
                 <a:latin typeface="Arial"/>
               </a:rPr>
-              <a:t>Speed-blind xstats under-predict the fastest decile by +19 pts of BABIP. Duran's speed term: +18 pts of wOBA on contact — inside the +5–14 band derived independently.</a:t>
+              <a:t>Raw pairings look dramatic (fig. 14) — but small samples shrink hard (fig. 15). What survives: settled, deliberate assignments.</a:t>
             </a:r>
           </a:p>
         </p:txBody>
@@ -5002,7 +5003,7 @@
                 </a:solidFill>
                 <a:latin typeface="Arial"/>
               </a:rPr>
-              <a:t>Adjusted battery model</a:t>
+              <a:t>The pen is paired too</a:t>
             </a:r>
           </a:p>
           <a:p>
@@ -5021,7 +5022,7 @@
                 </a:solidFill>
                 <a:latin typeface="Arial"/>
               </a:rPr>
-              <a:t>WOWY + fixed-effects OLS (pitcher/opponent/park), cluster-bootstrap CIs, empirical-Bayes shrinkage (fig. 15): raw splits are mostly noise; no significant catcher effect.</a:t>
+              <a:t>Leverage relievers ride with a settled catcher — these innings aren't assigned at random.</a:t>
             </a:r>
           </a:p>
         </p:txBody>
@@ -5109,7 +5110,7 @@
                 </a:solidFill>
                 <a:latin typeface="Arial"/>
               </a:rPr>
-              <a:t>Why it's credible</a:t>
+              <a:t>So: no catcher trade</a:t>
             </a:r>
           </a:p>
           <a:p>
@@ -5128,7 +5129,7 @@
                 </a:solidFill>
                 <a:latin typeface="Arial"/>
               </a:rPr>
-              <a:t>Out-of-sample everywhere, CIs on every headline, and frozen pre-registered predictions graded in October — flattering or not.</a:t>
+              <a:t>The adjusted model (pitcher/opponent/park controls) finds no significant catcher effect: -31 pts, 95% CI [-84, +21]. Nothing here for a trade to fix.</a:t>
             </a:r>
           </a:p>
         </p:txBody>
@@ -5247,7 +5248,7 @@
                 </a:solidFill>
                 <a:latin typeface="Courier New"/>
               </a:rPr>
-              <a:t>// THE MENU</a:t>
+              <a:t>// UNDER THE HOOD</a:t>
             </a:r>
           </a:p>
         </p:txBody>
@@ -5289,34 +5290,56 @@
                 </a:solidFill>
                 <a:latin typeface="Arial"/>
               </a:rPr>
-              <a:t>Three trades that fit, and one walk-away</a:t>
-            </a:r>
-          </a:p>
-        </p:txBody>
-      </p:sp>
-      <p:sp>
-        <p:nvSpPr>
-          <p:cNvPr id="4" name="Rounded Rectangle 3"/>
+              <a:t>Two custom models behind the calls</a:t>
+            </a:r>
+          </a:p>
+        </p:txBody>
+      </p:sp>
+      <p:pic>
+        <p:nvPicPr>
+          <p:cNvPr id="4" name="Picture 3" descr="16_speed_model.png"/>
+          <p:cNvPicPr>
+            <a:picLocks noChangeAspect="1"/>
+          </p:cNvPicPr>
+          <p:nvPr/>
+        </p:nvPicPr>
+        <p:blipFill>
+          <a:blip r:embed="rId2"/>
+          <a:stretch>
+            <a:fillRect/>
+          </a:stretch>
+        </p:blipFill>
+        <p:spPr>
+          <a:xfrm>
+            <a:off x="383344" y="1554480"/>
+            <a:ext cx="7280030" cy="4206240"/>
+          </a:xfrm>
+          <a:prstGeom prst="rect">
+            <a:avLst/>
+          </a:prstGeom>
+        </p:spPr>
+      </p:pic>
+      <p:sp>
+        <p:nvSpPr>
+          <p:cNvPr id="5" name="Rounded Rectangle 4"/>
           <p:cNvSpPr/>
           <p:nvPr/>
         </p:nvSpPr>
         <p:spPr>
           <a:xfrm>
-            <a:off x="566928" y="1691640"/>
-            <a:ext cx="5358384" cy="1938528"/>
+            <a:off x="8001000" y="1773936"/>
+            <a:ext cx="146304" cy="146304"/>
           </a:xfrm>
           <a:prstGeom prst="roundRect">
             <a:avLst>
-              <a:gd name="adj" fmla="val 6000"/>
+              <a:gd name="adj" fmla="val 18000"/>
             </a:avLst>
           </a:prstGeom>
           <a:solidFill>
-            <a:srgbClr val="121E33"/>
+            <a:srgbClr val="E8615A"/>
           </a:solidFill>
-          <a:ln w="12700">
-            <a:solidFill>
-              <a:srgbClr val="26334E"/>
-            </a:solidFill>
+          <a:ln>
+            <a:noFill/>
           </a:ln>
           <a:effectLst/>
         </p:spPr>
@@ -5344,116 +5367,51 @@
       </p:sp>
       <p:sp>
         <p:nvSpPr>
-          <p:cNvPr id="5" name="TextBox 4"/>
-          <p:cNvSpPr txBox="1"/>
-          <p:nvPr/>
-        </p:nvSpPr>
-        <p:spPr>
-          <a:xfrm>
-            <a:off x="822960" y="1856232"/>
-            <a:ext cx="4855464" cy="292608"/>
-          </a:xfrm>
-          <a:prstGeom prst="rect">
-            <a:avLst/>
-          </a:prstGeom>
-          <a:noFill/>
-        </p:spPr>
-        <p:txBody>
-          <a:bodyPr wrap="square" anchor="t" lIns="0" rIns="0" tIns="0" bIns="0">
-            <a:spAutoFit/>
-          </a:bodyPr>
-          <a:lstStyle/>
-          <a:p>
-            <a:pPr algn="l">
-              <a:lnSpc>
-                <a:spcPct val="100000"/>
-              </a:lnSpc>
-              <a:spcAft>
-                <a:spcPts val="0"/>
-              </a:spcAft>
-            </a:pPr>
-            <a:r>
-              <a:rPr sz="1100" b="1" i="0">
-                <a:solidFill>
-                  <a:srgbClr val="58C08D"/>
-                </a:solidFill>
-                <a:latin typeface="Arial"/>
-              </a:rPr>
-              <a:t>1 · THE PEN FIX · DO IT</a:t>
-            </a:r>
-          </a:p>
-        </p:txBody>
-      </p:sp>
-      <p:sp>
-        <p:nvSpPr>
           <p:cNvPr id="6" name="TextBox 5"/>
           <p:cNvSpPr txBox="1"/>
           <p:nvPr/>
         </p:nvSpPr>
         <p:spPr>
           <a:xfrm>
-            <a:off x="822960" y="2148840"/>
-            <a:ext cx="4855464" cy="365760"/>
-          </a:xfrm>
-          <a:prstGeom prst="rect">
-            <a:avLst/>
-          </a:prstGeom>
-          <a:noFill/>
-        </p:spPr>
-        <p:txBody>
-          <a:bodyPr wrap="square" anchor="t" lIns="0" rIns="0" tIns="0" bIns="0">
-            <a:spAutoFit/>
-          </a:bodyPr>
-          <a:lstStyle/>
-          <a:p>
-            <a:pPr algn="l">
-              <a:lnSpc>
-                <a:spcPct val="100000"/>
-              </a:lnSpc>
-              <a:spcAft>
-                <a:spcPts val="0"/>
-              </a:spcAft>
-            </a:pPr>
-            <a:r>
-              <a:rPr sz="1650" b="1" i="0">
+            <a:off x="8293608" y="1737360"/>
+            <a:ext cx="3749039" cy="1097280"/>
+          </a:xfrm>
+          <a:prstGeom prst="rect">
+            <a:avLst/>
+          </a:prstGeom>
+          <a:noFill/>
+        </p:spPr>
+        <p:txBody>
+          <a:bodyPr wrap="square" anchor="t" lIns="0" rIns="0" tIns="0" bIns="0">
+            <a:spAutoFit/>
+          </a:bodyPr>
+          <a:lstStyle/>
+          <a:p>
+            <a:pPr algn="l">
+              <a:lnSpc>
+                <a:spcPct val="107000"/>
+              </a:lnSpc>
+              <a:spcAft>
+                <a:spcPts val="200"/>
+              </a:spcAft>
+            </a:pPr>
+            <a:r>
+              <a:rPr sz="1350" b="1" i="0">
                 <a:solidFill>
                   <a:srgbClr val="EAF0F8"/>
                 </a:solidFill>
                 <a:latin typeface="Arial"/>
               </a:rPr>
-              <a:t>RHP Luke Weaver (NYM)</a:t>
-            </a:r>
-          </a:p>
-        </p:txBody>
-      </p:sp>
-      <p:sp>
-        <p:nvSpPr>
-          <p:cNvPr id="7" name="TextBox 6"/>
-          <p:cNvSpPr txBox="1"/>
-          <p:nvPr/>
-        </p:nvSpPr>
-        <p:spPr>
-          <a:xfrm>
-            <a:off x="822960" y="2560320"/>
-            <a:ext cx="4855464" cy="960120"/>
-          </a:xfrm>
-          <a:prstGeom prst="rect">
-            <a:avLst/>
-          </a:prstGeom>
-          <a:noFill/>
-        </p:spPr>
-        <p:txBody>
-          <a:bodyPr wrap="square" anchor="t" lIns="0" rIns="0" tIns="0" bIns="0">
-            <a:spAutoFit/>
-          </a:bodyPr>
-          <a:lstStyle/>
-          <a:p>
-            <a:pPr algn="l">
-              <a:lnSpc>
-                <a:spcPct val="110000"/>
-              </a:lnSpc>
-              <a:spcAft>
-                <a:spcPts val="400"/>
+              <a:t>Speed-aware xBABIP / xwOBAcon</a:t>
+            </a:r>
+          </a:p>
+          <a:p>
+            <a:pPr algn="l">
+              <a:lnSpc>
+                <a:spcPct val="107000"/>
+              </a:lnSpc>
+              <a:spcAft>
+                <a:spcPts val="200"/>
               </a:spcAft>
             </a:pPr>
             <a:r>
@@ -5463,34 +5421,32 @@
                 </a:solidFill>
                 <a:latin typeface="Arial"/>
               </a:rPr>
-              <a:t>For a 45 FV + 40 FV — prospects only, nobody loses a job or an inning. Elite relief year, signed through '27. The highest-probability marginal win on the board.</a:t>
-            </a:r>
-          </a:p>
-        </p:txBody>
-      </p:sp>
-      <p:sp>
-        <p:nvSpPr>
-          <p:cNvPr id="8" name="Rounded Rectangle 7"/>
+              <a:t>Gradient boosting on 77,928 league batted balls (EV, LA, spray ± sprint speed), 5-fold CV grouped by batter so every residual is out-of-sample.</a:t>
+            </a:r>
+          </a:p>
+        </p:txBody>
+      </p:sp>
+      <p:sp>
+        <p:nvSpPr>
+          <p:cNvPr id="7" name="Rounded Rectangle 6"/>
           <p:cNvSpPr/>
           <p:nvPr/>
         </p:nvSpPr>
         <p:spPr>
           <a:xfrm>
-            <a:off x="6227064" y="1691640"/>
-            <a:ext cx="5358384" cy="1938528"/>
+            <a:off x="8001000" y="2889504"/>
+            <a:ext cx="146304" cy="146304"/>
           </a:xfrm>
           <a:prstGeom prst="roundRect">
             <a:avLst>
-              <a:gd name="adj" fmla="val 6000"/>
+              <a:gd name="adj" fmla="val 18000"/>
             </a:avLst>
           </a:prstGeom>
           <a:solidFill>
-            <a:srgbClr val="121E33"/>
+            <a:srgbClr val="EAF0F8"/>
           </a:solidFill>
-          <a:ln w="12700">
-            <a:solidFill>
-              <a:srgbClr val="26334E"/>
-            </a:solidFill>
+          <a:ln>
+            <a:noFill/>
           </a:ln>
           <a:effectLst/>
         </p:spPr>
@@ -5518,116 +5474,51 @@
       </p:sp>
       <p:sp>
         <p:nvSpPr>
-          <p:cNvPr id="9" name="TextBox 8"/>
-          <p:cNvSpPr txBox="1"/>
-          <p:nvPr/>
-        </p:nvSpPr>
-        <p:spPr>
-          <a:xfrm>
-            <a:off x="6483096" y="1856232"/>
-            <a:ext cx="4855464" cy="292608"/>
-          </a:xfrm>
-          <a:prstGeom prst="rect">
-            <a:avLst/>
-          </a:prstGeom>
-          <a:noFill/>
-        </p:spPr>
-        <p:txBody>
-          <a:bodyPr wrap="square" anchor="t" lIns="0" rIns="0" tIns="0" bIns="0">
-            <a:spAutoFit/>
-          </a:bodyPr>
-          <a:lstStyle/>
-          <a:p>
-            <a:pPr algn="l">
-              <a:lnSpc>
-                <a:spcPct val="100000"/>
-              </a:lnSpc>
-              <a:spcAft>
-                <a:spcPts val="0"/>
-              </a:spcAft>
-            </a:pPr>
-            <a:r>
-              <a:rPr sz="1100" b="1" i="0">
+          <p:cNvPr id="8" name="TextBox 7"/>
+          <p:cNvSpPr txBox="1"/>
+          <p:nvPr/>
+        </p:nvSpPr>
+        <p:spPr>
+          <a:xfrm>
+            <a:off x="8293608" y="2852928"/>
+            <a:ext cx="3749039" cy="1097280"/>
+          </a:xfrm>
+          <a:prstGeom prst="rect">
+            <a:avLst/>
+          </a:prstGeom>
+          <a:noFill/>
+        </p:spPr>
+        <p:txBody>
+          <a:bodyPr wrap="square" anchor="t" lIns="0" rIns="0" tIns="0" bIns="0">
+            <a:spAutoFit/>
+          </a:bodyPr>
+          <a:lstStyle/>
+          <a:p>
+            <a:pPr algn="l">
+              <a:lnSpc>
+                <a:spcPct val="107000"/>
+              </a:lnSpc>
+              <a:spcAft>
+                <a:spcPts val="200"/>
+              </a:spcAft>
+            </a:pPr>
+            <a:r>
+              <a:rPr sz="1350" b="1" i="0">
                 <a:solidFill>
                   <a:srgbClr val="EAF0F8"/>
                 </a:solidFill>
                 <a:latin typeface="Arial"/>
               </a:rPr>
-              <a:t>2 · THE STABILIZER · IF THE PRICE HOLDS</a:t>
-            </a:r>
-          </a:p>
-        </p:txBody>
-      </p:sp>
-      <p:sp>
-        <p:nvSpPr>
-          <p:cNvPr id="10" name="TextBox 9"/>
-          <p:cNvSpPr txBox="1"/>
-          <p:nvPr/>
-        </p:nvSpPr>
-        <p:spPr>
-          <a:xfrm>
-            <a:off x="6483096" y="2148840"/>
-            <a:ext cx="4855464" cy="365760"/>
-          </a:xfrm>
-          <a:prstGeom prst="rect">
-            <a:avLst/>
-          </a:prstGeom>
-          <a:noFill/>
-        </p:spPr>
-        <p:txBody>
-          <a:bodyPr wrap="square" anchor="t" lIns="0" rIns="0" tIns="0" bIns="0">
-            <a:spAutoFit/>
-          </a:bodyPr>
-          <a:lstStyle/>
-          <a:p>
-            <a:pPr algn="l">
-              <a:lnSpc>
-                <a:spcPct val="100000"/>
-              </a:lnSpc>
-              <a:spcAft>
-                <a:spcPts val="0"/>
-              </a:spcAft>
-            </a:pPr>
-            <a:r>
-              <a:rPr sz="1650" b="1" i="0">
-                <a:solidFill>
-                  <a:srgbClr val="EAF0F8"/>
-                </a:solidFill>
-                <a:latin typeface="Arial"/>
-              </a:rPr>
-              <a:t>2B Luis Arraez (SFG)</a:t>
-            </a:r>
-          </a:p>
-        </p:txBody>
-      </p:sp>
-      <p:sp>
-        <p:nvSpPr>
-          <p:cNvPr id="11" name="TextBox 10"/>
-          <p:cNvSpPr txBox="1"/>
-          <p:nvPr/>
-        </p:nvSpPr>
-        <p:spPr>
-          <a:xfrm>
-            <a:off x="6483096" y="2560320"/>
-            <a:ext cx="4855464" cy="960120"/>
-          </a:xfrm>
-          <a:prstGeom prst="rect">
-            <a:avLst/>
-          </a:prstGeom>
-          <a:noFill/>
-        </p:spPr>
-        <p:txBody>
-          <a:bodyPr wrap="square" anchor="t" lIns="0" rIns="0" tIns="0" bIns="0">
-            <a:spAutoFit/>
-          </a:bodyPr>
-          <a:lstStyle/>
-          <a:p>
-            <a:pPr algn="l">
-              <a:lnSpc>
-                <a:spcPct val="110000"/>
-              </a:lnSpc>
-              <a:spcAft>
-                <a:spcPts val="400"/>
+              <a:t>The blind spot, measured</a:t>
+            </a:r>
+          </a:p>
+          <a:p>
+            <a:pPr algn="l">
+              <a:lnSpc>
+                <a:spcPct val="107000"/>
+              </a:lnSpc>
+              <a:spcAft>
+                <a:spcPts val="200"/>
               </a:spcAft>
             </a:pPr>
             <a:r>
@@ -5637,34 +5528,32 @@
                 </a:solidFill>
                 <a:latin typeface="Arial"/>
               </a:rPr>
-              <a:t>For Brayan Bello — the first deal that touches the active roster. Zero prospect cost; Arraez fills a patchwork platoon spot, not a hot regular's.</a:t>
-            </a:r>
-          </a:p>
-        </p:txBody>
-      </p:sp>
-      <p:sp>
-        <p:nvSpPr>
-          <p:cNvPr id="12" name="Rounded Rectangle 11"/>
+              <a:t>Speed-blind xstats under-predict the fastest decile by +20 pts of BABIP. Duran's speed term: +23 pts of wOBA on contact — inside the +5–14 band derived independently.</a:t>
+            </a:r>
+          </a:p>
+        </p:txBody>
+      </p:sp>
+      <p:sp>
+        <p:nvSpPr>
+          <p:cNvPr id="9" name="Rounded Rectangle 8"/>
           <p:cNvSpPr/>
           <p:nvPr/>
         </p:nvSpPr>
         <p:spPr>
           <a:xfrm>
-            <a:off x="566928" y="3886200"/>
-            <a:ext cx="5358384" cy="1938528"/>
+            <a:off x="8001000" y="4005072"/>
+            <a:ext cx="146304" cy="146304"/>
           </a:xfrm>
           <a:prstGeom prst="roundRect">
             <a:avLst>
-              <a:gd name="adj" fmla="val 6000"/>
+              <a:gd name="adj" fmla="val 18000"/>
             </a:avLst>
           </a:prstGeom>
           <a:solidFill>
-            <a:srgbClr val="121E33"/>
+            <a:srgbClr val="E3B14E"/>
           </a:solidFill>
-          <a:ln w="12700">
-            <a:solidFill>
-              <a:srgbClr val="26334E"/>
-            </a:solidFill>
+          <a:ln>
+            <a:noFill/>
           </a:ln>
           <a:effectLst/>
         </p:spPr>
@@ -5692,116 +5581,51 @@
       </p:sp>
       <p:sp>
         <p:nvSpPr>
-          <p:cNvPr id="13" name="TextBox 12"/>
-          <p:cNvSpPr txBox="1"/>
-          <p:nvPr/>
-        </p:nvSpPr>
-        <p:spPr>
-          <a:xfrm>
-            <a:off x="822960" y="4050791"/>
-            <a:ext cx="4855464" cy="292608"/>
-          </a:xfrm>
-          <a:prstGeom prst="rect">
-            <a:avLst/>
-          </a:prstGeom>
-          <a:noFill/>
-        </p:spPr>
-        <p:txBody>
-          <a:bodyPr wrap="square" anchor="t" lIns="0" rIns="0" tIns="0" bIns="0">
-            <a:spAutoFit/>
-          </a:bodyPr>
-          <a:lstStyle/>
-          <a:p>
-            <a:pPr algn="l">
-              <a:lnSpc>
-                <a:spcPct val="100000"/>
-              </a:lnSpc>
-              <a:spcAft>
-                <a:spcPts val="0"/>
-              </a:spcAft>
-            </a:pPr>
-            <a:r>
-              <a:rPr sz="1100" b="1" i="0">
-                <a:solidFill>
-                  <a:srgbClr val="E8615A"/>
-                </a:solidFill>
-                <a:latin typeface="Arial"/>
-              </a:rPr>
-              <a:t>3 · THE BIG SWING · PROBABLY WAIT</a:t>
-            </a:r>
-          </a:p>
-        </p:txBody>
-      </p:sp>
-      <p:sp>
-        <p:nvSpPr>
-          <p:cNvPr id="14" name="TextBox 13"/>
-          <p:cNvSpPr txBox="1"/>
-          <p:nvPr/>
-        </p:nvSpPr>
-        <p:spPr>
-          <a:xfrm>
-            <a:off x="822960" y="4343400"/>
-            <a:ext cx="4855464" cy="365760"/>
-          </a:xfrm>
-          <a:prstGeom prst="rect">
-            <a:avLst/>
-          </a:prstGeom>
-          <a:noFill/>
-        </p:spPr>
-        <p:txBody>
-          <a:bodyPr wrap="square" anchor="t" lIns="0" rIns="0" tIns="0" bIns="0">
-            <a:spAutoFit/>
-          </a:bodyPr>
-          <a:lstStyle/>
-          <a:p>
-            <a:pPr algn="l">
-              <a:lnSpc>
-                <a:spcPct val="100000"/>
-              </a:lnSpc>
-              <a:spcAft>
-                <a:spcPts val="0"/>
-              </a:spcAft>
-            </a:pPr>
-            <a:r>
-              <a:rPr sz="1650" b="1" i="0">
+          <p:cNvPr id="10" name="TextBox 9"/>
+          <p:cNvSpPr txBox="1"/>
+          <p:nvPr/>
+        </p:nvSpPr>
+        <p:spPr>
+          <a:xfrm>
+            <a:off x="8293608" y="3968496"/>
+            <a:ext cx="3749039" cy="1097280"/>
+          </a:xfrm>
+          <a:prstGeom prst="rect">
+            <a:avLst/>
+          </a:prstGeom>
+          <a:noFill/>
+        </p:spPr>
+        <p:txBody>
+          <a:bodyPr wrap="square" anchor="t" lIns="0" rIns="0" tIns="0" bIns="0">
+            <a:spAutoFit/>
+          </a:bodyPr>
+          <a:lstStyle/>
+          <a:p>
+            <a:pPr algn="l">
+              <a:lnSpc>
+                <a:spcPct val="107000"/>
+              </a:lnSpc>
+              <a:spcAft>
+                <a:spcPts val="200"/>
+              </a:spcAft>
+            </a:pPr>
+            <a:r>
+              <a:rPr sz="1350" b="1" i="0">
                 <a:solidFill>
                   <a:srgbClr val="EAF0F8"/>
                 </a:solidFill>
                 <a:latin typeface="Arial"/>
               </a:rPr>
-              <a:t>SS Zach Neto (LAA)</a:t>
-            </a:r>
-          </a:p>
-        </p:txBody>
-      </p:sp>
-      <p:sp>
-        <p:nvSpPr>
-          <p:cNvPr id="15" name="TextBox 14"/>
-          <p:cNvSpPr txBox="1"/>
-          <p:nvPr/>
-        </p:nvSpPr>
-        <p:spPr>
-          <a:xfrm>
-            <a:off x="822960" y="4754880"/>
-            <a:ext cx="4855464" cy="960120"/>
-          </a:xfrm>
-          <a:prstGeom prst="rect">
-            <a:avLst/>
-          </a:prstGeom>
-          <a:noFill/>
-        </p:spPr>
-        <p:txBody>
-          <a:bodyPr wrap="square" anchor="t" lIns="0" rIns="0" tIns="0" bIns="0">
-            <a:spAutoFit/>
-          </a:bodyPr>
-          <a:lstStyle/>
-          <a:p>
-            <a:pPr algn="l">
-              <a:lnSpc>
-                <a:spcPct val="110000"/>
-              </a:lnSpc>
-              <a:spcAft>
-                <a:spcPts val="400"/>
+              <a:t>Adjusted battery model</a:t>
+            </a:r>
+          </a:p>
+          <a:p>
+            <a:pPr algn="l">
+              <a:lnSpc>
+                <a:spcPct val="107000"/>
+              </a:lnSpc>
+              <a:spcAft>
+                <a:spcPts val="200"/>
               </a:spcAft>
             </a:pPr>
             <a:r>
@@ -5811,34 +5635,32 @@
                 </a:solidFill>
                 <a:latin typeface="Arial"/>
               </a:rPr>
-              <a:t>For Tolle + Early + a 45 FV: two arms out of a winning rotation mid-streak. Franchise-window correct — and still there in the winter. Controlled through 2029.</a:t>
-            </a:r>
-          </a:p>
-        </p:txBody>
-      </p:sp>
-      <p:sp>
-        <p:nvSpPr>
-          <p:cNvPr id="16" name="Rounded Rectangle 15"/>
+              <a:t>WOWY + fixed-effects OLS (pitcher/opponent/park), cluster-bootstrap CIs, empirical-Bayes shrinkage (fig. 15): raw splits are mostly noise; no significant catcher effect.</a:t>
+            </a:r>
+          </a:p>
+        </p:txBody>
+      </p:sp>
+      <p:sp>
+        <p:nvSpPr>
+          <p:cNvPr id="11" name="Rounded Rectangle 10"/>
           <p:cNvSpPr/>
           <p:nvPr/>
         </p:nvSpPr>
         <p:spPr>
           <a:xfrm>
-            <a:off x="6227064" y="3886200"/>
-            <a:ext cx="5358384" cy="1938528"/>
+            <a:off x="8001000" y="5120640"/>
+            <a:ext cx="146304" cy="146304"/>
           </a:xfrm>
           <a:prstGeom prst="roundRect">
             <a:avLst>
-              <a:gd name="adj" fmla="val 6000"/>
+              <a:gd name="adj" fmla="val 18000"/>
             </a:avLst>
           </a:prstGeom>
           <a:solidFill>
-            <a:srgbClr val="121E33"/>
+            <a:srgbClr val="58C08D"/>
           </a:solidFill>
-          <a:ln w="12700">
-            <a:solidFill>
-              <a:srgbClr val="26334E"/>
-            </a:solidFill>
+          <a:ln>
+            <a:noFill/>
           </a:ln>
           <a:effectLst/>
         </p:spPr>
@@ -5866,116 +5688,51 @@
       </p:sp>
       <p:sp>
         <p:nvSpPr>
-          <p:cNvPr id="17" name="TextBox 16"/>
-          <p:cNvSpPr txBox="1"/>
-          <p:nvPr/>
-        </p:nvSpPr>
-        <p:spPr>
-          <a:xfrm>
-            <a:off x="6483096" y="4050791"/>
-            <a:ext cx="4855464" cy="292608"/>
-          </a:xfrm>
-          <a:prstGeom prst="rect">
-            <a:avLst/>
-          </a:prstGeom>
-          <a:noFill/>
-        </p:spPr>
-        <p:txBody>
-          <a:bodyPr wrap="square" anchor="t" lIns="0" rIns="0" tIns="0" bIns="0">
-            <a:spAutoFit/>
-          </a:bodyPr>
-          <a:lstStyle/>
-          <a:p>
-            <a:pPr algn="l">
-              <a:lnSpc>
-                <a:spcPct val="100000"/>
-              </a:lnSpc>
-              <a:spcAft>
-                <a:spcPts val="0"/>
-              </a:spcAft>
-            </a:pPr>
-            <a:r>
-              <a:rPr sz="1100" b="1" i="0">
-                <a:solidFill>
-                  <a:srgbClr val="E3B14E"/>
-                </a:solidFill>
-                <a:latin typeface="Arial"/>
-              </a:rPr>
-              <a:t>✗ · THE WALK-AWAY</a:t>
-            </a:r>
-          </a:p>
-        </p:txBody>
-      </p:sp>
-      <p:sp>
-        <p:nvSpPr>
-          <p:cNvPr id="18" name="TextBox 17"/>
-          <p:cNvSpPr txBox="1"/>
-          <p:nvPr/>
-        </p:nvSpPr>
-        <p:spPr>
-          <a:xfrm>
-            <a:off x="6483096" y="4343400"/>
-            <a:ext cx="4855464" cy="365760"/>
-          </a:xfrm>
-          <a:prstGeom prst="rect">
-            <a:avLst/>
-          </a:prstGeom>
-          <a:noFill/>
-        </p:spPr>
-        <p:txBody>
-          <a:bodyPr wrap="square" anchor="t" lIns="0" rIns="0" tIns="0" bIns="0">
-            <a:spAutoFit/>
-          </a:bodyPr>
-          <a:lstStyle/>
-          <a:p>
-            <a:pPr algn="l">
-              <a:lnSpc>
-                <a:spcPct val="100000"/>
-              </a:lnSpc>
-              <a:spcAft>
-                <a:spcPts val="0"/>
-              </a:spcAft>
-            </a:pPr>
-            <a:r>
-              <a:rPr sz="1650" b="1" i="0">
+          <p:cNvPr id="12" name="TextBox 11"/>
+          <p:cNvSpPr txBox="1"/>
+          <p:nvPr/>
+        </p:nvSpPr>
+        <p:spPr>
+          <a:xfrm>
+            <a:off x="8293608" y="5084064"/>
+            <a:ext cx="3749039" cy="1097280"/>
+          </a:xfrm>
+          <a:prstGeom prst="rect">
+            <a:avLst/>
+          </a:prstGeom>
+          <a:noFill/>
+        </p:spPr>
+        <p:txBody>
+          <a:bodyPr wrap="square" anchor="t" lIns="0" rIns="0" tIns="0" bIns="0">
+            <a:spAutoFit/>
+          </a:bodyPr>
+          <a:lstStyle/>
+          <a:p>
+            <a:pPr algn="l">
+              <a:lnSpc>
+                <a:spcPct val="107000"/>
+              </a:lnSpc>
+              <a:spcAft>
+                <a:spcPts val="200"/>
+              </a:spcAft>
+            </a:pPr>
+            <a:r>
+              <a:rPr sz="1350" b="1" i="0">
                 <a:solidFill>
                   <a:srgbClr val="EAF0F8"/>
                 </a:solidFill>
                 <a:latin typeface="Arial"/>
               </a:rPr>
-              <a:t>C Shea Langeliers (ATH)</a:t>
-            </a:r>
-          </a:p>
-        </p:txBody>
-      </p:sp>
-      <p:sp>
-        <p:nvSpPr>
-          <p:cNvPr id="19" name="TextBox 18"/>
-          <p:cNvSpPr txBox="1"/>
-          <p:nvPr/>
-        </p:nvSpPr>
-        <p:spPr>
-          <a:xfrm>
-            <a:off x="6483096" y="4754880"/>
-            <a:ext cx="4855464" cy="960120"/>
-          </a:xfrm>
-          <a:prstGeom prst="rect">
-            <a:avLst/>
-          </a:prstGeom>
-          <a:noFill/>
-        </p:spPr>
-        <p:txBody>
-          <a:bodyPr wrap="square" anchor="t" lIns="0" rIns="0" tIns="0" bIns="0">
-            <a:spAutoFit/>
-          </a:bodyPr>
-          <a:lstStyle/>
-          <a:p>
-            <a:pPr algn="l">
-              <a:lnSpc>
-                <a:spcPct val="110000"/>
-              </a:lnSpc>
-              <a:spcAft>
-                <a:spcPts val="400"/>
+              <a:t>Why it's credible</a:t>
+            </a:r>
+          </a:p>
+          <a:p>
+            <a:pPr algn="l">
+              <a:lnSpc>
+                <a:spcPct val="107000"/>
+              </a:lnSpc>
+              <a:spcAft>
+                <a:spcPts val="200"/>
               </a:spcAft>
             </a:pPr>
             <a:r>
@@ -5985,65 +5742,14 @@
                 </a:solidFill>
                 <a:latin typeface="Arial"/>
               </a:rPr>
-              <a:t>The value math worked; the battery map is the veto. No August bat is worth resetting eight pitcher-catcher pairings in the middle of a streak built on run prevention.</a:t>
-            </a:r>
-          </a:p>
-        </p:txBody>
-      </p:sp>
-      <p:sp>
-        <p:nvSpPr>
-          <p:cNvPr id="20" name="TextBox 19"/>
-          <p:cNvSpPr txBox="1"/>
-          <p:nvPr/>
-        </p:nvSpPr>
-        <p:spPr>
-          <a:xfrm>
-            <a:off x="566928" y="5897880"/>
-            <a:ext cx="11064240" cy="457200"/>
-          </a:xfrm>
-          <a:prstGeom prst="rect">
-            <a:avLst/>
-          </a:prstGeom>
-          <a:noFill/>
-        </p:spPr>
-        <p:txBody>
-          <a:bodyPr wrap="square" anchor="t" lIns="0" rIns="0" tIns="0" bIns="0">
-            <a:spAutoFit/>
-          </a:bodyPr>
-          <a:lstStyle/>
-          <a:p>
-            <a:pPr algn="l">
-              <a:lnSpc>
-                <a:spcPct val="100000"/>
-              </a:lnSpc>
-              <a:spcAft>
-                <a:spcPts val="0"/>
-              </a:spcAft>
-            </a:pPr>
-            <a:r>
-              <a:rPr sz="1250" b="1" i="0">
-                <a:solidFill>
-                  <a:srgbClr val="D9E1EF"/>
-                </a:solidFill>
-                <a:latin typeface="Arial"/>
-              </a:rPr>
-              <a:t>A menu, not a plan — Boston can afford about two. </a:t>
-            </a:r>
-            <a:r>
-              <a:rPr sz="1250" b="0" i="0">
-                <a:solidFill>
-                  <a:srgbClr val="93A0B6"/>
-                </a:solidFill>
-                <a:latin typeface="Arial"/>
-              </a:rPr>
-              <a:t>Full value math and verified contracts in the mock-trades memo. Hypotheticals, not reporting.</a:t>
-            </a:r>
-          </a:p>
-        </p:txBody>
-      </p:sp>
-      <p:sp>
-        <p:nvSpPr>
-          <p:cNvPr id="21" name="TextBox 20"/>
+              <a:t>Out-of-sample everywhere, CIs on every headline, and frozen pre-registered predictions graded in October — flattering or not.</a:t>
+            </a:r>
+          </a:p>
+        </p:txBody>
+      </p:sp>
+      <p:sp>
+        <p:nvSpPr>
+          <p:cNvPr id="13" name="TextBox 12"/>
           <p:cNvSpPr txBox="1"/>
           <p:nvPr/>
         </p:nvSpPr>
@@ -6155,7 +5861,7 @@
                 </a:solidFill>
                 <a:latin typeface="Courier New"/>
               </a:rPr>
-              <a:t>// THE WINTER PLAN</a:t>
+              <a:t>// THE MENU</a:t>
             </a:r>
           </a:p>
         </p:txBody>
@@ -6197,63 +5903,21 @@
                 </a:solidFill>
                 <a:latin typeface="Arial"/>
               </a:rPr>
-              <a:t>Spend the pitching surplus on offense</a:t>
-            </a:r>
-          </a:p>
-        </p:txBody>
-      </p:sp>
-      <p:sp>
-        <p:nvSpPr>
-          <p:cNvPr id="4" name="TextBox 3"/>
-          <p:cNvSpPr txBox="1"/>
-          <p:nvPr/>
-        </p:nvSpPr>
-        <p:spPr>
-          <a:xfrm>
-            <a:off x="566928" y="1572768"/>
-            <a:ext cx="11064240" cy="640080"/>
-          </a:xfrm>
-          <a:prstGeom prst="rect">
-            <a:avLst/>
-          </a:prstGeom>
-          <a:noFill/>
-        </p:spPr>
-        <p:txBody>
-          <a:bodyPr wrap="square" anchor="t" lIns="0" rIns="0" tIns="0" bIns="0">
-            <a:spAutoFit/>
-          </a:bodyPr>
-          <a:lstStyle/>
-          <a:p>
-            <a:pPr algn="l">
-              <a:lnSpc>
-                <a:spcPct val="112000"/>
-              </a:lnSpc>
-              <a:spcAft>
-                <a:spcPts val="400"/>
-              </a:spcAft>
-            </a:pPr>
-            <a:r>
-              <a:rPr sz="1450" b="0" i="0">
-                <a:solidFill>
-                  <a:srgbClr val="D9E1EF"/>
-                </a:solidFill>
-                <a:latin typeface="Arial"/>
-              </a:rPr>
-              <a:t>If winter comes and Duran's rebound has shown up, this is what a deal should return. With a top-6 rotation (3.65 ERA) carrying the club, trading bats for arms is backwards — convert the outfield surplus into what's thin:</a:t>
-            </a:r>
-          </a:p>
-        </p:txBody>
-      </p:sp>
-      <p:sp>
-        <p:nvSpPr>
-          <p:cNvPr id="5" name="Rounded Rectangle 4"/>
+              <a:t>Three trades that fit, and one walk-away</a:t>
+            </a:r>
+          </a:p>
+        </p:txBody>
+      </p:sp>
+      <p:sp>
+        <p:nvSpPr>
+          <p:cNvPr id="4" name="Rounded Rectangle 3"/>
           <p:cNvSpPr/>
           <p:nvPr/>
         </p:nvSpPr>
         <p:spPr>
           <a:xfrm>
-            <a:off x="566928" y="2468880"/>
-            <a:ext cx="3502152" cy="2514600"/>
+            <a:off x="566928" y="1691640"/>
+            <a:ext cx="5358384" cy="1938528"/>
           </a:xfrm>
           <a:prstGeom prst="roundRect">
             <a:avLst>
@@ -6294,153 +5958,140 @@
       </p:sp>
       <p:sp>
         <p:nvSpPr>
-          <p:cNvPr id="6" name="Rounded Rectangle 5"/>
+          <p:cNvPr id="5" name="TextBox 4"/>
+          <p:cNvSpPr txBox="1"/>
+          <p:nvPr/>
+        </p:nvSpPr>
+        <p:spPr>
+          <a:xfrm>
+            <a:off x="822960" y="1856232"/>
+            <a:ext cx="4855464" cy="292608"/>
+          </a:xfrm>
+          <a:prstGeom prst="rect">
+            <a:avLst/>
+          </a:prstGeom>
+          <a:noFill/>
+        </p:spPr>
+        <p:txBody>
+          <a:bodyPr wrap="square" anchor="t" lIns="0" rIns="0" tIns="0" bIns="0">
+            <a:spAutoFit/>
+          </a:bodyPr>
+          <a:lstStyle/>
+          <a:p>
+            <a:pPr algn="l">
+              <a:lnSpc>
+                <a:spcPct val="100000"/>
+              </a:lnSpc>
+              <a:spcAft>
+                <a:spcPts val="0"/>
+              </a:spcAft>
+            </a:pPr>
+            <a:r>
+              <a:rPr sz="1100" b="1" i="0">
+                <a:solidFill>
+                  <a:srgbClr val="58C08D"/>
+                </a:solidFill>
+                <a:latin typeface="Arial"/>
+              </a:rPr>
+              <a:t>1 · THE PEN FIX · DO IT</a:t>
+            </a:r>
+          </a:p>
+        </p:txBody>
+      </p:sp>
+      <p:sp>
+        <p:nvSpPr>
+          <p:cNvPr id="6" name="TextBox 5"/>
+          <p:cNvSpPr txBox="1"/>
+          <p:nvPr/>
+        </p:nvSpPr>
+        <p:spPr>
+          <a:xfrm>
+            <a:off x="822960" y="2148840"/>
+            <a:ext cx="4855464" cy="365760"/>
+          </a:xfrm>
+          <a:prstGeom prst="rect">
+            <a:avLst/>
+          </a:prstGeom>
+          <a:noFill/>
+        </p:spPr>
+        <p:txBody>
+          <a:bodyPr wrap="square" anchor="t" lIns="0" rIns="0" tIns="0" bIns="0">
+            <a:spAutoFit/>
+          </a:bodyPr>
+          <a:lstStyle/>
+          <a:p>
+            <a:pPr algn="l">
+              <a:lnSpc>
+                <a:spcPct val="100000"/>
+              </a:lnSpc>
+              <a:spcAft>
+                <a:spcPts val="0"/>
+              </a:spcAft>
+            </a:pPr>
+            <a:r>
+              <a:rPr sz="1650" b="1" i="0">
+                <a:solidFill>
+                  <a:srgbClr val="EAF0F8"/>
+                </a:solidFill>
+                <a:latin typeface="Arial"/>
+              </a:rPr>
+              <a:t>RHP Luke Weaver (NYM)</a:t>
+            </a:r>
+          </a:p>
+        </p:txBody>
+      </p:sp>
+      <p:sp>
+        <p:nvSpPr>
+          <p:cNvPr id="7" name="TextBox 6"/>
+          <p:cNvSpPr txBox="1"/>
+          <p:nvPr/>
+        </p:nvSpPr>
+        <p:spPr>
+          <a:xfrm>
+            <a:off x="822960" y="2560320"/>
+            <a:ext cx="4855464" cy="960120"/>
+          </a:xfrm>
+          <a:prstGeom prst="rect">
+            <a:avLst/>
+          </a:prstGeom>
+          <a:noFill/>
+        </p:spPr>
+        <p:txBody>
+          <a:bodyPr wrap="square" anchor="t" lIns="0" rIns="0" tIns="0" bIns="0">
+            <a:spAutoFit/>
+          </a:bodyPr>
+          <a:lstStyle/>
+          <a:p>
+            <a:pPr algn="l">
+              <a:lnSpc>
+                <a:spcPct val="110000"/>
+              </a:lnSpc>
+              <a:spcAft>
+                <a:spcPts val="400"/>
+              </a:spcAft>
+            </a:pPr>
+            <a:r>
+              <a:rPr sz="1160" b="0" i="0">
+                <a:solidFill>
+                  <a:srgbClr val="93A0B6"/>
+                </a:solidFill>
+                <a:latin typeface="Arial"/>
+              </a:rPr>
+              <a:t>For a 45 FV + 40 FV — prospects only, nobody loses a job or an inning. Elite relief year, signed through '27. The highest-probability marginal win on the board.</a:t>
+            </a:r>
+          </a:p>
+        </p:txBody>
+      </p:sp>
+      <p:sp>
+        <p:nvSpPr>
+          <p:cNvPr id="8" name="Rounded Rectangle 7"/>
           <p:cNvSpPr/>
           <p:nvPr/>
         </p:nvSpPr>
         <p:spPr>
           <a:xfrm>
-            <a:off x="841247" y="2724912"/>
-            <a:ext cx="384048" cy="384048"/>
-          </a:xfrm>
-          <a:prstGeom prst="roundRect">
-            <a:avLst>
-              <a:gd name="adj" fmla="val 18000"/>
-            </a:avLst>
-          </a:prstGeom>
-          <a:solidFill>
-            <a:srgbClr val="58C08D"/>
-          </a:solidFill>
-          <a:ln>
-            <a:noFill/>
-          </a:ln>
-          <a:effectLst/>
-        </p:spPr>
-        <p:style>
-          <a:lnRef idx="1">
-            <a:schemeClr val="accent1"/>
-          </a:lnRef>
-          <a:fillRef idx="3">
-            <a:schemeClr val="accent1"/>
-          </a:fillRef>
-          <a:effectRef idx="2">
-            <a:schemeClr val="accent1"/>
-          </a:effectRef>
-          <a:fontRef idx="minor">
-            <a:schemeClr val="lt1"/>
-          </a:fontRef>
-        </p:style>
-        <p:txBody>
-          <a:bodyPr rtlCol="0" anchor="ctr" wrap="none"/>
-          <a:lstStyle/>
-          <a:p>
-            <a:pPr algn="ctr"/>
-            <a:r>
-              <a:rPr sz="1600" b="1">
-                <a:solidFill>
-                  <a:srgbClr val="0B1220"/>
-                </a:solidFill>
-                <a:latin typeface="Courier New"/>
-              </a:rPr>
-              <a:t>1</a:t>
-            </a:r>
-          </a:p>
-        </p:txBody>
-      </p:sp>
-      <p:sp>
-        <p:nvSpPr>
-          <p:cNvPr id="7" name="TextBox 6"/>
-          <p:cNvSpPr txBox="1"/>
-          <p:nvPr/>
-        </p:nvSpPr>
-        <p:spPr>
-          <a:xfrm>
-            <a:off x="841247" y="3310128"/>
-            <a:ext cx="2999232" cy="411480"/>
-          </a:xfrm>
-          <a:prstGeom prst="rect">
-            <a:avLst/>
-          </a:prstGeom>
-          <a:noFill/>
-        </p:spPr>
-        <p:txBody>
-          <a:bodyPr wrap="square" anchor="t" lIns="0" rIns="0" tIns="0" bIns="0">
-            <a:spAutoFit/>
-          </a:bodyPr>
-          <a:lstStyle/>
-          <a:p>
-            <a:pPr algn="l">
-              <a:lnSpc>
-                <a:spcPct val="100000"/>
-              </a:lnSpc>
-              <a:spcAft>
-                <a:spcPts val="0"/>
-              </a:spcAft>
-            </a:pPr>
-            <a:r>
-              <a:rPr sz="1600" b="1" i="0">
-                <a:solidFill>
-                  <a:srgbClr val="EAF0F8"/>
-                </a:solidFill>
-                <a:latin typeface="Arial"/>
-              </a:rPr>
-              <a:t>Controllable bats</a:t>
-            </a:r>
-          </a:p>
-        </p:txBody>
-      </p:sp>
-      <p:sp>
-        <p:nvSpPr>
-          <p:cNvPr id="8" name="TextBox 7"/>
-          <p:cNvSpPr txBox="1"/>
-          <p:nvPr/>
-        </p:nvSpPr>
-        <p:spPr>
-          <a:xfrm>
-            <a:off x="841247" y="3767328"/>
-            <a:ext cx="2999232" cy="1097280"/>
-          </a:xfrm>
-          <a:prstGeom prst="rect">
-            <a:avLst/>
-          </a:prstGeom>
-          <a:noFill/>
-        </p:spPr>
-        <p:txBody>
-          <a:bodyPr wrap="square" anchor="t" lIns="0" rIns="0" tIns="0" bIns="0">
-            <a:spAutoFit/>
-          </a:bodyPr>
-          <a:lstStyle/>
-          <a:p>
-            <a:pPr algn="l">
-              <a:lnSpc>
-                <a:spcPct val="110000"/>
-              </a:lnSpc>
-              <a:spcAft>
-                <a:spcPts val="400"/>
-              </a:spcAft>
-            </a:pPr>
-            <a:r>
-              <a:rPr sz="1280" b="0" i="0">
-                <a:solidFill>
-                  <a:srgbClr val="93A0B6"/>
-                </a:solidFill>
-                <a:latin typeface="Arial"/>
-              </a:rPr>
-              <a:t>Young, cost-controlled position players to fix an inconsistent lineup and lengthen it around the core.</a:t>
-            </a:r>
-          </a:p>
-        </p:txBody>
-      </p:sp>
-      <p:sp>
-        <p:nvSpPr>
-          <p:cNvPr id="9" name="Rounded Rectangle 8"/>
-          <p:cNvSpPr/>
-          <p:nvPr/>
-        </p:nvSpPr>
-        <p:spPr>
-          <a:xfrm>
-            <a:off x="4352544" y="2468880"/>
-            <a:ext cx="3502152" cy="2514600"/>
+            <a:off x="6227064" y="1691640"/>
+            <a:ext cx="5358384" cy="1938528"/>
           </a:xfrm>
           <a:prstGeom prst="roundRect">
             <a:avLst>
@@ -6481,153 +6132,140 @@
       </p:sp>
       <p:sp>
         <p:nvSpPr>
-          <p:cNvPr id="10" name="Rounded Rectangle 9"/>
+          <p:cNvPr id="9" name="TextBox 8"/>
+          <p:cNvSpPr txBox="1"/>
+          <p:nvPr/>
+        </p:nvSpPr>
+        <p:spPr>
+          <a:xfrm>
+            <a:off x="6483096" y="1856232"/>
+            <a:ext cx="4855464" cy="292608"/>
+          </a:xfrm>
+          <a:prstGeom prst="rect">
+            <a:avLst/>
+          </a:prstGeom>
+          <a:noFill/>
+        </p:spPr>
+        <p:txBody>
+          <a:bodyPr wrap="square" anchor="t" lIns="0" rIns="0" tIns="0" bIns="0">
+            <a:spAutoFit/>
+          </a:bodyPr>
+          <a:lstStyle/>
+          <a:p>
+            <a:pPr algn="l">
+              <a:lnSpc>
+                <a:spcPct val="100000"/>
+              </a:lnSpc>
+              <a:spcAft>
+                <a:spcPts val="0"/>
+              </a:spcAft>
+            </a:pPr>
+            <a:r>
+              <a:rPr sz="1100" b="1" i="0">
+                <a:solidFill>
+                  <a:srgbClr val="EAF0F8"/>
+                </a:solidFill>
+                <a:latin typeface="Arial"/>
+              </a:rPr>
+              <a:t>2 · THE STABILIZER · IF THE PRICE HOLDS</a:t>
+            </a:r>
+          </a:p>
+        </p:txBody>
+      </p:sp>
+      <p:sp>
+        <p:nvSpPr>
+          <p:cNvPr id="10" name="TextBox 9"/>
+          <p:cNvSpPr txBox="1"/>
+          <p:nvPr/>
+        </p:nvSpPr>
+        <p:spPr>
+          <a:xfrm>
+            <a:off x="6483096" y="2148840"/>
+            <a:ext cx="4855464" cy="365760"/>
+          </a:xfrm>
+          <a:prstGeom prst="rect">
+            <a:avLst/>
+          </a:prstGeom>
+          <a:noFill/>
+        </p:spPr>
+        <p:txBody>
+          <a:bodyPr wrap="square" anchor="t" lIns="0" rIns="0" tIns="0" bIns="0">
+            <a:spAutoFit/>
+          </a:bodyPr>
+          <a:lstStyle/>
+          <a:p>
+            <a:pPr algn="l">
+              <a:lnSpc>
+                <a:spcPct val="100000"/>
+              </a:lnSpc>
+              <a:spcAft>
+                <a:spcPts val="0"/>
+              </a:spcAft>
+            </a:pPr>
+            <a:r>
+              <a:rPr sz="1650" b="1" i="0">
+                <a:solidFill>
+                  <a:srgbClr val="EAF0F8"/>
+                </a:solidFill>
+                <a:latin typeface="Arial"/>
+              </a:rPr>
+              <a:t>2B Luis Arraez (SFG)</a:t>
+            </a:r>
+          </a:p>
+        </p:txBody>
+      </p:sp>
+      <p:sp>
+        <p:nvSpPr>
+          <p:cNvPr id="11" name="TextBox 10"/>
+          <p:cNvSpPr txBox="1"/>
+          <p:nvPr/>
+        </p:nvSpPr>
+        <p:spPr>
+          <a:xfrm>
+            <a:off x="6483096" y="2560320"/>
+            <a:ext cx="4855464" cy="960120"/>
+          </a:xfrm>
+          <a:prstGeom prst="rect">
+            <a:avLst/>
+          </a:prstGeom>
+          <a:noFill/>
+        </p:spPr>
+        <p:txBody>
+          <a:bodyPr wrap="square" anchor="t" lIns="0" rIns="0" tIns="0" bIns="0">
+            <a:spAutoFit/>
+          </a:bodyPr>
+          <a:lstStyle/>
+          <a:p>
+            <a:pPr algn="l">
+              <a:lnSpc>
+                <a:spcPct val="110000"/>
+              </a:lnSpc>
+              <a:spcAft>
+                <a:spcPts val="400"/>
+              </a:spcAft>
+            </a:pPr>
+            <a:r>
+              <a:rPr sz="1160" b="0" i="0">
+                <a:solidFill>
+                  <a:srgbClr val="93A0B6"/>
+                </a:solidFill>
+                <a:latin typeface="Arial"/>
+              </a:rPr>
+              <a:t>For Brayan Bello — the first deal that touches the active roster. Zero prospect cost; Arraez fills a patchwork platoon spot, not a hot regular's.</a:t>
+            </a:r>
+          </a:p>
+        </p:txBody>
+      </p:sp>
+      <p:sp>
+        <p:nvSpPr>
+          <p:cNvPr id="12" name="Rounded Rectangle 11"/>
           <p:cNvSpPr/>
           <p:nvPr/>
         </p:nvSpPr>
         <p:spPr>
           <a:xfrm>
-            <a:off x="4626864" y="2724912"/>
-            <a:ext cx="384048" cy="384048"/>
-          </a:xfrm>
-          <a:prstGeom prst="roundRect">
-            <a:avLst>
-              <a:gd name="adj" fmla="val 18000"/>
-            </a:avLst>
-          </a:prstGeom>
-          <a:solidFill>
-            <a:srgbClr val="EAF0F8"/>
-          </a:solidFill>
-          <a:ln>
-            <a:noFill/>
-          </a:ln>
-          <a:effectLst/>
-        </p:spPr>
-        <p:style>
-          <a:lnRef idx="1">
-            <a:schemeClr val="accent1"/>
-          </a:lnRef>
-          <a:fillRef idx="3">
-            <a:schemeClr val="accent1"/>
-          </a:fillRef>
-          <a:effectRef idx="2">
-            <a:schemeClr val="accent1"/>
-          </a:effectRef>
-          <a:fontRef idx="minor">
-            <a:schemeClr val="lt1"/>
-          </a:fontRef>
-        </p:style>
-        <p:txBody>
-          <a:bodyPr rtlCol="0" anchor="ctr" wrap="none"/>
-          <a:lstStyle/>
-          <a:p>
-            <a:pPr algn="ctr"/>
-            <a:r>
-              <a:rPr sz="1600" b="1">
-                <a:solidFill>
-                  <a:srgbClr val="0B1220"/>
-                </a:solidFill>
-                <a:latin typeface="Courier New"/>
-              </a:rPr>
-              <a:t>2</a:t>
-            </a:r>
-          </a:p>
-        </p:txBody>
-      </p:sp>
-      <p:sp>
-        <p:nvSpPr>
-          <p:cNvPr id="11" name="TextBox 10"/>
-          <p:cNvSpPr txBox="1"/>
-          <p:nvPr/>
-        </p:nvSpPr>
-        <p:spPr>
-          <a:xfrm>
-            <a:off x="4626864" y="3310128"/>
-            <a:ext cx="2999232" cy="411480"/>
-          </a:xfrm>
-          <a:prstGeom prst="rect">
-            <a:avLst/>
-          </a:prstGeom>
-          <a:noFill/>
-        </p:spPr>
-        <p:txBody>
-          <a:bodyPr wrap="square" anchor="t" lIns="0" rIns="0" tIns="0" bIns="0">
-            <a:spAutoFit/>
-          </a:bodyPr>
-          <a:lstStyle/>
-          <a:p>
-            <a:pPr algn="l">
-              <a:lnSpc>
-                <a:spcPct val="100000"/>
-              </a:lnSpc>
-              <a:spcAft>
-                <a:spcPts val="0"/>
-              </a:spcAft>
-            </a:pPr>
-            <a:r>
-              <a:rPr sz="1600" b="1" i="0">
-                <a:solidFill>
-                  <a:srgbClr val="EAF0F8"/>
-                </a:solidFill>
-                <a:latin typeface="Arial"/>
-              </a:rPr>
-              <a:t>Best talent / upside</a:t>
-            </a:r>
-          </a:p>
-        </p:txBody>
-      </p:sp>
-      <p:sp>
-        <p:nvSpPr>
-          <p:cNvPr id="12" name="TextBox 11"/>
-          <p:cNvSpPr txBox="1"/>
-          <p:nvPr/>
-        </p:nvSpPr>
-        <p:spPr>
-          <a:xfrm>
-            <a:off x="4626864" y="3767328"/>
-            <a:ext cx="2999232" cy="1097280"/>
-          </a:xfrm>
-          <a:prstGeom prst="rect">
-            <a:avLst/>
-          </a:prstGeom>
-          <a:noFill/>
-        </p:spPr>
-        <p:txBody>
-          <a:bodyPr wrap="square" anchor="t" lIns="0" rIns="0" tIns="0" bIns="0">
-            <a:spAutoFit/>
-          </a:bodyPr>
-          <a:lstStyle/>
-          <a:p>
-            <a:pPr algn="l">
-              <a:lnSpc>
-                <a:spcPct val="110000"/>
-              </a:lnSpc>
-              <a:spcAft>
-                <a:spcPts val="400"/>
-              </a:spcAft>
-            </a:pPr>
-            <a:r>
-              <a:rPr sz="1280" b="0" i="0">
-                <a:solidFill>
-                  <a:srgbClr val="93A0B6"/>
-                </a:solidFill>
-                <a:latin typeface="Arial"/>
-              </a:rPr>
-              <a:t>In a retool you take the best player, not the positional patch — prospects and MLB-ready youth over rentals.</a:t>
-            </a:r>
-          </a:p>
-        </p:txBody>
-      </p:sp>
-      <p:sp>
-        <p:nvSpPr>
-          <p:cNvPr id="13" name="Rounded Rectangle 12"/>
-          <p:cNvSpPr/>
-          <p:nvPr/>
-        </p:nvSpPr>
-        <p:spPr>
-          <a:xfrm>
-            <a:off x="8138159" y="2468880"/>
-            <a:ext cx="3502152" cy="2514600"/>
+            <a:off x="566928" y="3886200"/>
+            <a:ext cx="5358384" cy="1938528"/>
           </a:xfrm>
           <a:prstGeom prst="roundRect">
             <a:avLst>
@@ -6668,25 +6306,153 @@
       </p:sp>
       <p:sp>
         <p:nvSpPr>
-          <p:cNvPr id="14" name="Rounded Rectangle 13"/>
+          <p:cNvPr id="13" name="TextBox 12"/>
+          <p:cNvSpPr txBox="1"/>
+          <p:nvPr/>
+        </p:nvSpPr>
+        <p:spPr>
+          <a:xfrm>
+            <a:off x="822960" y="4050791"/>
+            <a:ext cx="4855464" cy="292608"/>
+          </a:xfrm>
+          <a:prstGeom prst="rect">
+            <a:avLst/>
+          </a:prstGeom>
+          <a:noFill/>
+        </p:spPr>
+        <p:txBody>
+          <a:bodyPr wrap="square" anchor="t" lIns="0" rIns="0" tIns="0" bIns="0">
+            <a:spAutoFit/>
+          </a:bodyPr>
+          <a:lstStyle/>
+          <a:p>
+            <a:pPr algn="l">
+              <a:lnSpc>
+                <a:spcPct val="100000"/>
+              </a:lnSpc>
+              <a:spcAft>
+                <a:spcPts val="0"/>
+              </a:spcAft>
+            </a:pPr>
+            <a:r>
+              <a:rPr sz="1100" b="1" i="0">
+                <a:solidFill>
+                  <a:srgbClr val="E8615A"/>
+                </a:solidFill>
+                <a:latin typeface="Arial"/>
+              </a:rPr>
+              <a:t>3 · THE BIG SWING · PROBABLY WAIT</a:t>
+            </a:r>
+          </a:p>
+        </p:txBody>
+      </p:sp>
+      <p:sp>
+        <p:nvSpPr>
+          <p:cNvPr id="14" name="TextBox 13"/>
+          <p:cNvSpPr txBox="1"/>
+          <p:nvPr/>
+        </p:nvSpPr>
+        <p:spPr>
+          <a:xfrm>
+            <a:off x="822960" y="4343400"/>
+            <a:ext cx="4855464" cy="365760"/>
+          </a:xfrm>
+          <a:prstGeom prst="rect">
+            <a:avLst/>
+          </a:prstGeom>
+          <a:noFill/>
+        </p:spPr>
+        <p:txBody>
+          <a:bodyPr wrap="square" anchor="t" lIns="0" rIns="0" tIns="0" bIns="0">
+            <a:spAutoFit/>
+          </a:bodyPr>
+          <a:lstStyle/>
+          <a:p>
+            <a:pPr algn="l">
+              <a:lnSpc>
+                <a:spcPct val="100000"/>
+              </a:lnSpc>
+              <a:spcAft>
+                <a:spcPts val="0"/>
+              </a:spcAft>
+            </a:pPr>
+            <a:r>
+              <a:rPr sz="1650" b="1" i="0">
+                <a:solidFill>
+                  <a:srgbClr val="EAF0F8"/>
+                </a:solidFill>
+                <a:latin typeface="Arial"/>
+              </a:rPr>
+              <a:t>SS Zach Neto (LAA)</a:t>
+            </a:r>
+          </a:p>
+        </p:txBody>
+      </p:sp>
+      <p:sp>
+        <p:nvSpPr>
+          <p:cNvPr id="15" name="TextBox 14"/>
+          <p:cNvSpPr txBox="1"/>
+          <p:nvPr/>
+        </p:nvSpPr>
+        <p:spPr>
+          <a:xfrm>
+            <a:off x="822960" y="4754880"/>
+            <a:ext cx="4855464" cy="960120"/>
+          </a:xfrm>
+          <a:prstGeom prst="rect">
+            <a:avLst/>
+          </a:prstGeom>
+          <a:noFill/>
+        </p:spPr>
+        <p:txBody>
+          <a:bodyPr wrap="square" anchor="t" lIns="0" rIns="0" tIns="0" bIns="0">
+            <a:spAutoFit/>
+          </a:bodyPr>
+          <a:lstStyle/>
+          <a:p>
+            <a:pPr algn="l">
+              <a:lnSpc>
+                <a:spcPct val="110000"/>
+              </a:lnSpc>
+              <a:spcAft>
+                <a:spcPts val="400"/>
+              </a:spcAft>
+            </a:pPr>
+            <a:r>
+              <a:rPr sz="1160" b="0" i="0">
+                <a:solidFill>
+                  <a:srgbClr val="93A0B6"/>
+                </a:solidFill>
+                <a:latin typeface="Arial"/>
+              </a:rPr>
+              <a:t>For Tolle + Early + a 45 FV: two arms out of a winning rotation mid-streak. Franchise-window correct — and still there in the winter. Controlled through 2029.</a:t>
+            </a:r>
+          </a:p>
+        </p:txBody>
+      </p:sp>
+      <p:sp>
+        <p:nvSpPr>
+          <p:cNvPr id="16" name="Rounded Rectangle 15"/>
           <p:cNvSpPr/>
           <p:nvPr/>
         </p:nvSpPr>
         <p:spPr>
           <a:xfrm>
-            <a:off x="8412480" y="2724912"/>
-            <a:ext cx="384048" cy="384048"/>
+            <a:off x="6227064" y="3886200"/>
+            <a:ext cx="5358384" cy="1938528"/>
           </a:xfrm>
           <a:prstGeom prst="roundRect">
             <a:avLst>
-              <a:gd name="adj" fmla="val 18000"/>
+              <a:gd name="adj" fmla="val 6000"/>
             </a:avLst>
           </a:prstGeom>
           <a:solidFill>
-            <a:srgbClr val="E3B14E"/>
+            <a:srgbClr val="121E33"/>
           </a:solidFill>
-          <a:ln>
-            <a:noFill/>
+          <a:ln w="12700">
+            <a:solidFill>
+              <a:srgbClr val="26334E"/>
+            </a:solidFill>
           </a:ln>
           <a:effectLst/>
         </p:spPr>
@@ -6705,32 +6471,23 @@
           </a:fontRef>
         </p:style>
         <p:txBody>
-          <a:bodyPr rtlCol="0" anchor="ctr" wrap="none"/>
+          <a:bodyPr rtlCol="0" anchor="ctr"/>
           <a:lstStyle/>
           <a:p>
             <a:pPr algn="ctr"/>
-            <a:r>
-              <a:rPr sz="1600" b="1">
-                <a:solidFill>
-                  <a:srgbClr val="0B1220"/>
-                </a:solidFill>
-                <a:latin typeface="Courier New"/>
-              </a:rPr>
-              <a:t>3</a:t>
-            </a:r>
-          </a:p>
-        </p:txBody>
-      </p:sp>
-      <p:sp>
-        <p:nvSpPr>
-          <p:cNvPr id="15" name="TextBox 14"/>
-          <p:cNvSpPr txBox="1"/>
-          <p:nvPr/>
-        </p:nvSpPr>
-        <p:spPr>
-          <a:xfrm>
-            <a:off x="8412480" y="3310128"/>
-            <a:ext cx="2999232" cy="411480"/>
+          </a:p>
+        </p:txBody>
+      </p:sp>
+      <p:sp>
+        <p:nvSpPr>
+          <p:cNvPr id="17" name="TextBox 16"/>
+          <p:cNvSpPr txBox="1"/>
+          <p:nvPr/>
+        </p:nvSpPr>
+        <p:spPr>
+          <a:xfrm>
+            <a:off x="6483096" y="4050791"/>
+            <a:ext cx="4855464" cy="292608"/>
           </a:xfrm>
           <a:prstGeom prst="rect">
             <a:avLst/>
@@ -6752,27 +6509,69 @@
               </a:spcAft>
             </a:pPr>
             <a:r>
-              <a:rPr sz="1600" b="1" i="0">
+              <a:rPr sz="1100" b="1" i="0">
+                <a:solidFill>
+                  <a:srgbClr val="E3B14E"/>
+                </a:solidFill>
+                <a:latin typeface="Arial"/>
+              </a:rPr>
+              <a:t>✗ · THE WALK-AWAY</a:t>
+            </a:r>
+          </a:p>
+        </p:txBody>
+      </p:sp>
+      <p:sp>
+        <p:nvSpPr>
+          <p:cNvPr id="18" name="TextBox 17"/>
+          <p:cNvSpPr txBox="1"/>
+          <p:nvPr/>
+        </p:nvSpPr>
+        <p:spPr>
+          <a:xfrm>
+            <a:off x="6483096" y="4343400"/>
+            <a:ext cx="4855464" cy="365760"/>
+          </a:xfrm>
+          <a:prstGeom prst="rect">
+            <a:avLst/>
+          </a:prstGeom>
+          <a:noFill/>
+        </p:spPr>
+        <p:txBody>
+          <a:bodyPr wrap="square" anchor="t" lIns="0" rIns="0" tIns="0" bIns="0">
+            <a:spAutoFit/>
+          </a:bodyPr>
+          <a:lstStyle/>
+          <a:p>
+            <a:pPr algn="l">
+              <a:lnSpc>
+                <a:spcPct val="100000"/>
+              </a:lnSpc>
+              <a:spcAft>
+                <a:spcPts val="0"/>
+              </a:spcAft>
+            </a:pPr>
+            <a:r>
+              <a:rPr sz="1650" b="1" i="0">
                 <a:solidFill>
                   <a:srgbClr val="EAF0F8"/>
                 </a:solidFill>
                 <a:latin typeface="Arial"/>
               </a:rPr>
-              <a:t>Salary relief</a:t>
-            </a:r>
-          </a:p>
-        </p:txBody>
-      </p:sp>
-      <p:sp>
-        <p:nvSpPr>
-          <p:cNvPr id="16" name="TextBox 15"/>
-          <p:cNvSpPr txBox="1"/>
-          <p:nvPr/>
-        </p:nvSpPr>
-        <p:spPr>
-          <a:xfrm>
-            <a:off x="8412480" y="3767328"/>
-            <a:ext cx="2999232" cy="1097280"/>
+              <a:t>C Shea Langeliers (ATH)</a:t>
+            </a:r>
+          </a:p>
+        </p:txBody>
+      </p:sp>
+      <p:sp>
+        <p:nvSpPr>
+          <p:cNvPr id="19" name="TextBox 18"/>
+          <p:cNvSpPr txBox="1"/>
+          <p:nvPr/>
+        </p:nvSpPr>
+        <p:spPr>
+          <a:xfrm>
+            <a:off x="6483096" y="4754880"/>
+            <a:ext cx="4855464" cy="960120"/>
           </a:xfrm>
           <a:prstGeom prst="rect">
             <a:avLst/>
@@ -6794,26 +6593,26 @@
               </a:spcAft>
             </a:pPr>
             <a:r>
-              <a:rPr sz="1280" b="0" i="0">
+              <a:rPr sz="1160" b="0" i="0">
                 <a:solidFill>
                   <a:srgbClr val="93A0B6"/>
                 </a:solidFill>
                 <a:latin typeface="Arial"/>
               </a:rPr>
-              <a:t>Attach Yoshida money where possible; free payroll for the 2027 window.</a:t>
-            </a:r>
-          </a:p>
-        </p:txBody>
-      </p:sp>
-      <p:sp>
-        <p:nvSpPr>
-          <p:cNvPr id="17" name="TextBox 16"/>
-          <p:cNvSpPr txBox="1"/>
-          <p:nvPr/>
-        </p:nvSpPr>
-        <p:spPr>
-          <a:xfrm>
-            <a:off x="566928" y="5257800"/>
+              <a:t>The value math worked; the battery map is the veto. No August bat is worth resetting eight pitcher-catcher pairings in the middle of a streak built on run prevention.</a:t>
+            </a:r>
+          </a:p>
+        </p:txBody>
+      </p:sp>
+      <p:sp>
+        <p:nvSpPr>
+          <p:cNvPr id="20" name="TextBox 19"/>
+          <p:cNvSpPr txBox="1"/>
+          <p:nvPr/>
+        </p:nvSpPr>
+        <p:spPr>
+          <a:xfrm>
+            <a:off x="566928" y="5897880"/>
             <a:ext cx="11064240" cy="457200"/>
           </a:xfrm>
           <a:prstGeom prst="rect">
@@ -6836,29 +6635,29 @@
               </a:spcAft>
             </a:pPr>
             <a:r>
-              <a:rPr sz="1400" b="1" i="1">
-                <a:solidFill>
-                  <a:srgbClr val="EAF0F8"/>
-                </a:solidFill>
-                <a:latin typeface="Arial"/>
-              </a:rPr>
-              <a:t>Keep the arms. Cash the outfield. </a:t>
-            </a:r>
-            <a:r>
-              <a:rPr sz="1400" b="0" i="1">
+              <a:rPr sz="1250" b="1" i="0">
+                <a:solidFill>
+                  <a:srgbClr val="D9E1EF"/>
+                </a:solidFill>
+                <a:latin typeface="Arial"/>
+              </a:rPr>
+              <a:t>A menu, not a plan — Boston can afford about two. </a:t>
+            </a:r>
+            <a:r>
+              <a:rPr sz="1250" b="0" i="0">
                 <a:solidFill>
                   <a:srgbClr val="93A0B6"/>
                 </a:solidFill>
                 <a:latin typeface="Arial"/>
               </a:rPr>
-              <a:t>Build the 2027 lineup, don't rent the 2026 one.</a:t>
-            </a:r>
-          </a:p>
-        </p:txBody>
-      </p:sp>
-      <p:sp>
-        <p:nvSpPr>
-          <p:cNvPr id="18" name="TextBox 17"/>
+              <a:t>Full value math and verified contracts in the mock-trades memo. Hypotheticals, not reporting.</a:t>
+            </a:r>
+          </a:p>
+        </p:txBody>
+      </p:sp>
+      <p:sp>
+        <p:nvSpPr>
+          <p:cNvPr id="21" name="TextBox 20"/>
           <p:cNvSpPr txBox="1"/>
           <p:nvPr/>
         </p:nvSpPr>
@@ -6970,7 +6769,7 @@
                 </a:solidFill>
                 <a:latin typeface="Courier New"/>
               </a:rPr>
-              <a:t>// THE MARKET</a:t>
+              <a:t>// THE WINTER PLAN</a:t>
             </a:r>
           </a:p>
         </p:txBody>
@@ -7012,74 +6811,98 @@
                 </a:solidFill>
                 <a:latin typeface="Arial"/>
               </a:rPr>
-              <a:t>Who pays: contenders with a hole in the outfield</a:t>
-            </a:r>
-          </a:p>
-        </p:txBody>
-      </p:sp>
-      <p:pic>
-        <p:nvPicPr>
-          <p:cNvPr id="4" name="Picture 3" descr="08_trade_fit_targets.png"/>
-          <p:cNvPicPr>
-            <a:picLocks noChangeAspect="1"/>
-          </p:cNvPicPr>
-          <p:nvPr/>
-        </p:nvPicPr>
-        <p:blipFill>
-          <a:blip r:embed="rId2"/>
-          <a:stretch>
-            <a:fillRect/>
-          </a:stretch>
-        </p:blipFill>
-        <p:spPr>
-          <a:xfrm>
-            <a:off x="757237" y="1463040"/>
-            <a:ext cx="6715125" cy="4297680"/>
-          </a:xfrm>
-          <a:prstGeom prst="rect">
-            <a:avLst/>
-          </a:prstGeom>
-        </p:spPr>
-      </p:pic>
-      <p:sp>
-        <p:nvSpPr>
-          <p:cNvPr id="5" name="TextBox 4"/>
-          <p:cNvSpPr txBox="1"/>
-          <p:nvPr/>
-        </p:nvSpPr>
-        <p:spPr>
-          <a:xfrm>
-            <a:off x="8183879" y="1691640"/>
-            <a:ext cx="3657600" cy="457200"/>
-          </a:xfrm>
-          <a:prstGeom prst="rect">
-            <a:avLst/>
-          </a:prstGeom>
-          <a:noFill/>
-        </p:spPr>
-        <p:txBody>
-          <a:bodyPr wrap="square" anchor="t" lIns="0" rIns="0" tIns="0" bIns="0">
-            <a:spAutoFit/>
-          </a:bodyPr>
-          <a:lstStyle/>
-          <a:p>
-            <a:pPr algn="l">
-              <a:lnSpc>
-                <a:spcPct val="100000"/>
-              </a:lnSpc>
-              <a:spcAft>
-                <a:spcPts val="0"/>
-              </a:spcAft>
-            </a:pPr>
-            <a:r>
-              <a:rPr sz="1500" b="1" i="0">
-                <a:solidFill>
-                  <a:srgbClr val="EAF0F8"/>
-                </a:solidFill>
-                <a:latin typeface="Arial"/>
-              </a:rPr>
-              <a:t>Best-fit buyers</a:t>
-            </a:r>
+              <a:t>Spend the pitching surplus on offense</a:t>
+            </a:r>
+          </a:p>
+        </p:txBody>
+      </p:sp>
+      <p:sp>
+        <p:nvSpPr>
+          <p:cNvPr id="4" name="TextBox 3"/>
+          <p:cNvSpPr txBox="1"/>
+          <p:nvPr/>
+        </p:nvSpPr>
+        <p:spPr>
+          <a:xfrm>
+            <a:off x="566928" y="1572768"/>
+            <a:ext cx="11064240" cy="640080"/>
+          </a:xfrm>
+          <a:prstGeom prst="rect">
+            <a:avLst/>
+          </a:prstGeom>
+          <a:noFill/>
+        </p:spPr>
+        <p:txBody>
+          <a:bodyPr wrap="square" anchor="t" lIns="0" rIns="0" tIns="0" bIns="0">
+            <a:spAutoFit/>
+          </a:bodyPr>
+          <a:lstStyle/>
+          <a:p>
+            <a:pPr algn="l">
+              <a:lnSpc>
+                <a:spcPct val="112000"/>
+              </a:lnSpc>
+              <a:spcAft>
+                <a:spcPts val="400"/>
+              </a:spcAft>
+            </a:pPr>
+            <a:r>
+              <a:rPr sz="1450" b="0" i="0">
+                <a:solidFill>
+                  <a:srgbClr val="D9E1EF"/>
+                </a:solidFill>
+                <a:latin typeface="Arial"/>
+              </a:rPr>
+              <a:t>If winter comes and Duran's rebound has shown up, this is what a deal should return. With a top-6 rotation (3.65 ERA) carrying the club, trading bats for arms is backwards — convert the outfield surplus into what's thin:</a:t>
+            </a:r>
+          </a:p>
+        </p:txBody>
+      </p:sp>
+      <p:sp>
+        <p:nvSpPr>
+          <p:cNvPr id="5" name="Rounded Rectangle 4"/>
+          <p:cNvSpPr/>
+          <p:nvPr/>
+        </p:nvSpPr>
+        <p:spPr>
+          <a:xfrm>
+            <a:off x="566928" y="2468880"/>
+            <a:ext cx="3502152" cy="2514600"/>
+          </a:xfrm>
+          <a:prstGeom prst="roundRect">
+            <a:avLst>
+              <a:gd name="adj" fmla="val 6000"/>
+            </a:avLst>
+          </a:prstGeom>
+          <a:solidFill>
+            <a:srgbClr val="121E33"/>
+          </a:solidFill>
+          <a:ln w="12700">
+            <a:solidFill>
+              <a:srgbClr val="26334E"/>
+            </a:solidFill>
+          </a:ln>
+          <a:effectLst/>
+        </p:spPr>
+        <p:style>
+          <a:lnRef idx="1">
+            <a:schemeClr val="accent1"/>
+          </a:lnRef>
+          <a:fillRef idx="3">
+            <a:schemeClr val="accent1"/>
+          </a:fillRef>
+          <a:effectRef idx="2">
+            <a:schemeClr val="accent1"/>
+          </a:effectRef>
+          <a:fontRef idx="minor">
+            <a:schemeClr val="lt1"/>
+          </a:fontRef>
+        </p:style>
+        <p:txBody>
+          <a:bodyPr rtlCol="0" anchor="ctr"/>
+          <a:lstStyle/>
+          <a:p>
+            <a:pPr algn="ctr"/>
           </a:p>
         </p:txBody>
       </p:sp>
@@ -7091,8 +6914,8 @@
         </p:nvSpPr>
         <p:spPr>
           <a:xfrm>
-            <a:off x="8183879" y="2221991"/>
-            <a:ext cx="128016" cy="128016"/>
+            <a:off x="841247" y="2724912"/>
+            <a:ext cx="384048" cy="384048"/>
           </a:xfrm>
           <a:prstGeom prst="roundRect">
             <a:avLst>
@@ -7100,7 +6923,7 @@
             </a:avLst>
           </a:prstGeom>
           <a:solidFill>
-            <a:srgbClr val="E8615A"/>
+            <a:srgbClr val="58C08D"/>
           </a:solidFill>
           <a:ln>
             <a:noFill/>
@@ -7122,6 +6945,147 @@
           </a:fontRef>
         </p:style>
         <p:txBody>
+          <a:bodyPr rtlCol="0" anchor="ctr" wrap="none"/>
+          <a:lstStyle/>
+          <a:p>
+            <a:pPr algn="ctr"/>
+            <a:r>
+              <a:rPr sz="1600" b="1">
+                <a:solidFill>
+                  <a:srgbClr val="0B1220"/>
+                </a:solidFill>
+                <a:latin typeface="Courier New"/>
+              </a:rPr>
+              <a:t>1</a:t>
+            </a:r>
+          </a:p>
+        </p:txBody>
+      </p:sp>
+      <p:sp>
+        <p:nvSpPr>
+          <p:cNvPr id="7" name="TextBox 6"/>
+          <p:cNvSpPr txBox="1"/>
+          <p:nvPr/>
+        </p:nvSpPr>
+        <p:spPr>
+          <a:xfrm>
+            <a:off x="841247" y="3310128"/>
+            <a:ext cx="2999232" cy="411480"/>
+          </a:xfrm>
+          <a:prstGeom prst="rect">
+            <a:avLst/>
+          </a:prstGeom>
+          <a:noFill/>
+        </p:spPr>
+        <p:txBody>
+          <a:bodyPr wrap="square" anchor="t" lIns="0" rIns="0" tIns="0" bIns="0">
+            <a:spAutoFit/>
+          </a:bodyPr>
+          <a:lstStyle/>
+          <a:p>
+            <a:pPr algn="l">
+              <a:lnSpc>
+                <a:spcPct val="100000"/>
+              </a:lnSpc>
+              <a:spcAft>
+                <a:spcPts val="0"/>
+              </a:spcAft>
+            </a:pPr>
+            <a:r>
+              <a:rPr sz="1600" b="1" i="0">
+                <a:solidFill>
+                  <a:srgbClr val="EAF0F8"/>
+                </a:solidFill>
+                <a:latin typeface="Arial"/>
+              </a:rPr>
+              <a:t>Controllable bats</a:t>
+            </a:r>
+          </a:p>
+        </p:txBody>
+      </p:sp>
+      <p:sp>
+        <p:nvSpPr>
+          <p:cNvPr id="8" name="TextBox 7"/>
+          <p:cNvSpPr txBox="1"/>
+          <p:nvPr/>
+        </p:nvSpPr>
+        <p:spPr>
+          <a:xfrm>
+            <a:off x="841247" y="3767328"/>
+            <a:ext cx="2999232" cy="1097280"/>
+          </a:xfrm>
+          <a:prstGeom prst="rect">
+            <a:avLst/>
+          </a:prstGeom>
+          <a:noFill/>
+        </p:spPr>
+        <p:txBody>
+          <a:bodyPr wrap="square" anchor="t" lIns="0" rIns="0" tIns="0" bIns="0">
+            <a:spAutoFit/>
+          </a:bodyPr>
+          <a:lstStyle/>
+          <a:p>
+            <a:pPr algn="l">
+              <a:lnSpc>
+                <a:spcPct val="110000"/>
+              </a:lnSpc>
+              <a:spcAft>
+                <a:spcPts val="400"/>
+              </a:spcAft>
+            </a:pPr>
+            <a:r>
+              <a:rPr sz="1280" b="0" i="0">
+                <a:solidFill>
+                  <a:srgbClr val="93A0B6"/>
+                </a:solidFill>
+                <a:latin typeface="Arial"/>
+              </a:rPr>
+              <a:t>Young, cost-controlled position players to fix an inconsistent lineup and lengthen it around the core.</a:t>
+            </a:r>
+          </a:p>
+        </p:txBody>
+      </p:sp>
+      <p:sp>
+        <p:nvSpPr>
+          <p:cNvPr id="9" name="Rounded Rectangle 8"/>
+          <p:cNvSpPr/>
+          <p:nvPr/>
+        </p:nvSpPr>
+        <p:spPr>
+          <a:xfrm>
+            <a:off x="4352544" y="2468880"/>
+            <a:ext cx="3502152" cy="2514600"/>
+          </a:xfrm>
+          <a:prstGeom prst="roundRect">
+            <a:avLst>
+              <a:gd name="adj" fmla="val 6000"/>
+            </a:avLst>
+          </a:prstGeom>
+          <a:solidFill>
+            <a:srgbClr val="121E33"/>
+          </a:solidFill>
+          <a:ln w="12700">
+            <a:solidFill>
+              <a:srgbClr val="26334E"/>
+            </a:solidFill>
+          </a:ln>
+          <a:effectLst/>
+        </p:spPr>
+        <p:style>
+          <a:lnRef idx="1">
+            <a:schemeClr val="accent1"/>
+          </a:lnRef>
+          <a:fillRef idx="3">
+            <a:schemeClr val="accent1"/>
+          </a:fillRef>
+          <a:effectRef idx="2">
+            <a:schemeClr val="accent1"/>
+          </a:effectRef>
+          <a:fontRef idx="minor">
+            <a:schemeClr val="lt1"/>
+          </a:fontRef>
+        </p:style>
+        <p:txBody>
           <a:bodyPr rtlCol="0" anchor="ctr"/>
           <a:lstStyle/>
           <a:p>
@@ -7131,65 +7095,14 @@
       </p:sp>
       <p:sp>
         <p:nvSpPr>
-          <p:cNvPr id="7" name="TextBox 6"/>
-          <p:cNvSpPr txBox="1"/>
-          <p:nvPr/>
-        </p:nvSpPr>
-        <p:spPr>
-          <a:xfrm>
-            <a:off x="8439911" y="2194560"/>
-            <a:ext cx="3566160" cy="457200"/>
-          </a:xfrm>
-          <a:prstGeom prst="rect">
-            <a:avLst/>
-          </a:prstGeom>
-          <a:noFill/>
-        </p:spPr>
-        <p:txBody>
-          <a:bodyPr wrap="square" anchor="t" lIns="0" rIns="0" tIns="0" bIns="0">
-            <a:spAutoFit/>
-          </a:bodyPr>
-          <a:lstStyle/>
-          <a:p>
-            <a:pPr algn="l">
-              <a:lnSpc>
-                <a:spcPct val="100000"/>
-              </a:lnSpc>
-              <a:spcAft>
-                <a:spcPts val="0"/>
-              </a:spcAft>
-            </a:pPr>
-            <a:r>
-              <a:rPr sz="1400" b="1" i="0">
-                <a:solidFill>
-                  <a:srgbClr val="EAF0F8"/>
-                </a:solidFill>
-                <a:latin typeface="Arial"/>
-              </a:rPr>
-              <a:t>Phillies  </a:t>
-            </a:r>
-            <a:r>
-              <a:rPr sz="1200" b="0" i="0">
-                <a:solidFill>
-                  <a:srgbClr val="93A0B6"/>
-                </a:solidFill>
-                <a:latin typeface="Arial"/>
-              </a:rPr>
-              <a:t>.557, 84 OF wRC+</a:t>
-            </a:r>
-          </a:p>
-        </p:txBody>
-      </p:sp>
-      <p:sp>
-        <p:nvSpPr>
-          <p:cNvPr id="8" name="Rounded Rectangle 7"/>
+          <p:cNvPr id="10" name="Rounded Rectangle 9"/>
           <p:cNvSpPr/>
           <p:nvPr/>
         </p:nvSpPr>
         <p:spPr>
           <a:xfrm>
-            <a:off x="8183879" y="2788920"/>
-            <a:ext cx="128016" cy="128016"/>
+            <a:off x="4626864" y="2724912"/>
+            <a:ext cx="384048" cy="384048"/>
           </a:xfrm>
           <a:prstGeom prst="roundRect">
             <a:avLst>
@@ -7197,7 +7110,7 @@
             </a:avLst>
           </a:prstGeom>
           <a:solidFill>
-            <a:srgbClr val="E8615A"/>
+            <a:srgbClr val="EAF0F8"/>
           </a:solidFill>
           <a:ln>
             <a:noFill/>
@@ -7219,6 +7132,147 @@
           </a:fontRef>
         </p:style>
         <p:txBody>
+          <a:bodyPr rtlCol="0" anchor="ctr" wrap="none"/>
+          <a:lstStyle/>
+          <a:p>
+            <a:pPr algn="ctr"/>
+            <a:r>
+              <a:rPr sz="1600" b="1">
+                <a:solidFill>
+                  <a:srgbClr val="0B1220"/>
+                </a:solidFill>
+                <a:latin typeface="Courier New"/>
+              </a:rPr>
+              <a:t>2</a:t>
+            </a:r>
+          </a:p>
+        </p:txBody>
+      </p:sp>
+      <p:sp>
+        <p:nvSpPr>
+          <p:cNvPr id="11" name="TextBox 10"/>
+          <p:cNvSpPr txBox="1"/>
+          <p:nvPr/>
+        </p:nvSpPr>
+        <p:spPr>
+          <a:xfrm>
+            <a:off x="4626864" y="3310128"/>
+            <a:ext cx="2999232" cy="411480"/>
+          </a:xfrm>
+          <a:prstGeom prst="rect">
+            <a:avLst/>
+          </a:prstGeom>
+          <a:noFill/>
+        </p:spPr>
+        <p:txBody>
+          <a:bodyPr wrap="square" anchor="t" lIns="0" rIns="0" tIns="0" bIns="0">
+            <a:spAutoFit/>
+          </a:bodyPr>
+          <a:lstStyle/>
+          <a:p>
+            <a:pPr algn="l">
+              <a:lnSpc>
+                <a:spcPct val="100000"/>
+              </a:lnSpc>
+              <a:spcAft>
+                <a:spcPts val="0"/>
+              </a:spcAft>
+            </a:pPr>
+            <a:r>
+              <a:rPr sz="1600" b="1" i="0">
+                <a:solidFill>
+                  <a:srgbClr val="EAF0F8"/>
+                </a:solidFill>
+                <a:latin typeface="Arial"/>
+              </a:rPr>
+              <a:t>Best talent / upside</a:t>
+            </a:r>
+          </a:p>
+        </p:txBody>
+      </p:sp>
+      <p:sp>
+        <p:nvSpPr>
+          <p:cNvPr id="12" name="TextBox 11"/>
+          <p:cNvSpPr txBox="1"/>
+          <p:nvPr/>
+        </p:nvSpPr>
+        <p:spPr>
+          <a:xfrm>
+            <a:off x="4626864" y="3767328"/>
+            <a:ext cx="2999232" cy="1097280"/>
+          </a:xfrm>
+          <a:prstGeom prst="rect">
+            <a:avLst/>
+          </a:prstGeom>
+          <a:noFill/>
+        </p:spPr>
+        <p:txBody>
+          <a:bodyPr wrap="square" anchor="t" lIns="0" rIns="0" tIns="0" bIns="0">
+            <a:spAutoFit/>
+          </a:bodyPr>
+          <a:lstStyle/>
+          <a:p>
+            <a:pPr algn="l">
+              <a:lnSpc>
+                <a:spcPct val="110000"/>
+              </a:lnSpc>
+              <a:spcAft>
+                <a:spcPts val="400"/>
+              </a:spcAft>
+            </a:pPr>
+            <a:r>
+              <a:rPr sz="1280" b="0" i="0">
+                <a:solidFill>
+                  <a:srgbClr val="93A0B6"/>
+                </a:solidFill>
+                <a:latin typeface="Arial"/>
+              </a:rPr>
+              <a:t>In a retool you take the best player, not the positional patch — prospects and MLB-ready youth over rentals.</a:t>
+            </a:r>
+          </a:p>
+        </p:txBody>
+      </p:sp>
+      <p:sp>
+        <p:nvSpPr>
+          <p:cNvPr id="13" name="Rounded Rectangle 12"/>
+          <p:cNvSpPr/>
+          <p:nvPr/>
+        </p:nvSpPr>
+        <p:spPr>
+          <a:xfrm>
+            <a:off x="8138159" y="2468880"/>
+            <a:ext cx="3502152" cy="2514600"/>
+          </a:xfrm>
+          <a:prstGeom prst="roundRect">
+            <a:avLst>
+              <a:gd name="adj" fmla="val 6000"/>
+            </a:avLst>
+          </a:prstGeom>
+          <a:solidFill>
+            <a:srgbClr val="121E33"/>
+          </a:solidFill>
+          <a:ln w="12700">
+            <a:solidFill>
+              <a:srgbClr val="26334E"/>
+            </a:solidFill>
+          </a:ln>
+          <a:effectLst/>
+        </p:spPr>
+        <p:style>
+          <a:lnRef idx="1">
+            <a:schemeClr val="accent1"/>
+          </a:lnRef>
+          <a:fillRef idx="3">
+            <a:schemeClr val="accent1"/>
+          </a:fillRef>
+          <a:effectRef idx="2">
+            <a:schemeClr val="accent1"/>
+          </a:effectRef>
+          <a:fontRef idx="minor">
+            <a:schemeClr val="lt1"/>
+          </a:fontRef>
+        </p:style>
+        <p:txBody>
           <a:bodyPr rtlCol="0" anchor="ctr"/>
           <a:lstStyle/>
           <a:p>
@@ -7228,65 +7282,14 @@
       </p:sp>
       <p:sp>
         <p:nvSpPr>
-          <p:cNvPr id="9" name="TextBox 8"/>
-          <p:cNvSpPr txBox="1"/>
-          <p:nvPr/>
-        </p:nvSpPr>
-        <p:spPr>
-          <a:xfrm>
-            <a:off x="8439911" y="2761488"/>
-            <a:ext cx="3566160" cy="457200"/>
-          </a:xfrm>
-          <a:prstGeom prst="rect">
-            <a:avLst/>
-          </a:prstGeom>
-          <a:noFill/>
-        </p:spPr>
-        <p:txBody>
-          <a:bodyPr wrap="square" anchor="t" lIns="0" rIns="0" tIns="0" bIns="0">
-            <a:spAutoFit/>
-          </a:bodyPr>
-          <a:lstStyle/>
-          <a:p>
-            <a:pPr algn="l">
-              <a:lnSpc>
-                <a:spcPct val="100000"/>
-              </a:lnSpc>
-              <a:spcAft>
-                <a:spcPts val="0"/>
-              </a:spcAft>
-            </a:pPr>
-            <a:r>
-              <a:rPr sz="1400" b="1" i="0">
-                <a:solidFill>
-                  <a:srgbClr val="EAF0F8"/>
-                </a:solidFill>
-                <a:latin typeface="Arial"/>
-              </a:rPr>
-              <a:t>Rays  </a:t>
-            </a:r>
-            <a:r>
-              <a:rPr sz="1200" b="0" i="0">
-                <a:solidFill>
-                  <a:srgbClr val="93A0B6"/>
-                </a:solidFill>
-                <a:latin typeface="Arial"/>
-              </a:rPr>
-              <a:t>.596, 88 OF wRC+</a:t>
-            </a:r>
-          </a:p>
-        </p:txBody>
-      </p:sp>
-      <p:sp>
-        <p:nvSpPr>
-          <p:cNvPr id="10" name="Rounded Rectangle 9"/>
+          <p:cNvPr id="14" name="Rounded Rectangle 13"/>
           <p:cNvSpPr/>
           <p:nvPr/>
         </p:nvSpPr>
         <p:spPr>
           <a:xfrm>
-            <a:off x="8183879" y="3355847"/>
-            <a:ext cx="128016" cy="128016"/>
+            <a:off x="8412480" y="2724912"/>
+            <a:ext cx="384048" cy="384048"/>
           </a:xfrm>
           <a:prstGeom prst="roundRect">
             <a:avLst>
@@ -7294,7 +7297,7 @@
             </a:avLst>
           </a:prstGeom>
           <a:solidFill>
-            <a:srgbClr val="E8615A"/>
+            <a:srgbClr val="E3B14E"/>
           </a:solidFill>
           <a:ln>
             <a:noFill/>
@@ -7316,23 +7319,32 @@
           </a:fontRef>
         </p:style>
         <p:txBody>
-          <a:bodyPr rtlCol="0" anchor="ctr"/>
+          <a:bodyPr rtlCol="0" anchor="ctr" wrap="none"/>
           <a:lstStyle/>
           <a:p>
             <a:pPr algn="ctr"/>
-          </a:p>
-        </p:txBody>
-      </p:sp>
-      <p:sp>
-        <p:nvSpPr>
-          <p:cNvPr id="11" name="TextBox 10"/>
-          <p:cNvSpPr txBox="1"/>
-          <p:nvPr/>
-        </p:nvSpPr>
-        <p:spPr>
-          <a:xfrm>
-            <a:off x="8439911" y="3328415"/>
-            <a:ext cx="3566160" cy="457200"/>
+            <a:r>
+              <a:rPr sz="1600" b="1">
+                <a:solidFill>
+                  <a:srgbClr val="0B1220"/>
+                </a:solidFill>
+                <a:latin typeface="Courier New"/>
+              </a:rPr>
+              <a:t>3</a:t>
+            </a:r>
+          </a:p>
+        </p:txBody>
+      </p:sp>
+      <p:sp>
+        <p:nvSpPr>
+          <p:cNvPr id="15" name="TextBox 14"/>
+          <p:cNvSpPr txBox="1"/>
+          <p:nvPr/>
+        </p:nvSpPr>
+        <p:spPr>
+          <a:xfrm>
+            <a:off x="8412480" y="3310128"/>
+            <a:ext cx="2999232" cy="411480"/>
           </a:xfrm>
           <a:prstGeom prst="rect">
             <a:avLst/>
@@ -7354,82 +7366,69 @@
               </a:spcAft>
             </a:pPr>
             <a:r>
-              <a:rPr sz="1400" b="1" i="0">
+              <a:rPr sz="1600" b="1" i="0">
                 <a:solidFill>
                   <a:srgbClr val="EAF0F8"/>
                 </a:solidFill>
                 <a:latin typeface="Arial"/>
               </a:rPr>
-              <a:t>Cardinals  </a:t>
-            </a:r>
-            <a:r>
-              <a:rPr sz="1200" b="0" i="0">
+              <a:t>Salary relief</a:t>
+            </a:r>
+          </a:p>
+        </p:txBody>
+      </p:sp>
+      <p:sp>
+        <p:nvSpPr>
+          <p:cNvPr id="16" name="TextBox 15"/>
+          <p:cNvSpPr txBox="1"/>
+          <p:nvPr/>
+        </p:nvSpPr>
+        <p:spPr>
+          <a:xfrm>
+            <a:off x="8412480" y="3767328"/>
+            <a:ext cx="2999232" cy="1097280"/>
+          </a:xfrm>
+          <a:prstGeom prst="rect">
+            <a:avLst/>
+          </a:prstGeom>
+          <a:noFill/>
+        </p:spPr>
+        <p:txBody>
+          <a:bodyPr wrap="square" anchor="t" lIns="0" rIns="0" tIns="0" bIns="0">
+            <a:spAutoFit/>
+          </a:bodyPr>
+          <a:lstStyle/>
+          <a:p>
+            <a:pPr algn="l">
+              <a:lnSpc>
+                <a:spcPct val="110000"/>
+              </a:lnSpc>
+              <a:spcAft>
+                <a:spcPts val="400"/>
+              </a:spcAft>
+            </a:pPr>
+            <a:r>
+              <a:rPr sz="1280" b="0" i="0">
                 <a:solidFill>
                   <a:srgbClr val="93A0B6"/>
                 </a:solidFill>
                 <a:latin typeface="Arial"/>
               </a:rPr>
-              <a:t>.526, OF need</a:t>
-            </a:r>
-          </a:p>
-        </p:txBody>
-      </p:sp>
-      <p:sp>
-        <p:nvSpPr>
-          <p:cNvPr id="12" name="Rounded Rectangle 11"/>
-          <p:cNvSpPr/>
-          <p:nvPr/>
-        </p:nvSpPr>
-        <p:spPr>
-          <a:xfrm>
-            <a:off x="8183879" y="3922776"/>
-            <a:ext cx="128016" cy="128016"/>
-          </a:xfrm>
-          <a:prstGeom prst="roundRect">
-            <a:avLst>
-              <a:gd name="adj" fmla="val 18000"/>
-            </a:avLst>
-          </a:prstGeom>
-          <a:solidFill>
-            <a:srgbClr val="E8615A"/>
-          </a:solidFill>
-          <a:ln>
-            <a:noFill/>
-          </a:ln>
-          <a:effectLst/>
-        </p:spPr>
-        <p:style>
-          <a:lnRef idx="1">
-            <a:schemeClr val="accent1"/>
-          </a:lnRef>
-          <a:fillRef idx="3">
-            <a:schemeClr val="accent1"/>
-          </a:fillRef>
-          <a:effectRef idx="2">
-            <a:schemeClr val="accent1"/>
-          </a:effectRef>
-          <a:fontRef idx="minor">
-            <a:schemeClr val="lt1"/>
-          </a:fontRef>
-        </p:style>
-        <p:txBody>
-          <a:bodyPr rtlCol="0" anchor="ctr"/>
-          <a:lstStyle/>
-          <a:p>
-            <a:pPr algn="ctr"/>
-          </a:p>
-        </p:txBody>
-      </p:sp>
-      <p:sp>
-        <p:nvSpPr>
-          <p:cNvPr id="13" name="TextBox 12"/>
-          <p:cNvSpPr txBox="1"/>
-          <p:nvPr/>
-        </p:nvSpPr>
-        <p:spPr>
-          <a:xfrm>
-            <a:off x="8439911" y="3895344"/>
-            <a:ext cx="3566160" cy="457200"/>
+              <a:t>Attach Yoshida money where possible; free payroll for the 2027 window.</a:t>
+            </a:r>
+          </a:p>
+        </p:txBody>
+      </p:sp>
+      <p:sp>
+        <p:nvSpPr>
+          <p:cNvPr id="17" name="TextBox 16"/>
+          <p:cNvSpPr txBox="1"/>
+          <p:nvPr/>
+        </p:nvSpPr>
+        <p:spPr>
+          <a:xfrm>
+            <a:off x="566928" y="5257800"/>
+            <a:ext cx="11064240" cy="457200"/>
           </a:xfrm>
           <a:prstGeom prst="rect">
             <a:avLst/>
@@ -7451,89 +7450,29 @@
               </a:spcAft>
             </a:pPr>
             <a:r>
-              <a:rPr sz="1400" b="1" i="0">
+              <a:rPr sz="1400" b="1" i="1">
                 <a:solidFill>
                   <a:srgbClr val="EAF0F8"/>
                 </a:solidFill>
                 <a:latin typeface="Arial"/>
               </a:rPr>
-              <a:t>Astros  </a:t>
-            </a:r>
-            <a:r>
-              <a:rPr sz="1200" b="0" i="0">
+              <a:t>Keep the arms. Cash the outfield. </a:t>
+            </a:r>
+            <a:r>
+              <a:rPr sz="1400" b="0" i="1">
                 <a:solidFill>
                   <a:srgbClr val="93A0B6"/>
                 </a:solidFill>
                 <a:latin typeface="Arial"/>
               </a:rPr>
-              <a:t>fringe, weakest OF</a:t>
-            </a:r>
-          </a:p>
-        </p:txBody>
-      </p:sp>
-      <p:sp>
-        <p:nvSpPr>
-          <p:cNvPr id="14" name="TextBox 13"/>
-          <p:cNvSpPr txBox="1"/>
-          <p:nvPr/>
-        </p:nvSpPr>
-        <p:spPr>
-          <a:xfrm>
-            <a:off x="8183879" y="4709160"/>
-            <a:ext cx="3657600" cy="1005840"/>
-          </a:xfrm>
-          <a:prstGeom prst="rect">
-            <a:avLst/>
-          </a:prstGeom>
-          <a:noFill/>
-        </p:spPr>
-        <p:txBody>
-          <a:bodyPr wrap="square" anchor="t" lIns="0" rIns="0" tIns="0" bIns="0">
-            <a:spAutoFit/>
-          </a:bodyPr>
-          <a:lstStyle/>
-          <a:p>
-            <a:pPr algn="l">
-              <a:lnSpc>
-                <a:spcPct val="112000"/>
-              </a:lnSpc>
-              <a:spcAft>
-                <a:spcPts val="400"/>
-              </a:spcAft>
-            </a:pPr>
-            <a:r>
-              <a:rPr sz="1250" b="0" i="0">
-                <a:solidFill>
-                  <a:srgbClr val="D9E1EF"/>
-                </a:solidFill>
-                <a:latin typeface="Arial"/>
-              </a:rPr>
-              <a:t>Trade a redundant bat to a team that needs one — and take back the </a:t>
-            </a:r>
-            <a:r>
-              <a:rPr sz="1250" b="1" i="0">
-                <a:solidFill>
-                  <a:srgbClr val="58C08D"/>
-                </a:solidFill>
-                <a:latin typeface="Arial"/>
-              </a:rPr>
-              <a:t>hitting/youth</a:t>
-            </a:r>
-            <a:r>
-              <a:rPr sz="1250" b="0" i="0">
-                <a:solidFill>
-                  <a:srgbClr val="D9E1EF"/>
-                </a:solidFill>
-                <a:latin typeface="Arial"/>
-              </a:rPr>
-              <a:t> Boston is short on.</a:t>
-            </a:r>
-          </a:p>
-        </p:txBody>
-      </p:sp>
-      <p:sp>
-        <p:nvSpPr>
-          <p:cNvPr id="15" name="TextBox 14"/>
+              <a:t>Build the 2027 lineup, don't rent the 2026 one.</a:t>
+            </a:r>
+          </a:p>
+        </p:txBody>
+      </p:sp>
+      <p:sp>
+        <p:nvSpPr>
+          <p:cNvPr id="18" name="TextBox 17"/>
           <p:cNvSpPr txBox="1"/>
           <p:nvPr/>
         </p:nvSpPr>
@@ -7645,7 +7584,7 @@
                 </a:solidFill>
                 <a:latin typeface="Courier New"/>
               </a:rPr>
-              <a:t>// THE SEQUENCE</a:t>
+              <a:t>// THE MARKET</a:t>
             </a:r>
           </a:p>
         </p:txBody>
@@ -7687,21 +7626,87 @@
                 </a:solidFill>
                 <a:latin typeface="Arial"/>
               </a:rPr>
-              <a:t>Buy now, decide on Duran in the winter</a:t>
-            </a:r>
-          </a:p>
-        </p:txBody>
-      </p:sp>
-      <p:sp>
-        <p:nvSpPr>
-          <p:cNvPr id="4" name="Rounded Rectangle 3"/>
+              <a:t>Who pays: contenders with a hole in the outfield</a:t>
+            </a:r>
+          </a:p>
+        </p:txBody>
+      </p:sp>
+      <p:pic>
+        <p:nvPicPr>
+          <p:cNvPr id="4" name="Picture 3" descr="08_trade_fit_targets.png"/>
+          <p:cNvPicPr>
+            <a:picLocks noChangeAspect="1"/>
+          </p:cNvPicPr>
+          <p:nvPr/>
+        </p:nvPicPr>
+        <p:blipFill>
+          <a:blip r:embed="rId2"/>
+          <a:stretch>
+            <a:fillRect/>
+          </a:stretch>
+        </p:blipFill>
+        <p:spPr>
+          <a:xfrm>
+            <a:off x="757237" y="1463040"/>
+            <a:ext cx="6715125" cy="4297680"/>
+          </a:xfrm>
+          <a:prstGeom prst="rect">
+            <a:avLst/>
+          </a:prstGeom>
+        </p:spPr>
+      </p:pic>
+      <p:sp>
+        <p:nvSpPr>
+          <p:cNvPr id="5" name="TextBox 4"/>
+          <p:cNvSpPr txBox="1"/>
+          <p:nvPr/>
+        </p:nvSpPr>
+        <p:spPr>
+          <a:xfrm>
+            <a:off x="8183879" y="1691640"/>
+            <a:ext cx="3657600" cy="457200"/>
+          </a:xfrm>
+          <a:prstGeom prst="rect">
+            <a:avLst/>
+          </a:prstGeom>
+          <a:noFill/>
+        </p:spPr>
+        <p:txBody>
+          <a:bodyPr wrap="square" anchor="t" lIns="0" rIns="0" tIns="0" bIns="0">
+            <a:spAutoFit/>
+          </a:bodyPr>
+          <a:lstStyle/>
+          <a:p>
+            <a:pPr algn="l">
+              <a:lnSpc>
+                <a:spcPct val="100000"/>
+              </a:lnSpc>
+              <a:spcAft>
+                <a:spcPts val="0"/>
+              </a:spcAft>
+            </a:pPr>
+            <a:r>
+              <a:rPr sz="1500" b="1" i="0">
+                <a:solidFill>
+                  <a:srgbClr val="EAF0F8"/>
+                </a:solidFill>
+                <a:latin typeface="Arial"/>
+              </a:rPr>
+              <a:t>Best-fit buyers</a:t>
+            </a:r>
+          </a:p>
+        </p:txBody>
+      </p:sp>
+      <p:sp>
+        <p:nvSpPr>
+          <p:cNvPr id="6" name="Rounded Rectangle 5"/>
           <p:cNvSpPr/>
           <p:nvPr/>
         </p:nvSpPr>
         <p:spPr>
           <a:xfrm>
-            <a:off x="640080" y="1801368"/>
-            <a:ext cx="457200" cy="457200"/>
+            <a:off x="8183879" y="2221991"/>
+            <a:ext cx="128016" cy="128016"/>
           </a:xfrm>
           <a:prstGeom prst="roundRect">
             <a:avLst>
@@ -7731,93 +7736,74 @@
           </a:fontRef>
         </p:style>
         <p:txBody>
-          <a:bodyPr rtlCol="0" anchor="ctr" wrap="none"/>
+          <a:bodyPr rtlCol="0" anchor="ctr"/>
           <a:lstStyle/>
           <a:p>
             <a:pPr algn="ctr"/>
-            <a:r>
-              <a:rPr sz="1800" b="1">
-                <a:solidFill>
-                  <a:srgbClr val="0B1220"/>
-                </a:solidFill>
-                <a:latin typeface="Courier New"/>
-              </a:rPr>
-              <a:t>1</a:t>
-            </a:r>
-          </a:p>
-        </p:txBody>
-      </p:sp>
-      <p:sp>
-        <p:nvSpPr>
-          <p:cNvPr id="5" name="TextBox 4"/>
-          <p:cNvSpPr txBox="1"/>
-          <p:nvPr/>
-        </p:nvSpPr>
-        <p:spPr>
-          <a:xfrm>
-            <a:off x="1280160" y="1783080"/>
-            <a:ext cx="6126480" cy="1005840"/>
-          </a:xfrm>
-          <a:prstGeom prst="rect">
-            <a:avLst/>
-          </a:prstGeom>
-          <a:noFill/>
-        </p:spPr>
-        <p:txBody>
-          <a:bodyPr wrap="square" anchor="t" lIns="0" rIns="0" tIns="0" bIns="0">
-            <a:spAutoFit/>
-          </a:bodyPr>
-          <a:lstStyle/>
-          <a:p>
-            <a:pPr algn="l">
-              <a:lnSpc>
-                <a:spcPct val="108000"/>
-              </a:lnSpc>
-              <a:spcAft>
-                <a:spcPts val="200"/>
-              </a:spcAft>
-            </a:pPr>
-            <a:r>
-              <a:rPr sz="1700" b="1" i="0">
+          </a:p>
+        </p:txBody>
+      </p:sp>
+      <p:sp>
+        <p:nvSpPr>
+          <p:cNvPr id="7" name="TextBox 6"/>
+          <p:cNvSpPr txBox="1"/>
+          <p:nvPr/>
+        </p:nvSpPr>
+        <p:spPr>
+          <a:xfrm>
+            <a:off x="8439911" y="2194560"/>
+            <a:ext cx="3566160" cy="457200"/>
+          </a:xfrm>
+          <a:prstGeom prst="rect">
+            <a:avLst/>
+          </a:prstGeom>
+          <a:noFill/>
+        </p:spPr>
+        <p:txBody>
+          <a:bodyPr wrap="square" anchor="t" lIns="0" rIns="0" tIns="0" bIns="0">
+            <a:spAutoFit/>
+          </a:bodyPr>
+          <a:lstStyle/>
+          <a:p>
+            <a:pPr algn="l">
+              <a:lnSpc>
+                <a:spcPct val="100000"/>
+              </a:lnSpc>
+              <a:spcAft>
+                <a:spcPts val="0"/>
+              </a:spcAft>
+            </a:pPr>
+            <a:r>
+              <a:rPr sz="1400" b="1" i="0">
                 <a:solidFill>
                   <a:srgbClr val="EAF0F8"/>
                 </a:solidFill>
                 <a:latin typeface="Arial"/>
               </a:rPr>
-              <a:t>At the deadline: buy targeted</a:t>
-            </a:r>
-          </a:p>
-          <a:p>
-            <a:pPr algn="l">
-              <a:lnSpc>
-                <a:spcPct val="108000"/>
-              </a:lnSpc>
-              <a:spcAft>
-                <a:spcPts val="200"/>
-              </a:spcAft>
-            </a:pPr>
-            <a:r>
-              <a:rPr sz="1350" b="0" i="0">
+              <a:t>Phillies  </a:t>
+            </a:r>
+            <a:r>
+              <a:rPr sz="1200" b="0" i="0">
                 <a:solidFill>
                   <a:srgbClr val="93A0B6"/>
                 </a:solidFill>
                 <a:latin typeface="Arial"/>
               </a:rPr>
-              <a:t>A controllable infield bat and a reliever, funded from the pitching surplus. Keep the vets — they're playoff innings now.</a:t>
-            </a:r>
-          </a:p>
-        </p:txBody>
-      </p:sp>
-      <p:sp>
-        <p:nvSpPr>
-          <p:cNvPr id="6" name="Rounded Rectangle 5"/>
+              <a:t>.557, 84 OF wRC+</a:t>
+            </a:r>
+          </a:p>
+        </p:txBody>
+      </p:sp>
+      <p:sp>
+        <p:nvSpPr>
+          <p:cNvPr id="8" name="Rounded Rectangle 7"/>
           <p:cNvSpPr/>
           <p:nvPr/>
         </p:nvSpPr>
         <p:spPr>
           <a:xfrm>
-            <a:off x="640080" y="2971800"/>
-            <a:ext cx="457200" cy="457200"/>
+            <a:off x="8183879" y="2788920"/>
+            <a:ext cx="128016" cy="128016"/>
           </a:xfrm>
           <a:prstGeom prst="roundRect">
             <a:avLst>
@@ -7847,93 +7833,74 @@
           </a:fontRef>
         </p:style>
         <p:txBody>
-          <a:bodyPr rtlCol="0" anchor="ctr" wrap="none"/>
+          <a:bodyPr rtlCol="0" anchor="ctr"/>
           <a:lstStyle/>
           <a:p>
             <a:pPr algn="ctr"/>
-            <a:r>
-              <a:rPr sz="1800" b="1">
-                <a:solidFill>
-                  <a:srgbClr val="0B1220"/>
-                </a:solidFill>
-                <a:latin typeface="Courier New"/>
-              </a:rPr>
-              <a:t>2</a:t>
-            </a:r>
-          </a:p>
-        </p:txBody>
-      </p:sp>
-      <p:sp>
-        <p:nvSpPr>
-          <p:cNvPr id="7" name="TextBox 6"/>
-          <p:cNvSpPr txBox="1"/>
-          <p:nvPr/>
-        </p:nvSpPr>
-        <p:spPr>
-          <a:xfrm>
-            <a:off x="1280160" y="2953512"/>
-            <a:ext cx="6126480" cy="1005840"/>
-          </a:xfrm>
-          <a:prstGeom prst="rect">
-            <a:avLst/>
-          </a:prstGeom>
-          <a:noFill/>
-        </p:spPr>
-        <p:txBody>
-          <a:bodyPr wrap="square" anchor="t" lIns="0" rIns="0" tIns="0" bIns="0">
-            <a:spAutoFit/>
-          </a:bodyPr>
-          <a:lstStyle/>
-          <a:p>
-            <a:pPr algn="l">
-              <a:lnSpc>
-                <a:spcPct val="108000"/>
-              </a:lnSpc>
-              <a:spcAft>
-                <a:spcPts val="200"/>
-              </a:spcAft>
-            </a:pPr>
-            <a:r>
-              <a:rPr sz="1700" b="1" i="0">
+          </a:p>
+        </p:txBody>
+      </p:sp>
+      <p:sp>
+        <p:nvSpPr>
+          <p:cNvPr id="9" name="TextBox 8"/>
+          <p:cNvSpPr txBox="1"/>
+          <p:nvPr/>
+        </p:nvSpPr>
+        <p:spPr>
+          <a:xfrm>
+            <a:off x="8439911" y="2761488"/>
+            <a:ext cx="3566160" cy="457200"/>
+          </a:xfrm>
+          <a:prstGeom prst="rect">
+            <a:avLst/>
+          </a:prstGeom>
+          <a:noFill/>
+        </p:spPr>
+        <p:txBody>
+          <a:bodyPr wrap="square" anchor="t" lIns="0" rIns="0" tIns="0" bIns="0">
+            <a:spAutoFit/>
+          </a:bodyPr>
+          <a:lstStyle/>
+          <a:p>
+            <a:pPr algn="l">
+              <a:lnSpc>
+                <a:spcPct val="100000"/>
+              </a:lnSpc>
+              <a:spcAft>
+                <a:spcPts val="0"/>
+              </a:spcAft>
+            </a:pPr>
+            <a:r>
+              <a:rPr sz="1400" b="1" i="0">
                 <a:solidFill>
                   <a:srgbClr val="EAF0F8"/>
                 </a:solidFill>
                 <a:latin typeface="Arial"/>
               </a:rPr>
-              <a:t>Hold Duran through August</a:t>
-            </a:r>
-          </a:p>
-          <a:p>
-            <a:pPr algn="l">
-              <a:lnSpc>
-                <a:spcPct val="108000"/>
-              </a:lnSpc>
-              <a:spcAft>
-                <a:spcPts val="200"/>
-              </a:spcAft>
-            </a:pPr>
-            <a:r>
-              <a:rPr sz="1350" b="0" i="0">
+              <a:t>Rays  </a:t>
+            </a:r>
+            <a:r>
+              <a:rPr sz="1200" b="0" i="0">
                 <a:solidFill>
                   <a:srgbClr val="93A0B6"/>
                 </a:solidFill>
                 <a:latin typeface="Arial"/>
               </a:rPr>
-              <a:t>His value is at its nadir and his July contact quality (~.35 xwOBA) is already surging. Selling now cashes the slump.</a:t>
-            </a:r>
-          </a:p>
-        </p:txBody>
-      </p:sp>
-      <p:sp>
-        <p:nvSpPr>
-          <p:cNvPr id="8" name="Rounded Rectangle 7"/>
+              <a:t>.596, 88 OF wRC+</a:t>
+            </a:r>
+          </a:p>
+        </p:txBody>
+      </p:sp>
+      <p:sp>
+        <p:nvSpPr>
+          <p:cNvPr id="10" name="Rounded Rectangle 9"/>
           <p:cNvSpPr/>
           <p:nvPr/>
         </p:nvSpPr>
         <p:spPr>
           <a:xfrm>
-            <a:off x="640080" y="4142231"/>
-            <a:ext cx="457200" cy="457200"/>
+            <a:off x="8183879" y="3355847"/>
+            <a:ext cx="128016" cy="128016"/>
           </a:xfrm>
           <a:prstGeom prst="roundRect">
             <a:avLst>
@@ -7963,101 +7930,82 @@
           </a:fontRef>
         </p:style>
         <p:txBody>
-          <a:bodyPr rtlCol="0" anchor="ctr" wrap="none"/>
+          <a:bodyPr rtlCol="0" anchor="ctr"/>
           <a:lstStyle/>
           <a:p>
             <a:pPr algn="ctr"/>
-            <a:r>
-              <a:rPr sz="1800" b="1">
-                <a:solidFill>
-                  <a:srgbClr val="0B1220"/>
-                </a:solidFill>
-                <a:latin typeface="Courier New"/>
-              </a:rPr>
-              <a:t>3</a:t>
-            </a:r>
-          </a:p>
-        </p:txBody>
-      </p:sp>
-      <p:sp>
-        <p:nvSpPr>
-          <p:cNvPr id="9" name="TextBox 8"/>
-          <p:cNvSpPr txBox="1"/>
-          <p:nvPr/>
-        </p:nvSpPr>
-        <p:spPr>
-          <a:xfrm>
-            <a:off x="1280160" y="4123944"/>
-            <a:ext cx="6126480" cy="1005840"/>
-          </a:xfrm>
-          <a:prstGeom prst="rect">
-            <a:avLst/>
-          </a:prstGeom>
-          <a:noFill/>
-        </p:spPr>
-        <p:txBody>
-          <a:bodyPr wrap="square" anchor="t" lIns="0" rIns="0" tIns="0" bIns="0">
-            <a:spAutoFit/>
-          </a:bodyPr>
-          <a:lstStyle/>
-          <a:p>
-            <a:pPr algn="l">
-              <a:lnSpc>
-                <a:spcPct val="108000"/>
-              </a:lnSpc>
-              <a:spcAft>
-                <a:spcPts val="200"/>
-              </a:spcAft>
-            </a:pPr>
-            <a:r>
-              <a:rPr sz="1700" b="1" i="0">
+          </a:p>
+        </p:txBody>
+      </p:sp>
+      <p:sp>
+        <p:nvSpPr>
+          <p:cNvPr id="11" name="TextBox 10"/>
+          <p:cNvSpPr txBox="1"/>
+          <p:nvPr/>
+        </p:nvSpPr>
+        <p:spPr>
+          <a:xfrm>
+            <a:off x="8439911" y="3328415"/>
+            <a:ext cx="3566160" cy="457200"/>
+          </a:xfrm>
+          <a:prstGeom prst="rect">
+            <a:avLst/>
+          </a:prstGeom>
+          <a:noFill/>
+        </p:spPr>
+        <p:txBody>
+          <a:bodyPr wrap="square" anchor="t" lIns="0" rIns="0" tIns="0" bIns="0">
+            <a:spAutoFit/>
+          </a:bodyPr>
+          <a:lstStyle/>
+          <a:p>
+            <a:pPr algn="l">
+              <a:lnSpc>
+                <a:spcPct val="100000"/>
+              </a:lnSpc>
+              <a:spcAft>
+                <a:spcPts val="0"/>
+              </a:spcAft>
+            </a:pPr>
+            <a:r>
+              <a:rPr sz="1400" b="1" i="0">
                 <a:solidFill>
                   <a:srgbClr val="EAF0F8"/>
                 </a:solidFill>
                 <a:latin typeface="Arial"/>
               </a:rPr>
-              <a:t>Winter: re-price, then choose</a:t>
-            </a:r>
-          </a:p>
-          <a:p>
-            <a:pPr algn="l">
-              <a:lnSpc>
-                <a:spcPct val="108000"/>
-              </a:lnSpc>
-              <a:spcAft>
-                <a:spcPts val="200"/>
-              </a:spcAft>
-            </a:pPr>
-            <a:r>
-              <a:rPr sz="1350" b="0" i="0">
+              <a:t>Cardinals  </a:t>
+            </a:r>
+            <a:r>
+              <a:rPr sz="1200" b="0" i="0">
                 <a:solidFill>
                   <a:srgbClr val="93A0B6"/>
                 </a:solidFill>
                 <a:latin typeface="Arial"/>
               </a:rPr>
-              <a:t>Anthony healthy, jam returns. Rebound confirmed → extend or trade at full price. Erosion persists → sell at market. Either way, the 2027 OF is Anthony / Rafaela / Abreu.</a:t>
-            </a:r>
-          </a:p>
-        </p:txBody>
-      </p:sp>
-      <p:sp>
-        <p:nvSpPr>
-          <p:cNvPr id="10" name="Rounded Rectangle 9"/>
+              <a:t>.526, OF need</a:t>
+            </a:r>
+          </a:p>
+        </p:txBody>
+      </p:sp>
+      <p:sp>
+        <p:nvSpPr>
+          <p:cNvPr id="12" name="Rounded Rectangle 11"/>
           <p:cNvSpPr/>
           <p:nvPr/>
         </p:nvSpPr>
         <p:spPr>
           <a:xfrm>
-            <a:off x="7818120" y="1783080"/>
-            <a:ext cx="3794760" cy="3337560"/>
+            <a:off x="8183879" y="3922776"/>
+            <a:ext cx="128016" cy="128016"/>
           </a:xfrm>
           <a:prstGeom prst="roundRect">
             <a:avLst>
-              <a:gd name="adj" fmla="val 6000"/>
+              <a:gd name="adj" fmla="val 18000"/>
             </a:avLst>
           </a:prstGeom>
           <a:solidFill>
-            <a:srgbClr val="1A2740"/>
+            <a:srgbClr val="E8615A"/>
           </a:solidFill>
           <a:ln>
             <a:noFill/>
@@ -8088,14 +8036,14 @@
       </p:sp>
       <p:sp>
         <p:nvSpPr>
-          <p:cNvPr id="11" name="TextBox 10"/>
-          <p:cNvSpPr txBox="1"/>
-          <p:nvPr/>
-        </p:nvSpPr>
-        <p:spPr>
-          <a:xfrm>
-            <a:off x="8092440" y="2011680"/>
-            <a:ext cx="3291840" cy="365760"/>
+          <p:cNvPr id="13" name="TextBox 12"/>
+          <p:cNvSpPr txBox="1"/>
+          <p:nvPr/>
+        </p:nvSpPr>
+        <p:spPr>
+          <a:xfrm>
+            <a:off x="8439911" y="3895344"/>
+            <a:ext cx="3566160" cy="457200"/>
           </a:xfrm>
           <a:prstGeom prst="rect">
             <a:avLst/>
@@ -8117,196 +8065,82 @@
               </a:spcAft>
             </a:pPr>
             <a:r>
+              <a:rPr sz="1400" b="1" i="0">
+                <a:solidFill>
+                  <a:srgbClr val="EAF0F8"/>
+                </a:solidFill>
+                <a:latin typeface="Arial"/>
+              </a:rPr>
+              <a:t>Astros  </a:t>
+            </a:r>
+            <a:r>
+              <a:rPr sz="1200" b="0" i="0">
+                <a:solidFill>
+                  <a:srgbClr val="93A0B6"/>
+                </a:solidFill>
+                <a:latin typeface="Arial"/>
+              </a:rPr>
+              <a:t>fringe, weakest OF</a:t>
+            </a:r>
+          </a:p>
+        </p:txBody>
+      </p:sp>
+      <p:sp>
+        <p:nvSpPr>
+          <p:cNvPr id="14" name="TextBox 13"/>
+          <p:cNvSpPr txBox="1"/>
+          <p:nvPr/>
+        </p:nvSpPr>
+        <p:spPr>
+          <a:xfrm>
+            <a:off x="8183879" y="4709160"/>
+            <a:ext cx="3657600" cy="1005840"/>
+          </a:xfrm>
+          <a:prstGeom prst="rect">
+            <a:avLst/>
+          </a:prstGeom>
+          <a:noFill/>
+        </p:spPr>
+        <p:txBody>
+          <a:bodyPr wrap="square" anchor="t" lIns="0" rIns="0" tIns="0" bIns="0">
+            <a:spAutoFit/>
+          </a:bodyPr>
+          <a:lstStyle/>
+          <a:p>
+            <a:pPr algn="l">
+              <a:lnSpc>
+                <a:spcPct val="112000"/>
+              </a:lnSpc>
+              <a:spcAft>
+                <a:spcPts val="400"/>
+              </a:spcAft>
+            </a:pPr>
+            <a:r>
+              <a:rPr sz="1250" b="0" i="0">
+                <a:solidFill>
+                  <a:srgbClr val="D9E1EF"/>
+                </a:solidFill>
+                <a:latin typeface="Arial"/>
+              </a:rPr>
+              <a:t>Trade a redundant bat to a team that needs one — and take back the </a:t>
+            </a:r>
+            <a:r>
               <a:rPr sz="1250" b="1" i="0">
                 <a:solidFill>
-                  <a:srgbClr val="C9D2E3"/>
-                </a:solidFill>
-                <a:latin typeface="Arial"/>
-              </a:rPr>
-              <a:t>THE RETURN</a:t>
-            </a:r>
-          </a:p>
-        </p:txBody>
-      </p:sp>
-      <p:sp>
-        <p:nvSpPr>
-          <p:cNvPr id="12" name="TextBox 11"/>
-          <p:cNvSpPr txBox="1"/>
-          <p:nvPr/>
-        </p:nvSpPr>
-        <p:spPr>
-          <a:xfrm>
-            <a:off x="8092440" y="2487168"/>
-            <a:ext cx="3291840" cy="914400"/>
-          </a:xfrm>
-          <a:prstGeom prst="rect">
-            <a:avLst/>
-          </a:prstGeom>
-          <a:noFill/>
-        </p:spPr>
-        <p:txBody>
-          <a:bodyPr wrap="square" anchor="t" lIns="0" rIns="0" tIns="0" bIns="0">
-            <a:spAutoFit/>
-          </a:bodyPr>
-          <a:lstStyle/>
-          <a:p>
-            <a:pPr algn="l">
-              <a:lnSpc>
-                <a:spcPct val="105000"/>
-              </a:lnSpc>
-              <a:spcAft>
-                <a:spcPts val="200"/>
-              </a:spcAft>
-            </a:pPr>
-            <a:r>
-              <a:rPr sz="1300" b="1" i="0">
-                <a:solidFill>
-                  <a:srgbClr val="F0B8BC"/>
-                </a:solidFill>
-                <a:latin typeface="Arial"/>
-              </a:rPr>
-              <a:t>Sell now (nadir)</a:t>
-            </a:r>
-          </a:p>
-          <a:p>
-            <a:pPr algn="l">
-              <a:lnSpc>
-                <a:spcPct val="105000"/>
-              </a:lnSpc>
-              <a:spcAft>
-                <a:spcPts val="200"/>
-              </a:spcAft>
-            </a:pPr>
-            <a:r>
-              <a:rPr sz="1400" b="0" i="0">
-                <a:solidFill>
-                  <a:srgbClr val="F4F7FC"/>
-                </a:solidFill>
-                <a:latin typeface="Arial"/>
-              </a:rPr>
-              <a:t>~$10–15M · a 45-FV bat</a:t>
-            </a:r>
-          </a:p>
-        </p:txBody>
-      </p:sp>
-      <p:sp>
-        <p:nvSpPr>
-          <p:cNvPr id="13" name="TextBox 12"/>
-          <p:cNvSpPr txBox="1"/>
-          <p:nvPr/>
-        </p:nvSpPr>
-        <p:spPr>
-          <a:xfrm>
-            <a:off x="8092440" y="3520440"/>
-            <a:ext cx="3291840" cy="1005840"/>
-          </a:xfrm>
-          <a:prstGeom prst="rect">
-            <a:avLst/>
-          </a:prstGeom>
-          <a:noFill/>
-        </p:spPr>
-        <p:txBody>
-          <a:bodyPr wrap="square" anchor="t" lIns="0" rIns="0" tIns="0" bIns="0">
-            <a:spAutoFit/>
-          </a:bodyPr>
-          <a:lstStyle/>
-          <a:p>
-            <a:pPr algn="l">
-              <a:lnSpc>
-                <a:spcPct val="105000"/>
-              </a:lnSpc>
-              <a:spcAft>
-                <a:spcPts val="200"/>
-              </a:spcAft>
-            </a:pPr>
-            <a:r>
-              <a:rPr sz="1300" b="1" i="0">
-                <a:solidFill>
-                  <a:srgbClr val="A9E5B5"/>
-                </a:solidFill>
-                <a:latin typeface="Arial"/>
-              </a:rPr>
-              <a:t>Sell after rebound</a:t>
-            </a:r>
-          </a:p>
-          <a:p>
-            <a:pPr algn="l">
-              <a:lnSpc>
-                <a:spcPct val="105000"/>
-              </a:lnSpc>
-              <a:spcAft>
-                <a:spcPts val="200"/>
-              </a:spcAft>
-            </a:pPr>
-            <a:r>
-              <a:rPr sz="1400" b="0" i="0">
-                <a:solidFill>
-                  <a:srgbClr val="F4F7FC"/>
-                </a:solidFill>
-                <a:latin typeface="Arial"/>
-              </a:rPr>
-              <a:t>~$28M · a 50-FV, top-100</a:t>
-            </a:r>
-          </a:p>
-          <a:p>
-            <a:pPr algn="l">
-              <a:lnSpc>
-                <a:spcPct val="105000"/>
-              </a:lnSpc>
-              <a:spcAft>
-                <a:spcPts val="200"/>
-              </a:spcAft>
-            </a:pPr>
-            <a:r>
-              <a:rPr sz="1400" b="0" i="0">
-                <a:solidFill>
-                  <a:srgbClr val="F4F7FC"/>
-                </a:solidFill>
-                <a:latin typeface="Arial"/>
-              </a:rPr>
-              <a:t>controllable talent</a:t>
-            </a:r>
-          </a:p>
-        </p:txBody>
-      </p:sp>
-      <p:sp>
-        <p:nvSpPr>
-          <p:cNvPr id="14" name="TextBox 13"/>
-          <p:cNvSpPr txBox="1"/>
-          <p:nvPr/>
-        </p:nvSpPr>
-        <p:spPr>
-          <a:xfrm>
-            <a:off x="8092440" y="4617720"/>
-            <a:ext cx="3291840" cy="457200"/>
-          </a:xfrm>
-          <a:prstGeom prst="rect">
-            <a:avLst/>
-          </a:prstGeom>
-          <a:noFill/>
-        </p:spPr>
-        <p:txBody>
-          <a:bodyPr wrap="square" anchor="t" lIns="0" rIns="0" tIns="0" bIns="0">
-            <a:spAutoFit/>
-          </a:bodyPr>
-          <a:lstStyle/>
-          <a:p>
-            <a:pPr algn="l">
-              <a:lnSpc>
-                <a:spcPct val="105000"/>
-              </a:lnSpc>
-              <a:spcAft>
-                <a:spcPts val="400"/>
-              </a:spcAft>
-            </a:pPr>
-            <a:r>
-              <a:rPr sz="1150" b="0" i="1">
-                <a:solidFill>
-                  <a:srgbClr val="C9D2E3"/>
-                </a:solidFill>
-                <a:latin typeface="Arial"/>
-              </a:rPr>
-              <a:t>One grade of return = the reason to wait.</a:t>
+                  <a:srgbClr val="58C08D"/>
+                </a:solidFill>
+                <a:latin typeface="Arial"/>
+              </a:rPr>
+              <a:t>hitting/youth</a:t>
+            </a:r>
+            <a:r>
+              <a:rPr sz="1250" b="0" i="0">
+                <a:solidFill>
+                  <a:srgbClr val="D9E1EF"/>
+                </a:solidFill>
+                <a:latin typeface="Arial"/>
+              </a:rPr>
+              <a:t> Boston is short on.</a:t>
             </a:r>
           </a:p>
         </p:txBody>
@@ -8371,6 +8205,786 @@
 </file>
 
 <file path=ppt/slides/slide17.xml><?xml version="1.0" encoding="utf-8"?>
+<p:sld xmlns:a="http://schemas.openxmlformats.org/drawingml/2006/main" xmlns:p="http://schemas.openxmlformats.org/presentationml/2006/main" xmlns:r="http://schemas.openxmlformats.org/officeDocument/2006/relationships">
+  <p:cSld>
+    <p:bg>
+      <p:bgPr>
+        <a:solidFill>
+          <a:srgbClr val="0B1220"/>
+        </a:solidFill>
+        <a:effectLst/>
+      </p:bgPr>
+    </p:bg>
+    <p:spTree>
+      <p:nvGrpSpPr>
+        <p:cNvPr id="1" name=""/>
+        <p:cNvGrpSpPr/>
+        <p:nvPr/>
+      </p:nvGrpSpPr>
+      <p:grpSpPr/>
+      <p:sp>
+        <p:nvSpPr>
+          <p:cNvPr id="2" name="TextBox 1"/>
+          <p:cNvSpPr txBox="1"/>
+          <p:nvPr/>
+        </p:nvSpPr>
+        <p:spPr>
+          <a:xfrm>
+            <a:off x="566928" y="384048"/>
+            <a:ext cx="10058400" cy="274320"/>
+          </a:xfrm>
+          <a:prstGeom prst="rect">
+            <a:avLst/>
+          </a:prstGeom>
+          <a:noFill/>
+        </p:spPr>
+        <p:txBody>
+          <a:bodyPr wrap="square" anchor="t" lIns="0" rIns="0" tIns="0" bIns="0">
+            <a:spAutoFit/>
+          </a:bodyPr>
+          <a:lstStyle/>
+          <a:p>
+            <a:pPr algn="l">
+              <a:lnSpc>
+                <a:spcPct val="100000"/>
+              </a:lnSpc>
+              <a:spcAft>
+                <a:spcPts val="0"/>
+              </a:spcAft>
+            </a:pPr>
+            <a:r>
+              <a:rPr sz="1200" b="1" i="0">
+                <a:solidFill>
+                  <a:srgbClr val="E8615A"/>
+                </a:solidFill>
+                <a:latin typeface="Courier New"/>
+              </a:rPr>
+              <a:t>// THE SEQUENCE</a:t>
+            </a:r>
+          </a:p>
+        </p:txBody>
+      </p:sp>
+      <p:sp>
+        <p:nvSpPr>
+          <p:cNvPr id="3" name="TextBox 2"/>
+          <p:cNvSpPr txBox="1"/>
+          <p:nvPr/>
+        </p:nvSpPr>
+        <p:spPr>
+          <a:xfrm>
+            <a:off x="566928" y="658368"/>
+            <a:ext cx="11064240" cy="868680"/>
+          </a:xfrm>
+          <a:prstGeom prst="rect">
+            <a:avLst/>
+          </a:prstGeom>
+          <a:noFill/>
+        </p:spPr>
+        <p:txBody>
+          <a:bodyPr wrap="square" anchor="t" lIns="0" rIns="0" tIns="0" bIns="0">
+            <a:spAutoFit/>
+          </a:bodyPr>
+          <a:lstStyle/>
+          <a:p>
+            <a:pPr algn="l">
+              <a:lnSpc>
+                <a:spcPct val="100000"/>
+              </a:lnSpc>
+              <a:spcAft>
+                <a:spcPts val="0"/>
+              </a:spcAft>
+            </a:pPr>
+            <a:r>
+              <a:rPr sz="3000" b="1" i="0">
+                <a:solidFill>
+                  <a:srgbClr val="EAF0F8"/>
+                </a:solidFill>
+                <a:latin typeface="Arial"/>
+              </a:rPr>
+              <a:t>Buy now, decide on Duran in the winter</a:t>
+            </a:r>
+          </a:p>
+        </p:txBody>
+      </p:sp>
+      <p:sp>
+        <p:nvSpPr>
+          <p:cNvPr id="4" name="Rounded Rectangle 3"/>
+          <p:cNvSpPr/>
+          <p:nvPr/>
+        </p:nvSpPr>
+        <p:spPr>
+          <a:xfrm>
+            <a:off x="640080" y="1801368"/>
+            <a:ext cx="457200" cy="457200"/>
+          </a:xfrm>
+          <a:prstGeom prst="roundRect">
+            <a:avLst>
+              <a:gd name="adj" fmla="val 18000"/>
+            </a:avLst>
+          </a:prstGeom>
+          <a:solidFill>
+            <a:srgbClr val="E8615A"/>
+          </a:solidFill>
+          <a:ln>
+            <a:noFill/>
+          </a:ln>
+          <a:effectLst/>
+        </p:spPr>
+        <p:style>
+          <a:lnRef idx="1">
+            <a:schemeClr val="accent1"/>
+          </a:lnRef>
+          <a:fillRef idx="3">
+            <a:schemeClr val="accent1"/>
+          </a:fillRef>
+          <a:effectRef idx="2">
+            <a:schemeClr val="accent1"/>
+          </a:effectRef>
+          <a:fontRef idx="minor">
+            <a:schemeClr val="lt1"/>
+          </a:fontRef>
+        </p:style>
+        <p:txBody>
+          <a:bodyPr rtlCol="0" anchor="ctr" wrap="none"/>
+          <a:lstStyle/>
+          <a:p>
+            <a:pPr algn="ctr"/>
+            <a:r>
+              <a:rPr sz="1800" b="1">
+                <a:solidFill>
+                  <a:srgbClr val="0B1220"/>
+                </a:solidFill>
+                <a:latin typeface="Courier New"/>
+              </a:rPr>
+              <a:t>1</a:t>
+            </a:r>
+          </a:p>
+        </p:txBody>
+      </p:sp>
+      <p:sp>
+        <p:nvSpPr>
+          <p:cNvPr id="5" name="TextBox 4"/>
+          <p:cNvSpPr txBox="1"/>
+          <p:nvPr/>
+        </p:nvSpPr>
+        <p:spPr>
+          <a:xfrm>
+            <a:off x="1280160" y="1783080"/>
+            <a:ext cx="6126480" cy="1005840"/>
+          </a:xfrm>
+          <a:prstGeom prst="rect">
+            <a:avLst/>
+          </a:prstGeom>
+          <a:noFill/>
+        </p:spPr>
+        <p:txBody>
+          <a:bodyPr wrap="square" anchor="t" lIns="0" rIns="0" tIns="0" bIns="0">
+            <a:spAutoFit/>
+          </a:bodyPr>
+          <a:lstStyle/>
+          <a:p>
+            <a:pPr algn="l">
+              <a:lnSpc>
+                <a:spcPct val="108000"/>
+              </a:lnSpc>
+              <a:spcAft>
+                <a:spcPts val="200"/>
+              </a:spcAft>
+            </a:pPr>
+            <a:r>
+              <a:rPr sz="1700" b="1" i="0">
+                <a:solidFill>
+                  <a:srgbClr val="EAF0F8"/>
+                </a:solidFill>
+                <a:latin typeface="Arial"/>
+              </a:rPr>
+              <a:t>At the deadline: buy targeted</a:t>
+            </a:r>
+          </a:p>
+          <a:p>
+            <a:pPr algn="l">
+              <a:lnSpc>
+                <a:spcPct val="108000"/>
+              </a:lnSpc>
+              <a:spcAft>
+                <a:spcPts val="200"/>
+              </a:spcAft>
+            </a:pPr>
+            <a:r>
+              <a:rPr sz="1350" b="0" i="0">
+                <a:solidFill>
+                  <a:srgbClr val="93A0B6"/>
+                </a:solidFill>
+                <a:latin typeface="Arial"/>
+              </a:rPr>
+              <a:t>A controllable infield bat and a reliever, funded from the pitching surplus. Keep the vets — they're playoff innings now.</a:t>
+            </a:r>
+          </a:p>
+        </p:txBody>
+      </p:sp>
+      <p:sp>
+        <p:nvSpPr>
+          <p:cNvPr id="6" name="Rounded Rectangle 5"/>
+          <p:cNvSpPr/>
+          <p:nvPr/>
+        </p:nvSpPr>
+        <p:spPr>
+          <a:xfrm>
+            <a:off x="640080" y="2971800"/>
+            <a:ext cx="457200" cy="457200"/>
+          </a:xfrm>
+          <a:prstGeom prst="roundRect">
+            <a:avLst>
+              <a:gd name="adj" fmla="val 18000"/>
+            </a:avLst>
+          </a:prstGeom>
+          <a:solidFill>
+            <a:srgbClr val="E8615A"/>
+          </a:solidFill>
+          <a:ln>
+            <a:noFill/>
+          </a:ln>
+          <a:effectLst/>
+        </p:spPr>
+        <p:style>
+          <a:lnRef idx="1">
+            <a:schemeClr val="accent1"/>
+          </a:lnRef>
+          <a:fillRef idx="3">
+            <a:schemeClr val="accent1"/>
+          </a:fillRef>
+          <a:effectRef idx="2">
+            <a:schemeClr val="accent1"/>
+          </a:effectRef>
+          <a:fontRef idx="minor">
+            <a:schemeClr val="lt1"/>
+          </a:fontRef>
+        </p:style>
+        <p:txBody>
+          <a:bodyPr rtlCol="0" anchor="ctr" wrap="none"/>
+          <a:lstStyle/>
+          <a:p>
+            <a:pPr algn="ctr"/>
+            <a:r>
+              <a:rPr sz="1800" b="1">
+                <a:solidFill>
+                  <a:srgbClr val="0B1220"/>
+                </a:solidFill>
+                <a:latin typeface="Courier New"/>
+              </a:rPr>
+              <a:t>2</a:t>
+            </a:r>
+          </a:p>
+        </p:txBody>
+      </p:sp>
+      <p:sp>
+        <p:nvSpPr>
+          <p:cNvPr id="7" name="TextBox 6"/>
+          <p:cNvSpPr txBox="1"/>
+          <p:nvPr/>
+        </p:nvSpPr>
+        <p:spPr>
+          <a:xfrm>
+            <a:off x="1280160" y="2953512"/>
+            <a:ext cx="6126480" cy="1005840"/>
+          </a:xfrm>
+          <a:prstGeom prst="rect">
+            <a:avLst/>
+          </a:prstGeom>
+          <a:noFill/>
+        </p:spPr>
+        <p:txBody>
+          <a:bodyPr wrap="square" anchor="t" lIns="0" rIns="0" tIns="0" bIns="0">
+            <a:spAutoFit/>
+          </a:bodyPr>
+          <a:lstStyle/>
+          <a:p>
+            <a:pPr algn="l">
+              <a:lnSpc>
+                <a:spcPct val="108000"/>
+              </a:lnSpc>
+              <a:spcAft>
+                <a:spcPts val="200"/>
+              </a:spcAft>
+            </a:pPr>
+            <a:r>
+              <a:rPr sz="1700" b="1" i="0">
+                <a:solidFill>
+                  <a:srgbClr val="EAF0F8"/>
+                </a:solidFill>
+                <a:latin typeface="Arial"/>
+              </a:rPr>
+              <a:t>Hold Duran through August</a:t>
+            </a:r>
+          </a:p>
+          <a:p>
+            <a:pPr algn="l">
+              <a:lnSpc>
+                <a:spcPct val="108000"/>
+              </a:lnSpc>
+              <a:spcAft>
+                <a:spcPts val="200"/>
+              </a:spcAft>
+            </a:pPr>
+            <a:r>
+              <a:rPr sz="1350" b="0" i="0">
+                <a:solidFill>
+                  <a:srgbClr val="93A0B6"/>
+                </a:solidFill>
+                <a:latin typeface="Arial"/>
+              </a:rPr>
+              <a:t>His value is at its nadir and his July contact quality (~.35 xwOBA) is already surging. Selling now cashes the slump.</a:t>
+            </a:r>
+          </a:p>
+        </p:txBody>
+      </p:sp>
+      <p:sp>
+        <p:nvSpPr>
+          <p:cNvPr id="8" name="Rounded Rectangle 7"/>
+          <p:cNvSpPr/>
+          <p:nvPr/>
+        </p:nvSpPr>
+        <p:spPr>
+          <a:xfrm>
+            <a:off x="640080" y="4142231"/>
+            <a:ext cx="457200" cy="457200"/>
+          </a:xfrm>
+          <a:prstGeom prst="roundRect">
+            <a:avLst>
+              <a:gd name="adj" fmla="val 18000"/>
+            </a:avLst>
+          </a:prstGeom>
+          <a:solidFill>
+            <a:srgbClr val="E8615A"/>
+          </a:solidFill>
+          <a:ln>
+            <a:noFill/>
+          </a:ln>
+          <a:effectLst/>
+        </p:spPr>
+        <p:style>
+          <a:lnRef idx="1">
+            <a:schemeClr val="accent1"/>
+          </a:lnRef>
+          <a:fillRef idx="3">
+            <a:schemeClr val="accent1"/>
+          </a:fillRef>
+          <a:effectRef idx="2">
+            <a:schemeClr val="accent1"/>
+          </a:effectRef>
+          <a:fontRef idx="minor">
+            <a:schemeClr val="lt1"/>
+          </a:fontRef>
+        </p:style>
+        <p:txBody>
+          <a:bodyPr rtlCol="0" anchor="ctr" wrap="none"/>
+          <a:lstStyle/>
+          <a:p>
+            <a:pPr algn="ctr"/>
+            <a:r>
+              <a:rPr sz="1800" b="1">
+                <a:solidFill>
+                  <a:srgbClr val="0B1220"/>
+                </a:solidFill>
+                <a:latin typeface="Courier New"/>
+              </a:rPr>
+              <a:t>3</a:t>
+            </a:r>
+          </a:p>
+        </p:txBody>
+      </p:sp>
+      <p:sp>
+        <p:nvSpPr>
+          <p:cNvPr id="9" name="TextBox 8"/>
+          <p:cNvSpPr txBox="1"/>
+          <p:nvPr/>
+        </p:nvSpPr>
+        <p:spPr>
+          <a:xfrm>
+            <a:off x="1280160" y="4123944"/>
+            <a:ext cx="6126480" cy="1005840"/>
+          </a:xfrm>
+          <a:prstGeom prst="rect">
+            <a:avLst/>
+          </a:prstGeom>
+          <a:noFill/>
+        </p:spPr>
+        <p:txBody>
+          <a:bodyPr wrap="square" anchor="t" lIns="0" rIns="0" tIns="0" bIns="0">
+            <a:spAutoFit/>
+          </a:bodyPr>
+          <a:lstStyle/>
+          <a:p>
+            <a:pPr algn="l">
+              <a:lnSpc>
+                <a:spcPct val="108000"/>
+              </a:lnSpc>
+              <a:spcAft>
+                <a:spcPts val="200"/>
+              </a:spcAft>
+            </a:pPr>
+            <a:r>
+              <a:rPr sz="1700" b="1" i="0">
+                <a:solidFill>
+                  <a:srgbClr val="EAF0F8"/>
+                </a:solidFill>
+                <a:latin typeface="Arial"/>
+              </a:rPr>
+              <a:t>Winter: re-price, then choose</a:t>
+            </a:r>
+          </a:p>
+          <a:p>
+            <a:pPr algn="l">
+              <a:lnSpc>
+                <a:spcPct val="108000"/>
+              </a:lnSpc>
+              <a:spcAft>
+                <a:spcPts val="200"/>
+              </a:spcAft>
+            </a:pPr>
+            <a:r>
+              <a:rPr sz="1350" b="0" i="0">
+                <a:solidFill>
+                  <a:srgbClr val="93A0B6"/>
+                </a:solidFill>
+                <a:latin typeface="Arial"/>
+              </a:rPr>
+              <a:t>Anthony healthy, jam returns. Rebound confirmed → extend or trade at full price. Erosion persists → sell at market. Either way, the 2027 OF is Anthony / Rafaela / Abreu.</a:t>
+            </a:r>
+          </a:p>
+        </p:txBody>
+      </p:sp>
+      <p:sp>
+        <p:nvSpPr>
+          <p:cNvPr id="10" name="Rounded Rectangle 9"/>
+          <p:cNvSpPr/>
+          <p:nvPr/>
+        </p:nvSpPr>
+        <p:spPr>
+          <a:xfrm>
+            <a:off x="7818120" y="1783080"/>
+            <a:ext cx="3794760" cy="3337560"/>
+          </a:xfrm>
+          <a:prstGeom prst="roundRect">
+            <a:avLst>
+              <a:gd name="adj" fmla="val 6000"/>
+            </a:avLst>
+          </a:prstGeom>
+          <a:solidFill>
+            <a:srgbClr val="1A2740"/>
+          </a:solidFill>
+          <a:ln>
+            <a:noFill/>
+          </a:ln>
+          <a:effectLst/>
+        </p:spPr>
+        <p:style>
+          <a:lnRef idx="1">
+            <a:schemeClr val="accent1"/>
+          </a:lnRef>
+          <a:fillRef idx="3">
+            <a:schemeClr val="accent1"/>
+          </a:fillRef>
+          <a:effectRef idx="2">
+            <a:schemeClr val="accent1"/>
+          </a:effectRef>
+          <a:fontRef idx="minor">
+            <a:schemeClr val="lt1"/>
+          </a:fontRef>
+        </p:style>
+        <p:txBody>
+          <a:bodyPr rtlCol="0" anchor="ctr"/>
+          <a:lstStyle/>
+          <a:p>
+            <a:pPr algn="ctr"/>
+          </a:p>
+        </p:txBody>
+      </p:sp>
+      <p:sp>
+        <p:nvSpPr>
+          <p:cNvPr id="11" name="TextBox 10"/>
+          <p:cNvSpPr txBox="1"/>
+          <p:nvPr/>
+        </p:nvSpPr>
+        <p:spPr>
+          <a:xfrm>
+            <a:off x="8092440" y="2011680"/>
+            <a:ext cx="3291840" cy="365760"/>
+          </a:xfrm>
+          <a:prstGeom prst="rect">
+            <a:avLst/>
+          </a:prstGeom>
+          <a:noFill/>
+        </p:spPr>
+        <p:txBody>
+          <a:bodyPr wrap="square" anchor="t" lIns="0" rIns="0" tIns="0" bIns="0">
+            <a:spAutoFit/>
+          </a:bodyPr>
+          <a:lstStyle/>
+          <a:p>
+            <a:pPr algn="l">
+              <a:lnSpc>
+                <a:spcPct val="100000"/>
+              </a:lnSpc>
+              <a:spcAft>
+                <a:spcPts val="0"/>
+              </a:spcAft>
+            </a:pPr>
+            <a:r>
+              <a:rPr sz="1250" b="1" i="0">
+                <a:solidFill>
+                  <a:srgbClr val="C9D2E3"/>
+                </a:solidFill>
+                <a:latin typeface="Arial"/>
+              </a:rPr>
+              <a:t>THE RETURN</a:t>
+            </a:r>
+          </a:p>
+        </p:txBody>
+      </p:sp>
+      <p:sp>
+        <p:nvSpPr>
+          <p:cNvPr id="12" name="TextBox 11"/>
+          <p:cNvSpPr txBox="1"/>
+          <p:nvPr/>
+        </p:nvSpPr>
+        <p:spPr>
+          <a:xfrm>
+            <a:off x="8092440" y="2487168"/>
+            <a:ext cx="3291840" cy="914400"/>
+          </a:xfrm>
+          <a:prstGeom prst="rect">
+            <a:avLst/>
+          </a:prstGeom>
+          <a:noFill/>
+        </p:spPr>
+        <p:txBody>
+          <a:bodyPr wrap="square" anchor="t" lIns="0" rIns="0" tIns="0" bIns="0">
+            <a:spAutoFit/>
+          </a:bodyPr>
+          <a:lstStyle/>
+          <a:p>
+            <a:pPr algn="l">
+              <a:lnSpc>
+                <a:spcPct val="105000"/>
+              </a:lnSpc>
+              <a:spcAft>
+                <a:spcPts val="200"/>
+              </a:spcAft>
+            </a:pPr>
+            <a:r>
+              <a:rPr sz="1300" b="1" i="0">
+                <a:solidFill>
+                  <a:srgbClr val="F0B8BC"/>
+                </a:solidFill>
+                <a:latin typeface="Arial"/>
+              </a:rPr>
+              <a:t>Sell now (nadir)</a:t>
+            </a:r>
+          </a:p>
+          <a:p>
+            <a:pPr algn="l">
+              <a:lnSpc>
+                <a:spcPct val="105000"/>
+              </a:lnSpc>
+              <a:spcAft>
+                <a:spcPts val="200"/>
+              </a:spcAft>
+            </a:pPr>
+            <a:r>
+              <a:rPr sz="1400" b="0" i="0">
+                <a:solidFill>
+                  <a:srgbClr val="F4F7FC"/>
+                </a:solidFill>
+                <a:latin typeface="Arial"/>
+              </a:rPr>
+              <a:t>~$10–15M · a 45-FV bat</a:t>
+            </a:r>
+          </a:p>
+        </p:txBody>
+      </p:sp>
+      <p:sp>
+        <p:nvSpPr>
+          <p:cNvPr id="13" name="TextBox 12"/>
+          <p:cNvSpPr txBox="1"/>
+          <p:nvPr/>
+        </p:nvSpPr>
+        <p:spPr>
+          <a:xfrm>
+            <a:off x="8092440" y="3520440"/>
+            <a:ext cx="3291840" cy="1005840"/>
+          </a:xfrm>
+          <a:prstGeom prst="rect">
+            <a:avLst/>
+          </a:prstGeom>
+          <a:noFill/>
+        </p:spPr>
+        <p:txBody>
+          <a:bodyPr wrap="square" anchor="t" lIns="0" rIns="0" tIns="0" bIns="0">
+            <a:spAutoFit/>
+          </a:bodyPr>
+          <a:lstStyle/>
+          <a:p>
+            <a:pPr algn="l">
+              <a:lnSpc>
+                <a:spcPct val="105000"/>
+              </a:lnSpc>
+              <a:spcAft>
+                <a:spcPts val="200"/>
+              </a:spcAft>
+            </a:pPr>
+            <a:r>
+              <a:rPr sz="1300" b="1" i="0">
+                <a:solidFill>
+                  <a:srgbClr val="A9E5B5"/>
+                </a:solidFill>
+                <a:latin typeface="Arial"/>
+              </a:rPr>
+              <a:t>Sell after rebound</a:t>
+            </a:r>
+          </a:p>
+          <a:p>
+            <a:pPr algn="l">
+              <a:lnSpc>
+                <a:spcPct val="105000"/>
+              </a:lnSpc>
+              <a:spcAft>
+                <a:spcPts val="200"/>
+              </a:spcAft>
+            </a:pPr>
+            <a:r>
+              <a:rPr sz="1400" b="0" i="0">
+                <a:solidFill>
+                  <a:srgbClr val="F4F7FC"/>
+                </a:solidFill>
+                <a:latin typeface="Arial"/>
+              </a:rPr>
+              <a:t>~$28M · a 50-FV, top-100</a:t>
+            </a:r>
+          </a:p>
+          <a:p>
+            <a:pPr algn="l">
+              <a:lnSpc>
+                <a:spcPct val="105000"/>
+              </a:lnSpc>
+              <a:spcAft>
+                <a:spcPts val="200"/>
+              </a:spcAft>
+            </a:pPr>
+            <a:r>
+              <a:rPr sz="1400" b="0" i="0">
+                <a:solidFill>
+                  <a:srgbClr val="F4F7FC"/>
+                </a:solidFill>
+                <a:latin typeface="Arial"/>
+              </a:rPr>
+              <a:t>controllable talent</a:t>
+            </a:r>
+          </a:p>
+        </p:txBody>
+      </p:sp>
+      <p:sp>
+        <p:nvSpPr>
+          <p:cNvPr id="14" name="TextBox 13"/>
+          <p:cNvSpPr txBox="1"/>
+          <p:nvPr/>
+        </p:nvSpPr>
+        <p:spPr>
+          <a:xfrm>
+            <a:off x="8092440" y="4617720"/>
+            <a:ext cx="3291840" cy="457200"/>
+          </a:xfrm>
+          <a:prstGeom prst="rect">
+            <a:avLst/>
+          </a:prstGeom>
+          <a:noFill/>
+        </p:spPr>
+        <p:txBody>
+          <a:bodyPr wrap="square" anchor="t" lIns="0" rIns="0" tIns="0" bIns="0">
+            <a:spAutoFit/>
+          </a:bodyPr>
+          <a:lstStyle/>
+          <a:p>
+            <a:pPr algn="l">
+              <a:lnSpc>
+                <a:spcPct val="105000"/>
+              </a:lnSpc>
+              <a:spcAft>
+                <a:spcPts val="400"/>
+              </a:spcAft>
+            </a:pPr>
+            <a:r>
+              <a:rPr sz="1150" b="0" i="1">
+                <a:solidFill>
+                  <a:srgbClr val="C9D2E3"/>
+                </a:solidFill>
+                <a:latin typeface="Arial"/>
+              </a:rPr>
+              <a:t>One grade of return = the reason to wait.</a:t>
+            </a:r>
+          </a:p>
+        </p:txBody>
+      </p:sp>
+      <p:sp>
+        <p:nvSpPr>
+          <p:cNvPr id="15" name="TextBox 14"/>
+          <p:cNvSpPr txBox="1"/>
+          <p:nvPr/>
+        </p:nvSpPr>
+        <p:spPr>
+          <a:xfrm>
+            <a:off x="566928" y="6510528"/>
+            <a:ext cx="11064240" cy="274320"/>
+          </a:xfrm>
+          <a:prstGeom prst="rect">
+            <a:avLst/>
+          </a:prstGeom>
+          <a:noFill/>
+        </p:spPr>
+        <p:txBody>
+          <a:bodyPr wrap="square" anchor="t" lIns="0" rIns="0" tIns="0" bIns="0">
+            <a:spAutoFit/>
+          </a:bodyPr>
+          <a:lstStyle/>
+          <a:p>
+            <a:pPr algn="l">
+              <a:lnSpc>
+                <a:spcPct val="100000"/>
+              </a:lnSpc>
+              <a:spcAft>
+                <a:spcPts val="0"/>
+              </a:spcAft>
+            </a:pPr>
+            <a:r>
+              <a:rPr sz="800" b="1" i="0">
+                <a:solidFill>
+                  <a:srgbClr val="E8615A"/>
+                </a:solidFill>
+                <a:latin typeface="Courier New"/>
+              </a:rPr>
+              <a:t>BOS // OUTFIELD STRATEGY</a:t>
+            </a:r>
+            <a:r>
+              <a:rPr sz="800" b="0" i="0">
+                <a:solidFill>
+                  <a:srgbClr val="5E6B84"/>
+                </a:solidFill>
+                <a:latin typeface="Courier New"/>
+              </a:rPr>
+              <a:t>   STATCAST / FANGRAPHS / MLB STATS API / SPOTRAC · JULY 2026</a:t>
+            </a:r>
+          </a:p>
+        </p:txBody>
+      </p:sp>
+    </p:spTree>
+  </p:cSld>
+  <p:clrMapOvr>
+    <a:masterClrMapping/>
+  </p:clrMapOvr>
+</p:sld>
+</file>
+
+<file path=ppt/slides/slide18.xml><?xml version="1.0" encoding="utf-8"?>
 <p:sld xmlns:a="http://schemas.openxmlformats.org/drawingml/2006/main" xmlns:p="http://schemas.openxmlformats.org/presentationml/2006/main" xmlns:r="http://schemas.openxmlformats.org/officeDocument/2006/relationships">
   <p:cSld>
     <p:bg>
@@ -8568,7 +9182,7 @@
                 </a:solidFill>
                 <a:latin typeface="Arial"/>
               </a:rPr>
-              <a:t>77% playoff odds, +46 run differential, a wild card in hand — buy small (a reliever first), keep the vets, and let the record keep catching up to the process.</a:t>
+              <a:t>77% playoff odds, +45 run differential, a wild card in hand — buy small (a reliever first), keep the vets, and let the record keep catching up to the process.</a:t>
             </a:r>
           </a:p>
         </p:txBody>
@@ -9013,7 +9627,7 @@
                 </a:solidFill>
                 <a:latin typeface="Arial"/>
               </a:rPr>
-              <a:t>W14</a:t>
+              <a:t>W13</a:t>
             </a:r>
           </a:p>
         </p:txBody>
@@ -9187,7 +9801,7 @@
                 </a:solidFill>
                 <a:latin typeface="Arial"/>
               </a:rPr>
-              <a:t>+46</a:t>
+              <a:t>+45</a:t>
             </a:r>
           </a:p>
         </p:txBody>

--- a/outputs/Red_Sox_Outfield_Strategy.pptx
+++ b/outputs/Red_Sox_Outfield_Strategy.pptx
@@ -3299,7 +3299,7 @@
                 </a:solidFill>
                 <a:latin typeface="Arial"/>
               </a:rPr>
-              <a:t>The hottest team in baseball was supposed to sell. A lookahead to trade deadline thoughts.</a:t>
+              <a:t>The hottest team in baseball was supposed to sell. A lookahead to the trade deadline, now 11 days away.</a:t>
             </a:r>
           </a:p>
         </p:txBody>
@@ -3409,7 +3409,7 @@
                 </a:solidFill>
                 <a:latin typeface="Courier New"/>
               </a:rPr>
-              <a:t>// IF THEY BUY — WHERE?</a:t>
+              <a:t>// IF THEY BUY, WHERE?</a:t>
             </a:r>
           </a:p>
         </p:txBody>
@@ -3582,7 +3582,7 @@
                 </a:solidFill>
                 <a:latin typeface="Arial"/>
               </a:rPr>
-              <a:t>Duran's regression — now sheltered by a Jahmai Jones platoon — plus Anthony's eventual return. Free.</a:t>
+              <a:t>Duran's regression, now sheltered by a Jahmai Jones platoon, plus Anthony's eventual return. Free.</a:t>
             </a:r>
           </a:p>
         </p:txBody>
@@ -3796,7 +3796,7 @@
                 </a:solidFill>
                 <a:latin typeface="Arial"/>
               </a:rPr>
-              <a:t>ERA top-10 but FIP and reliever WAR rank far worse — it will regress without help.</a:t>
+              <a:t>ERA top-10 but FIP and reliever WAR rank far worse, it will regress without help.</a:t>
             </a:r>
           </a:p>
         </p:txBody>
@@ -4195,7 +4195,7 @@
                 </a:solidFill>
                 <a:latin typeface="Arial"/>
               </a:rPr>
-              <a:t>Waiver claims, up-down arms and career minor-leaguers holding real roles — +3.0 WAR combined.</a:t>
+              <a:t>Waiver claims, up-down arms and career minor-leaguers holding real roles, +3.0 WAR combined.</a:t>
             </a:r>
           </a:p>
         </p:txBody>
@@ -4409,7 +4409,7 @@
                 </a:solidFill>
                 <a:latin typeface="Arial"/>
               </a:rPr>
-              <a:t>Results sit within a few points of expected — they're earning it. The risk is track record: careers, not heaters, predict August.</a:t>
+              <a:t>Results sit within a few points of expected, they're earning it. The risk is track record: careers, not heaters, predict August.</a:t>
             </a:r>
           </a:p>
         </p:txBody>
@@ -4808,7 +4808,7 @@
                 </a:solidFill>
                 <a:latin typeface="Arial"/>
               </a:rPr>
-              <a:t>3.42 RA9 with Wong, 4.20 with Narváez — the run-prevention core of the streak.</a:t>
+              <a:t>3.42 RA9 with Wong, 4.20 with Narváez, the run-prevention core of the streak.</a:t>
             </a:r>
           </a:p>
         </p:txBody>
@@ -4915,7 +4915,7 @@
                 </a:solidFill>
                 <a:latin typeface="Arial"/>
               </a:rPr>
-              <a:t>Raw pairings look dramatic (fig. 14) — but small samples shrink hard (fig. 15). What survives: settled, deliberate assignments.</a:t>
+              <a:t>Raw pairings look dramatic (fig. 14), but small samples shrink hard (fig. 15). What survives: settled, deliberate assignments.</a:t>
             </a:r>
           </a:p>
         </p:txBody>
@@ -5022,7 +5022,7 @@
                 </a:solidFill>
                 <a:latin typeface="Arial"/>
               </a:rPr>
-              <a:t>Leverage relievers ride with a settled catcher — these innings aren't assigned at random.</a:t>
+              <a:t>Leverage relievers ride with a settled catcher, these innings aren't assigned at random.</a:t>
             </a:r>
           </a:p>
         </p:txBody>
@@ -5528,7 +5528,7 @@
                 </a:solidFill>
                 <a:latin typeface="Arial"/>
               </a:rPr>
-              <a:t>Speed-blind xstats under-predict the fastest decile by +20 pts of BABIP. Duran's speed term: +23 pts of wOBA on contact — inside the +5–14 band derived independently.</a:t>
+              <a:t>Speed-blind xstats under-predict the fastest decile by +20 pts of BABIP. Duran's speed term: +23 pts of wOBA on contact, inside the +5–14 band derived independently.</a:t>
             </a:r>
           </a:p>
         </p:txBody>
@@ -5742,7 +5742,7 @@
                 </a:solidFill>
                 <a:latin typeface="Arial"/>
               </a:rPr>
-              <a:t>Out-of-sample everywhere, CIs on every headline, and frozen pre-registered predictions graded in October — flattering or not.</a:t>
+              <a:t>Out-of-sample everywhere, CIs on every headline, and frozen pre-registered predictions graded in October, flattering or not.</a:t>
             </a:r>
           </a:p>
         </p:txBody>
@@ -6077,7 +6077,7 @@
                 </a:solidFill>
                 <a:latin typeface="Arial"/>
               </a:rPr>
-              <a:t>For a 45 FV + 40 FV — prospects only, nobody loses a job or an inning. Elite relief year, signed through '27. The highest-probability marginal win on the board.</a:t>
+              <a:t>For a 45 FV + 40 FV, prospects only, nobody loses a job or an inning. Elite relief year, signed through '27. The highest-probability marginal win on the board.</a:t>
             </a:r>
           </a:p>
         </p:txBody>
@@ -6251,7 +6251,7 @@
                 </a:solidFill>
                 <a:latin typeface="Arial"/>
               </a:rPr>
-              <a:t>For Brayan Bello — the first deal that touches the active roster. Zero prospect cost; Arraez fills a patchwork platoon spot, not a hot regular's.</a:t>
+              <a:t>For Brayan Bello, the first deal that touches the active roster. Zero prospect cost; Arraez fills a patchwork platoon spot, not a hot regular's.</a:t>
             </a:r>
           </a:p>
         </p:txBody>
@@ -6425,7 +6425,7 @@
                 </a:solidFill>
                 <a:latin typeface="Arial"/>
               </a:rPr>
-              <a:t>For Tolle + Early + a 45 FV: two arms out of a winning rotation mid-streak. Franchise-window correct — and still there in the winter. Controlled through 2029.</a:t>
+              <a:t>For Tolle + Early + a 45 FV: two arms out of a winning rotation mid-streak. Franchise-window correct, and still there in the winter. Controlled through 2029.</a:t>
             </a:r>
           </a:p>
         </p:txBody>
@@ -6641,7 +6641,7 @@
                 </a:solidFill>
                 <a:latin typeface="Arial"/>
               </a:rPr>
-              <a:t>A menu, not a plan — Boston can afford about two. </a:t>
+              <a:t>A menu, not a plan, Boston can afford about two. </a:t>
             </a:r>
             <a:r>
               <a:rPr sz="1250" b="0" i="0">
@@ -6853,7 +6853,7 @@
                 </a:solidFill>
                 <a:latin typeface="Arial"/>
               </a:rPr>
-              <a:t>If winter comes and Duran's rebound has shown up, this is what a deal should return. With a top-6 rotation (3.65 ERA) carrying the club, trading bats for arms is backwards — convert the outfield surplus into what's thin:</a:t>
+              <a:t>If winter comes and Duran's rebound has shown up, this is what a deal should return. With a top-6 rotation (3.65 ERA) carrying the club, trading bats for arms is backwards, convert the outfield surplus into what's thin:</a:t>
             </a:r>
           </a:p>
         </p:txBody>
@@ -7227,7 +7227,7 @@
                 </a:solidFill>
                 <a:latin typeface="Arial"/>
               </a:rPr>
-              <a:t>In a retool you take the best player, not the positional patch — prospects and MLB-ready youth over rentals.</a:t>
+              <a:t>In a retool you take the best player, not the positional patch, prospects and MLB-ready youth over rentals.</a:t>
             </a:r>
           </a:p>
         </p:txBody>
@@ -8122,7 +8122,7 @@
                 </a:solidFill>
                 <a:latin typeface="Arial"/>
               </a:rPr>
-              <a:t>Trade a redundant bat to a team that needs one — and take back the </a:t>
+              <a:t>Trade a redundant bat to a team that needs one, and take back the </a:t>
             </a:r>
             <a:r>
               <a:rPr sz="1250" b="1" i="0">
@@ -8417,7 +8417,7 @@
                 </a:solidFill>
                 <a:latin typeface="Arial"/>
               </a:rPr>
-              <a:t>A controllable infield bat and a reliever, funded from the pitching surplus. Keep the vets — they're playoff innings now.</a:t>
+              <a:t>A controllable infield bat and a reliever, funded from the pitching surplus. Keep the vets, they're playoff innings now.</a:t>
             </a:r>
           </a:p>
         </p:txBody>
@@ -9182,7 +9182,7 @@
                 </a:solidFill>
                 <a:latin typeface="Arial"/>
               </a:rPr>
-              <a:t>77% playoff odds, +45 run differential, a wild card in hand — buy small (a reliever first), keep the vets, and let the record keep catching up to the process.</a:t>
+              <a:t>77% playoff odds, +45 run differential, a wild card in hand, buy small (a reliever first), keep the vets, and let the record keep catching up to the process.</a:t>
             </a:r>
           </a:p>
         </p:txBody>
@@ -9279,7 +9279,7 @@
                 </a:solidFill>
                 <a:latin typeface="Arial"/>
               </a:rPr>
-              <a:t>Hold Duran through the deadline; re-price him in winter — extend or trade the 2025 player, never the unlucky 2026 one.</a:t>
+              <a:t>Hold Duran through the deadline; re-price him in winter, extend or trade the 2025 player, never the unlucky 2026 one.</a:t>
             </a:r>
           </a:p>
         </p:txBody>
@@ -9427,7 +9427,7 @@
                 </a:solidFill>
                 <a:latin typeface="Arial"/>
               </a:rPr>
-              <a:t>high that 2024 shouldn't be the anchor and pitching is a strength; the open question is how much of 2026's skill dip (chase, whiff, hard-hit are all worse) persists — the one thing to watch before selling.</a:t>
+              <a:t>high that 2024 shouldn't be the anchor and pitching is a strength; the open question is how much of 2026's skill dip (chase, whiff, hard-hit are all worse) persists, the one thing to watch before selling.</a:t>
             </a:r>
           </a:p>
         </p:txBody>
@@ -10634,7 +10634,7 @@
                 </a:solidFill>
                 <a:latin typeface="Arial"/>
               </a:rPr>
-              <a:t>A reliever first, maybe an infield bat — prospects before big-leaguers, empty spots before hot ones. The catcher tandem stays.</a:t>
+              <a:t>A reliever first, maybe an infield bat, prospects before big-leaguers, empty spots before hot ones. The catcher tandem stays.</a:t>
             </a:r>
           </a:p>
         </p:txBody>
@@ -12991,7 +12991,7 @@
                 </a:solidFill>
                 <a:latin typeface="Arial"/>
               </a:rPr>
-              <a:t>wOBA .263 BELOW its .293 xwOBA — 34 to 43 pts under his own norm; BABIP .238 vs .309 expected. Erosion real, luck worse.</a:t>
+              <a:t>wOBA .263 BELOW its .293 xwOBA, 34 to 43 pts under his own norm; BABIP .238 vs .309 expected. Erosion real, luck worse.</a:t>
             </a:r>
           </a:p>
         </p:txBody>
@@ -13725,7 +13725,7 @@
                 </a:solidFill>
                 <a:latin typeface="Arial"/>
               </a:rPr>
-              <a:t>the 22-point probability gap is the price of the worse chase / whiff / hard-hit rates. Hold-through-2026 survives the erosion stress test — but with less confidence in the rebound narrative itself.</a:t>
+              <a:t>the 22-point probability gap is the price of the worse chase / whiff / hard-hit rates. Hold-through-2026 survives the erosion stress test, but with less confidence in the rebound narrative itself.</a:t>
             </a:r>
           </a:p>
         </p:txBody>
@@ -14009,7 +14009,7 @@
                 </a:solidFill>
                 <a:latin typeface="Arial"/>
               </a:rPr>
-              <a:t>  avg bat speed, 2026 — UP from 72.7 in '24</a:t>
+              <a:t>  avg bat speed 2026, up from 72.7 in '24</a:t>
             </a:r>
           </a:p>
         </p:txBody>

--- a/outputs/Red_Sox_Outfield_Strategy.pptx
+++ b/outputs/Red_Sox_Outfield_Strategy.pptx
@@ -23,6 +23,7 @@
     <p:sldId id="271" r:id="rId22"/>
     <p:sldId id="272" r:id="rId23"/>
     <p:sldId id="273" r:id="rId24"/>
+    <p:sldId id="274" r:id="rId25"/>
   </p:sldIdLst>
   <p:sldSz cx="12191695" cy="6858000" type="screen4x3"/>
   <p:notesSz cx="6858000" cy="9144000"/>
@@ -3299,7 +3300,7 @@
                 </a:solidFill>
                 <a:latin typeface="Arial"/>
               </a:rPr>
-              <a:t>The hottest team in baseball was supposed to sell. A lookahead to the trade deadline, now 11 days away.</a:t>
+              <a:t>The hottest team in baseball was supposed to sell. A lookahead to the trade deadline, now 8 days away.</a:t>
             </a:r>
           </a:p>
         </p:txBody>
@@ -4195,7 +4196,7 @@
                 </a:solidFill>
                 <a:latin typeface="Arial"/>
               </a:rPr>
-              <a:t>Waiver claims, up-down arms and career minor-leaguers holding real roles, +3.0 WAR combined.</a:t>
+              <a:t>Waiver claims, up-down arms and career minor-leaguers holding real roles, +3.4 WAR combined.</a:t>
             </a:r>
           </a:p>
         </p:txBody>
@@ -6769,7 +6770,7 @@
                 </a:solidFill>
                 <a:latin typeface="Courier New"/>
               </a:rPr>
-              <a:t>// THE WINTER PLAN</a:t>
+              <a:t>// THE REAL TRADE</a:t>
             </a:r>
           </a:p>
         </p:txBody>
@@ -6811,53 +6812,35 @@
                 </a:solidFill>
                 <a:latin typeface="Arial"/>
               </a:rPr>
-              <a:t>Spend the pitching surplus on offense</a:t>
-            </a:r>
-          </a:p>
-        </p:txBody>
-      </p:sp>
-      <p:sp>
-        <p:nvSpPr>
-          <p:cNvPr id="4" name="TextBox 3"/>
-          <p:cNvSpPr txBox="1"/>
-          <p:nvPr/>
-        </p:nvSpPr>
-        <p:spPr>
-          <a:xfrm>
-            <a:off x="566928" y="1572768"/>
-            <a:ext cx="11064240" cy="640080"/>
-          </a:xfrm>
-          <a:prstGeom prst="rect">
-            <a:avLst/>
-          </a:prstGeom>
-          <a:noFill/>
-        </p:spPr>
-        <p:txBody>
-          <a:bodyPr wrap="square" anchor="t" lIns="0" rIns="0" tIns="0" bIns="0">
-            <a:spAutoFit/>
-          </a:bodyPr>
-          <a:lstStyle/>
-          <a:p>
-            <a:pPr algn="l">
-              <a:lnSpc>
-                <a:spcPct val="112000"/>
-              </a:lnSpc>
-              <a:spcAft>
-                <a:spcPts val="400"/>
-              </a:spcAft>
-            </a:pPr>
-            <a:r>
-              <a:rPr sz="1450" b="0" i="0">
-                <a:solidFill>
-                  <a:srgbClr val="D9E1EF"/>
-                </a:solidFill>
-                <a:latin typeface="Arial"/>
-              </a:rPr>
-              <a:t>If winter comes and Duran's rebound has shown up, this is what a deal should return. With a top-6 rotation (3.65 ERA) carrying the club, trading bats for arms is backwards, convert the outfield surplus into what's thin:</a:t>
-            </a:r>
-          </a:p>
-        </p:txBody>
-      </p:sp>
+              <a:t>They made one: Mead for Early</a:t>
+            </a:r>
+          </a:p>
+        </p:txBody>
+      </p:sp>
+      <p:pic>
+        <p:nvPicPr>
+          <p:cNvPr id="4" name="Picture 3" descr="18_mead_fit.png"/>
+          <p:cNvPicPr>
+            <a:picLocks noChangeAspect="1"/>
+          </p:cNvPicPr>
+          <p:nvPr/>
+        </p:nvPicPr>
+        <p:blipFill>
+          <a:blip r:embed="rId2"/>
+          <a:stretch>
+            <a:fillRect/>
+          </a:stretch>
+        </p:blipFill>
+        <p:spPr>
+          <a:xfrm>
+            <a:off x="383344" y="1554480"/>
+            <a:ext cx="7280030" cy="4206240"/>
+          </a:xfrm>
+          <a:prstGeom prst="rect">
+            <a:avLst/>
+          </a:prstGeom>
+        </p:spPr>
+      </p:pic>
       <p:sp>
         <p:nvSpPr>
           <p:cNvPr id="5" name="Rounded Rectangle 4"/>
@@ -6866,21 +6849,19 @@
         </p:nvSpPr>
         <p:spPr>
           <a:xfrm>
-            <a:off x="566928" y="2468880"/>
-            <a:ext cx="3502152" cy="2514600"/>
+            <a:off x="8001000" y="1773936"/>
+            <a:ext cx="146304" cy="146304"/>
           </a:xfrm>
           <a:prstGeom prst="roundRect">
             <a:avLst>
-              <a:gd name="adj" fmla="val 6000"/>
+              <a:gd name="adj" fmla="val 18000"/>
             </a:avLst>
           </a:prstGeom>
           <a:solidFill>
-            <a:srgbClr val="121E33"/>
+            <a:srgbClr val="E8615A"/>
           </a:solidFill>
-          <a:ln w="12700">
-            <a:solidFill>
-              <a:srgbClr val="26334E"/>
-            </a:solidFill>
+          <a:ln>
+            <a:noFill/>
           </a:ln>
           <a:effectLst/>
         </p:spPr>
@@ -6908,14 +6889,289 @@
       </p:sp>
       <p:sp>
         <p:nvSpPr>
-          <p:cNvPr id="6" name="Rounded Rectangle 5"/>
+          <p:cNvPr id="6" name="TextBox 5"/>
+          <p:cNvSpPr txBox="1"/>
+          <p:nvPr/>
+        </p:nvSpPr>
+        <p:spPr>
+          <a:xfrm>
+            <a:off x="8293608" y="1737360"/>
+            <a:ext cx="3749039" cy="1097280"/>
+          </a:xfrm>
+          <a:prstGeom prst="rect">
+            <a:avLst/>
+          </a:prstGeom>
+          <a:noFill/>
+        </p:spPr>
+        <p:txBody>
+          <a:bodyPr wrap="square" anchor="t" lIns="0" rIns="0" tIns="0" bIns="0">
+            <a:spAutoFit/>
+          </a:bodyPr>
+          <a:lstStyle/>
+          <a:p>
+            <a:pPr algn="l">
+              <a:lnSpc>
+                <a:spcPct val="107000"/>
+              </a:lnSpc>
+              <a:spcAft>
+                <a:spcPts val="200"/>
+              </a:spcAft>
+            </a:pPr>
+            <a:r>
+              <a:rPr sz="1350" b="1" i="0">
+                <a:solidFill>
+                  <a:srgbClr val="EAF0F8"/>
+                </a:solidFill>
+                <a:latin typeface="Arial"/>
+              </a:rPr>
+              <a:t>The deal</a:t>
+            </a:r>
+          </a:p>
+          <a:p>
+            <a:pPr algn="l">
+              <a:lnSpc>
+                <a:spcPct val="107000"/>
+              </a:lnSpc>
+              <a:spcAft>
+                <a:spcPts val="200"/>
+              </a:spcAft>
+            </a:pPr>
+            <a:r>
+              <a:rPr sz="1160" b="0" i="0">
+                <a:solidFill>
+                  <a:srgbClr val="93A0B6"/>
+                </a:solidFill>
+                <a:latin typeface="Arial"/>
+              </a:rPr>
+              <a:t>Curtis Mead (25) from Washington for Connelly Early: one surplus arm for a 134 wRC+ infield bat with years of club control.</a:t>
+            </a:r>
+          </a:p>
+        </p:txBody>
+      </p:sp>
+      <p:sp>
+        <p:nvSpPr>
+          <p:cNvPr id="7" name="Rounded Rectangle 6"/>
           <p:cNvSpPr/>
           <p:nvPr/>
         </p:nvSpPr>
         <p:spPr>
           <a:xfrm>
-            <a:off x="841247" y="2724912"/>
-            <a:ext cx="384048" cy="384048"/>
+            <a:off x="8001000" y="2889504"/>
+            <a:ext cx="146304" cy="146304"/>
+          </a:xfrm>
+          <a:prstGeom prst="roundRect">
+            <a:avLst>
+              <a:gd name="adj" fmla="val 18000"/>
+            </a:avLst>
+          </a:prstGeom>
+          <a:solidFill>
+            <a:srgbClr val="EAF0F8"/>
+          </a:solidFill>
+          <a:ln>
+            <a:noFill/>
+          </a:ln>
+          <a:effectLst/>
+        </p:spPr>
+        <p:style>
+          <a:lnRef idx="1">
+            <a:schemeClr val="accent1"/>
+          </a:lnRef>
+          <a:fillRef idx="3">
+            <a:schemeClr val="accent1"/>
+          </a:fillRef>
+          <a:effectRef idx="2">
+            <a:schemeClr val="accent1"/>
+          </a:effectRef>
+          <a:fontRef idx="minor">
+            <a:schemeClr val="lt1"/>
+          </a:fontRef>
+        </p:style>
+        <p:txBody>
+          <a:bodyPr rtlCol="0" anchor="ctr"/>
+          <a:lstStyle/>
+          <a:p>
+            <a:pPr algn="ctr"/>
+          </a:p>
+        </p:txBody>
+      </p:sp>
+      <p:sp>
+        <p:nvSpPr>
+          <p:cNvPr id="8" name="TextBox 7"/>
+          <p:cNvSpPr txBox="1"/>
+          <p:nvPr/>
+        </p:nvSpPr>
+        <p:spPr>
+          <a:xfrm>
+            <a:off x="8293608" y="2852928"/>
+            <a:ext cx="3749039" cy="1097280"/>
+          </a:xfrm>
+          <a:prstGeom prst="rect">
+            <a:avLst/>
+          </a:prstGeom>
+          <a:noFill/>
+        </p:spPr>
+        <p:txBody>
+          <a:bodyPr wrap="square" anchor="t" lIns="0" rIns="0" tIns="0" bIns="0">
+            <a:spAutoFit/>
+          </a:bodyPr>
+          <a:lstStyle/>
+          <a:p>
+            <a:pPr algn="l">
+              <a:lnSpc>
+                <a:spcPct val="107000"/>
+              </a:lnSpc>
+              <a:spcAft>
+                <a:spcPts val="200"/>
+              </a:spcAft>
+            </a:pPr>
+            <a:r>
+              <a:rPr sz="1350" b="1" i="0">
+                <a:solidFill>
+                  <a:srgbClr val="EAF0F8"/>
+                </a:solidFill>
+                <a:latin typeface="Arial"/>
+              </a:rPr>
+              <a:t>The Fenway fit</a:t>
+            </a:r>
+          </a:p>
+          <a:p>
+            <a:pPr algn="l">
+              <a:lnSpc>
+                <a:spcPct val="107000"/>
+              </a:lnSpc>
+              <a:spcAft>
+                <a:spcPts val="200"/>
+              </a:spcAft>
+            </a:pPr>
+            <a:r>
+              <a:rPr sz="1160" b="0" i="0">
+                <a:solidFill>
+                  <a:srgbClr val="93A0B6"/>
+                </a:solidFill>
+                <a:latin typeface="Arial"/>
+              </a:rPr>
+              <a:t>23% pull-air rate, 82nd percentile, with a .846 wOBA on pulled air balls. RHB pull-air plays to the Monster.</a:t>
+            </a:r>
+          </a:p>
+        </p:txBody>
+      </p:sp>
+      <p:sp>
+        <p:nvSpPr>
+          <p:cNvPr id="9" name="Rounded Rectangle 8"/>
+          <p:cNvSpPr/>
+          <p:nvPr/>
+        </p:nvSpPr>
+        <p:spPr>
+          <a:xfrm>
+            <a:off x="8001000" y="4005072"/>
+            <a:ext cx="146304" cy="146304"/>
+          </a:xfrm>
+          <a:prstGeom prst="roundRect">
+            <a:avLst>
+              <a:gd name="adj" fmla="val 18000"/>
+            </a:avLst>
+          </a:prstGeom>
+          <a:solidFill>
+            <a:srgbClr val="E3B14E"/>
+          </a:solidFill>
+          <a:ln>
+            <a:noFill/>
+          </a:ln>
+          <a:effectLst/>
+        </p:spPr>
+        <p:style>
+          <a:lnRef idx="1">
+            <a:schemeClr val="accent1"/>
+          </a:lnRef>
+          <a:fillRef idx="3">
+            <a:schemeClr val="accent1"/>
+          </a:fillRef>
+          <a:effectRef idx="2">
+            <a:schemeClr val="accent1"/>
+          </a:effectRef>
+          <a:fontRef idx="minor">
+            <a:schemeClr val="lt1"/>
+          </a:fontRef>
+        </p:style>
+        <p:txBody>
+          <a:bodyPr rtlCol="0" anchor="ctr"/>
+          <a:lstStyle/>
+          <a:p>
+            <a:pPr algn="ctr"/>
+          </a:p>
+        </p:txBody>
+      </p:sp>
+      <p:sp>
+        <p:nvSpPr>
+          <p:cNvPr id="10" name="TextBox 9"/>
+          <p:cNvSpPr txBox="1"/>
+          <p:nvPr/>
+        </p:nvSpPr>
+        <p:spPr>
+          <a:xfrm>
+            <a:off x="8293608" y="3968496"/>
+            <a:ext cx="3749039" cy="1097280"/>
+          </a:xfrm>
+          <a:prstGeom prst="rect">
+            <a:avLst/>
+          </a:prstGeom>
+          <a:noFill/>
+        </p:spPr>
+        <p:txBody>
+          <a:bodyPr wrap="square" anchor="t" lIns="0" rIns="0" tIns="0" bIns="0">
+            <a:spAutoFit/>
+          </a:bodyPr>
+          <a:lstStyle/>
+          <a:p>
+            <a:pPr algn="l">
+              <a:lnSpc>
+                <a:spcPct val="107000"/>
+              </a:lnSpc>
+              <a:spcAft>
+                <a:spcPts val="200"/>
+              </a:spcAft>
+            </a:pPr>
+            <a:r>
+              <a:rPr sz="1350" b="1" i="0">
+                <a:solidFill>
+                  <a:srgbClr val="EAF0F8"/>
+                </a:solidFill>
+                <a:latin typeface="Arial"/>
+              </a:rPr>
+              <a:t>Earned, mostly</a:t>
+            </a:r>
+          </a:p>
+          <a:p>
+            <a:pPr algn="l">
+              <a:lnSpc>
+                <a:spcPct val="107000"/>
+              </a:lnSpc>
+              <a:spcAft>
+                <a:spcPts val="200"/>
+              </a:spcAft>
+            </a:pPr>
+            <a:r>
+              <a:rPr sz="1160" b="0" i="0">
+                <a:solidFill>
+                  <a:srgbClr val="93A0B6"/>
+                </a:solidFill>
+                <a:latin typeface="Arial"/>
+              </a:rPr>
+              <a:t>.376 wOBA against a .359 xwOBA, so the breakout has contact quality behind it. The flag: 488 PA of .617 OPS before this year.</a:t>
+            </a:r>
+          </a:p>
+        </p:txBody>
+      </p:sp>
+      <p:sp>
+        <p:nvSpPr>
+          <p:cNvPr id="11" name="Rounded Rectangle 10"/>
+          <p:cNvSpPr/>
+          <p:nvPr/>
+        </p:nvSpPr>
+        <p:spPr>
+          <a:xfrm>
+            <a:off x="8001000" y="5120640"/>
+            <a:ext cx="146304" cy="146304"/>
           </a:xfrm>
           <a:prstGeom prst="roundRect">
             <a:avLst>
@@ -6945,534 +7201,77 @@
           </a:fontRef>
         </p:style>
         <p:txBody>
-          <a:bodyPr rtlCol="0" anchor="ctr" wrap="none"/>
+          <a:bodyPr rtlCol="0" anchor="ctr"/>
           <a:lstStyle/>
           <a:p>
             <a:pPr algn="ctr"/>
-            <a:r>
-              <a:rPr sz="1600" b="1">
-                <a:solidFill>
-                  <a:srgbClr val="0B1220"/>
-                </a:solidFill>
-                <a:latin typeface="Courier New"/>
-              </a:rPr>
-              <a:t>1</a:t>
-            </a:r>
-          </a:p>
-        </p:txBody>
-      </p:sp>
-      <p:sp>
-        <p:nvSpPr>
-          <p:cNvPr id="7" name="TextBox 6"/>
-          <p:cNvSpPr txBox="1"/>
-          <p:nvPr/>
-        </p:nvSpPr>
-        <p:spPr>
-          <a:xfrm>
-            <a:off x="841247" y="3310128"/>
-            <a:ext cx="2999232" cy="411480"/>
-          </a:xfrm>
-          <a:prstGeom prst="rect">
-            <a:avLst/>
-          </a:prstGeom>
-          <a:noFill/>
-        </p:spPr>
-        <p:txBody>
-          <a:bodyPr wrap="square" anchor="t" lIns="0" rIns="0" tIns="0" bIns="0">
-            <a:spAutoFit/>
-          </a:bodyPr>
-          <a:lstStyle/>
-          <a:p>
-            <a:pPr algn="l">
-              <a:lnSpc>
-                <a:spcPct val="100000"/>
-              </a:lnSpc>
-              <a:spcAft>
-                <a:spcPts val="0"/>
-              </a:spcAft>
-            </a:pPr>
-            <a:r>
-              <a:rPr sz="1600" b="1" i="0">
+          </a:p>
+        </p:txBody>
+      </p:sp>
+      <p:sp>
+        <p:nvSpPr>
+          <p:cNvPr id="12" name="TextBox 11"/>
+          <p:cNvSpPr txBox="1"/>
+          <p:nvPr/>
+        </p:nvSpPr>
+        <p:spPr>
+          <a:xfrm>
+            <a:off x="8293608" y="5084064"/>
+            <a:ext cx="3749039" cy="1097280"/>
+          </a:xfrm>
+          <a:prstGeom prst="rect">
+            <a:avLst/>
+          </a:prstGeom>
+          <a:noFill/>
+        </p:spPr>
+        <p:txBody>
+          <a:bodyPr wrap="square" anchor="t" lIns="0" rIns="0" tIns="0" bIns="0">
+            <a:spAutoFit/>
+          </a:bodyPr>
+          <a:lstStyle/>
+          <a:p>
+            <a:pPr algn="l">
+              <a:lnSpc>
+                <a:spcPct val="107000"/>
+              </a:lnSpc>
+              <a:spcAft>
+                <a:spcPts val="200"/>
+              </a:spcAft>
+            </a:pPr>
+            <a:r>
+              <a:rPr sz="1350" b="1" i="0">
                 <a:solidFill>
                   <a:srgbClr val="EAF0F8"/>
                 </a:solidFill>
                 <a:latin typeface="Arial"/>
               </a:rPr>
-              <a:t>Controllable bats</a:t>
-            </a:r>
-          </a:p>
-        </p:txBody>
-      </p:sp>
-      <p:sp>
-        <p:nvSpPr>
-          <p:cNvPr id="8" name="TextBox 7"/>
-          <p:cNvSpPr txBox="1"/>
-          <p:nvPr/>
-        </p:nvSpPr>
-        <p:spPr>
-          <a:xfrm>
-            <a:off x="841247" y="3767328"/>
-            <a:ext cx="2999232" cy="1097280"/>
-          </a:xfrm>
-          <a:prstGeom prst="rect">
-            <a:avLst/>
-          </a:prstGeom>
-          <a:noFill/>
-        </p:spPr>
-        <p:txBody>
-          <a:bodyPr wrap="square" anchor="t" lIns="0" rIns="0" tIns="0" bIns="0">
-            <a:spAutoFit/>
-          </a:bodyPr>
-          <a:lstStyle/>
-          <a:p>
-            <a:pPr algn="l">
-              <a:lnSpc>
-                <a:spcPct val="110000"/>
-              </a:lnSpc>
-              <a:spcAft>
-                <a:spcPts val="400"/>
-              </a:spcAft>
-            </a:pPr>
-            <a:r>
-              <a:rPr sz="1280" b="0" i="0">
+              <a:t>Menu grade</a:t>
+            </a:r>
+          </a:p>
+          <a:p>
+            <a:pPr algn="l">
+              <a:lnSpc>
+                <a:spcPct val="107000"/>
+              </a:lnSpc>
+              <a:spcAft>
+                <a:spcPts val="200"/>
+              </a:spcAft>
+            </a:pPr>
+            <a:r>
+              <a:rPr sz="1160" b="0" i="0">
                 <a:solidFill>
                   <a:srgbClr val="93A0B6"/>
                 </a:solidFill>
                 <a:latin typeface="Arial"/>
               </a:rPr>
-              <a:t>Young, cost-controlled position players to fix an inconsistent lineup and lengthen it around the core.</a:t>
-            </a:r>
-          </a:p>
-        </p:txBody>
-      </p:sp>
-      <p:sp>
-        <p:nvSpPr>
-          <p:cNvPr id="9" name="Rounded Rectangle 8"/>
-          <p:cNvSpPr/>
-          <p:nvPr/>
-        </p:nvSpPr>
-        <p:spPr>
-          <a:xfrm>
-            <a:off x="4352544" y="2468880"/>
-            <a:ext cx="3502152" cy="2514600"/>
-          </a:xfrm>
-          <a:prstGeom prst="roundRect">
-            <a:avLst>
-              <a:gd name="adj" fmla="val 6000"/>
-            </a:avLst>
-          </a:prstGeom>
-          <a:solidFill>
-            <a:srgbClr val="121E33"/>
-          </a:solidFill>
-          <a:ln w="12700">
-            <a:solidFill>
-              <a:srgbClr val="26334E"/>
-            </a:solidFill>
-          </a:ln>
-          <a:effectLst/>
-        </p:spPr>
-        <p:style>
-          <a:lnRef idx="1">
-            <a:schemeClr val="accent1"/>
-          </a:lnRef>
-          <a:fillRef idx="3">
-            <a:schemeClr val="accent1"/>
-          </a:fillRef>
-          <a:effectRef idx="2">
-            <a:schemeClr val="accent1"/>
-          </a:effectRef>
-          <a:fontRef idx="minor">
-            <a:schemeClr val="lt1"/>
-          </a:fontRef>
-        </p:style>
-        <p:txBody>
-          <a:bodyPr rtlCol="0" anchor="ctr"/>
-          <a:lstStyle/>
-          <a:p>
-            <a:pPr algn="ctr"/>
-          </a:p>
-        </p:txBody>
-      </p:sp>
-      <p:sp>
-        <p:nvSpPr>
-          <p:cNvPr id="10" name="Rounded Rectangle 9"/>
-          <p:cNvSpPr/>
-          <p:nvPr/>
-        </p:nvSpPr>
-        <p:spPr>
-          <a:xfrm>
-            <a:off x="4626864" y="2724912"/>
-            <a:ext cx="384048" cy="384048"/>
-          </a:xfrm>
-          <a:prstGeom prst="roundRect">
-            <a:avLst>
-              <a:gd name="adj" fmla="val 18000"/>
-            </a:avLst>
-          </a:prstGeom>
-          <a:solidFill>
-            <a:srgbClr val="EAF0F8"/>
-          </a:solidFill>
-          <a:ln>
-            <a:noFill/>
-          </a:ln>
-          <a:effectLst/>
-        </p:spPr>
-        <p:style>
-          <a:lnRef idx="1">
-            <a:schemeClr val="accent1"/>
-          </a:lnRef>
-          <a:fillRef idx="3">
-            <a:schemeClr val="accent1"/>
-          </a:fillRef>
-          <a:effectRef idx="2">
-            <a:schemeClr val="accent1"/>
-          </a:effectRef>
-          <a:fontRef idx="minor">
-            <a:schemeClr val="lt1"/>
-          </a:fontRef>
-        </p:style>
-        <p:txBody>
-          <a:bodyPr rtlCol="0" anchor="ctr" wrap="none"/>
-          <a:lstStyle/>
-          <a:p>
-            <a:pPr algn="ctr"/>
-            <a:r>
-              <a:rPr sz="1600" b="1">
-                <a:solidFill>
-                  <a:srgbClr val="0B1220"/>
-                </a:solidFill>
-                <a:latin typeface="Courier New"/>
-              </a:rPr>
-              <a:t>2</a:t>
-            </a:r>
-          </a:p>
-        </p:txBody>
-      </p:sp>
-      <p:sp>
-        <p:nvSpPr>
-          <p:cNvPr id="11" name="TextBox 10"/>
-          <p:cNvSpPr txBox="1"/>
-          <p:nvPr/>
-        </p:nvSpPr>
-        <p:spPr>
-          <a:xfrm>
-            <a:off x="4626864" y="3310128"/>
-            <a:ext cx="2999232" cy="411480"/>
-          </a:xfrm>
-          <a:prstGeom prst="rect">
-            <a:avLst/>
-          </a:prstGeom>
-          <a:noFill/>
-        </p:spPr>
-        <p:txBody>
-          <a:bodyPr wrap="square" anchor="t" lIns="0" rIns="0" tIns="0" bIns="0">
-            <a:spAutoFit/>
-          </a:bodyPr>
-          <a:lstStyle/>
-          <a:p>
-            <a:pPr algn="l">
-              <a:lnSpc>
-                <a:spcPct val="100000"/>
-              </a:lnSpc>
-              <a:spcAft>
-                <a:spcPts val="0"/>
-              </a:spcAft>
-            </a:pPr>
-            <a:r>
-              <a:rPr sz="1600" b="1" i="0">
-                <a:solidFill>
-                  <a:srgbClr val="EAF0F8"/>
-                </a:solidFill>
-                <a:latin typeface="Arial"/>
-              </a:rPr>
-              <a:t>Best talent / upside</a:t>
-            </a:r>
-          </a:p>
-        </p:txBody>
-      </p:sp>
-      <p:sp>
-        <p:nvSpPr>
-          <p:cNvPr id="12" name="TextBox 11"/>
-          <p:cNvSpPr txBox="1"/>
-          <p:nvPr/>
-        </p:nvSpPr>
-        <p:spPr>
-          <a:xfrm>
-            <a:off x="4626864" y="3767328"/>
-            <a:ext cx="2999232" cy="1097280"/>
-          </a:xfrm>
-          <a:prstGeom prst="rect">
-            <a:avLst/>
-          </a:prstGeom>
-          <a:noFill/>
-        </p:spPr>
-        <p:txBody>
-          <a:bodyPr wrap="square" anchor="t" lIns="0" rIns="0" tIns="0" bIns="0">
-            <a:spAutoFit/>
-          </a:bodyPr>
-          <a:lstStyle/>
-          <a:p>
-            <a:pPr algn="l">
-              <a:lnSpc>
-                <a:spcPct val="110000"/>
-              </a:lnSpc>
-              <a:spcAft>
-                <a:spcPts val="400"/>
-              </a:spcAft>
-            </a:pPr>
-            <a:r>
-              <a:rPr sz="1280" b="0" i="0">
-                <a:solidFill>
-                  <a:srgbClr val="93A0B6"/>
-                </a:solidFill>
-                <a:latin typeface="Arial"/>
-              </a:rPr>
-              <a:t>In a retool you take the best player, not the positional patch, prospects and MLB-ready youth over rentals.</a:t>
-            </a:r>
-          </a:p>
-        </p:txBody>
-      </p:sp>
-      <p:sp>
-        <p:nvSpPr>
-          <p:cNvPr id="13" name="Rounded Rectangle 12"/>
-          <p:cNvSpPr/>
-          <p:nvPr/>
-        </p:nvSpPr>
-        <p:spPr>
-          <a:xfrm>
-            <a:off x="8138159" y="2468880"/>
-            <a:ext cx="3502152" cy="2514600"/>
-          </a:xfrm>
-          <a:prstGeom prst="roundRect">
-            <a:avLst>
-              <a:gd name="adj" fmla="val 6000"/>
-            </a:avLst>
-          </a:prstGeom>
-          <a:solidFill>
-            <a:srgbClr val="121E33"/>
-          </a:solidFill>
-          <a:ln w="12700">
-            <a:solidFill>
-              <a:srgbClr val="26334E"/>
-            </a:solidFill>
-          </a:ln>
-          <a:effectLst/>
-        </p:spPr>
-        <p:style>
-          <a:lnRef idx="1">
-            <a:schemeClr val="accent1"/>
-          </a:lnRef>
-          <a:fillRef idx="3">
-            <a:schemeClr val="accent1"/>
-          </a:fillRef>
-          <a:effectRef idx="2">
-            <a:schemeClr val="accent1"/>
-          </a:effectRef>
-          <a:fontRef idx="minor">
-            <a:schemeClr val="lt1"/>
-          </a:fontRef>
-        </p:style>
-        <p:txBody>
-          <a:bodyPr rtlCol="0" anchor="ctr"/>
-          <a:lstStyle/>
-          <a:p>
-            <a:pPr algn="ctr"/>
-          </a:p>
-        </p:txBody>
-      </p:sp>
-      <p:sp>
-        <p:nvSpPr>
-          <p:cNvPr id="14" name="Rounded Rectangle 13"/>
-          <p:cNvSpPr/>
-          <p:nvPr/>
-        </p:nvSpPr>
-        <p:spPr>
-          <a:xfrm>
-            <a:off x="8412480" y="2724912"/>
-            <a:ext cx="384048" cy="384048"/>
-          </a:xfrm>
-          <a:prstGeom prst="roundRect">
-            <a:avLst>
-              <a:gd name="adj" fmla="val 18000"/>
-            </a:avLst>
-          </a:prstGeom>
-          <a:solidFill>
-            <a:srgbClr val="E3B14E"/>
-          </a:solidFill>
-          <a:ln>
-            <a:noFill/>
-          </a:ln>
-          <a:effectLst/>
-        </p:spPr>
-        <p:style>
-          <a:lnRef idx="1">
-            <a:schemeClr val="accent1"/>
-          </a:lnRef>
-          <a:fillRef idx="3">
-            <a:schemeClr val="accent1"/>
-          </a:fillRef>
-          <a:effectRef idx="2">
-            <a:schemeClr val="accent1"/>
-          </a:effectRef>
-          <a:fontRef idx="minor">
-            <a:schemeClr val="lt1"/>
-          </a:fontRef>
-        </p:style>
-        <p:txBody>
-          <a:bodyPr rtlCol="0" anchor="ctr" wrap="none"/>
-          <a:lstStyle/>
-          <a:p>
-            <a:pPr algn="ctr"/>
-            <a:r>
-              <a:rPr sz="1600" b="1">
-                <a:solidFill>
-                  <a:srgbClr val="0B1220"/>
-                </a:solidFill>
-                <a:latin typeface="Courier New"/>
-              </a:rPr>
-              <a:t>3</a:t>
-            </a:r>
-          </a:p>
-        </p:txBody>
-      </p:sp>
-      <p:sp>
-        <p:nvSpPr>
-          <p:cNvPr id="15" name="TextBox 14"/>
-          <p:cNvSpPr txBox="1"/>
-          <p:nvPr/>
-        </p:nvSpPr>
-        <p:spPr>
-          <a:xfrm>
-            <a:off x="8412480" y="3310128"/>
-            <a:ext cx="2999232" cy="411480"/>
-          </a:xfrm>
-          <a:prstGeom prst="rect">
-            <a:avLst/>
-          </a:prstGeom>
-          <a:noFill/>
-        </p:spPr>
-        <p:txBody>
-          <a:bodyPr wrap="square" anchor="t" lIns="0" rIns="0" tIns="0" bIns="0">
-            <a:spAutoFit/>
-          </a:bodyPr>
-          <a:lstStyle/>
-          <a:p>
-            <a:pPr algn="l">
-              <a:lnSpc>
-                <a:spcPct val="100000"/>
-              </a:lnSpc>
-              <a:spcAft>
-                <a:spcPts val="0"/>
-              </a:spcAft>
-            </a:pPr>
-            <a:r>
-              <a:rPr sz="1600" b="1" i="0">
-                <a:solidFill>
-                  <a:srgbClr val="EAF0F8"/>
-                </a:solidFill>
-                <a:latin typeface="Arial"/>
-              </a:rPr>
-              <a:t>Salary relief</a:t>
-            </a:r>
-          </a:p>
-        </p:txBody>
-      </p:sp>
-      <p:sp>
-        <p:nvSpPr>
-          <p:cNvPr id="16" name="TextBox 15"/>
-          <p:cNvSpPr txBox="1"/>
-          <p:nvPr/>
-        </p:nvSpPr>
-        <p:spPr>
-          <a:xfrm>
-            <a:off x="8412480" y="3767328"/>
-            <a:ext cx="2999232" cy="1097280"/>
-          </a:xfrm>
-          <a:prstGeom prst="rect">
-            <a:avLst/>
-          </a:prstGeom>
-          <a:noFill/>
-        </p:spPr>
-        <p:txBody>
-          <a:bodyPr wrap="square" anchor="t" lIns="0" rIns="0" tIns="0" bIns="0">
-            <a:spAutoFit/>
-          </a:bodyPr>
-          <a:lstStyle/>
-          <a:p>
-            <a:pPr algn="l">
-              <a:lnSpc>
-                <a:spcPct val="110000"/>
-              </a:lnSpc>
-              <a:spcAft>
-                <a:spcPts val="400"/>
-              </a:spcAft>
-            </a:pPr>
-            <a:r>
-              <a:rPr sz="1280" b="0" i="0">
-                <a:solidFill>
-                  <a:srgbClr val="93A0B6"/>
-                </a:solidFill>
-                <a:latin typeface="Arial"/>
-              </a:rPr>
-              <a:t>Attach Yoshida money where possible; free payroll for the 2027 window.</a:t>
-            </a:r>
-          </a:p>
-        </p:txBody>
-      </p:sp>
-      <p:sp>
-        <p:nvSpPr>
-          <p:cNvPr id="17" name="TextBox 16"/>
-          <p:cNvSpPr txBox="1"/>
-          <p:nvPr/>
-        </p:nvSpPr>
-        <p:spPr>
-          <a:xfrm>
-            <a:off x="566928" y="5257800"/>
-            <a:ext cx="11064240" cy="457200"/>
-          </a:xfrm>
-          <a:prstGeom prst="rect">
-            <a:avLst/>
-          </a:prstGeom>
-          <a:noFill/>
-        </p:spPr>
-        <p:txBody>
-          <a:bodyPr wrap="square" anchor="t" lIns="0" rIns="0" tIns="0" bIns="0">
-            <a:spAutoFit/>
-          </a:bodyPr>
-          <a:lstStyle/>
-          <a:p>
-            <a:pPr algn="l">
-              <a:lnSpc>
-                <a:spcPct val="100000"/>
-              </a:lnSpc>
-              <a:spcAft>
-                <a:spcPts val="0"/>
-              </a:spcAft>
-            </a:pPr>
-            <a:r>
-              <a:rPr sz="1400" b="1" i="1">
-                <a:solidFill>
-                  <a:srgbClr val="EAF0F8"/>
-                </a:solidFill>
-                <a:latin typeface="Arial"/>
-              </a:rPr>
-              <a:t>Keep the arms. Cash the outfield. </a:t>
-            </a:r>
-            <a:r>
-              <a:rPr sz="1400" b="0" i="1">
-                <a:solidFill>
-                  <a:srgbClr val="93A0B6"/>
-                </a:solidFill>
-                <a:latin typeface="Arial"/>
-              </a:rPr>
-              <a:t>Build the 2027 lineup, don't rent the 2026 one.</a:t>
-            </a:r>
-          </a:p>
-        </p:txBody>
-      </p:sp>
-      <p:sp>
-        <p:nvSpPr>
-          <p:cNvPr id="18" name="TextBox 17"/>
+              <a:t>The big-swing shape at half the price, and the infield hole filled. The pen fix is still open, 8 days left.</a:t>
+            </a:r>
+          </a:p>
+        </p:txBody>
+      </p:sp>
+      <p:sp>
+        <p:nvSpPr>
+          <p:cNvPr id="13" name="TextBox 12"/>
           <p:cNvSpPr txBox="1"/>
           <p:nvPr/>
         </p:nvSpPr>
@@ -7584,7 +7383,7 @@
                 </a:solidFill>
                 <a:latin typeface="Courier New"/>
               </a:rPr>
-              <a:t>// THE MARKET</a:t>
+              <a:t>// THE WINTER PLAN</a:t>
             </a:r>
           </a:p>
         </p:txBody>
@@ -7626,74 +7425,98 @@
                 </a:solidFill>
                 <a:latin typeface="Arial"/>
               </a:rPr>
-              <a:t>Who pays: contenders with a hole in the outfield</a:t>
-            </a:r>
-          </a:p>
-        </p:txBody>
-      </p:sp>
-      <p:pic>
-        <p:nvPicPr>
-          <p:cNvPr id="4" name="Picture 3" descr="08_trade_fit_targets.png"/>
-          <p:cNvPicPr>
-            <a:picLocks noChangeAspect="1"/>
-          </p:cNvPicPr>
-          <p:nvPr/>
-        </p:nvPicPr>
-        <p:blipFill>
-          <a:blip r:embed="rId2"/>
-          <a:stretch>
-            <a:fillRect/>
-          </a:stretch>
-        </p:blipFill>
-        <p:spPr>
-          <a:xfrm>
-            <a:off x="757237" y="1463040"/>
-            <a:ext cx="6715125" cy="4297680"/>
-          </a:xfrm>
-          <a:prstGeom prst="rect">
-            <a:avLst/>
-          </a:prstGeom>
-        </p:spPr>
-      </p:pic>
-      <p:sp>
-        <p:nvSpPr>
-          <p:cNvPr id="5" name="TextBox 4"/>
-          <p:cNvSpPr txBox="1"/>
-          <p:nvPr/>
-        </p:nvSpPr>
-        <p:spPr>
-          <a:xfrm>
-            <a:off x="8183879" y="1691640"/>
-            <a:ext cx="3657600" cy="457200"/>
-          </a:xfrm>
-          <a:prstGeom prst="rect">
-            <a:avLst/>
-          </a:prstGeom>
-          <a:noFill/>
-        </p:spPr>
-        <p:txBody>
-          <a:bodyPr wrap="square" anchor="t" lIns="0" rIns="0" tIns="0" bIns="0">
-            <a:spAutoFit/>
-          </a:bodyPr>
-          <a:lstStyle/>
-          <a:p>
-            <a:pPr algn="l">
-              <a:lnSpc>
-                <a:spcPct val="100000"/>
-              </a:lnSpc>
-              <a:spcAft>
-                <a:spcPts val="0"/>
-              </a:spcAft>
-            </a:pPr>
-            <a:r>
-              <a:rPr sz="1500" b="1" i="0">
-                <a:solidFill>
-                  <a:srgbClr val="EAF0F8"/>
-                </a:solidFill>
-                <a:latin typeface="Arial"/>
-              </a:rPr>
-              <a:t>Best-fit buyers</a:t>
-            </a:r>
+              <a:t>Spend the pitching surplus on offense</a:t>
+            </a:r>
+          </a:p>
+        </p:txBody>
+      </p:sp>
+      <p:sp>
+        <p:nvSpPr>
+          <p:cNvPr id="4" name="TextBox 3"/>
+          <p:cNvSpPr txBox="1"/>
+          <p:nvPr/>
+        </p:nvSpPr>
+        <p:spPr>
+          <a:xfrm>
+            <a:off x="566928" y="1572768"/>
+            <a:ext cx="11064240" cy="640080"/>
+          </a:xfrm>
+          <a:prstGeom prst="rect">
+            <a:avLst/>
+          </a:prstGeom>
+          <a:noFill/>
+        </p:spPr>
+        <p:txBody>
+          <a:bodyPr wrap="square" anchor="t" lIns="0" rIns="0" tIns="0" bIns="0">
+            <a:spAutoFit/>
+          </a:bodyPr>
+          <a:lstStyle/>
+          <a:p>
+            <a:pPr algn="l">
+              <a:lnSpc>
+                <a:spcPct val="112000"/>
+              </a:lnSpc>
+              <a:spcAft>
+                <a:spcPts val="400"/>
+              </a:spcAft>
+            </a:pPr>
+            <a:r>
+              <a:rPr sz="1450" b="0" i="0">
+                <a:solidFill>
+                  <a:srgbClr val="D9E1EF"/>
+                </a:solidFill>
+                <a:latin typeface="Arial"/>
+              </a:rPr>
+              <a:t>If winter comes and Duran's rebound has shown up, this is what a deal should return. With a top-6 rotation (3.65 ERA) carrying the club, trading bats for arms is backwards, convert the outfield surplus into what's thin:</a:t>
+            </a:r>
+          </a:p>
+        </p:txBody>
+      </p:sp>
+      <p:sp>
+        <p:nvSpPr>
+          <p:cNvPr id="5" name="Rounded Rectangle 4"/>
+          <p:cNvSpPr/>
+          <p:nvPr/>
+        </p:nvSpPr>
+        <p:spPr>
+          <a:xfrm>
+            <a:off x="566928" y="2468880"/>
+            <a:ext cx="3502152" cy="2514600"/>
+          </a:xfrm>
+          <a:prstGeom prst="roundRect">
+            <a:avLst>
+              <a:gd name="adj" fmla="val 6000"/>
+            </a:avLst>
+          </a:prstGeom>
+          <a:solidFill>
+            <a:srgbClr val="121E33"/>
+          </a:solidFill>
+          <a:ln w="12700">
+            <a:solidFill>
+              <a:srgbClr val="26334E"/>
+            </a:solidFill>
+          </a:ln>
+          <a:effectLst/>
+        </p:spPr>
+        <p:style>
+          <a:lnRef idx="1">
+            <a:schemeClr val="accent1"/>
+          </a:lnRef>
+          <a:fillRef idx="3">
+            <a:schemeClr val="accent1"/>
+          </a:fillRef>
+          <a:effectRef idx="2">
+            <a:schemeClr val="accent1"/>
+          </a:effectRef>
+          <a:fontRef idx="minor">
+            <a:schemeClr val="lt1"/>
+          </a:fontRef>
+        </p:style>
+        <p:txBody>
+          <a:bodyPr rtlCol="0" anchor="ctr"/>
+          <a:lstStyle/>
+          <a:p>
+            <a:pPr algn="ctr"/>
           </a:p>
         </p:txBody>
       </p:sp>
@@ -7705,8 +7528,8 @@
         </p:nvSpPr>
         <p:spPr>
           <a:xfrm>
-            <a:off x="8183879" y="2221991"/>
-            <a:ext cx="128016" cy="128016"/>
+            <a:off x="841247" y="2724912"/>
+            <a:ext cx="384048" cy="384048"/>
           </a:xfrm>
           <a:prstGeom prst="roundRect">
             <a:avLst>
@@ -7714,7 +7537,7 @@
             </a:avLst>
           </a:prstGeom>
           <a:solidFill>
-            <a:srgbClr val="E8615A"/>
+            <a:srgbClr val="58C08D"/>
           </a:solidFill>
           <a:ln>
             <a:noFill/>
@@ -7736,6 +7559,147 @@
           </a:fontRef>
         </p:style>
         <p:txBody>
+          <a:bodyPr rtlCol="0" anchor="ctr" wrap="none"/>
+          <a:lstStyle/>
+          <a:p>
+            <a:pPr algn="ctr"/>
+            <a:r>
+              <a:rPr sz="1600" b="1">
+                <a:solidFill>
+                  <a:srgbClr val="0B1220"/>
+                </a:solidFill>
+                <a:latin typeface="Courier New"/>
+              </a:rPr>
+              <a:t>1</a:t>
+            </a:r>
+          </a:p>
+        </p:txBody>
+      </p:sp>
+      <p:sp>
+        <p:nvSpPr>
+          <p:cNvPr id="7" name="TextBox 6"/>
+          <p:cNvSpPr txBox="1"/>
+          <p:nvPr/>
+        </p:nvSpPr>
+        <p:spPr>
+          <a:xfrm>
+            <a:off x="841247" y="3310128"/>
+            <a:ext cx="2999232" cy="411480"/>
+          </a:xfrm>
+          <a:prstGeom prst="rect">
+            <a:avLst/>
+          </a:prstGeom>
+          <a:noFill/>
+        </p:spPr>
+        <p:txBody>
+          <a:bodyPr wrap="square" anchor="t" lIns="0" rIns="0" tIns="0" bIns="0">
+            <a:spAutoFit/>
+          </a:bodyPr>
+          <a:lstStyle/>
+          <a:p>
+            <a:pPr algn="l">
+              <a:lnSpc>
+                <a:spcPct val="100000"/>
+              </a:lnSpc>
+              <a:spcAft>
+                <a:spcPts val="0"/>
+              </a:spcAft>
+            </a:pPr>
+            <a:r>
+              <a:rPr sz="1600" b="1" i="0">
+                <a:solidFill>
+                  <a:srgbClr val="EAF0F8"/>
+                </a:solidFill>
+                <a:latin typeface="Arial"/>
+              </a:rPr>
+              <a:t>Controllable bats</a:t>
+            </a:r>
+          </a:p>
+        </p:txBody>
+      </p:sp>
+      <p:sp>
+        <p:nvSpPr>
+          <p:cNvPr id="8" name="TextBox 7"/>
+          <p:cNvSpPr txBox="1"/>
+          <p:nvPr/>
+        </p:nvSpPr>
+        <p:spPr>
+          <a:xfrm>
+            <a:off x="841247" y="3767328"/>
+            <a:ext cx="2999232" cy="1097280"/>
+          </a:xfrm>
+          <a:prstGeom prst="rect">
+            <a:avLst/>
+          </a:prstGeom>
+          <a:noFill/>
+        </p:spPr>
+        <p:txBody>
+          <a:bodyPr wrap="square" anchor="t" lIns="0" rIns="0" tIns="0" bIns="0">
+            <a:spAutoFit/>
+          </a:bodyPr>
+          <a:lstStyle/>
+          <a:p>
+            <a:pPr algn="l">
+              <a:lnSpc>
+                <a:spcPct val="110000"/>
+              </a:lnSpc>
+              <a:spcAft>
+                <a:spcPts val="400"/>
+              </a:spcAft>
+            </a:pPr>
+            <a:r>
+              <a:rPr sz="1280" b="0" i="0">
+                <a:solidFill>
+                  <a:srgbClr val="93A0B6"/>
+                </a:solidFill>
+                <a:latin typeface="Arial"/>
+              </a:rPr>
+              <a:t>Young, cost-controlled position players to fix an inconsistent lineup and lengthen it around the core.</a:t>
+            </a:r>
+          </a:p>
+        </p:txBody>
+      </p:sp>
+      <p:sp>
+        <p:nvSpPr>
+          <p:cNvPr id="9" name="Rounded Rectangle 8"/>
+          <p:cNvSpPr/>
+          <p:nvPr/>
+        </p:nvSpPr>
+        <p:spPr>
+          <a:xfrm>
+            <a:off x="4352544" y="2468880"/>
+            <a:ext cx="3502152" cy="2514600"/>
+          </a:xfrm>
+          <a:prstGeom prst="roundRect">
+            <a:avLst>
+              <a:gd name="adj" fmla="val 6000"/>
+            </a:avLst>
+          </a:prstGeom>
+          <a:solidFill>
+            <a:srgbClr val="121E33"/>
+          </a:solidFill>
+          <a:ln w="12700">
+            <a:solidFill>
+              <a:srgbClr val="26334E"/>
+            </a:solidFill>
+          </a:ln>
+          <a:effectLst/>
+        </p:spPr>
+        <p:style>
+          <a:lnRef idx="1">
+            <a:schemeClr val="accent1"/>
+          </a:lnRef>
+          <a:fillRef idx="3">
+            <a:schemeClr val="accent1"/>
+          </a:fillRef>
+          <a:effectRef idx="2">
+            <a:schemeClr val="accent1"/>
+          </a:effectRef>
+          <a:fontRef idx="minor">
+            <a:schemeClr val="lt1"/>
+          </a:fontRef>
+        </p:style>
+        <p:txBody>
           <a:bodyPr rtlCol="0" anchor="ctr"/>
           <a:lstStyle/>
           <a:p>
@@ -7745,65 +7709,14 @@
       </p:sp>
       <p:sp>
         <p:nvSpPr>
-          <p:cNvPr id="7" name="TextBox 6"/>
-          <p:cNvSpPr txBox="1"/>
-          <p:nvPr/>
-        </p:nvSpPr>
-        <p:spPr>
-          <a:xfrm>
-            <a:off x="8439911" y="2194560"/>
-            <a:ext cx="3566160" cy="457200"/>
-          </a:xfrm>
-          <a:prstGeom prst="rect">
-            <a:avLst/>
-          </a:prstGeom>
-          <a:noFill/>
-        </p:spPr>
-        <p:txBody>
-          <a:bodyPr wrap="square" anchor="t" lIns="0" rIns="0" tIns="0" bIns="0">
-            <a:spAutoFit/>
-          </a:bodyPr>
-          <a:lstStyle/>
-          <a:p>
-            <a:pPr algn="l">
-              <a:lnSpc>
-                <a:spcPct val="100000"/>
-              </a:lnSpc>
-              <a:spcAft>
-                <a:spcPts val="0"/>
-              </a:spcAft>
-            </a:pPr>
-            <a:r>
-              <a:rPr sz="1400" b="1" i="0">
-                <a:solidFill>
-                  <a:srgbClr val="EAF0F8"/>
-                </a:solidFill>
-                <a:latin typeface="Arial"/>
-              </a:rPr>
-              <a:t>Phillies  </a:t>
-            </a:r>
-            <a:r>
-              <a:rPr sz="1200" b="0" i="0">
-                <a:solidFill>
-                  <a:srgbClr val="93A0B6"/>
-                </a:solidFill>
-                <a:latin typeface="Arial"/>
-              </a:rPr>
-              <a:t>.557, 84 OF wRC+</a:t>
-            </a:r>
-          </a:p>
-        </p:txBody>
-      </p:sp>
-      <p:sp>
-        <p:nvSpPr>
-          <p:cNvPr id="8" name="Rounded Rectangle 7"/>
+          <p:cNvPr id="10" name="Rounded Rectangle 9"/>
           <p:cNvSpPr/>
           <p:nvPr/>
         </p:nvSpPr>
         <p:spPr>
           <a:xfrm>
-            <a:off x="8183879" y="2788920"/>
-            <a:ext cx="128016" cy="128016"/>
+            <a:off x="4626864" y="2724912"/>
+            <a:ext cx="384048" cy="384048"/>
           </a:xfrm>
           <a:prstGeom prst="roundRect">
             <a:avLst>
@@ -7811,7 +7724,7 @@
             </a:avLst>
           </a:prstGeom>
           <a:solidFill>
-            <a:srgbClr val="E8615A"/>
+            <a:srgbClr val="EAF0F8"/>
           </a:solidFill>
           <a:ln>
             <a:noFill/>
@@ -7833,6 +7746,147 @@
           </a:fontRef>
         </p:style>
         <p:txBody>
+          <a:bodyPr rtlCol="0" anchor="ctr" wrap="none"/>
+          <a:lstStyle/>
+          <a:p>
+            <a:pPr algn="ctr"/>
+            <a:r>
+              <a:rPr sz="1600" b="1">
+                <a:solidFill>
+                  <a:srgbClr val="0B1220"/>
+                </a:solidFill>
+                <a:latin typeface="Courier New"/>
+              </a:rPr>
+              <a:t>2</a:t>
+            </a:r>
+          </a:p>
+        </p:txBody>
+      </p:sp>
+      <p:sp>
+        <p:nvSpPr>
+          <p:cNvPr id="11" name="TextBox 10"/>
+          <p:cNvSpPr txBox="1"/>
+          <p:nvPr/>
+        </p:nvSpPr>
+        <p:spPr>
+          <a:xfrm>
+            <a:off x="4626864" y="3310128"/>
+            <a:ext cx="2999232" cy="411480"/>
+          </a:xfrm>
+          <a:prstGeom prst="rect">
+            <a:avLst/>
+          </a:prstGeom>
+          <a:noFill/>
+        </p:spPr>
+        <p:txBody>
+          <a:bodyPr wrap="square" anchor="t" lIns="0" rIns="0" tIns="0" bIns="0">
+            <a:spAutoFit/>
+          </a:bodyPr>
+          <a:lstStyle/>
+          <a:p>
+            <a:pPr algn="l">
+              <a:lnSpc>
+                <a:spcPct val="100000"/>
+              </a:lnSpc>
+              <a:spcAft>
+                <a:spcPts val="0"/>
+              </a:spcAft>
+            </a:pPr>
+            <a:r>
+              <a:rPr sz="1600" b="1" i="0">
+                <a:solidFill>
+                  <a:srgbClr val="EAF0F8"/>
+                </a:solidFill>
+                <a:latin typeface="Arial"/>
+              </a:rPr>
+              <a:t>Best talent / upside</a:t>
+            </a:r>
+          </a:p>
+        </p:txBody>
+      </p:sp>
+      <p:sp>
+        <p:nvSpPr>
+          <p:cNvPr id="12" name="TextBox 11"/>
+          <p:cNvSpPr txBox="1"/>
+          <p:nvPr/>
+        </p:nvSpPr>
+        <p:spPr>
+          <a:xfrm>
+            <a:off x="4626864" y="3767328"/>
+            <a:ext cx="2999232" cy="1097280"/>
+          </a:xfrm>
+          <a:prstGeom prst="rect">
+            <a:avLst/>
+          </a:prstGeom>
+          <a:noFill/>
+        </p:spPr>
+        <p:txBody>
+          <a:bodyPr wrap="square" anchor="t" lIns="0" rIns="0" tIns="0" bIns="0">
+            <a:spAutoFit/>
+          </a:bodyPr>
+          <a:lstStyle/>
+          <a:p>
+            <a:pPr algn="l">
+              <a:lnSpc>
+                <a:spcPct val="110000"/>
+              </a:lnSpc>
+              <a:spcAft>
+                <a:spcPts val="400"/>
+              </a:spcAft>
+            </a:pPr>
+            <a:r>
+              <a:rPr sz="1280" b="0" i="0">
+                <a:solidFill>
+                  <a:srgbClr val="93A0B6"/>
+                </a:solidFill>
+                <a:latin typeface="Arial"/>
+              </a:rPr>
+              <a:t>In a retool you take the best player, not the positional patch, prospects and MLB-ready youth over rentals.</a:t>
+            </a:r>
+          </a:p>
+        </p:txBody>
+      </p:sp>
+      <p:sp>
+        <p:nvSpPr>
+          <p:cNvPr id="13" name="Rounded Rectangle 12"/>
+          <p:cNvSpPr/>
+          <p:nvPr/>
+        </p:nvSpPr>
+        <p:spPr>
+          <a:xfrm>
+            <a:off x="8138159" y="2468880"/>
+            <a:ext cx="3502152" cy="2514600"/>
+          </a:xfrm>
+          <a:prstGeom prst="roundRect">
+            <a:avLst>
+              <a:gd name="adj" fmla="val 6000"/>
+            </a:avLst>
+          </a:prstGeom>
+          <a:solidFill>
+            <a:srgbClr val="121E33"/>
+          </a:solidFill>
+          <a:ln w="12700">
+            <a:solidFill>
+              <a:srgbClr val="26334E"/>
+            </a:solidFill>
+          </a:ln>
+          <a:effectLst/>
+        </p:spPr>
+        <p:style>
+          <a:lnRef idx="1">
+            <a:schemeClr val="accent1"/>
+          </a:lnRef>
+          <a:fillRef idx="3">
+            <a:schemeClr val="accent1"/>
+          </a:fillRef>
+          <a:effectRef idx="2">
+            <a:schemeClr val="accent1"/>
+          </a:effectRef>
+          <a:fontRef idx="minor">
+            <a:schemeClr val="lt1"/>
+          </a:fontRef>
+        </p:style>
+        <p:txBody>
           <a:bodyPr rtlCol="0" anchor="ctr"/>
           <a:lstStyle/>
           <a:p>
@@ -7842,65 +7896,14 @@
       </p:sp>
       <p:sp>
         <p:nvSpPr>
-          <p:cNvPr id="9" name="TextBox 8"/>
-          <p:cNvSpPr txBox="1"/>
-          <p:nvPr/>
-        </p:nvSpPr>
-        <p:spPr>
-          <a:xfrm>
-            <a:off x="8439911" y="2761488"/>
-            <a:ext cx="3566160" cy="457200"/>
-          </a:xfrm>
-          <a:prstGeom prst="rect">
-            <a:avLst/>
-          </a:prstGeom>
-          <a:noFill/>
-        </p:spPr>
-        <p:txBody>
-          <a:bodyPr wrap="square" anchor="t" lIns="0" rIns="0" tIns="0" bIns="0">
-            <a:spAutoFit/>
-          </a:bodyPr>
-          <a:lstStyle/>
-          <a:p>
-            <a:pPr algn="l">
-              <a:lnSpc>
-                <a:spcPct val="100000"/>
-              </a:lnSpc>
-              <a:spcAft>
-                <a:spcPts val="0"/>
-              </a:spcAft>
-            </a:pPr>
-            <a:r>
-              <a:rPr sz="1400" b="1" i="0">
-                <a:solidFill>
-                  <a:srgbClr val="EAF0F8"/>
-                </a:solidFill>
-                <a:latin typeface="Arial"/>
-              </a:rPr>
-              <a:t>Rays  </a:t>
-            </a:r>
-            <a:r>
-              <a:rPr sz="1200" b="0" i="0">
-                <a:solidFill>
-                  <a:srgbClr val="93A0B6"/>
-                </a:solidFill>
-                <a:latin typeface="Arial"/>
-              </a:rPr>
-              <a:t>.596, 88 OF wRC+</a:t>
-            </a:r>
-          </a:p>
-        </p:txBody>
-      </p:sp>
-      <p:sp>
-        <p:nvSpPr>
-          <p:cNvPr id="10" name="Rounded Rectangle 9"/>
+          <p:cNvPr id="14" name="Rounded Rectangle 13"/>
           <p:cNvSpPr/>
           <p:nvPr/>
         </p:nvSpPr>
         <p:spPr>
           <a:xfrm>
-            <a:off x="8183879" y="3355847"/>
-            <a:ext cx="128016" cy="128016"/>
+            <a:off x="8412480" y="2724912"/>
+            <a:ext cx="384048" cy="384048"/>
           </a:xfrm>
           <a:prstGeom prst="roundRect">
             <a:avLst>
@@ -7908,7 +7911,7 @@
             </a:avLst>
           </a:prstGeom>
           <a:solidFill>
-            <a:srgbClr val="E8615A"/>
+            <a:srgbClr val="E3B14E"/>
           </a:solidFill>
           <a:ln>
             <a:noFill/>
@@ -7930,23 +7933,32 @@
           </a:fontRef>
         </p:style>
         <p:txBody>
-          <a:bodyPr rtlCol="0" anchor="ctr"/>
+          <a:bodyPr rtlCol="0" anchor="ctr" wrap="none"/>
           <a:lstStyle/>
           <a:p>
             <a:pPr algn="ctr"/>
-          </a:p>
-        </p:txBody>
-      </p:sp>
-      <p:sp>
-        <p:nvSpPr>
-          <p:cNvPr id="11" name="TextBox 10"/>
-          <p:cNvSpPr txBox="1"/>
-          <p:nvPr/>
-        </p:nvSpPr>
-        <p:spPr>
-          <a:xfrm>
-            <a:off x="8439911" y="3328415"/>
-            <a:ext cx="3566160" cy="457200"/>
+            <a:r>
+              <a:rPr sz="1600" b="1">
+                <a:solidFill>
+                  <a:srgbClr val="0B1220"/>
+                </a:solidFill>
+                <a:latin typeface="Courier New"/>
+              </a:rPr>
+              <a:t>3</a:t>
+            </a:r>
+          </a:p>
+        </p:txBody>
+      </p:sp>
+      <p:sp>
+        <p:nvSpPr>
+          <p:cNvPr id="15" name="TextBox 14"/>
+          <p:cNvSpPr txBox="1"/>
+          <p:nvPr/>
+        </p:nvSpPr>
+        <p:spPr>
+          <a:xfrm>
+            <a:off x="8412480" y="3310128"/>
+            <a:ext cx="2999232" cy="411480"/>
           </a:xfrm>
           <a:prstGeom prst="rect">
             <a:avLst/>
@@ -7968,82 +7980,69 @@
               </a:spcAft>
             </a:pPr>
             <a:r>
-              <a:rPr sz="1400" b="1" i="0">
+              <a:rPr sz="1600" b="1" i="0">
                 <a:solidFill>
                   <a:srgbClr val="EAF0F8"/>
                 </a:solidFill>
                 <a:latin typeface="Arial"/>
               </a:rPr>
-              <a:t>Cardinals  </a:t>
-            </a:r>
-            <a:r>
-              <a:rPr sz="1200" b="0" i="0">
+              <a:t>Salary relief</a:t>
+            </a:r>
+          </a:p>
+        </p:txBody>
+      </p:sp>
+      <p:sp>
+        <p:nvSpPr>
+          <p:cNvPr id="16" name="TextBox 15"/>
+          <p:cNvSpPr txBox="1"/>
+          <p:nvPr/>
+        </p:nvSpPr>
+        <p:spPr>
+          <a:xfrm>
+            <a:off x="8412480" y="3767328"/>
+            <a:ext cx="2999232" cy="1097280"/>
+          </a:xfrm>
+          <a:prstGeom prst="rect">
+            <a:avLst/>
+          </a:prstGeom>
+          <a:noFill/>
+        </p:spPr>
+        <p:txBody>
+          <a:bodyPr wrap="square" anchor="t" lIns="0" rIns="0" tIns="0" bIns="0">
+            <a:spAutoFit/>
+          </a:bodyPr>
+          <a:lstStyle/>
+          <a:p>
+            <a:pPr algn="l">
+              <a:lnSpc>
+                <a:spcPct val="110000"/>
+              </a:lnSpc>
+              <a:spcAft>
+                <a:spcPts val="400"/>
+              </a:spcAft>
+            </a:pPr>
+            <a:r>
+              <a:rPr sz="1280" b="0" i="0">
                 <a:solidFill>
                   <a:srgbClr val="93A0B6"/>
                 </a:solidFill>
                 <a:latin typeface="Arial"/>
               </a:rPr>
-              <a:t>.526, OF need</a:t>
-            </a:r>
-          </a:p>
-        </p:txBody>
-      </p:sp>
-      <p:sp>
-        <p:nvSpPr>
-          <p:cNvPr id="12" name="Rounded Rectangle 11"/>
-          <p:cNvSpPr/>
-          <p:nvPr/>
-        </p:nvSpPr>
-        <p:spPr>
-          <a:xfrm>
-            <a:off x="8183879" y="3922776"/>
-            <a:ext cx="128016" cy="128016"/>
-          </a:xfrm>
-          <a:prstGeom prst="roundRect">
-            <a:avLst>
-              <a:gd name="adj" fmla="val 18000"/>
-            </a:avLst>
-          </a:prstGeom>
-          <a:solidFill>
-            <a:srgbClr val="E8615A"/>
-          </a:solidFill>
-          <a:ln>
-            <a:noFill/>
-          </a:ln>
-          <a:effectLst/>
-        </p:spPr>
-        <p:style>
-          <a:lnRef idx="1">
-            <a:schemeClr val="accent1"/>
-          </a:lnRef>
-          <a:fillRef idx="3">
-            <a:schemeClr val="accent1"/>
-          </a:fillRef>
-          <a:effectRef idx="2">
-            <a:schemeClr val="accent1"/>
-          </a:effectRef>
-          <a:fontRef idx="minor">
-            <a:schemeClr val="lt1"/>
-          </a:fontRef>
-        </p:style>
-        <p:txBody>
-          <a:bodyPr rtlCol="0" anchor="ctr"/>
-          <a:lstStyle/>
-          <a:p>
-            <a:pPr algn="ctr"/>
-          </a:p>
-        </p:txBody>
-      </p:sp>
-      <p:sp>
-        <p:nvSpPr>
-          <p:cNvPr id="13" name="TextBox 12"/>
-          <p:cNvSpPr txBox="1"/>
-          <p:nvPr/>
-        </p:nvSpPr>
-        <p:spPr>
-          <a:xfrm>
-            <a:off x="8439911" y="3895344"/>
-            <a:ext cx="3566160" cy="457200"/>
+              <a:t>Attach Yoshida money where possible; free payroll for the 2027 window.</a:t>
+            </a:r>
+          </a:p>
+        </p:txBody>
+      </p:sp>
+      <p:sp>
+        <p:nvSpPr>
+          <p:cNvPr id="17" name="TextBox 16"/>
+          <p:cNvSpPr txBox="1"/>
+          <p:nvPr/>
+        </p:nvSpPr>
+        <p:spPr>
+          <a:xfrm>
+            <a:off x="566928" y="5257800"/>
+            <a:ext cx="11064240" cy="457200"/>
           </a:xfrm>
           <a:prstGeom prst="rect">
             <a:avLst/>
@@ -8065,89 +8064,29 @@
               </a:spcAft>
             </a:pPr>
             <a:r>
-              <a:rPr sz="1400" b="1" i="0">
+              <a:rPr sz="1400" b="1" i="1">
                 <a:solidFill>
                   <a:srgbClr val="EAF0F8"/>
                 </a:solidFill>
                 <a:latin typeface="Arial"/>
               </a:rPr>
-              <a:t>Astros  </a:t>
-            </a:r>
-            <a:r>
-              <a:rPr sz="1200" b="0" i="0">
+              <a:t>Keep the arms. Cash the outfield. </a:t>
+            </a:r>
+            <a:r>
+              <a:rPr sz="1400" b="0" i="1">
                 <a:solidFill>
                   <a:srgbClr val="93A0B6"/>
                 </a:solidFill>
                 <a:latin typeface="Arial"/>
               </a:rPr>
-              <a:t>fringe, weakest OF</a:t>
-            </a:r>
-          </a:p>
-        </p:txBody>
-      </p:sp>
-      <p:sp>
-        <p:nvSpPr>
-          <p:cNvPr id="14" name="TextBox 13"/>
-          <p:cNvSpPr txBox="1"/>
-          <p:nvPr/>
-        </p:nvSpPr>
-        <p:spPr>
-          <a:xfrm>
-            <a:off x="8183879" y="4709160"/>
-            <a:ext cx="3657600" cy="1005840"/>
-          </a:xfrm>
-          <a:prstGeom prst="rect">
-            <a:avLst/>
-          </a:prstGeom>
-          <a:noFill/>
-        </p:spPr>
-        <p:txBody>
-          <a:bodyPr wrap="square" anchor="t" lIns="0" rIns="0" tIns="0" bIns="0">
-            <a:spAutoFit/>
-          </a:bodyPr>
-          <a:lstStyle/>
-          <a:p>
-            <a:pPr algn="l">
-              <a:lnSpc>
-                <a:spcPct val="112000"/>
-              </a:lnSpc>
-              <a:spcAft>
-                <a:spcPts val="400"/>
-              </a:spcAft>
-            </a:pPr>
-            <a:r>
-              <a:rPr sz="1250" b="0" i="0">
-                <a:solidFill>
-                  <a:srgbClr val="D9E1EF"/>
-                </a:solidFill>
-                <a:latin typeface="Arial"/>
-              </a:rPr>
-              <a:t>Trade a redundant bat to a team that needs one, and take back the </a:t>
-            </a:r>
-            <a:r>
-              <a:rPr sz="1250" b="1" i="0">
-                <a:solidFill>
-                  <a:srgbClr val="58C08D"/>
-                </a:solidFill>
-                <a:latin typeface="Arial"/>
-              </a:rPr>
-              <a:t>hitting/youth</a:t>
-            </a:r>
-            <a:r>
-              <a:rPr sz="1250" b="0" i="0">
-                <a:solidFill>
-                  <a:srgbClr val="D9E1EF"/>
-                </a:solidFill>
-                <a:latin typeface="Arial"/>
-              </a:rPr>
-              <a:t> Boston is short on.</a:t>
-            </a:r>
-          </a:p>
-        </p:txBody>
-      </p:sp>
-      <p:sp>
-        <p:nvSpPr>
-          <p:cNvPr id="15" name="TextBox 14"/>
+              <a:t>Build the 2027 lineup, don't rent the 2026 one.</a:t>
+            </a:r>
+          </a:p>
+        </p:txBody>
+      </p:sp>
+      <p:sp>
+        <p:nvSpPr>
+          <p:cNvPr id="18" name="TextBox 17"/>
           <p:cNvSpPr txBox="1"/>
           <p:nvPr/>
         </p:nvSpPr>
@@ -8259,7 +8198,7 @@
                 </a:solidFill>
                 <a:latin typeface="Courier New"/>
               </a:rPr>
-              <a:t>// THE SEQUENCE</a:t>
+              <a:t>// THE MARKET</a:t>
             </a:r>
           </a:p>
         </p:txBody>
@@ -8301,21 +8240,87 @@
                 </a:solidFill>
                 <a:latin typeface="Arial"/>
               </a:rPr>
-              <a:t>Buy now, decide on Duran in the winter</a:t>
-            </a:r>
-          </a:p>
-        </p:txBody>
-      </p:sp>
-      <p:sp>
-        <p:nvSpPr>
-          <p:cNvPr id="4" name="Rounded Rectangle 3"/>
+              <a:t>Who pays: contenders with a hole in the outfield</a:t>
+            </a:r>
+          </a:p>
+        </p:txBody>
+      </p:sp>
+      <p:pic>
+        <p:nvPicPr>
+          <p:cNvPr id="4" name="Picture 3" descr="08_trade_fit_targets.png"/>
+          <p:cNvPicPr>
+            <a:picLocks noChangeAspect="1"/>
+          </p:cNvPicPr>
+          <p:nvPr/>
+        </p:nvPicPr>
+        <p:blipFill>
+          <a:blip r:embed="rId2"/>
+          <a:stretch>
+            <a:fillRect/>
+          </a:stretch>
+        </p:blipFill>
+        <p:spPr>
+          <a:xfrm>
+            <a:off x="757237" y="1463040"/>
+            <a:ext cx="6715125" cy="4297680"/>
+          </a:xfrm>
+          <a:prstGeom prst="rect">
+            <a:avLst/>
+          </a:prstGeom>
+        </p:spPr>
+      </p:pic>
+      <p:sp>
+        <p:nvSpPr>
+          <p:cNvPr id="5" name="TextBox 4"/>
+          <p:cNvSpPr txBox="1"/>
+          <p:nvPr/>
+        </p:nvSpPr>
+        <p:spPr>
+          <a:xfrm>
+            <a:off x="8183879" y="1691640"/>
+            <a:ext cx="3657600" cy="457200"/>
+          </a:xfrm>
+          <a:prstGeom prst="rect">
+            <a:avLst/>
+          </a:prstGeom>
+          <a:noFill/>
+        </p:spPr>
+        <p:txBody>
+          <a:bodyPr wrap="square" anchor="t" lIns="0" rIns="0" tIns="0" bIns="0">
+            <a:spAutoFit/>
+          </a:bodyPr>
+          <a:lstStyle/>
+          <a:p>
+            <a:pPr algn="l">
+              <a:lnSpc>
+                <a:spcPct val="100000"/>
+              </a:lnSpc>
+              <a:spcAft>
+                <a:spcPts val="0"/>
+              </a:spcAft>
+            </a:pPr>
+            <a:r>
+              <a:rPr sz="1500" b="1" i="0">
+                <a:solidFill>
+                  <a:srgbClr val="EAF0F8"/>
+                </a:solidFill>
+                <a:latin typeface="Arial"/>
+              </a:rPr>
+              <a:t>Best-fit buyers</a:t>
+            </a:r>
+          </a:p>
+        </p:txBody>
+      </p:sp>
+      <p:sp>
+        <p:nvSpPr>
+          <p:cNvPr id="6" name="Rounded Rectangle 5"/>
           <p:cNvSpPr/>
           <p:nvPr/>
         </p:nvSpPr>
         <p:spPr>
           <a:xfrm>
-            <a:off x="640080" y="1801368"/>
-            <a:ext cx="457200" cy="457200"/>
+            <a:off x="8183879" y="2221991"/>
+            <a:ext cx="128016" cy="128016"/>
           </a:xfrm>
           <a:prstGeom prst="roundRect">
             <a:avLst>
@@ -8345,93 +8350,74 @@
           </a:fontRef>
         </p:style>
         <p:txBody>
-          <a:bodyPr rtlCol="0" anchor="ctr" wrap="none"/>
+          <a:bodyPr rtlCol="0" anchor="ctr"/>
           <a:lstStyle/>
           <a:p>
             <a:pPr algn="ctr"/>
-            <a:r>
-              <a:rPr sz="1800" b="1">
-                <a:solidFill>
-                  <a:srgbClr val="0B1220"/>
-                </a:solidFill>
-                <a:latin typeface="Courier New"/>
-              </a:rPr>
-              <a:t>1</a:t>
-            </a:r>
-          </a:p>
-        </p:txBody>
-      </p:sp>
-      <p:sp>
-        <p:nvSpPr>
-          <p:cNvPr id="5" name="TextBox 4"/>
-          <p:cNvSpPr txBox="1"/>
-          <p:nvPr/>
-        </p:nvSpPr>
-        <p:spPr>
-          <a:xfrm>
-            <a:off x="1280160" y="1783080"/>
-            <a:ext cx="6126480" cy="1005840"/>
-          </a:xfrm>
-          <a:prstGeom prst="rect">
-            <a:avLst/>
-          </a:prstGeom>
-          <a:noFill/>
-        </p:spPr>
-        <p:txBody>
-          <a:bodyPr wrap="square" anchor="t" lIns="0" rIns="0" tIns="0" bIns="0">
-            <a:spAutoFit/>
-          </a:bodyPr>
-          <a:lstStyle/>
-          <a:p>
-            <a:pPr algn="l">
-              <a:lnSpc>
-                <a:spcPct val="108000"/>
-              </a:lnSpc>
-              <a:spcAft>
-                <a:spcPts val="200"/>
-              </a:spcAft>
-            </a:pPr>
-            <a:r>
-              <a:rPr sz="1700" b="1" i="0">
+          </a:p>
+        </p:txBody>
+      </p:sp>
+      <p:sp>
+        <p:nvSpPr>
+          <p:cNvPr id="7" name="TextBox 6"/>
+          <p:cNvSpPr txBox="1"/>
+          <p:nvPr/>
+        </p:nvSpPr>
+        <p:spPr>
+          <a:xfrm>
+            <a:off x="8439911" y="2194560"/>
+            <a:ext cx="3566160" cy="457200"/>
+          </a:xfrm>
+          <a:prstGeom prst="rect">
+            <a:avLst/>
+          </a:prstGeom>
+          <a:noFill/>
+        </p:spPr>
+        <p:txBody>
+          <a:bodyPr wrap="square" anchor="t" lIns="0" rIns="0" tIns="0" bIns="0">
+            <a:spAutoFit/>
+          </a:bodyPr>
+          <a:lstStyle/>
+          <a:p>
+            <a:pPr algn="l">
+              <a:lnSpc>
+                <a:spcPct val="100000"/>
+              </a:lnSpc>
+              <a:spcAft>
+                <a:spcPts val="0"/>
+              </a:spcAft>
+            </a:pPr>
+            <a:r>
+              <a:rPr sz="1400" b="1" i="0">
                 <a:solidFill>
                   <a:srgbClr val="EAF0F8"/>
                 </a:solidFill>
                 <a:latin typeface="Arial"/>
               </a:rPr>
-              <a:t>At the deadline: buy targeted</a:t>
-            </a:r>
-          </a:p>
-          <a:p>
-            <a:pPr algn="l">
-              <a:lnSpc>
-                <a:spcPct val="108000"/>
-              </a:lnSpc>
-              <a:spcAft>
-                <a:spcPts val="200"/>
-              </a:spcAft>
-            </a:pPr>
-            <a:r>
-              <a:rPr sz="1350" b="0" i="0">
+              <a:t>Phillies  </a:t>
+            </a:r>
+            <a:r>
+              <a:rPr sz="1200" b="0" i="0">
                 <a:solidFill>
                   <a:srgbClr val="93A0B6"/>
                 </a:solidFill>
                 <a:latin typeface="Arial"/>
               </a:rPr>
-              <a:t>A controllable infield bat and a reliever, funded from the pitching surplus. Keep the vets, they're playoff innings now.</a:t>
-            </a:r>
-          </a:p>
-        </p:txBody>
-      </p:sp>
-      <p:sp>
-        <p:nvSpPr>
-          <p:cNvPr id="6" name="Rounded Rectangle 5"/>
+              <a:t>.557, 84 OF wRC+</a:t>
+            </a:r>
+          </a:p>
+        </p:txBody>
+      </p:sp>
+      <p:sp>
+        <p:nvSpPr>
+          <p:cNvPr id="8" name="Rounded Rectangle 7"/>
           <p:cNvSpPr/>
           <p:nvPr/>
         </p:nvSpPr>
         <p:spPr>
           <a:xfrm>
-            <a:off x="640080" y="2971800"/>
-            <a:ext cx="457200" cy="457200"/>
+            <a:off x="8183879" y="2788920"/>
+            <a:ext cx="128016" cy="128016"/>
           </a:xfrm>
           <a:prstGeom prst="roundRect">
             <a:avLst>
@@ -8461,93 +8447,74 @@
           </a:fontRef>
         </p:style>
         <p:txBody>
-          <a:bodyPr rtlCol="0" anchor="ctr" wrap="none"/>
+          <a:bodyPr rtlCol="0" anchor="ctr"/>
           <a:lstStyle/>
           <a:p>
             <a:pPr algn="ctr"/>
-            <a:r>
-              <a:rPr sz="1800" b="1">
-                <a:solidFill>
-                  <a:srgbClr val="0B1220"/>
-                </a:solidFill>
-                <a:latin typeface="Courier New"/>
-              </a:rPr>
-              <a:t>2</a:t>
-            </a:r>
-          </a:p>
-        </p:txBody>
-      </p:sp>
-      <p:sp>
-        <p:nvSpPr>
-          <p:cNvPr id="7" name="TextBox 6"/>
-          <p:cNvSpPr txBox="1"/>
-          <p:nvPr/>
-        </p:nvSpPr>
-        <p:spPr>
-          <a:xfrm>
-            <a:off x="1280160" y="2953512"/>
-            <a:ext cx="6126480" cy="1005840"/>
-          </a:xfrm>
-          <a:prstGeom prst="rect">
-            <a:avLst/>
-          </a:prstGeom>
-          <a:noFill/>
-        </p:spPr>
-        <p:txBody>
-          <a:bodyPr wrap="square" anchor="t" lIns="0" rIns="0" tIns="0" bIns="0">
-            <a:spAutoFit/>
-          </a:bodyPr>
-          <a:lstStyle/>
-          <a:p>
-            <a:pPr algn="l">
-              <a:lnSpc>
-                <a:spcPct val="108000"/>
-              </a:lnSpc>
-              <a:spcAft>
-                <a:spcPts val="200"/>
-              </a:spcAft>
-            </a:pPr>
-            <a:r>
-              <a:rPr sz="1700" b="1" i="0">
+          </a:p>
+        </p:txBody>
+      </p:sp>
+      <p:sp>
+        <p:nvSpPr>
+          <p:cNvPr id="9" name="TextBox 8"/>
+          <p:cNvSpPr txBox="1"/>
+          <p:nvPr/>
+        </p:nvSpPr>
+        <p:spPr>
+          <a:xfrm>
+            <a:off x="8439911" y="2761488"/>
+            <a:ext cx="3566160" cy="457200"/>
+          </a:xfrm>
+          <a:prstGeom prst="rect">
+            <a:avLst/>
+          </a:prstGeom>
+          <a:noFill/>
+        </p:spPr>
+        <p:txBody>
+          <a:bodyPr wrap="square" anchor="t" lIns="0" rIns="0" tIns="0" bIns="0">
+            <a:spAutoFit/>
+          </a:bodyPr>
+          <a:lstStyle/>
+          <a:p>
+            <a:pPr algn="l">
+              <a:lnSpc>
+                <a:spcPct val="100000"/>
+              </a:lnSpc>
+              <a:spcAft>
+                <a:spcPts val="0"/>
+              </a:spcAft>
+            </a:pPr>
+            <a:r>
+              <a:rPr sz="1400" b="1" i="0">
                 <a:solidFill>
                   <a:srgbClr val="EAF0F8"/>
                 </a:solidFill>
                 <a:latin typeface="Arial"/>
               </a:rPr>
-              <a:t>Hold Duran through August</a:t>
-            </a:r>
-          </a:p>
-          <a:p>
-            <a:pPr algn="l">
-              <a:lnSpc>
-                <a:spcPct val="108000"/>
-              </a:lnSpc>
-              <a:spcAft>
-                <a:spcPts val="200"/>
-              </a:spcAft>
-            </a:pPr>
-            <a:r>
-              <a:rPr sz="1350" b="0" i="0">
+              <a:t>Rays  </a:t>
+            </a:r>
+            <a:r>
+              <a:rPr sz="1200" b="0" i="0">
                 <a:solidFill>
                   <a:srgbClr val="93A0B6"/>
                 </a:solidFill>
                 <a:latin typeface="Arial"/>
               </a:rPr>
-              <a:t>His value is at its nadir and his July contact quality (~.35 xwOBA) is already surging. Selling now cashes the slump.</a:t>
-            </a:r>
-          </a:p>
-        </p:txBody>
-      </p:sp>
-      <p:sp>
-        <p:nvSpPr>
-          <p:cNvPr id="8" name="Rounded Rectangle 7"/>
+              <a:t>.596, 88 OF wRC+</a:t>
+            </a:r>
+          </a:p>
+        </p:txBody>
+      </p:sp>
+      <p:sp>
+        <p:nvSpPr>
+          <p:cNvPr id="10" name="Rounded Rectangle 9"/>
           <p:cNvSpPr/>
           <p:nvPr/>
         </p:nvSpPr>
         <p:spPr>
           <a:xfrm>
-            <a:off x="640080" y="4142231"/>
-            <a:ext cx="457200" cy="457200"/>
+            <a:off x="8183879" y="3355847"/>
+            <a:ext cx="128016" cy="128016"/>
           </a:xfrm>
           <a:prstGeom prst="roundRect">
             <a:avLst>
@@ -8577,101 +8544,82 @@
           </a:fontRef>
         </p:style>
         <p:txBody>
-          <a:bodyPr rtlCol="0" anchor="ctr" wrap="none"/>
+          <a:bodyPr rtlCol="0" anchor="ctr"/>
           <a:lstStyle/>
           <a:p>
             <a:pPr algn="ctr"/>
-            <a:r>
-              <a:rPr sz="1800" b="1">
-                <a:solidFill>
-                  <a:srgbClr val="0B1220"/>
-                </a:solidFill>
-                <a:latin typeface="Courier New"/>
-              </a:rPr>
-              <a:t>3</a:t>
-            </a:r>
-          </a:p>
-        </p:txBody>
-      </p:sp>
-      <p:sp>
-        <p:nvSpPr>
-          <p:cNvPr id="9" name="TextBox 8"/>
-          <p:cNvSpPr txBox="1"/>
-          <p:nvPr/>
-        </p:nvSpPr>
-        <p:spPr>
-          <a:xfrm>
-            <a:off x="1280160" y="4123944"/>
-            <a:ext cx="6126480" cy="1005840"/>
-          </a:xfrm>
-          <a:prstGeom prst="rect">
-            <a:avLst/>
-          </a:prstGeom>
-          <a:noFill/>
-        </p:spPr>
-        <p:txBody>
-          <a:bodyPr wrap="square" anchor="t" lIns="0" rIns="0" tIns="0" bIns="0">
-            <a:spAutoFit/>
-          </a:bodyPr>
-          <a:lstStyle/>
-          <a:p>
-            <a:pPr algn="l">
-              <a:lnSpc>
-                <a:spcPct val="108000"/>
-              </a:lnSpc>
-              <a:spcAft>
-                <a:spcPts val="200"/>
-              </a:spcAft>
-            </a:pPr>
-            <a:r>
-              <a:rPr sz="1700" b="1" i="0">
+          </a:p>
+        </p:txBody>
+      </p:sp>
+      <p:sp>
+        <p:nvSpPr>
+          <p:cNvPr id="11" name="TextBox 10"/>
+          <p:cNvSpPr txBox="1"/>
+          <p:nvPr/>
+        </p:nvSpPr>
+        <p:spPr>
+          <a:xfrm>
+            <a:off x="8439911" y="3328415"/>
+            <a:ext cx="3566160" cy="457200"/>
+          </a:xfrm>
+          <a:prstGeom prst="rect">
+            <a:avLst/>
+          </a:prstGeom>
+          <a:noFill/>
+        </p:spPr>
+        <p:txBody>
+          <a:bodyPr wrap="square" anchor="t" lIns="0" rIns="0" tIns="0" bIns="0">
+            <a:spAutoFit/>
+          </a:bodyPr>
+          <a:lstStyle/>
+          <a:p>
+            <a:pPr algn="l">
+              <a:lnSpc>
+                <a:spcPct val="100000"/>
+              </a:lnSpc>
+              <a:spcAft>
+                <a:spcPts val="0"/>
+              </a:spcAft>
+            </a:pPr>
+            <a:r>
+              <a:rPr sz="1400" b="1" i="0">
                 <a:solidFill>
                   <a:srgbClr val="EAF0F8"/>
                 </a:solidFill>
                 <a:latin typeface="Arial"/>
               </a:rPr>
-              <a:t>Winter: re-price, then choose</a:t>
-            </a:r>
-          </a:p>
-          <a:p>
-            <a:pPr algn="l">
-              <a:lnSpc>
-                <a:spcPct val="108000"/>
-              </a:lnSpc>
-              <a:spcAft>
-                <a:spcPts val="200"/>
-              </a:spcAft>
-            </a:pPr>
-            <a:r>
-              <a:rPr sz="1350" b="0" i="0">
+              <a:t>Cardinals  </a:t>
+            </a:r>
+            <a:r>
+              <a:rPr sz="1200" b="0" i="0">
                 <a:solidFill>
                   <a:srgbClr val="93A0B6"/>
                 </a:solidFill>
                 <a:latin typeface="Arial"/>
               </a:rPr>
-              <a:t>Anthony healthy, jam returns. Rebound confirmed → extend or trade at full price. Erosion persists → sell at market. Either way, the 2027 OF is Anthony / Rafaela / Abreu.</a:t>
-            </a:r>
-          </a:p>
-        </p:txBody>
-      </p:sp>
-      <p:sp>
-        <p:nvSpPr>
-          <p:cNvPr id="10" name="Rounded Rectangle 9"/>
+              <a:t>.526, OF need</a:t>
+            </a:r>
+          </a:p>
+        </p:txBody>
+      </p:sp>
+      <p:sp>
+        <p:nvSpPr>
+          <p:cNvPr id="12" name="Rounded Rectangle 11"/>
           <p:cNvSpPr/>
           <p:nvPr/>
         </p:nvSpPr>
         <p:spPr>
           <a:xfrm>
-            <a:off x="7818120" y="1783080"/>
-            <a:ext cx="3794760" cy="3337560"/>
+            <a:off x="8183879" y="3922776"/>
+            <a:ext cx="128016" cy="128016"/>
           </a:xfrm>
           <a:prstGeom prst="roundRect">
             <a:avLst>
-              <a:gd name="adj" fmla="val 6000"/>
+              <a:gd name="adj" fmla="val 18000"/>
             </a:avLst>
           </a:prstGeom>
           <a:solidFill>
-            <a:srgbClr val="1A2740"/>
+            <a:srgbClr val="E8615A"/>
           </a:solidFill>
           <a:ln>
             <a:noFill/>
@@ -8702,14 +8650,14 @@
       </p:sp>
       <p:sp>
         <p:nvSpPr>
-          <p:cNvPr id="11" name="TextBox 10"/>
-          <p:cNvSpPr txBox="1"/>
-          <p:nvPr/>
-        </p:nvSpPr>
-        <p:spPr>
-          <a:xfrm>
-            <a:off x="8092440" y="2011680"/>
-            <a:ext cx="3291840" cy="365760"/>
+          <p:cNvPr id="13" name="TextBox 12"/>
+          <p:cNvSpPr txBox="1"/>
+          <p:nvPr/>
+        </p:nvSpPr>
+        <p:spPr>
+          <a:xfrm>
+            <a:off x="8439911" y="3895344"/>
+            <a:ext cx="3566160" cy="457200"/>
           </a:xfrm>
           <a:prstGeom prst="rect">
             <a:avLst/>
@@ -8731,196 +8679,82 @@
               </a:spcAft>
             </a:pPr>
             <a:r>
+              <a:rPr sz="1400" b="1" i="0">
+                <a:solidFill>
+                  <a:srgbClr val="EAF0F8"/>
+                </a:solidFill>
+                <a:latin typeface="Arial"/>
+              </a:rPr>
+              <a:t>Astros  </a:t>
+            </a:r>
+            <a:r>
+              <a:rPr sz="1200" b="0" i="0">
+                <a:solidFill>
+                  <a:srgbClr val="93A0B6"/>
+                </a:solidFill>
+                <a:latin typeface="Arial"/>
+              </a:rPr>
+              <a:t>fringe, weakest OF</a:t>
+            </a:r>
+          </a:p>
+        </p:txBody>
+      </p:sp>
+      <p:sp>
+        <p:nvSpPr>
+          <p:cNvPr id="14" name="TextBox 13"/>
+          <p:cNvSpPr txBox="1"/>
+          <p:nvPr/>
+        </p:nvSpPr>
+        <p:spPr>
+          <a:xfrm>
+            <a:off x="8183879" y="4709160"/>
+            <a:ext cx="3657600" cy="1005840"/>
+          </a:xfrm>
+          <a:prstGeom prst="rect">
+            <a:avLst/>
+          </a:prstGeom>
+          <a:noFill/>
+        </p:spPr>
+        <p:txBody>
+          <a:bodyPr wrap="square" anchor="t" lIns="0" rIns="0" tIns="0" bIns="0">
+            <a:spAutoFit/>
+          </a:bodyPr>
+          <a:lstStyle/>
+          <a:p>
+            <a:pPr algn="l">
+              <a:lnSpc>
+                <a:spcPct val="112000"/>
+              </a:lnSpc>
+              <a:spcAft>
+                <a:spcPts val="400"/>
+              </a:spcAft>
+            </a:pPr>
+            <a:r>
+              <a:rPr sz="1250" b="0" i="0">
+                <a:solidFill>
+                  <a:srgbClr val="D9E1EF"/>
+                </a:solidFill>
+                <a:latin typeface="Arial"/>
+              </a:rPr>
+              <a:t>Trade a redundant bat to a team that needs one, and take back the </a:t>
+            </a:r>
+            <a:r>
               <a:rPr sz="1250" b="1" i="0">
                 <a:solidFill>
-                  <a:srgbClr val="C9D2E3"/>
-                </a:solidFill>
-                <a:latin typeface="Arial"/>
-              </a:rPr>
-              <a:t>THE RETURN</a:t>
-            </a:r>
-          </a:p>
-        </p:txBody>
-      </p:sp>
-      <p:sp>
-        <p:nvSpPr>
-          <p:cNvPr id="12" name="TextBox 11"/>
-          <p:cNvSpPr txBox="1"/>
-          <p:nvPr/>
-        </p:nvSpPr>
-        <p:spPr>
-          <a:xfrm>
-            <a:off x="8092440" y="2487168"/>
-            <a:ext cx="3291840" cy="914400"/>
-          </a:xfrm>
-          <a:prstGeom prst="rect">
-            <a:avLst/>
-          </a:prstGeom>
-          <a:noFill/>
-        </p:spPr>
-        <p:txBody>
-          <a:bodyPr wrap="square" anchor="t" lIns="0" rIns="0" tIns="0" bIns="0">
-            <a:spAutoFit/>
-          </a:bodyPr>
-          <a:lstStyle/>
-          <a:p>
-            <a:pPr algn="l">
-              <a:lnSpc>
-                <a:spcPct val="105000"/>
-              </a:lnSpc>
-              <a:spcAft>
-                <a:spcPts val="200"/>
-              </a:spcAft>
-            </a:pPr>
-            <a:r>
-              <a:rPr sz="1300" b="1" i="0">
-                <a:solidFill>
-                  <a:srgbClr val="F0B8BC"/>
-                </a:solidFill>
-                <a:latin typeface="Arial"/>
-              </a:rPr>
-              <a:t>Sell now (nadir)</a:t>
-            </a:r>
-          </a:p>
-          <a:p>
-            <a:pPr algn="l">
-              <a:lnSpc>
-                <a:spcPct val="105000"/>
-              </a:lnSpc>
-              <a:spcAft>
-                <a:spcPts val="200"/>
-              </a:spcAft>
-            </a:pPr>
-            <a:r>
-              <a:rPr sz="1400" b="0" i="0">
-                <a:solidFill>
-                  <a:srgbClr val="F4F7FC"/>
-                </a:solidFill>
-                <a:latin typeface="Arial"/>
-              </a:rPr>
-              <a:t>~$10–15M · a 45-FV bat</a:t>
-            </a:r>
-          </a:p>
-        </p:txBody>
-      </p:sp>
-      <p:sp>
-        <p:nvSpPr>
-          <p:cNvPr id="13" name="TextBox 12"/>
-          <p:cNvSpPr txBox="1"/>
-          <p:nvPr/>
-        </p:nvSpPr>
-        <p:spPr>
-          <a:xfrm>
-            <a:off x="8092440" y="3520440"/>
-            <a:ext cx="3291840" cy="1005840"/>
-          </a:xfrm>
-          <a:prstGeom prst="rect">
-            <a:avLst/>
-          </a:prstGeom>
-          <a:noFill/>
-        </p:spPr>
-        <p:txBody>
-          <a:bodyPr wrap="square" anchor="t" lIns="0" rIns="0" tIns="0" bIns="0">
-            <a:spAutoFit/>
-          </a:bodyPr>
-          <a:lstStyle/>
-          <a:p>
-            <a:pPr algn="l">
-              <a:lnSpc>
-                <a:spcPct val="105000"/>
-              </a:lnSpc>
-              <a:spcAft>
-                <a:spcPts val="200"/>
-              </a:spcAft>
-            </a:pPr>
-            <a:r>
-              <a:rPr sz="1300" b="1" i="0">
-                <a:solidFill>
-                  <a:srgbClr val="A9E5B5"/>
-                </a:solidFill>
-                <a:latin typeface="Arial"/>
-              </a:rPr>
-              <a:t>Sell after rebound</a:t>
-            </a:r>
-          </a:p>
-          <a:p>
-            <a:pPr algn="l">
-              <a:lnSpc>
-                <a:spcPct val="105000"/>
-              </a:lnSpc>
-              <a:spcAft>
-                <a:spcPts val="200"/>
-              </a:spcAft>
-            </a:pPr>
-            <a:r>
-              <a:rPr sz="1400" b="0" i="0">
-                <a:solidFill>
-                  <a:srgbClr val="F4F7FC"/>
-                </a:solidFill>
-                <a:latin typeface="Arial"/>
-              </a:rPr>
-              <a:t>~$28M · a 50-FV, top-100</a:t>
-            </a:r>
-          </a:p>
-          <a:p>
-            <a:pPr algn="l">
-              <a:lnSpc>
-                <a:spcPct val="105000"/>
-              </a:lnSpc>
-              <a:spcAft>
-                <a:spcPts val="200"/>
-              </a:spcAft>
-            </a:pPr>
-            <a:r>
-              <a:rPr sz="1400" b="0" i="0">
-                <a:solidFill>
-                  <a:srgbClr val="F4F7FC"/>
-                </a:solidFill>
-                <a:latin typeface="Arial"/>
-              </a:rPr>
-              <a:t>controllable talent</a:t>
-            </a:r>
-          </a:p>
-        </p:txBody>
-      </p:sp>
-      <p:sp>
-        <p:nvSpPr>
-          <p:cNvPr id="14" name="TextBox 13"/>
-          <p:cNvSpPr txBox="1"/>
-          <p:nvPr/>
-        </p:nvSpPr>
-        <p:spPr>
-          <a:xfrm>
-            <a:off x="8092440" y="4617720"/>
-            <a:ext cx="3291840" cy="457200"/>
-          </a:xfrm>
-          <a:prstGeom prst="rect">
-            <a:avLst/>
-          </a:prstGeom>
-          <a:noFill/>
-        </p:spPr>
-        <p:txBody>
-          <a:bodyPr wrap="square" anchor="t" lIns="0" rIns="0" tIns="0" bIns="0">
-            <a:spAutoFit/>
-          </a:bodyPr>
-          <a:lstStyle/>
-          <a:p>
-            <a:pPr algn="l">
-              <a:lnSpc>
-                <a:spcPct val="105000"/>
-              </a:lnSpc>
-              <a:spcAft>
-                <a:spcPts val="400"/>
-              </a:spcAft>
-            </a:pPr>
-            <a:r>
-              <a:rPr sz="1150" b="0" i="1">
-                <a:solidFill>
-                  <a:srgbClr val="C9D2E3"/>
-                </a:solidFill>
-                <a:latin typeface="Arial"/>
-              </a:rPr>
-              <a:t>One grade of return = the reason to wait.</a:t>
+                  <a:srgbClr val="58C08D"/>
+                </a:solidFill>
+                <a:latin typeface="Arial"/>
+              </a:rPr>
+              <a:t>hitting/youth</a:t>
+            </a:r>
+            <a:r>
+              <a:rPr sz="1250" b="0" i="0">
+                <a:solidFill>
+                  <a:srgbClr val="D9E1EF"/>
+                </a:solidFill>
+                <a:latin typeface="Arial"/>
+              </a:rPr>
+              <a:t> Boston is short on.</a:t>
             </a:r>
           </a:p>
         </p:txBody>
@@ -8985,6 +8819,786 @@
 </file>
 
 <file path=ppt/slides/slide18.xml><?xml version="1.0" encoding="utf-8"?>
+<p:sld xmlns:a="http://schemas.openxmlformats.org/drawingml/2006/main" xmlns:p="http://schemas.openxmlformats.org/presentationml/2006/main" xmlns:r="http://schemas.openxmlformats.org/officeDocument/2006/relationships">
+  <p:cSld>
+    <p:bg>
+      <p:bgPr>
+        <a:solidFill>
+          <a:srgbClr val="0B1220"/>
+        </a:solidFill>
+        <a:effectLst/>
+      </p:bgPr>
+    </p:bg>
+    <p:spTree>
+      <p:nvGrpSpPr>
+        <p:cNvPr id="1" name=""/>
+        <p:cNvGrpSpPr/>
+        <p:nvPr/>
+      </p:nvGrpSpPr>
+      <p:grpSpPr/>
+      <p:sp>
+        <p:nvSpPr>
+          <p:cNvPr id="2" name="TextBox 1"/>
+          <p:cNvSpPr txBox="1"/>
+          <p:nvPr/>
+        </p:nvSpPr>
+        <p:spPr>
+          <a:xfrm>
+            <a:off x="566928" y="384048"/>
+            <a:ext cx="10058400" cy="274320"/>
+          </a:xfrm>
+          <a:prstGeom prst="rect">
+            <a:avLst/>
+          </a:prstGeom>
+          <a:noFill/>
+        </p:spPr>
+        <p:txBody>
+          <a:bodyPr wrap="square" anchor="t" lIns="0" rIns="0" tIns="0" bIns="0">
+            <a:spAutoFit/>
+          </a:bodyPr>
+          <a:lstStyle/>
+          <a:p>
+            <a:pPr algn="l">
+              <a:lnSpc>
+                <a:spcPct val="100000"/>
+              </a:lnSpc>
+              <a:spcAft>
+                <a:spcPts val="0"/>
+              </a:spcAft>
+            </a:pPr>
+            <a:r>
+              <a:rPr sz="1200" b="1" i="0">
+                <a:solidFill>
+                  <a:srgbClr val="E8615A"/>
+                </a:solidFill>
+                <a:latin typeface="Courier New"/>
+              </a:rPr>
+              <a:t>// THE SEQUENCE</a:t>
+            </a:r>
+          </a:p>
+        </p:txBody>
+      </p:sp>
+      <p:sp>
+        <p:nvSpPr>
+          <p:cNvPr id="3" name="TextBox 2"/>
+          <p:cNvSpPr txBox="1"/>
+          <p:nvPr/>
+        </p:nvSpPr>
+        <p:spPr>
+          <a:xfrm>
+            <a:off x="566928" y="658368"/>
+            <a:ext cx="11064240" cy="868680"/>
+          </a:xfrm>
+          <a:prstGeom prst="rect">
+            <a:avLst/>
+          </a:prstGeom>
+          <a:noFill/>
+        </p:spPr>
+        <p:txBody>
+          <a:bodyPr wrap="square" anchor="t" lIns="0" rIns="0" tIns="0" bIns="0">
+            <a:spAutoFit/>
+          </a:bodyPr>
+          <a:lstStyle/>
+          <a:p>
+            <a:pPr algn="l">
+              <a:lnSpc>
+                <a:spcPct val="100000"/>
+              </a:lnSpc>
+              <a:spcAft>
+                <a:spcPts val="0"/>
+              </a:spcAft>
+            </a:pPr>
+            <a:r>
+              <a:rPr sz="3000" b="1" i="0">
+                <a:solidFill>
+                  <a:srgbClr val="EAF0F8"/>
+                </a:solidFill>
+                <a:latin typeface="Arial"/>
+              </a:rPr>
+              <a:t>Buy now, decide on Duran in the winter</a:t>
+            </a:r>
+          </a:p>
+        </p:txBody>
+      </p:sp>
+      <p:sp>
+        <p:nvSpPr>
+          <p:cNvPr id="4" name="Rounded Rectangle 3"/>
+          <p:cNvSpPr/>
+          <p:nvPr/>
+        </p:nvSpPr>
+        <p:spPr>
+          <a:xfrm>
+            <a:off x="640080" y="1801368"/>
+            <a:ext cx="457200" cy="457200"/>
+          </a:xfrm>
+          <a:prstGeom prst="roundRect">
+            <a:avLst>
+              <a:gd name="adj" fmla="val 18000"/>
+            </a:avLst>
+          </a:prstGeom>
+          <a:solidFill>
+            <a:srgbClr val="E8615A"/>
+          </a:solidFill>
+          <a:ln>
+            <a:noFill/>
+          </a:ln>
+          <a:effectLst/>
+        </p:spPr>
+        <p:style>
+          <a:lnRef idx="1">
+            <a:schemeClr val="accent1"/>
+          </a:lnRef>
+          <a:fillRef idx="3">
+            <a:schemeClr val="accent1"/>
+          </a:fillRef>
+          <a:effectRef idx="2">
+            <a:schemeClr val="accent1"/>
+          </a:effectRef>
+          <a:fontRef idx="minor">
+            <a:schemeClr val="lt1"/>
+          </a:fontRef>
+        </p:style>
+        <p:txBody>
+          <a:bodyPr rtlCol="0" anchor="ctr" wrap="none"/>
+          <a:lstStyle/>
+          <a:p>
+            <a:pPr algn="ctr"/>
+            <a:r>
+              <a:rPr sz="1800" b="1">
+                <a:solidFill>
+                  <a:srgbClr val="0B1220"/>
+                </a:solidFill>
+                <a:latin typeface="Courier New"/>
+              </a:rPr>
+              <a:t>1</a:t>
+            </a:r>
+          </a:p>
+        </p:txBody>
+      </p:sp>
+      <p:sp>
+        <p:nvSpPr>
+          <p:cNvPr id="5" name="TextBox 4"/>
+          <p:cNvSpPr txBox="1"/>
+          <p:nvPr/>
+        </p:nvSpPr>
+        <p:spPr>
+          <a:xfrm>
+            <a:off x="1280160" y="1783080"/>
+            <a:ext cx="6126480" cy="1005840"/>
+          </a:xfrm>
+          <a:prstGeom prst="rect">
+            <a:avLst/>
+          </a:prstGeom>
+          <a:noFill/>
+        </p:spPr>
+        <p:txBody>
+          <a:bodyPr wrap="square" anchor="t" lIns="0" rIns="0" tIns="0" bIns="0">
+            <a:spAutoFit/>
+          </a:bodyPr>
+          <a:lstStyle/>
+          <a:p>
+            <a:pPr algn="l">
+              <a:lnSpc>
+                <a:spcPct val="108000"/>
+              </a:lnSpc>
+              <a:spcAft>
+                <a:spcPts val="200"/>
+              </a:spcAft>
+            </a:pPr>
+            <a:r>
+              <a:rPr sz="1700" b="1" i="0">
+                <a:solidFill>
+                  <a:srgbClr val="EAF0F8"/>
+                </a:solidFill>
+                <a:latin typeface="Arial"/>
+              </a:rPr>
+              <a:t>At the deadline: buy targeted</a:t>
+            </a:r>
+          </a:p>
+          <a:p>
+            <a:pPr algn="l">
+              <a:lnSpc>
+                <a:spcPct val="108000"/>
+              </a:lnSpc>
+              <a:spcAft>
+                <a:spcPts val="200"/>
+              </a:spcAft>
+            </a:pPr>
+            <a:r>
+              <a:rPr sz="1350" b="0" i="0">
+                <a:solidFill>
+                  <a:srgbClr val="93A0B6"/>
+                </a:solidFill>
+                <a:latin typeface="Arial"/>
+              </a:rPr>
+              <a:t>A controllable infield bat and a reliever, funded from the pitching surplus. Keep the vets, they're playoff innings now.</a:t>
+            </a:r>
+          </a:p>
+        </p:txBody>
+      </p:sp>
+      <p:sp>
+        <p:nvSpPr>
+          <p:cNvPr id="6" name="Rounded Rectangle 5"/>
+          <p:cNvSpPr/>
+          <p:nvPr/>
+        </p:nvSpPr>
+        <p:spPr>
+          <a:xfrm>
+            <a:off x="640080" y="2971800"/>
+            <a:ext cx="457200" cy="457200"/>
+          </a:xfrm>
+          <a:prstGeom prst="roundRect">
+            <a:avLst>
+              <a:gd name="adj" fmla="val 18000"/>
+            </a:avLst>
+          </a:prstGeom>
+          <a:solidFill>
+            <a:srgbClr val="E8615A"/>
+          </a:solidFill>
+          <a:ln>
+            <a:noFill/>
+          </a:ln>
+          <a:effectLst/>
+        </p:spPr>
+        <p:style>
+          <a:lnRef idx="1">
+            <a:schemeClr val="accent1"/>
+          </a:lnRef>
+          <a:fillRef idx="3">
+            <a:schemeClr val="accent1"/>
+          </a:fillRef>
+          <a:effectRef idx="2">
+            <a:schemeClr val="accent1"/>
+          </a:effectRef>
+          <a:fontRef idx="minor">
+            <a:schemeClr val="lt1"/>
+          </a:fontRef>
+        </p:style>
+        <p:txBody>
+          <a:bodyPr rtlCol="0" anchor="ctr" wrap="none"/>
+          <a:lstStyle/>
+          <a:p>
+            <a:pPr algn="ctr"/>
+            <a:r>
+              <a:rPr sz="1800" b="1">
+                <a:solidFill>
+                  <a:srgbClr val="0B1220"/>
+                </a:solidFill>
+                <a:latin typeface="Courier New"/>
+              </a:rPr>
+              <a:t>2</a:t>
+            </a:r>
+          </a:p>
+        </p:txBody>
+      </p:sp>
+      <p:sp>
+        <p:nvSpPr>
+          <p:cNvPr id="7" name="TextBox 6"/>
+          <p:cNvSpPr txBox="1"/>
+          <p:nvPr/>
+        </p:nvSpPr>
+        <p:spPr>
+          <a:xfrm>
+            <a:off x="1280160" y="2953512"/>
+            <a:ext cx="6126480" cy="1005840"/>
+          </a:xfrm>
+          <a:prstGeom prst="rect">
+            <a:avLst/>
+          </a:prstGeom>
+          <a:noFill/>
+        </p:spPr>
+        <p:txBody>
+          <a:bodyPr wrap="square" anchor="t" lIns="0" rIns="0" tIns="0" bIns="0">
+            <a:spAutoFit/>
+          </a:bodyPr>
+          <a:lstStyle/>
+          <a:p>
+            <a:pPr algn="l">
+              <a:lnSpc>
+                <a:spcPct val="108000"/>
+              </a:lnSpc>
+              <a:spcAft>
+                <a:spcPts val="200"/>
+              </a:spcAft>
+            </a:pPr>
+            <a:r>
+              <a:rPr sz="1700" b="1" i="0">
+                <a:solidFill>
+                  <a:srgbClr val="EAF0F8"/>
+                </a:solidFill>
+                <a:latin typeface="Arial"/>
+              </a:rPr>
+              <a:t>Hold Duran through August</a:t>
+            </a:r>
+          </a:p>
+          <a:p>
+            <a:pPr algn="l">
+              <a:lnSpc>
+                <a:spcPct val="108000"/>
+              </a:lnSpc>
+              <a:spcAft>
+                <a:spcPts val="200"/>
+              </a:spcAft>
+            </a:pPr>
+            <a:r>
+              <a:rPr sz="1350" b="0" i="0">
+                <a:solidFill>
+                  <a:srgbClr val="93A0B6"/>
+                </a:solidFill>
+                <a:latin typeface="Arial"/>
+              </a:rPr>
+              <a:t>His value is at its nadir and his July contact quality (~.35 xwOBA) is already surging. Selling now cashes the slump.</a:t>
+            </a:r>
+          </a:p>
+        </p:txBody>
+      </p:sp>
+      <p:sp>
+        <p:nvSpPr>
+          <p:cNvPr id="8" name="Rounded Rectangle 7"/>
+          <p:cNvSpPr/>
+          <p:nvPr/>
+        </p:nvSpPr>
+        <p:spPr>
+          <a:xfrm>
+            <a:off x="640080" y="4142231"/>
+            <a:ext cx="457200" cy="457200"/>
+          </a:xfrm>
+          <a:prstGeom prst="roundRect">
+            <a:avLst>
+              <a:gd name="adj" fmla="val 18000"/>
+            </a:avLst>
+          </a:prstGeom>
+          <a:solidFill>
+            <a:srgbClr val="E8615A"/>
+          </a:solidFill>
+          <a:ln>
+            <a:noFill/>
+          </a:ln>
+          <a:effectLst/>
+        </p:spPr>
+        <p:style>
+          <a:lnRef idx="1">
+            <a:schemeClr val="accent1"/>
+          </a:lnRef>
+          <a:fillRef idx="3">
+            <a:schemeClr val="accent1"/>
+          </a:fillRef>
+          <a:effectRef idx="2">
+            <a:schemeClr val="accent1"/>
+          </a:effectRef>
+          <a:fontRef idx="minor">
+            <a:schemeClr val="lt1"/>
+          </a:fontRef>
+        </p:style>
+        <p:txBody>
+          <a:bodyPr rtlCol="0" anchor="ctr" wrap="none"/>
+          <a:lstStyle/>
+          <a:p>
+            <a:pPr algn="ctr"/>
+            <a:r>
+              <a:rPr sz="1800" b="1">
+                <a:solidFill>
+                  <a:srgbClr val="0B1220"/>
+                </a:solidFill>
+                <a:latin typeface="Courier New"/>
+              </a:rPr>
+              <a:t>3</a:t>
+            </a:r>
+          </a:p>
+        </p:txBody>
+      </p:sp>
+      <p:sp>
+        <p:nvSpPr>
+          <p:cNvPr id="9" name="TextBox 8"/>
+          <p:cNvSpPr txBox="1"/>
+          <p:nvPr/>
+        </p:nvSpPr>
+        <p:spPr>
+          <a:xfrm>
+            <a:off x="1280160" y="4123944"/>
+            <a:ext cx="6126480" cy="1005840"/>
+          </a:xfrm>
+          <a:prstGeom prst="rect">
+            <a:avLst/>
+          </a:prstGeom>
+          <a:noFill/>
+        </p:spPr>
+        <p:txBody>
+          <a:bodyPr wrap="square" anchor="t" lIns="0" rIns="0" tIns="0" bIns="0">
+            <a:spAutoFit/>
+          </a:bodyPr>
+          <a:lstStyle/>
+          <a:p>
+            <a:pPr algn="l">
+              <a:lnSpc>
+                <a:spcPct val="108000"/>
+              </a:lnSpc>
+              <a:spcAft>
+                <a:spcPts val="200"/>
+              </a:spcAft>
+            </a:pPr>
+            <a:r>
+              <a:rPr sz="1700" b="1" i="0">
+                <a:solidFill>
+                  <a:srgbClr val="EAF0F8"/>
+                </a:solidFill>
+                <a:latin typeface="Arial"/>
+              </a:rPr>
+              <a:t>Winter: re-price, then choose</a:t>
+            </a:r>
+          </a:p>
+          <a:p>
+            <a:pPr algn="l">
+              <a:lnSpc>
+                <a:spcPct val="108000"/>
+              </a:lnSpc>
+              <a:spcAft>
+                <a:spcPts val="200"/>
+              </a:spcAft>
+            </a:pPr>
+            <a:r>
+              <a:rPr sz="1350" b="0" i="0">
+                <a:solidFill>
+                  <a:srgbClr val="93A0B6"/>
+                </a:solidFill>
+                <a:latin typeface="Arial"/>
+              </a:rPr>
+              <a:t>Anthony healthy, jam returns. Rebound confirmed → extend or trade at full price. Erosion persists → sell at market. Either way, the 2027 OF is Anthony / Rafaela / Abreu.</a:t>
+            </a:r>
+          </a:p>
+        </p:txBody>
+      </p:sp>
+      <p:sp>
+        <p:nvSpPr>
+          <p:cNvPr id="10" name="Rounded Rectangle 9"/>
+          <p:cNvSpPr/>
+          <p:nvPr/>
+        </p:nvSpPr>
+        <p:spPr>
+          <a:xfrm>
+            <a:off x="7818120" y="1783080"/>
+            <a:ext cx="3794760" cy="3337560"/>
+          </a:xfrm>
+          <a:prstGeom prst="roundRect">
+            <a:avLst>
+              <a:gd name="adj" fmla="val 6000"/>
+            </a:avLst>
+          </a:prstGeom>
+          <a:solidFill>
+            <a:srgbClr val="1A2740"/>
+          </a:solidFill>
+          <a:ln>
+            <a:noFill/>
+          </a:ln>
+          <a:effectLst/>
+        </p:spPr>
+        <p:style>
+          <a:lnRef idx="1">
+            <a:schemeClr val="accent1"/>
+          </a:lnRef>
+          <a:fillRef idx="3">
+            <a:schemeClr val="accent1"/>
+          </a:fillRef>
+          <a:effectRef idx="2">
+            <a:schemeClr val="accent1"/>
+          </a:effectRef>
+          <a:fontRef idx="minor">
+            <a:schemeClr val="lt1"/>
+          </a:fontRef>
+        </p:style>
+        <p:txBody>
+          <a:bodyPr rtlCol="0" anchor="ctr"/>
+          <a:lstStyle/>
+          <a:p>
+            <a:pPr algn="ctr"/>
+          </a:p>
+        </p:txBody>
+      </p:sp>
+      <p:sp>
+        <p:nvSpPr>
+          <p:cNvPr id="11" name="TextBox 10"/>
+          <p:cNvSpPr txBox="1"/>
+          <p:nvPr/>
+        </p:nvSpPr>
+        <p:spPr>
+          <a:xfrm>
+            <a:off x="8092440" y="2011680"/>
+            <a:ext cx="3291840" cy="365760"/>
+          </a:xfrm>
+          <a:prstGeom prst="rect">
+            <a:avLst/>
+          </a:prstGeom>
+          <a:noFill/>
+        </p:spPr>
+        <p:txBody>
+          <a:bodyPr wrap="square" anchor="t" lIns="0" rIns="0" tIns="0" bIns="0">
+            <a:spAutoFit/>
+          </a:bodyPr>
+          <a:lstStyle/>
+          <a:p>
+            <a:pPr algn="l">
+              <a:lnSpc>
+                <a:spcPct val="100000"/>
+              </a:lnSpc>
+              <a:spcAft>
+                <a:spcPts val="0"/>
+              </a:spcAft>
+            </a:pPr>
+            <a:r>
+              <a:rPr sz="1250" b="1" i="0">
+                <a:solidFill>
+                  <a:srgbClr val="C9D2E3"/>
+                </a:solidFill>
+                <a:latin typeface="Arial"/>
+              </a:rPr>
+              <a:t>THE RETURN</a:t>
+            </a:r>
+          </a:p>
+        </p:txBody>
+      </p:sp>
+      <p:sp>
+        <p:nvSpPr>
+          <p:cNvPr id="12" name="TextBox 11"/>
+          <p:cNvSpPr txBox="1"/>
+          <p:nvPr/>
+        </p:nvSpPr>
+        <p:spPr>
+          <a:xfrm>
+            <a:off x="8092440" y="2487168"/>
+            <a:ext cx="3291840" cy="914400"/>
+          </a:xfrm>
+          <a:prstGeom prst="rect">
+            <a:avLst/>
+          </a:prstGeom>
+          <a:noFill/>
+        </p:spPr>
+        <p:txBody>
+          <a:bodyPr wrap="square" anchor="t" lIns="0" rIns="0" tIns="0" bIns="0">
+            <a:spAutoFit/>
+          </a:bodyPr>
+          <a:lstStyle/>
+          <a:p>
+            <a:pPr algn="l">
+              <a:lnSpc>
+                <a:spcPct val="105000"/>
+              </a:lnSpc>
+              <a:spcAft>
+                <a:spcPts val="200"/>
+              </a:spcAft>
+            </a:pPr>
+            <a:r>
+              <a:rPr sz="1300" b="1" i="0">
+                <a:solidFill>
+                  <a:srgbClr val="F0B8BC"/>
+                </a:solidFill>
+                <a:latin typeface="Arial"/>
+              </a:rPr>
+              <a:t>Sell now (nadir)</a:t>
+            </a:r>
+          </a:p>
+          <a:p>
+            <a:pPr algn="l">
+              <a:lnSpc>
+                <a:spcPct val="105000"/>
+              </a:lnSpc>
+              <a:spcAft>
+                <a:spcPts val="200"/>
+              </a:spcAft>
+            </a:pPr>
+            <a:r>
+              <a:rPr sz="1400" b="0" i="0">
+                <a:solidFill>
+                  <a:srgbClr val="F4F7FC"/>
+                </a:solidFill>
+                <a:latin typeface="Arial"/>
+              </a:rPr>
+              <a:t>~$10–15M · a 45-FV bat</a:t>
+            </a:r>
+          </a:p>
+        </p:txBody>
+      </p:sp>
+      <p:sp>
+        <p:nvSpPr>
+          <p:cNvPr id="13" name="TextBox 12"/>
+          <p:cNvSpPr txBox="1"/>
+          <p:nvPr/>
+        </p:nvSpPr>
+        <p:spPr>
+          <a:xfrm>
+            <a:off x="8092440" y="3520440"/>
+            <a:ext cx="3291840" cy="1005840"/>
+          </a:xfrm>
+          <a:prstGeom prst="rect">
+            <a:avLst/>
+          </a:prstGeom>
+          <a:noFill/>
+        </p:spPr>
+        <p:txBody>
+          <a:bodyPr wrap="square" anchor="t" lIns="0" rIns="0" tIns="0" bIns="0">
+            <a:spAutoFit/>
+          </a:bodyPr>
+          <a:lstStyle/>
+          <a:p>
+            <a:pPr algn="l">
+              <a:lnSpc>
+                <a:spcPct val="105000"/>
+              </a:lnSpc>
+              <a:spcAft>
+                <a:spcPts val="200"/>
+              </a:spcAft>
+            </a:pPr>
+            <a:r>
+              <a:rPr sz="1300" b="1" i="0">
+                <a:solidFill>
+                  <a:srgbClr val="A9E5B5"/>
+                </a:solidFill>
+                <a:latin typeface="Arial"/>
+              </a:rPr>
+              <a:t>Sell after rebound</a:t>
+            </a:r>
+          </a:p>
+          <a:p>
+            <a:pPr algn="l">
+              <a:lnSpc>
+                <a:spcPct val="105000"/>
+              </a:lnSpc>
+              <a:spcAft>
+                <a:spcPts val="200"/>
+              </a:spcAft>
+            </a:pPr>
+            <a:r>
+              <a:rPr sz="1400" b="0" i="0">
+                <a:solidFill>
+                  <a:srgbClr val="F4F7FC"/>
+                </a:solidFill>
+                <a:latin typeface="Arial"/>
+              </a:rPr>
+              <a:t>~$28M · a 50-FV, top-100</a:t>
+            </a:r>
+          </a:p>
+          <a:p>
+            <a:pPr algn="l">
+              <a:lnSpc>
+                <a:spcPct val="105000"/>
+              </a:lnSpc>
+              <a:spcAft>
+                <a:spcPts val="200"/>
+              </a:spcAft>
+            </a:pPr>
+            <a:r>
+              <a:rPr sz="1400" b="0" i="0">
+                <a:solidFill>
+                  <a:srgbClr val="F4F7FC"/>
+                </a:solidFill>
+                <a:latin typeface="Arial"/>
+              </a:rPr>
+              <a:t>controllable talent</a:t>
+            </a:r>
+          </a:p>
+        </p:txBody>
+      </p:sp>
+      <p:sp>
+        <p:nvSpPr>
+          <p:cNvPr id="14" name="TextBox 13"/>
+          <p:cNvSpPr txBox="1"/>
+          <p:nvPr/>
+        </p:nvSpPr>
+        <p:spPr>
+          <a:xfrm>
+            <a:off x="8092440" y="4617720"/>
+            <a:ext cx="3291840" cy="457200"/>
+          </a:xfrm>
+          <a:prstGeom prst="rect">
+            <a:avLst/>
+          </a:prstGeom>
+          <a:noFill/>
+        </p:spPr>
+        <p:txBody>
+          <a:bodyPr wrap="square" anchor="t" lIns="0" rIns="0" tIns="0" bIns="0">
+            <a:spAutoFit/>
+          </a:bodyPr>
+          <a:lstStyle/>
+          <a:p>
+            <a:pPr algn="l">
+              <a:lnSpc>
+                <a:spcPct val="105000"/>
+              </a:lnSpc>
+              <a:spcAft>
+                <a:spcPts val="400"/>
+              </a:spcAft>
+            </a:pPr>
+            <a:r>
+              <a:rPr sz="1150" b="0" i="1">
+                <a:solidFill>
+                  <a:srgbClr val="C9D2E3"/>
+                </a:solidFill>
+                <a:latin typeface="Arial"/>
+              </a:rPr>
+              <a:t>One grade of return = the reason to wait.</a:t>
+            </a:r>
+          </a:p>
+        </p:txBody>
+      </p:sp>
+      <p:sp>
+        <p:nvSpPr>
+          <p:cNvPr id="15" name="TextBox 14"/>
+          <p:cNvSpPr txBox="1"/>
+          <p:nvPr/>
+        </p:nvSpPr>
+        <p:spPr>
+          <a:xfrm>
+            <a:off x="566928" y="6510528"/>
+            <a:ext cx="11064240" cy="274320"/>
+          </a:xfrm>
+          <a:prstGeom prst="rect">
+            <a:avLst/>
+          </a:prstGeom>
+          <a:noFill/>
+        </p:spPr>
+        <p:txBody>
+          <a:bodyPr wrap="square" anchor="t" lIns="0" rIns="0" tIns="0" bIns="0">
+            <a:spAutoFit/>
+          </a:bodyPr>
+          <a:lstStyle/>
+          <a:p>
+            <a:pPr algn="l">
+              <a:lnSpc>
+                <a:spcPct val="100000"/>
+              </a:lnSpc>
+              <a:spcAft>
+                <a:spcPts val="0"/>
+              </a:spcAft>
+            </a:pPr>
+            <a:r>
+              <a:rPr sz="800" b="1" i="0">
+                <a:solidFill>
+                  <a:srgbClr val="E8615A"/>
+                </a:solidFill>
+                <a:latin typeface="Courier New"/>
+              </a:rPr>
+              <a:t>BOS // OUTFIELD STRATEGY</a:t>
+            </a:r>
+            <a:r>
+              <a:rPr sz="800" b="0" i="0">
+                <a:solidFill>
+                  <a:srgbClr val="5E6B84"/>
+                </a:solidFill>
+                <a:latin typeface="Courier New"/>
+              </a:rPr>
+              <a:t>   STATCAST / FANGRAPHS / MLB STATS API / SPOTRAC · JULY 2026</a:t>
+            </a:r>
+          </a:p>
+        </p:txBody>
+      </p:sp>
+    </p:spTree>
+  </p:cSld>
+  <p:clrMapOvr>
+    <a:masterClrMapping/>
+  </p:clrMapOvr>
+</p:sld>
+</file>
+
+<file path=ppt/slides/slide19.xml><?xml version="1.0" encoding="utf-8"?>
 <p:sld xmlns:a="http://schemas.openxmlformats.org/drawingml/2006/main" xmlns:p="http://schemas.openxmlformats.org/presentationml/2006/main" xmlns:r="http://schemas.openxmlformats.org/officeDocument/2006/relationships">
   <p:cSld>
     <p:bg>
@@ -9182,7 +9796,7 @@
                 </a:solidFill>
                 <a:latin typeface="Arial"/>
               </a:rPr>
-              <a:t>77% playoff odds, +45 run differential, a wild card in hand, buy small (a reliever first), keep the vets, and let the record keep catching up to the process.</a:t>
+              <a:t>77% playoff odds, +41 run differential, a wild card in hand, buy small (a reliever first), keep the vets, and let the record keep catching up to the process.</a:t>
             </a:r>
           </a:p>
         </p:txBody>
@@ -9801,7 +10415,7 @@
                 </a:solidFill>
                 <a:latin typeface="Arial"/>
               </a:rPr>
-              <a:t>+45</a:t>
+              <a:t>+41</a:t>
             </a:r>
           </a:p>
         </p:txBody>
